--- a/operation_uptime/Operation_Uptime_Deck.pptx
+++ b/operation_uptime/Operation_Uptime_Deck.pptx
@@ -114,30 +114,30 @@
   <p:extLst>
     <p:ext uri="{521415D9-36F7-43E2-AB2F-B90AF26B5E84}">
       <p14:sectionLst xmlns:p14="http://schemas.microsoft.com/office/powerpoint/2010/main">
-        <p14:section name="Summary" id="{721e932a-412a-64ed-e806-259a84ca346e}">
+        <p14:section name="Summary" id="{c1fe148d-18b6-2f7d-bae4-0dce805ea791}">
           <p14:sldIdLst>
             <p14:sldId id="256"/>
           </p14:sldIdLst>
         </p14:section>
-        <p14:section name="Part 1 Funnel" id="{16fd1b44-ffb8-f6b3-3c98-7ffe0ecf6f9a}">
+        <p14:section name="Part 1 Funnel" id="{e92b1702-e93c-7d9f-8821-f7f96dca919c}">
           <p14:sldIdLst>
             <p14:sldId id="257"/>
             <p14:sldId id="258"/>
           </p14:sldIdLst>
         </p14:section>
-        <p14:section name="Part 2 Channels &amp; budget" id="{140cfb64-67fc-6076-8995-23a21a488071}">
+        <p14:section name="Part 2 Channels &amp; budget" id="{08e4786c-2b45-e9e1-850e-6d53c82bd042}">
           <p14:sldIdLst>
             <p14:sldId id="259"/>
             <p14:sldId id="260"/>
             <p14:sldId id="261"/>
           </p14:sldIdLst>
         </p14:section>
-        <p14:section name="Part 3 New sources" id="{0c29ad4d-a1b7-52ca-a0d6-08cfc4ba8f23}">
+        <p14:section name="Part 3 New sources" id="{fcd9d371-a1f4-59f0-3eef-8b662a338126}">
           <p14:sldIdLst>
             <p14:sldId id="262"/>
           </p14:sldIdLst>
         </p14:section>
-        <p14:section name="Part 4 Run it" id="{c0fb1c71-4454-d0e3-25b0-a9c616b3304f}">
+        <p14:section name="Part 4 Run it" id="{57ad5b5d-7d1c-a627-3a96-75002f169876}">
           <p14:sldIdLst>
             <p14:sldId id="263"/>
           </p14:sldIdLst>
@@ -2485,7 +2485,7 @@
           <a:p>
             <a:r>
               <a:rPr lang="en-US" dirty="0"/>
-              <a:t>Part 5 one-page summary. All figures are live from the model's Summary/Budget/Funnel tabs.</a:t>
+              <a:t>Part 5 one-page summary. All figures were generated from the model's Summary, Budget and Funnel tabs; re-run the deck build after changing the model.</a:t>
             </a:r>
             <a:endParaRPr lang="en-US" dirty="0"/>
           </a:p>
@@ -6282,7 +6282,7 @@
                   <a:schemeClr val="tx1"/>
                 </a:solidFill>
               </a:rPr>
-              <a:t>€750 test in every paid channel in weeks 1–2, then buy hires cheapest-first: free channels → ATS rediscovery (~€20/hire) → Polish corridor (≤40% of mechatronics) → construction-electrician campaign → LinkedIn, Search, referrals, 1 StepStone ad. Pace ≤55 qualified a week; paid spend stops 27 Nov.</a:t>
+              <a:t>€750 test in every paid CPC/CPA cell in weeks 1–2, then buy hires cheapest-first: free channels → ATS rediscovery (~€20/hire) → Polish corridor (≤40% of mechatronics) → construction-electrician campaign → LinkedIn, Search, referrals, 1 StepStone ad. Pace ≤55 qualified a week; paid spend stops 27 Nov.</a:t>
             </a:r>
             <a:endParaRPr lang="en-US" sz="1100" dirty="0"/>
           </a:p>
@@ -10125,7 +10125,7 @@
                   <a:schemeClr val="tx1"/>
                 </a:solidFill>
               </a:rPr>
-              <a:t>Assessment → interview 7 days, → offer 3, → signature 7; supervisors +7. Last realistic signature Fri 18 Dec, so applications must arrive by Fri 27 Nov (E/M/A) and Fri 20 Nov (supervisors). Slots = 55 × 41 days ÷ 7 = 322.</a:t>
+              <a:t>Application → assessment 4 days, → interview 7, → offer 3, → signature 7; supervisors +7. Last realistic signature Fri 18 Dec, so applications must arrive by Fri 27 Nov (E/M/A) and Fri 20 Nov (supervisors). Slots = 55 × 41 days ÷ 7 = 322.</a:t>
             </a:r>
             <a:endParaRPr lang="en-US" sz="1200" dirty="0"/>
           </a:p>
@@ -12223,7 +12223,7 @@
                   <a:schemeClr val="tx1"/>
                 </a:solidFill>
               </a:rPr>
-              <a:t>30% worse pass or acceptance rates need 415 qualified for 322 slots (129%), capping hires at ~78 and lifting media 43%. Upstream misses (share qualified, cost per application) only cost money.</a:t>
+              <a:t>30% worse pass or acceptance rates need 415 qualified for 322 slots (129%). The 43% more media that would need can't help: slots cap hires at ~78. Upstream misses (share qualified, cost per application) only cost money.</a:t>
             </a:r>
             <a:endParaRPr lang="en-US" sz="1200" dirty="0"/>
           </a:p>
@@ -17090,7 +17090,7 @@
                   <a:schemeClr val="accent4"/>
                 </a:solidFill>
               </a:rPr>
-              <a:t>Researched: StepStone €1,449/30-day ad (instaffo.com) · Pracuj.pl ~1,499 PLN/ad, indicative (dlafirm.pracuj.pl) · Indeed CPC $0.10–5+ (pin.com) · LinkedIn CPC $4–8 (peoplebox.ai) · Appcast apply rate 6.1% (2025 benchmark). Everything else: own estimates, labelled on the Assumptions tab.</a:t>
+              <a:t>Researched: StepStone €1,449/30-day ad (instaffo.com) · Pracuj.pl ~1,499 PLN/ad, indicative (dlafirm.pracuj.pl) · Indeed CPC $0.10–5+ (pin.com) · LinkedIn CPC $4–8 (peoplebox.ai) · Appcast apply rate 6.1% (2025 benchmark). Other sources (§6 BQFG, BA Engpassanalyse, WSI, plant headcount) and every own estimate are labelled on the Assumptions tab.</a:t>
             </a:r>
             <a:endParaRPr lang="en-US" sz="1000" dirty="0"/>
           </a:p>
@@ -22952,7 +22952,7 @@
                   <a:schemeClr val="tx1"/>
                 </a:solidFill>
               </a:rPr>
-              <a:t>electricians (23 of 30 at −30%), then supervisors (8 of 10). Mechatronics never falls short.</a:t>
+              <a:t>electricians (23 of 30 at −30%), then supervisors (8 of 10); automation slips to 14 of 15. Mechatronics never falls short.</a:t>
             </a:r>
             <a:endParaRPr lang="en-US" sz="1200" dirty="0"/>
           </a:p>
@@ -22983,7 +22983,7 @@
                   <a:schemeClr val="tx1"/>
                 </a:solidFill>
               </a:rPr>
-              <a:t>the last €14.25k buys ~9 hires at ~€1,550 each, mostly electricians, the role that keeps lines running. Keep it. If you must cut, cover supervisors through internal promotion and protect electricians. Above €47.5k, money buys almost nothing before 31 Dec: the 55/week limit binds.</a:t>
+              <a:t>the last €14.25k buys ~9 hires at ~€1,530 each, mostly electricians, the role that keeps lines running. Keep it. If you must cut, cover supervisors through internal promotion and protect electricians. Above €47.5k, extra money buys at most ~11 more hires (the 31 spare slots); then the 55/week limit binds.</a:t>
             </a:r>
             <a:endParaRPr lang="en-US" sz="1200" dirty="0"/>
           </a:p>
@@ -23397,7 +23397,7 @@
                   <a:schemeClr val="tx1"/>
                 </a:solidFill>
               </a:rPr>
-              <a:t>Wed 21 Oct – Tue 3 Nov (waves 1–2): €350. Pass: ≥19 qualified (≥⅓ electricians). Kill: &lt;10 → stop the waves</a:t>
+              <a:t>Wed 21 Oct – Tue 3 Nov (waves 1–3): €350. Pass: ≥19 qualified (≥⅓ electricians). Kill: &lt;10 → no further re-contacts; bonus stays live</a:t>
             </a:r>
             <a:endParaRPr lang="en-US" sz="1200" dirty="0"/>
           </a:p>
@@ -23428,7 +23428,7 @@
                   <a:schemeClr val="tx1"/>
                 </a:solidFill>
               </a:rPr>
-              <a:t>Me: wave 1 on day 2, set-up in 3 days. Client: ATS export + consent check, bonus approval, one staff message</a:t>
+              <a:t>Me: copy, segments and tracked links ready before 20 Oct; wave 1 on day 2 once the GDPR-checked export arrives. Client: ATS export + consent check, bonus approval, one staff message</a:t>
             </a:r>
             <a:endParaRPr lang="en-US" sz="1200" dirty="0"/>
           </a:p>
@@ -23692,7 +23692,7 @@
                   <a:schemeClr val="tx1"/>
                 </a:solidFill>
               </a:rPr>
-              <a:t>Fri 23 Oct – Fri 6 Nov (read Mon 9 Nov): €3.7k. Pass: ≥7 qualified at ≤€250. Kill: &lt;4, &gt;€300 per qualified, or profile rejected; week 4: &lt;40% interview pass</a:t>
+              <a:t>Fri 23 Oct – Fri 6 Nov (read Mon 9 Nov): €2.8k. Pass: ≥4 qualified at ≤€250. Kill: &lt;3, &gt;€300 per qualified, or profile rejected; week 4: &lt;40% interview pass</a:t>
             </a:r>
             <a:endParaRPr lang="en-US" sz="1200" dirty="0"/>
           </a:p>
@@ -23987,7 +23987,7 @@
                   <a:schemeClr val="tx1"/>
                 </a:solidFill>
               </a:rPr>
-              <a:t>Tue 27 Oct – Mon 9 Nov (freelancer starts 27 Oct): €1.2k. Pass: ≥5 qualified at ≤€110. Kill: &lt;3, &gt;€130 per qualified, or &lt;30% pass the language check</a:t>
+              <a:t>Tue 27 Oct – Mon 9 Nov (freelancer starts 27 Oct): €1.1k. Pass: ≥4 qualified at ≤€110. Kill: &lt;3, &gt;€130 per qualified, or &lt;30% pass the language check</a:t>
             </a:r>
             <a:endParaRPr lang="en-US" sz="1200" dirty="0"/>
           </a:p>

--- a/operation_uptime/Operation_Uptime_Deck.pptx
+++ b/operation_uptime/Operation_Uptime_Deck.pptx
@@ -114,30 +114,30 @@
   <p:extLst>
     <p:ext uri="{521415D9-36F7-43E2-AB2F-B90AF26B5E84}">
       <p14:sectionLst xmlns:p14="http://schemas.microsoft.com/office/powerpoint/2010/main">
-        <p14:section name="Summary" id="{c1fe148d-18b6-2f7d-bae4-0dce805ea791}">
+        <p14:section name="Summary" id="{bd00b158-f32d-5cff-3c29-40a10ed8ded9}">
           <p14:sldIdLst>
             <p14:sldId id="256"/>
           </p14:sldIdLst>
         </p14:section>
-        <p14:section name="Part 1 Funnel" id="{e92b1702-e93c-7d9f-8821-f7f96dca919c}">
+        <p14:section name="Part 1 Funnel" id="{2bab0a75-f0a9-6472-174e-2854a9482c97}">
           <p14:sldIdLst>
             <p14:sldId id="257"/>
             <p14:sldId id="258"/>
           </p14:sldIdLst>
         </p14:section>
-        <p14:section name="Part 2 Channels &amp; budget" id="{08e4786c-2b45-e9e1-850e-6d53c82bd042}">
+        <p14:section name="Part 2 Channels &amp; budget" id="{cfd8344b-ca2b-91c6-2b42-5eb2f5e79824}">
           <p14:sldIdLst>
             <p14:sldId id="259"/>
             <p14:sldId id="260"/>
             <p14:sldId id="261"/>
           </p14:sldIdLst>
         </p14:section>
-        <p14:section name="Part 3 New sources" id="{fcd9d371-a1f4-59f0-3eef-8b662a338126}">
+        <p14:section name="Part 3 New sources" id="{b2c6ce35-cab7-003a-3190-a85bb7911ea0}">
           <p14:sldIdLst>
             <p14:sldId id="262"/>
           </p14:sldIdLst>
         </p14:section>
-        <p14:section name="Part 4 Run it" id="{57ad5b5d-7d1c-a627-3a96-75002f169876}">
+        <p14:section name="Part 4 Run it" id="{92515731-63e2-e902-5cd0-1b77c60b9b14}">
           <p14:sldIdLst>
             <p14:sldId id="263"/>
           </p14:sldIdLst>
@@ -20897,7 +20897,7 @@
                             <a:schemeClr val="tx1"/>
                           </a:solidFill>
                         </a:rPr>
-                        <a:t>€0.3k</a:t>
+                        <a:t>€350</a:t>
                       </a:r>
                       <a:endParaRPr lang="en-US" sz="1000" dirty="0"/>
                     </a:p>
@@ -23692,7 +23692,7 @@
                   <a:schemeClr val="tx1"/>
                 </a:solidFill>
               </a:rPr>
-              <a:t>Fri 23 Oct – Fri 6 Nov (read Mon 9 Nov): €2.8k. Pass: ≥4 qualified at ≤€250. Kill: &lt;3, &gt;€300 per qualified, or profile rejected; week 4: &lt;40% interview pass</a:t>
+              <a:t>Fri 23 Oct – Thu 5 Nov (read Mon 9 Nov): €2.6k. Pass: ≥4 qualified at ≤€250. Kill: &lt;3, &gt;€300 per qualified, or profile rejected; week 4: &lt;40% interview pass</a:t>
             </a:r>
             <a:endParaRPr lang="en-US" sz="1200" dirty="0"/>
           </a:p>

--- a/operation_uptime/Operation_Uptime_Deck.pptx
+++ b/operation_uptime/Operation_Uptime_Deck.pptx
@@ -114,30 +114,30 @@
   <p:extLst>
     <p:ext uri="{521415D9-36F7-43E2-AB2F-B90AF26B5E84}">
       <p14:sectionLst xmlns:p14="http://schemas.microsoft.com/office/powerpoint/2010/main">
-        <p14:section name="Summary" id="{bd00b158-f32d-5cff-3c29-40a10ed8ded9}">
+        <p14:section name="Summary" id="{8d100aba-e385-f549-818e-6e2d0299c9af}">
           <p14:sldIdLst>
             <p14:sldId id="256"/>
           </p14:sldIdLst>
         </p14:section>
-        <p14:section name="Part 1 Funnel" id="{2bab0a75-f0a9-6472-174e-2854a9482c97}">
+        <p14:section name="Part 1 Funnel" id="{87c93c7d-7386-c193-7162-9c14a107c7ab}">
           <p14:sldIdLst>
             <p14:sldId id="257"/>
             <p14:sldId id="258"/>
           </p14:sldIdLst>
         </p14:section>
-        <p14:section name="Part 2 Channels &amp; budget" id="{cfd8344b-ca2b-91c6-2b42-5eb2f5e79824}">
+        <p14:section name="Part 2 Channels &amp; budget" id="{44577dcc-176e-a789-dcd5-569f81d93bdd}">
           <p14:sldIdLst>
             <p14:sldId id="259"/>
             <p14:sldId id="260"/>
             <p14:sldId id="261"/>
           </p14:sldIdLst>
         </p14:section>
-        <p14:section name="Part 3 New sources" id="{b2c6ce35-cab7-003a-3190-a85bb7911ea0}">
+        <p14:section name="Part 3 New sources" id="{0c52266a-6c87-43fb-af32-2559c2b90b6e}">
           <p14:sldIdLst>
             <p14:sldId id="262"/>
           </p14:sldIdLst>
         </p14:section>
-        <p14:section name="Part 4 Run it" id="{92515731-63e2-e902-5cd0-1b77c60b9b14}">
+        <p14:section name="Part 4 Run it" id="{a4ee0300-3ae6-7b6d-70dc-10f406e70e63}">
           <p14:sldIdLst>
             <p14:sldId id="263"/>
           </p14:sldIdLst>
@@ -239,9 +239,9 @@
           </c:dLbls>
           <c:cat>
             <c:multiLvlStrRef>
-              <c:f>Sheet1!$A$2:$A$7</c:f>
+              <c:f>Sheet1!$A$2:$A$8</c:f>
               <c:multiLvlStrCache>
-                <c:ptCount val="6"/>
+                <c:ptCount val="7"/>
                 <c:lvl>
                   <c:pt idx="0">
                     <c:v>Wk 1</c:v>
@@ -261,16 +261,19 @@
                   <c:pt idx="5">
                     <c:v>Wk 6</c:v>
                   </c:pt>
+                  <c:pt idx="6">
+                    <c:v>Wk 7</c:v>
+                  </c:pt>
                 </c:lvl>
               </c:multiLvlStrCache>
             </c:multiLvlStrRef>
           </c:cat>
           <c:val>
             <c:numRef>
-              <c:f>Sheet1!$B$2:$B$7</c:f>
+              <c:f>Sheet1!$B$2:$B$8</c:f>
               <c:numCache>
                 <c:formatCode>General</c:formatCode>
-                <c:ptCount val="6"/>
+                <c:ptCount val="7"/>
                 <c:pt idx="0">
                   <c:v>39</c:v>
                 </c:pt>
@@ -288,6 +291,9 @@
                 </c:pt>
                 <c:pt idx="5">
                   <c:v>43</c:v>
+                </c:pt>
+                <c:pt idx="6">
+                  <c:v>0</c:v>
                 </c:pt>
               </c:numCache>
             </c:numRef>
@@ -340,9 +346,9 @@
           </c:dLbls>
           <c:cat>
             <c:multiLvlStrRef>
-              <c:f>Sheet1!$A$2:$A$7</c:f>
+              <c:f>Sheet1!$A$2:$A$8</c:f>
               <c:multiLvlStrCache>
-                <c:ptCount val="6"/>
+                <c:ptCount val="7"/>
                 <c:lvl>
                   <c:pt idx="0">
                     <c:v>Wk 1</c:v>
@@ -362,16 +368,19 @@
                   <c:pt idx="5">
                     <c:v>Wk 6</c:v>
                   </c:pt>
+                  <c:pt idx="6">
+                    <c:v>Wk 7</c:v>
+                  </c:pt>
                 </c:lvl>
               </c:multiLvlStrCache>
             </c:multiLvlStrRef>
           </c:cat>
           <c:val>
             <c:numRef>
-              <c:f>Sheet1!$C$2:$C$7</c:f>
+              <c:f>Sheet1!$C$2:$C$8</c:f>
               <c:numCache>
                 <c:formatCode>General</c:formatCode>
-                <c:ptCount val="6"/>
+                <c:ptCount val="7"/>
                 <c:pt idx="0">
                   <c:v>39</c:v>
                 </c:pt>
@@ -389,6 +398,9 @@
                 </c:pt>
                 <c:pt idx="5">
                   <c:v>55</c:v>
+                </c:pt>
+                <c:pt idx="6">
+                  <c:v>8</c:v>
                 </c:pt>
               </c:numCache>
             </c:numRef>
@@ -10177,7 +10189,7 @@
                   <a:schemeClr val="tx2"/>
                 </a:solidFill>
               </a:rPr>
-              <a:t>Week 1: 39 of 39 slots; weeks 2–5: 51–55 of 55; week 6: 43. Rediscovery re-applicants (waves 21 and 26 Oct) and the €750 tests fill weeks 1–2, so regular spend starts at 3% and 5%, then 20–24% a week.</a:t>
+              <a:t>Week 1: 39 of 39 slots; weeks 2–5: 51–55 of 55; week 6: 43; week 7 is Tue 1 Dec only (last assessment day, 8 slots). Rediscovery re-applicants (waves 21 Oct, 26 Oct and 2 Nov) and the €750 tests fill weeks 1–2, so regular spend starts at 3% and 5%, then 20–24% a week.</a:t>
             </a:r>
             <a:endParaRPr lang="en-US" sz="1100" dirty="0"/>
           </a:p>
@@ -24584,7 +24596,7 @@
                   <a:schemeClr val="tx1"/>
                 </a:solidFill>
               </a:rPr>
-              <a:t>1) Pass rate on the week-1 cohort (interviews 29 Oct–2 Nov), the most sensitive input: if &lt;45% → tighter knock-outs, pre-screen calls, ask +10 slots, re-run the model. 2) Electrician supply: profile decision + I2's two-week read on 9 Nov; if killed → Meta, StepStone (up to 2 more ads), programmatic; expect ~25–27 electricians. 3) The 12 tests' cost per application and share qualified → re-rank on Assumptions §7. Week 4 (16 Nov): acceptance &lt;55% → earlier cut-off + signing bonus.</a:t>
+              <a:t>1) Pass rate on the week-1 cohort (interviews 29 Oct–2 Nov), the most sensitive input: if &lt;45% → tighter knock-outs, pre-screen calls, ask +10 slots, re-run the model. 2) Electrician supply: profile decision + I2's two-week read on 9 Nov; if killed → Meta, StepStone (up to 2 more ads), programmatic; expect ~25–27 electricians (my judgement: capacity allows 30, but slower and at €1,000–1,500 per hire). 3) The 12 tests' cost per application and share qualified → re-rank on Assumptions §7. Week 4 (16 Nov): acceptance &lt;55% → earlier cut-off + signing bonus.</a:t>
             </a:r>
             <a:endParaRPr lang="en-US" sz="1250" dirty="0"/>
           </a:p>

--- a/operation_uptime/Operation_Uptime_Deck.pptx
+++ b/operation_uptime/Operation_Uptime_Deck.pptx
@@ -114,30 +114,30 @@
   <p:extLst>
     <p:ext uri="{521415D9-36F7-43E2-AB2F-B90AF26B5E84}">
       <p14:sectionLst xmlns:p14="http://schemas.microsoft.com/office/powerpoint/2010/main">
-        <p14:section name="Summary" id="{8d100aba-e385-f549-818e-6e2d0299c9af}">
+        <p14:section name="Summary" id="{7945eef3-b949-c68e-8198-e1b04d6400ae}">
           <p14:sldIdLst>
             <p14:sldId id="256"/>
           </p14:sldIdLst>
         </p14:section>
-        <p14:section name="Part 1 Funnel" id="{87c93c7d-7386-c193-7162-9c14a107c7ab}">
+        <p14:section name="Part 1 Funnel" id="{f4f7ecf5-d61e-ef9f-6fda-904ed589cde3}">
           <p14:sldIdLst>
             <p14:sldId id="257"/>
             <p14:sldId id="258"/>
           </p14:sldIdLst>
         </p14:section>
-        <p14:section name="Part 2 Channels &amp; budget" id="{44577dcc-176e-a789-dcd5-569f81d93bdd}">
+        <p14:section name="Part 2 Channels &amp; budget" id="{7743f578-a711-e64b-0a97-5fbace36e591}">
           <p14:sldIdLst>
             <p14:sldId id="259"/>
             <p14:sldId id="260"/>
             <p14:sldId id="261"/>
           </p14:sldIdLst>
         </p14:section>
-        <p14:section name="Part 3 New sources" id="{0c52266a-6c87-43fb-af32-2559c2b90b6e}">
+        <p14:section name="Part 3 New sources" id="{a314cee0-95e9-8b70-892f-6bfc26610c85}">
           <p14:sldIdLst>
             <p14:sldId id="262"/>
           </p14:sldIdLst>
         </p14:section>
-        <p14:section name="Part 4 Run it" id="{a4ee0300-3ae6-7b6d-70dc-10f406e70e63}">
+        <p14:section name="Part 4 Run it" id="{1bf77cf0-48c7-6e52-58eb-b2c669fd35b4}">
           <p14:sldIdLst>
             <p14:sldId id="263"/>
           </p14:sldIdLst>

--- a/operation_uptime/Operation_Uptime_Deck.pptx
+++ b/operation_uptime/Operation_Uptime_Deck.pptx
@@ -114,30 +114,30 @@
   <p:extLst>
     <p:ext uri="{521415D9-36F7-43E2-AB2F-B90AF26B5E84}">
       <p14:sectionLst xmlns:p14="http://schemas.microsoft.com/office/powerpoint/2010/main">
-        <p14:section name="Summary" id="{7945eef3-b949-c68e-8198-e1b04d6400ae}">
+        <p14:section name="Summary" id="{edff4e24-d042-2c14-e6ed-45bf5de85241}">
           <p14:sldIdLst>
             <p14:sldId id="256"/>
           </p14:sldIdLst>
         </p14:section>
-        <p14:section name="Part 1 Funnel" id="{f4f7ecf5-d61e-ef9f-6fda-904ed589cde3}">
+        <p14:section name="Part 1 Funnel" id="{6e51d43d-a8d6-b352-6a08-0526c4eba922}">
           <p14:sldIdLst>
             <p14:sldId id="257"/>
             <p14:sldId id="258"/>
           </p14:sldIdLst>
         </p14:section>
-        <p14:section name="Part 2 Channels &amp; budget" id="{7743f578-a711-e64b-0a97-5fbace36e591}">
+        <p14:section name="Part 2 Channels &amp; budget" id="{3326d6cd-e9a4-d31b-23f2-96794002a429}">
           <p14:sldIdLst>
             <p14:sldId id="259"/>
             <p14:sldId id="260"/>
             <p14:sldId id="261"/>
           </p14:sldIdLst>
         </p14:section>
-        <p14:section name="Part 3 New sources" id="{a314cee0-95e9-8b70-892f-6bfc26610c85}">
+        <p14:section name="Part 3 New sources" id="{094779ac-35d8-8611-4551-8ebd1544b707}">
           <p14:sldIdLst>
             <p14:sldId id="262"/>
           </p14:sldIdLst>
         </p14:section>
-        <p14:section name="Part 4 Run it" id="{1bf77cf0-48c7-6e52-58eb-b2c669fd35b4}">
+        <p14:section name="Part 4 Run it" id="{8b66d83d-d770-5d8f-d15e-02ff52301a85}">
           <p14:sldIdLst>
             <p14:sldId id="263"/>
           </p14:sldIdLst>

--- a/operation_uptime/Operation_Uptime_Deck.pptx
+++ b/operation_uptime/Operation_Uptime_Deck.pptx
@@ -114,30 +114,30 @@
   <p:extLst>
     <p:ext uri="{521415D9-36F7-43E2-AB2F-B90AF26B5E84}">
       <p14:sectionLst xmlns:p14="http://schemas.microsoft.com/office/powerpoint/2010/main">
-        <p14:section name="Summary" id="{edff4e24-d042-2c14-e6ed-45bf5de85241}">
+        <p14:section name="Summary" id="{4d4e0ca9-6e03-eb3a-09fb-397efe5e6133}">
           <p14:sldIdLst>
             <p14:sldId id="256"/>
           </p14:sldIdLst>
         </p14:section>
-        <p14:section name="Part 1 Funnel" id="{6e51d43d-a8d6-b352-6a08-0526c4eba922}">
+        <p14:section name="Part 1 Funnel" id="{118194ef-3e25-4e11-3b4c-348f5948c35c}">
           <p14:sldIdLst>
             <p14:sldId id="257"/>
             <p14:sldId id="258"/>
           </p14:sldIdLst>
         </p14:section>
-        <p14:section name="Part 2 Channels &amp; budget" id="{3326d6cd-e9a4-d31b-23f2-96794002a429}">
+        <p14:section name="Part 2 Channels &amp; budget" id="{80225c14-75c9-c49d-65c8-cd9081514d2d}">
           <p14:sldIdLst>
             <p14:sldId id="259"/>
             <p14:sldId id="260"/>
             <p14:sldId id="261"/>
           </p14:sldIdLst>
         </p14:section>
-        <p14:section name="Part 3 New sources" id="{094779ac-35d8-8611-4551-8ebd1544b707}">
+        <p14:section name="Part 3 New sources" id="{a64351ae-a56a-d12b-8f43-29c15d5bf572}">
           <p14:sldIdLst>
             <p14:sldId id="262"/>
           </p14:sldIdLst>
         </p14:section>
-        <p14:section name="Part 4 Run it" id="{8b66d83d-d770-5d8f-d15e-02ff52301a85}">
+        <p14:section name="Part 4 Run it" id="{62f40b79-b081-756b-6155-396156db0b36}">
           <p14:sldIdLst>
             <p14:sldId id="263"/>
           </p14:sldIdLst>

--- a/operation_uptime/Operation_Uptime_Deck.pptx
+++ b/operation_uptime/Operation_Uptime_Deck.pptx
@@ -114,30 +114,30 @@
   <p:extLst>
     <p:ext uri="{521415D9-36F7-43E2-AB2F-B90AF26B5E84}">
       <p14:sectionLst xmlns:p14="http://schemas.microsoft.com/office/powerpoint/2010/main">
-        <p14:section name="Summary" id="{4d4e0ca9-6e03-eb3a-09fb-397efe5e6133}">
+        <p14:section name="Summary" id="{831b61c7-dba6-d64e-c74b-6a1bb76c74a4}">
           <p14:sldIdLst>
             <p14:sldId id="256"/>
           </p14:sldIdLst>
         </p14:section>
-        <p14:section name="Part 1 Funnel" id="{118194ef-3e25-4e11-3b4c-348f5948c35c}">
+        <p14:section name="Part 1 Funnel" id="{ec10d330-e7d7-effc-9e6f-32d7e574c06d}">
           <p14:sldIdLst>
             <p14:sldId id="257"/>
             <p14:sldId id="258"/>
           </p14:sldIdLst>
         </p14:section>
-        <p14:section name="Part 2 Channels &amp; budget" id="{80225c14-75c9-c49d-65c8-cd9081514d2d}">
+        <p14:section name="Part 2 Channels &amp; budget" id="{20f2e94a-e6ab-11c5-b796-36005b2b9247}">
           <p14:sldIdLst>
             <p14:sldId id="259"/>
             <p14:sldId id="260"/>
             <p14:sldId id="261"/>
           </p14:sldIdLst>
         </p14:section>
-        <p14:section name="Part 3 New sources" id="{a64351ae-a56a-d12b-8f43-29c15d5bf572}">
+        <p14:section name="Part 3 New sources" id="{c034f7d4-e8e8-9271-28e1-ba9d2f199904}">
           <p14:sldIdLst>
             <p14:sldId id="262"/>
           </p14:sldIdLst>
         </p14:section>
-        <p14:section name="Part 4 Run it" id="{62f40b79-b081-756b-6155-396156db0b36}">
+        <p14:section name="Part 4 Run it" id="{8507f958-5496-c550-8c85-2680cbc26c75}">
           <p14:sldIdLst>
             <p14:sldId id="263"/>
           </p14:sldIdLst>

--- a/operation_uptime/Operation_Uptime_Deck.pptx
+++ b/operation_uptime/Operation_Uptime_Deck.pptx
@@ -114,30 +114,30 @@
   <p:extLst>
     <p:ext uri="{521415D9-36F7-43E2-AB2F-B90AF26B5E84}">
       <p14:sectionLst xmlns:p14="http://schemas.microsoft.com/office/powerpoint/2010/main">
-        <p14:section name="Summary" id="{831b61c7-dba6-d64e-c74b-6a1bb76c74a4}">
+        <p14:section name="Summary" id="{f8a88073-1330-45f4-e01b-74e6f738fc02}">
           <p14:sldIdLst>
             <p14:sldId id="256"/>
           </p14:sldIdLst>
         </p14:section>
-        <p14:section name="Part 1 Funnel" id="{ec10d330-e7d7-effc-9e6f-32d7e574c06d}">
+        <p14:section name="Part 1 Funnel" id="{08f63a34-2e00-4d71-998a-54ca1fa06ea6}">
           <p14:sldIdLst>
             <p14:sldId id="257"/>
             <p14:sldId id="258"/>
           </p14:sldIdLst>
         </p14:section>
-        <p14:section name="Part 2 Channels &amp; budget" id="{20f2e94a-e6ab-11c5-b796-36005b2b9247}">
+        <p14:section name="Part 2 Channels &amp; budget" id="{4ac4808e-65dd-04a2-3d11-db03ca21dcf1}">
           <p14:sldIdLst>
             <p14:sldId id="259"/>
             <p14:sldId id="260"/>
             <p14:sldId id="261"/>
           </p14:sldIdLst>
         </p14:section>
-        <p14:section name="Part 3 New sources" id="{c034f7d4-e8e8-9271-28e1-ba9d2f199904}">
+        <p14:section name="Part 3 New sources" id="{7588a314-d594-f44b-138b-d79c8ec2f33c}">
           <p14:sldIdLst>
             <p14:sldId id="262"/>
           </p14:sldIdLst>
         </p14:section>
-        <p14:section name="Part 4 Run it" id="{8507f958-5496-c550-8c85-2680cbc26c75}">
+        <p14:section name="Part 4 Run it" id="{0199cb29-7037-d626-ce5e-195b1b3658bf}">
           <p14:sldIdLst>
             <p14:sldId id="263"/>
           </p14:sldIdLst>
@@ -275,22 +275,22 @@
                 <c:formatCode>General</c:formatCode>
                 <c:ptCount val="7"/>
                 <c:pt idx="0">
-                  <c:v>39</c:v>
+                  <c:v>37</c:v>
                 </c:pt>
                 <c:pt idx="1">
-                  <c:v>55</c:v>
+                  <c:v>52</c:v>
                 </c:pt>
                 <c:pt idx="2">
                   <c:v>53</c:v>
                 </c:pt>
                 <c:pt idx="3">
-                  <c:v>51</c:v>
+                  <c:v>54</c:v>
                 </c:pt>
                 <c:pt idx="4">
-                  <c:v>51</c:v>
+                  <c:v>54</c:v>
                 </c:pt>
                 <c:pt idx="5">
-                  <c:v>43</c:v>
+                  <c:v>55</c:v>
                 </c:pt>
                 <c:pt idx="6">
                   <c:v>0</c:v>
@@ -400,7 +400,7 @@
                   <c:v>55</c:v>
                 </c:pt>
                 <c:pt idx="6">
-                  <c:v>8</c:v>
+                  <c:v>0</c:v>
                 </c:pt>
               </c:numCache>
             </c:numRef>
@@ -693,10 +693,10 @@
                   <c:v>100</c:v>
                 </c:pt>
                 <c:pt idx="1">
-                  <c:v>78</c:v>
+                  <c:v>72</c:v>
                 </c:pt>
                 <c:pt idx="2">
-                  <c:v>78</c:v>
+                  <c:v>72</c:v>
                 </c:pt>
                 <c:pt idx="3">
                   <c:v>100</c:v>
@@ -705,7 +705,7 @@
                   <c:v>100</c:v>
                 </c:pt>
                 <c:pt idx="5">
-                  <c:v>78</c:v>
+                  <c:v>72</c:v>
                 </c:pt>
               </c:numCache>
             </c:numRef>
@@ -1107,22 +1107,22 @@
                 <c:formatCode>General</c:formatCode>
                 <c:ptCount val="9"/>
                 <c:pt idx="0">
-                  <c:v>810</c:v>
+                  <c:v>4323</c:v>
                 </c:pt>
                 <c:pt idx="1">
-                  <c:v>1287</c:v>
+                  <c:v>6762</c:v>
                 </c:pt>
                 <c:pt idx="2">
-                  <c:v>4674</c:v>
+                  <c:v>9766</c:v>
                 </c:pt>
                 <c:pt idx="3">
-                  <c:v>5504</c:v>
+                  <c:v>12446</c:v>
                 </c:pt>
                 <c:pt idx="4">
-                  <c:v>5504</c:v>
+                  <c:v>12446</c:v>
                 </c:pt>
                 <c:pt idx="5">
-                  <c:v>4298</c:v>
+                  <c:v>12374</c:v>
                 </c:pt>
                 <c:pt idx="6">
                   <c:v>0</c:v>
@@ -1226,7 +1226,7 @@
                 <c:formatCode>General</c:formatCode>
                 <c:ptCount val="9"/>
                 <c:pt idx="0">
-                  <c:v>3049</c:v>
+                  <c:v>11743</c:v>
                 </c:pt>
                 <c:pt idx="1">
                   <c:v>0</c:v>
@@ -1354,22 +1354,22 @@
                   <c:v>0</c:v>
                 </c:pt>
                 <c:pt idx="3">
-                  <c:v>125</c:v>
+                  <c:v>388</c:v>
                 </c:pt>
                 <c:pt idx="4">
-                  <c:v>226</c:v>
+                  <c:v>702</c:v>
                 </c:pt>
                 <c:pt idx="5">
-                  <c:v>862</c:v>
+                  <c:v>1031</c:v>
                 </c:pt>
                 <c:pt idx="6">
-                  <c:v>1116</c:v>
+                  <c:v>1346</c:v>
                 </c:pt>
                 <c:pt idx="7">
-                  <c:v>1140</c:v>
+                  <c:v>1406</c:v>
                 </c:pt>
                 <c:pt idx="8">
-                  <c:v>1140</c:v>
+                  <c:v>1655</c:v>
                 </c:pt>
               </c:numCache>
             </c:numRef>
@@ -1631,16 +1631,16 @@
                 <c:ptCount val="4"/>
                 <c:lvl>
                   <c:pt idx="0">
-                    <c:v>100% · €47.50k</c:v>
+                    <c:v>100% · €102.50k</c:v>
                   </c:pt>
                   <c:pt idx="1">
-                    <c:v>85% · €40.38k</c:v>
+                    <c:v>85% · €87.13k</c:v>
                   </c:pt>
                   <c:pt idx="2">
-                    <c:v>70% · €33.25k</c:v>
+                    <c:v>70% · €71.75k</c:v>
                   </c:pt>
                   <c:pt idx="3">
-                    <c:v>50% · €23.75k</c:v>
+                    <c:v>50% · €51.25k</c:v>
                   </c:pt>
                 </c:lvl>
               </c:multiLvlStrCache>
@@ -1659,10 +1659,10 @@
                   <c:v>27.9</c:v>
                 </c:pt>
                 <c:pt idx="2">
-                  <c:v>23.1</c:v>
+                  <c:v>23.4</c:v>
                 </c:pt>
                 <c:pt idx="3">
-                  <c:v>12.7</c:v>
+                  <c:v>16.5</c:v>
                 </c:pt>
               </c:numCache>
             </c:numRef>
@@ -1721,16 +1721,16 @@
                 <c:ptCount val="4"/>
                 <c:lvl>
                   <c:pt idx="0">
-                    <c:v>100% · €47.50k</c:v>
+                    <c:v>100% · €102.50k</c:v>
                   </c:pt>
                   <c:pt idx="1">
-                    <c:v>85% · €40.38k</c:v>
+                    <c:v>85% · €87.13k</c:v>
                   </c:pt>
                   <c:pt idx="2">
-                    <c:v>70% · €33.25k</c:v>
+                    <c:v>70% · €71.75k</c:v>
                   </c:pt>
                   <c:pt idx="3">
-                    <c:v>50% · €23.75k</c:v>
+                    <c:v>50% · €51.25k</c:v>
                   </c:pt>
                 </c:lvl>
               </c:multiLvlStrCache>
@@ -1811,16 +1811,16 @@
                 <c:ptCount val="4"/>
                 <c:lvl>
                   <c:pt idx="0">
-                    <c:v>100% · €47.50k</c:v>
+                    <c:v>100% · €102.50k</c:v>
                   </c:pt>
                   <c:pt idx="1">
-                    <c:v>85% · €40.38k</c:v>
+                    <c:v>85% · €87.13k</c:v>
                   </c:pt>
                   <c:pt idx="2">
-                    <c:v>70% · €33.25k</c:v>
+                    <c:v>70% · €71.75k</c:v>
                   </c:pt>
                   <c:pt idx="3">
-                    <c:v>50% · €23.75k</c:v>
+                    <c:v>50% · €51.25k</c:v>
                   </c:pt>
                 </c:lvl>
               </c:multiLvlStrCache>
@@ -1836,13 +1836,13 @@
                   <c:v>15</c:v>
                 </c:pt>
                 <c:pt idx="1">
-                  <c:v>14.4</c:v>
+                  <c:v>14.7</c:v>
                 </c:pt>
                 <c:pt idx="2">
-                  <c:v>14.4</c:v>
+                  <c:v>14.7</c:v>
                 </c:pt>
                 <c:pt idx="3">
-                  <c:v>14.4</c:v>
+                  <c:v>14.7</c:v>
                 </c:pt>
               </c:numCache>
             </c:numRef>
@@ -1901,16 +1901,16 @@
                 <c:ptCount val="4"/>
                 <c:lvl>
                   <c:pt idx="0">
-                    <c:v>100% · €47.50k</c:v>
+                    <c:v>100% · €102.50k</c:v>
                   </c:pt>
                   <c:pt idx="1">
-                    <c:v>85% · €40.38k</c:v>
+                    <c:v>85% · €87.13k</c:v>
                   </c:pt>
                   <c:pt idx="2">
-                    <c:v>70% · €33.25k</c:v>
+                    <c:v>70% · €71.75k</c:v>
                   </c:pt>
                   <c:pt idx="3">
-                    <c:v>50% · €23.75k</c:v>
+                    <c:v>50% · €51.25k</c:v>
                   </c:pt>
                 </c:lvl>
               </c:multiLvlStrCache>
@@ -1926,13 +1926,13 @@
                   <c:v>10</c:v>
                 </c:pt>
                 <c:pt idx="1">
-                  <c:v>9.5</c:v>
+                  <c:v>9.8</c:v>
                 </c:pt>
                 <c:pt idx="2">
-                  <c:v>8.1</c:v>
+                  <c:v>9.8</c:v>
                 </c:pt>
                 <c:pt idx="3">
-                  <c:v>8.1</c:v>
+                  <c:v>9.4</c:v>
                 </c:pt>
               </c:numCache>
             </c:numRef>
@@ -3760,7 +3760,7 @@
                 <a:ea typeface="Cambria" pitchFamily="34" charset="-122"/>
                 <a:cs typeface="Cambria" pitchFamily="34" charset="-120"/>
               </a:rPr>
-              <a:t>€47.5k signs 100 maintenance hires by 31 Dec if the 55 weekly assessments hold</a:t>
+              <a:t>€102.5k signs 100 maintenance hires by 31 Dec if the 55 weekly assessments hold</a:t>
             </a:r>
             <a:endParaRPr lang="en-US" sz="2200" dirty="0"/>
           </a:p>
@@ -3826,7 +3826,7 @@
                 <a:ea typeface="Cambria" pitchFamily="34" charset="-122"/>
                 <a:cs typeface="Cambria" pitchFamily="34" charset="-120"/>
               </a:rPr>
-              <a:t>€47.5k</a:t>
+              <a:t>€102.5k</a:t>
             </a:r>
             <a:endParaRPr lang="en-US" sz="2600" dirty="0"/>
           </a:p>
@@ -3862,7 +3862,7 @@
                   <a:schemeClr val="tx2"/>
                 </a:solidFill>
               </a:rPr>
-              <a:t>recommended budget: €38.7k planned + €8.8k reserve released only on results</a:t>
+              <a:t>recommended budget: €85.4k planned + €17.1k reserve released only on results</a:t>
             </a:r>
             <a:endParaRPr lang="en-US" sz="1000" dirty="0"/>
           </a:p>
@@ -3928,7 +3928,7 @@
                 <a:ea typeface="Cambria" pitchFamily="34" charset="-122"/>
                 <a:cs typeface="Cambria" pitchFamily="34" charset="-120"/>
               </a:rPr>
-              <a:t>€387</a:t>
+              <a:t>€854</a:t>
             </a:r>
             <a:endParaRPr lang="en-US" sz="2600" dirty="0"/>
           </a:p>
@@ -3964,7 +3964,7 @@
                   <a:schemeClr val="tx2"/>
                 </a:solidFill>
               </a:rPr>
-              <a:t>media cost per hire (≤€475 if the reserve is spent); excludes Joveo fees</a:t>
+              <a:t>media cost per hire (≤€1,025 if the reserve is spent); excludes Joveo fees</a:t>
             </a:r>
             <a:endParaRPr lang="en-US" sz="1000" dirty="0"/>
           </a:p>
@@ -4030,7 +4030,7 @@
                 <a:ea typeface="Cambria" pitchFamily="34" charset="-122"/>
                 <a:cs typeface="Cambria" pitchFamily="34" charset="-120"/>
               </a:rPr>
-              <a:t>90%</a:t>
+              <a:t>97%</a:t>
             </a:r>
             <a:endParaRPr lang="en-US" sz="2600" dirty="0"/>
           </a:p>
@@ -4066,7 +4066,7 @@
                   <a:schemeClr val="tx2"/>
                 </a:solidFill>
               </a:rPr>
-              <a:t>of 322 assessment slots used (291 qualified). Capacity, not money, is the limit</a:t>
+              <a:t>of 314 assessment slots used (305 qualified). Capacity, not money, is the limit</a:t>
             </a:r>
             <a:endParaRPr lang="en-US" sz="1000" dirty="0"/>
           </a:p>
@@ -4132,7 +4132,7 @@
                 <a:ea typeface="Cambria" pitchFamily="34" charset="-122"/>
                 <a:cs typeface="Cambria" pitchFamily="34" charset="-120"/>
               </a:rPr>
-              <a:t>27 Nov</a:t>
+              <a:t>24 Nov</a:t>
             </a:r>
             <a:endParaRPr lang="en-US" sz="2600" dirty="0"/>
           </a:p>
@@ -4168,7 +4168,7 @@
                   <a:schemeClr val="tx2"/>
                 </a:solidFill>
               </a:rPr>
-              <a:t>last useful application (20 Nov for supervisors): signatures by Fri 18 Dec</a:t>
+              <a:t>last useful application (17 Nov for supervisors): signatures by Fri 18 Dec</a:t>
             </a:r>
             <a:endParaRPr lang="en-US" sz="1000" dirty="0"/>
           </a:p>
@@ -4215,7 +4215,7 @@
                   <a:schemeClr val="tx1"/>
                 </a:solidFill>
               </a:rPr>
-              <a:t>~60% we sign all 100, ~85% at least 90 (my judgement). If pass or acceptance rates are 30% worse, ~78. </a:t>
+              <a:t>~50% we sign all 100, ~80% at least 90 (my judgement; slots are 97% used). If pass or acceptance rates are 30% worse, ~72. </a:t>
             </a:r>
             <a:pPr indent="0" marL="0">
               <a:buNone/>
@@ -4237,7 +4237,7 @@
                   <a:schemeClr val="tx1"/>
                 </a:solidFill>
               </a:rPr>
-              <a:t>(€33.25k): ~91 hires; electricians fall short first (23 of 30).</a:t>
+              <a:t>(€71.75k): ~93 hires; electricians fall short first (23 of 30).</a:t>
             </a:r>
             <a:endParaRPr lang="en-US" sz="1100" dirty="0"/>
           </a:p>
@@ -4266,10 +4266,10 @@
             <a:tbl>
               <a:tblPr/>
               <a:tblGrid>
-                <a:gridCol w="1024128"/>
-                <a:gridCol w="457200"/>
-                <a:gridCol w="566928"/>
-                <a:gridCol w="530352"/>
+                <a:gridCol w="914400"/>
+                <a:gridCol w="475488"/>
+                <a:gridCol w="548640"/>
+                <a:gridCol w="640080"/>
                 <a:gridCol w="1536192"/>
               </a:tblGrid>
               <a:tr h="411480">
@@ -4762,7 +4762,7 @@
                           <a:ea typeface="Calibri" pitchFamily="34" charset="-122"/>
                           <a:cs typeface="Calibri" pitchFamily="34" charset="-120"/>
                         </a:rPr>
-                        <a:t>€19.9k</a:t>
+                        <a:t>€46.5k</a:t>
                       </a:r>
                       <a:endParaRPr lang="en-US" sz="1000" dirty="0">
                         <a:latin typeface="Calibri" charset="0"/>
@@ -4827,7 +4827,7 @@
                           <a:ea typeface="Calibri" pitchFamily="34" charset="-122"/>
                           <a:cs typeface="Calibri" pitchFamily="34" charset="-120"/>
                         </a:rPr>
-                        <a:t>€664</a:t>
+                        <a:t>€1,550</a:t>
                       </a:r>
                       <a:endParaRPr lang="en-US" sz="1000" dirty="0">
                         <a:latin typeface="Calibri" charset="0"/>
@@ -4892,7 +4892,7 @@
                           <a:ea typeface="Calibri" pitchFamily="34" charset="-122"/>
                           <a:cs typeface="Calibri" pitchFamily="34" charset="-120"/>
                         </a:rPr>
-                        <a:t>Handwerk→Industrie 11.6 · rediscovery 4.4 · referrals 4.2 · organic 3.9 · Google Search 3.9 · other 2.1</a:t>
+                        <a:t>Handwerk→Industrie 9.5 · rediscovery 4.3 · StepStone 4.3 · referrals 4.1 · organic 3.8 · other 4.1</a:t>
                       </a:r>
                       <a:endParaRPr lang="en-US" sz="900" dirty="0">
                         <a:latin typeface="Calibri" charset="0"/>
@@ -5089,7 +5089,7 @@
                           <a:ea typeface="Calibri" pitchFamily="34" charset="-122"/>
                           <a:cs typeface="Calibri" pitchFamily="34" charset="-120"/>
                         </a:rPr>
-                        <a:t>€5.5k</a:t>
+                        <a:t>€9.7k</a:t>
                       </a:r>
                       <a:endParaRPr lang="en-US" sz="1000" dirty="0">
                         <a:latin typeface="Calibri" charset="0"/>
@@ -5154,7 +5154,7 @@
                           <a:ea typeface="Calibri" pitchFamily="34" charset="-122"/>
                           <a:cs typeface="Calibri" pitchFamily="34" charset="-120"/>
                         </a:rPr>
-                        <a:t>€123</a:t>
+                        <a:t>€215</a:t>
                       </a:r>
                       <a:endParaRPr lang="en-US" sz="1000" dirty="0">
                         <a:latin typeface="Calibri" charset="0"/>
@@ -5219,7 +5219,7 @@
                           <a:ea typeface="Calibri" pitchFamily="34" charset="-122"/>
                           <a:cs typeface="Calibri" pitchFamily="34" charset="-120"/>
                         </a:rPr>
-                        <a:t>organic 14.6 · Polish corridor 13.8 · rediscovery 8.4 · tests 8.2</a:t>
+                        <a:t>Polish corridor 18.0 · organic 13.4 · rediscovery 7.7 · StepStone 4.8 · tests 1.2</a:t>
                       </a:r>
                       <a:endParaRPr lang="en-US" sz="900" dirty="0">
                         <a:latin typeface="Calibri" charset="0"/>
@@ -5416,7 +5416,7 @@
                           <a:ea typeface="Calibri" pitchFamily="34" charset="-122"/>
                           <a:cs typeface="Calibri" pitchFamily="34" charset="-120"/>
                         </a:rPr>
-                        <a:t>€6.7k</a:t>
+                        <a:t>€14.6k</a:t>
                       </a:r>
                       <a:endParaRPr lang="en-US" sz="1000" dirty="0">
                         <a:latin typeface="Calibri" charset="0"/>
@@ -5481,7 +5481,7 @@
                           <a:ea typeface="Calibri" pitchFamily="34" charset="-122"/>
                           <a:cs typeface="Calibri" pitchFamily="34" charset="-120"/>
                         </a:rPr>
-                        <a:t>€447</a:t>
+                        <a:t>€975</a:t>
                       </a:r>
                       <a:endParaRPr lang="en-US" sz="1000" dirty="0">
                         <a:latin typeface="Calibri" charset="0"/>
@@ -5546,7 +5546,7 @@
                           <a:ea typeface="Calibri" pitchFamily="34" charset="-122"/>
                           <a:cs typeface="Calibri" pitchFamily="34" charset="-120"/>
                         </a:rPr>
-                        <a:t>LinkedIn 8.6 · rediscovery 2.4 · organic 2.3 · tests 1.6</a:t>
+                        <a:t>LinkedIn 8.6 · rediscovery 2.3 · organic 2.3 · referrals 1.5 · tests 0.3</a:t>
                       </a:r>
                       <a:endParaRPr lang="en-US" sz="900" dirty="0">
                         <a:latin typeface="Calibri" charset="0"/>
@@ -5743,7 +5743,7 @@
                           <a:ea typeface="Calibri" pitchFamily="34" charset="-122"/>
                           <a:cs typeface="Calibri" pitchFamily="34" charset="-120"/>
                         </a:rPr>
-                        <a:t>€6.6k</a:t>
+                        <a:t>€14.6k</a:t>
                       </a:r>
                       <a:endParaRPr lang="en-US" sz="1000" dirty="0">
                         <a:latin typeface="Calibri" charset="0"/>
@@ -5808,7 +5808,7 @@
                           <a:ea typeface="Calibri" pitchFamily="34" charset="-122"/>
                           <a:cs typeface="Calibri" pitchFamily="34" charset="-120"/>
                         </a:rPr>
-                        <a:t>€655</a:t>
+                        <a:t>€1,457</a:t>
                       </a:r>
                       <a:endParaRPr lang="en-US" sz="1000" dirty="0">
                         <a:latin typeface="Calibri" charset="0"/>
@@ -5873,7 +5873,7 @@
                           <a:ea typeface="Calibri" pitchFamily="34" charset="-122"/>
                           <a:cs typeface="Calibri" pitchFamily="34" charset="-120"/>
                         </a:rPr>
-                        <a:t>LinkedIn 5.4 · rediscovery 1.5 · organic 1.3 · Google Search 1.0 · tests 0.5 · other 0.4</a:t>
+                        <a:t>LinkedIn 4.5 · StepStone 1.8 · rediscovery 1.3 · organic 1.1 · referrals 1.0 · other 0.2</a:t>
                       </a:r>
                       <a:endParaRPr lang="en-US" sz="900" dirty="0">
                         <a:latin typeface="Calibri" charset="0"/>
@@ -6070,7 +6070,7 @@
                           <a:ea typeface="Calibri" pitchFamily="34" charset="-122"/>
                           <a:cs typeface="Calibri" pitchFamily="34" charset="-120"/>
                         </a:rPr>
-                        <a:t>€38.7k</a:t>
+                        <a:t>€85.4k</a:t>
                       </a:r>
                       <a:endParaRPr lang="en-US" sz="1000" dirty="0">
                         <a:latin typeface="Calibri" charset="0"/>
@@ -6135,7 +6135,7 @@
                           <a:ea typeface="Calibri" pitchFamily="34" charset="-122"/>
                           <a:cs typeface="Calibri" pitchFamily="34" charset="-120"/>
                         </a:rPr>
-                        <a:t>€387</a:t>
+                        <a:t>€854</a:t>
                       </a:r>
                       <a:endParaRPr lang="en-US" sz="1000" dirty="0">
                         <a:latin typeface="Calibri" charset="0"/>
@@ -6200,7 +6200,7 @@
                           <a:ea typeface="Calibri" pitchFamily="34" charset="-122"/>
                           <a:cs typeface="Calibri" pitchFamily="34" charset="-120"/>
                         </a:rPr>
-                        <a:t>+ €8.8k reserve = €47.5k</a:t>
+                        <a:t>+ €17.1k reserve = €102.5k</a:t>
                       </a:r>
                       <a:endParaRPr lang="en-US" sz="900" dirty="0">
                         <a:latin typeface="Calibri" charset="0"/>
@@ -6294,7 +6294,7 @@
                   <a:schemeClr val="tx1"/>
                 </a:solidFill>
               </a:rPr>
-              <a:t>€750 test in every paid CPC/CPA cell in weeks 1–2, then buy hires cheapest-first: free channels → ATS rediscovery (~€20/hire) → Polish corridor (≤40% of mechatronics) → construction-electrician campaign → LinkedIn, Search, referrals, 1 StepStone ad. Pace ≤55 qualified a week; paid spend stops 27 Nov.</a:t>
+              <a:t>€750 test in every paid CPC/CPA cell in weeks 1–2, then buy hires cheapest-first: free channels → ATS rediscovery (~€13/hire) → Polish corridor (≤40% of mechatronics) → StepStone (7 ads) → referrals, LinkedIn → construction-electrician campaign, Search. Pace ≤55 qualified a week; paid spend stops Tue 24 Nov.</a:t>
             </a:r>
             <a:endParaRPr lang="en-US" sz="1100" dirty="0"/>
           </a:p>
@@ -6434,7 +6434,7 @@
                   <a:schemeClr val="tx1"/>
                 </a:solidFill>
               </a:rPr>
-              <a:t>90% used. Pre-screened sources first, pace ≤55/wk, ask +10–15 slots (65/wk → 76% use).</a:t>
+              <a:t>97% used. Pre-screened sources first, pace ≤55/wk, ask +10–15 slots (65/wk → 80% use).</a:t>
             </a:r>
             <a:endParaRPr lang="en-US" sz="1100" dirty="0"/>
           </a:p>
@@ -6465,7 +6465,7 @@
                   <a:schemeClr val="tx1"/>
                 </a:solidFill>
               </a:rPr>
-              <a:t>~12 of 30 need your OK on construction electricians by 23 Oct; else Meta, StepStone, programmatic at €1,000–1,500/hire.</a:t>
+              <a:t>~9 of 30 need your OK on construction electricians by 23 Oct; else more StepStone (~€1,022/hire), then Search and programmatic at €3.8k–€4.3k/hire.</a:t>
             </a:r>
             <a:endParaRPr lang="en-US" sz="1100" dirty="0"/>
           </a:p>
@@ -6496,7 +6496,7 @@
                   <a:schemeClr val="tx1"/>
                 </a:solidFill>
               </a:rPr>
-              <a:t>3-day offers, e-signature, 7-day offer validity, stop spend 27 Nov.</a:t>
+              <a:t>3-day offers, e-signature, 7-day offer validity, stop spend Tue 24 Nov.</a:t>
             </a:r>
             <a:endParaRPr lang="en-US" sz="1100" dirty="0"/>
           </a:p>
@@ -6695,7 +6695,7 @@
                   <a:schemeClr val="tx1"/>
                 </a:solidFill>
               </a:rPr>
-              <a:t>3-day offers, e-signature to 18 Dec; approve €47.5k</a:t>
+              <a:t>3-day offers, e-signature to 18 Dec; approve €102.5k</a:t>
             </a:r>
             <a:endParaRPr lang="en-US" sz="1100" dirty="0"/>
           </a:p>
@@ -6845,7 +6845,7 @@
                 <a:ea typeface="Cambria" pitchFamily="34" charset="-122"/>
                 <a:cs typeface="Cambria" pitchFamily="34" charset="-120"/>
               </a:rPr>
-              <a:t>Working back from 100 hires: ~291 qualified applicants for 322 assessment slots</a:t>
+              <a:t>Working back from 100 hires: ~305 qualified applicants for 314 assessment slots</a:t>
             </a:r>
             <a:endParaRPr lang="en-US" sz="2200" dirty="0"/>
           </a:p>
@@ -7624,7 +7624,7 @@
                             <a:schemeClr val="tx1"/>
                           </a:solidFill>
                         </a:rPr>
-                        <a:t>55%</a:t>
+                        <a:t>50%</a:t>
                       </a:r>
                       <a:endParaRPr lang="en-US" sz="1100" dirty="0"/>
                     </a:p>
@@ -7740,7 +7740,7 @@
                             <a:schemeClr val="tx1"/>
                           </a:solidFill>
                         </a:rPr>
-                        <a:t>65%</a:t>
+                        <a:t>70%</a:t>
                       </a:r>
                       <a:endParaRPr lang="en-US" sz="1100" dirty="0"/>
                     </a:p>
@@ -7856,7 +7856,7 @@
                             <a:schemeClr val="tx1"/>
                           </a:solidFill>
                         </a:rPr>
-                        <a:t>93</a:t>
+                        <a:t>95</a:t>
                       </a:r>
                       <a:endParaRPr lang="en-US" sz="1100" dirty="0"/>
                     </a:p>
@@ -7914,7 +7914,7 @@
                             <a:schemeClr val="tx1"/>
                           </a:solidFill>
                         </a:rPr>
-                        <a:t>622</a:t>
+                        <a:t>635</a:t>
                       </a:r>
                       <a:endParaRPr lang="en-US" sz="1100" dirty="0"/>
                     </a:p>
@@ -8148,7 +8148,7 @@
                             <a:schemeClr val="tx1"/>
                           </a:solidFill>
                         </a:rPr>
-                        <a:t>60%</a:t>
+                        <a:t>55%</a:t>
                       </a:r>
                       <a:endParaRPr lang="en-US" sz="1100" dirty="0"/>
                     </a:p>
@@ -8322,7 +8322,7 @@
                             <a:schemeClr val="tx1"/>
                           </a:solidFill>
                         </a:rPr>
-                        <a:t>41%</a:t>
+                        <a:t>37%</a:t>
                       </a:r>
                       <a:endParaRPr lang="en-US" sz="1100" dirty="0"/>
                     </a:p>
@@ -8380,7 +8380,7 @@
                             <a:schemeClr val="tx1"/>
                           </a:solidFill>
                         </a:rPr>
-                        <a:t>111</a:t>
+                        <a:t>121</a:t>
                       </a:r>
                       <a:endParaRPr lang="en-US" sz="1100" dirty="0"/>
                     </a:p>
@@ -8438,7 +8438,7 @@
                             <a:schemeClr val="tx1"/>
                           </a:solidFill>
                         </a:rPr>
-                        <a:t>505</a:t>
+                        <a:t>551</a:t>
                       </a:r>
                       <a:endParaRPr lang="en-US" sz="1100" dirty="0"/>
                     </a:p>
@@ -8672,7 +8672,7 @@
                             <a:schemeClr val="tx1"/>
                           </a:solidFill>
                         </a:rPr>
-                        <a:t>50%</a:t>
+                        <a:t>45%</a:t>
                       </a:r>
                       <a:endParaRPr lang="en-US" sz="1100" dirty="0"/>
                     </a:p>
@@ -8788,7 +8788,7 @@
                             <a:schemeClr val="tx1"/>
                           </a:solidFill>
                         </a:rPr>
-                        <a:t>65%</a:t>
+                        <a:t>70%</a:t>
                       </a:r>
                       <a:endParaRPr lang="en-US" sz="1100" dirty="0"/>
                     </a:p>
@@ -8846,7 +8846,7 @@
                             <a:schemeClr val="tx1"/>
                           </a:solidFill>
                         </a:rPr>
-                        <a:t>29%</a:t>
+                        <a:t>28%</a:t>
                       </a:r>
                       <a:endParaRPr lang="en-US" sz="1100" dirty="0"/>
                     </a:p>
@@ -8904,7 +8904,7 @@
                             <a:schemeClr val="tx1"/>
                           </a:solidFill>
                         </a:rPr>
-                        <a:t>51</a:t>
+                        <a:t>53</a:t>
                       </a:r>
                       <a:endParaRPr lang="en-US" sz="1100" dirty="0"/>
                     </a:p>
@@ -8962,7 +8962,7 @@
                             <a:schemeClr val="tx1"/>
                           </a:solidFill>
                         </a:rPr>
-                        <a:t>427</a:t>
+                        <a:t>441</a:t>
                       </a:r>
                       <a:endParaRPr lang="en-US" sz="1100" dirty="0"/>
                     </a:p>
@@ -9196,7 +9196,7 @@
                             <a:schemeClr val="tx1"/>
                           </a:solidFill>
                         </a:rPr>
-                        <a:t>45%</a:t>
+                        <a:t>40%</a:t>
                       </a:r>
                       <a:endParaRPr lang="en-US" sz="1100" dirty="0"/>
                     </a:p>
@@ -9370,7 +9370,7 @@
                             <a:schemeClr val="tx1"/>
                           </a:solidFill>
                         </a:rPr>
-                        <a:t>27%</a:t>
+                        <a:t>24%</a:t>
                       </a:r>
                       <a:endParaRPr lang="en-US" sz="1100" dirty="0"/>
                     </a:p>
@@ -9428,7 +9428,7 @@
                             <a:schemeClr val="tx1"/>
                           </a:solidFill>
                         </a:rPr>
-                        <a:t>37</a:t>
+                        <a:t>42</a:t>
                       </a:r>
                       <a:endParaRPr lang="en-US" sz="1100" dirty="0"/>
                     </a:p>
@@ -9486,7 +9486,7 @@
                             <a:schemeClr val="tx1"/>
                           </a:solidFill>
                         </a:rPr>
-                        <a:t>373</a:t>
+                        <a:t>420</a:t>
                       </a:r>
                       <a:endParaRPr lang="en-US" sz="1100" dirty="0"/>
                     </a:p>
@@ -9862,7 +9862,7 @@
                             <a:schemeClr val="tx1"/>
                           </a:solidFill>
                         </a:rPr>
-                        <a:t>34%</a:t>
+                        <a:t>32%</a:t>
                       </a:r>
                       <a:endParaRPr lang="en-US" sz="1100" dirty="0"/>
                     </a:p>
@@ -9920,7 +9920,7 @@
                             <a:schemeClr val="tx1"/>
                           </a:solidFill>
                         </a:rPr>
-                        <a:t>293</a:t>
+                        <a:t>311</a:t>
                       </a:r>
                       <a:endParaRPr lang="en-US" sz="1100" dirty="0"/>
                     </a:p>
@@ -9978,7 +9978,7 @@
                             <a:schemeClr val="tx1"/>
                           </a:solidFill>
                         </a:rPr>
-                        <a:t>1,927</a:t>
+                        <a:t>2,047</a:t>
                       </a:r>
                       <a:endParaRPr lang="en-US" sz="1100" dirty="0"/>
                     </a:p>
@@ -10068,7 +10068,7 @@
                   <a:schemeClr val="tx1"/>
                 </a:solidFill>
               </a:rPr>
-              <a:t>All own estimates, each reasoned on the Assumptions tab. Few applicants qualify (brief), and foreign-trained electricians can't be recognised in time (2–4 months, §6 BQFG). About half fail a practical test. Acceptance reflects counter-offers in Engpass trades. With the channel mix, the plan needs </a:t>
+              <a:t>Sourced where data exists (IAB: 28% of applications suitable; Gem interview-pass and Königsteiner/StepStone offer-acceptance data), own estimates otherwise; each labelled on the Assumptions tab. Few applicants qualify (brief), and foreign-trained electricians can't be recognised in time (2–4 months, §6 BQFG). Acceptance reflects counter-offers in Engpass trades. With the channel mix, the plan needs </a:t>
             </a:r>
             <a:pPr indent="0" marL="0">
               <a:buNone/>
@@ -10079,7 +10079,7 @@
                   <a:schemeClr val="tx1"/>
                 </a:solidFill>
               </a:rPr>
-              <a:t>291 qualified / 1,611 applications</a:t>
+              <a:t>305 qualified / 1,525 applications</a:t>
             </a:r>
             <a:pPr indent="0" marL="0">
               <a:buNone/>
@@ -10137,7 +10137,7 @@
                   <a:schemeClr val="tx1"/>
                 </a:solidFill>
               </a:rPr>
-              <a:t>Application → assessment 4 days, → interview 7, → offer 3, → signature 7; supervisors +7. Last realistic signature Fri 18 Dec, so applications must arrive by Fri 27 Nov (E/M/A) and Fri 20 Nov (supervisors). Slots = 55 × 41 days ÷ 7 = 322.</a:t>
+              <a:t>Application → assessment 6 days, → interview 8, → offer 3, → signature 7 (first two: SmartRecruiters DE benchmark); supervisors +7. Last realistic signature Fri 18 Dec, so applications must arrive by Tue 24 Nov (E/M/A) and Tue 17 Nov (supervisors). Slots = 55 × 40 days ÷ 7 = 314.</a:t>
             </a:r>
             <a:endParaRPr lang="en-US" sz="1200" dirty="0"/>
           </a:p>
@@ -10189,7 +10189,7 @@
                   <a:schemeClr val="tx2"/>
                 </a:solidFill>
               </a:rPr>
-              <a:t>Week 1: 39 of 39 slots; weeks 2–5: 51–55 of 55; week 6: 43; week 7 is Tue 1 Dec only (last assessment day, 8 slots). Rediscovery re-applicants (waves 21 Oct, 26 Oct and 2 Nov) and the €750 tests fill weeks 1–2, so regular spend starts at 3% and 5%, then 20–24% a week.</a:t>
+              <a:t>Week 1: 37 of 39 slots; weeks 2–5: 52–54 of 55; week 6: 55; assessments end Mon 30 Nov. Rediscovery re-applicants (waves 21 Oct, 26 Oct and 2 Nov) and the €750 tests fill weeks 1–2, so regular spend ramps 7%, 11%, 16%, then 21–25% a week.</a:t>
             </a:r>
             <a:endParaRPr lang="en-US" sz="1100" dirty="0"/>
           </a:p>
@@ -10339,7 +10339,7 @@
                 <a:ea typeface="Cambria" pitchFamily="34" charset="-122"/>
                 <a:cs typeface="Cambria" pitchFamily="34" charset="-120"/>
               </a:rPr>
-              <a:t>Electricians are hardest; a 30% worse pass rate costs ~22 hires that money can't buy back</a:t>
+              <a:t>Electricians are hardest; a 30% worse pass rate costs ~28 hires that money can't buy back</a:t>
             </a:r>
             <a:endParaRPr lang="en-US" sz="2200" dirty="0"/>
           </a:p>
@@ -10816,7 +10816,7 @@
                             <a:schemeClr val="tx1"/>
                           </a:solidFill>
                         </a:rPr>
-                        <a:t>1.9×</a:t>
+                        <a:t>1.8×</a:t>
                       </a:r>
                       <a:endParaRPr lang="en-US" sz="1100" dirty="0"/>
                     </a:p>
@@ -10932,7 +10932,7 @@
                             <a:schemeClr val="tx1"/>
                           </a:solidFill>
                         </a:rPr>
-                        <a:t>9%</a:t>
+                        <a:t>14%</a:t>
                       </a:r>
                       <a:endParaRPr lang="en-US" sz="1100" dirty="0"/>
                     </a:p>
@@ -11166,7 +11166,7 @@
                             <a:schemeClr val="tx1"/>
                           </a:solidFill>
                         </a:rPr>
-                        <a:t>3.2×</a:t>
+                        <a:t>3.0×</a:t>
                       </a:r>
                       <a:endParaRPr lang="en-US" sz="1100" dirty="0"/>
                     </a:p>
@@ -11224,7 +11224,7 @@
                             <a:schemeClr val="tx1"/>
                           </a:solidFill>
                         </a:rPr>
-                        <a:t>3.2×</a:t>
+                        <a:t>3.0×</a:t>
                       </a:r>
                       <a:endParaRPr lang="en-US" sz="1100" dirty="0"/>
                     </a:p>
@@ -11282,7 +11282,7 @@
                             <a:schemeClr val="tx1"/>
                           </a:solidFill>
                         </a:rPr>
-                        <a:t>5%</a:t>
+                        <a:t>7%</a:t>
                       </a:r>
                       <a:endParaRPr lang="en-US" sz="1100" dirty="0"/>
                     </a:p>
@@ -11516,7 +11516,7 @@
                             <a:schemeClr val="tx1"/>
                           </a:solidFill>
                         </a:rPr>
-                        <a:t>2.0×</a:t>
+                        <a:t>1.9×</a:t>
                       </a:r>
                       <a:endParaRPr lang="en-US" sz="1100" dirty="0"/>
                     </a:p>
@@ -11574,7 +11574,7 @@
                             <a:schemeClr val="tx1"/>
                           </a:solidFill>
                         </a:rPr>
-                        <a:t>2.0×</a:t>
+                        <a:t>1.9×</a:t>
                       </a:r>
                       <a:endParaRPr lang="en-US" sz="1100" dirty="0"/>
                     </a:p>
@@ -11632,7 +11632,7 @@
                             <a:schemeClr val="tx1"/>
                           </a:solidFill>
                         </a:rPr>
-                        <a:t>9%</a:t>
+                        <a:t>10%</a:t>
                       </a:r>
                       <a:endParaRPr lang="en-US" sz="1100" dirty="0"/>
                     </a:p>
@@ -11866,7 +11866,7 @@
                             <a:schemeClr val="tx1"/>
                           </a:solidFill>
                         </a:rPr>
-                        <a:t>1.8×</a:t>
+                        <a:t>1.6×</a:t>
                       </a:r>
                       <a:endParaRPr lang="en-US" sz="1100" dirty="0"/>
                     </a:p>
@@ -11924,7 +11924,7 @@
                             <a:schemeClr val="tx1"/>
                           </a:solidFill>
                         </a:rPr>
-                        <a:t>1.8×</a:t>
+                        <a:t>1.6×</a:t>
                       </a:r>
                       <a:endParaRPr lang="en-US" sz="1100" dirty="0"/>
                     </a:p>
@@ -11982,7 +11982,7 @@
                             <a:schemeClr val="tx1"/>
                           </a:solidFill>
                         </a:rPr>
-                        <a:t>17%</a:t>
+                        <a:t>19%</a:t>
                       </a:r>
                       <a:endParaRPr lang="en-US" sz="1100" dirty="0"/>
                     </a:p>
@@ -12235,7 +12235,7 @@
                   <a:schemeClr val="tx1"/>
                 </a:solidFill>
               </a:rPr>
-              <a:t>30% worse pass or acceptance rates need 415 qualified for 322 slots (129%). The 43% more media that would need can't help: slots cap hires at ~78. Upstream misses (share qualified, cost per application) only cost money.</a:t>
+              <a:t>30% worse pass or acceptance rates need 436 qualified for 314 slots (139%). The 43% more media that would need can't help: slots cap hires at ~72. Upstream misses (share qualified, cost per application) only cost money.</a:t>
             </a:r>
             <a:endParaRPr lang="en-US" sz="1200" dirty="0"/>
           </a:p>
@@ -12542,7 +12542,7 @@
                             <a:schemeClr val="tx1"/>
                           </a:solidFill>
                         </a:rPr>
-                        <a:t>415</a:t>
+                        <a:t>436</a:t>
                       </a:r>
                       <a:endParaRPr lang="en-US" sz="1000" dirty="0"/>
                     </a:p>
@@ -12718,7 +12718,7 @@
                             <a:schemeClr val="tx1"/>
                           </a:solidFill>
                         </a:rPr>
-                        <a:t>415</a:t>
+                        <a:t>436</a:t>
                       </a:r>
                       <a:endParaRPr lang="en-US" sz="1000" dirty="0"/>
                     </a:p>
@@ -12894,7 +12894,7 @@
                             <a:schemeClr val="tx1"/>
                           </a:solidFill>
                         </a:rPr>
-                        <a:t>291</a:t>
+                        <a:t>305</a:t>
                       </a:r>
                       <a:endParaRPr lang="en-US" sz="1000" dirty="0"/>
                     </a:p>
@@ -13070,7 +13070,7 @@
                             <a:schemeClr val="tx1"/>
                           </a:solidFill>
                         </a:rPr>
-                        <a:t>291</a:t>
+                        <a:t>305</a:t>
                       </a:r>
                       <a:endParaRPr lang="en-US" sz="1000" dirty="0"/>
                     </a:p>
@@ -13246,7 +13246,7 @@
                             <a:schemeClr val="tx1"/>
                           </a:solidFill>
                         </a:rPr>
-                        <a:t>291</a:t>
+                        <a:t>305</a:t>
                       </a:r>
                       <a:endParaRPr lang="en-US" sz="1000" dirty="0"/>
                     </a:p>
@@ -13912,7 +13912,7 @@
                             <a:schemeClr val="tx1"/>
                           </a:solidFill>
                         </a:rPr>
-                        <a:t>€0 / €0 · 3.9</a:t>
+                        <a:t>€0 / €0 · 3.8</a:t>
                       </a:r>
                       <a:endParaRPr lang="en-US" sz="1000" dirty="0"/>
                     </a:p>
@@ -13973,7 +13973,7 @@
                             <a:schemeClr val="tx1"/>
                           </a:solidFill>
                         </a:rPr>
-                        <a:t>€0 / €0 · 14.6</a:t>
+                        <a:t>€0 / €0 · 13.4</a:t>
                       </a:r>
                       <a:endParaRPr lang="en-US" sz="1000" dirty="0"/>
                     </a:p>
@@ -14095,7 +14095,7 @@
                             <a:schemeClr val="tx1"/>
                           </a:solidFill>
                         </a:rPr>
-                        <a:t>€0 / €0 · 1.3</a:t>
+                        <a:t>€0 / €0 · 1.1</a:t>
                       </a:r>
                       <a:endParaRPr lang="en-US" sz="1000" dirty="0"/>
                     </a:p>
@@ -14216,7 +14216,7 @@
                             <a:schemeClr val="tx1"/>
                           </a:solidFill>
                         </a:rPr>
-                        <a:t>€8 / €23 · 4.4</a:t>
+                        <a:t>€5 / €14 · 4.3</a:t>
                       </a:r>
                       <a:endParaRPr lang="en-US" sz="1000" dirty="0"/>
                     </a:p>
@@ -14277,7 +14277,7 @@
                             <a:schemeClr val="tx1"/>
                           </a:solidFill>
                         </a:rPr>
-                        <a:t>€8 / €18 · 8.4</a:t>
+                        <a:t>€5 / €12 · 7.7</a:t>
                       </a:r>
                       <a:endParaRPr lang="en-US" sz="1000" dirty="0"/>
                     </a:p>
@@ -14338,7 +14338,7 @@
                             <a:schemeClr val="tx1"/>
                           </a:solidFill>
                         </a:rPr>
-                        <a:t>€8 / €25 · 2.4</a:t>
+                        <a:t>€5 / €15 · 2.3</a:t>
                       </a:r>
                       <a:endParaRPr lang="en-US" sz="1000" dirty="0"/>
                     </a:p>
@@ -14399,7 +14399,7 @@
                             <a:schemeClr val="tx1"/>
                           </a:solidFill>
                         </a:rPr>
-                        <a:t>€8 / €27 · 1.5</a:t>
+                        <a:t>€5 / €18 · 1.3</a:t>
                       </a:r>
                       <a:endParaRPr lang="en-US" sz="1000" dirty="0"/>
                     </a:p>
@@ -14578,7 +14578,7 @@
                             <a:schemeClr val="tx1"/>
                           </a:solidFill>
                         </a:rPr>
-                        <a:t>€89 / €221 · 13.8</a:t>
+                        <a:t>€92 / €248 · 18.0</a:t>
                       </a:r>
                       <a:endParaRPr lang="en-US" sz="1000" dirty="0"/>
                     </a:p>
@@ -14757,6 +14757,912 @@
                             <a:schemeClr val="tx1"/>
                           </a:solidFill>
                         </a:rPr>
+                        <a:t>StepStone (German, CV-based, €1,449/ad)</a:t>
+                      </a:r>
+                      <a:endParaRPr lang="en-US" sz="1000" dirty="0"/>
+                    </a:p>
+                  </a:txBody>
+                  <a:tcPr marL="91440" marR="91440" marT="45720" marB="45720" anchor="ctr">
+                    <a:lnL w="6350" cap="flat" cmpd="sng" algn="ctr">
+                      <a:solidFill>
+                        <a:srgbClr val="D6DEE5"/>
+                      </a:solidFill>
+                      <a:prstDash val="solid"/>
+                      <a:round/>
+                      <a:headEnd type="none" w="med" len="med"/>
+                      <a:tailEnd type="none" w="med" len="med"/>
+                    </a:lnL>
+                    <a:lnR w="6350" cap="flat" cmpd="sng" algn="ctr">
+                      <a:solidFill>
+                        <a:srgbClr val="D6DEE5"/>
+                      </a:solidFill>
+                      <a:prstDash val="solid"/>
+                      <a:round/>
+                      <a:headEnd type="none" w="med" len="med"/>
+                      <a:tailEnd type="none" w="med" len="med"/>
+                    </a:lnR>
+                    <a:lnT w="6350" cap="flat" cmpd="sng" algn="ctr">
+                      <a:solidFill>
+                        <a:srgbClr val="D6DEE5"/>
+                      </a:solidFill>
+                      <a:prstDash val="solid"/>
+                      <a:round/>
+                      <a:headEnd type="none" w="med" len="med"/>
+                      <a:tailEnd type="none" w="med" len="med"/>
+                    </a:lnT>
+                    <a:lnB w="6350" cap="flat" cmpd="sng" algn="ctr">
+                      <a:solidFill>
+                        <a:srgbClr val="D6DEE5"/>
+                      </a:solidFill>
+                      <a:prstDash val="solid"/>
+                      <a:round/>
+                      <a:headEnd type="none" w="med" len="med"/>
+                      <a:tailEnd type="none" w="med" len="med"/>
+                    </a:lnB>
+                  </a:tcPr>
+                </a:tc>
+                <a:tc>
+                  <a:txBody>
+                    <a:bodyPr/>
+                    <a:lstStyle/>
+                    <a:p>
+                      <a:pPr algn="ctr" indent="0" marL="0">
+                        <a:buNone/>
+                      </a:pPr>
+                      <a:r>
+                        <a:rPr lang="en-US" sz="1000" dirty="0">
+                          <a:solidFill>
+                            <a:schemeClr val="tx1"/>
+                          </a:solidFill>
+                        </a:rPr>
+                        <a:t>€322 / €1,022 · 4.3</a:t>
+                      </a:r>
+                      <a:endParaRPr lang="en-US" sz="1000" dirty="0"/>
+                    </a:p>
+                  </a:txBody>
+                  <a:tcPr marL="91440" marR="91440" marT="45720" marB="45720" anchor="ctr">
+                    <a:lnL w="6350" cap="flat" cmpd="sng" algn="ctr">
+                      <a:solidFill>
+                        <a:srgbClr val="D6DEE5"/>
+                      </a:solidFill>
+                      <a:prstDash val="solid"/>
+                      <a:round/>
+                      <a:headEnd type="none" w="med" len="med"/>
+                      <a:tailEnd type="none" w="med" len="med"/>
+                    </a:lnL>
+                    <a:lnR w="6350" cap="flat" cmpd="sng" algn="ctr">
+                      <a:solidFill>
+                        <a:srgbClr val="D6DEE5"/>
+                      </a:solidFill>
+                      <a:prstDash val="solid"/>
+                      <a:round/>
+                      <a:headEnd type="none" w="med" len="med"/>
+                      <a:tailEnd type="none" w="med" len="med"/>
+                    </a:lnR>
+                    <a:lnT w="6350" cap="flat" cmpd="sng" algn="ctr">
+                      <a:solidFill>
+                        <a:srgbClr val="D6DEE5"/>
+                      </a:solidFill>
+                      <a:prstDash val="solid"/>
+                      <a:round/>
+                      <a:headEnd type="none" w="med" len="med"/>
+                      <a:tailEnd type="none" w="med" len="med"/>
+                    </a:lnT>
+                    <a:lnB w="6350" cap="flat" cmpd="sng" algn="ctr">
+                      <a:solidFill>
+                        <a:srgbClr val="D6DEE5"/>
+                      </a:solidFill>
+                      <a:prstDash val="solid"/>
+                      <a:round/>
+                      <a:headEnd type="none" w="med" len="med"/>
+                      <a:tailEnd type="none" w="med" len="med"/>
+                    </a:lnB>
+                    <a:solidFill>
+                      <a:srgbClr val="DCEFE8"/>
+                    </a:solidFill>
+                  </a:tcPr>
+                </a:tc>
+                <a:tc>
+                  <a:txBody>
+                    <a:bodyPr/>
+                    <a:lstStyle/>
+                    <a:p>
+                      <a:pPr algn="ctr" indent="0" marL="0">
+                        <a:buNone/>
+                      </a:pPr>
+                      <a:r>
+                        <a:rPr lang="en-US" sz="1000" dirty="0">
+                          <a:solidFill>
+                            <a:schemeClr val="tx1"/>
+                          </a:solidFill>
+                        </a:rPr>
+                        <a:t>€166 / €446 · 4.8</a:t>
+                      </a:r>
+                      <a:endParaRPr lang="en-US" sz="1000" dirty="0"/>
+                    </a:p>
+                  </a:txBody>
+                  <a:tcPr marL="91440" marR="91440" marT="45720" marB="45720" anchor="ctr">
+                    <a:lnL w="6350" cap="flat" cmpd="sng" algn="ctr">
+                      <a:solidFill>
+                        <a:srgbClr val="D6DEE5"/>
+                      </a:solidFill>
+                      <a:prstDash val="solid"/>
+                      <a:round/>
+                      <a:headEnd type="none" w="med" len="med"/>
+                      <a:tailEnd type="none" w="med" len="med"/>
+                    </a:lnL>
+                    <a:lnR w="6350" cap="flat" cmpd="sng" algn="ctr">
+                      <a:solidFill>
+                        <a:srgbClr val="D6DEE5"/>
+                      </a:solidFill>
+                      <a:prstDash val="solid"/>
+                      <a:round/>
+                      <a:headEnd type="none" w="med" len="med"/>
+                      <a:tailEnd type="none" w="med" len="med"/>
+                    </a:lnR>
+                    <a:lnT w="6350" cap="flat" cmpd="sng" algn="ctr">
+                      <a:solidFill>
+                        <a:srgbClr val="D6DEE5"/>
+                      </a:solidFill>
+                      <a:prstDash val="solid"/>
+                      <a:round/>
+                      <a:headEnd type="none" w="med" len="med"/>
+                      <a:tailEnd type="none" w="med" len="med"/>
+                    </a:lnT>
+                    <a:lnB w="6350" cap="flat" cmpd="sng" algn="ctr">
+                      <a:solidFill>
+                        <a:srgbClr val="D6DEE5"/>
+                      </a:solidFill>
+                      <a:prstDash val="solid"/>
+                      <a:round/>
+                      <a:headEnd type="none" w="med" len="med"/>
+                      <a:tailEnd type="none" w="med" len="med"/>
+                    </a:lnB>
+                    <a:solidFill>
+                      <a:srgbClr val="DCEFE8"/>
+                    </a:solidFill>
+                  </a:tcPr>
+                </a:tc>
+                <a:tc>
+                  <a:txBody>
+                    <a:bodyPr/>
+                    <a:lstStyle/>
+                    <a:p>
+                      <a:pPr algn="ctr" indent="0" marL="0">
+                        <a:buNone/>
+                      </a:pPr>
+                      <a:r>
+                        <a:rPr lang="en-US" sz="1000" dirty="0">
+                          <a:solidFill>
+                            <a:schemeClr val="tx1"/>
+                          </a:solidFill>
+                        </a:rPr>
+                        <a:t>€386 / €1,363 · –</a:t>
+                      </a:r>
+                      <a:endParaRPr lang="en-US" sz="1000" dirty="0"/>
+                    </a:p>
+                  </a:txBody>
+                  <a:tcPr marL="91440" marR="91440" marT="45720" marB="45720" anchor="ctr">
+                    <a:lnL w="6350" cap="flat" cmpd="sng" algn="ctr">
+                      <a:solidFill>
+                        <a:srgbClr val="D6DEE5"/>
+                      </a:solidFill>
+                      <a:prstDash val="solid"/>
+                      <a:round/>
+                      <a:headEnd type="none" w="med" len="med"/>
+                      <a:tailEnd type="none" w="med" len="med"/>
+                    </a:lnL>
+                    <a:lnR w="6350" cap="flat" cmpd="sng" algn="ctr">
+                      <a:solidFill>
+                        <a:srgbClr val="D6DEE5"/>
+                      </a:solidFill>
+                      <a:prstDash val="solid"/>
+                      <a:round/>
+                      <a:headEnd type="none" w="med" len="med"/>
+                      <a:tailEnd type="none" w="med" len="med"/>
+                    </a:lnR>
+                    <a:lnT w="6350" cap="flat" cmpd="sng" algn="ctr">
+                      <a:solidFill>
+                        <a:srgbClr val="D6DEE5"/>
+                      </a:solidFill>
+                      <a:prstDash val="solid"/>
+                      <a:round/>
+                      <a:headEnd type="none" w="med" len="med"/>
+                      <a:tailEnd type="none" w="med" len="med"/>
+                    </a:lnT>
+                    <a:lnB w="6350" cap="flat" cmpd="sng" algn="ctr">
+                      <a:solidFill>
+                        <a:srgbClr val="D6DEE5"/>
+                      </a:solidFill>
+                      <a:prstDash val="solid"/>
+                      <a:round/>
+                      <a:headEnd type="none" w="med" len="med"/>
+                      <a:tailEnd type="none" w="med" len="med"/>
+                    </a:lnB>
+                    <a:solidFill>
+                      <a:srgbClr val="F2F4F6"/>
+                    </a:solidFill>
+                  </a:tcPr>
+                </a:tc>
+                <a:tc>
+                  <a:txBody>
+                    <a:bodyPr/>
+                    <a:lstStyle/>
+                    <a:p>
+                      <a:pPr algn="ctr" indent="0" marL="0">
+                        <a:buNone/>
+                      </a:pPr>
+                      <a:r>
+                        <a:rPr lang="en-US" sz="1000" dirty="0">
+                          <a:solidFill>
+                            <a:schemeClr val="tx1"/>
+                          </a:solidFill>
+                        </a:rPr>
+                        <a:t>€386 / €1,624 · 1.8</a:t>
+                      </a:r>
+                      <a:endParaRPr lang="en-US" sz="1000" dirty="0"/>
+                    </a:p>
+                  </a:txBody>
+                  <a:tcPr marL="91440" marR="91440" marT="45720" marB="45720" anchor="ctr">
+                    <a:lnL w="6350" cap="flat" cmpd="sng" algn="ctr">
+                      <a:solidFill>
+                        <a:srgbClr val="D6DEE5"/>
+                      </a:solidFill>
+                      <a:prstDash val="solid"/>
+                      <a:round/>
+                      <a:headEnd type="none" w="med" len="med"/>
+                      <a:tailEnd type="none" w="med" len="med"/>
+                    </a:lnL>
+                    <a:lnR w="6350" cap="flat" cmpd="sng" algn="ctr">
+                      <a:solidFill>
+                        <a:srgbClr val="D6DEE5"/>
+                      </a:solidFill>
+                      <a:prstDash val="solid"/>
+                      <a:round/>
+                      <a:headEnd type="none" w="med" len="med"/>
+                      <a:tailEnd type="none" w="med" len="med"/>
+                    </a:lnR>
+                    <a:lnT w="6350" cap="flat" cmpd="sng" algn="ctr">
+                      <a:solidFill>
+                        <a:srgbClr val="D6DEE5"/>
+                      </a:solidFill>
+                      <a:prstDash val="solid"/>
+                      <a:round/>
+                      <a:headEnd type="none" w="med" len="med"/>
+                      <a:tailEnd type="none" w="med" len="med"/>
+                    </a:lnT>
+                    <a:lnB w="6350" cap="flat" cmpd="sng" algn="ctr">
+                      <a:solidFill>
+                        <a:srgbClr val="D6DEE5"/>
+                      </a:solidFill>
+                      <a:prstDash val="solid"/>
+                      <a:round/>
+                      <a:headEnd type="none" w="med" len="med"/>
+                      <a:tailEnd type="none" w="med" len="med"/>
+                    </a:lnB>
+                    <a:solidFill>
+                      <a:srgbClr val="DCEFE8"/>
+                    </a:solidFill>
+                  </a:tcPr>
+                </a:tc>
+              </a:tr>
+              <a:tr h="329184">
+                <a:tc>
+                  <a:txBody>
+                    <a:bodyPr/>
+                    <a:lstStyle/>
+                    <a:p>
+                      <a:pPr indent="0" marL="0">
+                        <a:buNone/>
+                      </a:pPr>
+                      <a:r>
+                        <a:rPr lang="en-US" sz="1000" dirty="0">
+                          <a:solidFill>
+                            <a:schemeClr val="tx1"/>
+                          </a:solidFill>
+                        </a:rPr>
+                        <a:t>I1b Referrals (€1,000 bonus on hire)</a:t>
+                      </a:r>
+                      <a:endParaRPr lang="en-US" sz="1000" dirty="0"/>
+                    </a:p>
+                  </a:txBody>
+                  <a:tcPr marL="91440" marR="91440" marT="45720" marB="45720" anchor="ctr">
+                    <a:lnL w="6350" cap="flat" cmpd="sng" algn="ctr">
+                      <a:solidFill>
+                        <a:srgbClr val="D6DEE5"/>
+                      </a:solidFill>
+                      <a:prstDash val="solid"/>
+                      <a:round/>
+                      <a:headEnd type="none" w="med" len="med"/>
+                      <a:tailEnd type="none" w="med" len="med"/>
+                    </a:lnL>
+                    <a:lnR w="6350" cap="flat" cmpd="sng" algn="ctr">
+                      <a:solidFill>
+                        <a:srgbClr val="D6DEE5"/>
+                      </a:solidFill>
+                      <a:prstDash val="solid"/>
+                      <a:round/>
+                      <a:headEnd type="none" w="med" len="med"/>
+                      <a:tailEnd type="none" w="med" len="med"/>
+                    </a:lnR>
+                    <a:lnT w="6350" cap="flat" cmpd="sng" algn="ctr">
+                      <a:solidFill>
+                        <a:srgbClr val="D6DEE5"/>
+                      </a:solidFill>
+                      <a:prstDash val="solid"/>
+                      <a:round/>
+                      <a:headEnd type="none" w="med" len="med"/>
+                      <a:tailEnd type="none" w="med" len="med"/>
+                    </a:lnT>
+                    <a:lnB w="6350" cap="flat" cmpd="sng" algn="ctr">
+                      <a:solidFill>
+                        <a:srgbClr val="D6DEE5"/>
+                      </a:solidFill>
+                      <a:prstDash val="solid"/>
+                      <a:round/>
+                      <a:headEnd type="none" w="med" len="med"/>
+                      <a:tailEnd type="none" w="med" len="med"/>
+                    </a:lnB>
+                  </a:tcPr>
+                </a:tc>
+                <a:tc>
+                  <a:txBody>
+                    <a:bodyPr/>
+                    <a:lstStyle/>
+                    <a:p>
+                      <a:pPr algn="ctr" indent="0" marL="0">
+                        <a:buNone/>
+                      </a:pPr>
+                      <a:r>
+                        <a:rPr lang="en-US" sz="1000" dirty="0">
+                          <a:solidFill>
+                            <a:schemeClr val="tx1"/>
+                          </a:solidFill>
+                        </a:rPr>
+                        <a:t>€362 / €1,000 · 4.1</a:t>
+                      </a:r>
+                      <a:endParaRPr lang="en-US" sz="1000" dirty="0"/>
+                    </a:p>
+                  </a:txBody>
+                  <a:tcPr marL="91440" marR="91440" marT="45720" marB="45720" anchor="ctr">
+                    <a:lnL w="6350" cap="flat" cmpd="sng" algn="ctr">
+                      <a:solidFill>
+                        <a:srgbClr val="D6DEE5"/>
+                      </a:solidFill>
+                      <a:prstDash val="solid"/>
+                      <a:round/>
+                      <a:headEnd type="none" w="med" len="med"/>
+                      <a:tailEnd type="none" w="med" len="med"/>
+                    </a:lnL>
+                    <a:lnR w="6350" cap="flat" cmpd="sng" algn="ctr">
+                      <a:solidFill>
+                        <a:srgbClr val="D6DEE5"/>
+                      </a:solidFill>
+                      <a:prstDash val="solid"/>
+                      <a:round/>
+                      <a:headEnd type="none" w="med" len="med"/>
+                      <a:tailEnd type="none" w="med" len="med"/>
+                    </a:lnR>
+                    <a:lnT w="6350" cap="flat" cmpd="sng" algn="ctr">
+                      <a:solidFill>
+                        <a:srgbClr val="D6DEE5"/>
+                      </a:solidFill>
+                      <a:prstDash val="solid"/>
+                      <a:round/>
+                      <a:headEnd type="none" w="med" len="med"/>
+                      <a:tailEnd type="none" w="med" len="med"/>
+                    </a:lnT>
+                    <a:lnB w="6350" cap="flat" cmpd="sng" algn="ctr">
+                      <a:solidFill>
+                        <a:srgbClr val="D6DEE5"/>
+                      </a:solidFill>
+                      <a:prstDash val="solid"/>
+                      <a:round/>
+                      <a:headEnd type="none" w="med" len="med"/>
+                      <a:tailEnd type="none" w="med" len="med"/>
+                    </a:lnB>
+                    <a:solidFill>
+                      <a:srgbClr val="DCEFE8"/>
+                    </a:solidFill>
+                  </a:tcPr>
+                </a:tc>
+                <a:tc>
+                  <a:txBody>
+                    <a:bodyPr/>
+                    <a:lstStyle/>
+                    <a:p>
+                      <a:pPr algn="ctr" indent="0" marL="0">
+                        <a:buNone/>
+                      </a:pPr>
+                      <a:r>
+                        <a:rPr lang="en-US" sz="1000" dirty="0">
+                          <a:solidFill>
+                            <a:schemeClr val="tx1"/>
+                          </a:solidFill>
+                        </a:rPr>
+                        <a:t>€427 / €1,000 · –</a:t>
+                      </a:r>
+                      <a:endParaRPr lang="en-US" sz="1000" dirty="0"/>
+                    </a:p>
+                  </a:txBody>
+                  <a:tcPr marL="91440" marR="91440" marT="45720" marB="45720" anchor="ctr">
+                    <a:lnL w="6350" cap="flat" cmpd="sng" algn="ctr">
+                      <a:solidFill>
+                        <a:srgbClr val="D6DEE5"/>
+                      </a:solidFill>
+                      <a:prstDash val="solid"/>
+                      <a:round/>
+                      <a:headEnd type="none" w="med" len="med"/>
+                      <a:tailEnd type="none" w="med" len="med"/>
+                    </a:lnL>
+                    <a:lnR w="6350" cap="flat" cmpd="sng" algn="ctr">
+                      <a:solidFill>
+                        <a:srgbClr val="D6DEE5"/>
+                      </a:solidFill>
+                      <a:prstDash val="solid"/>
+                      <a:round/>
+                      <a:headEnd type="none" w="med" len="med"/>
+                      <a:tailEnd type="none" w="med" len="med"/>
+                    </a:lnR>
+                    <a:lnT w="6350" cap="flat" cmpd="sng" algn="ctr">
+                      <a:solidFill>
+                        <a:srgbClr val="D6DEE5"/>
+                      </a:solidFill>
+                      <a:prstDash val="solid"/>
+                      <a:round/>
+                      <a:headEnd type="none" w="med" len="med"/>
+                      <a:tailEnd type="none" w="med" len="med"/>
+                    </a:lnT>
+                    <a:lnB w="6350" cap="flat" cmpd="sng" algn="ctr">
+                      <a:solidFill>
+                        <a:srgbClr val="D6DEE5"/>
+                      </a:solidFill>
+                      <a:prstDash val="solid"/>
+                      <a:round/>
+                      <a:headEnd type="none" w="med" len="med"/>
+                      <a:tailEnd type="none" w="med" len="med"/>
+                    </a:lnB>
+                    <a:solidFill>
+                      <a:srgbClr val="F2F4F6"/>
+                    </a:solidFill>
+                  </a:tcPr>
+                </a:tc>
+                <a:tc>
+                  <a:txBody>
+                    <a:bodyPr/>
+                    <a:lstStyle/>
+                    <a:p>
+                      <a:pPr algn="ctr" indent="0" marL="0">
+                        <a:buNone/>
+                      </a:pPr>
+                      <a:r>
+                        <a:rPr lang="en-US" sz="1000" dirty="0">
+                          <a:solidFill>
+                            <a:schemeClr val="tx1"/>
+                          </a:solidFill>
+                        </a:rPr>
+                        <a:t>€326 / €1,000 · 1.5</a:t>
+                      </a:r>
+                      <a:endParaRPr lang="en-US" sz="1000" dirty="0"/>
+                    </a:p>
+                  </a:txBody>
+                  <a:tcPr marL="91440" marR="91440" marT="45720" marB="45720" anchor="ctr">
+                    <a:lnL w="6350" cap="flat" cmpd="sng" algn="ctr">
+                      <a:solidFill>
+                        <a:srgbClr val="D6DEE5"/>
+                      </a:solidFill>
+                      <a:prstDash val="solid"/>
+                      <a:round/>
+                      <a:headEnd type="none" w="med" len="med"/>
+                      <a:tailEnd type="none" w="med" len="med"/>
+                    </a:lnL>
+                    <a:lnR w="6350" cap="flat" cmpd="sng" algn="ctr">
+                      <a:solidFill>
+                        <a:srgbClr val="D6DEE5"/>
+                      </a:solidFill>
+                      <a:prstDash val="solid"/>
+                      <a:round/>
+                      <a:headEnd type="none" w="med" len="med"/>
+                      <a:tailEnd type="none" w="med" len="med"/>
+                    </a:lnR>
+                    <a:lnT w="6350" cap="flat" cmpd="sng" algn="ctr">
+                      <a:solidFill>
+                        <a:srgbClr val="D6DEE5"/>
+                      </a:solidFill>
+                      <a:prstDash val="solid"/>
+                      <a:round/>
+                      <a:headEnd type="none" w="med" len="med"/>
+                      <a:tailEnd type="none" w="med" len="med"/>
+                    </a:lnT>
+                    <a:lnB w="6350" cap="flat" cmpd="sng" algn="ctr">
+                      <a:solidFill>
+                        <a:srgbClr val="D6DEE5"/>
+                      </a:solidFill>
+                      <a:prstDash val="solid"/>
+                      <a:round/>
+                      <a:headEnd type="none" w="med" len="med"/>
+                      <a:tailEnd type="none" w="med" len="med"/>
+                    </a:lnB>
+                    <a:solidFill>
+                      <a:srgbClr val="DCEFE8"/>
+                    </a:solidFill>
+                  </a:tcPr>
+                </a:tc>
+                <a:tc>
+                  <a:txBody>
+                    <a:bodyPr/>
+                    <a:lstStyle/>
+                    <a:p>
+                      <a:pPr algn="ctr" indent="0" marL="0">
+                        <a:buNone/>
+                      </a:pPr>
+                      <a:r>
+                        <a:rPr lang="en-US" sz="1000" dirty="0">
+                          <a:solidFill>
+                            <a:schemeClr val="tx1"/>
+                          </a:solidFill>
+                        </a:rPr>
+                        <a:t>€274 / €1,000 · 1.0</a:t>
+                      </a:r>
+                      <a:endParaRPr lang="en-US" sz="1000" dirty="0"/>
+                    </a:p>
+                  </a:txBody>
+                  <a:tcPr marL="91440" marR="91440" marT="45720" marB="45720" anchor="ctr">
+                    <a:lnL w="6350" cap="flat" cmpd="sng" algn="ctr">
+                      <a:solidFill>
+                        <a:srgbClr val="D6DEE5"/>
+                      </a:solidFill>
+                      <a:prstDash val="solid"/>
+                      <a:round/>
+                      <a:headEnd type="none" w="med" len="med"/>
+                      <a:tailEnd type="none" w="med" len="med"/>
+                    </a:lnL>
+                    <a:lnR w="6350" cap="flat" cmpd="sng" algn="ctr">
+                      <a:solidFill>
+                        <a:srgbClr val="D6DEE5"/>
+                      </a:solidFill>
+                      <a:prstDash val="solid"/>
+                      <a:round/>
+                      <a:headEnd type="none" w="med" len="med"/>
+                      <a:tailEnd type="none" w="med" len="med"/>
+                    </a:lnR>
+                    <a:lnT w="6350" cap="flat" cmpd="sng" algn="ctr">
+                      <a:solidFill>
+                        <a:srgbClr val="D6DEE5"/>
+                      </a:solidFill>
+                      <a:prstDash val="solid"/>
+                      <a:round/>
+                      <a:headEnd type="none" w="med" len="med"/>
+                      <a:tailEnd type="none" w="med" len="med"/>
+                    </a:lnT>
+                    <a:lnB w="6350" cap="flat" cmpd="sng" algn="ctr">
+                      <a:solidFill>
+                        <a:srgbClr val="D6DEE5"/>
+                      </a:solidFill>
+                      <a:prstDash val="solid"/>
+                      <a:round/>
+                      <a:headEnd type="none" w="med" len="med"/>
+                      <a:tailEnd type="none" w="med" len="med"/>
+                    </a:lnB>
+                    <a:solidFill>
+                      <a:srgbClr val="DCEFE8"/>
+                    </a:solidFill>
+                  </a:tcPr>
+                </a:tc>
+              </a:tr>
+              <a:tr h="329184">
+                <a:tc>
+                  <a:txBody>
+                    <a:bodyPr/>
+                    <a:lstStyle/>
+                    <a:p>
+                      <a:pPr indent="0" marL="0">
+                        <a:buNone/>
+                      </a:pPr>
+                      <a:r>
+                        <a:rPr lang="en-US" sz="1000" dirty="0">
+                          <a:solidFill>
+                            <a:schemeClr val="tx1"/>
+                          </a:solidFill>
+                        </a:rPr>
+                        <a:t>LinkedIn (PLC/TIA and Meister profiles)</a:t>
+                      </a:r>
+                      <a:endParaRPr lang="en-US" sz="1000" dirty="0"/>
+                    </a:p>
+                  </a:txBody>
+                  <a:tcPr marL="91440" marR="91440" marT="45720" marB="45720" anchor="ctr">
+                    <a:lnL w="6350" cap="flat" cmpd="sng" algn="ctr">
+                      <a:solidFill>
+                        <a:srgbClr val="D6DEE5"/>
+                      </a:solidFill>
+                      <a:prstDash val="solid"/>
+                      <a:round/>
+                      <a:headEnd type="none" w="med" len="med"/>
+                      <a:tailEnd type="none" w="med" len="med"/>
+                    </a:lnL>
+                    <a:lnR w="6350" cap="flat" cmpd="sng" algn="ctr">
+                      <a:solidFill>
+                        <a:srgbClr val="D6DEE5"/>
+                      </a:solidFill>
+                      <a:prstDash val="solid"/>
+                      <a:round/>
+                      <a:headEnd type="none" w="med" len="med"/>
+                      <a:tailEnd type="none" w="med" len="med"/>
+                    </a:lnR>
+                    <a:lnT w="6350" cap="flat" cmpd="sng" algn="ctr">
+                      <a:solidFill>
+                        <a:srgbClr val="D6DEE5"/>
+                      </a:solidFill>
+                      <a:prstDash val="solid"/>
+                      <a:round/>
+                      <a:headEnd type="none" w="med" len="med"/>
+                      <a:tailEnd type="none" w="med" len="med"/>
+                    </a:lnT>
+                    <a:lnB w="6350" cap="flat" cmpd="sng" algn="ctr">
+                      <a:solidFill>
+                        <a:srgbClr val="D6DEE5"/>
+                      </a:solidFill>
+                      <a:prstDash val="solid"/>
+                      <a:round/>
+                      <a:headEnd type="none" w="med" len="med"/>
+                      <a:tailEnd type="none" w="med" len="med"/>
+                    </a:lnB>
+                  </a:tcPr>
+                </a:tc>
+                <a:tc>
+                  <a:txBody>
+                    <a:bodyPr/>
+                    <a:lstStyle/>
+                    <a:p>
+                      <a:pPr algn="ctr" indent="0" marL="0">
+                        <a:buNone/>
+                      </a:pPr>
+                      <a:r>
+                        <a:rPr lang="en-US" sz="1000" dirty="0">
+                          <a:solidFill>
+                            <a:schemeClr val="accent4"/>
+                          </a:solidFill>
+                        </a:rPr>
+                        <a:t>–</a:t>
+                      </a:r>
+                      <a:endParaRPr lang="en-US" sz="1000" dirty="0"/>
+                    </a:p>
+                  </a:txBody>
+                  <a:tcPr marL="91440" marR="91440" marT="45720" marB="45720" anchor="ctr">
+                    <a:lnL w="6350" cap="flat" cmpd="sng" algn="ctr">
+                      <a:solidFill>
+                        <a:srgbClr val="D6DEE5"/>
+                      </a:solidFill>
+                      <a:prstDash val="solid"/>
+                      <a:round/>
+                      <a:headEnd type="none" w="med" len="med"/>
+                      <a:tailEnd type="none" w="med" len="med"/>
+                    </a:lnL>
+                    <a:lnR w="6350" cap="flat" cmpd="sng" algn="ctr">
+                      <a:solidFill>
+                        <a:srgbClr val="D6DEE5"/>
+                      </a:solidFill>
+                      <a:prstDash val="solid"/>
+                      <a:round/>
+                      <a:headEnd type="none" w="med" len="med"/>
+                      <a:tailEnd type="none" w="med" len="med"/>
+                    </a:lnR>
+                    <a:lnT w="6350" cap="flat" cmpd="sng" algn="ctr">
+                      <a:solidFill>
+                        <a:srgbClr val="D6DEE5"/>
+                      </a:solidFill>
+                      <a:prstDash val="solid"/>
+                      <a:round/>
+                      <a:headEnd type="none" w="med" len="med"/>
+                      <a:tailEnd type="none" w="med" len="med"/>
+                    </a:lnT>
+                    <a:lnB w="6350" cap="flat" cmpd="sng" algn="ctr">
+                      <a:solidFill>
+                        <a:srgbClr val="D6DEE5"/>
+                      </a:solidFill>
+                      <a:prstDash val="solid"/>
+                      <a:round/>
+                      <a:headEnd type="none" w="med" len="med"/>
+                      <a:tailEnd type="none" w="med" len="med"/>
+                    </a:lnB>
+                  </a:tcPr>
+                </a:tc>
+                <a:tc>
+                  <a:txBody>
+                    <a:bodyPr/>
+                    <a:lstStyle/>
+                    <a:p>
+                      <a:pPr algn="ctr" indent="0" marL="0">
+                        <a:buNone/>
+                      </a:pPr>
+                      <a:r>
+                        <a:rPr lang="en-US" sz="1000" dirty="0">
+                          <a:solidFill>
+                            <a:schemeClr val="accent4"/>
+                          </a:solidFill>
+                        </a:rPr>
+                        <a:t>–</a:t>
+                      </a:r>
+                      <a:endParaRPr lang="en-US" sz="1000" dirty="0"/>
+                    </a:p>
+                  </a:txBody>
+                  <a:tcPr marL="91440" marR="91440" marT="45720" marB="45720" anchor="ctr">
+                    <a:lnL w="6350" cap="flat" cmpd="sng" algn="ctr">
+                      <a:solidFill>
+                        <a:srgbClr val="D6DEE5"/>
+                      </a:solidFill>
+                      <a:prstDash val="solid"/>
+                      <a:round/>
+                      <a:headEnd type="none" w="med" len="med"/>
+                      <a:tailEnd type="none" w="med" len="med"/>
+                    </a:lnL>
+                    <a:lnR w="6350" cap="flat" cmpd="sng" algn="ctr">
+                      <a:solidFill>
+                        <a:srgbClr val="D6DEE5"/>
+                      </a:solidFill>
+                      <a:prstDash val="solid"/>
+                      <a:round/>
+                      <a:headEnd type="none" w="med" len="med"/>
+                      <a:tailEnd type="none" w="med" len="med"/>
+                    </a:lnR>
+                    <a:lnT w="6350" cap="flat" cmpd="sng" algn="ctr">
+                      <a:solidFill>
+                        <a:srgbClr val="D6DEE5"/>
+                      </a:solidFill>
+                      <a:prstDash val="solid"/>
+                      <a:round/>
+                      <a:headEnd type="none" w="med" len="med"/>
+                      <a:tailEnd type="none" w="med" len="med"/>
+                    </a:lnT>
+                    <a:lnB w="6350" cap="flat" cmpd="sng" algn="ctr">
+                      <a:solidFill>
+                        <a:srgbClr val="D6DEE5"/>
+                      </a:solidFill>
+                      <a:prstDash val="solid"/>
+                      <a:round/>
+                      <a:headEnd type="none" w="med" len="med"/>
+                      <a:tailEnd type="none" w="med" len="med"/>
+                    </a:lnB>
+                  </a:tcPr>
+                </a:tc>
+                <a:tc>
+                  <a:txBody>
+                    <a:bodyPr/>
+                    <a:lstStyle/>
+                    <a:p>
+                      <a:pPr algn="ctr" indent="0" marL="0">
+                        <a:buNone/>
+                      </a:pPr>
+                      <a:r>
+                        <a:rPr lang="en-US" sz="1000" dirty="0">
+                          <a:solidFill>
+                            <a:schemeClr val="tx1"/>
+                          </a:solidFill>
+                        </a:rPr>
+                        <a:t>€384 / €1,354 · 8.6</a:t>
+                      </a:r>
+                      <a:endParaRPr lang="en-US" sz="1000" dirty="0"/>
+                    </a:p>
+                  </a:txBody>
+                  <a:tcPr marL="91440" marR="91440" marT="45720" marB="45720" anchor="ctr">
+                    <a:lnL w="6350" cap="flat" cmpd="sng" algn="ctr">
+                      <a:solidFill>
+                        <a:srgbClr val="D6DEE5"/>
+                      </a:solidFill>
+                      <a:prstDash val="solid"/>
+                      <a:round/>
+                      <a:headEnd type="none" w="med" len="med"/>
+                      <a:tailEnd type="none" w="med" len="med"/>
+                    </a:lnL>
+                    <a:lnR w="6350" cap="flat" cmpd="sng" algn="ctr">
+                      <a:solidFill>
+                        <a:srgbClr val="D6DEE5"/>
+                      </a:solidFill>
+                      <a:prstDash val="solid"/>
+                      <a:round/>
+                      <a:headEnd type="none" w="med" len="med"/>
+                      <a:tailEnd type="none" w="med" len="med"/>
+                    </a:lnR>
+                    <a:lnT w="6350" cap="flat" cmpd="sng" algn="ctr">
+                      <a:solidFill>
+                        <a:srgbClr val="D6DEE5"/>
+                      </a:solidFill>
+                      <a:prstDash val="solid"/>
+                      <a:round/>
+                      <a:headEnd type="none" w="med" len="med"/>
+                      <a:tailEnd type="none" w="med" len="med"/>
+                    </a:lnT>
+                    <a:lnB w="6350" cap="flat" cmpd="sng" algn="ctr">
+                      <a:solidFill>
+                        <a:srgbClr val="D6DEE5"/>
+                      </a:solidFill>
+                      <a:prstDash val="solid"/>
+                      <a:round/>
+                      <a:headEnd type="none" w="med" len="med"/>
+                      <a:tailEnd type="none" w="med" len="med"/>
+                    </a:lnB>
+                    <a:solidFill>
+                      <a:srgbClr val="DCEFE8"/>
+                    </a:solidFill>
+                  </a:tcPr>
+                </a:tc>
+                <a:tc>
+                  <a:txBody>
+                    <a:bodyPr/>
+                    <a:lstStyle/>
+                    <a:p>
+                      <a:pPr algn="ctr" indent="0" marL="0">
+                        <a:buNone/>
+                      </a:pPr>
+                      <a:r>
+                        <a:rPr lang="en-US" sz="1000" dirty="0">
+                          <a:solidFill>
+                            <a:schemeClr val="tx1"/>
+                          </a:solidFill>
+                        </a:rPr>
+                        <a:t>€480 / €2,017 · 4.5</a:t>
+                      </a:r>
+                      <a:endParaRPr lang="en-US" sz="1000" dirty="0"/>
+                    </a:p>
+                  </a:txBody>
+                  <a:tcPr marL="91440" marR="91440" marT="45720" marB="45720" anchor="ctr">
+                    <a:lnL w="6350" cap="flat" cmpd="sng" algn="ctr">
+                      <a:solidFill>
+                        <a:srgbClr val="D6DEE5"/>
+                      </a:solidFill>
+                      <a:prstDash val="solid"/>
+                      <a:round/>
+                      <a:headEnd type="none" w="med" len="med"/>
+                      <a:tailEnd type="none" w="med" len="med"/>
+                    </a:lnL>
+                    <a:lnR w="6350" cap="flat" cmpd="sng" algn="ctr">
+                      <a:solidFill>
+                        <a:srgbClr val="D6DEE5"/>
+                      </a:solidFill>
+                      <a:prstDash val="solid"/>
+                      <a:round/>
+                      <a:headEnd type="none" w="med" len="med"/>
+                      <a:tailEnd type="none" w="med" len="med"/>
+                    </a:lnR>
+                    <a:lnT w="6350" cap="flat" cmpd="sng" algn="ctr">
+                      <a:solidFill>
+                        <a:srgbClr val="D6DEE5"/>
+                      </a:solidFill>
+                      <a:prstDash val="solid"/>
+                      <a:round/>
+                      <a:headEnd type="none" w="med" len="med"/>
+                      <a:tailEnd type="none" w="med" len="med"/>
+                    </a:lnT>
+                    <a:lnB w="6350" cap="flat" cmpd="sng" algn="ctr">
+                      <a:solidFill>
+                        <a:srgbClr val="D6DEE5"/>
+                      </a:solidFill>
+                      <a:prstDash val="solid"/>
+                      <a:round/>
+                      <a:headEnd type="none" w="med" len="med"/>
+                      <a:tailEnd type="none" w="med" len="med"/>
+                    </a:lnB>
+                    <a:solidFill>
+                      <a:srgbClr val="DCEFE8"/>
+                    </a:solidFill>
+                  </a:tcPr>
+                </a:tc>
+              </a:tr>
+              <a:tr h="329184">
+                <a:tc>
+                  <a:txBody>
+                    <a:bodyPr/>
+                    <a:lstStyle/>
+                    <a:p>
+                      <a:pPr indent="0" marL="0">
+                        <a:buNone/>
+                      </a:pPr>
+                      <a:r>
+                        <a:rPr lang="en-US" sz="1000" dirty="0">
+                          <a:solidFill>
+                            <a:schemeClr val="tx1"/>
+                          </a:solidFill>
+                        </a:rPr>
                         <a:t>Meta lead ads (passive blue-collar reach)</a:t>
                       </a:r>
                       <a:endParaRPr lang="en-US" sz="1000" dirty="0"/>
@@ -14815,7 +15721,7 @@
                             <a:schemeClr val="tx1"/>
                           </a:solidFill>
                         </a:rPr>
-                        <a:t>€360 / €1,119 · 0.7 T</a:t>
+                        <a:t>€1,680 / €5,333 · 0.1 T</a:t>
                       </a:r>
                       <a:endParaRPr lang="en-US" sz="1000" dirty="0"/>
                     </a:p>
@@ -14876,7 +15782,7 @@
                             <a:schemeClr val="tx1"/>
                           </a:solidFill>
                         </a:rPr>
-                        <a:t>€100 / €247 · 3.0 T</a:t>
+                        <a:t>€700 / €1,886 · 0.4 T</a:t>
                       </a:r>
                       <a:endParaRPr lang="en-US" sz="1000" dirty="0"/>
                     </a:p>
@@ -15055,7 +15961,7 @@
                             <a:schemeClr val="tx1"/>
                           </a:solidFill>
                         </a:rPr>
-                        <a:t>Programmatic (Indeed, Jooble, Talent.com…)</a:t>
+                        <a:t>Google Search (high intent, low volume)</a:t>
                       </a:r>
                       <a:endParaRPr lang="en-US" sz="1000" dirty="0"/>
                     </a:p>
@@ -15113,7 +16019,68 @@
                             <a:schemeClr val="tx1"/>
                           </a:solidFill>
                         </a:rPr>
-                        <a:t>€476 / €1,480 · 0.5 T</a:t>
+                        <a:t>€1,193 / €3,788 · 3.8</a:t>
+                      </a:r>
+                      <a:endParaRPr lang="en-US" sz="1000" dirty="0"/>
+                    </a:p>
+                  </a:txBody>
+                  <a:tcPr marL="91440" marR="91440" marT="45720" marB="45720" anchor="ctr">
+                    <a:lnL w="6350" cap="flat" cmpd="sng" algn="ctr">
+                      <a:solidFill>
+                        <a:srgbClr val="D6DEE5"/>
+                      </a:solidFill>
+                      <a:prstDash val="solid"/>
+                      <a:round/>
+                      <a:headEnd type="none" w="med" len="med"/>
+                      <a:tailEnd type="none" w="med" len="med"/>
+                    </a:lnL>
+                    <a:lnR w="6350" cap="flat" cmpd="sng" algn="ctr">
+                      <a:solidFill>
+                        <a:srgbClr val="D6DEE5"/>
+                      </a:solidFill>
+                      <a:prstDash val="solid"/>
+                      <a:round/>
+                      <a:headEnd type="none" w="med" len="med"/>
+                      <a:tailEnd type="none" w="med" len="med"/>
+                    </a:lnR>
+                    <a:lnT w="6350" cap="flat" cmpd="sng" algn="ctr">
+                      <a:solidFill>
+                        <a:srgbClr val="D6DEE5"/>
+                      </a:solidFill>
+                      <a:prstDash val="solid"/>
+                      <a:round/>
+                      <a:headEnd type="none" w="med" len="med"/>
+                      <a:tailEnd type="none" w="med" len="med"/>
+                    </a:lnT>
+                    <a:lnB w="6350" cap="flat" cmpd="sng" algn="ctr">
+                      <a:solidFill>
+                        <a:srgbClr val="D6DEE5"/>
+                      </a:solidFill>
+                      <a:prstDash val="solid"/>
+                      <a:round/>
+                      <a:headEnd type="none" w="med" len="med"/>
+                      <a:tailEnd type="none" w="med" len="med"/>
+                    </a:lnB>
+                    <a:solidFill>
+                      <a:srgbClr val="DCEFE8"/>
+                    </a:solidFill>
+                  </a:tcPr>
+                </a:tc>
+                <a:tc>
+                  <a:txBody>
+                    <a:bodyPr/>
+                    <a:lstStyle/>
+                    <a:p>
+                      <a:pPr algn="ctr" indent="0" marL="0">
+                        <a:buNone/>
+                      </a:pPr>
+                      <a:r>
+                        <a:rPr lang="en-US" sz="1000" dirty="0">
+                          <a:solidFill>
+                            <a:schemeClr val="tx1"/>
+                          </a:solidFill>
+                        </a:rPr>
+                        <a:t>€716 / €1,929 · 0.4 T</a:t>
                       </a:r>
                       <a:endParaRPr lang="en-US" sz="1000" dirty="0"/>
                     </a:p>
@@ -15174,7 +16141,7 @@
                             <a:schemeClr val="tx1"/>
                           </a:solidFill>
                         </a:rPr>
-                        <a:t>€109 / €269 · 2.8 T</a:t>
+                        <a:t>€1,193 / €4,209 · 0.2 T</a:t>
                       </a:r>
                       <a:endParaRPr lang="en-US" sz="1000" dirty="0"/>
                     </a:p>
@@ -15235,7 +16202,7 @@
                             <a:schemeClr val="tx1"/>
                           </a:solidFill>
                         </a:rPr>
-                        <a:t>€375 / €1,282 · 0.6 T</a:t>
+                        <a:t>€1,492 / €6,268 · 0.1 T</a:t>
                       </a:r>
                       <a:endParaRPr lang="en-US" sz="1000" dirty="0"/>
                     </a:p>
@@ -15282,6 +16249,66 @@
                     </a:solidFill>
                   </a:tcPr>
                 </a:tc>
+              </a:tr>
+              <a:tr h="329184">
+                <a:tc>
+                  <a:txBody>
+                    <a:bodyPr/>
+                    <a:lstStyle/>
+                    <a:p>
+                      <a:pPr indent="0" marL="0">
+                        <a:buNone/>
+                      </a:pPr>
+                      <a:r>
+                        <a:rPr lang="en-US" sz="1000" dirty="0">
+                          <a:solidFill>
+                            <a:schemeClr val="tx1"/>
+                          </a:solidFill>
+                        </a:rPr>
+                        <a:t>Programmatic (Indeed, Jooble, Talent.com…)</a:t>
+                      </a:r>
+                      <a:endParaRPr lang="en-US" sz="1000" dirty="0"/>
+                    </a:p>
+                  </a:txBody>
+                  <a:tcPr marL="91440" marR="91440" marT="45720" marB="45720" anchor="ctr">
+                    <a:lnL w="6350" cap="flat" cmpd="sng" algn="ctr">
+                      <a:solidFill>
+                        <a:srgbClr val="D6DEE5"/>
+                      </a:solidFill>
+                      <a:prstDash val="solid"/>
+                      <a:round/>
+                      <a:headEnd type="none" w="med" len="med"/>
+                      <a:tailEnd type="none" w="med" len="med"/>
+                    </a:lnL>
+                    <a:lnR w="6350" cap="flat" cmpd="sng" algn="ctr">
+                      <a:solidFill>
+                        <a:srgbClr val="D6DEE5"/>
+                      </a:solidFill>
+                      <a:prstDash val="solid"/>
+                      <a:round/>
+                      <a:headEnd type="none" w="med" len="med"/>
+                      <a:tailEnd type="none" w="med" len="med"/>
+                    </a:lnR>
+                    <a:lnT w="6350" cap="flat" cmpd="sng" algn="ctr">
+                      <a:solidFill>
+                        <a:srgbClr val="D6DEE5"/>
+                      </a:solidFill>
+                      <a:prstDash val="solid"/>
+                      <a:round/>
+                      <a:headEnd type="none" w="med" len="med"/>
+                      <a:tailEnd type="none" w="med" len="med"/>
+                    </a:lnT>
+                    <a:lnB w="6350" cap="flat" cmpd="sng" algn="ctr">
+                      <a:solidFill>
+                        <a:srgbClr val="D6DEE5"/>
+                      </a:solidFill>
+                      <a:prstDash val="solid"/>
+                      <a:round/>
+                      <a:headEnd type="none" w="med" len="med"/>
+                      <a:tailEnd type="none" w="med" len="med"/>
+                    </a:lnB>
+                  </a:tcPr>
+                </a:tc>
                 <a:tc>
                   <a:txBody>
                     <a:bodyPr/>
@@ -15296,7 +16323,7 @@
                             <a:schemeClr val="tx1"/>
                           </a:solidFill>
                         </a:rPr>
-                        <a:t>€425 / €1,587 · 0.5 T</a:t>
+                        <a:t>€1,342 / €4,259 · 0.2 T</a:t>
                       </a:r>
                       <a:endParaRPr lang="en-US" sz="1000" dirty="0"/>
                     </a:p>
@@ -15343,6 +16370,189 @@
                     </a:solidFill>
                   </a:tcPr>
                 </a:tc>
+                <a:tc>
+                  <a:txBody>
+                    <a:bodyPr/>
+                    <a:lstStyle/>
+                    <a:p>
+                      <a:pPr algn="ctr" indent="0" marL="0">
+                        <a:buNone/>
+                      </a:pPr>
+                      <a:r>
+                        <a:rPr lang="en-US" sz="1000" dirty="0">
+                          <a:solidFill>
+                            <a:schemeClr val="tx1"/>
+                          </a:solidFill>
+                        </a:rPr>
+                        <a:t>€732 / €1,971 · 0.4 T</a:t>
+                      </a:r>
+                      <a:endParaRPr lang="en-US" sz="1000" dirty="0"/>
+                    </a:p>
+                  </a:txBody>
+                  <a:tcPr marL="91440" marR="91440" marT="45720" marB="45720" anchor="ctr">
+                    <a:lnL w="6350" cap="flat" cmpd="sng" algn="ctr">
+                      <a:solidFill>
+                        <a:srgbClr val="D6DEE5"/>
+                      </a:solidFill>
+                      <a:prstDash val="solid"/>
+                      <a:round/>
+                      <a:headEnd type="none" w="med" len="med"/>
+                      <a:tailEnd type="none" w="med" len="med"/>
+                    </a:lnL>
+                    <a:lnR w="6350" cap="flat" cmpd="sng" algn="ctr">
+                      <a:solidFill>
+                        <a:srgbClr val="D6DEE5"/>
+                      </a:solidFill>
+                      <a:prstDash val="solid"/>
+                      <a:round/>
+                      <a:headEnd type="none" w="med" len="med"/>
+                      <a:tailEnd type="none" w="med" len="med"/>
+                    </a:lnR>
+                    <a:lnT w="6350" cap="flat" cmpd="sng" algn="ctr">
+                      <a:solidFill>
+                        <a:srgbClr val="D6DEE5"/>
+                      </a:solidFill>
+                      <a:prstDash val="solid"/>
+                      <a:round/>
+                      <a:headEnd type="none" w="med" len="med"/>
+                      <a:tailEnd type="none" w="med" len="med"/>
+                    </a:lnT>
+                    <a:lnB w="6350" cap="flat" cmpd="sng" algn="ctr">
+                      <a:solidFill>
+                        <a:srgbClr val="D6DEE5"/>
+                      </a:solidFill>
+                      <a:prstDash val="solid"/>
+                      <a:round/>
+                      <a:headEnd type="none" w="med" len="med"/>
+                      <a:tailEnd type="none" w="med" len="med"/>
+                    </a:lnB>
+                    <a:solidFill>
+                      <a:srgbClr val="FBEBC8"/>
+                    </a:solidFill>
+                  </a:tcPr>
+                </a:tc>
+                <a:tc>
+                  <a:txBody>
+                    <a:bodyPr/>
+                    <a:lstStyle/>
+                    <a:p>
+                      <a:pPr algn="ctr" indent="0" marL="0">
+                        <a:buNone/>
+                      </a:pPr>
+                      <a:r>
+                        <a:rPr lang="en-US" sz="1000" dirty="0">
+                          <a:solidFill>
+                            <a:schemeClr val="tx1"/>
+                          </a:solidFill>
+                        </a:rPr>
+                        <a:t>€1,342 / €4,733 · 0.2 T</a:t>
+                      </a:r>
+                      <a:endParaRPr lang="en-US" sz="1000" dirty="0"/>
+                    </a:p>
+                  </a:txBody>
+                  <a:tcPr marL="91440" marR="91440" marT="45720" marB="45720" anchor="ctr">
+                    <a:lnL w="6350" cap="flat" cmpd="sng" algn="ctr">
+                      <a:solidFill>
+                        <a:srgbClr val="D6DEE5"/>
+                      </a:solidFill>
+                      <a:prstDash val="solid"/>
+                      <a:round/>
+                      <a:headEnd type="none" w="med" len="med"/>
+                      <a:tailEnd type="none" w="med" len="med"/>
+                    </a:lnL>
+                    <a:lnR w="6350" cap="flat" cmpd="sng" algn="ctr">
+                      <a:solidFill>
+                        <a:srgbClr val="D6DEE5"/>
+                      </a:solidFill>
+                      <a:prstDash val="solid"/>
+                      <a:round/>
+                      <a:headEnd type="none" w="med" len="med"/>
+                      <a:tailEnd type="none" w="med" len="med"/>
+                    </a:lnR>
+                    <a:lnT w="6350" cap="flat" cmpd="sng" algn="ctr">
+                      <a:solidFill>
+                        <a:srgbClr val="D6DEE5"/>
+                      </a:solidFill>
+                      <a:prstDash val="solid"/>
+                      <a:round/>
+                      <a:headEnd type="none" w="med" len="med"/>
+                      <a:tailEnd type="none" w="med" len="med"/>
+                    </a:lnT>
+                    <a:lnB w="6350" cap="flat" cmpd="sng" algn="ctr">
+                      <a:solidFill>
+                        <a:srgbClr val="D6DEE5"/>
+                      </a:solidFill>
+                      <a:prstDash val="solid"/>
+                      <a:round/>
+                      <a:headEnd type="none" w="med" len="med"/>
+                      <a:tailEnd type="none" w="med" len="med"/>
+                    </a:lnB>
+                    <a:solidFill>
+                      <a:srgbClr val="FBEBC8"/>
+                    </a:solidFill>
+                  </a:tcPr>
+                </a:tc>
+                <a:tc>
+                  <a:txBody>
+                    <a:bodyPr/>
+                    <a:lstStyle/>
+                    <a:p>
+                      <a:pPr algn="ctr" indent="0" marL="0">
+                        <a:buNone/>
+                      </a:pPr>
+                      <a:r>
+                        <a:rPr lang="en-US" sz="1000" dirty="0">
+                          <a:solidFill>
+                            <a:schemeClr val="tx1"/>
+                          </a:solidFill>
+                        </a:rPr>
+                        <a:t>€1,610 / €6,765 · 0.1 T</a:t>
+                      </a:r>
+                      <a:endParaRPr lang="en-US" sz="1000" dirty="0"/>
+                    </a:p>
+                  </a:txBody>
+                  <a:tcPr marL="91440" marR="91440" marT="45720" marB="45720" anchor="ctr">
+                    <a:lnL w="6350" cap="flat" cmpd="sng" algn="ctr">
+                      <a:solidFill>
+                        <a:srgbClr val="D6DEE5"/>
+                      </a:solidFill>
+                      <a:prstDash val="solid"/>
+                      <a:round/>
+                      <a:headEnd type="none" w="med" len="med"/>
+                      <a:tailEnd type="none" w="med" len="med"/>
+                    </a:lnL>
+                    <a:lnR w="6350" cap="flat" cmpd="sng" algn="ctr">
+                      <a:solidFill>
+                        <a:srgbClr val="D6DEE5"/>
+                      </a:solidFill>
+                      <a:prstDash val="solid"/>
+                      <a:round/>
+                      <a:headEnd type="none" w="med" len="med"/>
+                      <a:tailEnd type="none" w="med" len="med"/>
+                    </a:lnR>
+                    <a:lnT w="6350" cap="flat" cmpd="sng" algn="ctr">
+                      <a:solidFill>
+                        <a:srgbClr val="D6DEE5"/>
+                      </a:solidFill>
+                      <a:prstDash val="solid"/>
+                      <a:round/>
+                      <a:headEnd type="none" w="med" len="med"/>
+                      <a:tailEnd type="none" w="med" len="med"/>
+                    </a:lnT>
+                    <a:lnB w="6350" cap="flat" cmpd="sng" algn="ctr">
+                      <a:solidFill>
+                        <a:srgbClr val="D6DEE5"/>
+                      </a:solidFill>
+                      <a:prstDash val="solid"/>
+                      <a:round/>
+                      <a:headEnd type="none" w="med" len="med"/>
+                      <a:tailEnd type="none" w="med" len="med"/>
+                    </a:lnB>
+                    <a:solidFill>
+                      <a:srgbClr val="FBEBC8"/>
+                    </a:solidFill>
+                  </a:tcPr>
+                </a:tc>
               </a:tr>
               <a:tr h="329184">
                 <a:tc>
@@ -15359,7 +16569,7 @@
                             <a:schemeClr val="tx1"/>
                           </a:solidFill>
                         </a:rPr>
-                        <a:t>Google Search (high intent, low volume)</a:t>
+                        <a:t>I2 Handwerk → Industrie (new pool)</a:t>
                       </a:r>
                       <a:endParaRPr lang="en-US" sz="1000" dirty="0"/>
                     </a:p>
@@ -15417,7 +16627,7 @@
                             <a:schemeClr val="tx1"/>
                           </a:solidFill>
                         </a:rPr>
-                        <a:t>€210 / €651 · 3.9</a:t>
+                        <a:t>€560 / €2,349 · 9.5</a:t>
                       </a:r>
                       <a:endParaRPr lang="en-US" sz="1000" dirty="0"/>
                     </a:p>
@@ -15475,10 +16685,10 @@
                       <a:r>
                         <a:rPr lang="en-US" sz="1000" dirty="0">
                           <a:solidFill>
-                            <a:schemeClr val="tx1"/>
-                          </a:solidFill>
-                        </a:rPr>
-                        <a:t>€126 / €310 · 2.4 T</a:t>
+                            <a:schemeClr val="accent4"/>
+                          </a:solidFill>
+                        </a:rPr>
+                        <a:t>–</a:t>
                       </a:r>
                       <a:endParaRPr lang="en-US" sz="1000" dirty="0"/>
                     </a:p>
@@ -15520,9 +16730,6 @@
                       <a:headEnd type="none" w="med" len="med"/>
                       <a:tailEnd type="none" w="med" len="med"/>
                     </a:lnB>
-                    <a:solidFill>
-                      <a:srgbClr val="FBEBC8"/>
-                    </a:solidFill>
                   </a:tcPr>
                 </a:tc>
                 <a:tc>
@@ -15536,10 +16743,10 @@
                       <a:r>
                         <a:rPr lang="en-US" sz="1000" dirty="0">
                           <a:solidFill>
-                            <a:schemeClr val="tx1"/>
-                          </a:solidFill>
-                        </a:rPr>
-                        <a:t>€210 / €716 · 1.0 T</a:t>
+                            <a:schemeClr val="accent4"/>
+                          </a:solidFill>
+                        </a:rPr>
+                        <a:t>–</a:t>
                       </a:r>
                       <a:endParaRPr lang="en-US" sz="1000" dirty="0"/>
                     </a:p>
@@ -15581,9 +16788,6 @@
                       <a:headEnd type="none" w="med" len="med"/>
                       <a:tailEnd type="none" w="med" len="med"/>
                     </a:lnB>
-                    <a:solidFill>
-                      <a:srgbClr val="FBEBC8"/>
-                    </a:solidFill>
                   </a:tcPr>
                 </a:tc>
                 <a:tc>
@@ -15597,10 +16801,10 @@
                       <a:r>
                         <a:rPr lang="en-US" sz="1000" dirty="0">
                           <a:solidFill>
-                            <a:schemeClr val="tx1"/>
-                          </a:solidFill>
-                        </a:rPr>
-                        <a:t>€262 / €978 · 1.0</a:t>
+                            <a:schemeClr val="accent4"/>
+                          </a:solidFill>
+                        </a:rPr>
+                        <a:t>–</a:t>
                       </a:r>
                       <a:endParaRPr lang="en-US" sz="1000" dirty="0"/>
                     </a:p>
@@ -15642,1210 +16846,6 @@
                       <a:headEnd type="none" w="med" len="med"/>
                       <a:tailEnd type="none" w="med" len="med"/>
                     </a:lnB>
-                    <a:solidFill>
-                      <a:srgbClr val="DCEFE8"/>
-                    </a:solidFill>
-                  </a:tcPr>
-                </a:tc>
-              </a:tr>
-              <a:tr h="329184">
-                <a:tc>
-                  <a:txBody>
-                    <a:bodyPr/>
-                    <a:lstStyle/>
-                    <a:p>
-                      <a:pPr indent="0" marL="0">
-                        <a:buNone/>
-                      </a:pPr>
-                      <a:r>
-                        <a:rPr lang="en-US" sz="1000" dirty="0">
-                          <a:solidFill>
-                            <a:schemeClr val="tx1"/>
-                          </a:solidFill>
-                        </a:rPr>
-                        <a:t>LinkedIn (PLC/TIA and Meister profiles)</a:t>
-                      </a:r>
-                      <a:endParaRPr lang="en-US" sz="1000" dirty="0"/>
-                    </a:p>
-                  </a:txBody>
-                  <a:tcPr marL="91440" marR="91440" marT="45720" marB="45720" anchor="ctr">
-                    <a:lnL w="6350" cap="flat" cmpd="sng" algn="ctr">
-                      <a:solidFill>
-                        <a:srgbClr val="D6DEE5"/>
-                      </a:solidFill>
-                      <a:prstDash val="solid"/>
-                      <a:round/>
-                      <a:headEnd type="none" w="med" len="med"/>
-                      <a:tailEnd type="none" w="med" len="med"/>
-                    </a:lnL>
-                    <a:lnR w="6350" cap="flat" cmpd="sng" algn="ctr">
-                      <a:solidFill>
-                        <a:srgbClr val="D6DEE5"/>
-                      </a:solidFill>
-                      <a:prstDash val="solid"/>
-                      <a:round/>
-                      <a:headEnd type="none" w="med" len="med"/>
-                      <a:tailEnd type="none" w="med" len="med"/>
-                    </a:lnR>
-                    <a:lnT w="6350" cap="flat" cmpd="sng" algn="ctr">
-                      <a:solidFill>
-                        <a:srgbClr val="D6DEE5"/>
-                      </a:solidFill>
-                      <a:prstDash val="solid"/>
-                      <a:round/>
-                      <a:headEnd type="none" w="med" len="med"/>
-                      <a:tailEnd type="none" w="med" len="med"/>
-                    </a:lnT>
-                    <a:lnB w="6350" cap="flat" cmpd="sng" algn="ctr">
-                      <a:solidFill>
-                        <a:srgbClr val="D6DEE5"/>
-                      </a:solidFill>
-                      <a:prstDash val="solid"/>
-                      <a:round/>
-                      <a:headEnd type="none" w="med" len="med"/>
-                      <a:tailEnd type="none" w="med" len="med"/>
-                    </a:lnB>
-                  </a:tcPr>
-                </a:tc>
-                <a:tc>
-                  <a:txBody>
-                    <a:bodyPr/>
-                    <a:lstStyle/>
-                    <a:p>
-                      <a:pPr algn="ctr" indent="0" marL="0">
-                        <a:buNone/>
-                      </a:pPr>
-                      <a:r>
-                        <a:rPr lang="en-US" sz="1000" dirty="0">
-                          <a:solidFill>
-                            <a:schemeClr val="accent4"/>
-                          </a:solidFill>
-                        </a:rPr>
-                        <a:t>–</a:t>
-                      </a:r>
-                      <a:endParaRPr lang="en-US" sz="1000" dirty="0"/>
-                    </a:p>
-                  </a:txBody>
-                  <a:tcPr marL="91440" marR="91440" marT="45720" marB="45720" anchor="ctr">
-                    <a:lnL w="6350" cap="flat" cmpd="sng" algn="ctr">
-                      <a:solidFill>
-                        <a:srgbClr val="D6DEE5"/>
-                      </a:solidFill>
-                      <a:prstDash val="solid"/>
-                      <a:round/>
-                      <a:headEnd type="none" w="med" len="med"/>
-                      <a:tailEnd type="none" w="med" len="med"/>
-                    </a:lnL>
-                    <a:lnR w="6350" cap="flat" cmpd="sng" algn="ctr">
-                      <a:solidFill>
-                        <a:srgbClr val="D6DEE5"/>
-                      </a:solidFill>
-                      <a:prstDash val="solid"/>
-                      <a:round/>
-                      <a:headEnd type="none" w="med" len="med"/>
-                      <a:tailEnd type="none" w="med" len="med"/>
-                    </a:lnR>
-                    <a:lnT w="6350" cap="flat" cmpd="sng" algn="ctr">
-                      <a:solidFill>
-                        <a:srgbClr val="D6DEE5"/>
-                      </a:solidFill>
-                      <a:prstDash val="solid"/>
-                      <a:round/>
-                      <a:headEnd type="none" w="med" len="med"/>
-                      <a:tailEnd type="none" w="med" len="med"/>
-                    </a:lnT>
-                    <a:lnB w="6350" cap="flat" cmpd="sng" algn="ctr">
-                      <a:solidFill>
-                        <a:srgbClr val="D6DEE5"/>
-                      </a:solidFill>
-                      <a:prstDash val="solid"/>
-                      <a:round/>
-                      <a:headEnd type="none" w="med" len="med"/>
-                      <a:tailEnd type="none" w="med" len="med"/>
-                    </a:lnB>
-                  </a:tcPr>
-                </a:tc>
-                <a:tc>
-                  <a:txBody>
-                    <a:bodyPr/>
-                    <a:lstStyle/>
-                    <a:p>
-                      <a:pPr algn="ctr" indent="0" marL="0">
-                        <a:buNone/>
-                      </a:pPr>
-                      <a:r>
-                        <a:rPr lang="en-US" sz="1000" dirty="0">
-                          <a:solidFill>
-                            <a:schemeClr val="accent4"/>
-                          </a:solidFill>
-                        </a:rPr>
-                        <a:t>–</a:t>
-                      </a:r>
-                      <a:endParaRPr lang="en-US" sz="1000" dirty="0"/>
-                    </a:p>
-                  </a:txBody>
-                  <a:tcPr marL="91440" marR="91440" marT="45720" marB="45720" anchor="ctr">
-                    <a:lnL w="6350" cap="flat" cmpd="sng" algn="ctr">
-                      <a:solidFill>
-                        <a:srgbClr val="D6DEE5"/>
-                      </a:solidFill>
-                      <a:prstDash val="solid"/>
-                      <a:round/>
-                      <a:headEnd type="none" w="med" len="med"/>
-                      <a:tailEnd type="none" w="med" len="med"/>
-                    </a:lnL>
-                    <a:lnR w="6350" cap="flat" cmpd="sng" algn="ctr">
-                      <a:solidFill>
-                        <a:srgbClr val="D6DEE5"/>
-                      </a:solidFill>
-                      <a:prstDash val="solid"/>
-                      <a:round/>
-                      <a:headEnd type="none" w="med" len="med"/>
-                      <a:tailEnd type="none" w="med" len="med"/>
-                    </a:lnR>
-                    <a:lnT w="6350" cap="flat" cmpd="sng" algn="ctr">
-                      <a:solidFill>
-                        <a:srgbClr val="D6DEE5"/>
-                      </a:solidFill>
-                      <a:prstDash val="solid"/>
-                      <a:round/>
-                      <a:headEnd type="none" w="med" len="med"/>
-                      <a:tailEnd type="none" w="med" len="med"/>
-                    </a:lnT>
-                    <a:lnB w="6350" cap="flat" cmpd="sng" algn="ctr">
-                      <a:solidFill>
-                        <a:srgbClr val="D6DEE5"/>
-                      </a:solidFill>
-                      <a:prstDash val="solid"/>
-                      <a:round/>
-                      <a:headEnd type="none" w="med" len="med"/>
-                      <a:tailEnd type="none" w="med" len="med"/>
-                    </a:lnB>
-                  </a:tcPr>
-                </a:tc>
-                <a:tc>
-                  <a:txBody>
-                    <a:bodyPr/>
-                    <a:lstStyle/>
-                    <a:p>
-                      <a:pPr algn="ctr" indent="0" marL="0">
-                        <a:buNone/>
-                      </a:pPr>
-                      <a:r>
-                        <a:rPr lang="en-US" sz="1000" dirty="0">
-                          <a:solidFill>
-                            <a:schemeClr val="tx1"/>
-                          </a:solidFill>
-                        </a:rPr>
-                        <a:t>€175 / €598 · 8.6</a:t>
-                      </a:r>
-                      <a:endParaRPr lang="en-US" sz="1000" dirty="0"/>
-                    </a:p>
-                  </a:txBody>
-                  <a:tcPr marL="91440" marR="91440" marT="45720" marB="45720" anchor="ctr">
-                    <a:lnL w="6350" cap="flat" cmpd="sng" algn="ctr">
-                      <a:solidFill>
-                        <a:srgbClr val="D6DEE5"/>
-                      </a:solidFill>
-                      <a:prstDash val="solid"/>
-                      <a:round/>
-                      <a:headEnd type="none" w="med" len="med"/>
-                      <a:tailEnd type="none" w="med" len="med"/>
-                    </a:lnL>
-                    <a:lnR w="6350" cap="flat" cmpd="sng" algn="ctr">
-                      <a:solidFill>
-                        <a:srgbClr val="D6DEE5"/>
-                      </a:solidFill>
-                      <a:prstDash val="solid"/>
-                      <a:round/>
-                      <a:headEnd type="none" w="med" len="med"/>
-                      <a:tailEnd type="none" w="med" len="med"/>
-                    </a:lnR>
-                    <a:lnT w="6350" cap="flat" cmpd="sng" algn="ctr">
-                      <a:solidFill>
-                        <a:srgbClr val="D6DEE5"/>
-                      </a:solidFill>
-                      <a:prstDash val="solid"/>
-                      <a:round/>
-                      <a:headEnd type="none" w="med" len="med"/>
-                      <a:tailEnd type="none" w="med" len="med"/>
-                    </a:lnT>
-                    <a:lnB w="6350" cap="flat" cmpd="sng" algn="ctr">
-                      <a:solidFill>
-                        <a:srgbClr val="D6DEE5"/>
-                      </a:solidFill>
-                      <a:prstDash val="solid"/>
-                      <a:round/>
-                      <a:headEnd type="none" w="med" len="med"/>
-                      <a:tailEnd type="none" w="med" len="med"/>
-                    </a:lnB>
-                    <a:solidFill>
-                      <a:srgbClr val="DCEFE8"/>
-                    </a:solidFill>
-                  </a:tcPr>
-                </a:tc>
-                <a:tc>
-                  <a:txBody>
-                    <a:bodyPr/>
-                    <a:lstStyle/>
-                    <a:p>
-                      <a:pPr algn="ctr" indent="0" marL="0">
-                        <a:buNone/>
-                      </a:pPr>
-                      <a:r>
-                        <a:rPr lang="en-US" sz="1000" dirty="0">
-                          <a:solidFill>
-                            <a:schemeClr val="tx1"/>
-                          </a:solidFill>
-                        </a:rPr>
-                        <a:t>€219 / €817 · 5.4</a:t>
-                      </a:r>
-                      <a:endParaRPr lang="en-US" sz="1000" dirty="0"/>
-                    </a:p>
-                  </a:txBody>
-                  <a:tcPr marL="91440" marR="91440" marT="45720" marB="45720" anchor="ctr">
-                    <a:lnL w="6350" cap="flat" cmpd="sng" algn="ctr">
-                      <a:solidFill>
-                        <a:srgbClr val="D6DEE5"/>
-                      </a:solidFill>
-                      <a:prstDash val="solid"/>
-                      <a:round/>
-                      <a:headEnd type="none" w="med" len="med"/>
-                      <a:tailEnd type="none" w="med" len="med"/>
-                    </a:lnL>
-                    <a:lnR w="6350" cap="flat" cmpd="sng" algn="ctr">
-                      <a:solidFill>
-                        <a:srgbClr val="D6DEE5"/>
-                      </a:solidFill>
-                      <a:prstDash val="solid"/>
-                      <a:round/>
-                      <a:headEnd type="none" w="med" len="med"/>
-                      <a:tailEnd type="none" w="med" len="med"/>
-                    </a:lnR>
-                    <a:lnT w="6350" cap="flat" cmpd="sng" algn="ctr">
-                      <a:solidFill>
-                        <a:srgbClr val="D6DEE5"/>
-                      </a:solidFill>
-                      <a:prstDash val="solid"/>
-                      <a:round/>
-                      <a:headEnd type="none" w="med" len="med"/>
-                      <a:tailEnd type="none" w="med" len="med"/>
-                    </a:lnT>
-                    <a:lnB w="6350" cap="flat" cmpd="sng" algn="ctr">
-                      <a:solidFill>
-                        <a:srgbClr val="D6DEE5"/>
-                      </a:solidFill>
-                      <a:prstDash val="solid"/>
-                      <a:round/>
-                      <a:headEnd type="none" w="med" len="med"/>
-                      <a:tailEnd type="none" w="med" len="med"/>
-                    </a:lnB>
-                    <a:solidFill>
-                      <a:srgbClr val="DCEFE8"/>
-                    </a:solidFill>
-                  </a:tcPr>
-                </a:tc>
-              </a:tr>
-              <a:tr h="329184">
-                <a:tc>
-                  <a:txBody>
-                    <a:bodyPr/>
-                    <a:lstStyle/>
-                    <a:p>
-                      <a:pPr indent="0" marL="0">
-                        <a:buNone/>
-                      </a:pPr>
-                      <a:r>
-                        <a:rPr lang="en-US" sz="1000" dirty="0">
-                          <a:solidFill>
-                            <a:schemeClr val="tx1"/>
-                          </a:solidFill>
-                        </a:rPr>
-                        <a:t>I2 Handwerk → Industrie (new pool)</a:t>
-                      </a:r>
-                      <a:endParaRPr lang="en-US" sz="1000" dirty="0"/>
-                    </a:p>
-                  </a:txBody>
-                  <a:tcPr marL="91440" marR="91440" marT="45720" marB="45720" anchor="ctr">
-                    <a:lnL w="6350" cap="flat" cmpd="sng" algn="ctr">
-                      <a:solidFill>
-                        <a:srgbClr val="D6DEE5"/>
-                      </a:solidFill>
-                      <a:prstDash val="solid"/>
-                      <a:round/>
-                      <a:headEnd type="none" w="med" len="med"/>
-                      <a:tailEnd type="none" w="med" len="med"/>
-                    </a:lnL>
-                    <a:lnR w="6350" cap="flat" cmpd="sng" algn="ctr">
-                      <a:solidFill>
-                        <a:srgbClr val="D6DEE5"/>
-                      </a:solidFill>
-                      <a:prstDash val="solid"/>
-                      <a:round/>
-                      <a:headEnd type="none" w="med" len="med"/>
-                      <a:tailEnd type="none" w="med" len="med"/>
-                    </a:lnR>
-                    <a:lnT w="6350" cap="flat" cmpd="sng" algn="ctr">
-                      <a:solidFill>
-                        <a:srgbClr val="D6DEE5"/>
-                      </a:solidFill>
-                      <a:prstDash val="solid"/>
-                      <a:round/>
-                      <a:headEnd type="none" w="med" len="med"/>
-                      <a:tailEnd type="none" w="med" len="med"/>
-                    </a:lnT>
-                    <a:lnB w="6350" cap="flat" cmpd="sng" algn="ctr">
-                      <a:solidFill>
-                        <a:srgbClr val="D6DEE5"/>
-                      </a:solidFill>
-                      <a:prstDash val="solid"/>
-                      <a:round/>
-                      <a:headEnd type="none" w="med" len="med"/>
-                      <a:tailEnd type="none" w="med" len="med"/>
-                    </a:lnB>
-                  </a:tcPr>
-                </a:tc>
-                <a:tc>
-                  <a:txBody>
-                    <a:bodyPr/>
-                    <a:lstStyle/>
-                    <a:p>
-                      <a:pPr algn="ctr" indent="0" marL="0">
-                        <a:buNone/>
-                      </a:pPr>
-                      <a:r>
-                        <a:rPr lang="en-US" sz="1000" dirty="0">
-                          <a:solidFill>
-                            <a:schemeClr val="tx1"/>
-                          </a:solidFill>
-                        </a:rPr>
-                        <a:t>€200 / €881 · 11.6</a:t>
-                      </a:r>
-                      <a:endParaRPr lang="en-US" sz="1000" dirty="0"/>
-                    </a:p>
-                  </a:txBody>
-                  <a:tcPr marL="91440" marR="91440" marT="45720" marB="45720" anchor="ctr">
-                    <a:lnL w="6350" cap="flat" cmpd="sng" algn="ctr">
-                      <a:solidFill>
-                        <a:srgbClr val="D6DEE5"/>
-                      </a:solidFill>
-                      <a:prstDash val="solid"/>
-                      <a:round/>
-                      <a:headEnd type="none" w="med" len="med"/>
-                      <a:tailEnd type="none" w="med" len="med"/>
-                    </a:lnL>
-                    <a:lnR w="6350" cap="flat" cmpd="sng" algn="ctr">
-                      <a:solidFill>
-                        <a:srgbClr val="D6DEE5"/>
-                      </a:solidFill>
-                      <a:prstDash val="solid"/>
-                      <a:round/>
-                      <a:headEnd type="none" w="med" len="med"/>
-                      <a:tailEnd type="none" w="med" len="med"/>
-                    </a:lnR>
-                    <a:lnT w="6350" cap="flat" cmpd="sng" algn="ctr">
-                      <a:solidFill>
-                        <a:srgbClr val="D6DEE5"/>
-                      </a:solidFill>
-                      <a:prstDash val="solid"/>
-                      <a:round/>
-                      <a:headEnd type="none" w="med" len="med"/>
-                      <a:tailEnd type="none" w="med" len="med"/>
-                    </a:lnT>
-                    <a:lnB w="6350" cap="flat" cmpd="sng" algn="ctr">
-                      <a:solidFill>
-                        <a:srgbClr val="D6DEE5"/>
-                      </a:solidFill>
-                      <a:prstDash val="solid"/>
-                      <a:round/>
-                      <a:headEnd type="none" w="med" len="med"/>
-                      <a:tailEnd type="none" w="med" len="med"/>
-                    </a:lnB>
-                    <a:solidFill>
-                      <a:srgbClr val="DCEFE8"/>
-                    </a:solidFill>
-                  </a:tcPr>
-                </a:tc>
-                <a:tc>
-                  <a:txBody>
-                    <a:bodyPr/>
-                    <a:lstStyle/>
-                    <a:p>
-                      <a:pPr algn="ctr" indent="0" marL="0">
-                        <a:buNone/>
-                      </a:pPr>
-                      <a:r>
-                        <a:rPr lang="en-US" sz="1000" dirty="0">
-                          <a:solidFill>
-                            <a:schemeClr val="accent4"/>
-                          </a:solidFill>
-                        </a:rPr>
-                        <a:t>–</a:t>
-                      </a:r>
-                      <a:endParaRPr lang="en-US" sz="1000" dirty="0"/>
-                    </a:p>
-                  </a:txBody>
-                  <a:tcPr marL="91440" marR="91440" marT="45720" marB="45720" anchor="ctr">
-                    <a:lnL w="6350" cap="flat" cmpd="sng" algn="ctr">
-                      <a:solidFill>
-                        <a:srgbClr val="D6DEE5"/>
-                      </a:solidFill>
-                      <a:prstDash val="solid"/>
-                      <a:round/>
-                      <a:headEnd type="none" w="med" len="med"/>
-                      <a:tailEnd type="none" w="med" len="med"/>
-                    </a:lnL>
-                    <a:lnR w="6350" cap="flat" cmpd="sng" algn="ctr">
-                      <a:solidFill>
-                        <a:srgbClr val="D6DEE5"/>
-                      </a:solidFill>
-                      <a:prstDash val="solid"/>
-                      <a:round/>
-                      <a:headEnd type="none" w="med" len="med"/>
-                      <a:tailEnd type="none" w="med" len="med"/>
-                    </a:lnR>
-                    <a:lnT w="6350" cap="flat" cmpd="sng" algn="ctr">
-                      <a:solidFill>
-                        <a:srgbClr val="D6DEE5"/>
-                      </a:solidFill>
-                      <a:prstDash val="solid"/>
-                      <a:round/>
-                      <a:headEnd type="none" w="med" len="med"/>
-                      <a:tailEnd type="none" w="med" len="med"/>
-                    </a:lnT>
-                    <a:lnB w="6350" cap="flat" cmpd="sng" algn="ctr">
-                      <a:solidFill>
-                        <a:srgbClr val="D6DEE5"/>
-                      </a:solidFill>
-                      <a:prstDash val="solid"/>
-                      <a:round/>
-                      <a:headEnd type="none" w="med" len="med"/>
-                      <a:tailEnd type="none" w="med" len="med"/>
-                    </a:lnB>
-                  </a:tcPr>
-                </a:tc>
-                <a:tc>
-                  <a:txBody>
-                    <a:bodyPr/>
-                    <a:lstStyle/>
-                    <a:p>
-                      <a:pPr algn="ctr" indent="0" marL="0">
-                        <a:buNone/>
-                      </a:pPr>
-                      <a:r>
-                        <a:rPr lang="en-US" sz="1000" dirty="0">
-                          <a:solidFill>
-                            <a:schemeClr val="accent4"/>
-                          </a:solidFill>
-                        </a:rPr>
-                        <a:t>–</a:t>
-                      </a:r>
-                      <a:endParaRPr lang="en-US" sz="1000" dirty="0"/>
-                    </a:p>
-                  </a:txBody>
-                  <a:tcPr marL="91440" marR="91440" marT="45720" marB="45720" anchor="ctr">
-                    <a:lnL w="6350" cap="flat" cmpd="sng" algn="ctr">
-                      <a:solidFill>
-                        <a:srgbClr val="D6DEE5"/>
-                      </a:solidFill>
-                      <a:prstDash val="solid"/>
-                      <a:round/>
-                      <a:headEnd type="none" w="med" len="med"/>
-                      <a:tailEnd type="none" w="med" len="med"/>
-                    </a:lnL>
-                    <a:lnR w="6350" cap="flat" cmpd="sng" algn="ctr">
-                      <a:solidFill>
-                        <a:srgbClr val="D6DEE5"/>
-                      </a:solidFill>
-                      <a:prstDash val="solid"/>
-                      <a:round/>
-                      <a:headEnd type="none" w="med" len="med"/>
-                      <a:tailEnd type="none" w="med" len="med"/>
-                    </a:lnR>
-                    <a:lnT w="6350" cap="flat" cmpd="sng" algn="ctr">
-                      <a:solidFill>
-                        <a:srgbClr val="D6DEE5"/>
-                      </a:solidFill>
-                      <a:prstDash val="solid"/>
-                      <a:round/>
-                      <a:headEnd type="none" w="med" len="med"/>
-                      <a:tailEnd type="none" w="med" len="med"/>
-                    </a:lnT>
-                    <a:lnB w="6350" cap="flat" cmpd="sng" algn="ctr">
-                      <a:solidFill>
-                        <a:srgbClr val="D6DEE5"/>
-                      </a:solidFill>
-                      <a:prstDash val="solid"/>
-                      <a:round/>
-                      <a:headEnd type="none" w="med" len="med"/>
-                      <a:tailEnd type="none" w="med" len="med"/>
-                    </a:lnB>
-                  </a:tcPr>
-                </a:tc>
-                <a:tc>
-                  <a:txBody>
-                    <a:bodyPr/>
-                    <a:lstStyle/>
-                    <a:p>
-                      <a:pPr algn="ctr" indent="0" marL="0">
-                        <a:buNone/>
-                      </a:pPr>
-                      <a:r>
-                        <a:rPr lang="en-US" sz="1000" dirty="0">
-                          <a:solidFill>
-                            <a:schemeClr val="accent4"/>
-                          </a:solidFill>
-                        </a:rPr>
-                        <a:t>–</a:t>
-                      </a:r>
-                      <a:endParaRPr lang="en-US" sz="1000" dirty="0"/>
-                    </a:p>
-                  </a:txBody>
-                  <a:tcPr marL="91440" marR="91440" marT="45720" marB="45720" anchor="ctr">
-                    <a:lnL w="6350" cap="flat" cmpd="sng" algn="ctr">
-                      <a:solidFill>
-                        <a:srgbClr val="D6DEE5"/>
-                      </a:solidFill>
-                      <a:prstDash val="solid"/>
-                      <a:round/>
-                      <a:headEnd type="none" w="med" len="med"/>
-                      <a:tailEnd type="none" w="med" len="med"/>
-                    </a:lnL>
-                    <a:lnR w="6350" cap="flat" cmpd="sng" algn="ctr">
-                      <a:solidFill>
-                        <a:srgbClr val="D6DEE5"/>
-                      </a:solidFill>
-                      <a:prstDash val="solid"/>
-                      <a:round/>
-                      <a:headEnd type="none" w="med" len="med"/>
-                      <a:tailEnd type="none" w="med" len="med"/>
-                    </a:lnR>
-                    <a:lnT w="6350" cap="flat" cmpd="sng" algn="ctr">
-                      <a:solidFill>
-                        <a:srgbClr val="D6DEE5"/>
-                      </a:solidFill>
-                      <a:prstDash val="solid"/>
-                      <a:round/>
-                      <a:headEnd type="none" w="med" len="med"/>
-                      <a:tailEnd type="none" w="med" len="med"/>
-                    </a:lnT>
-                    <a:lnB w="6350" cap="flat" cmpd="sng" algn="ctr">
-                      <a:solidFill>
-                        <a:srgbClr val="D6DEE5"/>
-                      </a:solidFill>
-                      <a:prstDash val="solid"/>
-                      <a:round/>
-                      <a:headEnd type="none" w="med" len="med"/>
-                      <a:tailEnd type="none" w="med" len="med"/>
-                    </a:lnB>
-                  </a:tcPr>
-                </a:tc>
-              </a:tr>
-              <a:tr h="329184">
-                <a:tc>
-                  <a:txBody>
-                    <a:bodyPr/>
-                    <a:lstStyle/>
-                    <a:p>
-                      <a:pPr indent="0" marL="0">
-                        <a:buNone/>
-                      </a:pPr>
-                      <a:r>
-                        <a:rPr lang="en-US" sz="1000" dirty="0">
-                          <a:solidFill>
-                            <a:schemeClr val="tx1"/>
-                          </a:solidFill>
-                        </a:rPr>
-                        <a:t>I1b Referrals (€1,000 bonus on hire)</a:t>
-                      </a:r>
-                      <a:endParaRPr lang="en-US" sz="1000" dirty="0"/>
-                    </a:p>
-                  </a:txBody>
-                  <a:tcPr marL="91440" marR="91440" marT="45720" marB="45720" anchor="ctr">
-                    <a:lnL w="6350" cap="flat" cmpd="sng" algn="ctr">
-                      <a:solidFill>
-                        <a:srgbClr val="D6DEE5"/>
-                      </a:solidFill>
-                      <a:prstDash val="solid"/>
-                      <a:round/>
-                      <a:headEnd type="none" w="med" len="med"/>
-                      <a:tailEnd type="none" w="med" len="med"/>
-                    </a:lnL>
-                    <a:lnR w="6350" cap="flat" cmpd="sng" algn="ctr">
-                      <a:solidFill>
-                        <a:srgbClr val="D6DEE5"/>
-                      </a:solidFill>
-                      <a:prstDash val="solid"/>
-                      <a:round/>
-                      <a:headEnd type="none" w="med" len="med"/>
-                      <a:tailEnd type="none" w="med" len="med"/>
-                    </a:lnR>
-                    <a:lnT w="6350" cap="flat" cmpd="sng" algn="ctr">
-                      <a:solidFill>
-                        <a:srgbClr val="D6DEE5"/>
-                      </a:solidFill>
-                      <a:prstDash val="solid"/>
-                      <a:round/>
-                      <a:headEnd type="none" w="med" len="med"/>
-                      <a:tailEnd type="none" w="med" len="med"/>
-                    </a:lnT>
-                    <a:lnB w="6350" cap="flat" cmpd="sng" algn="ctr">
-                      <a:solidFill>
-                        <a:srgbClr val="D6DEE5"/>
-                      </a:solidFill>
-                      <a:prstDash val="solid"/>
-                      <a:round/>
-                      <a:headEnd type="none" w="med" len="med"/>
-                      <a:tailEnd type="none" w="med" len="med"/>
-                    </a:lnB>
-                  </a:tcPr>
-                </a:tc>
-                <a:tc>
-                  <a:txBody>
-                    <a:bodyPr/>
-                    <a:lstStyle/>
-                    <a:p>
-                      <a:pPr algn="ctr" indent="0" marL="0">
-                        <a:buNone/>
-                      </a:pPr>
-                      <a:r>
-                        <a:rPr lang="en-US" sz="1000" dirty="0">
-                          <a:solidFill>
-                            <a:schemeClr val="tx1"/>
-                          </a:solidFill>
-                        </a:rPr>
-                        <a:t>€370 / €1,000 · 4.2</a:t>
-                      </a:r>
-                      <a:endParaRPr lang="en-US" sz="1000" dirty="0"/>
-                    </a:p>
-                  </a:txBody>
-                  <a:tcPr marL="91440" marR="91440" marT="45720" marB="45720" anchor="ctr">
-                    <a:lnL w="6350" cap="flat" cmpd="sng" algn="ctr">
-                      <a:solidFill>
-                        <a:srgbClr val="D6DEE5"/>
-                      </a:solidFill>
-                      <a:prstDash val="solid"/>
-                      <a:round/>
-                      <a:headEnd type="none" w="med" len="med"/>
-                      <a:tailEnd type="none" w="med" len="med"/>
-                    </a:lnL>
-                    <a:lnR w="6350" cap="flat" cmpd="sng" algn="ctr">
-                      <a:solidFill>
-                        <a:srgbClr val="D6DEE5"/>
-                      </a:solidFill>
-                      <a:prstDash val="solid"/>
-                      <a:round/>
-                      <a:headEnd type="none" w="med" len="med"/>
-                      <a:tailEnd type="none" w="med" len="med"/>
-                    </a:lnR>
-                    <a:lnT w="6350" cap="flat" cmpd="sng" algn="ctr">
-                      <a:solidFill>
-                        <a:srgbClr val="D6DEE5"/>
-                      </a:solidFill>
-                      <a:prstDash val="solid"/>
-                      <a:round/>
-                      <a:headEnd type="none" w="med" len="med"/>
-                      <a:tailEnd type="none" w="med" len="med"/>
-                    </a:lnT>
-                    <a:lnB w="6350" cap="flat" cmpd="sng" algn="ctr">
-                      <a:solidFill>
-                        <a:srgbClr val="D6DEE5"/>
-                      </a:solidFill>
-                      <a:prstDash val="solid"/>
-                      <a:round/>
-                      <a:headEnd type="none" w="med" len="med"/>
-                      <a:tailEnd type="none" w="med" len="med"/>
-                    </a:lnB>
-                    <a:solidFill>
-                      <a:srgbClr val="DCEFE8"/>
-                    </a:solidFill>
-                  </a:tcPr>
-                </a:tc>
-                <a:tc>
-                  <a:txBody>
-                    <a:bodyPr/>
-                    <a:lstStyle/>
-                    <a:p>
-                      <a:pPr algn="ctr" indent="0" marL="0">
-                        <a:buNone/>
-                      </a:pPr>
-                      <a:r>
-                        <a:rPr lang="en-US" sz="1000" dirty="0">
-                          <a:solidFill>
-                            <a:schemeClr val="tx1"/>
-                          </a:solidFill>
-                        </a:rPr>
-                        <a:t>€466 / €1,000 · –</a:t>
-                      </a:r>
-                      <a:endParaRPr lang="en-US" sz="1000" dirty="0"/>
-                    </a:p>
-                  </a:txBody>
-                  <a:tcPr marL="91440" marR="91440" marT="45720" marB="45720" anchor="ctr">
-                    <a:lnL w="6350" cap="flat" cmpd="sng" algn="ctr">
-                      <a:solidFill>
-                        <a:srgbClr val="D6DEE5"/>
-                      </a:solidFill>
-                      <a:prstDash val="solid"/>
-                      <a:round/>
-                      <a:headEnd type="none" w="med" len="med"/>
-                      <a:tailEnd type="none" w="med" len="med"/>
-                    </a:lnL>
-                    <a:lnR w="6350" cap="flat" cmpd="sng" algn="ctr">
-                      <a:solidFill>
-                        <a:srgbClr val="D6DEE5"/>
-                      </a:solidFill>
-                      <a:prstDash val="solid"/>
-                      <a:round/>
-                      <a:headEnd type="none" w="med" len="med"/>
-                      <a:tailEnd type="none" w="med" len="med"/>
-                    </a:lnR>
-                    <a:lnT w="6350" cap="flat" cmpd="sng" algn="ctr">
-                      <a:solidFill>
-                        <a:srgbClr val="D6DEE5"/>
-                      </a:solidFill>
-                      <a:prstDash val="solid"/>
-                      <a:round/>
-                      <a:headEnd type="none" w="med" len="med"/>
-                      <a:tailEnd type="none" w="med" len="med"/>
-                    </a:lnT>
-                    <a:lnB w="6350" cap="flat" cmpd="sng" algn="ctr">
-                      <a:solidFill>
-                        <a:srgbClr val="D6DEE5"/>
-                      </a:solidFill>
-                      <a:prstDash val="solid"/>
-                      <a:round/>
-                      <a:headEnd type="none" w="med" len="med"/>
-                      <a:tailEnd type="none" w="med" len="med"/>
-                    </a:lnB>
-                    <a:solidFill>
-                      <a:srgbClr val="F2F4F6"/>
-                    </a:solidFill>
-                  </a:tcPr>
-                </a:tc>
-                <a:tc>
-                  <a:txBody>
-                    <a:bodyPr/>
-                    <a:lstStyle/>
-                    <a:p>
-                      <a:pPr algn="ctr" indent="0" marL="0">
-                        <a:buNone/>
-                      </a:pPr>
-                      <a:r>
-                        <a:rPr lang="en-US" sz="1000" dirty="0">
-                          <a:solidFill>
-                            <a:schemeClr val="tx1"/>
-                          </a:solidFill>
-                        </a:rPr>
-                        <a:t>€336 / €1,000 · –</a:t>
-                      </a:r>
-                      <a:endParaRPr lang="en-US" sz="1000" dirty="0"/>
-                    </a:p>
-                  </a:txBody>
-                  <a:tcPr marL="91440" marR="91440" marT="45720" marB="45720" anchor="ctr">
-                    <a:lnL w="6350" cap="flat" cmpd="sng" algn="ctr">
-                      <a:solidFill>
-                        <a:srgbClr val="D6DEE5"/>
-                      </a:solidFill>
-                      <a:prstDash val="solid"/>
-                      <a:round/>
-                      <a:headEnd type="none" w="med" len="med"/>
-                      <a:tailEnd type="none" w="med" len="med"/>
-                    </a:lnL>
-                    <a:lnR w="6350" cap="flat" cmpd="sng" algn="ctr">
-                      <a:solidFill>
-                        <a:srgbClr val="D6DEE5"/>
-                      </a:solidFill>
-                      <a:prstDash val="solid"/>
-                      <a:round/>
-                      <a:headEnd type="none" w="med" len="med"/>
-                      <a:tailEnd type="none" w="med" len="med"/>
-                    </a:lnR>
-                    <a:lnT w="6350" cap="flat" cmpd="sng" algn="ctr">
-                      <a:solidFill>
-                        <a:srgbClr val="D6DEE5"/>
-                      </a:solidFill>
-                      <a:prstDash val="solid"/>
-                      <a:round/>
-                      <a:headEnd type="none" w="med" len="med"/>
-                      <a:tailEnd type="none" w="med" len="med"/>
-                    </a:lnT>
-                    <a:lnB w="6350" cap="flat" cmpd="sng" algn="ctr">
-                      <a:solidFill>
-                        <a:srgbClr val="D6DEE5"/>
-                      </a:solidFill>
-                      <a:prstDash val="solid"/>
-                      <a:round/>
-                      <a:headEnd type="none" w="med" len="med"/>
-                      <a:tailEnd type="none" w="med" len="med"/>
-                    </a:lnB>
-                    <a:solidFill>
-                      <a:srgbClr val="F2F4F6"/>
-                    </a:solidFill>
-                  </a:tcPr>
-                </a:tc>
-                <a:tc>
-                  <a:txBody>
-                    <a:bodyPr/>
-                    <a:lstStyle/>
-                    <a:p>
-                      <a:pPr algn="ctr" indent="0" marL="0">
-                        <a:buNone/>
-                      </a:pPr>
-                      <a:r>
-                        <a:rPr lang="en-US" sz="1000" dirty="0">
-                          <a:solidFill>
-                            <a:schemeClr val="tx1"/>
-                          </a:solidFill>
-                        </a:rPr>
-                        <a:t>€308 / €1,000 · 0.4</a:t>
-                      </a:r>
-                      <a:endParaRPr lang="en-US" sz="1000" dirty="0"/>
-                    </a:p>
-                  </a:txBody>
-                  <a:tcPr marL="91440" marR="91440" marT="45720" marB="45720" anchor="ctr">
-                    <a:lnL w="6350" cap="flat" cmpd="sng" algn="ctr">
-                      <a:solidFill>
-                        <a:srgbClr val="D6DEE5"/>
-                      </a:solidFill>
-                      <a:prstDash val="solid"/>
-                      <a:round/>
-                      <a:headEnd type="none" w="med" len="med"/>
-                      <a:tailEnd type="none" w="med" len="med"/>
-                    </a:lnL>
-                    <a:lnR w="6350" cap="flat" cmpd="sng" algn="ctr">
-                      <a:solidFill>
-                        <a:srgbClr val="D6DEE5"/>
-                      </a:solidFill>
-                      <a:prstDash val="solid"/>
-                      <a:round/>
-                      <a:headEnd type="none" w="med" len="med"/>
-                      <a:tailEnd type="none" w="med" len="med"/>
-                    </a:lnR>
-                    <a:lnT w="6350" cap="flat" cmpd="sng" algn="ctr">
-                      <a:solidFill>
-                        <a:srgbClr val="D6DEE5"/>
-                      </a:solidFill>
-                      <a:prstDash val="solid"/>
-                      <a:round/>
-                      <a:headEnd type="none" w="med" len="med"/>
-                      <a:tailEnd type="none" w="med" len="med"/>
-                    </a:lnT>
-                    <a:lnB w="6350" cap="flat" cmpd="sng" algn="ctr">
-                      <a:solidFill>
-                        <a:srgbClr val="D6DEE5"/>
-                      </a:solidFill>
-                      <a:prstDash val="solid"/>
-                      <a:round/>
-                      <a:headEnd type="none" w="med" len="med"/>
-                      <a:tailEnd type="none" w="med" len="med"/>
-                    </a:lnB>
-                    <a:solidFill>
-                      <a:srgbClr val="DCEFE8"/>
-                    </a:solidFill>
-                  </a:tcPr>
-                </a:tc>
-              </a:tr>
-              <a:tr h="329184">
-                <a:tc>
-                  <a:txBody>
-                    <a:bodyPr/>
-                    <a:lstStyle/>
-                    <a:p>
-                      <a:pPr indent="0" marL="0">
-                        <a:buNone/>
-                      </a:pPr>
-                      <a:r>
-                        <a:rPr lang="en-US" sz="1000" dirty="0">
-                          <a:solidFill>
-                            <a:schemeClr val="tx1"/>
-                          </a:solidFill>
-                        </a:rPr>
-                        <a:t>StepStone (German, CV-based, €1,449/ad)</a:t>
-                      </a:r>
-                      <a:endParaRPr lang="en-US" sz="1000" dirty="0"/>
-                    </a:p>
-                  </a:txBody>
-                  <a:tcPr marL="91440" marR="91440" marT="45720" marB="45720" anchor="ctr">
-                    <a:lnL w="6350" cap="flat" cmpd="sng" algn="ctr">
-                      <a:solidFill>
-                        <a:srgbClr val="D6DEE5"/>
-                      </a:solidFill>
-                      <a:prstDash val="solid"/>
-                      <a:round/>
-                      <a:headEnd type="none" w="med" len="med"/>
-                      <a:tailEnd type="none" w="med" len="med"/>
-                    </a:lnL>
-                    <a:lnR w="6350" cap="flat" cmpd="sng" algn="ctr">
-                      <a:solidFill>
-                        <a:srgbClr val="D6DEE5"/>
-                      </a:solidFill>
-                      <a:prstDash val="solid"/>
-                      <a:round/>
-                      <a:headEnd type="none" w="med" len="med"/>
-                      <a:tailEnd type="none" w="med" len="med"/>
-                    </a:lnR>
-                    <a:lnT w="6350" cap="flat" cmpd="sng" algn="ctr">
-                      <a:solidFill>
-                        <a:srgbClr val="D6DEE5"/>
-                      </a:solidFill>
-                      <a:prstDash val="solid"/>
-                      <a:round/>
-                      <a:headEnd type="none" w="med" len="med"/>
-                      <a:tailEnd type="none" w="med" len="med"/>
-                    </a:lnT>
-                    <a:lnB w="6350" cap="flat" cmpd="sng" algn="ctr">
-                      <a:solidFill>
-                        <a:srgbClr val="D6DEE5"/>
-                      </a:solidFill>
-                      <a:prstDash val="solid"/>
-                      <a:round/>
-                      <a:headEnd type="none" w="med" len="med"/>
-                      <a:tailEnd type="none" w="med" len="med"/>
-                    </a:lnB>
-                  </a:tcPr>
-                </a:tc>
-                <a:tc>
-                  <a:txBody>
-                    <a:bodyPr/>
-                    <a:lstStyle/>
-                    <a:p>
-                      <a:pPr algn="ctr" indent="0" marL="0">
-                        <a:buNone/>
-                      </a:pPr>
-                      <a:r>
-                        <a:rPr lang="en-US" sz="1000" dirty="0">
-                          <a:solidFill>
-                            <a:schemeClr val="tx1"/>
-                          </a:solidFill>
-                        </a:rPr>
-                        <a:t>€322 / €1,001 · 0.9</a:t>
-                      </a:r>
-                      <a:endParaRPr lang="en-US" sz="1000" dirty="0"/>
-                    </a:p>
-                  </a:txBody>
-                  <a:tcPr marL="91440" marR="91440" marT="45720" marB="45720" anchor="ctr">
-                    <a:lnL w="6350" cap="flat" cmpd="sng" algn="ctr">
-                      <a:solidFill>
-                        <a:srgbClr val="D6DEE5"/>
-                      </a:solidFill>
-                      <a:prstDash val="solid"/>
-                      <a:round/>
-                      <a:headEnd type="none" w="med" len="med"/>
-                      <a:tailEnd type="none" w="med" len="med"/>
-                    </a:lnL>
-                    <a:lnR w="6350" cap="flat" cmpd="sng" algn="ctr">
-                      <a:solidFill>
-                        <a:srgbClr val="D6DEE5"/>
-                      </a:solidFill>
-                      <a:prstDash val="solid"/>
-                      <a:round/>
-                      <a:headEnd type="none" w="med" len="med"/>
-                      <a:tailEnd type="none" w="med" len="med"/>
-                    </a:lnR>
-                    <a:lnT w="6350" cap="flat" cmpd="sng" algn="ctr">
-                      <a:solidFill>
-                        <a:srgbClr val="D6DEE5"/>
-                      </a:solidFill>
-                      <a:prstDash val="solid"/>
-                      <a:round/>
-                      <a:headEnd type="none" w="med" len="med"/>
-                      <a:tailEnd type="none" w="med" len="med"/>
-                    </a:lnT>
-                    <a:lnB w="6350" cap="flat" cmpd="sng" algn="ctr">
-                      <a:solidFill>
-                        <a:srgbClr val="D6DEE5"/>
-                      </a:solidFill>
-                      <a:prstDash val="solid"/>
-                      <a:round/>
-                      <a:headEnd type="none" w="med" len="med"/>
-                      <a:tailEnd type="none" w="med" len="med"/>
-                    </a:lnB>
-                    <a:solidFill>
-                      <a:srgbClr val="DCEFE8"/>
-                    </a:solidFill>
-                  </a:tcPr>
-                </a:tc>
-                <a:tc>
-                  <a:txBody>
-                    <a:bodyPr/>
-                    <a:lstStyle/>
-                    <a:p>
-                      <a:pPr algn="ctr" indent="0" marL="0">
-                        <a:buNone/>
-                      </a:pPr>
-                      <a:r>
-                        <a:rPr lang="en-US" sz="1000" dirty="0">
-                          <a:solidFill>
-                            <a:schemeClr val="tx1"/>
-                          </a:solidFill>
-                        </a:rPr>
-                        <a:t>€166 / €409 · –</a:t>
-                      </a:r>
-                      <a:endParaRPr lang="en-US" sz="1000" dirty="0"/>
-                    </a:p>
-                  </a:txBody>
-                  <a:tcPr marL="91440" marR="91440" marT="45720" marB="45720" anchor="ctr">
-                    <a:lnL w="6350" cap="flat" cmpd="sng" algn="ctr">
-                      <a:solidFill>
-                        <a:srgbClr val="D6DEE5"/>
-                      </a:solidFill>
-                      <a:prstDash val="solid"/>
-                      <a:round/>
-                      <a:headEnd type="none" w="med" len="med"/>
-                      <a:tailEnd type="none" w="med" len="med"/>
-                    </a:lnL>
-                    <a:lnR w="6350" cap="flat" cmpd="sng" algn="ctr">
-                      <a:solidFill>
-                        <a:srgbClr val="D6DEE5"/>
-                      </a:solidFill>
-                      <a:prstDash val="solid"/>
-                      <a:round/>
-                      <a:headEnd type="none" w="med" len="med"/>
-                      <a:tailEnd type="none" w="med" len="med"/>
-                    </a:lnR>
-                    <a:lnT w="6350" cap="flat" cmpd="sng" algn="ctr">
-                      <a:solidFill>
-                        <a:srgbClr val="D6DEE5"/>
-                      </a:solidFill>
-                      <a:prstDash val="solid"/>
-                      <a:round/>
-                      <a:headEnd type="none" w="med" len="med"/>
-                      <a:tailEnd type="none" w="med" len="med"/>
-                    </a:lnT>
-                    <a:lnB w="6350" cap="flat" cmpd="sng" algn="ctr">
-                      <a:solidFill>
-                        <a:srgbClr val="D6DEE5"/>
-                      </a:solidFill>
-                      <a:prstDash val="solid"/>
-                      <a:round/>
-                      <a:headEnd type="none" w="med" len="med"/>
-                      <a:tailEnd type="none" w="med" len="med"/>
-                    </a:lnB>
-                    <a:solidFill>
-                      <a:srgbClr val="F2F4F6"/>
-                    </a:solidFill>
-                  </a:tcPr>
-                </a:tc>
-                <a:tc>
-                  <a:txBody>
-                    <a:bodyPr/>
-                    <a:lstStyle/>
-                    <a:p>
-                      <a:pPr algn="ctr" indent="0" marL="0">
-                        <a:buNone/>
-                      </a:pPr>
-                      <a:r>
-                        <a:rPr lang="en-US" sz="1000" dirty="0">
-                          <a:solidFill>
-                            <a:schemeClr val="tx1"/>
-                          </a:solidFill>
-                        </a:rPr>
-                        <a:t>€386 / €1,321 · –</a:t>
-                      </a:r>
-                      <a:endParaRPr lang="en-US" sz="1000" dirty="0"/>
-                    </a:p>
-                  </a:txBody>
-                  <a:tcPr marL="91440" marR="91440" marT="45720" marB="45720" anchor="ctr">
-                    <a:lnL w="6350" cap="flat" cmpd="sng" algn="ctr">
-                      <a:solidFill>
-                        <a:srgbClr val="D6DEE5"/>
-                      </a:solidFill>
-                      <a:prstDash val="solid"/>
-                      <a:round/>
-                      <a:headEnd type="none" w="med" len="med"/>
-                      <a:tailEnd type="none" w="med" len="med"/>
-                    </a:lnL>
-                    <a:lnR w="6350" cap="flat" cmpd="sng" algn="ctr">
-                      <a:solidFill>
-                        <a:srgbClr val="D6DEE5"/>
-                      </a:solidFill>
-                      <a:prstDash val="solid"/>
-                      <a:round/>
-                      <a:headEnd type="none" w="med" len="med"/>
-                      <a:tailEnd type="none" w="med" len="med"/>
-                    </a:lnR>
-                    <a:lnT w="6350" cap="flat" cmpd="sng" algn="ctr">
-                      <a:solidFill>
-                        <a:srgbClr val="D6DEE5"/>
-                      </a:solidFill>
-                      <a:prstDash val="solid"/>
-                      <a:round/>
-                      <a:headEnd type="none" w="med" len="med"/>
-                      <a:tailEnd type="none" w="med" len="med"/>
-                    </a:lnT>
-                    <a:lnB w="6350" cap="flat" cmpd="sng" algn="ctr">
-                      <a:solidFill>
-                        <a:srgbClr val="D6DEE5"/>
-                      </a:solidFill>
-                      <a:prstDash val="solid"/>
-                      <a:round/>
-                      <a:headEnd type="none" w="med" len="med"/>
-                      <a:tailEnd type="none" w="med" len="med"/>
-                    </a:lnB>
-                    <a:solidFill>
-                      <a:srgbClr val="F2F4F6"/>
-                    </a:solidFill>
-                  </a:tcPr>
-                </a:tc>
-                <a:tc>
-                  <a:txBody>
-                    <a:bodyPr/>
-                    <a:lstStyle/>
-                    <a:p>
-                      <a:pPr algn="ctr" indent="0" marL="0">
-                        <a:buNone/>
-                      </a:pPr>
-                      <a:r>
-                        <a:rPr lang="en-US" sz="1000" dirty="0">
-                          <a:solidFill>
-                            <a:schemeClr val="tx1"/>
-                          </a:solidFill>
-                        </a:rPr>
-                        <a:t>€386 / €1,443 · –</a:t>
-                      </a:r>
-                      <a:endParaRPr lang="en-US" sz="1000" dirty="0"/>
-                    </a:p>
-                  </a:txBody>
-                  <a:tcPr marL="91440" marR="91440" marT="45720" marB="45720" anchor="ctr">
-                    <a:lnL w="6350" cap="flat" cmpd="sng" algn="ctr">
-                      <a:solidFill>
-                        <a:srgbClr val="D6DEE5"/>
-                      </a:solidFill>
-                      <a:prstDash val="solid"/>
-                      <a:round/>
-                      <a:headEnd type="none" w="med" len="med"/>
-                      <a:tailEnd type="none" w="med" len="med"/>
-                    </a:lnL>
-                    <a:lnR w="6350" cap="flat" cmpd="sng" algn="ctr">
-                      <a:solidFill>
-                        <a:srgbClr val="D6DEE5"/>
-                      </a:solidFill>
-                      <a:prstDash val="solid"/>
-                      <a:round/>
-                      <a:headEnd type="none" w="med" len="med"/>
-                      <a:tailEnd type="none" w="med" len="med"/>
-                    </a:lnR>
-                    <a:lnT w="6350" cap="flat" cmpd="sng" algn="ctr">
-                      <a:solidFill>
-                        <a:srgbClr val="D6DEE5"/>
-                      </a:solidFill>
-                      <a:prstDash val="solid"/>
-                      <a:round/>
-                      <a:headEnd type="none" w="med" len="med"/>
-                      <a:tailEnd type="none" w="med" len="med"/>
-                    </a:lnT>
-                    <a:lnB w="6350" cap="flat" cmpd="sng" algn="ctr">
-                      <a:solidFill>
-                        <a:srgbClr val="D6DEE5"/>
-                      </a:solidFill>
-                      <a:prstDash val="solid"/>
-                      <a:round/>
-                      <a:headEnd type="none" w="med" len="med"/>
-                      <a:tailEnd type="none" w="med" len="med"/>
-                    </a:lnB>
-                    <a:solidFill>
-                      <a:srgbClr val="F2F4F6"/>
-                    </a:solidFill>
                   </a:tcPr>
                 </a:tc>
               </a:tr>
@@ -17066,7 +17066,7 @@
                   <a:schemeClr val="tx2"/>
                 </a:solidFill>
               </a:rPr>
-              <a:t>Cells: cost per qualified / cost per hire · hires planned. Cost per hire = (cost per application × applications + set-up) ÷ hires at full capacity; I2 includes €1,200 set-up, I3 €400 translation. StepStone's single ad works out at €1,583 per hire: costed whole, credited only the applications the plan needs (conservative).</a:t>
+              <a:t>Cells: cost per qualified / cost per hire · hires planned. Cost per hire = (cost per application × applications + set-up) ÷ hires at full capacity; I2 includes €1,200 set-up, I3 €400 translation. StepStone ads (7 × €1,449) are costed whole and credited only the applications the plan needs (conservative).</a:t>
             </a:r>
             <a:endParaRPr lang="en-US" sz="1000" dirty="0"/>
           </a:p>
@@ -17102,7 +17102,7 @@
                   <a:schemeClr val="accent4"/>
                 </a:solidFill>
               </a:rPr>
-              <a:t>Researched: StepStone €1,449/30-day ad (instaffo.com) · Pracuj.pl ~1,499 PLN/ad, indicative (dlafirm.pracuj.pl) · Indeed CPC $0.10–5+ (pin.com) · LinkedIn CPC $4–8 (peoplebox.ai) · Appcast apply rate 6.1% (2025 benchmark). Other sources (§6 BQFG, BA Engpassanalyse, WSI, plant headcount) and every own estimate are labelled on the Assumptions tab.</a:t>
+              <a:t>Sourced: StepStone €1,449/30-day ad (stepstone.de price list) · cost per application, DACH medians: Indeed €161, Google €179, LinkedIn €96, Meta €84 (TalentBait, 2,549 campaigns, 2024–26) · share qualified: 28% of applications suitable (IAB-Stellenerhebung 2026) · pools: BA employment statistics by KldB code (Dec 2025) · time-to-offer: SmartRecruiters Germany benchmark. Every source and every remaining own estimate is labelled with its URL on the Assumptions tab.</a:t>
             </a:r>
             <a:endParaRPr lang="en-US" sz="1000" dirty="0"/>
           </a:p>
@@ -17252,7 +17252,7 @@
                 <a:ea typeface="Cambria" pitchFamily="34" charset="-122"/>
                 <a:cs typeface="Cambria" pitchFamily="34" charset="-120"/>
               </a:rPr>
-              <a:t>€38.7k planned across roles and weeks, plus €8.8k reserve released on results</a:t>
+              <a:t>€85.4k planned across roles and weeks, plus €17.1k reserve released on results</a:t>
             </a:r>
             <a:endParaRPr lang="en-US" sz="2200" dirty="0"/>
           </a:p>
@@ -17321,7 +17321,7 @@
                   <a:schemeClr val="tx1"/>
                 </a:solidFill>
               </a:rPr>
-              <a:t>€20.4k paid channels (incl. €9.0k tests) + €16.7k initiative media, pre-screen calls and bonuses + €1.6k set-up = €38.7k. Reserve: 15% of €45.6k plus rounding = €8.8k.</a:t>
+              <a:t>€52.0k paid channels (incl. €9.0k tests) + €31.8k initiative media, pre-screen calls and bonuses + €1.6k set-up = €85.4k. Reserve: 15% of €100.5k plus rounding = €17.1k.</a:t>
             </a:r>
             <a:endParaRPr lang="en-US" sz="1100" dirty="0"/>
           </a:p>
@@ -17352,7 +17352,7 @@
                   <a:schemeClr val="tx1"/>
                 </a:solidFill>
               </a:rPr>
-              <a:t>weeks 1–2 cost €14.1k (30%), mostly tests. Duds are cut from Mon 2 Nov (after €500 / 30 apps); tests and the full re-allocation are judged by Mon 9 Nov; the reserve moves only from week 3. Paid media stops after 27 Nov.</a:t>
+              <a:t>weeks 1–2 cost €31.8k (31%), mostly tests. Duds are cut from Mon 2 Nov (after €500 / 30 apps); tests and the full re-allocation are judged by Mon 9 Nov; the reserve moves only from week 3. Paid media stops after Tue 24 Nov.</a:t>
             </a:r>
             <a:endParaRPr lang="en-US" sz="1100" dirty="0"/>
           </a:p>
@@ -17767,7 +17767,7 @@
                             <a:schemeClr val="tx1"/>
                           </a:solidFill>
                         </a:rPr>
-                        <a:t>€19.9k</a:t>
+                        <a:t>€46.5k</a:t>
                       </a:r>
                       <a:endParaRPr lang="en-US" sz="1100" dirty="0"/>
                     </a:p>
@@ -17941,7 +17941,7 @@
                             <a:schemeClr val="tx1"/>
                           </a:solidFill>
                         </a:rPr>
-                        <a:t>€664</a:t>
+                        <a:t>€1,550</a:t>
                       </a:r>
                       <a:endParaRPr lang="en-US" sz="1100" dirty="0"/>
                     </a:p>
@@ -18059,7 +18059,7 @@
                             <a:schemeClr val="tx1"/>
                           </a:solidFill>
                         </a:rPr>
-                        <a:t>€5.5k</a:t>
+                        <a:t>€9.7k</a:t>
                       </a:r>
                       <a:endParaRPr lang="en-US" sz="1100" dirty="0"/>
                     </a:p>
@@ -18233,7 +18233,7 @@
                             <a:schemeClr val="tx1"/>
                           </a:solidFill>
                         </a:rPr>
-                        <a:t>€123</a:t>
+                        <a:t>€215</a:t>
                       </a:r>
                       <a:endParaRPr lang="en-US" sz="1100" dirty="0"/>
                     </a:p>
@@ -18351,7 +18351,7 @@
                             <a:schemeClr val="tx1"/>
                           </a:solidFill>
                         </a:rPr>
-                        <a:t>€6.7k</a:t>
+                        <a:t>€14.6k</a:t>
                       </a:r>
                       <a:endParaRPr lang="en-US" sz="1100" dirty="0"/>
                     </a:p>
@@ -18525,7 +18525,7 @@
                             <a:schemeClr val="tx1"/>
                           </a:solidFill>
                         </a:rPr>
-                        <a:t>€447</a:t>
+                        <a:t>€975</a:t>
                       </a:r>
                       <a:endParaRPr lang="en-US" sz="1100" dirty="0"/>
                     </a:p>
@@ -18643,7 +18643,7 @@
                             <a:schemeClr val="tx1"/>
                           </a:solidFill>
                         </a:rPr>
-                        <a:t>€6.6k</a:t>
+                        <a:t>€14.6k</a:t>
                       </a:r>
                       <a:endParaRPr lang="en-US" sz="1100" dirty="0"/>
                     </a:p>
@@ -18817,7 +18817,7 @@
                             <a:schemeClr val="tx1"/>
                           </a:solidFill>
                         </a:rPr>
-                        <a:t>€655</a:t>
+                        <a:t>€1,457</a:t>
                       </a:r>
                       <a:endParaRPr lang="en-US" sz="1100" dirty="0"/>
                     </a:p>
@@ -18935,7 +18935,7 @@
                             <a:schemeClr val="tx1"/>
                           </a:solidFill>
                         </a:rPr>
-                        <a:t>€38.7k</a:t>
+                        <a:t>€85.4k</a:t>
                       </a:r>
                       <a:endParaRPr lang="en-US" sz="1100" dirty="0"/>
                     </a:p>
@@ -19109,7 +19109,7 @@
                             <a:schemeClr val="tx1"/>
                           </a:solidFill>
                         </a:rPr>
-                        <a:t>€387</a:t>
+                        <a:t>€854</a:t>
                       </a:r>
                       <a:endParaRPr lang="en-US" sz="1100" dirty="0"/>
                     </a:p>
@@ -19563,7 +19563,7 @@
                             <a:schemeClr val="tx1"/>
                           </a:solidFill>
                         </a:rPr>
-                        <a:t>22.1</a:t>
+                        <a:t>20.6</a:t>
                       </a:r>
                       <a:endParaRPr lang="en-US" sz="1000" dirty="0"/>
                     </a:p>
@@ -19797,7 +19797,7 @@
                             <a:schemeClr val="tx1"/>
                           </a:solidFill>
                         </a:rPr>
-                        <a:t>4.3</a:t>
+                        <a:t>0.8</a:t>
                       </a:r>
                       <a:endParaRPr lang="en-US" sz="1000" dirty="0"/>
                     </a:p>
@@ -19855,7 +19855,7 @@
                             <a:schemeClr val="tx1"/>
                           </a:solidFill>
                         </a:rPr>
-                        <a:t>€690</a:t>
+                        <a:t>€3,632</a:t>
                       </a:r>
                       <a:endParaRPr lang="en-US" sz="1000" dirty="0"/>
                     </a:p>
@@ -19973,7 +19973,7 @@
                             <a:schemeClr val="tx1"/>
                           </a:solidFill>
                         </a:rPr>
-                        <a:t>€1.4k</a:t>
+                        <a:t>€10.1k</a:t>
                       </a:r>
                       <a:endParaRPr lang="en-US" sz="1000" dirty="0"/>
                     </a:p>
@@ -20031,7 +20031,7 @@
                             <a:schemeClr val="tx1"/>
                           </a:solidFill>
                         </a:rPr>
-                        <a:t>0.9</a:t>
+                        <a:t>10.8</a:t>
                       </a:r>
                       <a:endParaRPr lang="en-US" sz="1000" dirty="0"/>
                     </a:p>
@@ -20089,7 +20089,7 @@
                             <a:schemeClr val="tx1"/>
                           </a:solidFill>
                         </a:rPr>
-                        <a:t>€1,583</a:t>
+                        <a:t>€937</a:t>
                       </a:r>
                       <a:endParaRPr lang="en-US" sz="1000" dirty="0"/>
                     </a:p>
@@ -20207,7 +20207,7 @@
                             <a:schemeClr val="tx1"/>
                           </a:solidFill>
                         </a:rPr>
-                        <a:t>€9.5k</a:t>
+                        <a:t>€20.8k</a:t>
                       </a:r>
                       <a:endParaRPr lang="en-US" sz="1000" dirty="0"/>
                     </a:p>
@@ -20265,7 +20265,7 @@
                             <a:schemeClr val="tx1"/>
                           </a:solidFill>
                         </a:rPr>
-                        <a:t>14.0</a:t>
+                        <a:t>13.1</a:t>
                       </a:r>
                       <a:endParaRPr lang="en-US" sz="1000" dirty="0"/>
                     </a:p>
@@ -20323,7 +20323,7 @@
                             <a:schemeClr val="tx1"/>
                           </a:solidFill>
                         </a:rPr>
-                        <a:t>€682</a:t>
+                        <a:t>€1,584</a:t>
                       </a:r>
                       <a:endParaRPr lang="en-US" sz="1000" dirty="0"/>
                     </a:p>
@@ -20499,7 +20499,7 @@
                             <a:schemeClr val="tx1"/>
                           </a:solidFill>
                         </a:rPr>
-                        <a:t>3.7</a:t>
+                        <a:t>0.5</a:t>
                       </a:r>
                       <a:endParaRPr lang="en-US" sz="1000" dirty="0"/>
                     </a:p>
@@ -20557,7 +20557,7 @@
                             <a:schemeClr val="tx1"/>
                           </a:solidFill>
                         </a:rPr>
-                        <a:t>€405</a:t>
+                        <a:t>€2,786</a:t>
                       </a:r>
                       <a:endParaRPr lang="en-US" sz="1000" dirty="0"/>
                     </a:p>
@@ -20675,7 +20675,7 @@
                             <a:schemeClr val="tx1"/>
                           </a:solidFill>
                         </a:rPr>
-                        <a:t>€5.0k</a:t>
+                        <a:t>€16.6k</a:t>
                       </a:r>
                       <a:endParaRPr lang="en-US" sz="1000" dirty="0"/>
                     </a:p>
@@ -20733,7 +20733,7 @@
                             <a:schemeClr val="tx1"/>
                           </a:solidFill>
                         </a:rPr>
-                        <a:t>8.3</a:t>
+                        <a:t>4.5</a:t>
                       </a:r>
                       <a:endParaRPr lang="en-US" sz="1000" dirty="0"/>
                     </a:p>
@@ -20791,7 +20791,7 @@
                             <a:schemeClr val="tx1"/>
                           </a:solidFill>
                         </a:rPr>
-                        <a:t>€598</a:t>
+                        <a:t>€3,710</a:t>
                       </a:r>
                       <a:endParaRPr lang="en-US" sz="1000" dirty="0"/>
                     </a:p>
@@ -20909,7 +20909,7 @@
                             <a:schemeClr val="tx1"/>
                           </a:solidFill>
                         </a:rPr>
-                        <a:t>€350</a:t>
+                        <a:t>€210</a:t>
                       </a:r>
                       <a:endParaRPr lang="en-US" sz="1000" dirty="0"/>
                     </a:p>
@@ -20967,7 +20967,7 @@
                             <a:schemeClr val="tx1"/>
                           </a:solidFill>
                         </a:rPr>
-                        <a:t>16.7</a:t>
+                        <a:t>15.7</a:t>
                       </a:r>
                       <a:endParaRPr lang="en-US" sz="1000" dirty="0"/>
                     </a:p>
@@ -21025,7 +21025,7 @@
                             <a:schemeClr val="tx1"/>
                           </a:solidFill>
                         </a:rPr>
-                        <a:t>€21</a:t>
+                        <a:t>€13</a:t>
                       </a:r>
                       <a:endParaRPr lang="en-US" sz="1000" dirty="0"/>
                     </a:p>
@@ -21143,7 +21143,7 @@
                             <a:schemeClr val="tx1"/>
                           </a:solidFill>
                         </a:rPr>
-                        <a:t>€4.6k</a:t>
+                        <a:t>€6.5k</a:t>
                       </a:r>
                       <a:endParaRPr lang="en-US" sz="1000" dirty="0"/>
                     </a:p>
@@ -21201,7 +21201,7 @@
                             <a:schemeClr val="tx1"/>
                           </a:solidFill>
                         </a:rPr>
-                        <a:t>4.6</a:t>
+                        <a:t>6.5</a:t>
                       </a:r>
                       <a:endParaRPr lang="en-US" sz="1000" dirty="0"/>
                     </a:p>
@@ -21377,7 +21377,7 @@
                             <a:schemeClr val="tx1"/>
                           </a:solidFill>
                         </a:rPr>
-                        <a:t>€10.2k</a:t>
+                        <a:t>€22.2k</a:t>
                       </a:r>
                       <a:endParaRPr lang="en-US" sz="1000" dirty="0"/>
                     </a:p>
@@ -21435,7 +21435,7 @@
                             <a:schemeClr val="tx1"/>
                           </a:solidFill>
                         </a:rPr>
-                        <a:t>11.6</a:t>
+                        <a:t>9.5</a:t>
                       </a:r>
                       <a:endParaRPr lang="en-US" sz="1000" dirty="0"/>
                     </a:p>
@@ -21493,7 +21493,7 @@
                             <a:schemeClr val="tx1"/>
                           </a:solidFill>
                         </a:rPr>
-                        <a:t>€881</a:t>
+                        <a:t>€2,349</a:t>
                       </a:r>
                       <a:endParaRPr lang="en-US" sz="1000" dirty="0"/>
                     </a:p>
@@ -21611,7 +21611,7 @@
                             <a:schemeClr val="tx1"/>
                           </a:solidFill>
                         </a:rPr>
-                        <a:t>€3.1k</a:t>
+                        <a:t>€4.5k</a:t>
                       </a:r>
                       <a:endParaRPr lang="en-US" sz="1000" dirty="0"/>
                     </a:p>
@@ -21669,7 +21669,7 @@
                             <a:schemeClr val="tx1"/>
                           </a:solidFill>
                         </a:rPr>
-                        <a:t>13.8</a:t>
+                        <a:t>18.0</a:t>
                       </a:r>
                       <a:endParaRPr lang="en-US" sz="1000" dirty="0"/>
                     </a:p>
@@ -21727,7 +21727,7 @@
                             <a:schemeClr val="tx1"/>
                           </a:solidFill>
                         </a:rPr>
-                        <a:t>€228</a:t>
+                        <a:t>€248</a:t>
                       </a:r>
                       <a:endParaRPr lang="en-US" sz="1000" dirty="0"/>
                     </a:p>
@@ -21920,7 +21920,7 @@
                 <a:ea typeface="Cambria" pitchFamily="34" charset="-122"/>
                 <a:cs typeface="Cambria" pitchFamily="34" charset="-120"/>
               </a:rPr>
-              <a:t>30% less (€33.25k) still signs ~91, but electricians take most of the loss</a:t>
+              <a:t>30% less (€71.75k) still signs ~93, but electricians take most of the loss</a:t>
             </a:r>
             <a:endParaRPr lang="en-US" sz="2200" dirty="0"/>
           </a:p>
@@ -22169,7 +22169,7 @@
                             <a:schemeClr val="tx1"/>
                           </a:solidFill>
                         </a:rPr>
-                        <a:t>100% · €47.50k</a:t>
+                        <a:t>100% · €102.50k</a:t>
                       </a:r>
                       <a:endParaRPr lang="en-US" sz="1100" dirty="0"/>
                     </a:p>
@@ -22285,7 +22285,7 @@
                             <a:schemeClr val="tx1"/>
                           </a:solidFill>
                         </a:rPr>
-                        <a:t>€475</a:t>
+                        <a:t>€1,025</a:t>
                       </a:r>
                       <a:endParaRPr lang="en-US" sz="1100" dirty="0"/>
                     </a:p>
@@ -22345,7 +22345,7 @@
                             <a:schemeClr val="tx1"/>
                           </a:solidFill>
                         </a:rPr>
-                        <a:t>85% · €40.38k</a:t>
+                        <a:t>85% · €87.13k</a:t>
                       </a:r>
                       <a:endParaRPr lang="en-US" sz="1100" dirty="0"/>
                     </a:p>
@@ -22461,7 +22461,7 @@
                             <a:schemeClr val="tx1"/>
                           </a:solidFill>
                         </a:rPr>
-                        <a:t>€417</a:t>
+                        <a:t>€895</a:t>
                       </a:r>
                       <a:endParaRPr lang="en-US" sz="1100" dirty="0"/>
                     </a:p>
@@ -22521,7 +22521,7 @@
                             <a:schemeClr val="tx1"/>
                           </a:solidFill>
                         </a:rPr>
-                        <a:t>70% · €33.25k</a:t>
+                        <a:t>70% · €71.75k</a:t>
                       </a:r>
                       <a:endParaRPr lang="en-US" sz="1100" dirty="0"/>
                     </a:p>
@@ -22579,7 +22579,7 @@
                             <a:schemeClr val="tx1"/>
                           </a:solidFill>
                         </a:rPr>
-                        <a:t>91</a:t>
+                        <a:t>93</a:t>
                       </a:r>
                       <a:endParaRPr lang="en-US" sz="1100" dirty="0"/>
                     </a:p>
@@ -22637,7 +22637,7 @@
                             <a:schemeClr val="tx1"/>
                           </a:solidFill>
                         </a:rPr>
-                        <a:t>€367</a:t>
+                        <a:t>€773</a:t>
                       </a:r>
                       <a:endParaRPr lang="en-US" sz="1100" dirty="0"/>
                     </a:p>
@@ -22697,7 +22697,7 @@
                             <a:schemeClr val="tx1"/>
                           </a:solidFill>
                         </a:rPr>
-                        <a:t>50% · €23.75k</a:t>
+                        <a:t>50% · €51.25k</a:t>
                       </a:r>
                       <a:endParaRPr lang="en-US" sz="1100" dirty="0"/>
                     </a:p>
@@ -22755,7 +22755,7 @@
                             <a:schemeClr val="tx1"/>
                           </a:solidFill>
                         </a:rPr>
-                        <a:t>80</a:t>
+                        <a:t>85</a:t>
                       </a:r>
                       <a:endParaRPr lang="en-US" sz="1100" dirty="0"/>
                     </a:p>
@@ -22813,7 +22813,7 @@
                             <a:schemeClr val="tx1"/>
                           </a:solidFill>
                         </a:rPr>
-                        <a:t>€296</a:t>
+                        <a:t>€600</a:t>
                       </a:r>
                       <a:endParaRPr lang="en-US" sz="1100" dirty="0"/>
                     </a:p>
@@ -22964,7 +22964,7 @@
                   <a:schemeClr val="tx1"/>
                 </a:solidFill>
               </a:rPr>
-              <a:t>electricians (23 of 30 at −30%), then supervisors (8 of 10); automation slips to 14 of 15. Mechatronics never falls short.</a:t>
+              <a:t>electricians (23 of 30 at −30%); automation and supervisors lose under 1 hire each (14.7 of 15, 9.8 of 10). Mechatronics never falls short.</a:t>
             </a:r>
             <a:endParaRPr lang="en-US" sz="1200" dirty="0"/>
           </a:p>
@@ -22995,7 +22995,7 @@
                   <a:schemeClr val="tx1"/>
                 </a:solidFill>
               </a:rPr>
-              <a:t>the last €14.25k buys ~9 hires at ~€1,530 each, mostly electricians, the role that keeps lines running. Keep it. If you must cut, cover supervisors through internal promotion and protect electricians. Above €47.5k, extra money buys at most ~11 more hires (the 31 spare slots); then the 55/week limit binds.</a:t>
+              <a:t>the last €30.75k buys ~7 hires at ~€4,290 each, mostly electricians, the role that keeps lines running. Keep it. If you must cut, cover supervisors through internal promotion and protect electricians. Above €102.5k, extra money buys at most ~3 more hires (the 9 spare slots); then the 55/week limit binds.</a:t>
             </a:r>
             <a:endParaRPr lang="en-US" sz="1200" dirty="0"/>
           </a:p>
@@ -23145,7 +23145,7 @@
                 <a:ea typeface="Cambria" pitchFamily="34" charset="-122"/>
                 <a:cs typeface="Cambria" pitchFamily="34" charset="-120"/>
               </a:rPr>
-              <a:t>Three new sources supply ~47 of the 100 hires, one built for electricians</a:t>
+              <a:t>Three new sources supply ~50 of the 100 hires, one built for electricians</a:t>
             </a:r>
             <a:endParaRPr lang="en-US" sz="2200" dirty="0"/>
           </a:p>
@@ -23347,7 +23347,7 @@
                   <a:schemeClr val="tx1"/>
                 </a:solidFill>
               </a:rPr>
-              <a:t>Already screened (50% qualified), already wanted Tesla, €4 per application</a:t>
+              <a:t>Already screened (50% qualified, my estimate), already wanted Tesla, ~€3 per application</a:t>
             </a:r>
             <a:endParaRPr lang="en-US" sz="1200" dirty="0"/>
           </a:p>
@@ -23378,7 +23378,7 @@
                   <a:schemeClr val="tx1"/>
                 </a:solidFill>
               </a:rPr>
-              <a:t>€350 + €4.6k bonuses → 84 re-apps + 28 referrals → ~55 qualified → ~21 hires</a:t>
+              <a:t>€210 + €6.5k bonuses → 84 re-apps + 43 referrals → ~61 qualified → ~22 hires</a:t>
             </a:r>
             <a:endParaRPr lang="en-US" sz="1200" dirty="0"/>
           </a:p>
@@ -23409,7 +23409,7 @@
                   <a:schemeClr val="tx1"/>
                 </a:solidFill>
               </a:rPr>
-              <a:t>Wed 21 Oct – Tue 3 Nov (waves 1–3): €350. Pass: ≥19 qualified (≥⅓ electricians). Kill: &lt;10 → no further re-contacts; bonus stays live</a:t>
+              <a:t>Wed 21 Oct – Tue 3 Nov (waves 1–3): €210. Pass: ≥20 qualified (≥⅓ electricians). Kill: &lt;11 → no further re-contacts; bonus stays live</a:t>
             </a:r>
             <a:endParaRPr lang="en-US" sz="1200" dirty="0"/>
           </a:p>
@@ -23580,7 +23580,7 @@
                   <a:schemeClr val="tx1"/>
                 </a:solidFill>
               </a:rPr>
-              <a:t>~12,000 construction electricians (Elektroniker EGT) within 75 km</a:t>
+              <a:t>~10,000 construction electricians (Elektroniker EGT, BA KldB 2621) within 75 km</a:t>
             </a:r>
             <a:endParaRPr lang="en-US" sz="1200" dirty="0"/>
           </a:p>
@@ -23673,7 +23673,7 @@
                   <a:schemeClr val="tx1"/>
                 </a:solidFill>
               </a:rPr>
-              <a:t>300 apps × €30 = €9.0k + €1.2k set-up → 45 qualified × 26% = 11.6 hires (€881/hire)</a:t>
+              <a:t>250 apps × €84 = €21.0k + €1.2k set-up → 38 qualified × 25% = 9.5 hires (€2,349/hire)</a:t>
             </a:r>
             <a:endParaRPr lang="en-US" sz="1200" dirty="0"/>
           </a:p>
@@ -23704,7 +23704,7 @@
                   <a:schemeClr val="tx1"/>
                 </a:solidFill>
               </a:rPr>
-              <a:t>Fri 23 Oct – Thu 5 Nov (read Mon 9 Nov): €2.6k. Pass: ≥4 qualified at ≤€250. Kill: &lt;3, &gt;€300 per qualified, or profile rejected; week 4: &lt;40% interview pass</a:t>
+              <a:t>Fri 23 Oct – Thu 5 Nov (read Mon 9 Nov): €5.8k. Pass: ≥4 qualified at ≤€700. Kill: &lt;3, &gt;€840 per qualified, or profile rejected; week 4: &lt;40% interview pass</a:t>
             </a:r>
             <a:endParaRPr lang="en-US" sz="1200" dirty="0"/>
           </a:p>
@@ -23968,7 +23968,7 @@
                   <a:schemeClr val="tx1"/>
                 </a:solidFill>
               </a:rPr>
-              <a:t>141 apps × €19.50 + €400 → 31 qualified × 45% = 13.8 hires (31% of mech, cap 40%)</a:t>
+              <a:t>200 apps × €20.25 + €400 → 44 qualified × 41% = 18.0 hires (40% of mech, cap 40%)</a:t>
             </a:r>
             <a:endParaRPr lang="en-US" sz="1200" dirty="0"/>
           </a:p>
@@ -23999,7 +23999,7 @@
                   <a:schemeClr val="tx1"/>
                 </a:solidFill>
               </a:rPr>
-              <a:t>Tue 27 Oct – Mon 9 Nov (freelancer starts 27 Oct): €1.1k. Pass: ≥4 qualified at ≤€110. Kill: &lt;3, &gt;€130 per qualified, or &lt;30% pass the language check</a:t>
+              <a:t>Tue 27 Oct – Mon 9 Nov (freelancer starts 27 Oct): €1.5k. Pass: ≥7 qualified at ≤€120. Kill: &lt;4, &gt;€140 per qualified, or &lt;30% pass the language check</a:t>
             </a:r>
             <a:endParaRPr lang="en-US" sz="1200" dirty="0"/>
           </a:p>
@@ -24077,7 +24077,7 @@
                   <a:schemeClr val="tx1"/>
                 </a:solidFill>
               </a:rPr>
-              <a:t>Every large employer holds thousands of previously screened candidates who are rarely re-marketed to. Here they cost ~€20 per hire and fill week-1 slots before paid channels warm up. Joveo already matches jobs to supply programmatically. Adding a consented rediscovery source, tracked to hire with the same source tags, is repeatable in any market without local staff.</a:t>
+              <a:t>Every large employer holds thousands of previously screened candidates who are rarely re-marketed to. Here they cost ~€13 per hire and fill week-1 slots before paid channels warm up. Joveo already matches jobs to supply programmatically. Adding a consented rediscovery source, tracked to hire with the same source tags, is repeatable in any market without local staff.</a:t>
             </a:r>
             <a:endParaRPr lang="en-US" sz="1200" dirty="0"/>
           </a:p>
@@ -24596,7 +24596,7 @@
                   <a:schemeClr val="tx1"/>
                 </a:solidFill>
               </a:rPr>
-              <a:t>1) Pass rate on the week-1 cohort (interviews 29 Oct–2 Nov), the most sensitive input: if &lt;45% → tighter knock-outs, pre-screen calls, ask +10 slots, re-run the model. 2) Electrician supply: profile decision + I2's two-week read on 9 Nov; if killed → Meta, StepStone (up to 2 more ads), programmatic; expect ~25–27 electricians (my judgement: capacity allows 30, but slower and at €1,000–1,500 per hire). 3) The 12 tests' cost per application and share qualified → re-rank on Assumptions §7. Week 4 (16 Nov): acceptance &lt;55% → earlier cut-off + signing bonus.</a:t>
+              <a:t>1) Pass rate on the week-1 cohort (interviews 29 Oct–2 Nov), the most sensitive input: if &lt;45% → tighter knock-outs, pre-screen calls, ask +10 slots, re-run the model. 2) Electrician supply: profile decision + I2's two-week read on 9 Nov; if killed → more StepStone ads, then Search and programmatic; expect ~25–27 electricians (my judgement: capacity allows 30, but slower and at €1,022–€3,788 per hire). 3) The 12 tests' cost per application and share qualified → re-rank on Assumptions §7. Week 4 (16 Nov): acceptance &lt;55% → earlier cut-off + signing bonus.</a:t>
             </a:r>
             <a:endParaRPr lang="en-US" sz="1250" dirty="0"/>
           </a:p>

--- a/operation_uptime/Operation_Uptime_Deck.pptx
+++ b/operation_uptime/Operation_Uptime_Deck.pptx
@@ -114,30 +114,30 @@
   <p:extLst>
     <p:ext uri="{521415D9-36F7-43E2-AB2F-B90AF26B5E84}">
       <p14:sectionLst xmlns:p14="http://schemas.microsoft.com/office/powerpoint/2010/main">
-        <p14:section name="Summary" id="{f8a88073-1330-45f4-e01b-74e6f738fc02}">
+        <p14:section name="Summary" id="{2596f74d-fb4a-fbb1-4ee1-31559558fa9d}">
           <p14:sldIdLst>
             <p14:sldId id="256"/>
           </p14:sldIdLst>
         </p14:section>
-        <p14:section name="Part 1 Funnel" id="{08f63a34-2e00-4d71-998a-54ca1fa06ea6}">
+        <p14:section name="Part 1 Funnel" id="{7f6cca6b-0890-571c-905b-7a9036c35073}">
           <p14:sldIdLst>
             <p14:sldId id="257"/>
             <p14:sldId id="258"/>
           </p14:sldIdLst>
         </p14:section>
-        <p14:section name="Part 2 Channels &amp; budget" id="{4ac4808e-65dd-04a2-3d11-db03ca21dcf1}">
+        <p14:section name="Part 2 Channels &amp; budget" id="{ad70c299-6e32-ef82-7795-d4fdae8eeebd}">
           <p14:sldIdLst>
             <p14:sldId id="259"/>
             <p14:sldId id="260"/>
             <p14:sldId id="261"/>
           </p14:sldIdLst>
         </p14:section>
-        <p14:section name="Part 3 New sources" id="{7588a314-d594-f44b-138b-d79c8ec2f33c}">
+        <p14:section name="Part 3 New sources" id="{59267c12-3ec3-6482-b322-98211a9a097a}">
           <p14:sldIdLst>
             <p14:sldId id="262"/>
           </p14:sldIdLst>
         </p14:section>
-        <p14:section name="Part 4 Run it" id="{0199cb29-7037-d626-ce5e-195b1b3658bf}">
+        <p14:section name="Part 4 Run it" id="{b0558b36-5242-87bf-2094-1c36c8756a8f}">
           <p14:sldIdLst>
             <p14:sldId id="263"/>
           </p14:sldIdLst>
@@ -17102,7 +17102,7 @@
                   <a:schemeClr val="accent4"/>
                 </a:solidFill>
               </a:rPr>
-              <a:t>Sourced: StepStone €1,449/30-day ad (stepstone.de price list) · cost per application, DACH medians: Indeed €161, Google €179, LinkedIn €96, Meta €84 (TalentBait, 2,549 campaigns, 2024–26) · share qualified: 28% of applications suitable (IAB-Stellenerhebung 2026) · pools: BA employment statistics by KldB code (Dec 2025) · time-to-offer: SmartRecruiters Germany benchmark. Every source and every remaining own estimate is labelled with its URL on the Assumptions tab.</a:t>
+              <a:t>Sourced: StepStone €1,449/30-day ad (stepstone.de price list) · cost per application, DACH medians: Indeed €161, Google €179, LinkedIn €96, Meta €84 (TalentBait, 2,549 campaigns, 2024–26) · share qualified: 28% of applications suitable (IAB-Stellenerhebung 2026) · pools: BA employment statistics by KldB code (Dec 2025) · time-to-offer: SmartRecruiters Germany benchmark. Every source, its link and every remaining own estimate are on the Sources tab of the model.</a:t>
             </a:r>
             <a:endParaRPr lang="en-US" sz="1000" dirty="0"/>
           </a:p>

--- a/operation_uptime/Operation_Uptime_Deck.pptx
+++ b/operation_uptime/Operation_Uptime_Deck.pptx
@@ -114,30 +114,30 @@
   <p:extLst>
     <p:ext uri="{521415D9-36F7-43E2-AB2F-B90AF26B5E84}">
       <p14:sectionLst xmlns:p14="http://schemas.microsoft.com/office/powerpoint/2010/main">
-        <p14:section name="Summary" id="{2596f74d-fb4a-fbb1-4ee1-31559558fa9d}">
+        <p14:section name="Summary" id="{36be1f79-3887-4443-4e24-5ec4a885815c}">
           <p14:sldIdLst>
             <p14:sldId id="256"/>
           </p14:sldIdLst>
         </p14:section>
-        <p14:section name="Part 1 Funnel" id="{7f6cca6b-0890-571c-905b-7a9036c35073}">
+        <p14:section name="Part 1 Funnel" id="{3e782c79-f585-9966-c89a-b790f94f19ad}">
           <p14:sldIdLst>
             <p14:sldId id="257"/>
             <p14:sldId id="258"/>
           </p14:sldIdLst>
         </p14:section>
-        <p14:section name="Part 2 Channels &amp; budget" id="{ad70c299-6e32-ef82-7795-d4fdae8eeebd}">
+        <p14:section name="Part 2 Channels &amp; budget" id="{17c6439d-bb3d-a118-0356-cc571bfcb041}">
           <p14:sldIdLst>
             <p14:sldId id="259"/>
             <p14:sldId id="260"/>
             <p14:sldId id="261"/>
           </p14:sldIdLst>
         </p14:section>
-        <p14:section name="Part 3 New sources" id="{59267c12-3ec3-6482-b322-98211a9a097a}">
+        <p14:section name="Part 3 New sources" id="{3edde6c8-9290-d423-84e2-c2d6a89dc256}">
           <p14:sldIdLst>
             <p14:sldId id="262"/>
           </p14:sldIdLst>
         </p14:section>
-        <p14:section name="Part 4 Run it" id="{b0558b36-5242-87bf-2094-1c36c8756a8f}">
+        <p14:section name="Part 4 Run it" id="{95904679-1b3f-005d-d1d4-36a78d0d1e40}">
           <p14:sldIdLst>
             <p14:sldId id="263"/>
           </p14:sldIdLst>
@@ -17102,7 +17102,7 @@
                   <a:schemeClr val="accent4"/>
                 </a:solidFill>
               </a:rPr>
-              <a:t>Sourced: StepStone €1,449/30-day ad (stepstone.de price list) · cost per application, DACH medians: Indeed €161, Google €179, LinkedIn €96, Meta €84 (TalentBait, 2,549 campaigns, 2024–26) · share qualified: 28% of applications suitable (IAB-Stellenerhebung 2026) · pools: BA employment statistics by KldB code (Dec 2025) · time-to-offer: SmartRecruiters Germany benchmark. Every source, its link and every remaining own estimate are on the Sources tab of the model.</a:t>
+              <a:t>Sourced: StepStone €1,449/30-day ad (stepstone.de price list) · cost per application, DACH medians: Indeed €161, Google €179, LinkedIn €96, Meta €84 (TalentBait, 2,549 campaigns, 2024–26) · share qualified: 28% of applications suitable (IAB-Stellenerhebung 2026) · pools: BA employment statistics by KldB code (Dec 2025) · time-to-offer: SmartRecruiters Germany benchmark. Every source (with its link) and every remaining own estimate is labelled on the Assumptions tab.</a:t>
             </a:r>
             <a:endParaRPr lang="en-US" sz="1000" dirty="0"/>
           </a:p>

--- a/operation_uptime/Operation_Uptime_Deck.pptx
+++ b/operation_uptime/Operation_Uptime_Deck.pptx
@@ -114,30 +114,30 @@
   <p:extLst>
     <p:ext uri="{521415D9-36F7-43E2-AB2F-B90AF26B5E84}">
       <p14:sectionLst xmlns:p14="http://schemas.microsoft.com/office/powerpoint/2010/main">
-        <p14:section name="Summary" id="{36be1f79-3887-4443-4e24-5ec4a885815c}">
+        <p14:section name="Summary" id="{2bdee562-aee5-03b5-c7ad-e010321f31a4}">
           <p14:sldIdLst>
             <p14:sldId id="256"/>
           </p14:sldIdLst>
         </p14:section>
-        <p14:section name="Part 1 Funnel" id="{3e782c79-f585-9966-c89a-b790f94f19ad}">
+        <p14:section name="Part 1 Funnel" id="{b035a81c-5815-6f5a-0b24-58eb45efaff1}">
           <p14:sldIdLst>
             <p14:sldId id="257"/>
             <p14:sldId id="258"/>
           </p14:sldIdLst>
         </p14:section>
-        <p14:section name="Part 2 Channels &amp; budget" id="{17c6439d-bb3d-a118-0356-cc571bfcb041}">
+        <p14:section name="Part 2 Channels &amp; budget" id="{5f707b24-326e-ad07-33c7-7985bb7b13ec}">
           <p14:sldIdLst>
             <p14:sldId id="259"/>
             <p14:sldId id="260"/>
             <p14:sldId id="261"/>
           </p14:sldIdLst>
         </p14:section>
-        <p14:section name="Part 3 New sources" id="{3edde6c8-9290-d423-84e2-c2d6a89dc256}">
+        <p14:section name="Part 3 New sources" id="{8711c40d-43b5-81fe-9f67-08f022f71fc8}">
           <p14:sldIdLst>
             <p14:sldId id="262"/>
           </p14:sldIdLst>
         </p14:section>
-        <p14:section name="Part 4 Run it" id="{95904679-1b3f-005d-d1d4-36a78d0d1e40}">
+        <p14:section name="Part 4 Run it" id="{e0a91142-f22a-f722-a4c5-f92bd1ad51fd}">
           <p14:sldIdLst>
             <p14:sldId id="263"/>
           </p14:sldIdLst>
@@ -275,22 +275,22 @@
                 <c:formatCode>General</c:formatCode>
                 <c:ptCount val="7"/>
                 <c:pt idx="0">
-                  <c:v>37</c:v>
+                  <c:v>38</c:v>
                 </c:pt>
                 <c:pt idx="1">
-                  <c:v>52</c:v>
+                  <c:v>54</c:v>
                 </c:pt>
                 <c:pt idx="2">
-                  <c:v>53</c:v>
+                  <c:v>54</c:v>
                 </c:pt>
                 <c:pt idx="3">
-                  <c:v>54</c:v>
+                  <c:v>55</c:v>
                 </c:pt>
                 <c:pt idx="4">
-                  <c:v>54</c:v>
+                  <c:v>55</c:v>
                 </c:pt>
                 <c:pt idx="5">
-                  <c:v>55</c:v>
+                  <c:v>53</c:v>
                 </c:pt>
                 <c:pt idx="6">
                   <c:v>0</c:v>
@@ -693,10 +693,10 @@
                   <c:v>100</c:v>
                 </c:pt>
                 <c:pt idx="1">
-                  <c:v>72</c:v>
+                  <c:v>71</c:v>
                 </c:pt>
                 <c:pt idx="2">
-                  <c:v>72</c:v>
+                  <c:v>71</c:v>
                 </c:pt>
                 <c:pt idx="3">
                   <c:v>100</c:v>
@@ -705,7 +705,7 @@
                   <c:v>100</c:v>
                 </c:pt>
                 <c:pt idx="5">
-                  <c:v>72</c:v>
+                  <c:v>71</c:v>
                 </c:pt>
               </c:numCache>
             </c:numRef>
@@ -1107,22 +1107,22 @@
                 <c:formatCode>General</c:formatCode>
                 <c:ptCount val="9"/>
                 <c:pt idx="0">
-                  <c:v>4323</c:v>
+                  <c:v>15555</c:v>
                 </c:pt>
                 <c:pt idx="1">
-                  <c:v>6762</c:v>
+                  <c:v>24084</c:v>
                 </c:pt>
                 <c:pt idx="2">
-                  <c:v>9766</c:v>
+                  <c:v>27182</c:v>
                 </c:pt>
                 <c:pt idx="3">
-                  <c:v>12446</c:v>
+                  <c:v>27954</c:v>
                 </c:pt>
                 <c:pt idx="4">
-                  <c:v>12446</c:v>
+                  <c:v>27954</c:v>
                 </c:pt>
                 <c:pt idx="5">
-                  <c:v>12374</c:v>
+                  <c:v>22961</c:v>
                 </c:pt>
                 <c:pt idx="6">
                   <c:v>0</c:v>
@@ -1226,7 +1226,7 @@
                 <c:formatCode>General</c:formatCode>
                 <c:ptCount val="9"/>
                 <c:pt idx="0">
-                  <c:v>11743</c:v>
+                  <c:v>10294</c:v>
                 </c:pt>
                 <c:pt idx="1">
                   <c:v>0</c:v>
@@ -1354,22 +1354,22 @@
                   <c:v>0</c:v>
                 </c:pt>
                 <c:pt idx="3">
-                  <c:v>388</c:v>
+                  <c:v>1049</c:v>
                 </c:pt>
                 <c:pt idx="4">
-                  <c:v>702</c:v>
+                  <c:v>1720</c:v>
                 </c:pt>
                 <c:pt idx="5">
-                  <c:v>1031</c:v>
+                  <c:v>1981</c:v>
                 </c:pt>
                 <c:pt idx="6">
-                  <c:v>1346</c:v>
+                  <c:v>2052</c:v>
                 </c:pt>
                 <c:pt idx="7">
-                  <c:v>1406</c:v>
+                  <c:v>2057</c:v>
                 </c:pt>
                 <c:pt idx="8">
-                  <c:v>1655</c:v>
+                  <c:v>2371</c:v>
                 </c:pt>
               </c:numCache>
             </c:numRef>
@@ -1631,16 +1631,16 @@
                 <c:ptCount val="4"/>
                 <c:lvl>
                   <c:pt idx="0">
-                    <c:v>100% · €102.50k</c:v>
+                    <c:v>100% · €207.50k</c:v>
                   </c:pt>
                   <c:pt idx="1">
-                    <c:v>85% · €87.13k</c:v>
+                    <c:v>85% · €176.38k</c:v>
                   </c:pt>
                   <c:pt idx="2">
-                    <c:v>70% · €71.75k</c:v>
+                    <c:v>70% · €145.25k</c:v>
                   </c:pt>
                   <c:pt idx="3">
-                    <c:v>50% · €51.25k</c:v>
+                    <c:v>50% · €103.75k</c:v>
                   </c:pt>
                 </c:lvl>
               </c:multiLvlStrCache>
@@ -1656,13 +1656,13 @@
                   <c:v>30</c:v>
                 </c:pt>
                 <c:pt idx="1">
-                  <c:v>27.9</c:v>
+                  <c:v>29.9</c:v>
                 </c:pt>
                 <c:pt idx="2">
-                  <c:v>23.4</c:v>
+                  <c:v>27.1</c:v>
                 </c:pt>
                 <c:pt idx="3">
-                  <c:v>16.5</c:v>
+                  <c:v>17.2</c:v>
                 </c:pt>
               </c:numCache>
             </c:numRef>
@@ -1721,16 +1721,16 @@
                 <c:ptCount val="4"/>
                 <c:lvl>
                   <c:pt idx="0">
-                    <c:v>100% · €102.50k</c:v>
+                    <c:v>100% · €207.50k</c:v>
                   </c:pt>
                   <c:pt idx="1">
-                    <c:v>85% · €87.13k</c:v>
+                    <c:v>85% · €176.38k</c:v>
                   </c:pt>
                   <c:pt idx="2">
-                    <c:v>70% · €71.75k</c:v>
+                    <c:v>70% · €145.25k</c:v>
                   </c:pt>
                   <c:pt idx="3">
-                    <c:v>50% · €51.25k</c:v>
+                    <c:v>50% · €103.75k</c:v>
                   </c:pt>
                 </c:lvl>
               </c:multiLvlStrCache>
@@ -1811,16 +1811,16 @@
                 <c:ptCount val="4"/>
                 <c:lvl>
                   <c:pt idx="0">
-                    <c:v>100% · €102.50k</c:v>
+                    <c:v>100% · €207.50k</c:v>
                   </c:pt>
                   <c:pt idx="1">
-                    <c:v>85% · €87.13k</c:v>
+                    <c:v>85% · €176.38k</c:v>
                   </c:pt>
                   <c:pt idx="2">
-                    <c:v>70% · €71.75k</c:v>
+                    <c:v>70% · €145.25k</c:v>
                   </c:pt>
                   <c:pt idx="3">
-                    <c:v>50% · €51.25k</c:v>
+                    <c:v>50% · €103.75k</c:v>
                   </c:pt>
                 </c:lvl>
               </c:multiLvlStrCache>
@@ -1836,13 +1836,13 @@
                   <c:v>15</c:v>
                 </c:pt>
                 <c:pt idx="1">
-                  <c:v>14.7</c:v>
+                  <c:v>14.9</c:v>
                 </c:pt>
                 <c:pt idx="2">
-                  <c:v>14.7</c:v>
+                  <c:v>14.3</c:v>
                 </c:pt>
                 <c:pt idx="3">
-                  <c:v>14.7</c:v>
+                  <c:v>14.3</c:v>
                 </c:pt>
               </c:numCache>
             </c:numRef>
@@ -1901,16 +1901,16 @@
                 <c:ptCount val="4"/>
                 <c:lvl>
                   <c:pt idx="0">
-                    <c:v>100% · €102.50k</c:v>
+                    <c:v>100% · €207.50k</c:v>
                   </c:pt>
                   <c:pt idx="1">
-                    <c:v>85% · €87.13k</c:v>
+                    <c:v>85% · €176.38k</c:v>
                   </c:pt>
                   <c:pt idx="2">
-                    <c:v>70% · €71.75k</c:v>
+                    <c:v>70% · €145.25k</c:v>
                   </c:pt>
                   <c:pt idx="3">
-                    <c:v>50% · €51.25k</c:v>
+                    <c:v>50% · €103.75k</c:v>
                   </c:pt>
                 </c:lvl>
               </c:multiLvlStrCache>
@@ -1926,13 +1926,13 @@
                   <c:v>10</c:v>
                 </c:pt>
                 <c:pt idx="1">
-                  <c:v>9.8</c:v>
+                  <c:v>4.6</c:v>
                 </c:pt>
                 <c:pt idx="2">
-                  <c:v>9.8</c:v>
+                  <c:v>1.6</c:v>
                 </c:pt>
                 <c:pt idx="3">
-                  <c:v>9.4</c:v>
+                  <c:v>1.6</c:v>
                 </c:pt>
               </c:numCache>
             </c:numRef>
@@ -3760,7 +3760,7 @@
                 <a:ea typeface="Cambria" pitchFamily="34" charset="-122"/>
                 <a:cs typeface="Cambria" pitchFamily="34" charset="-120"/>
               </a:rPr>
-              <a:t>€102.5k signs 100 maintenance hires by 31 Dec if the 55 weekly assessments hold</a:t>
+              <a:t>€207.5k signs 100 maintenance hires by 31 Dec if the 55 weekly assessments hold</a:t>
             </a:r>
             <a:endParaRPr lang="en-US" sz="2200" dirty="0"/>
           </a:p>
@@ -3826,7 +3826,7 @@
                 <a:ea typeface="Cambria" pitchFamily="34" charset="-122"/>
                 <a:cs typeface="Cambria" pitchFamily="34" charset="-120"/>
               </a:rPr>
-              <a:t>€102.5k</a:t>
+              <a:t>€207.5k</a:t>
             </a:r>
             <a:endParaRPr lang="en-US" sz="2600" dirty="0"/>
           </a:p>
@@ -3862,7 +3862,7 @@
                   <a:schemeClr val="tx2"/>
                 </a:solidFill>
               </a:rPr>
-              <a:t>recommended budget: €85.4k planned + €17.1k reserve released only on results</a:t>
+              <a:t>recommended budget: €176.2k planned + €31.3k reserve released only on results</a:t>
             </a:r>
             <a:endParaRPr lang="en-US" sz="1000" dirty="0"/>
           </a:p>
@@ -3928,7 +3928,7 @@
                 <a:ea typeface="Cambria" pitchFamily="34" charset="-122"/>
                 <a:cs typeface="Cambria" pitchFamily="34" charset="-120"/>
               </a:rPr>
-              <a:t>€854</a:t>
+              <a:t>€1,762</a:t>
             </a:r>
             <a:endParaRPr lang="en-US" sz="2600" dirty="0"/>
           </a:p>
@@ -3964,7 +3964,7 @@
                   <a:schemeClr val="tx2"/>
                 </a:solidFill>
               </a:rPr>
-              <a:t>media cost per hire (≤€1,025 if the reserve is spent); excludes Joveo fees</a:t>
+              <a:t>media cost per hire (≤€2,075 if the reserve is spent); excludes Joveo fees</a:t>
             </a:r>
             <a:endParaRPr lang="en-US" sz="1000" dirty="0"/>
           </a:p>
@@ -4030,7 +4030,7 @@
                 <a:ea typeface="Cambria" pitchFamily="34" charset="-122"/>
                 <a:cs typeface="Cambria" pitchFamily="34" charset="-120"/>
               </a:rPr>
-              <a:t>97%</a:t>
+              <a:t>98%</a:t>
             </a:r>
             <a:endParaRPr lang="en-US" sz="2600" dirty="0"/>
           </a:p>
@@ -4066,7 +4066,7 @@
                   <a:schemeClr val="tx2"/>
                 </a:solidFill>
               </a:rPr>
-              <a:t>of 314 assessment slots used (305 qualified). Capacity, not money, is the limit</a:t>
+              <a:t>of 314 assessment slots used (309 qualified). Capacity, not money, is the limit</a:t>
             </a:r>
             <a:endParaRPr lang="en-US" sz="1000" dirty="0"/>
           </a:p>
@@ -4215,7 +4215,7 @@
                   <a:schemeClr val="tx1"/>
                 </a:solidFill>
               </a:rPr>
-              <a:t>~50% we sign all 100, ~80% at least 90 (my judgement; slots are 97% used). If pass or acceptance rates are 30% worse, ~72. </a:t>
+              <a:t>100 if the funnel rates hold, with slots 98% used. Pass rates 10% worse: ~92 hires (slots run out); 30% worse: ~71. </a:t>
             </a:r>
             <a:pPr indent="0" marL="0">
               <a:buNone/>
@@ -4237,7 +4237,7 @@
                   <a:schemeClr val="tx1"/>
                 </a:solidFill>
               </a:rPr>
-              <a:t>(€71.75k): ~93 hires; electricians fall short first (23 of 30).</a:t>
+              <a:t>(€145.25k): ~88 hires; supervisors fall short first (1.6 of 10).</a:t>
             </a:r>
             <a:endParaRPr lang="en-US" sz="1100" dirty="0"/>
           </a:p>
@@ -4266,11 +4266,11 @@
             <a:tbl>
               <a:tblPr/>
               <a:tblGrid>
-                <a:gridCol w="914400"/>
-                <a:gridCol w="475488"/>
-                <a:gridCol w="548640"/>
+                <a:gridCol w="896112"/>
+                <a:gridCol w="457200"/>
                 <a:gridCol w="640080"/>
-                <a:gridCol w="1536192"/>
+                <a:gridCol w="603504"/>
+                <a:gridCol w="1517904"/>
               </a:tblGrid>
               <a:tr h="411480">
                 <a:tc>
@@ -4762,7 +4762,7 @@
                           <a:ea typeface="Calibri" pitchFamily="34" charset="-122"/>
                           <a:cs typeface="Calibri" pitchFamily="34" charset="-120"/>
                         </a:rPr>
-                        <a:t>€46.5k</a:t>
+                        <a:t>€70.7k</a:t>
                       </a:r>
                       <a:endParaRPr lang="en-US" sz="1000" dirty="0">
                         <a:latin typeface="Calibri" charset="0"/>
@@ -4827,7 +4827,7 @@
                           <a:ea typeface="Calibri" pitchFamily="34" charset="-122"/>
                           <a:cs typeface="Calibri" pitchFamily="34" charset="-120"/>
                         </a:rPr>
-                        <a:t>€1,550</a:t>
+                        <a:t>€2,356</a:t>
                       </a:r>
                       <a:endParaRPr lang="en-US" sz="1000" dirty="0">
                         <a:latin typeface="Calibri" charset="0"/>
@@ -4892,7 +4892,7 @@
                           <a:ea typeface="Calibri" pitchFamily="34" charset="-122"/>
                           <a:cs typeface="Calibri" pitchFamily="34" charset="-120"/>
                         </a:rPr>
-                        <a:t>Handwerk→Industrie 9.5 · rediscovery 4.3 · StepStone 4.3 · referrals 4.1 · organic 3.8 · other 4.1</a:t>
+                        <a:t>Meta 9.5 · Handwerk→Industrie 8.5 · organic 3.5 · referrals 3.3 · programmatic 3.2 · other 2.1</a:t>
                       </a:r>
                       <a:endParaRPr lang="en-US" sz="900" dirty="0">
                         <a:latin typeface="Calibri" charset="0"/>
@@ -5089,7 +5089,7 @@
                           <a:ea typeface="Calibri" pitchFamily="34" charset="-122"/>
                           <a:cs typeface="Calibri" pitchFamily="34" charset="-120"/>
                         </a:rPr>
-                        <a:t>€9.7k</a:t>
+                        <a:t>€33.9k</a:t>
                       </a:r>
                       <a:endParaRPr lang="en-US" sz="1000" dirty="0">
                         <a:latin typeface="Calibri" charset="0"/>
@@ -5154,7 +5154,7 @@
                           <a:ea typeface="Calibri" pitchFamily="34" charset="-122"/>
                           <a:cs typeface="Calibri" pitchFamily="34" charset="-120"/>
                         </a:rPr>
-                        <a:t>€215</a:t>
+                        <a:t>€752</a:t>
                       </a:r>
                       <a:endParaRPr lang="en-US" sz="1000" dirty="0">
                         <a:latin typeface="Calibri" charset="0"/>
@@ -5219,7 +5219,7 @@
                           <a:ea typeface="Calibri" pitchFamily="34" charset="-122"/>
                           <a:cs typeface="Calibri" pitchFamily="34" charset="-120"/>
                         </a:rPr>
-                        <a:t>Polish corridor 18.0 · organic 13.4 · rediscovery 7.7 · StepStone 4.8 · tests 1.2</a:t>
+                        <a:t>Polish corridor 18.0 · organic 9.2 · Meta 8.2 · referrals 5.8 · StepStone 1.8 · other 2.1</a:t>
                       </a:r>
                       <a:endParaRPr lang="en-US" sz="900" dirty="0">
                         <a:latin typeface="Calibri" charset="0"/>
@@ -5416,7 +5416,7 @@
                           <a:ea typeface="Calibri" pitchFamily="34" charset="-122"/>
                           <a:cs typeface="Calibri" pitchFamily="34" charset="-120"/>
                         </a:rPr>
-                        <a:t>€14.6k</a:t>
+                        <a:t>€32.4k</a:t>
                       </a:r>
                       <a:endParaRPr lang="en-US" sz="1000" dirty="0">
                         <a:latin typeface="Calibri" charset="0"/>
@@ -5481,7 +5481,7 @@
                           <a:ea typeface="Calibri" pitchFamily="34" charset="-122"/>
                           <a:cs typeface="Calibri" pitchFamily="34" charset="-120"/>
                         </a:rPr>
-                        <a:t>€975</a:t>
+                        <a:t>€2,158</a:t>
                       </a:r>
                       <a:endParaRPr lang="en-US" sz="1000" dirty="0">
                         <a:latin typeface="Calibri" charset="0"/>
@@ -5546,7 +5546,7 @@
                           <a:ea typeface="Calibri" pitchFamily="34" charset="-122"/>
                           <a:cs typeface="Calibri" pitchFamily="34" charset="-120"/>
                         </a:rPr>
-                        <a:t>LinkedIn 8.6 · rediscovery 2.3 · organic 2.3 · referrals 1.5 · tests 0.3</a:t>
+                        <a:t>LinkedIn 10.0 · organic 1.6 · referrals 1.5 · StepStone 0.9 · programmatic 0.5 · other 0.5</a:t>
                       </a:r>
                       <a:endParaRPr lang="en-US" sz="900" dirty="0">
                         <a:latin typeface="Calibri" charset="0"/>
@@ -5743,7 +5743,7 @@
                           <a:ea typeface="Calibri" pitchFamily="34" charset="-122"/>
                           <a:cs typeface="Calibri" pitchFamily="34" charset="-120"/>
                         </a:rPr>
-                        <a:t>€14.6k</a:t>
+                        <a:t>€39.3k</a:t>
                       </a:r>
                       <a:endParaRPr lang="en-US" sz="1000" dirty="0">
                         <a:latin typeface="Calibri" charset="0"/>
@@ -5808,7 +5808,7 @@
                           <a:ea typeface="Calibri" pitchFamily="34" charset="-122"/>
                           <a:cs typeface="Calibri" pitchFamily="34" charset="-120"/>
                         </a:rPr>
-                        <a:t>€1,457</a:t>
+                        <a:t>€3,930</a:t>
                       </a:r>
                       <a:endParaRPr lang="en-US" sz="1000" dirty="0">
                         <a:latin typeface="Calibri" charset="0"/>
@@ -5873,7 +5873,7 @@
                           <a:ea typeface="Calibri" pitchFamily="34" charset="-122"/>
                           <a:cs typeface="Calibri" pitchFamily="34" charset="-120"/>
                         </a:rPr>
-                        <a:t>LinkedIn 4.5 · StepStone 1.8 · rediscovery 1.3 · organic 1.1 · referrals 1.0 · other 0.2</a:t>
+                        <a:t>LinkedIn 8.3 · referrals 0.7 · organic 0.6 · rediscovery 0.2 · tests 0.2</a:t>
                       </a:r>
                       <a:endParaRPr lang="en-US" sz="900" dirty="0">
                         <a:latin typeface="Calibri" charset="0"/>
@@ -6070,7 +6070,7 @@
                           <a:ea typeface="Calibri" pitchFamily="34" charset="-122"/>
                           <a:cs typeface="Calibri" pitchFamily="34" charset="-120"/>
                         </a:rPr>
-                        <a:t>€85.4k</a:t>
+                        <a:t>€176.2k</a:t>
                       </a:r>
                       <a:endParaRPr lang="en-US" sz="1000" dirty="0">
                         <a:latin typeface="Calibri" charset="0"/>
@@ -6135,7 +6135,7 @@
                           <a:ea typeface="Calibri" pitchFamily="34" charset="-122"/>
                           <a:cs typeface="Calibri" pitchFamily="34" charset="-120"/>
                         </a:rPr>
-                        <a:t>€854</a:t>
+                        <a:t>€1,762</a:t>
                       </a:r>
                       <a:endParaRPr lang="en-US" sz="1000" dirty="0">
                         <a:latin typeface="Calibri" charset="0"/>
@@ -6200,7 +6200,7 @@
                           <a:ea typeface="Calibri" pitchFamily="34" charset="-122"/>
                           <a:cs typeface="Calibri" pitchFamily="34" charset="-120"/>
                         </a:rPr>
-                        <a:t>+ €17.1k reserve = €102.5k</a:t>
+                        <a:t>+ €31.3k reserve = €207.5k</a:t>
                       </a:r>
                       <a:endParaRPr lang="en-US" sz="900" dirty="0">
                         <a:latin typeface="Calibri" charset="0"/>
@@ -6294,7 +6294,7 @@
                   <a:schemeClr val="tx1"/>
                 </a:solidFill>
               </a:rPr>
-              <a:t>€750 test in every paid CPC/CPA cell in weeks 1–2, then buy hires cheapest-first: free channels → ATS rediscovery (~€13/hire) → Polish corridor (≤40% of mechatronics) → StepStone (7 ads) → referrals, LinkedIn → construction-electrician campaign, Search. Pace ≤55 qualified a week; paid spend stops Tue 24 Nov.</a:t>
+              <a:t>€750 test in every paid CPC/CPA cell in weeks 1–2, then buy hires cheapest-first: free channels → ATS rediscovery → Polish corridor (≤40% of mechatronics) → referrals → construction-electrician campaign → StepStone → Meta → LinkedIn → programmatic. Pace ≤55 qualified a week; paid spend stops Tue 24 Nov.</a:t>
             </a:r>
             <a:endParaRPr lang="en-US" sz="1100" dirty="0"/>
           </a:p>
@@ -6434,7 +6434,7 @@
                   <a:schemeClr val="tx1"/>
                 </a:solidFill>
               </a:rPr>
-              <a:t>97% used. Pre-screened sources first, pace ≤55/wk, ask +10–15 slots (65/wk → 80% use).</a:t>
+              <a:t>98% used. Pre-screened sources first, pace ≤55/wk, ask +10–15 slots (65/wk → 81% use).</a:t>
             </a:r>
             <a:endParaRPr lang="en-US" sz="1100" dirty="0"/>
           </a:p>
@@ -6465,7 +6465,7 @@
                   <a:schemeClr val="tx1"/>
                 </a:solidFill>
               </a:rPr>
-              <a:t>~9 of 30 need your OK on construction electricians by 23 Oct; else more StepStone (~€1,022/hire), then Search and programmatic at €3.8k–€4.3k/hire.</a:t>
+              <a:t>~9 of 30 need your OK on construction electricians by 23 Oct; without them programmatic ads fill the gap and the budget rises to €225.0k.</a:t>
             </a:r>
             <a:endParaRPr lang="en-US" sz="1100" dirty="0"/>
           </a:p>
@@ -6695,7 +6695,7 @@
                   <a:schemeClr val="tx1"/>
                 </a:solidFill>
               </a:rPr>
-              <a:t>3-day offers, e-signature to 18 Dec; approve €102.5k</a:t>
+              <a:t>3-day offers, e-signature to 18 Dec; approve €207.5k</a:t>
             </a:r>
             <a:endParaRPr lang="en-US" sz="1100" dirty="0"/>
           </a:p>
@@ -6845,7 +6845,7 @@
                 <a:ea typeface="Cambria" pitchFamily="34" charset="-122"/>
                 <a:cs typeface="Cambria" pitchFamily="34" charset="-120"/>
               </a:rPr>
-              <a:t>Working back from 100 hires: ~305 qualified applicants for 314 assessment slots</a:t>
+              <a:t>Working back from 100 hires: ~309 qualified applicants for 314 assessment slots</a:t>
             </a:r>
             <a:endParaRPr lang="en-US" sz="2200" dirty="0"/>
           </a:p>
@@ -8614,7 +8614,7 @@
                             <a:schemeClr val="tx1"/>
                           </a:solidFill>
                         </a:rPr>
-                        <a:t>12%</a:t>
+                        <a:t>15%</a:t>
                       </a:r>
                       <a:endParaRPr lang="en-US" sz="1100" dirty="0"/>
                     </a:p>
@@ -8962,7 +8962,7 @@
                             <a:schemeClr val="tx1"/>
                           </a:solidFill>
                         </a:rPr>
-                        <a:t>441</a:t>
+                        <a:t>353</a:t>
                       </a:r>
                       <a:endParaRPr lang="en-US" sz="1100" dirty="0"/>
                     </a:p>
@@ -9978,7 +9978,7 @@
                             <a:schemeClr val="tx1"/>
                           </a:solidFill>
                         </a:rPr>
-                        <a:t>2,047</a:t>
+                        <a:t>1,959</a:t>
                       </a:r>
                       <a:endParaRPr lang="en-US" sz="1100" dirty="0"/>
                     </a:p>
@@ -10079,7 +10079,7 @@
                   <a:schemeClr val="tx1"/>
                 </a:solidFill>
               </a:rPr>
-              <a:t>305 qualified / 1,525 applications</a:t>
+              <a:t>309 qualified / 2,413 applications</a:t>
             </a:r>
             <a:pPr indent="0" marL="0">
               <a:buNone/>
@@ -10189,7 +10189,7 @@
                   <a:schemeClr val="tx2"/>
                 </a:solidFill>
               </a:rPr>
-              <a:t>Week 1: 37 of 39 slots; weeks 2–5: 52–54 of 55; week 6: 55; assessments end Mon 30 Nov. Rediscovery re-applicants (waves 21 Oct, 26 Oct and 2 Nov) and the €750 tests fill weeks 1–2, so regular spend ramps 7%, 11%, 16%, then 21–25% a week.</a:t>
+              <a:t>Week 1: 38 of 39 slots; weeks 2–5: 54–55 of 55; week 6: 53; assessments end Mon 30 Nov. Rediscovery re-applicants (waves 21 Oct, 26 Oct and 2 Nov) and the €750 tests fill weeks 1–2, so regular spend ramps 10%, 16%, 18%, then 18–21% a week.</a:t>
             </a:r>
             <a:endParaRPr lang="en-US" sz="1100" dirty="0"/>
           </a:p>
@@ -10339,7 +10339,7 @@
                 <a:ea typeface="Cambria" pitchFamily="34" charset="-122"/>
                 <a:cs typeface="Cambria" pitchFamily="34" charset="-120"/>
               </a:rPr>
-              <a:t>Electricians are hardest; a 30% worse pass rate costs ~28 hires that money can't buy back</a:t>
+              <a:t>Electricians are hardest; a 30% worse pass rate costs ~29 hires that money can't buy back</a:t>
             </a:r>
             <a:endParaRPr lang="en-US" sz="2200" dirty="0"/>
           </a:p>
@@ -10816,7 +10816,7 @@
                             <a:schemeClr val="tx1"/>
                           </a:solidFill>
                         </a:rPr>
-                        <a:t>1.8×</a:t>
+                        <a:t>3.7×</a:t>
                       </a:r>
                       <a:endParaRPr lang="en-US" sz="1100" dirty="0"/>
                     </a:p>
@@ -10874,7 +10874,7 @@
                             <a:schemeClr val="accent3"/>
                           </a:solidFill>
                         </a:rPr>
-                        <a:t>1.5×</a:t>
+                        <a:t>3.4×</a:t>
                       </a:r>
                       <a:endParaRPr lang="en-US" sz="1100" dirty="0"/>
                     </a:p>
@@ -10932,7 +10932,7 @@
                             <a:schemeClr val="tx1"/>
                           </a:solidFill>
                         </a:rPr>
-                        <a:t>14%</a:t>
+                        <a:t>12%</a:t>
                       </a:r>
                       <a:endParaRPr lang="en-US" sz="1100" dirty="0"/>
                     </a:p>
@@ -11166,7 +11166,7 @@
                             <a:schemeClr val="tx1"/>
                           </a:solidFill>
                         </a:rPr>
-                        <a:t>3.0×</a:t>
+                        <a:t>12.2×</a:t>
                       </a:r>
                       <a:endParaRPr lang="en-US" sz="1100" dirty="0"/>
                     </a:p>
@@ -11224,7 +11224,7 @@
                             <a:schemeClr val="tx1"/>
                           </a:solidFill>
                         </a:rPr>
-                        <a:t>3.0×</a:t>
+                        <a:t>12.2×</a:t>
                       </a:r>
                       <a:endParaRPr lang="en-US" sz="1100" dirty="0"/>
                     </a:p>
@@ -11282,7 +11282,7 @@
                             <a:schemeClr val="tx1"/>
                           </a:solidFill>
                         </a:rPr>
-                        <a:t>7%</a:t>
+                        <a:t>4%</a:t>
                       </a:r>
                       <a:endParaRPr lang="en-US" sz="1100" dirty="0"/>
                     </a:p>
@@ -11516,7 +11516,7 @@
                             <a:schemeClr val="tx1"/>
                           </a:solidFill>
                         </a:rPr>
-                        <a:t>1.9×</a:t>
+                        <a:t>3.0×</a:t>
                       </a:r>
                       <a:endParaRPr lang="en-US" sz="1100" dirty="0"/>
                     </a:p>
@@ -11574,7 +11574,7 @@
                             <a:schemeClr val="tx1"/>
                           </a:solidFill>
                         </a:rPr>
-                        <a:t>1.9×</a:t>
+                        <a:t>3.0×</a:t>
                       </a:r>
                       <a:endParaRPr lang="en-US" sz="1100" dirty="0"/>
                     </a:p>
@@ -11632,7 +11632,7 @@
                             <a:schemeClr val="tx1"/>
                           </a:solidFill>
                         </a:rPr>
-                        <a:t>10%</a:t>
+                        <a:t>22%</a:t>
                       </a:r>
                       <a:endParaRPr lang="en-US" sz="1100" dirty="0"/>
                     </a:p>
@@ -11866,7 +11866,7 @@
                             <a:schemeClr val="tx1"/>
                           </a:solidFill>
                         </a:rPr>
-                        <a:t>1.6×</a:t>
+                        <a:t>3.8×</a:t>
                       </a:r>
                       <a:endParaRPr lang="en-US" sz="1100" dirty="0"/>
                     </a:p>
@@ -11924,7 +11924,7 @@
                             <a:schemeClr val="tx1"/>
                           </a:solidFill>
                         </a:rPr>
-                        <a:t>1.6×</a:t>
+                        <a:t>3.8×</a:t>
                       </a:r>
                       <a:endParaRPr lang="en-US" sz="1100" dirty="0"/>
                     </a:p>
@@ -11982,7 +11982,7 @@
                             <a:schemeClr val="tx1"/>
                           </a:solidFill>
                         </a:rPr>
-                        <a:t>19%</a:t>
+                        <a:t>17%</a:t>
                       </a:r>
                       <a:endParaRPr lang="en-US" sz="1100" dirty="0"/>
                     </a:p>
@@ -12188,7 +12188,7 @@
                   <a:schemeClr val="tx1"/>
                 </a:solidFill>
               </a:rPr>
-              <a:t>the largest scarce block (30), and the lowest coverage once the unproven construction-electrician campaign (I2) is removed. There is no Polish route and no foreign-trained route by 31 Dec, and energy/grid, rail, aerospace and agencies all chase the same certificate. Supervisors need a bigger share of a smaller pool, but they're only 10 hires with an internal-promotion fallback.</a:t>
+              <a:t>the scarcest trade in Brandenburg (KOFA 2026: 85.7% of vacancies have no suitable unemployed candidate, vs 41.4% across all occupations) and the largest scarce block (30), so they take 40% of the money. No Polish route and no foreign-trained route by 31 Dec. Supervisors cost more per hire and automation has thinner coverage, but they are 10 and 15 hires with fallbacks (internal promotion, foreign-trained).</a:t>
             </a:r>
             <a:endParaRPr lang="en-US" sz="1200" dirty="0"/>
           </a:p>
@@ -12235,7 +12235,7 @@
                   <a:schemeClr val="tx1"/>
                 </a:solidFill>
               </a:rPr>
-              <a:t>30% worse pass or acceptance rates need 436 qualified for 314 slots (139%). The 43% more media that would need can't help: slots cap hires at ~72. Upstream misses (share qualified, cost per application) only cost money.</a:t>
+              <a:t>30% worse pass or acceptance rates need 441 qualified for 314 slots (140%). The 43% more media that would need can't help: slots cap hires at ~71. Upstream misses (share qualified, cost per application) only cost money.</a:t>
             </a:r>
             <a:endParaRPr lang="en-US" sz="1200" dirty="0"/>
           </a:p>
@@ -12542,7 +12542,7 @@
                             <a:schemeClr val="tx1"/>
                           </a:solidFill>
                         </a:rPr>
-                        <a:t>436</a:t>
+                        <a:t>441</a:t>
                       </a:r>
                       <a:endParaRPr lang="en-US" sz="1000" dirty="0"/>
                     </a:p>
@@ -12718,7 +12718,7 @@
                             <a:schemeClr val="tx1"/>
                           </a:solidFill>
                         </a:rPr>
-                        <a:t>436</a:t>
+                        <a:t>441</a:t>
                       </a:r>
                       <a:endParaRPr lang="en-US" sz="1000" dirty="0"/>
                     </a:p>
@@ -12894,7 +12894,7 @@
                             <a:schemeClr val="tx1"/>
                           </a:solidFill>
                         </a:rPr>
-                        <a:t>305</a:t>
+                        <a:t>309</a:t>
                       </a:r>
                       <a:endParaRPr lang="en-US" sz="1000" dirty="0"/>
                     </a:p>
@@ -13070,7 +13070,7 @@
                             <a:schemeClr val="tx1"/>
                           </a:solidFill>
                         </a:rPr>
-                        <a:t>305</a:t>
+                        <a:t>309</a:t>
                       </a:r>
                       <a:endParaRPr lang="en-US" sz="1000" dirty="0"/>
                     </a:p>
@@ -13246,7 +13246,7 @@
                             <a:schemeClr val="tx1"/>
                           </a:solidFill>
                         </a:rPr>
-                        <a:t>305</a:t>
+                        <a:t>309</a:t>
                       </a:r>
                       <a:endParaRPr lang="en-US" sz="1000" dirty="0"/>
                     </a:p>
@@ -13497,7 +13497,7 @@
                 <a:ea typeface="Cambria" pitchFamily="34" charset="-122"/>
                 <a:cs typeface="Cambria" pitchFamily="34" charset="-120"/>
               </a:rPr>
-              <a:t>Each role buys hires cheapest-first; electricians run out of cheap sources after ~8</a:t>
+              <a:t>Each role buys hires cheapest-first; electricians run out of cheap sources after ~4</a:t>
             </a:r>
             <a:endParaRPr lang="en-US" sz="2200" dirty="0"/>
           </a:p>
@@ -13912,7 +13912,7 @@
                             <a:schemeClr val="tx1"/>
                           </a:solidFill>
                         </a:rPr>
-                        <a:t>€0 / €0 · 3.8</a:t>
+                        <a:t>€0 / €0 · 3.5</a:t>
                       </a:r>
                       <a:endParaRPr lang="en-US" sz="1000" dirty="0"/>
                     </a:p>
@@ -13973,7 +13973,7 @@
                             <a:schemeClr val="tx1"/>
                           </a:solidFill>
                         </a:rPr>
-                        <a:t>€0 / €0 · 13.4</a:t>
+                        <a:t>€0 / €0 · 9.2</a:t>
                       </a:r>
                       <a:endParaRPr lang="en-US" sz="1000" dirty="0"/>
                     </a:p>
@@ -14034,7 +14034,7 @@
                             <a:schemeClr val="tx1"/>
                           </a:solidFill>
                         </a:rPr>
-                        <a:t>€0 / €0 · 2.3</a:t>
+                        <a:t>€0 / €0 · 1.6</a:t>
                       </a:r>
                       <a:endParaRPr lang="en-US" sz="1000" dirty="0"/>
                     </a:p>
@@ -14095,7 +14095,7 @@
                             <a:schemeClr val="tx1"/>
                           </a:solidFill>
                         </a:rPr>
-                        <a:t>€0 / €0 · 1.1</a:t>
+                        <a:t>€0 / €0 · 0.6</a:t>
                       </a:r>
                       <a:endParaRPr lang="en-US" sz="1000" dirty="0"/>
                     </a:p>
@@ -14216,7 +14216,7 @@
                             <a:schemeClr val="tx1"/>
                           </a:solidFill>
                         </a:rPr>
-                        <a:t>€5 / €14 · 4.3</a:t>
+                        <a:t>€5 / €14 · 0.9</a:t>
                       </a:r>
                       <a:endParaRPr lang="en-US" sz="1000" dirty="0"/>
                     </a:p>
@@ -14277,7 +14277,7 @@
                             <a:schemeClr val="tx1"/>
                           </a:solidFill>
                         </a:rPr>
-                        <a:t>€5 / €12 · 7.7</a:t>
+                        <a:t>€5 / €12 · 1.6</a:t>
                       </a:r>
                       <a:endParaRPr lang="en-US" sz="1000" dirty="0"/>
                     </a:p>
@@ -14338,7 +14338,7 @@
                             <a:schemeClr val="tx1"/>
                           </a:solidFill>
                         </a:rPr>
-                        <a:t>€5 / €15 · 2.3</a:t>
+                        <a:t>€5 / €15 · 0.4</a:t>
                       </a:r>
                       <a:endParaRPr lang="en-US" sz="1000" dirty="0"/>
                     </a:p>
@@ -14399,7 +14399,7 @@
                             <a:schemeClr val="tx1"/>
                           </a:solidFill>
                         </a:rPr>
-                        <a:t>€5 / €18 · 1.3</a:t>
+                        <a:t>€5 / €18 · 0.2</a:t>
                       </a:r>
                       <a:endParaRPr lang="en-US" sz="1000" dirty="0"/>
                     </a:p>
@@ -14578,7 +14578,7 @@
                             <a:schemeClr val="tx1"/>
                           </a:solidFill>
                         </a:rPr>
-                        <a:t>€92 / €248 · 18.0</a:t>
+                        <a:t>€134 / €383 · 18.0</a:t>
                       </a:r>
                       <a:endParaRPr lang="en-US" sz="1000" dirty="0"/>
                     </a:p>
@@ -14757,7 +14757,7 @@
                             <a:schemeClr val="tx1"/>
                           </a:solidFill>
                         </a:rPr>
-                        <a:t>StepStone (German, CV-based, €1,449/ad)</a:t>
+                        <a:t>I1b Referrals (€1,000 bonus on hire)</a:t>
                       </a:r>
                       <a:endParaRPr lang="en-US" sz="1000" dirty="0"/>
                     </a:p>
@@ -14815,7 +14815,7 @@
                             <a:schemeClr val="tx1"/>
                           </a:solidFill>
                         </a:rPr>
-                        <a:t>€322 / €1,022 · 4.3</a:t>
+                        <a:t>€362 / €1,000 · 3.3</a:t>
                       </a:r>
                       <a:endParaRPr lang="en-US" sz="1000" dirty="0"/>
                     </a:p>
@@ -14876,7 +14876,7 @@
                             <a:schemeClr val="tx1"/>
                           </a:solidFill>
                         </a:rPr>
-                        <a:t>€166 / €446 · 4.8</a:t>
+                        <a:t>€427 / €1,000 · 5.8</a:t>
                       </a:r>
                       <a:endParaRPr lang="en-US" sz="1000" dirty="0"/>
                     </a:p>
@@ -14937,7 +14937,372 @@
                             <a:schemeClr val="tx1"/>
                           </a:solidFill>
                         </a:rPr>
-                        <a:t>€386 / €1,363 · –</a:t>
+                        <a:t>€326 / €1,000 · 1.5</a:t>
+                      </a:r>
+                      <a:endParaRPr lang="en-US" sz="1000" dirty="0"/>
+                    </a:p>
+                  </a:txBody>
+                  <a:tcPr marL="91440" marR="91440" marT="45720" marB="45720" anchor="ctr">
+                    <a:lnL w="6350" cap="flat" cmpd="sng" algn="ctr">
+                      <a:solidFill>
+                        <a:srgbClr val="D6DEE5"/>
+                      </a:solidFill>
+                      <a:prstDash val="solid"/>
+                      <a:round/>
+                      <a:headEnd type="none" w="med" len="med"/>
+                      <a:tailEnd type="none" w="med" len="med"/>
+                    </a:lnL>
+                    <a:lnR w="6350" cap="flat" cmpd="sng" algn="ctr">
+                      <a:solidFill>
+                        <a:srgbClr val="D6DEE5"/>
+                      </a:solidFill>
+                      <a:prstDash val="solid"/>
+                      <a:round/>
+                      <a:headEnd type="none" w="med" len="med"/>
+                      <a:tailEnd type="none" w="med" len="med"/>
+                    </a:lnR>
+                    <a:lnT w="6350" cap="flat" cmpd="sng" algn="ctr">
+                      <a:solidFill>
+                        <a:srgbClr val="D6DEE5"/>
+                      </a:solidFill>
+                      <a:prstDash val="solid"/>
+                      <a:round/>
+                      <a:headEnd type="none" w="med" len="med"/>
+                      <a:tailEnd type="none" w="med" len="med"/>
+                    </a:lnT>
+                    <a:lnB w="6350" cap="flat" cmpd="sng" algn="ctr">
+                      <a:solidFill>
+                        <a:srgbClr val="D6DEE5"/>
+                      </a:solidFill>
+                      <a:prstDash val="solid"/>
+                      <a:round/>
+                      <a:headEnd type="none" w="med" len="med"/>
+                      <a:tailEnd type="none" w="med" len="med"/>
+                    </a:lnB>
+                    <a:solidFill>
+                      <a:srgbClr val="DCEFE8"/>
+                    </a:solidFill>
+                  </a:tcPr>
+                </a:tc>
+                <a:tc>
+                  <a:txBody>
+                    <a:bodyPr/>
+                    <a:lstStyle/>
+                    <a:p>
+                      <a:pPr algn="ctr" indent="0" marL="0">
+                        <a:buNone/>
+                      </a:pPr>
+                      <a:r>
+                        <a:rPr lang="en-US" sz="1000" dirty="0">
+                          <a:solidFill>
+                            <a:schemeClr val="tx1"/>
+                          </a:solidFill>
+                        </a:rPr>
+                        <a:t>€274 / €1,000 · 0.7</a:t>
+                      </a:r>
+                      <a:endParaRPr lang="en-US" sz="1000" dirty="0"/>
+                    </a:p>
+                  </a:txBody>
+                  <a:tcPr marL="91440" marR="91440" marT="45720" marB="45720" anchor="ctr">
+                    <a:lnL w="6350" cap="flat" cmpd="sng" algn="ctr">
+                      <a:solidFill>
+                        <a:srgbClr val="D6DEE5"/>
+                      </a:solidFill>
+                      <a:prstDash val="solid"/>
+                      <a:round/>
+                      <a:headEnd type="none" w="med" len="med"/>
+                      <a:tailEnd type="none" w="med" len="med"/>
+                    </a:lnL>
+                    <a:lnR w="6350" cap="flat" cmpd="sng" algn="ctr">
+                      <a:solidFill>
+                        <a:srgbClr val="D6DEE5"/>
+                      </a:solidFill>
+                      <a:prstDash val="solid"/>
+                      <a:round/>
+                      <a:headEnd type="none" w="med" len="med"/>
+                      <a:tailEnd type="none" w="med" len="med"/>
+                    </a:lnR>
+                    <a:lnT w="6350" cap="flat" cmpd="sng" algn="ctr">
+                      <a:solidFill>
+                        <a:srgbClr val="D6DEE5"/>
+                      </a:solidFill>
+                      <a:prstDash val="solid"/>
+                      <a:round/>
+                      <a:headEnd type="none" w="med" len="med"/>
+                      <a:tailEnd type="none" w="med" len="med"/>
+                    </a:lnT>
+                    <a:lnB w="6350" cap="flat" cmpd="sng" algn="ctr">
+                      <a:solidFill>
+                        <a:srgbClr val="D6DEE5"/>
+                      </a:solidFill>
+                      <a:prstDash val="solid"/>
+                      <a:round/>
+                      <a:headEnd type="none" w="med" len="med"/>
+                      <a:tailEnd type="none" w="med" len="med"/>
+                    </a:lnB>
+                    <a:solidFill>
+                      <a:srgbClr val="DCEFE8"/>
+                    </a:solidFill>
+                  </a:tcPr>
+                </a:tc>
+              </a:tr>
+              <a:tr h="329184">
+                <a:tc>
+                  <a:txBody>
+                    <a:bodyPr/>
+                    <a:lstStyle/>
+                    <a:p>
+                      <a:pPr indent="0" marL="0">
+                        <a:buNone/>
+                      </a:pPr>
+                      <a:r>
+                        <a:rPr lang="en-US" sz="1000" dirty="0">
+                          <a:solidFill>
+                            <a:schemeClr val="tx1"/>
+                          </a:solidFill>
+                        </a:rPr>
+                        <a:t>StepStone (German, CV-based, €1,449/ad)</a:t>
+                      </a:r>
+                      <a:endParaRPr lang="en-US" sz="1000" dirty="0"/>
+                    </a:p>
+                  </a:txBody>
+                  <a:tcPr marL="91440" marR="91440" marT="45720" marB="45720" anchor="ctr">
+                    <a:lnL w="6350" cap="flat" cmpd="sng" algn="ctr">
+                      <a:solidFill>
+                        <a:srgbClr val="D6DEE5"/>
+                      </a:solidFill>
+                      <a:prstDash val="solid"/>
+                      <a:round/>
+                      <a:headEnd type="none" w="med" len="med"/>
+                      <a:tailEnd type="none" w="med" len="med"/>
+                    </a:lnL>
+                    <a:lnR w="6350" cap="flat" cmpd="sng" algn="ctr">
+                      <a:solidFill>
+                        <a:srgbClr val="D6DEE5"/>
+                      </a:solidFill>
+                      <a:prstDash val="solid"/>
+                      <a:round/>
+                      <a:headEnd type="none" w="med" len="med"/>
+                      <a:tailEnd type="none" w="med" len="med"/>
+                    </a:lnR>
+                    <a:lnT w="6350" cap="flat" cmpd="sng" algn="ctr">
+                      <a:solidFill>
+                        <a:srgbClr val="D6DEE5"/>
+                      </a:solidFill>
+                      <a:prstDash val="solid"/>
+                      <a:round/>
+                      <a:headEnd type="none" w="med" len="med"/>
+                      <a:tailEnd type="none" w="med" len="med"/>
+                    </a:lnT>
+                    <a:lnB w="6350" cap="flat" cmpd="sng" algn="ctr">
+                      <a:solidFill>
+                        <a:srgbClr val="D6DEE5"/>
+                      </a:solidFill>
+                      <a:prstDash val="solid"/>
+                      <a:round/>
+                      <a:headEnd type="none" w="med" len="med"/>
+                      <a:tailEnd type="none" w="med" len="med"/>
+                    </a:lnB>
+                  </a:tcPr>
+                </a:tc>
+                <a:tc>
+                  <a:txBody>
+                    <a:bodyPr/>
+                    <a:lstStyle/>
+                    <a:p>
+                      <a:pPr algn="ctr" indent="0" marL="0">
+                        <a:buNone/>
+                      </a:pPr>
+                      <a:r>
+                        <a:rPr lang="en-US" sz="1000" dirty="0">
+                          <a:solidFill>
+                            <a:schemeClr val="tx1"/>
+                          </a:solidFill>
+                        </a:rPr>
+                        <a:t>€894 / €2,840 · 1.0</a:t>
+                      </a:r>
+                      <a:endParaRPr lang="en-US" sz="1000" dirty="0"/>
+                    </a:p>
+                  </a:txBody>
+                  <a:tcPr marL="91440" marR="91440" marT="45720" marB="45720" anchor="ctr">
+                    <a:lnL w="6350" cap="flat" cmpd="sng" algn="ctr">
+                      <a:solidFill>
+                        <a:srgbClr val="D6DEE5"/>
+                      </a:solidFill>
+                      <a:prstDash val="solid"/>
+                      <a:round/>
+                      <a:headEnd type="none" w="med" len="med"/>
+                      <a:tailEnd type="none" w="med" len="med"/>
+                    </a:lnL>
+                    <a:lnR w="6350" cap="flat" cmpd="sng" algn="ctr">
+                      <a:solidFill>
+                        <a:srgbClr val="D6DEE5"/>
+                      </a:solidFill>
+                      <a:prstDash val="solid"/>
+                      <a:round/>
+                      <a:headEnd type="none" w="med" len="med"/>
+                      <a:tailEnd type="none" w="med" len="med"/>
+                    </a:lnR>
+                    <a:lnT w="6350" cap="flat" cmpd="sng" algn="ctr">
+                      <a:solidFill>
+                        <a:srgbClr val="D6DEE5"/>
+                      </a:solidFill>
+                      <a:prstDash val="solid"/>
+                      <a:round/>
+                      <a:headEnd type="none" w="med" len="med"/>
+                      <a:tailEnd type="none" w="med" len="med"/>
+                    </a:lnT>
+                    <a:lnB w="6350" cap="flat" cmpd="sng" algn="ctr">
+                      <a:solidFill>
+                        <a:srgbClr val="D6DEE5"/>
+                      </a:solidFill>
+                      <a:prstDash val="solid"/>
+                      <a:round/>
+                      <a:headEnd type="none" w="med" len="med"/>
+                      <a:tailEnd type="none" w="med" len="med"/>
+                    </a:lnB>
+                    <a:solidFill>
+                      <a:srgbClr val="DCEFE8"/>
+                    </a:solidFill>
+                  </a:tcPr>
+                </a:tc>
+                <a:tc>
+                  <a:txBody>
+                    <a:bodyPr/>
+                    <a:lstStyle/>
+                    <a:p>
+                      <a:pPr algn="ctr" indent="0" marL="0">
+                        <a:buNone/>
+                      </a:pPr>
+                      <a:r>
+                        <a:rPr lang="en-US" sz="1000" dirty="0">
+                          <a:solidFill>
+                            <a:schemeClr val="tx1"/>
+                          </a:solidFill>
+                        </a:rPr>
+                        <a:t>€610 / €1,643 · 1.8</a:t>
+                      </a:r>
+                      <a:endParaRPr lang="en-US" sz="1000" dirty="0"/>
+                    </a:p>
+                  </a:txBody>
+                  <a:tcPr marL="91440" marR="91440" marT="45720" marB="45720" anchor="ctr">
+                    <a:lnL w="6350" cap="flat" cmpd="sng" algn="ctr">
+                      <a:solidFill>
+                        <a:srgbClr val="D6DEE5"/>
+                      </a:solidFill>
+                      <a:prstDash val="solid"/>
+                      <a:round/>
+                      <a:headEnd type="none" w="med" len="med"/>
+                      <a:tailEnd type="none" w="med" len="med"/>
+                    </a:lnL>
+                    <a:lnR w="6350" cap="flat" cmpd="sng" algn="ctr">
+                      <a:solidFill>
+                        <a:srgbClr val="D6DEE5"/>
+                      </a:solidFill>
+                      <a:prstDash val="solid"/>
+                      <a:round/>
+                      <a:headEnd type="none" w="med" len="med"/>
+                      <a:tailEnd type="none" w="med" len="med"/>
+                    </a:lnR>
+                    <a:lnT w="6350" cap="flat" cmpd="sng" algn="ctr">
+                      <a:solidFill>
+                        <a:srgbClr val="D6DEE5"/>
+                      </a:solidFill>
+                      <a:prstDash val="solid"/>
+                      <a:round/>
+                      <a:headEnd type="none" w="med" len="med"/>
+                      <a:tailEnd type="none" w="med" len="med"/>
+                    </a:lnT>
+                    <a:lnB w="6350" cap="flat" cmpd="sng" algn="ctr">
+                      <a:solidFill>
+                        <a:srgbClr val="D6DEE5"/>
+                      </a:solidFill>
+                      <a:prstDash val="solid"/>
+                      <a:round/>
+                      <a:headEnd type="none" w="med" len="med"/>
+                      <a:tailEnd type="none" w="med" len="med"/>
+                    </a:lnB>
+                    <a:solidFill>
+                      <a:srgbClr val="DCEFE8"/>
+                    </a:solidFill>
+                  </a:tcPr>
+                </a:tc>
+                <a:tc>
+                  <a:txBody>
+                    <a:bodyPr/>
+                    <a:lstStyle/>
+                    <a:p>
+                      <a:pPr algn="ctr" indent="0" marL="0">
+                        <a:buNone/>
+                      </a:pPr>
+                      <a:r>
+                        <a:rPr lang="en-US" sz="1000" dirty="0">
+                          <a:solidFill>
+                            <a:schemeClr val="tx1"/>
+                          </a:solidFill>
+                        </a:rPr>
+                        <a:t>€894 / €3,155 · 0.9</a:t>
+                      </a:r>
+                      <a:endParaRPr lang="en-US" sz="1000" dirty="0"/>
+                    </a:p>
+                  </a:txBody>
+                  <a:tcPr marL="91440" marR="91440" marT="45720" marB="45720" anchor="ctr">
+                    <a:lnL w="6350" cap="flat" cmpd="sng" algn="ctr">
+                      <a:solidFill>
+                        <a:srgbClr val="D6DEE5"/>
+                      </a:solidFill>
+                      <a:prstDash val="solid"/>
+                      <a:round/>
+                      <a:headEnd type="none" w="med" len="med"/>
+                      <a:tailEnd type="none" w="med" len="med"/>
+                    </a:lnL>
+                    <a:lnR w="6350" cap="flat" cmpd="sng" algn="ctr">
+                      <a:solidFill>
+                        <a:srgbClr val="D6DEE5"/>
+                      </a:solidFill>
+                      <a:prstDash val="solid"/>
+                      <a:round/>
+                      <a:headEnd type="none" w="med" len="med"/>
+                      <a:tailEnd type="none" w="med" len="med"/>
+                    </a:lnR>
+                    <a:lnT w="6350" cap="flat" cmpd="sng" algn="ctr">
+                      <a:solidFill>
+                        <a:srgbClr val="D6DEE5"/>
+                      </a:solidFill>
+                      <a:prstDash val="solid"/>
+                      <a:round/>
+                      <a:headEnd type="none" w="med" len="med"/>
+                      <a:tailEnd type="none" w="med" len="med"/>
+                    </a:lnT>
+                    <a:lnB w="6350" cap="flat" cmpd="sng" algn="ctr">
+                      <a:solidFill>
+                        <a:srgbClr val="D6DEE5"/>
+                      </a:solidFill>
+                      <a:prstDash val="solid"/>
+                      <a:round/>
+                      <a:headEnd type="none" w="med" len="med"/>
+                      <a:tailEnd type="none" w="med" len="med"/>
+                    </a:lnB>
+                    <a:solidFill>
+                      <a:srgbClr val="DCEFE8"/>
+                    </a:solidFill>
+                  </a:tcPr>
+                </a:tc>
+                <a:tc>
+                  <a:txBody>
+                    <a:bodyPr/>
+                    <a:lstStyle/>
+                    <a:p>
+                      <a:pPr algn="ctr" indent="0" marL="0">
+                        <a:buNone/>
+                      </a:pPr>
+                      <a:r>
+                        <a:rPr lang="en-US" sz="1000" dirty="0">
+                          <a:solidFill>
+                            <a:schemeClr val="tx1"/>
+                          </a:solidFill>
+                        </a:rPr>
+                        <a:t>€1,342 / €5,637 · –</a:t>
                       </a:r>
                       <a:endParaRPr lang="en-US" sz="1000" dirty="0"/>
                     </a:p>
@@ -14984,6 +15349,66 @@
                     </a:solidFill>
                   </a:tcPr>
                 </a:tc>
+              </a:tr>
+              <a:tr h="329184">
+                <a:tc>
+                  <a:txBody>
+                    <a:bodyPr/>
+                    <a:lstStyle/>
+                    <a:p>
+                      <a:pPr indent="0" marL="0">
+                        <a:buNone/>
+                      </a:pPr>
+                      <a:r>
+                        <a:rPr lang="en-US" sz="1000" dirty="0">
+                          <a:solidFill>
+                            <a:schemeClr val="tx1"/>
+                          </a:solidFill>
+                        </a:rPr>
+                        <a:t>Meta lead ads (passive blue-collar reach)</a:t>
+                      </a:r>
+                      <a:endParaRPr lang="en-US" sz="1000" dirty="0"/>
+                    </a:p>
+                  </a:txBody>
+                  <a:tcPr marL="91440" marR="91440" marT="45720" marB="45720" anchor="ctr">
+                    <a:lnL w="6350" cap="flat" cmpd="sng" algn="ctr">
+                      <a:solidFill>
+                        <a:srgbClr val="D6DEE5"/>
+                      </a:solidFill>
+                      <a:prstDash val="solid"/>
+                      <a:round/>
+                      <a:headEnd type="none" w="med" len="med"/>
+                      <a:tailEnd type="none" w="med" len="med"/>
+                    </a:lnL>
+                    <a:lnR w="6350" cap="flat" cmpd="sng" algn="ctr">
+                      <a:solidFill>
+                        <a:srgbClr val="D6DEE5"/>
+                      </a:solidFill>
+                      <a:prstDash val="solid"/>
+                      <a:round/>
+                      <a:headEnd type="none" w="med" len="med"/>
+                      <a:tailEnd type="none" w="med" len="med"/>
+                    </a:lnR>
+                    <a:lnT w="6350" cap="flat" cmpd="sng" algn="ctr">
+                      <a:solidFill>
+                        <a:srgbClr val="D6DEE5"/>
+                      </a:solidFill>
+                      <a:prstDash val="solid"/>
+                      <a:round/>
+                      <a:headEnd type="none" w="med" len="med"/>
+                      <a:tailEnd type="none" w="med" len="med"/>
+                    </a:lnT>
+                    <a:lnB w="6350" cap="flat" cmpd="sng" algn="ctr">
+                      <a:solidFill>
+                        <a:srgbClr val="D6DEE5"/>
+                      </a:solidFill>
+                      <a:prstDash val="solid"/>
+                      <a:round/>
+                      <a:headEnd type="none" w="med" len="med"/>
+                      <a:tailEnd type="none" w="med" len="med"/>
+                    </a:lnB>
+                  </a:tcPr>
+                </a:tc>
                 <a:tc>
                   <a:txBody>
                     <a:bodyPr/>
@@ -14998,7 +15423,7 @@
                             <a:schemeClr val="tx1"/>
                           </a:solidFill>
                         </a:rPr>
-                        <a:t>€386 / €1,624 · 1.8</a:t>
+                        <a:t>€1,120 / €3,556 · 9.5</a:t>
                       </a:r>
                       <a:endParaRPr lang="en-US" sz="1000" dirty="0"/>
                     </a:p>
@@ -15045,14 +15470,12 @@
                     </a:solidFill>
                   </a:tcPr>
                 </a:tc>
-              </a:tr>
-              <a:tr h="329184">
-                <a:tc>
-                  <a:txBody>
-                    <a:bodyPr/>
-                    <a:lstStyle/>
-                    <a:p>
-                      <a:pPr indent="0" marL="0">
+                <a:tc>
+                  <a:txBody>
+                    <a:bodyPr/>
+                    <a:lstStyle/>
+                    <a:p>
+                      <a:pPr algn="ctr" indent="0" marL="0">
                         <a:buNone/>
                       </a:pPr>
                       <a:r>
@@ -15061,65 +15484,7 @@
                             <a:schemeClr val="tx1"/>
                           </a:solidFill>
                         </a:rPr>
-                        <a:t>I1b Referrals (€1,000 bonus on hire)</a:t>
-                      </a:r>
-                      <a:endParaRPr lang="en-US" sz="1000" dirty="0"/>
-                    </a:p>
-                  </a:txBody>
-                  <a:tcPr marL="91440" marR="91440" marT="45720" marB="45720" anchor="ctr">
-                    <a:lnL w="6350" cap="flat" cmpd="sng" algn="ctr">
-                      <a:solidFill>
-                        <a:srgbClr val="D6DEE5"/>
-                      </a:solidFill>
-                      <a:prstDash val="solid"/>
-                      <a:round/>
-                      <a:headEnd type="none" w="med" len="med"/>
-                      <a:tailEnd type="none" w="med" len="med"/>
-                    </a:lnL>
-                    <a:lnR w="6350" cap="flat" cmpd="sng" algn="ctr">
-                      <a:solidFill>
-                        <a:srgbClr val="D6DEE5"/>
-                      </a:solidFill>
-                      <a:prstDash val="solid"/>
-                      <a:round/>
-                      <a:headEnd type="none" w="med" len="med"/>
-                      <a:tailEnd type="none" w="med" len="med"/>
-                    </a:lnR>
-                    <a:lnT w="6350" cap="flat" cmpd="sng" algn="ctr">
-                      <a:solidFill>
-                        <a:srgbClr val="D6DEE5"/>
-                      </a:solidFill>
-                      <a:prstDash val="solid"/>
-                      <a:round/>
-                      <a:headEnd type="none" w="med" len="med"/>
-                      <a:tailEnd type="none" w="med" len="med"/>
-                    </a:lnT>
-                    <a:lnB w="6350" cap="flat" cmpd="sng" algn="ctr">
-                      <a:solidFill>
-                        <a:srgbClr val="D6DEE5"/>
-                      </a:solidFill>
-                      <a:prstDash val="solid"/>
-                      <a:round/>
-                      <a:headEnd type="none" w="med" len="med"/>
-                      <a:tailEnd type="none" w="med" len="med"/>
-                    </a:lnB>
-                  </a:tcPr>
-                </a:tc>
-                <a:tc>
-                  <a:txBody>
-                    <a:bodyPr/>
-                    <a:lstStyle/>
-                    <a:p>
-                      <a:pPr algn="ctr" indent="0" marL="0">
-                        <a:buNone/>
-                      </a:pPr>
-                      <a:r>
-                        <a:rPr lang="en-US" sz="1000" dirty="0">
-                          <a:solidFill>
-                            <a:schemeClr val="tx1"/>
-                          </a:solidFill>
-                        </a:rPr>
-                        <a:t>€362 / €1,000 · 4.1</a:t>
+                        <a:t>€764 / €2,057 · 8.2</a:t>
                       </a:r>
                       <a:endParaRPr lang="en-US" sz="1000" dirty="0"/>
                     </a:p>
@@ -15177,10 +15542,128 @@
                       <a:r>
                         <a:rPr lang="en-US" sz="1000" dirty="0">
                           <a:solidFill>
+                            <a:schemeClr val="accent4"/>
+                          </a:solidFill>
+                        </a:rPr>
+                        <a:t>–</a:t>
+                      </a:r>
+                      <a:endParaRPr lang="en-US" sz="1000" dirty="0"/>
+                    </a:p>
+                  </a:txBody>
+                  <a:tcPr marL="91440" marR="91440" marT="45720" marB="45720" anchor="ctr">
+                    <a:lnL w="6350" cap="flat" cmpd="sng" algn="ctr">
+                      <a:solidFill>
+                        <a:srgbClr val="D6DEE5"/>
+                      </a:solidFill>
+                      <a:prstDash val="solid"/>
+                      <a:round/>
+                      <a:headEnd type="none" w="med" len="med"/>
+                      <a:tailEnd type="none" w="med" len="med"/>
+                    </a:lnL>
+                    <a:lnR w="6350" cap="flat" cmpd="sng" algn="ctr">
+                      <a:solidFill>
+                        <a:srgbClr val="D6DEE5"/>
+                      </a:solidFill>
+                      <a:prstDash val="solid"/>
+                      <a:round/>
+                      <a:headEnd type="none" w="med" len="med"/>
+                      <a:tailEnd type="none" w="med" len="med"/>
+                    </a:lnR>
+                    <a:lnT w="6350" cap="flat" cmpd="sng" algn="ctr">
+                      <a:solidFill>
+                        <a:srgbClr val="D6DEE5"/>
+                      </a:solidFill>
+                      <a:prstDash val="solid"/>
+                      <a:round/>
+                      <a:headEnd type="none" w="med" len="med"/>
+                      <a:tailEnd type="none" w="med" len="med"/>
+                    </a:lnT>
+                    <a:lnB w="6350" cap="flat" cmpd="sng" algn="ctr">
+                      <a:solidFill>
+                        <a:srgbClr val="D6DEE5"/>
+                      </a:solidFill>
+                      <a:prstDash val="solid"/>
+                      <a:round/>
+                      <a:headEnd type="none" w="med" len="med"/>
+                      <a:tailEnd type="none" w="med" len="med"/>
+                    </a:lnB>
+                  </a:tcPr>
+                </a:tc>
+                <a:tc>
+                  <a:txBody>
+                    <a:bodyPr/>
+                    <a:lstStyle/>
+                    <a:p>
+                      <a:pPr algn="ctr" indent="0" marL="0">
+                        <a:buNone/>
+                      </a:pPr>
+                      <a:r>
+                        <a:rPr lang="en-US" sz="1000" dirty="0">
+                          <a:solidFill>
+                            <a:schemeClr val="accent4"/>
+                          </a:solidFill>
+                        </a:rPr>
+                        <a:t>–</a:t>
+                      </a:r>
+                      <a:endParaRPr lang="en-US" sz="1000" dirty="0"/>
+                    </a:p>
+                  </a:txBody>
+                  <a:tcPr marL="91440" marR="91440" marT="45720" marB="45720" anchor="ctr">
+                    <a:lnL w="6350" cap="flat" cmpd="sng" algn="ctr">
+                      <a:solidFill>
+                        <a:srgbClr val="D6DEE5"/>
+                      </a:solidFill>
+                      <a:prstDash val="solid"/>
+                      <a:round/>
+                      <a:headEnd type="none" w="med" len="med"/>
+                      <a:tailEnd type="none" w="med" len="med"/>
+                    </a:lnL>
+                    <a:lnR w="6350" cap="flat" cmpd="sng" algn="ctr">
+                      <a:solidFill>
+                        <a:srgbClr val="D6DEE5"/>
+                      </a:solidFill>
+                      <a:prstDash val="solid"/>
+                      <a:round/>
+                      <a:headEnd type="none" w="med" len="med"/>
+                      <a:tailEnd type="none" w="med" len="med"/>
+                    </a:lnR>
+                    <a:lnT w="6350" cap="flat" cmpd="sng" algn="ctr">
+                      <a:solidFill>
+                        <a:srgbClr val="D6DEE5"/>
+                      </a:solidFill>
+                      <a:prstDash val="solid"/>
+                      <a:round/>
+                      <a:headEnd type="none" w="med" len="med"/>
+                      <a:tailEnd type="none" w="med" len="med"/>
+                    </a:lnT>
+                    <a:lnB w="6350" cap="flat" cmpd="sng" algn="ctr">
+                      <a:solidFill>
+                        <a:srgbClr val="D6DEE5"/>
+                      </a:solidFill>
+                      <a:prstDash val="solid"/>
+                      <a:round/>
+                      <a:headEnd type="none" w="med" len="med"/>
+                      <a:tailEnd type="none" w="med" len="med"/>
+                    </a:lnB>
+                  </a:tcPr>
+                </a:tc>
+              </a:tr>
+              <a:tr h="329184">
+                <a:tc>
+                  <a:txBody>
+                    <a:bodyPr/>
+                    <a:lstStyle/>
+                    <a:p>
+                      <a:pPr indent="0" marL="0">
+                        <a:buNone/>
+                      </a:pPr>
+                      <a:r>
+                        <a:rPr lang="en-US" sz="1000" dirty="0">
+                          <a:solidFill>
                             <a:schemeClr val="tx1"/>
                           </a:solidFill>
                         </a:rPr>
-                        <a:t>€427 / €1,000 · –</a:t>
+                        <a:t>I2 Handwerk → Industrie (new pool)</a:t>
                       </a:r>
                       <a:endParaRPr lang="en-US" sz="1000" dirty="0"/>
                     </a:p>
@@ -15222,9 +15705,6 @@
                       <a:headEnd type="none" w="med" len="med"/>
                       <a:tailEnd type="none" w="med" len="med"/>
                     </a:lnB>
-                    <a:solidFill>
-                      <a:srgbClr val="F2F4F6"/>
-                    </a:solidFill>
                   </a:tcPr>
                 </a:tc>
                 <a:tc>
@@ -15241,7 +15721,7 @@
                             <a:schemeClr val="tx1"/>
                           </a:solidFill>
                         </a:rPr>
-                        <a:t>€326 / €1,000 · 1.5</a:t>
+                        <a:t>€560 / €2,116 · 8.5</a:t>
                       </a:r>
                       <a:endParaRPr lang="en-US" sz="1000" dirty="0"/>
                     </a:p>
@@ -15299,10 +15779,244 @@
                       <a:r>
                         <a:rPr lang="en-US" sz="1000" dirty="0">
                           <a:solidFill>
+                            <a:schemeClr val="accent4"/>
+                          </a:solidFill>
+                        </a:rPr>
+                        <a:t>–</a:t>
+                      </a:r>
+                      <a:endParaRPr lang="en-US" sz="1000" dirty="0"/>
+                    </a:p>
+                  </a:txBody>
+                  <a:tcPr marL="91440" marR="91440" marT="45720" marB="45720" anchor="ctr">
+                    <a:lnL w="6350" cap="flat" cmpd="sng" algn="ctr">
+                      <a:solidFill>
+                        <a:srgbClr val="D6DEE5"/>
+                      </a:solidFill>
+                      <a:prstDash val="solid"/>
+                      <a:round/>
+                      <a:headEnd type="none" w="med" len="med"/>
+                      <a:tailEnd type="none" w="med" len="med"/>
+                    </a:lnL>
+                    <a:lnR w="6350" cap="flat" cmpd="sng" algn="ctr">
+                      <a:solidFill>
+                        <a:srgbClr val="D6DEE5"/>
+                      </a:solidFill>
+                      <a:prstDash val="solid"/>
+                      <a:round/>
+                      <a:headEnd type="none" w="med" len="med"/>
+                      <a:tailEnd type="none" w="med" len="med"/>
+                    </a:lnR>
+                    <a:lnT w="6350" cap="flat" cmpd="sng" algn="ctr">
+                      <a:solidFill>
+                        <a:srgbClr val="D6DEE5"/>
+                      </a:solidFill>
+                      <a:prstDash val="solid"/>
+                      <a:round/>
+                      <a:headEnd type="none" w="med" len="med"/>
+                      <a:tailEnd type="none" w="med" len="med"/>
+                    </a:lnT>
+                    <a:lnB w="6350" cap="flat" cmpd="sng" algn="ctr">
+                      <a:solidFill>
+                        <a:srgbClr val="D6DEE5"/>
+                      </a:solidFill>
+                      <a:prstDash val="solid"/>
+                      <a:round/>
+                      <a:headEnd type="none" w="med" len="med"/>
+                      <a:tailEnd type="none" w="med" len="med"/>
+                    </a:lnB>
+                  </a:tcPr>
+                </a:tc>
+                <a:tc>
+                  <a:txBody>
+                    <a:bodyPr/>
+                    <a:lstStyle/>
+                    <a:p>
+                      <a:pPr algn="ctr" indent="0" marL="0">
+                        <a:buNone/>
+                      </a:pPr>
+                      <a:r>
+                        <a:rPr lang="en-US" sz="1000" dirty="0">
+                          <a:solidFill>
+                            <a:schemeClr val="accent4"/>
+                          </a:solidFill>
+                        </a:rPr>
+                        <a:t>–</a:t>
+                      </a:r>
+                      <a:endParaRPr lang="en-US" sz="1000" dirty="0"/>
+                    </a:p>
+                  </a:txBody>
+                  <a:tcPr marL="91440" marR="91440" marT="45720" marB="45720" anchor="ctr">
+                    <a:lnL w="6350" cap="flat" cmpd="sng" algn="ctr">
+                      <a:solidFill>
+                        <a:srgbClr val="D6DEE5"/>
+                      </a:solidFill>
+                      <a:prstDash val="solid"/>
+                      <a:round/>
+                      <a:headEnd type="none" w="med" len="med"/>
+                      <a:tailEnd type="none" w="med" len="med"/>
+                    </a:lnL>
+                    <a:lnR w="6350" cap="flat" cmpd="sng" algn="ctr">
+                      <a:solidFill>
+                        <a:srgbClr val="D6DEE5"/>
+                      </a:solidFill>
+                      <a:prstDash val="solid"/>
+                      <a:round/>
+                      <a:headEnd type="none" w="med" len="med"/>
+                      <a:tailEnd type="none" w="med" len="med"/>
+                    </a:lnR>
+                    <a:lnT w="6350" cap="flat" cmpd="sng" algn="ctr">
+                      <a:solidFill>
+                        <a:srgbClr val="D6DEE5"/>
+                      </a:solidFill>
+                      <a:prstDash val="solid"/>
+                      <a:round/>
+                      <a:headEnd type="none" w="med" len="med"/>
+                      <a:tailEnd type="none" w="med" len="med"/>
+                    </a:lnT>
+                    <a:lnB w="6350" cap="flat" cmpd="sng" algn="ctr">
+                      <a:solidFill>
+                        <a:srgbClr val="D6DEE5"/>
+                      </a:solidFill>
+                      <a:prstDash val="solid"/>
+                      <a:round/>
+                      <a:headEnd type="none" w="med" len="med"/>
+                      <a:tailEnd type="none" w="med" len="med"/>
+                    </a:lnB>
+                  </a:tcPr>
+                </a:tc>
+                <a:tc>
+                  <a:txBody>
+                    <a:bodyPr/>
+                    <a:lstStyle/>
+                    <a:p>
+                      <a:pPr algn="ctr" indent="0" marL="0">
+                        <a:buNone/>
+                      </a:pPr>
+                      <a:r>
+                        <a:rPr lang="en-US" sz="1000" dirty="0">
+                          <a:solidFill>
+                            <a:schemeClr val="accent4"/>
+                          </a:solidFill>
+                        </a:rPr>
+                        <a:t>–</a:t>
+                      </a:r>
+                      <a:endParaRPr lang="en-US" sz="1000" dirty="0"/>
+                    </a:p>
+                  </a:txBody>
+                  <a:tcPr marL="91440" marR="91440" marT="45720" marB="45720" anchor="ctr">
+                    <a:lnL w="6350" cap="flat" cmpd="sng" algn="ctr">
+                      <a:solidFill>
+                        <a:srgbClr val="D6DEE5"/>
+                      </a:solidFill>
+                      <a:prstDash val="solid"/>
+                      <a:round/>
+                      <a:headEnd type="none" w="med" len="med"/>
+                      <a:tailEnd type="none" w="med" len="med"/>
+                    </a:lnL>
+                    <a:lnR w="6350" cap="flat" cmpd="sng" algn="ctr">
+                      <a:solidFill>
+                        <a:srgbClr val="D6DEE5"/>
+                      </a:solidFill>
+                      <a:prstDash val="solid"/>
+                      <a:round/>
+                      <a:headEnd type="none" w="med" len="med"/>
+                      <a:tailEnd type="none" w="med" len="med"/>
+                    </a:lnR>
+                    <a:lnT w="6350" cap="flat" cmpd="sng" algn="ctr">
+                      <a:solidFill>
+                        <a:srgbClr val="D6DEE5"/>
+                      </a:solidFill>
+                      <a:prstDash val="solid"/>
+                      <a:round/>
+                      <a:headEnd type="none" w="med" len="med"/>
+                      <a:tailEnd type="none" w="med" len="med"/>
+                    </a:lnT>
+                    <a:lnB w="6350" cap="flat" cmpd="sng" algn="ctr">
+                      <a:solidFill>
+                        <a:srgbClr val="D6DEE5"/>
+                      </a:solidFill>
+                      <a:prstDash val="solid"/>
+                      <a:round/>
+                      <a:headEnd type="none" w="med" len="med"/>
+                      <a:tailEnd type="none" w="med" len="med"/>
+                    </a:lnB>
+                  </a:tcPr>
+                </a:tc>
+              </a:tr>
+              <a:tr h="329184">
+                <a:tc>
+                  <a:txBody>
+                    <a:bodyPr/>
+                    <a:lstStyle/>
+                    <a:p>
+                      <a:pPr indent="0" marL="0">
+                        <a:buNone/>
+                      </a:pPr>
+                      <a:r>
+                        <a:rPr lang="en-US" sz="1000" dirty="0">
+                          <a:solidFill>
                             <a:schemeClr val="tx1"/>
                           </a:solidFill>
                         </a:rPr>
-                        <a:t>€274 / €1,000 · 1.0</a:t>
+                        <a:t>Programmatic (Indeed, Jooble, Talent.com…)</a:t>
+                      </a:r>
+                      <a:endParaRPr lang="en-US" sz="1000" dirty="0"/>
+                    </a:p>
+                  </a:txBody>
+                  <a:tcPr marL="91440" marR="91440" marT="45720" marB="45720" anchor="ctr">
+                    <a:lnL w="6350" cap="flat" cmpd="sng" algn="ctr">
+                      <a:solidFill>
+                        <a:srgbClr val="D6DEE5"/>
+                      </a:solidFill>
+                      <a:prstDash val="solid"/>
+                      <a:round/>
+                      <a:headEnd type="none" w="med" len="med"/>
+                      <a:tailEnd type="none" w="med" len="med"/>
+                    </a:lnL>
+                    <a:lnR w="6350" cap="flat" cmpd="sng" algn="ctr">
+                      <a:solidFill>
+                        <a:srgbClr val="D6DEE5"/>
+                      </a:solidFill>
+                      <a:prstDash val="solid"/>
+                      <a:round/>
+                      <a:headEnd type="none" w="med" len="med"/>
+                      <a:tailEnd type="none" w="med" len="med"/>
+                    </a:lnR>
+                    <a:lnT w="6350" cap="flat" cmpd="sng" algn="ctr">
+                      <a:solidFill>
+                        <a:srgbClr val="D6DEE5"/>
+                      </a:solidFill>
+                      <a:prstDash val="solid"/>
+                      <a:round/>
+                      <a:headEnd type="none" w="med" len="med"/>
+                      <a:tailEnd type="none" w="med" len="med"/>
+                    </a:lnT>
+                    <a:lnB w="6350" cap="flat" cmpd="sng" algn="ctr">
+                      <a:solidFill>
+                        <a:srgbClr val="D6DEE5"/>
+                      </a:solidFill>
+                      <a:prstDash val="solid"/>
+                      <a:round/>
+                      <a:headEnd type="none" w="med" len="med"/>
+                      <a:tailEnd type="none" w="med" len="med"/>
+                    </a:lnB>
+                  </a:tcPr>
+                </a:tc>
+                <a:tc>
+                  <a:txBody>
+                    <a:bodyPr/>
+                    <a:lstStyle/>
+                    <a:p>
+                      <a:pPr algn="ctr" indent="0" marL="0">
+                        <a:buNone/>
+                      </a:pPr>
+                      <a:r>
+                        <a:rPr lang="en-US" sz="1000" dirty="0">
+                          <a:solidFill>
+                            <a:schemeClr val="tx1"/>
+                          </a:solidFill>
+                        </a:rPr>
+                        <a:t>€1,193 / €3,786 · 3.2</a:t>
                       </a:r>
                       <a:endParaRPr lang="en-US" sz="1000" dirty="0"/>
                     </a:p>
@@ -15349,14 +16063,12 @@
                     </a:solidFill>
                   </a:tcPr>
                 </a:tc>
-              </a:tr>
-              <a:tr h="329184">
-                <a:tc>
-                  <a:txBody>
-                    <a:bodyPr/>
-                    <a:lstStyle/>
-                    <a:p>
-                      <a:pPr indent="0" marL="0">
+                <a:tc>
+                  <a:txBody>
+                    <a:bodyPr/>
+                    <a:lstStyle/>
+                    <a:p>
+                      <a:pPr algn="ctr" indent="0" marL="0">
                         <a:buNone/>
                       </a:pPr>
                       <a:r>
@@ -15365,7 +16077,7 @@
                             <a:schemeClr val="tx1"/>
                           </a:solidFill>
                         </a:rPr>
-                        <a:t>LinkedIn (PLC/TIA and Meister profiles)</a:t>
+                        <a:t>€813 / €2,190 · 0.3 T</a:t>
                       </a:r>
                       <a:endParaRPr lang="en-US" sz="1000" dirty="0"/>
                     </a:p>
@@ -15407,6 +16119,9 @@
                       <a:headEnd type="none" w="med" len="med"/>
                       <a:tailEnd type="none" w="med" len="med"/>
                     </a:lnB>
+                    <a:solidFill>
+                      <a:srgbClr val="FBEBC8"/>
+                    </a:solidFill>
                   </a:tcPr>
                 </a:tc>
                 <a:tc>
@@ -15420,126 +16135,10 @@
                       <a:r>
                         <a:rPr lang="en-US" sz="1000" dirty="0">
                           <a:solidFill>
-                            <a:schemeClr val="accent4"/>
-                          </a:solidFill>
-                        </a:rPr>
-                        <a:t>–</a:t>
-                      </a:r>
-                      <a:endParaRPr lang="en-US" sz="1000" dirty="0"/>
-                    </a:p>
-                  </a:txBody>
-                  <a:tcPr marL="91440" marR="91440" marT="45720" marB="45720" anchor="ctr">
-                    <a:lnL w="6350" cap="flat" cmpd="sng" algn="ctr">
-                      <a:solidFill>
-                        <a:srgbClr val="D6DEE5"/>
-                      </a:solidFill>
-                      <a:prstDash val="solid"/>
-                      <a:round/>
-                      <a:headEnd type="none" w="med" len="med"/>
-                      <a:tailEnd type="none" w="med" len="med"/>
-                    </a:lnL>
-                    <a:lnR w="6350" cap="flat" cmpd="sng" algn="ctr">
-                      <a:solidFill>
-                        <a:srgbClr val="D6DEE5"/>
-                      </a:solidFill>
-                      <a:prstDash val="solid"/>
-                      <a:round/>
-                      <a:headEnd type="none" w="med" len="med"/>
-                      <a:tailEnd type="none" w="med" len="med"/>
-                    </a:lnR>
-                    <a:lnT w="6350" cap="flat" cmpd="sng" algn="ctr">
-                      <a:solidFill>
-                        <a:srgbClr val="D6DEE5"/>
-                      </a:solidFill>
-                      <a:prstDash val="solid"/>
-                      <a:round/>
-                      <a:headEnd type="none" w="med" len="med"/>
-                      <a:tailEnd type="none" w="med" len="med"/>
-                    </a:lnT>
-                    <a:lnB w="6350" cap="flat" cmpd="sng" algn="ctr">
-                      <a:solidFill>
-                        <a:srgbClr val="D6DEE5"/>
-                      </a:solidFill>
-                      <a:prstDash val="solid"/>
-                      <a:round/>
-                      <a:headEnd type="none" w="med" len="med"/>
-                      <a:tailEnd type="none" w="med" len="med"/>
-                    </a:lnB>
-                  </a:tcPr>
-                </a:tc>
-                <a:tc>
-                  <a:txBody>
-                    <a:bodyPr/>
-                    <a:lstStyle/>
-                    <a:p>
-                      <a:pPr algn="ctr" indent="0" marL="0">
-                        <a:buNone/>
-                      </a:pPr>
-                      <a:r>
-                        <a:rPr lang="en-US" sz="1000" dirty="0">
-                          <a:solidFill>
-                            <a:schemeClr val="accent4"/>
-                          </a:solidFill>
-                        </a:rPr>
-                        <a:t>–</a:t>
-                      </a:r>
-                      <a:endParaRPr lang="en-US" sz="1000" dirty="0"/>
-                    </a:p>
-                  </a:txBody>
-                  <a:tcPr marL="91440" marR="91440" marT="45720" marB="45720" anchor="ctr">
-                    <a:lnL w="6350" cap="flat" cmpd="sng" algn="ctr">
-                      <a:solidFill>
-                        <a:srgbClr val="D6DEE5"/>
-                      </a:solidFill>
-                      <a:prstDash val="solid"/>
-                      <a:round/>
-                      <a:headEnd type="none" w="med" len="med"/>
-                      <a:tailEnd type="none" w="med" len="med"/>
-                    </a:lnL>
-                    <a:lnR w="6350" cap="flat" cmpd="sng" algn="ctr">
-                      <a:solidFill>
-                        <a:srgbClr val="D6DEE5"/>
-                      </a:solidFill>
-                      <a:prstDash val="solid"/>
-                      <a:round/>
-                      <a:headEnd type="none" w="med" len="med"/>
-                      <a:tailEnd type="none" w="med" len="med"/>
-                    </a:lnR>
-                    <a:lnT w="6350" cap="flat" cmpd="sng" algn="ctr">
-                      <a:solidFill>
-                        <a:srgbClr val="D6DEE5"/>
-                      </a:solidFill>
-                      <a:prstDash val="solid"/>
-                      <a:round/>
-                      <a:headEnd type="none" w="med" len="med"/>
-                      <a:tailEnd type="none" w="med" len="med"/>
-                    </a:lnT>
-                    <a:lnB w="6350" cap="flat" cmpd="sng" algn="ctr">
-                      <a:solidFill>
-                        <a:srgbClr val="D6DEE5"/>
-                      </a:solidFill>
-                      <a:prstDash val="solid"/>
-                      <a:round/>
-                      <a:headEnd type="none" w="med" len="med"/>
-                      <a:tailEnd type="none" w="med" len="med"/>
-                    </a:lnB>
-                  </a:tcPr>
-                </a:tc>
-                <a:tc>
-                  <a:txBody>
-                    <a:bodyPr/>
-                    <a:lstStyle/>
-                    <a:p>
-                      <a:pPr algn="ctr" indent="0" marL="0">
-                        <a:buNone/>
-                      </a:pPr>
-                      <a:r>
-                        <a:rPr lang="en-US" sz="1000" dirty="0">
-                          <a:solidFill>
                             <a:schemeClr val="tx1"/>
                           </a:solidFill>
                         </a:rPr>
-                        <a:t>€384 / €1,354 · 8.6</a:t>
+                        <a:t>€1,193 / €4,207 · 0.5</a:t>
                       </a:r>
                       <a:endParaRPr lang="en-US" sz="1000" dirty="0"/>
                     </a:p>
@@ -15600,7 +16199,244 @@
                             <a:schemeClr val="tx1"/>
                           </a:solidFill>
                         </a:rPr>
-                        <a:t>€480 / €2,017 · 4.5</a:t>
+                        <a:t>€1,789 / €7,516 · 0.1 T</a:t>
+                      </a:r>
+                      <a:endParaRPr lang="en-US" sz="1000" dirty="0"/>
+                    </a:p>
+                  </a:txBody>
+                  <a:tcPr marL="91440" marR="91440" marT="45720" marB="45720" anchor="ctr">
+                    <a:lnL w="6350" cap="flat" cmpd="sng" algn="ctr">
+                      <a:solidFill>
+                        <a:srgbClr val="D6DEE5"/>
+                      </a:solidFill>
+                      <a:prstDash val="solid"/>
+                      <a:round/>
+                      <a:headEnd type="none" w="med" len="med"/>
+                      <a:tailEnd type="none" w="med" len="med"/>
+                    </a:lnL>
+                    <a:lnR w="6350" cap="flat" cmpd="sng" algn="ctr">
+                      <a:solidFill>
+                        <a:srgbClr val="D6DEE5"/>
+                      </a:solidFill>
+                      <a:prstDash val="solid"/>
+                      <a:round/>
+                      <a:headEnd type="none" w="med" len="med"/>
+                      <a:tailEnd type="none" w="med" len="med"/>
+                    </a:lnR>
+                    <a:lnT w="6350" cap="flat" cmpd="sng" algn="ctr">
+                      <a:solidFill>
+                        <a:srgbClr val="D6DEE5"/>
+                      </a:solidFill>
+                      <a:prstDash val="solid"/>
+                      <a:round/>
+                      <a:headEnd type="none" w="med" len="med"/>
+                      <a:tailEnd type="none" w="med" len="med"/>
+                    </a:lnT>
+                    <a:lnB w="6350" cap="flat" cmpd="sng" algn="ctr">
+                      <a:solidFill>
+                        <a:srgbClr val="D6DEE5"/>
+                      </a:solidFill>
+                      <a:prstDash val="solid"/>
+                      <a:round/>
+                      <a:headEnd type="none" w="med" len="med"/>
+                      <a:tailEnd type="none" w="med" len="med"/>
+                    </a:lnB>
+                    <a:solidFill>
+                      <a:srgbClr val="FBEBC8"/>
+                    </a:solidFill>
+                  </a:tcPr>
+                </a:tc>
+              </a:tr>
+              <a:tr h="329184">
+                <a:tc>
+                  <a:txBody>
+                    <a:bodyPr/>
+                    <a:lstStyle/>
+                    <a:p>
+                      <a:pPr indent="0" marL="0">
+                        <a:buNone/>
+                      </a:pPr>
+                      <a:r>
+                        <a:rPr lang="en-US" sz="1000" dirty="0">
+                          <a:solidFill>
+                            <a:schemeClr val="tx1"/>
+                          </a:solidFill>
+                        </a:rPr>
+                        <a:t>LinkedIn (PLC/TIA and Meister profiles)</a:t>
+                      </a:r>
+                      <a:endParaRPr lang="en-US" sz="1000" dirty="0"/>
+                    </a:p>
+                  </a:txBody>
+                  <a:tcPr marL="91440" marR="91440" marT="45720" marB="45720" anchor="ctr">
+                    <a:lnL w="6350" cap="flat" cmpd="sng" algn="ctr">
+                      <a:solidFill>
+                        <a:srgbClr val="D6DEE5"/>
+                      </a:solidFill>
+                      <a:prstDash val="solid"/>
+                      <a:round/>
+                      <a:headEnd type="none" w="med" len="med"/>
+                      <a:tailEnd type="none" w="med" len="med"/>
+                    </a:lnL>
+                    <a:lnR w="6350" cap="flat" cmpd="sng" algn="ctr">
+                      <a:solidFill>
+                        <a:srgbClr val="D6DEE5"/>
+                      </a:solidFill>
+                      <a:prstDash val="solid"/>
+                      <a:round/>
+                      <a:headEnd type="none" w="med" len="med"/>
+                      <a:tailEnd type="none" w="med" len="med"/>
+                    </a:lnR>
+                    <a:lnT w="6350" cap="flat" cmpd="sng" algn="ctr">
+                      <a:solidFill>
+                        <a:srgbClr val="D6DEE5"/>
+                      </a:solidFill>
+                      <a:prstDash val="solid"/>
+                      <a:round/>
+                      <a:headEnd type="none" w="med" len="med"/>
+                      <a:tailEnd type="none" w="med" len="med"/>
+                    </a:lnT>
+                    <a:lnB w="6350" cap="flat" cmpd="sng" algn="ctr">
+                      <a:solidFill>
+                        <a:srgbClr val="D6DEE5"/>
+                      </a:solidFill>
+                      <a:prstDash val="solid"/>
+                      <a:round/>
+                      <a:headEnd type="none" w="med" len="med"/>
+                      <a:tailEnd type="none" w="med" len="med"/>
+                    </a:lnB>
+                  </a:tcPr>
+                </a:tc>
+                <a:tc>
+                  <a:txBody>
+                    <a:bodyPr/>
+                    <a:lstStyle/>
+                    <a:p>
+                      <a:pPr algn="ctr" indent="0" marL="0">
+                        <a:buNone/>
+                      </a:pPr>
+                      <a:r>
+                        <a:rPr lang="en-US" sz="1000" dirty="0">
+                          <a:solidFill>
+                            <a:schemeClr val="accent4"/>
+                          </a:solidFill>
+                        </a:rPr>
+                        <a:t>–</a:t>
+                      </a:r>
+                      <a:endParaRPr lang="en-US" sz="1000" dirty="0"/>
+                    </a:p>
+                  </a:txBody>
+                  <a:tcPr marL="91440" marR="91440" marT="45720" marB="45720" anchor="ctr">
+                    <a:lnL w="6350" cap="flat" cmpd="sng" algn="ctr">
+                      <a:solidFill>
+                        <a:srgbClr val="D6DEE5"/>
+                      </a:solidFill>
+                      <a:prstDash val="solid"/>
+                      <a:round/>
+                      <a:headEnd type="none" w="med" len="med"/>
+                      <a:tailEnd type="none" w="med" len="med"/>
+                    </a:lnL>
+                    <a:lnR w="6350" cap="flat" cmpd="sng" algn="ctr">
+                      <a:solidFill>
+                        <a:srgbClr val="D6DEE5"/>
+                      </a:solidFill>
+                      <a:prstDash val="solid"/>
+                      <a:round/>
+                      <a:headEnd type="none" w="med" len="med"/>
+                      <a:tailEnd type="none" w="med" len="med"/>
+                    </a:lnR>
+                    <a:lnT w="6350" cap="flat" cmpd="sng" algn="ctr">
+                      <a:solidFill>
+                        <a:srgbClr val="D6DEE5"/>
+                      </a:solidFill>
+                      <a:prstDash val="solid"/>
+                      <a:round/>
+                      <a:headEnd type="none" w="med" len="med"/>
+                      <a:tailEnd type="none" w="med" len="med"/>
+                    </a:lnT>
+                    <a:lnB w="6350" cap="flat" cmpd="sng" algn="ctr">
+                      <a:solidFill>
+                        <a:srgbClr val="D6DEE5"/>
+                      </a:solidFill>
+                      <a:prstDash val="solid"/>
+                      <a:round/>
+                      <a:headEnd type="none" w="med" len="med"/>
+                      <a:tailEnd type="none" w="med" len="med"/>
+                    </a:lnB>
+                  </a:tcPr>
+                </a:tc>
+                <a:tc>
+                  <a:txBody>
+                    <a:bodyPr/>
+                    <a:lstStyle/>
+                    <a:p>
+                      <a:pPr algn="ctr" indent="0" marL="0">
+                        <a:buNone/>
+                      </a:pPr>
+                      <a:r>
+                        <a:rPr lang="en-US" sz="1000" dirty="0">
+                          <a:solidFill>
+                            <a:schemeClr val="accent4"/>
+                          </a:solidFill>
+                        </a:rPr>
+                        <a:t>–</a:t>
+                      </a:r>
+                      <a:endParaRPr lang="en-US" sz="1000" dirty="0"/>
+                    </a:p>
+                  </a:txBody>
+                  <a:tcPr marL="91440" marR="91440" marT="45720" marB="45720" anchor="ctr">
+                    <a:lnL w="6350" cap="flat" cmpd="sng" algn="ctr">
+                      <a:solidFill>
+                        <a:srgbClr val="D6DEE5"/>
+                      </a:solidFill>
+                      <a:prstDash val="solid"/>
+                      <a:round/>
+                      <a:headEnd type="none" w="med" len="med"/>
+                      <a:tailEnd type="none" w="med" len="med"/>
+                    </a:lnL>
+                    <a:lnR w="6350" cap="flat" cmpd="sng" algn="ctr">
+                      <a:solidFill>
+                        <a:srgbClr val="D6DEE5"/>
+                      </a:solidFill>
+                      <a:prstDash val="solid"/>
+                      <a:round/>
+                      <a:headEnd type="none" w="med" len="med"/>
+                      <a:tailEnd type="none" w="med" len="med"/>
+                    </a:lnR>
+                    <a:lnT w="6350" cap="flat" cmpd="sng" algn="ctr">
+                      <a:solidFill>
+                        <a:srgbClr val="D6DEE5"/>
+                      </a:solidFill>
+                      <a:prstDash val="solid"/>
+                      <a:round/>
+                      <a:headEnd type="none" w="med" len="med"/>
+                      <a:tailEnd type="none" w="med" len="med"/>
+                    </a:lnT>
+                    <a:lnB w="6350" cap="flat" cmpd="sng" algn="ctr">
+                      <a:solidFill>
+                        <a:srgbClr val="D6DEE5"/>
+                      </a:solidFill>
+                      <a:prstDash val="solid"/>
+                      <a:round/>
+                      <a:headEnd type="none" w="med" len="med"/>
+                      <a:tailEnd type="none" w="med" len="med"/>
+                    </a:lnB>
+                  </a:tcPr>
+                </a:tc>
+                <a:tc>
+                  <a:txBody>
+                    <a:bodyPr/>
+                    <a:lstStyle/>
+                    <a:p>
+                      <a:pPr algn="ctr" indent="0" marL="0">
+                        <a:buNone/>
+                      </a:pPr>
+                      <a:r>
+                        <a:rPr lang="en-US" sz="1000" dirty="0">
+                          <a:solidFill>
+                            <a:schemeClr val="tx1"/>
+                          </a:solidFill>
+                        </a:rPr>
+                        <a:t>€711 / €2,508 · 10.0</a:t>
                       </a:r>
                       <a:endParaRPr lang="en-US" sz="1000" dirty="0"/>
                     </a:p>
@@ -15647,6 +16483,67 @@
                     </a:solidFill>
                   </a:tcPr>
                 </a:tc>
+                <a:tc>
+                  <a:txBody>
+                    <a:bodyPr/>
+                    <a:lstStyle/>
+                    <a:p>
+                      <a:pPr algn="ctr" indent="0" marL="0">
+                        <a:buNone/>
+                      </a:pPr>
+                      <a:r>
+                        <a:rPr lang="en-US" sz="1000" dirty="0">
+                          <a:solidFill>
+                            <a:schemeClr val="tx1"/>
+                          </a:solidFill>
+                        </a:rPr>
+                        <a:t>€1,067 / €4,482 · 8.3</a:t>
+                      </a:r>
+                      <a:endParaRPr lang="en-US" sz="1000" dirty="0"/>
+                    </a:p>
+                  </a:txBody>
+                  <a:tcPr marL="91440" marR="91440" marT="45720" marB="45720" anchor="ctr">
+                    <a:lnL w="6350" cap="flat" cmpd="sng" algn="ctr">
+                      <a:solidFill>
+                        <a:srgbClr val="D6DEE5"/>
+                      </a:solidFill>
+                      <a:prstDash val="solid"/>
+                      <a:round/>
+                      <a:headEnd type="none" w="med" len="med"/>
+                      <a:tailEnd type="none" w="med" len="med"/>
+                    </a:lnL>
+                    <a:lnR w="6350" cap="flat" cmpd="sng" algn="ctr">
+                      <a:solidFill>
+                        <a:srgbClr val="D6DEE5"/>
+                      </a:solidFill>
+                      <a:prstDash val="solid"/>
+                      <a:round/>
+                      <a:headEnd type="none" w="med" len="med"/>
+                      <a:tailEnd type="none" w="med" len="med"/>
+                    </a:lnR>
+                    <a:lnT w="6350" cap="flat" cmpd="sng" algn="ctr">
+                      <a:solidFill>
+                        <a:srgbClr val="D6DEE5"/>
+                      </a:solidFill>
+                      <a:prstDash val="solid"/>
+                      <a:round/>
+                      <a:headEnd type="none" w="med" len="med"/>
+                      <a:tailEnd type="none" w="med" len="med"/>
+                    </a:lnT>
+                    <a:lnB w="6350" cap="flat" cmpd="sng" algn="ctr">
+                      <a:solidFill>
+                        <a:srgbClr val="D6DEE5"/>
+                      </a:solidFill>
+                      <a:prstDash val="solid"/>
+                      <a:round/>
+                      <a:headEnd type="none" w="med" len="med"/>
+                      <a:tailEnd type="none" w="med" len="med"/>
+                    </a:lnB>
+                    <a:solidFill>
+                      <a:srgbClr val="DCEFE8"/>
+                    </a:solidFill>
+                  </a:tcPr>
+                </a:tc>
               </a:tr>
               <a:tr h="329184">
                 <a:tc>
@@ -15663,7 +16560,7 @@
                             <a:schemeClr val="tx1"/>
                           </a:solidFill>
                         </a:rPr>
-                        <a:t>Meta lead ads (passive blue-collar reach)</a:t>
+                        <a:t>Google Search (high intent, low volume)</a:t>
                       </a:r>
                       <a:endParaRPr lang="en-US" sz="1000" dirty="0"/>
                     </a:p>
@@ -15721,7 +16618,7 @@
                             <a:schemeClr val="tx1"/>
                           </a:solidFill>
                         </a:rPr>
-                        <a:t>€1,680 / €5,333 · 0.1 T</a:t>
+                        <a:t>€1,681 / €5,336 · 0.1 T</a:t>
                       </a:r>
                       <a:endParaRPr lang="en-US" sz="1000" dirty="0"/>
                     </a:p>
@@ -15782,7 +16679,7 @@
                             <a:schemeClr val="tx1"/>
                           </a:solidFill>
                         </a:rPr>
-                        <a:t>€700 / €1,886 · 0.4 T</a:t>
+                        <a:t>€1,146 / €3,087 · 0.2 T</a:t>
                       </a:r>
                       <a:endParaRPr lang="en-US" sz="1000" dirty="0"/>
                     </a:p>
@@ -15840,247 +16737,10 @@
                       <a:r>
                         <a:rPr lang="en-US" sz="1000" dirty="0">
                           <a:solidFill>
-                            <a:schemeClr val="accent4"/>
-                          </a:solidFill>
-                        </a:rPr>
-                        <a:t>–</a:t>
-                      </a:r>
-                      <a:endParaRPr lang="en-US" sz="1000" dirty="0"/>
-                    </a:p>
-                  </a:txBody>
-                  <a:tcPr marL="91440" marR="91440" marT="45720" marB="45720" anchor="ctr">
-                    <a:lnL w="6350" cap="flat" cmpd="sng" algn="ctr">
-                      <a:solidFill>
-                        <a:srgbClr val="D6DEE5"/>
-                      </a:solidFill>
-                      <a:prstDash val="solid"/>
-                      <a:round/>
-                      <a:headEnd type="none" w="med" len="med"/>
-                      <a:tailEnd type="none" w="med" len="med"/>
-                    </a:lnL>
-                    <a:lnR w="6350" cap="flat" cmpd="sng" algn="ctr">
-                      <a:solidFill>
-                        <a:srgbClr val="D6DEE5"/>
-                      </a:solidFill>
-                      <a:prstDash val="solid"/>
-                      <a:round/>
-                      <a:headEnd type="none" w="med" len="med"/>
-                      <a:tailEnd type="none" w="med" len="med"/>
-                    </a:lnR>
-                    <a:lnT w="6350" cap="flat" cmpd="sng" algn="ctr">
-                      <a:solidFill>
-                        <a:srgbClr val="D6DEE5"/>
-                      </a:solidFill>
-                      <a:prstDash val="solid"/>
-                      <a:round/>
-                      <a:headEnd type="none" w="med" len="med"/>
-                      <a:tailEnd type="none" w="med" len="med"/>
-                    </a:lnT>
-                    <a:lnB w="6350" cap="flat" cmpd="sng" algn="ctr">
-                      <a:solidFill>
-                        <a:srgbClr val="D6DEE5"/>
-                      </a:solidFill>
-                      <a:prstDash val="solid"/>
-                      <a:round/>
-                      <a:headEnd type="none" w="med" len="med"/>
-                      <a:tailEnd type="none" w="med" len="med"/>
-                    </a:lnB>
-                  </a:tcPr>
-                </a:tc>
-                <a:tc>
-                  <a:txBody>
-                    <a:bodyPr/>
-                    <a:lstStyle/>
-                    <a:p>
-                      <a:pPr algn="ctr" indent="0" marL="0">
-                        <a:buNone/>
-                      </a:pPr>
-                      <a:r>
-                        <a:rPr lang="en-US" sz="1000" dirty="0">
-                          <a:solidFill>
-                            <a:schemeClr val="accent4"/>
-                          </a:solidFill>
-                        </a:rPr>
-                        <a:t>–</a:t>
-                      </a:r>
-                      <a:endParaRPr lang="en-US" sz="1000" dirty="0"/>
-                    </a:p>
-                  </a:txBody>
-                  <a:tcPr marL="91440" marR="91440" marT="45720" marB="45720" anchor="ctr">
-                    <a:lnL w="6350" cap="flat" cmpd="sng" algn="ctr">
-                      <a:solidFill>
-                        <a:srgbClr val="D6DEE5"/>
-                      </a:solidFill>
-                      <a:prstDash val="solid"/>
-                      <a:round/>
-                      <a:headEnd type="none" w="med" len="med"/>
-                      <a:tailEnd type="none" w="med" len="med"/>
-                    </a:lnL>
-                    <a:lnR w="6350" cap="flat" cmpd="sng" algn="ctr">
-                      <a:solidFill>
-                        <a:srgbClr val="D6DEE5"/>
-                      </a:solidFill>
-                      <a:prstDash val="solid"/>
-                      <a:round/>
-                      <a:headEnd type="none" w="med" len="med"/>
-                      <a:tailEnd type="none" w="med" len="med"/>
-                    </a:lnR>
-                    <a:lnT w="6350" cap="flat" cmpd="sng" algn="ctr">
-                      <a:solidFill>
-                        <a:srgbClr val="D6DEE5"/>
-                      </a:solidFill>
-                      <a:prstDash val="solid"/>
-                      <a:round/>
-                      <a:headEnd type="none" w="med" len="med"/>
-                      <a:tailEnd type="none" w="med" len="med"/>
-                    </a:lnT>
-                    <a:lnB w="6350" cap="flat" cmpd="sng" algn="ctr">
-                      <a:solidFill>
-                        <a:srgbClr val="D6DEE5"/>
-                      </a:solidFill>
-                      <a:prstDash val="solid"/>
-                      <a:round/>
-                      <a:headEnd type="none" w="med" len="med"/>
-                      <a:tailEnd type="none" w="med" len="med"/>
-                    </a:lnB>
-                  </a:tcPr>
-                </a:tc>
-              </a:tr>
-              <a:tr h="329184">
-                <a:tc>
-                  <a:txBody>
-                    <a:bodyPr/>
-                    <a:lstStyle/>
-                    <a:p>
-                      <a:pPr indent="0" marL="0">
-                        <a:buNone/>
-                      </a:pPr>
-                      <a:r>
-                        <a:rPr lang="en-US" sz="1000" dirty="0">
-                          <a:solidFill>
                             <a:schemeClr val="tx1"/>
                           </a:solidFill>
                         </a:rPr>
-                        <a:t>Google Search (high intent, low volume)</a:t>
-                      </a:r>
-                      <a:endParaRPr lang="en-US" sz="1000" dirty="0"/>
-                    </a:p>
-                  </a:txBody>
-                  <a:tcPr marL="91440" marR="91440" marT="45720" marB="45720" anchor="ctr">
-                    <a:lnL w="6350" cap="flat" cmpd="sng" algn="ctr">
-                      <a:solidFill>
-                        <a:srgbClr val="D6DEE5"/>
-                      </a:solidFill>
-                      <a:prstDash val="solid"/>
-                      <a:round/>
-                      <a:headEnd type="none" w="med" len="med"/>
-                      <a:tailEnd type="none" w="med" len="med"/>
-                    </a:lnL>
-                    <a:lnR w="6350" cap="flat" cmpd="sng" algn="ctr">
-                      <a:solidFill>
-                        <a:srgbClr val="D6DEE5"/>
-                      </a:solidFill>
-                      <a:prstDash val="solid"/>
-                      <a:round/>
-                      <a:headEnd type="none" w="med" len="med"/>
-                      <a:tailEnd type="none" w="med" len="med"/>
-                    </a:lnR>
-                    <a:lnT w="6350" cap="flat" cmpd="sng" algn="ctr">
-                      <a:solidFill>
-                        <a:srgbClr val="D6DEE5"/>
-                      </a:solidFill>
-                      <a:prstDash val="solid"/>
-                      <a:round/>
-                      <a:headEnd type="none" w="med" len="med"/>
-                      <a:tailEnd type="none" w="med" len="med"/>
-                    </a:lnT>
-                    <a:lnB w="6350" cap="flat" cmpd="sng" algn="ctr">
-                      <a:solidFill>
-                        <a:srgbClr val="D6DEE5"/>
-                      </a:solidFill>
-                      <a:prstDash val="solid"/>
-                      <a:round/>
-                      <a:headEnd type="none" w="med" len="med"/>
-                      <a:tailEnd type="none" w="med" len="med"/>
-                    </a:lnB>
-                  </a:tcPr>
-                </a:tc>
-                <a:tc>
-                  <a:txBody>
-                    <a:bodyPr/>
-                    <a:lstStyle/>
-                    <a:p>
-                      <a:pPr algn="ctr" indent="0" marL="0">
-                        <a:buNone/>
-                      </a:pPr>
-                      <a:r>
-                        <a:rPr lang="en-US" sz="1000" dirty="0">
-                          <a:solidFill>
-                            <a:schemeClr val="tx1"/>
-                          </a:solidFill>
-                        </a:rPr>
-                        <a:t>€1,193 / €3,788 · 3.8</a:t>
-                      </a:r>
-                      <a:endParaRPr lang="en-US" sz="1000" dirty="0"/>
-                    </a:p>
-                  </a:txBody>
-                  <a:tcPr marL="91440" marR="91440" marT="45720" marB="45720" anchor="ctr">
-                    <a:lnL w="6350" cap="flat" cmpd="sng" algn="ctr">
-                      <a:solidFill>
-                        <a:srgbClr val="D6DEE5"/>
-                      </a:solidFill>
-                      <a:prstDash val="solid"/>
-                      <a:round/>
-                      <a:headEnd type="none" w="med" len="med"/>
-                      <a:tailEnd type="none" w="med" len="med"/>
-                    </a:lnL>
-                    <a:lnR w="6350" cap="flat" cmpd="sng" algn="ctr">
-                      <a:solidFill>
-                        <a:srgbClr val="D6DEE5"/>
-                      </a:solidFill>
-                      <a:prstDash val="solid"/>
-                      <a:round/>
-                      <a:headEnd type="none" w="med" len="med"/>
-                      <a:tailEnd type="none" w="med" len="med"/>
-                    </a:lnR>
-                    <a:lnT w="6350" cap="flat" cmpd="sng" algn="ctr">
-                      <a:solidFill>
-                        <a:srgbClr val="D6DEE5"/>
-                      </a:solidFill>
-                      <a:prstDash val="solid"/>
-                      <a:round/>
-                      <a:headEnd type="none" w="med" len="med"/>
-                      <a:tailEnd type="none" w="med" len="med"/>
-                    </a:lnT>
-                    <a:lnB w="6350" cap="flat" cmpd="sng" algn="ctr">
-                      <a:solidFill>
-                        <a:srgbClr val="D6DEE5"/>
-                      </a:solidFill>
-                      <a:prstDash val="solid"/>
-                      <a:round/>
-                      <a:headEnd type="none" w="med" len="med"/>
-                      <a:tailEnd type="none" w="med" len="med"/>
-                    </a:lnB>
-                    <a:solidFill>
-                      <a:srgbClr val="DCEFE8"/>
-                    </a:solidFill>
-                  </a:tcPr>
-                </a:tc>
-                <a:tc>
-                  <a:txBody>
-                    <a:bodyPr/>
-                    <a:lstStyle/>
-                    <a:p>
-                      <a:pPr algn="ctr" indent="0" marL="0">
-                        <a:buNone/>
-                      </a:pPr>
-                      <a:r>
-                        <a:rPr lang="en-US" sz="1000" dirty="0">
-                          <a:solidFill>
-                            <a:schemeClr val="tx1"/>
-                          </a:solidFill>
-                        </a:rPr>
-                        <a:t>€716 / €1,929 · 0.4 T</a:t>
+                        <a:t>€1,681 / €5,929 · 0.1 T</a:t>
                       </a:r>
                       <a:endParaRPr lang="en-US" sz="1000" dirty="0"/>
                     </a:p>
@@ -16141,7 +16801,7 @@
                             <a:schemeClr val="tx1"/>
                           </a:solidFill>
                         </a:rPr>
-                        <a:t>€1,193 / €4,209 · 0.2 T</a:t>
+                        <a:t>€2,521 / €10,593 · 0.1 T</a:t>
                       </a:r>
                       <a:endParaRPr lang="en-US" sz="1000" dirty="0"/>
                     </a:p>
@@ -16186,666 +16846,6 @@
                     <a:solidFill>
                       <a:srgbClr val="FBEBC8"/>
                     </a:solidFill>
-                  </a:tcPr>
-                </a:tc>
-                <a:tc>
-                  <a:txBody>
-                    <a:bodyPr/>
-                    <a:lstStyle/>
-                    <a:p>
-                      <a:pPr algn="ctr" indent="0" marL="0">
-                        <a:buNone/>
-                      </a:pPr>
-                      <a:r>
-                        <a:rPr lang="en-US" sz="1000" dirty="0">
-                          <a:solidFill>
-                            <a:schemeClr val="tx1"/>
-                          </a:solidFill>
-                        </a:rPr>
-                        <a:t>€1,492 / €6,268 · 0.1 T</a:t>
-                      </a:r>
-                      <a:endParaRPr lang="en-US" sz="1000" dirty="0"/>
-                    </a:p>
-                  </a:txBody>
-                  <a:tcPr marL="91440" marR="91440" marT="45720" marB="45720" anchor="ctr">
-                    <a:lnL w="6350" cap="flat" cmpd="sng" algn="ctr">
-                      <a:solidFill>
-                        <a:srgbClr val="D6DEE5"/>
-                      </a:solidFill>
-                      <a:prstDash val="solid"/>
-                      <a:round/>
-                      <a:headEnd type="none" w="med" len="med"/>
-                      <a:tailEnd type="none" w="med" len="med"/>
-                    </a:lnL>
-                    <a:lnR w="6350" cap="flat" cmpd="sng" algn="ctr">
-                      <a:solidFill>
-                        <a:srgbClr val="D6DEE5"/>
-                      </a:solidFill>
-                      <a:prstDash val="solid"/>
-                      <a:round/>
-                      <a:headEnd type="none" w="med" len="med"/>
-                      <a:tailEnd type="none" w="med" len="med"/>
-                    </a:lnR>
-                    <a:lnT w="6350" cap="flat" cmpd="sng" algn="ctr">
-                      <a:solidFill>
-                        <a:srgbClr val="D6DEE5"/>
-                      </a:solidFill>
-                      <a:prstDash val="solid"/>
-                      <a:round/>
-                      <a:headEnd type="none" w="med" len="med"/>
-                      <a:tailEnd type="none" w="med" len="med"/>
-                    </a:lnT>
-                    <a:lnB w="6350" cap="flat" cmpd="sng" algn="ctr">
-                      <a:solidFill>
-                        <a:srgbClr val="D6DEE5"/>
-                      </a:solidFill>
-                      <a:prstDash val="solid"/>
-                      <a:round/>
-                      <a:headEnd type="none" w="med" len="med"/>
-                      <a:tailEnd type="none" w="med" len="med"/>
-                    </a:lnB>
-                    <a:solidFill>
-                      <a:srgbClr val="FBEBC8"/>
-                    </a:solidFill>
-                  </a:tcPr>
-                </a:tc>
-              </a:tr>
-              <a:tr h="329184">
-                <a:tc>
-                  <a:txBody>
-                    <a:bodyPr/>
-                    <a:lstStyle/>
-                    <a:p>
-                      <a:pPr indent="0" marL="0">
-                        <a:buNone/>
-                      </a:pPr>
-                      <a:r>
-                        <a:rPr lang="en-US" sz="1000" dirty="0">
-                          <a:solidFill>
-                            <a:schemeClr val="tx1"/>
-                          </a:solidFill>
-                        </a:rPr>
-                        <a:t>Programmatic (Indeed, Jooble, Talent.com…)</a:t>
-                      </a:r>
-                      <a:endParaRPr lang="en-US" sz="1000" dirty="0"/>
-                    </a:p>
-                  </a:txBody>
-                  <a:tcPr marL="91440" marR="91440" marT="45720" marB="45720" anchor="ctr">
-                    <a:lnL w="6350" cap="flat" cmpd="sng" algn="ctr">
-                      <a:solidFill>
-                        <a:srgbClr val="D6DEE5"/>
-                      </a:solidFill>
-                      <a:prstDash val="solid"/>
-                      <a:round/>
-                      <a:headEnd type="none" w="med" len="med"/>
-                      <a:tailEnd type="none" w="med" len="med"/>
-                    </a:lnL>
-                    <a:lnR w="6350" cap="flat" cmpd="sng" algn="ctr">
-                      <a:solidFill>
-                        <a:srgbClr val="D6DEE5"/>
-                      </a:solidFill>
-                      <a:prstDash val="solid"/>
-                      <a:round/>
-                      <a:headEnd type="none" w="med" len="med"/>
-                      <a:tailEnd type="none" w="med" len="med"/>
-                    </a:lnR>
-                    <a:lnT w="6350" cap="flat" cmpd="sng" algn="ctr">
-                      <a:solidFill>
-                        <a:srgbClr val="D6DEE5"/>
-                      </a:solidFill>
-                      <a:prstDash val="solid"/>
-                      <a:round/>
-                      <a:headEnd type="none" w="med" len="med"/>
-                      <a:tailEnd type="none" w="med" len="med"/>
-                    </a:lnT>
-                    <a:lnB w="6350" cap="flat" cmpd="sng" algn="ctr">
-                      <a:solidFill>
-                        <a:srgbClr val="D6DEE5"/>
-                      </a:solidFill>
-                      <a:prstDash val="solid"/>
-                      <a:round/>
-                      <a:headEnd type="none" w="med" len="med"/>
-                      <a:tailEnd type="none" w="med" len="med"/>
-                    </a:lnB>
-                  </a:tcPr>
-                </a:tc>
-                <a:tc>
-                  <a:txBody>
-                    <a:bodyPr/>
-                    <a:lstStyle/>
-                    <a:p>
-                      <a:pPr algn="ctr" indent="0" marL="0">
-                        <a:buNone/>
-                      </a:pPr>
-                      <a:r>
-                        <a:rPr lang="en-US" sz="1000" dirty="0">
-                          <a:solidFill>
-                            <a:schemeClr val="tx1"/>
-                          </a:solidFill>
-                        </a:rPr>
-                        <a:t>€1,342 / €4,259 · 0.2 T</a:t>
-                      </a:r>
-                      <a:endParaRPr lang="en-US" sz="1000" dirty="0"/>
-                    </a:p>
-                  </a:txBody>
-                  <a:tcPr marL="91440" marR="91440" marT="45720" marB="45720" anchor="ctr">
-                    <a:lnL w="6350" cap="flat" cmpd="sng" algn="ctr">
-                      <a:solidFill>
-                        <a:srgbClr val="D6DEE5"/>
-                      </a:solidFill>
-                      <a:prstDash val="solid"/>
-                      <a:round/>
-                      <a:headEnd type="none" w="med" len="med"/>
-                      <a:tailEnd type="none" w="med" len="med"/>
-                    </a:lnL>
-                    <a:lnR w="6350" cap="flat" cmpd="sng" algn="ctr">
-                      <a:solidFill>
-                        <a:srgbClr val="D6DEE5"/>
-                      </a:solidFill>
-                      <a:prstDash val="solid"/>
-                      <a:round/>
-                      <a:headEnd type="none" w="med" len="med"/>
-                      <a:tailEnd type="none" w="med" len="med"/>
-                    </a:lnR>
-                    <a:lnT w="6350" cap="flat" cmpd="sng" algn="ctr">
-                      <a:solidFill>
-                        <a:srgbClr val="D6DEE5"/>
-                      </a:solidFill>
-                      <a:prstDash val="solid"/>
-                      <a:round/>
-                      <a:headEnd type="none" w="med" len="med"/>
-                      <a:tailEnd type="none" w="med" len="med"/>
-                    </a:lnT>
-                    <a:lnB w="6350" cap="flat" cmpd="sng" algn="ctr">
-                      <a:solidFill>
-                        <a:srgbClr val="D6DEE5"/>
-                      </a:solidFill>
-                      <a:prstDash val="solid"/>
-                      <a:round/>
-                      <a:headEnd type="none" w="med" len="med"/>
-                      <a:tailEnd type="none" w="med" len="med"/>
-                    </a:lnB>
-                    <a:solidFill>
-                      <a:srgbClr val="FBEBC8"/>
-                    </a:solidFill>
-                  </a:tcPr>
-                </a:tc>
-                <a:tc>
-                  <a:txBody>
-                    <a:bodyPr/>
-                    <a:lstStyle/>
-                    <a:p>
-                      <a:pPr algn="ctr" indent="0" marL="0">
-                        <a:buNone/>
-                      </a:pPr>
-                      <a:r>
-                        <a:rPr lang="en-US" sz="1000" dirty="0">
-                          <a:solidFill>
-                            <a:schemeClr val="tx1"/>
-                          </a:solidFill>
-                        </a:rPr>
-                        <a:t>€732 / €1,971 · 0.4 T</a:t>
-                      </a:r>
-                      <a:endParaRPr lang="en-US" sz="1000" dirty="0"/>
-                    </a:p>
-                  </a:txBody>
-                  <a:tcPr marL="91440" marR="91440" marT="45720" marB="45720" anchor="ctr">
-                    <a:lnL w="6350" cap="flat" cmpd="sng" algn="ctr">
-                      <a:solidFill>
-                        <a:srgbClr val="D6DEE5"/>
-                      </a:solidFill>
-                      <a:prstDash val="solid"/>
-                      <a:round/>
-                      <a:headEnd type="none" w="med" len="med"/>
-                      <a:tailEnd type="none" w="med" len="med"/>
-                    </a:lnL>
-                    <a:lnR w="6350" cap="flat" cmpd="sng" algn="ctr">
-                      <a:solidFill>
-                        <a:srgbClr val="D6DEE5"/>
-                      </a:solidFill>
-                      <a:prstDash val="solid"/>
-                      <a:round/>
-                      <a:headEnd type="none" w="med" len="med"/>
-                      <a:tailEnd type="none" w="med" len="med"/>
-                    </a:lnR>
-                    <a:lnT w="6350" cap="flat" cmpd="sng" algn="ctr">
-                      <a:solidFill>
-                        <a:srgbClr val="D6DEE5"/>
-                      </a:solidFill>
-                      <a:prstDash val="solid"/>
-                      <a:round/>
-                      <a:headEnd type="none" w="med" len="med"/>
-                      <a:tailEnd type="none" w="med" len="med"/>
-                    </a:lnT>
-                    <a:lnB w="6350" cap="flat" cmpd="sng" algn="ctr">
-                      <a:solidFill>
-                        <a:srgbClr val="D6DEE5"/>
-                      </a:solidFill>
-                      <a:prstDash val="solid"/>
-                      <a:round/>
-                      <a:headEnd type="none" w="med" len="med"/>
-                      <a:tailEnd type="none" w="med" len="med"/>
-                    </a:lnB>
-                    <a:solidFill>
-                      <a:srgbClr val="FBEBC8"/>
-                    </a:solidFill>
-                  </a:tcPr>
-                </a:tc>
-                <a:tc>
-                  <a:txBody>
-                    <a:bodyPr/>
-                    <a:lstStyle/>
-                    <a:p>
-                      <a:pPr algn="ctr" indent="0" marL="0">
-                        <a:buNone/>
-                      </a:pPr>
-                      <a:r>
-                        <a:rPr lang="en-US" sz="1000" dirty="0">
-                          <a:solidFill>
-                            <a:schemeClr val="tx1"/>
-                          </a:solidFill>
-                        </a:rPr>
-                        <a:t>€1,342 / €4,733 · 0.2 T</a:t>
-                      </a:r>
-                      <a:endParaRPr lang="en-US" sz="1000" dirty="0"/>
-                    </a:p>
-                  </a:txBody>
-                  <a:tcPr marL="91440" marR="91440" marT="45720" marB="45720" anchor="ctr">
-                    <a:lnL w="6350" cap="flat" cmpd="sng" algn="ctr">
-                      <a:solidFill>
-                        <a:srgbClr val="D6DEE5"/>
-                      </a:solidFill>
-                      <a:prstDash val="solid"/>
-                      <a:round/>
-                      <a:headEnd type="none" w="med" len="med"/>
-                      <a:tailEnd type="none" w="med" len="med"/>
-                    </a:lnL>
-                    <a:lnR w="6350" cap="flat" cmpd="sng" algn="ctr">
-                      <a:solidFill>
-                        <a:srgbClr val="D6DEE5"/>
-                      </a:solidFill>
-                      <a:prstDash val="solid"/>
-                      <a:round/>
-                      <a:headEnd type="none" w="med" len="med"/>
-                      <a:tailEnd type="none" w="med" len="med"/>
-                    </a:lnR>
-                    <a:lnT w="6350" cap="flat" cmpd="sng" algn="ctr">
-                      <a:solidFill>
-                        <a:srgbClr val="D6DEE5"/>
-                      </a:solidFill>
-                      <a:prstDash val="solid"/>
-                      <a:round/>
-                      <a:headEnd type="none" w="med" len="med"/>
-                      <a:tailEnd type="none" w="med" len="med"/>
-                    </a:lnT>
-                    <a:lnB w="6350" cap="flat" cmpd="sng" algn="ctr">
-                      <a:solidFill>
-                        <a:srgbClr val="D6DEE5"/>
-                      </a:solidFill>
-                      <a:prstDash val="solid"/>
-                      <a:round/>
-                      <a:headEnd type="none" w="med" len="med"/>
-                      <a:tailEnd type="none" w="med" len="med"/>
-                    </a:lnB>
-                    <a:solidFill>
-                      <a:srgbClr val="FBEBC8"/>
-                    </a:solidFill>
-                  </a:tcPr>
-                </a:tc>
-                <a:tc>
-                  <a:txBody>
-                    <a:bodyPr/>
-                    <a:lstStyle/>
-                    <a:p>
-                      <a:pPr algn="ctr" indent="0" marL="0">
-                        <a:buNone/>
-                      </a:pPr>
-                      <a:r>
-                        <a:rPr lang="en-US" sz="1000" dirty="0">
-                          <a:solidFill>
-                            <a:schemeClr val="tx1"/>
-                          </a:solidFill>
-                        </a:rPr>
-                        <a:t>€1,610 / €6,765 · 0.1 T</a:t>
-                      </a:r>
-                      <a:endParaRPr lang="en-US" sz="1000" dirty="0"/>
-                    </a:p>
-                  </a:txBody>
-                  <a:tcPr marL="91440" marR="91440" marT="45720" marB="45720" anchor="ctr">
-                    <a:lnL w="6350" cap="flat" cmpd="sng" algn="ctr">
-                      <a:solidFill>
-                        <a:srgbClr val="D6DEE5"/>
-                      </a:solidFill>
-                      <a:prstDash val="solid"/>
-                      <a:round/>
-                      <a:headEnd type="none" w="med" len="med"/>
-                      <a:tailEnd type="none" w="med" len="med"/>
-                    </a:lnL>
-                    <a:lnR w="6350" cap="flat" cmpd="sng" algn="ctr">
-                      <a:solidFill>
-                        <a:srgbClr val="D6DEE5"/>
-                      </a:solidFill>
-                      <a:prstDash val="solid"/>
-                      <a:round/>
-                      <a:headEnd type="none" w="med" len="med"/>
-                      <a:tailEnd type="none" w="med" len="med"/>
-                    </a:lnR>
-                    <a:lnT w="6350" cap="flat" cmpd="sng" algn="ctr">
-                      <a:solidFill>
-                        <a:srgbClr val="D6DEE5"/>
-                      </a:solidFill>
-                      <a:prstDash val="solid"/>
-                      <a:round/>
-                      <a:headEnd type="none" w="med" len="med"/>
-                      <a:tailEnd type="none" w="med" len="med"/>
-                    </a:lnT>
-                    <a:lnB w="6350" cap="flat" cmpd="sng" algn="ctr">
-                      <a:solidFill>
-                        <a:srgbClr val="D6DEE5"/>
-                      </a:solidFill>
-                      <a:prstDash val="solid"/>
-                      <a:round/>
-                      <a:headEnd type="none" w="med" len="med"/>
-                      <a:tailEnd type="none" w="med" len="med"/>
-                    </a:lnB>
-                    <a:solidFill>
-                      <a:srgbClr val="FBEBC8"/>
-                    </a:solidFill>
-                  </a:tcPr>
-                </a:tc>
-              </a:tr>
-              <a:tr h="329184">
-                <a:tc>
-                  <a:txBody>
-                    <a:bodyPr/>
-                    <a:lstStyle/>
-                    <a:p>
-                      <a:pPr indent="0" marL="0">
-                        <a:buNone/>
-                      </a:pPr>
-                      <a:r>
-                        <a:rPr lang="en-US" sz="1000" dirty="0">
-                          <a:solidFill>
-                            <a:schemeClr val="tx1"/>
-                          </a:solidFill>
-                        </a:rPr>
-                        <a:t>I2 Handwerk → Industrie (new pool)</a:t>
-                      </a:r>
-                      <a:endParaRPr lang="en-US" sz="1000" dirty="0"/>
-                    </a:p>
-                  </a:txBody>
-                  <a:tcPr marL="91440" marR="91440" marT="45720" marB="45720" anchor="ctr">
-                    <a:lnL w="6350" cap="flat" cmpd="sng" algn="ctr">
-                      <a:solidFill>
-                        <a:srgbClr val="D6DEE5"/>
-                      </a:solidFill>
-                      <a:prstDash val="solid"/>
-                      <a:round/>
-                      <a:headEnd type="none" w="med" len="med"/>
-                      <a:tailEnd type="none" w="med" len="med"/>
-                    </a:lnL>
-                    <a:lnR w="6350" cap="flat" cmpd="sng" algn="ctr">
-                      <a:solidFill>
-                        <a:srgbClr val="D6DEE5"/>
-                      </a:solidFill>
-                      <a:prstDash val="solid"/>
-                      <a:round/>
-                      <a:headEnd type="none" w="med" len="med"/>
-                      <a:tailEnd type="none" w="med" len="med"/>
-                    </a:lnR>
-                    <a:lnT w="6350" cap="flat" cmpd="sng" algn="ctr">
-                      <a:solidFill>
-                        <a:srgbClr val="D6DEE5"/>
-                      </a:solidFill>
-                      <a:prstDash val="solid"/>
-                      <a:round/>
-                      <a:headEnd type="none" w="med" len="med"/>
-                      <a:tailEnd type="none" w="med" len="med"/>
-                    </a:lnT>
-                    <a:lnB w="6350" cap="flat" cmpd="sng" algn="ctr">
-                      <a:solidFill>
-                        <a:srgbClr val="D6DEE5"/>
-                      </a:solidFill>
-                      <a:prstDash val="solid"/>
-                      <a:round/>
-                      <a:headEnd type="none" w="med" len="med"/>
-                      <a:tailEnd type="none" w="med" len="med"/>
-                    </a:lnB>
-                  </a:tcPr>
-                </a:tc>
-                <a:tc>
-                  <a:txBody>
-                    <a:bodyPr/>
-                    <a:lstStyle/>
-                    <a:p>
-                      <a:pPr algn="ctr" indent="0" marL="0">
-                        <a:buNone/>
-                      </a:pPr>
-                      <a:r>
-                        <a:rPr lang="en-US" sz="1000" dirty="0">
-                          <a:solidFill>
-                            <a:schemeClr val="tx1"/>
-                          </a:solidFill>
-                        </a:rPr>
-                        <a:t>€560 / €2,349 · 9.5</a:t>
-                      </a:r>
-                      <a:endParaRPr lang="en-US" sz="1000" dirty="0"/>
-                    </a:p>
-                  </a:txBody>
-                  <a:tcPr marL="91440" marR="91440" marT="45720" marB="45720" anchor="ctr">
-                    <a:lnL w="6350" cap="flat" cmpd="sng" algn="ctr">
-                      <a:solidFill>
-                        <a:srgbClr val="D6DEE5"/>
-                      </a:solidFill>
-                      <a:prstDash val="solid"/>
-                      <a:round/>
-                      <a:headEnd type="none" w="med" len="med"/>
-                      <a:tailEnd type="none" w="med" len="med"/>
-                    </a:lnL>
-                    <a:lnR w="6350" cap="flat" cmpd="sng" algn="ctr">
-                      <a:solidFill>
-                        <a:srgbClr val="D6DEE5"/>
-                      </a:solidFill>
-                      <a:prstDash val="solid"/>
-                      <a:round/>
-                      <a:headEnd type="none" w="med" len="med"/>
-                      <a:tailEnd type="none" w="med" len="med"/>
-                    </a:lnR>
-                    <a:lnT w="6350" cap="flat" cmpd="sng" algn="ctr">
-                      <a:solidFill>
-                        <a:srgbClr val="D6DEE5"/>
-                      </a:solidFill>
-                      <a:prstDash val="solid"/>
-                      <a:round/>
-                      <a:headEnd type="none" w="med" len="med"/>
-                      <a:tailEnd type="none" w="med" len="med"/>
-                    </a:lnT>
-                    <a:lnB w="6350" cap="flat" cmpd="sng" algn="ctr">
-                      <a:solidFill>
-                        <a:srgbClr val="D6DEE5"/>
-                      </a:solidFill>
-                      <a:prstDash val="solid"/>
-                      <a:round/>
-                      <a:headEnd type="none" w="med" len="med"/>
-                      <a:tailEnd type="none" w="med" len="med"/>
-                    </a:lnB>
-                    <a:solidFill>
-                      <a:srgbClr val="DCEFE8"/>
-                    </a:solidFill>
-                  </a:tcPr>
-                </a:tc>
-                <a:tc>
-                  <a:txBody>
-                    <a:bodyPr/>
-                    <a:lstStyle/>
-                    <a:p>
-                      <a:pPr algn="ctr" indent="0" marL="0">
-                        <a:buNone/>
-                      </a:pPr>
-                      <a:r>
-                        <a:rPr lang="en-US" sz="1000" dirty="0">
-                          <a:solidFill>
-                            <a:schemeClr val="accent4"/>
-                          </a:solidFill>
-                        </a:rPr>
-                        <a:t>–</a:t>
-                      </a:r>
-                      <a:endParaRPr lang="en-US" sz="1000" dirty="0"/>
-                    </a:p>
-                  </a:txBody>
-                  <a:tcPr marL="91440" marR="91440" marT="45720" marB="45720" anchor="ctr">
-                    <a:lnL w="6350" cap="flat" cmpd="sng" algn="ctr">
-                      <a:solidFill>
-                        <a:srgbClr val="D6DEE5"/>
-                      </a:solidFill>
-                      <a:prstDash val="solid"/>
-                      <a:round/>
-                      <a:headEnd type="none" w="med" len="med"/>
-                      <a:tailEnd type="none" w="med" len="med"/>
-                    </a:lnL>
-                    <a:lnR w="6350" cap="flat" cmpd="sng" algn="ctr">
-                      <a:solidFill>
-                        <a:srgbClr val="D6DEE5"/>
-                      </a:solidFill>
-                      <a:prstDash val="solid"/>
-                      <a:round/>
-                      <a:headEnd type="none" w="med" len="med"/>
-                      <a:tailEnd type="none" w="med" len="med"/>
-                    </a:lnR>
-                    <a:lnT w="6350" cap="flat" cmpd="sng" algn="ctr">
-                      <a:solidFill>
-                        <a:srgbClr val="D6DEE5"/>
-                      </a:solidFill>
-                      <a:prstDash val="solid"/>
-                      <a:round/>
-                      <a:headEnd type="none" w="med" len="med"/>
-                      <a:tailEnd type="none" w="med" len="med"/>
-                    </a:lnT>
-                    <a:lnB w="6350" cap="flat" cmpd="sng" algn="ctr">
-                      <a:solidFill>
-                        <a:srgbClr val="D6DEE5"/>
-                      </a:solidFill>
-                      <a:prstDash val="solid"/>
-                      <a:round/>
-                      <a:headEnd type="none" w="med" len="med"/>
-                      <a:tailEnd type="none" w="med" len="med"/>
-                    </a:lnB>
-                  </a:tcPr>
-                </a:tc>
-                <a:tc>
-                  <a:txBody>
-                    <a:bodyPr/>
-                    <a:lstStyle/>
-                    <a:p>
-                      <a:pPr algn="ctr" indent="0" marL="0">
-                        <a:buNone/>
-                      </a:pPr>
-                      <a:r>
-                        <a:rPr lang="en-US" sz="1000" dirty="0">
-                          <a:solidFill>
-                            <a:schemeClr val="accent4"/>
-                          </a:solidFill>
-                        </a:rPr>
-                        <a:t>–</a:t>
-                      </a:r>
-                      <a:endParaRPr lang="en-US" sz="1000" dirty="0"/>
-                    </a:p>
-                  </a:txBody>
-                  <a:tcPr marL="91440" marR="91440" marT="45720" marB="45720" anchor="ctr">
-                    <a:lnL w="6350" cap="flat" cmpd="sng" algn="ctr">
-                      <a:solidFill>
-                        <a:srgbClr val="D6DEE5"/>
-                      </a:solidFill>
-                      <a:prstDash val="solid"/>
-                      <a:round/>
-                      <a:headEnd type="none" w="med" len="med"/>
-                      <a:tailEnd type="none" w="med" len="med"/>
-                    </a:lnL>
-                    <a:lnR w="6350" cap="flat" cmpd="sng" algn="ctr">
-                      <a:solidFill>
-                        <a:srgbClr val="D6DEE5"/>
-                      </a:solidFill>
-                      <a:prstDash val="solid"/>
-                      <a:round/>
-                      <a:headEnd type="none" w="med" len="med"/>
-                      <a:tailEnd type="none" w="med" len="med"/>
-                    </a:lnR>
-                    <a:lnT w="6350" cap="flat" cmpd="sng" algn="ctr">
-                      <a:solidFill>
-                        <a:srgbClr val="D6DEE5"/>
-                      </a:solidFill>
-                      <a:prstDash val="solid"/>
-                      <a:round/>
-                      <a:headEnd type="none" w="med" len="med"/>
-                      <a:tailEnd type="none" w="med" len="med"/>
-                    </a:lnT>
-                    <a:lnB w="6350" cap="flat" cmpd="sng" algn="ctr">
-                      <a:solidFill>
-                        <a:srgbClr val="D6DEE5"/>
-                      </a:solidFill>
-                      <a:prstDash val="solid"/>
-                      <a:round/>
-                      <a:headEnd type="none" w="med" len="med"/>
-                      <a:tailEnd type="none" w="med" len="med"/>
-                    </a:lnB>
-                  </a:tcPr>
-                </a:tc>
-                <a:tc>
-                  <a:txBody>
-                    <a:bodyPr/>
-                    <a:lstStyle/>
-                    <a:p>
-                      <a:pPr algn="ctr" indent="0" marL="0">
-                        <a:buNone/>
-                      </a:pPr>
-                      <a:r>
-                        <a:rPr lang="en-US" sz="1000" dirty="0">
-                          <a:solidFill>
-                            <a:schemeClr val="accent4"/>
-                          </a:solidFill>
-                        </a:rPr>
-                        <a:t>–</a:t>
-                      </a:r>
-                      <a:endParaRPr lang="en-US" sz="1000" dirty="0"/>
-                    </a:p>
-                  </a:txBody>
-                  <a:tcPr marL="91440" marR="91440" marT="45720" marB="45720" anchor="ctr">
-                    <a:lnL w="6350" cap="flat" cmpd="sng" algn="ctr">
-                      <a:solidFill>
-                        <a:srgbClr val="D6DEE5"/>
-                      </a:solidFill>
-                      <a:prstDash val="solid"/>
-                      <a:round/>
-                      <a:headEnd type="none" w="med" len="med"/>
-                      <a:tailEnd type="none" w="med" len="med"/>
-                    </a:lnL>
-                    <a:lnR w="6350" cap="flat" cmpd="sng" algn="ctr">
-                      <a:solidFill>
-                        <a:srgbClr val="D6DEE5"/>
-                      </a:solidFill>
-                      <a:prstDash val="solid"/>
-                      <a:round/>
-                      <a:headEnd type="none" w="med" len="med"/>
-                      <a:tailEnd type="none" w="med" len="med"/>
-                    </a:lnR>
-                    <a:lnT w="6350" cap="flat" cmpd="sng" algn="ctr">
-                      <a:solidFill>
-                        <a:srgbClr val="D6DEE5"/>
-                      </a:solidFill>
-                      <a:prstDash val="solid"/>
-                      <a:round/>
-                      <a:headEnd type="none" w="med" len="med"/>
-                      <a:tailEnd type="none" w="med" len="med"/>
-                    </a:lnT>
-                    <a:lnB w="6350" cap="flat" cmpd="sng" algn="ctr">
-                      <a:solidFill>
-                        <a:srgbClr val="D6DEE5"/>
-                      </a:solidFill>
-                      <a:prstDash val="solid"/>
-                      <a:round/>
-                      <a:headEnd type="none" w="med" len="med"/>
-                      <a:tailEnd type="none" w="med" len="med"/>
-                    </a:lnB>
                   </a:tcPr>
                 </a:tc>
               </a:tr>
@@ -17066,7 +17066,7 @@
                   <a:schemeClr val="tx2"/>
                 </a:solidFill>
               </a:rPr>
-              <a:t>Cells: cost per qualified / cost per hire · hires planned. Cost per hire = (cost per application × applications + set-up) ÷ hires at full capacity; I2 includes €1,200 set-up, I3 €400 translation. StepStone ads (7 × €1,449) are costed whole and credited only the applications the plan needs (conservative).</a:t>
+              <a:t>Cells: cost per qualified / cost per hire · hires planned. Cost per hire = (cost per application × applications + set-up) ÷ hires at full capacity; I2 includes €1,200 set-up, I3 €400 translation. StepStone ads (6 × €1,449) are costed whole and credited only the applications the plan needs (conservative).</a:t>
             </a:r>
             <a:endParaRPr lang="en-US" sz="1000" dirty="0"/>
           </a:p>
@@ -17102,7 +17102,7 @@
                   <a:schemeClr val="accent4"/>
                 </a:solidFill>
               </a:rPr>
-              <a:t>Sourced: StepStone €1,449/30-day ad (stepstone.de price list) · cost per application, DACH medians: Indeed €161, Google €179, LinkedIn €96, Meta €84 (TalentBait, 2,549 campaigns, 2024–26) · share qualified: 28% of applications suitable (IAB-Stellenerhebung 2026) · pools: BA employment statistics by KldB code (Dec 2025) · time-to-offer: SmartRecruiters Germany benchmark. Every source (with its link) and every remaining own estimate is labelled on the Assumptions tab.</a:t>
+              <a:t>Sourced: cost per application, DACH medians: Indeed €161, Google €179, LinkedIn €96, Meta €84 (TalentBait 2024–26) · StepStone €1,449/ad, 12 applications per ad · share qualified: IAB 2026 (28%), channel index from IAB 2025 (job boards 0.90, careers page 0.71, social 0.50) · volume caps: channel reach (Trendence 2023: Indeed 36%, LinkedIn 15%) × in-market pool (BA 2025, Gallup 11%) · Meta volumes: Redline 2024–26. Every input's source or derivation is on the Assumptions tab.</a:t>
             </a:r>
             <a:endParaRPr lang="en-US" sz="1000" dirty="0"/>
           </a:p>
@@ -17252,7 +17252,7 @@
                 <a:ea typeface="Cambria" pitchFamily="34" charset="-122"/>
                 <a:cs typeface="Cambria" pitchFamily="34" charset="-120"/>
               </a:rPr>
-              <a:t>€85.4k planned across roles and weeks, plus €17.1k reserve released on results</a:t>
+              <a:t>€176.2k planned across roles and weeks, plus €31.3k reserve released on results</a:t>
             </a:r>
             <a:endParaRPr lang="en-US" sz="2200" dirty="0"/>
           </a:p>
@@ -17321,7 +17321,7 @@
                   <a:schemeClr val="tx1"/>
                 </a:solidFill>
               </a:rPr>
-              <a:t>€52.0k paid channels (incl. €9.0k tests) + €31.8k initiative media, pre-screen calls and bonuses + €1.6k set-up = €85.4k. Reserve: 15% of €100.5k plus rounding = €17.1k.</a:t>
+              <a:t>€140.1k paid channels (incl. €9.0k tests) + €34.6k initiative media, pre-screen calls and bonuses + €1.6k set-up = €176.2k. Reserve: 15% of €207.3k plus rounding = €31.3k.</a:t>
             </a:r>
             <a:endParaRPr lang="en-US" sz="1100" dirty="0"/>
           </a:p>
@@ -17352,7 +17352,7 @@
                   <a:schemeClr val="tx1"/>
                 </a:solidFill>
               </a:rPr>
-              <a:t>weeks 1–2 cost €31.8k (31%), mostly tests. Duds are cut from Mon 2 Nov (after €500 / 30 apps); tests and the full re-allocation are judged by Mon 9 Nov; the reserve moves only from week 3. Paid media stops after Tue 24 Nov.</a:t>
+              <a:t>weeks 1–2 cost €58.9k (28%), mostly tests. Duds are cut from Mon 2 Nov (after €500 / 30 apps); tests and the full re-allocation are judged by Mon 9 Nov; the reserve moves only from week 3. Paid media stops after Tue 24 Nov.</a:t>
             </a:r>
             <a:endParaRPr lang="en-US" sz="1100" dirty="0"/>
           </a:p>
@@ -17767,7 +17767,7 @@
                             <a:schemeClr val="tx1"/>
                           </a:solidFill>
                         </a:rPr>
-                        <a:t>€46.5k</a:t>
+                        <a:t>€70.7k</a:t>
                       </a:r>
                       <a:endParaRPr lang="en-US" sz="1100" dirty="0"/>
                     </a:p>
@@ -17941,7 +17941,7 @@
                             <a:schemeClr val="tx1"/>
                           </a:solidFill>
                         </a:rPr>
-                        <a:t>€1,550</a:t>
+                        <a:t>€2,356</a:t>
                       </a:r>
                       <a:endParaRPr lang="en-US" sz="1100" dirty="0"/>
                     </a:p>
@@ -18059,7 +18059,7 @@
                             <a:schemeClr val="tx1"/>
                           </a:solidFill>
                         </a:rPr>
-                        <a:t>€9.7k</a:t>
+                        <a:t>€33.9k</a:t>
                       </a:r>
                       <a:endParaRPr lang="en-US" sz="1100" dirty="0"/>
                     </a:p>
@@ -18233,7 +18233,7 @@
                             <a:schemeClr val="tx1"/>
                           </a:solidFill>
                         </a:rPr>
-                        <a:t>€215</a:t>
+                        <a:t>€752</a:t>
                       </a:r>
                       <a:endParaRPr lang="en-US" sz="1100" dirty="0"/>
                     </a:p>
@@ -18351,7 +18351,7 @@
                             <a:schemeClr val="tx1"/>
                           </a:solidFill>
                         </a:rPr>
-                        <a:t>€14.6k</a:t>
+                        <a:t>€32.4k</a:t>
                       </a:r>
                       <a:endParaRPr lang="en-US" sz="1100" dirty="0"/>
                     </a:p>
@@ -18525,7 +18525,7 @@
                             <a:schemeClr val="tx1"/>
                           </a:solidFill>
                         </a:rPr>
-                        <a:t>€975</a:t>
+                        <a:t>€2,158</a:t>
                       </a:r>
                       <a:endParaRPr lang="en-US" sz="1100" dirty="0"/>
                     </a:p>
@@ -18643,7 +18643,7 @@
                             <a:schemeClr val="tx1"/>
                           </a:solidFill>
                         </a:rPr>
-                        <a:t>€14.6k</a:t>
+                        <a:t>€39.3k</a:t>
                       </a:r>
                       <a:endParaRPr lang="en-US" sz="1100" dirty="0"/>
                     </a:p>
@@ -18817,7 +18817,7 @@
                             <a:schemeClr val="tx1"/>
                           </a:solidFill>
                         </a:rPr>
-                        <a:t>€1,457</a:t>
+                        <a:t>€3,930</a:t>
                       </a:r>
                       <a:endParaRPr lang="en-US" sz="1100" dirty="0"/>
                     </a:p>
@@ -18935,7 +18935,7 @@
                             <a:schemeClr val="tx1"/>
                           </a:solidFill>
                         </a:rPr>
-                        <a:t>€85.4k</a:t>
+                        <a:t>€176.2k</a:t>
                       </a:r>
                       <a:endParaRPr lang="en-US" sz="1100" dirty="0"/>
                     </a:p>
@@ -19109,7 +19109,7 @@
                             <a:schemeClr val="tx1"/>
                           </a:solidFill>
                         </a:rPr>
-                        <a:t>€854</a:t>
+                        <a:t>€1,762</a:t>
                       </a:r>
                       <a:endParaRPr lang="en-US" sz="1100" dirty="0"/>
                     </a:p>
@@ -19563,7 +19563,7 @@
                             <a:schemeClr val="tx1"/>
                           </a:solidFill>
                         </a:rPr>
-                        <a:t>20.6</a:t>
+                        <a:t>14.9</a:t>
                       </a:r>
                       <a:endParaRPr lang="en-US" sz="1000" dirty="0"/>
                     </a:p>
@@ -19739,7 +19739,7 @@
                             <a:schemeClr val="tx1"/>
                           </a:solidFill>
                         </a:rPr>
-                        <a:t>€3.0k</a:t>
+                        <a:t>€15.9k</a:t>
                       </a:r>
                       <a:endParaRPr lang="en-US" sz="1000" dirty="0"/>
                     </a:p>
@@ -19797,7 +19797,7 @@
                             <a:schemeClr val="tx1"/>
                           </a:solidFill>
                         </a:rPr>
-                        <a:t>0.8</a:t>
+                        <a:t>4.2</a:t>
                       </a:r>
                       <a:endParaRPr lang="en-US" sz="1000" dirty="0"/>
                     </a:p>
@@ -19855,7 +19855,7 @@
                             <a:schemeClr val="tx1"/>
                           </a:solidFill>
                         </a:rPr>
-                        <a:t>€3,632</a:t>
+                        <a:t>€3,799</a:t>
                       </a:r>
                       <a:endParaRPr lang="en-US" sz="1000" dirty="0"/>
                     </a:p>
@@ -19973,7 +19973,7 @@
                             <a:schemeClr val="tx1"/>
                           </a:solidFill>
                         </a:rPr>
-                        <a:t>€10.1k</a:t>
+                        <a:t>€8.7k</a:t>
                       </a:r>
                       <a:endParaRPr lang="en-US" sz="1000" dirty="0"/>
                     </a:p>
@@ -20031,7 +20031,7 @@
                             <a:schemeClr val="tx1"/>
                           </a:solidFill>
                         </a:rPr>
-                        <a:t>10.8</a:t>
+                        <a:t>3.7</a:t>
                       </a:r>
                       <a:endParaRPr lang="en-US" sz="1000" dirty="0"/>
                     </a:p>
@@ -20089,7 +20089,7 @@
                             <a:schemeClr val="tx1"/>
                           </a:solidFill>
                         </a:rPr>
-                        <a:t>€937</a:t>
+                        <a:t>€2,348</a:t>
                       </a:r>
                       <a:endParaRPr lang="en-US" sz="1000" dirty="0"/>
                     </a:p>
@@ -20207,7 +20207,7 @@
                             <a:schemeClr val="tx1"/>
                           </a:solidFill>
                         </a:rPr>
-                        <a:t>€20.8k</a:t>
+                        <a:t>€62.0k</a:t>
                       </a:r>
                       <a:endParaRPr lang="en-US" sz="1000" dirty="0"/>
                     </a:p>
@@ -20265,7 +20265,7 @@
                             <a:schemeClr val="tx1"/>
                           </a:solidFill>
                         </a:rPr>
-                        <a:t>13.1</a:t>
+                        <a:t>18.2</a:t>
                       </a:r>
                       <a:endParaRPr lang="en-US" sz="1000" dirty="0"/>
                     </a:p>
@@ -20323,7 +20323,7 @@
                             <a:schemeClr val="tx1"/>
                           </a:solidFill>
                         </a:rPr>
-                        <a:t>€1,584</a:t>
+                        <a:t>€3,404</a:t>
                       </a:r>
                       <a:endParaRPr lang="en-US" sz="1000" dirty="0"/>
                     </a:p>
@@ -20441,7 +20441,7 @@
                             <a:schemeClr val="tx1"/>
                           </a:solidFill>
                         </a:rPr>
-                        <a:t>€1.5k</a:t>
+                        <a:t>€50.4k</a:t>
                       </a:r>
                       <a:endParaRPr lang="en-US" sz="1000" dirty="0"/>
                     </a:p>
@@ -20499,7 +20499,7 @@
                             <a:schemeClr val="tx1"/>
                           </a:solidFill>
                         </a:rPr>
-                        <a:t>0.5</a:t>
+                        <a:t>17.6</a:t>
                       </a:r>
                       <a:endParaRPr lang="en-US" sz="1000" dirty="0"/>
                     </a:p>
@@ -20557,7 +20557,7 @@
                             <a:schemeClr val="tx1"/>
                           </a:solidFill>
                         </a:rPr>
-                        <a:t>€2,786</a:t>
+                        <a:t>€2,861</a:t>
                       </a:r>
                       <a:endParaRPr lang="en-US" sz="1000" dirty="0"/>
                     </a:p>
@@ -20675,7 +20675,7 @@
                             <a:schemeClr val="tx1"/>
                           </a:solidFill>
                         </a:rPr>
-                        <a:t>€16.6k</a:t>
+                        <a:t>€3.0k</a:t>
                       </a:r>
                       <a:endParaRPr lang="en-US" sz="1000" dirty="0"/>
                     </a:p>
@@ -20733,7 +20733,7 @@
                             <a:schemeClr val="tx1"/>
                           </a:solidFill>
                         </a:rPr>
-                        <a:t>4.5</a:t>
+                        <a:t>0.6</a:t>
                       </a:r>
                       <a:endParaRPr lang="en-US" sz="1000" dirty="0"/>
                     </a:p>
@@ -20791,7 +20791,7 @@
                             <a:schemeClr val="tx1"/>
                           </a:solidFill>
                         </a:rPr>
-                        <a:t>€3,710</a:t>
+                        <a:t>€5,165</a:t>
                       </a:r>
                       <a:endParaRPr lang="en-US" sz="1000" dirty="0"/>
                     </a:p>
@@ -20909,7 +20909,7 @@
                             <a:schemeClr val="tx1"/>
                           </a:solidFill>
                         </a:rPr>
-                        <a:t>€210</a:t>
+                        <a:t>€41</a:t>
                       </a:r>
                       <a:endParaRPr lang="en-US" sz="1000" dirty="0"/>
                     </a:p>
@@ -20967,7 +20967,7 @@
                             <a:schemeClr val="tx1"/>
                           </a:solidFill>
                         </a:rPr>
-                        <a:t>15.7</a:t>
+                        <a:t>3.1</a:t>
                       </a:r>
                       <a:endParaRPr lang="en-US" sz="1000" dirty="0"/>
                     </a:p>
@@ -21143,7 +21143,7 @@
                             <a:schemeClr val="tx1"/>
                           </a:solidFill>
                         </a:rPr>
-                        <a:t>€6.5k</a:t>
+                        <a:t>€11.2k</a:t>
                       </a:r>
                       <a:endParaRPr lang="en-US" sz="1000" dirty="0"/>
                     </a:p>
@@ -21201,7 +21201,7 @@
                             <a:schemeClr val="tx1"/>
                           </a:solidFill>
                         </a:rPr>
-                        <a:t>6.5</a:t>
+                        <a:t>11.2</a:t>
                       </a:r>
                       <a:endParaRPr lang="en-US" sz="1000" dirty="0"/>
                     </a:p>
@@ -21377,7 +21377,7 @@
                             <a:schemeClr val="tx1"/>
                           </a:solidFill>
                         </a:rPr>
-                        <a:t>€22.2k</a:t>
+                        <a:t>€18.0k</a:t>
                       </a:r>
                       <a:endParaRPr lang="en-US" sz="1000" dirty="0"/>
                     </a:p>
@@ -21435,7 +21435,7 @@
                             <a:schemeClr val="tx1"/>
                           </a:solidFill>
                         </a:rPr>
-                        <a:t>9.5</a:t>
+                        <a:t>8.5</a:t>
                       </a:r>
                       <a:endParaRPr lang="en-US" sz="1000" dirty="0"/>
                     </a:p>
@@ -21493,7 +21493,7 @@
                             <a:schemeClr val="tx1"/>
                           </a:solidFill>
                         </a:rPr>
-                        <a:t>€2,349</a:t>
+                        <a:t>€2,116</a:t>
                       </a:r>
                       <a:endParaRPr lang="en-US" sz="1000" dirty="0"/>
                     </a:p>
@@ -21611,7 +21611,7 @@
                             <a:schemeClr val="tx1"/>
                           </a:solidFill>
                         </a:rPr>
-                        <a:t>€4.5k</a:t>
+                        <a:t>€6.9k</a:t>
                       </a:r>
                       <a:endParaRPr lang="en-US" sz="1000" dirty="0"/>
                     </a:p>
@@ -21727,7 +21727,7 @@
                             <a:schemeClr val="tx1"/>
                           </a:solidFill>
                         </a:rPr>
-                        <a:t>€248</a:t>
+                        <a:t>€383</a:t>
                       </a:r>
                       <a:endParaRPr lang="en-US" sz="1000" dirty="0"/>
                     </a:p>
@@ -21920,7 +21920,7 @@
                 <a:ea typeface="Cambria" pitchFamily="34" charset="-122"/>
                 <a:cs typeface="Cambria" pitchFamily="34" charset="-120"/>
               </a:rPr>
-              <a:t>30% less (€71.75k) still signs ~93, but electricians take most of the loss</a:t>
+              <a:t>30% less (€145.25k) still signs ~88; supervisors take most of the loss</a:t>
             </a:r>
             <a:endParaRPr lang="en-US" sz="2200" dirty="0"/>
           </a:p>
@@ -22169,7 +22169,7 @@
                             <a:schemeClr val="tx1"/>
                           </a:solidFill>
                         </a:rPr>
-                        <a:t>100% · €102.50k</a:t>
+                        <a:t>100% · €207.50k</a:t>
                       </a:r>
                       <a:endParaRPr lang="en-US" sz="1100" dirty="0"/>
                     </a:p>
@@ -22285,7 +22285,7 @@
                             <a:schemeClr val="tx1"/>
                           </a:solidFill>
                         </a:rPr>
-                        <a:t>€1,025</a:t>
+                        <a:t>€2,075</a:t>
                       </a:r>
                       <a:endParaRPr lang="en-US" sz="1100" dirty="0"/>
                     </a:p>
@@ -22345,7 +22345,7 @@
                             <a:schemeClr val="tx1"/>
                           </a:solidFill>
                         </a:rPr>
-                        <a:t>85% · €87.13k</a:t>
+                        <a:t>85% · €176.38k</a:t>
                       </a:r>
                       <a:endParaRPr lang="en-US" sz="1100" dirty="0"/>
                     </a:p>
@@ -22403,7 +22403,7 @@
                             <a:schemeClr val="tx1"/>
                           </a:solidFill>
                         </a:rPr>
-                        <a:t>97</a:t>
+                        <a:t>94</a:t>
                       </a:r>
                       <a:endParaRPr lang="en-US" sz="1100" dirty="0"/>
                     </a:p>
@@ -22461,7 +22461,7 @@
                             <a:schemeClr val="tx1"/>
                           </a:solidFill>
                         </a:rPr>
-                        <a:t>€895</a:t>
+                        <a:t>€1,869</a:t>
                       </a:r>
                       <a:endParaRPr lang="en-US" sz="1100" dirty="0"/>
                     </a:p>
@@ -22521,7 +22521,7 @@
                             <a:schemeClr val="tx1"/>
                           </a:solidFill>
                         </a:rPr>
-                        <a:t>70% · €71.75k</a:t>
+                        <a:t>70% · €145.25k</a:t>
                       </a:r>
                       <a:endParaRPr lang="en-US" sz="1100" dirty="0"/>
                     </a:p>
@@ -22579,7 +22579,7 @@
                             <a:schemeClr val="tx1"/>
                           </a:solidFill>
                         </a:rPr>
-                        <a:t>93</a:t>
+                        <a:t>88</a:t>
                       </a:r>
                       <a:endParaRPr lang="en-US" sz="1100" dirty="0"/>
                     </a:p>
@@ -22637,7 +22637,7 @@
                             <a:schemeClr val="tx1"/>
                           </a:solidFill>
                         </a:rPr>
-                        <a:t>€773</a:t>
+                        <a:t>€1,651</a:t>
                       </a:r>
                       <a:endParaRPr lang="en-US" sz="1100" dirty="0"/>
                     </a:p>
@@ -22697,7 +22697,7 @@
                             <a:schemeClr val="tx1"/>
                           </a:solidFill>
                         </a:rPr>
-                        <a:t>50% · €51.25k</a:t>
+                        <a:t>50% · €103.75k</a:t>
                       </a:r>
                       <a:endParaRPr lang="en-US" sz="1100" dirty="0"/>
                     </a:p>
@@ -22755,7 +22755,7 @@
                             <a:schemeClr val="tx1"/>
                           </a:solidFill>
                         </a:rPr>
-                        <a:t>85</a:t>
+                        <a:t>78</a:t>
                       </a:r>
                       <a:endParaRPr lang="en-US" sz="1100" dirty="0"/>
                     </a:p>
@@ -22813,7 +22813,7 @@
                             <a:schemeClr val="tx1"/>
                           </a:solidFill>
                         </a:rPr>
-                        <a:t>€600</a:t>
+                        <a:t>€1,328</a:t>
                       </a:r>
                       <a:endParaRPr lang="en-US" sz="1100" dirty="0"/>
                     </a:p>
@@ -22964,7 +22964,7 @@
                   <a:schemeClr val="tx1"/>
                 </a:solidFill>
               </a:rPr>
-              <a:t>electricians (23 of 30 at −30%); automation and supervisors lose under 1 hire each (14.7 of 15, 9.8 of 10). Mechatronics never falls short.</a:t>
+              <a:t>at −30%: supervisors 1.6 of 10, electricians 27.1 of 30, automation 14.3 of 15. Mechatronics never falls short.</a:t>
             </a:r>
             <a:endParaRPr lang="en-US" sz="1200" dirty="0"/>
           </a:p>
@@ -22995,7 +22995,7 @@
                   <a:schemeClr val="tx1"/>
                 </a:solidFill>
               </a:rPr>
-              <a:t>the last €30.75k buys ~7 hires at ~€4,290 each, mostly electricians, the role that keeps lines running. Keep it. If you must cut, cover supervisors through internal promotion and protect electricians. Above €102.5k, extra money buys at most ~3 more hires (the 9 spare slots); then the 55/week limit binds.</a:t>
+              <a:t>the last €62.25k buys ~12 hires at ~€5,190 each, mostly supervisors. If you must cut, cover supervisors through internal promotion and protect electricians, the role that keeps lines running. Above €207.5k, extra money buys at most ~2 more hires (the 6 spare slots); then the 55/week limit binds.</a:t>
             </a:r>
             <a:endParaRPr lang="en-US" sz="1200" dirty="0"/>
           </a:p>
@@ -23145,7 +23145,7 @@
                 <a:ea typeface="Cambria" pitchFamily="34" charset="-122"/>
                 <a:cs typeface="Cambria" pitchFamily="34" charset="-120"/>
               </a:rPr>
-              <a:t>Three new sources supply ~50 of the 100 hires, one built for electricians</a:t>
+              <a:t>Three new sources supply ~41 of the 100 hires, one built for electricians</a:t>
             </a:r>
             <a:endParaRPr lang="en-US" sz="2200" dirty="0"/>
           </a:p>
@@ -23285,7 +23285,7 @@
                   <a:schemeClr val="tx1"/>
                 </a:solidFill>
               </a:rPr>
-              <a:t>~700 past applicants qualified but not hired; ~1,000 plant technicians as referrers</a:t>
+              <a:t>136 runners-up from the last year (consented talent pool); the plant's 10,703 staff as referrers</a:t>
             </a:r>
             <a:endParaRPr lang="en-US" sz="1200" dirty="0"/>
           </a:p>
@@ -23347,7 +23347,7 @@
                   <a:schemeClr val="tx1"/>
                 </a:solidFill>
               </a:rPr>
-              <a:t>Already screened (50% qualified, my estimate), already wanted Tesla, ~€3 per application</a:t>
+              <a:t>Already screened (50% still qualified, below the 70% skills match Forrester reports), already wanted Tesla, ~€3 per application</a:t>
             </a:r>
             <a:endParaRPr lang="en-US" sz="1200" dirty="0"/>
           </a:p>
@@ -23378,7 +23378,7 @@
                   <a:schemeClr val="tx1"/>
                 </a:solidFill>
               </a:rPr>
-              <a:t>€210 + €6.5k bonuses → 84 re-apps + 43 referrals → ~61 qualified → ~22 hires</a:t>
+              <a:t>€41 + €11.2k bonuses → 16 re-apps + 66 referrals → ~38 qualified → ~14 hires</a:t>
             </a:r>
             <a:endParaRPr lang="en-US" sz="1200" dirty="0"/>
           </a:p>
@@ -23409,7 +23409,7 @@
                   <a:schemeClr val="tx1"/>
                 </a:solidFill>
               </a:rPr>
-              <a:t>Wed 21 Oct – Tue 3 Nov (waves 1–3): €210. Pass: ≥20 qualified (≥⅓ electricians). Kill: &lt;11 → no further re-contacts; bonus stays live</a:t>
+              <a:t>Wed 21 Oct – Tue 3 Nov (waves 1–3): €41. Pass: ≥8 qualified (≥⅓ electricians). Kill: &lt;5 → no further re-contacts; bonus stays live</a:t>
             </a:r>
             <a:endParaRPr lang="en-US" sz="1200" dirty="0"/>
           </a:p>
@@ -23673,7 +23673,7 @@
                   <a:schemeClr val="tx1"/>
                 </a:solidFill>
               </a:rPr>
-              <a:t>250 apps × €84 = €21.0k + €1.2k set-up → 38 qualified × 25% = 9.5 hires (€2,349/hire)</a:t>
+              <a:t>200 apps × €84 = €16.8k + €1.2k set-up → 30 qualified × 28% = 8.5 hires (€2,116/hire)</a:t>
             </a:r>
             <a:endParaRPr lang="en-US" sz="1200" dirty="0"/>
           </a:p>
@@ -23704,7 +23704,7 @@
                   <a:schemeClr val="tx1"/>
                 </a:solidFill>
               </a:rPr>
-              <a:t>Fri 23 Oct – Thu 5 Nov (read Mon 9 Nov): €5.8k. Pass: ≥4 qualified at ≤€700. Kill: &lt;3, &gt;€840 per qualified, or profile rejected; week 4: &lt;40% interview pass</a:t>
+              <a:t>Fri 23 Oct – Thu 5 Nov (read Mon 9 Nov): €6.0k. Pass: ≥5 qualified at ≤€700. Kill: &lt;3, &gt;€840 per qualified, or profile rejected; week 4: &lt;40% interview pass</a:t>
             </a:r>
             <a:endParaRPr lang="en-US" sz="1200" dirty="0"/>
           </a:p>
@@ -23906,7 +23906,7 @@
                   <a:schemeClr val="tx1"/>
                 </a:solidFill>
               </a:rPr>
-              <a:t>Pracuj.pl, OLX Praca and Polish-geo Meta; a remote Polish-speaking freelancer phones each applicant (~15 min, paid hourly)</a:t>
+              <a:t>Pracuj.pl, OLX Praca and Polish-geo Meta; a remote Polish-speaking freelancer phones each applicant (15 min, low end of Indeed’s 15–30 min range)</a:t>
             </a:r>
             <a:endParaRPr lang="en-US" sz="1200" dirty="0"/>
           </a:p>
@@ -23937,7 +23937,7 @@
                   <a:schemeClr val="tx1"/>
                 </a:solidFill>
               </a:rPr>
-              <a:t>Polish job seekers mostly use Polish boards (my estimate); the pre-screen saves your 55 slots</a:t>
+              <a:t>Pracuj.pl is Poland's largest job board (762,827 offers in 2025); ~2,000 Polish trade workers already commute to Brandenburg</a:t>
             </a:r>
             <a:endParaRPr lang="en-US" sz="1200" dirty="0"/>
           </a:p>
@@ -23968,7 +23968,7 @@
                   <a:schemeClr val="tx1"/>
                 </a:solidFill>
               </a:rPr>
-              <a:t>200 apps × €20.25 + €400 → 44 qualified × 41% = 18.0 hires (40% of mech, cap 40%)</a:t>
+              <a:t>346 apps × €18.75 + €400 → 48 qualified × 37% = 18.0 hires (40% of mech, cap 40%)</a:t>
             </a:r>
             <a:endParaRPr lang="en-US" sz="1200" dirty="0"/>
           </a:p>
@@ -23999,7 +23999,7 @@
                   <a:schemeClr val="tx1"/>
                 </a:solidFill>
               </a:rPr>
-              <a:t>Tue 27 Oct – Mon 9 Nov (freelancer starts 27 Oct): €1.5k. Pass: ≥7 qualified at ≤€120. Kill: &lt;4, &gt;€140 per qualified, or &lt;30% pass the language check</a:t>
+              <a:t>Tue 27 Oct – Mon 9 Nov (freelancer starts 27 Oct): €2.5k. Pass: ≥9 qualified at ≤€170. Kill: &lt;5, &gt;€200 per qualified, or &lt;30% pass the language check</a:t>
             </a:r>
             <a:endParaRPr lang="en-US" sz="1200" dirty="0"/>
           </a:p>
@@ -24030,7 +24030,7 @@
                   <a:schemeClr val="tx1"/>
                 </a:solidFill>
               </a:rPr>
-              <a:t>Me: ads on day 3, contract the freelancer (live 27 Oct), script and scorecard, daily call 09:00 German time. Client: approve PL ads</a:t>
+              <a:t>Me: ads on day 3, contract the freelancer (live 27 Oct), script and scorecard. Client: approve PL ads</a:t>
             </a:r>
             <a:endParaRPr lang="en-US" sz="1200" dirty="0"/>
           </a:p>
@@ -24077,7 +24077,7 @@
                   <a:schemeClr val="tx1"/>
                 </a:solidFill>
               </a:rPr>
-              <a:t>Every large employer holds thousands of previously screened candidates who are rarely re-marketed to. Here they cost ~€13 per hire and fill week-1 slots before paid channels warm up. Joveo already matches jobs to supply programmatically. Adding a consented rediscovery source, tracked to hire with the same source tags, is repeatable in any market without local staff.</a:t>
+              <a:t>Every employer may keep consenting runners-up for up to a year, and they are rarely re-marketed to. Here 136 records cost ~€13 per hire and fill week-1 slots before paid channels warm up. Joveo already matches jobs to supply programmatically. Adding a consented rediscovery source, tracked to hire with the same source tags, is repeatable in any market without local staff.</a:t>
             </a:r>
             <a:endParaRPr lang="en-US" sz="1200" dirty="0"/>
           </a:p>
@@ -24473,7 +24473,7 @@
                   <a:schemeClr val="tx1"/>
                 </a:solidFill>
               </a:rPr>
-              <a:t>No judgement before €500 / 30 apps (tests run to €750). Updated Q = (qual + 30 × plan) ÷ (apps + 30). Cost per qualified ≤0.8× plan with free slots → +25%/wk from reserve; ≥1.5× → cut 50%; ≥2× → off. Zero qualified at €750 → off where ≥2 were expected; low-yield cells → off if applications are &lt;50% of plan. Next week forecast &gt;55 qualified → pause the costliest cells; &lt;45 → release reserve.</a:t>
+              <a:t>No judgement before €500 / 30 apps (tests run to €750). Updated Q = (qual + 30 × plan) ÷ (apps + 30). Cost per qualified ≤0.8× plan with free slots → +25%/wk from reserve; ≥1.5× → cut 50%; ≥2× → off. Zero qualified at €750 → off where ≥3 were expected; low-yield cells → off if applications are &lt;50% of plan. Next week forecast &gt;55 qualified → pause the costliest cells; &lt;45 → release reserve.</a:t>
             </a:r>
             <a:endParaRPr lang="en-US" sz="1250" dirty="0"/>
           </a:p>
@@ -24596,7 +24596,7 @@
                   <a:schemeClr val="tx1"/>
                 </a:solidFill>
               </a:rPr>
-              <a:t>1) Pass rate on the week-1 cohort (interviews 29 Oct–2 Nov), the most sensitive input: if &lt;45% → tighter knock-outs, pre-screen calls, ask +10 slots, re-run the model. 2) Electrician supply: profile decision + I2's two-week read on 9 Nov; if killed → more StepStone ads, then Search and programmatic; expect ~25–27 electricians (my judgement: capacity allows 30, but slower and at €1,022–€3,788 per hire). 3) The 12 tests' cost per application and share qualified → re-rank on Assumptions §7. Week 4 (16 Nov): acceptance &lt;55% → earlier cut-off + signing bonus.</a:t>
+              <a:t>1) Pass rate on the week-1 cohort (interviews 29 Oct–2 Nov), the most sensitive input: if &lt;45% → tighter knock-outs, pre-screen calls, ask +10 slots, re-run the model. 2) Electrician supply: profile decision + I2's two-week read on 9 Nov; if killed → programmatic picks up the gap: all 30 still possible (model run with I2 off), budget €225.0k, electricians at €2,829 per hire. 3) The 12 tests' cost per application and share qualified → re-rank on Assumptions §7. Week 4 (16 Nov): acceptance &lt;55% → earlier cut-off + signing bonus.</a:t>
             </a:r>
             <a:endParaRPr lang="en-US" sz="1250" dirty="0"/>
           </a:p>

--- a/operation_uptime/Operation_Uptime_Deck.pptx
+++ b/operation_uptime/Operation_Uptime_Deck.pptx
@@ -114,30 +114,30 @@
   <p:extLst>
     <p:ext uri="{521415D9-36F7-43E2-AB2F-B90AF26B5E84}">
       <p14:sectionLst xmlns:p14="http://schemas.microsoft.com/office/powerpoint/2010/main">
-        <p14:section name="Summary" id="{2bdee562-aee5-03b5-c7ad-e010321f31a4}">
+        <p14:section name="Summary" id="{8220110d-32ec-b84c-cba0-908a4f820703}">
           <p14:sldIdLst>
             <p14:sldId id="256"/>
           </p14:sldIdLst>
         </p14:section>
-        <p14:section name="Part 1 Funnel" id="{b035a81c-5815-6f5a-0b24-58eb45efaff1}">
+        <p14:section name="Part 1 Funnel" id="{4dde818f-132d-0663-5b7d-64d89c0a4d38}">
           <p14:sldIdLst>
             <p14:sldId id="257"/>
             <p14:sldId id="258"/>
           </p14:sldIdLst>
         </p14:section>
-        <p14:section name="Part 2 Channels &amp; budget" id="{5f707b24-326e-ad07-33c7-7985bb7b13ec}">
+        <p14:section name="Part 2 Channels &amp; budget" id="{e8d3f9ae-05c4-e12a-ed89-545b34f8f75b}">
           <p14:sldIdLst>
             <p14:sldId id="259"/>
             <p14:sldId id="260"/>
             <p14:sldId id="261"/>
           </p14:sldIdLst>
         </p14:section>
-        <p14:section name="Part 3 New sources" id="{8711c40d-43b5-81fe-9f67-08f022f71fc8}">
+        <p14:section name="Part 3 New sources" id="{b9cdde3d-29ad-e4a0-8940-38ff90eaded4}">
           <p14:sldIdLst>
             <p14:sldId id="262"/>
           </p14:sldIdLst>
         </p14:section>
-        <p14:section name="Part 4 Run it" id="{e0a91142-f22a-f722-a4c5-f92bd1ad51fd}">
+        <p14:section name="Part 4 Run it" id="{b920e9c4-881e-161d-28d5-ca630ef72700}">
           <p14:sldIdLst>
             <p14:sldId id="263"/>
           </p14:sldIdLst>

--- a/operation_uptime/Operation_Uptime_Deck.pptx
+++ b/operation_uptime/Operation_Uptime_Deck.pptx
@@ -114,30 +114,30 @@
   <p:extLst>
     <p:ext uri="{521415D9-36F7-43E2-AB2F-B90AF26B5E84}">
       <p14:sectionLst xmlns:p14="http://schemas.microsoft.com/office/powerpoint/2010/main">
-        <p14:section name="Summary" id="{8220110d-32ec-b84c-cba0-908a4f820703}">
+        <p14:section name="Summary" id="{b5206f16-7ef7-5e8f-5b97-a2281e36dda5}">
           <p14:sldIdLst>
             <p14:sldId id="256"/>
           </p14:sldIdLst>
         </p14:section>
-        <p14:section name="Part 1 Funnel" id="{4dde818f-132d-0663-5b7d-64d89c0a4d38}">
+        <p14:section name="Part 1 Funnel" id="{a4a93b05-1ac7-e866-a8e2-08c32e5adc77}">
           <p14:sldIdLst>
             <p14:sldId id="257"/>
             <p14:sldId id="258"/>
           </p14:sldIdLst>
         </p14:section>
-        <p14:section name="Part 2 Channels &amp; budget" id="{e8d3f9ae-05c4-e12a-ed89-545b34f8f75b}">
+        <p14:section name="Part 2 Channels &amp; budget" id="{b95f9b78-760f-da98-8859-d4736eebed2d}">
           <p14:sldIdLst>
             <p14:sldId id="259"/>
             <p14:sldId id="260"/>
             <p14:sldId id="261"/>
           </p14:sldIdLst>
         </p14:section>
-        <p14:section name="Part 3 New sources" id="{b9cdde3d-29ad-e4a0-8940-38ff90eaded4}">
+        <p14:section name="Part 3 New sources" id="{00b2a2b2-5d6b-340f-c280-4390cbd11ada}">
           <p14:sldIdLst>
             <p14:sldId id="262"/>
           </p14:sldIdLst>
         </p14:section>
-        <p14:section name="Part 4 Run it" id="{b920e9c4-881e-161d-28d5-ca630ef72700}">
+        <p14:section name="Part 4 Run it" id="{7779d167-52e6-e63b-e9ed-2e16521153a4}">
           <p14:sldIdLst>
             <p14:sldId id="263"/>
           </p14:sldIdLst>
@@ -275,7 +275,7 @@
                 <c:formatCode>General</c:formatCode>
                 <c:ptCount val="7"/>
                 <c:pt idx="0">
-                  <c:v>38</c:v>
+                  <c:v>39</c:v>
                 </c:pt>
                 <c:pt idx="1">
                   <c:v>54</c:v>
@@ -284,13 +284,13 @@
                   <c:v>54</c:v>
                 </c:pt>
                 <c:pt idx="3">
-                  <c:v>55</c:v>
+                  <c:v>53</c:v>
                 </c:pt>
                 <c:pt idx="4">
-                  <c:v>55</c:v>
+                  <c:v>54</c:v>
                 </c:pt>
                 <c:pt idx="5">
-                  <c:v>53</c:v>
+                  <c:v>54</c:v>
                 </c:pt>
                 <c:pt idx="6">
                   <c:v>0</c:v>
@@ -1107,22 +1107,22 @@
                 <c:formatCode>General</c:formatCode>
                 <c:ptCount val="9"/>
                 <c:pt idx="0">
-                  <c:v>15555</c:v>
+                  <c:v>6808</c:v>
                 </c:pt>
                 <c:pt idx="1">
-                  <c:v>24084</c:v>
+                  <c:v>10925</c:v>
                 </c:pt>
                 <c:pt idx="2">
-                  <c:v>27182</c:v>
+                  <c:v>13546</c:v>
                 </c:pt>
                 <c:pt idx="3">
-                  <c:v>27954</c:v>
+                  <c:v>13539</c:v>
                 </c:pt>
                 <c:pt idx="4">
-                  <c:v>27954</c:v>
+                  <c:v>13915</c:v>
                 </c:pt>
                 <c:pt idx="5">
-                  <c:v>22961</c:v>
+                  <c:v>12822</c:v>
                 </c:pt>
                 <c:pt idx="6">
                   <c:v>0</c:v>
@@ -1226,7 +1226,7 @@
                 <c:formatCode>General</c:formatCode>
                 <c:ptCount val="9"/>
                 <c:pt idx="0">
-                  <c:v>10294</c:v>
+                  <c:v>7396</c:v>
                 </c:pt>
                 <c:pt idx="1">
                   <c:v>0</c:v>
@@ -1354,22 +1354,22 @@
                   <c:v>0</c:v>
                 </c:pt>
                 <c:pt idx="3">
-                  <c:v>1049</c:v>
+                  <c:v>944</c:v>
                 </c:pt>
                 <c:pt idx="4">
-                  <c:v>1720</c:v>
+                  <c:v>1606</c:v>
                 </c:pt>
                 <c:pt idx="5">
-                  <c:v>1981</c:v>
+                  <c:v>2026</c:v>
                 </c:pt>
                 <c:pt idx="6">
-                  <c:v>2052</c:v>
+                  <c:v>2059</c:v>
                 </c:pt>
                 <c:pt idx="7">
-                  <c:v>2057</c:v>
+                  <c:v>2111</c:v>
                 </c:pt>
                 <c:pt idx="8">
-                  <c:v>2371</c:v>
+                  <c:v>2483</c:v>
                 </c:pt>
               </c:numCache>
             </c:numRef>
@@ -1631,16 +1631,16 @@
                 <c:ptCount val="4"/>
                 <c:lvl>
                   <c:pt idx="0">
-                    <c:v>100% · €207.50k</c:v>
+                    <c:v>100% · €117.50k</c:v>
                   </c:pt>
                   <c:pt idx="1">
-                    <c:v>85% · €176.38k</c:v>
+                    <c:v>85% · €99.88k</c:v>
                   </c:pt>
                   <c:pt idx="2">
-                    <c:v>70% · €145.25k</c:v>
+                    <c:v>70% · €82.25k</c:v>
                   </c:pt>
                   <c:pt idx="3">
-                    <c:v>50% · €103.75k</c:v>
+                    <c:v>50% · €58.75k</c:v>
                   </c:pt>
                 </c:lvl>
               </c:multiLvlStrCache>
@@ -1656,13 +1656,13 @@
                   <c:v>30</c:v>
                 </c:pt>
                 <c:pt idx="1">
-                  <c:v>29.9</c:v>
+                  <c:v>25.4</c:v>
                 </c:pt>
                 <c:pt idx="2">
-                  <c:v>27.1</c:v>
+                  <c:v>20.7</c:v>
                 </c:pt>
                 <c:pt idx="3">
-                  <c:v>17.2</c:v>
+                  <c:v>20.7</c:v>
                 </c:pt>
               </c:numCache>
             </c:numRef>
@@ -1721,16 +1721,16 @@
                 <c:ptCount val="4"/>
                 <c:lvl>
                   <c:pt idx="0">
-                    <c:v>100% · €207.50k</c:v>
+                    <c:v>100% · €117.50k</c:v>
                   </c:pt>
                   <c:pt idx="1">
-                    <c:v>85% · €176.38k</c:v>
+                    <c:v>85% · €99.88k</c:v>
                   </c:pt>
                   <c:pt idx="2">
-                    <c:v>70% · €145.25k</c:v>
+                    <c:v>70% · €82.25k</c:v>
                   </c:pt>
                   <c:pt idx="3">
-                    <c:v>50% · €103.75k</c:v>
+                    <c:v>50% · €58.75k</c:v>
                   </c:pt>
                 </c:lvl>
               </c:multiLvlStrCache>
@@ -1746,13 +1746,13 @@
                   <c:v>45</c:v>
                 </c:pt>
                 <c:pt idx="1">
-                  <c:v>45</c:v>
+                  <c:v>44.7</c:v>
                 </c:pt>
                 <c:pt idx="2">
-                  <c:v>45</c:v>
+                  <c:v>44.7</c:v>
                 </c:pt>
                 <c:pt idx="3">
-                  <c:v>45</c:v>
+                  <c:v>38.6</c:v>
                 </c:pt>
               </c:numCache>
             </c:numRef>
@@ -1811,16 +1811,16 @@
                 <c:ptCount val="4"/>
                 <c:lvl>
                   <c:pt idx="0">
-                    <c:v>100% · €207.50k</c:v>
+                    <c:v>100% · €117.50k</c:v>
                   </c:pt>
                   <c:pt idx="1">
-                    <c:v>85% · €176.38k</c:v>
+                    <c:v>85% · €99.88k</c:v>
                   </c:pt>
                   <c:pt idx="2">
-                    <c:v>70% · €145.25k</c:v>
+                    <c:v>70% · €82.25k</c:v>
                   </c:pt>
                   <c:pt idx="3">
-                    <c:v>50% · €103.75k</c:v>
+                    <c:v>50% · €58.75k</c:v>
                   </c:pt>
                 </c:lvl>
               </c:multiLvlStrCache>
@@ -1836,13 +1836,13 @@
                   <c:v>15</c:v>
                 </c:pt>
                 <c:pt idx="1">
-                  <c:v>14.9</c:v>
+                  <c:v>14.5</c:v>
                 </c:pt>
                 <c:pt idx="2">
-                  <c:v>14.3</c:v>
+                  <c:v>14.5</c:v>
                 </c:pt>
                 <c:pt idx="3">
-                  <c:v>14.3</c:v>
+                  <c:v>14.5</c:v>
                 </c:pt>
               </c:numCache>
             </c:numRef>
@@ -1901,16 +1901,16 @@
                 <c:ptCount val="4"/>
                 <c:lvl>
                   <c:pt idx="0">
-                    <c:v>100% · €207.50k</c:v>
+                    <c:v>100% · €117.50k</c:v>
                   </c:pt>
                   <c:pt idx="1">
-                    <c:v>85% · €176.38k</c:v>
+                    <c:v>85% · €99.88k</c:v>
                   </c:pt>
                   <c:pt idx="2">
-                    <c:v>70% · €145.25k</c:v>
+                    <c:v>70% · €82.25k</c:v>
                   </c:pt>
                   <c:pt idx="3">
-                    <c:v>50% · €103.75k</c:v>
+                    <c:v>50% · €58.75k</c:v>
                   </c:pt>
                 </c:lvl>
               </c:multiLvlStrCache>
@@ -1926,13 +1926,13 @@
                   <c:v>10</c:v>
                 </c:pt>
                 <c:pt idx="1">
-                  <c:v>4.6</c:v>
+                  <c:v>9.6</c:v>
                 </c:pt>
                 <c:pt idx="2">
-                  <c:v>1.6</c:v>
+                  <c:v>7</c:v>
                 </c:pt>
                 <c:pt idx="3">
-                  <c:v>1.6</c:v>
+                  <c:v>2.4</c:v>
                 </c:pt>
               </c:numCache>
             </c:numRef>
@@ -3760,7 +3760,7 @@
                 <a:ea typeface="Cambria" pitchFamily="34" charset="-122"/>
                 <a:cs typeface="Cambria" pitchFamily="34" charset="-120"/>
               </a:rPr>
-              <a:t>€207.5k signs 100 maintenance hires by 31 Dec if the 55 weekly assessments hold</a:t>
+              <a:t>€117.5k signs 100 maintenance hires by 31 Dec if the 55 weekly assessments hold</a:t>
             </a:r>
             <a:endParaRPr lang="en-US" sz="2200" dirty="0"/>
           </a:p>
@@ -3826,7 +3826,7 @@
                 <a:ea typeface="Cambria" pitchFamily="34" charset="-122"/>
                 <a:cs typeface="Cambria" pitchFamily="34" charset="-120"/>
               </a:rPr>
-              <a:t>€207.5k</a:t>
+              <a:t>€117.5k</a:t>
             </a:r>
             <a:endParaRPr lang="en-US" sz="2600" dirty="0"/>
           </a:p>
@@ -3862,7 +3862,7 @@
                   <a:schemeClr val="tx2"/>
                 </a:solidFill>
               </a:rPr>
-              <a:t>recommended budget: €176.2k planned + €31.3k reserve released only on results</a:t>
+              <a:t>recommended budget: €99.2k planned + €18.3k reserve released only on results</a:t>
             </a:r>
             <a:endParaRPr lang="en-US" sz="1000" dirty="0"/>
           </a:p>
@@ -3928,7 +3928,7 @@
                 <a:ea typeface="Cambria" pitchFamily="34" charset="-122"/>
                 <a:cs typeface="Cambria" pitchFamily="34" charset="-120"/>
               </a:rPr>
-              <a:t>€1,762</a:t>
+              <a:t>€992</a:t>
             </a:r>
             <a:endParaRPr lang="en-US" sz="2600" dirty="0"/>
           </a:p>
@@ -3964,7 +3964,7 @@
                   <a:schemeClr val="tx2"/>
                 </a:solidFill>
               </a:rPr>
-              <a:t>media cost per hire (≤€2,075 if the reserve is spent); excludes Joveo fees</a:t>
+              <a:t>media cost per hire (≤€1,175 if the reserve is spent); excludes Joveo fees</a:t>
             </a:r>
             <a:endParaRPr lang="en-US" sz="1000" dirty="0"/>
           </a:p>
@@ -4066,7 +4066,7 @@
                   <a:schemeClr val="tx2"/>
                 </a:solidFill>
               </a:rPr>
-              <a:t>of 314 assessment slots used (309 qualified). Capacity, not money, is the limit</a:t>
+              <a:t>of 314 assessment slots used (308 qualified). Capacity, not money, is the limit</a:t>
             </a:r>
             <a:endParaRPr lang="en-US" sz="1000" dirty="0"/>
           </a:p>
@@ -4237,7 +4237,7 @@
                   <a:schemeClr val="tx1"/>
                 </a:solidFill>
               </a:rPr>
-              <a:t>(€145.25k): ~88 hires; supervisors fall short first (1.6 of 10).</a:t>
+              <a:t>(€82.25k): ~87 hires; electricians fall short first (20.7 of 30).</a:t>
             </a:r>
             <a:endParaRPr lang="en-US" sz="1100" dirty="0"/>
           </a:p>
@@ -4762,7 +4762,7 @@
                           <a:ea typeface="Calibri" pitchFamily="34" charset="-122"/>
                           <a:cs typeface="Calibri" pitchFamily="34" charset="-120"/>
                         </a:rPr>
-                        <a:t>€70.7k</a:t>
+                        <a:t>€37.9k</a:t>
                       </a:r>
                       <a:endParaRPr lang="en-US" sz="1000" dirty="0">
                         <a:latin typeface="Calibri" charset="0"/>
@@ -4827,7 +4827,7 @@
                           <a:ea typeface="Calibri" pitchFamily="34" charset="-122"/>
                           <a:cs typeface="Calibri" pitchFamily="34" charset="-120"/>
                         </a:rPr>
-                        <a:t>€2,356</a:t>
+                        <a:t>€1,264</a:t>
                       </a:r>
                       <a:endParaRPr lang="en-US" sz="1000" dirty="0">
                         <a:latin typeface="Calibri" charset="0"/>
@@ -4892,7 +4892,7 @@
                           <a:ea typeface="Calibri" pitchFamily="34" charset="-122"/>
                           <a:cs typeface="Calibri" pitchFamily="34" charset="-120"/>
                         </a:rPr>
-                        <a:t>Meta 9.5 · Handwerk→Industrie 8.5 · organic 3.5 · referrals 3.3 · programmatic 3.2 · other 2.1</a:t>
+                        <a:t>Handwerk→Industrie 8.5 · Meta 6.3 · organic 5.9 · referrals 3.3 · programmatic 2.8 · other 3.3</a:t>
                       </a:r>
                       <a:endParaRPr lang="en-US" sz="900" dirty="0">
                         <a:latin typeface="Calibri" charset="0"/>
@@ -5089,7 +5089,7 @@
                           <a:ea typeface="Calibri" pitchFamily="34" charset="-122"/>
                           <a:cs typeface="Calibri" pitchFamily="34" charset="-120"/>
                         </a:rPr>
-                        <a:t>€33.9k</a:t>
+                        <a:t>€27.4k</a:t>
                       </a:r>
                       <a:endParaRPr lang="en-US" sz="1000" dirty="0">
                         <a:latin typeface="Calibri" charset="0"/>
@@ -5154,7 +5154,7 @@
                           <a:ea typeface="Calibri" pitchFamily="34" charset="-122"/>
                           <a:cs typeface="Calibri" pitchFamily="34" charset="-120"/>
                         </a:rPr>
-                        <a:t>€752</a:t>
+                        <a:t>€610</a:t>
                       </a:r>
                       <a:endParaRPr lang="en-US" sz="1000" dirty="0">
                         <a:latin typeface="Calibri" charset="0"/>
@@ -5219,7 +5219,7 @@
                           <a:ea typeface="Calibri" pitchFamily="34" charset="-122"/>
                           <a:cs typeface="Calibri" pitchFamily="34" charset="-120"/>
                         </a:rPr>
-                        <a:t>Polish corridor 18.0 · organic 9.2 · Meta 8.2 · referrals 5.8 · StepStone 1.8 · other 2.1</a:t>
+                        <a:t>Polish corridor 18.0 · organic 10.4 · referrals 5.8 · Meta 5.7 · rediscovery 2.4 · other 2.7</a:t>
                       </a:r>
                       <a:endParaRPr lang="en-US" sz="900" dirty="0">
                         <a:latin typeface="Calibri" charset="0"/>
@@ -5416,7 +5416,7 @@
                           <a:ea typeface="Calibri" pitchFamily="34" charset="-122"/>
                           <a:cs typeface="Calibri" pitchFamily="34" charset="-120"/>
                         </a:rPr>
-                        <a:t>€32.4k</a:t>
+                        <a:t>€17.6k</a:t>
                       </a:r>
                       <a:endParaRPr lang="en-US" sz="1000" dirty="0">
                         <a:latin typeface="Calibri" charset="0"/>
@@ -5481,7 +5481,7 @@
                           <a:ea typeface="Calibri" pitchFamily="34" charset="-122"/>
                           <a:cs typeface="Calibri" pitchFamily="34" charset="-120"/>
                         </a:rPr>
-                        <a:t>€2,158</a:t>
+                        <a:t>€1,175</a:t>
                       </a:r>
                       <a:endParaRPr lang="en-US" sz="1000" dirty="0">
                         <a:latin typeface="Calibri" charset="0"/>
@@ -5546,7 +5546,7 @@
                           <a:ea typeface="Calibri" pitchFamily="34" charset="-122"/>
                           <a:cs typeface="Calibri" pitchFamily="34" charset="-120"/>
                         </a:rPr>
-                        <a:t>LinkedIn 10.0 · organic 1.6 · referrals 1.5 · StepStone 0.9 · programmatic 0.5 · other 0.5</a:t>
+                        <a:t>LinkedIn 9.7 · organic 2.7 · referrals 1.5 · rediscovery 0.6 · tests 0.5</a:t>
                       </a:r>
                       <a:endParaRPr lang="en-US" sz="900" dirty="0">
                         <a:latin typeface="Calibri" charset="0"/>
@@ -5743,7 +5743,7 @@
                           <a:ea typeface="Calibri" pitchFamily="34" charset="-122"/>
                           <a:cs typeface="Calibri" pitchFamily="34" charset="-120"/>
                         </a:rPr>
-                        <a:t>€39.3k</a:t>
+                        <a:t>€16.2k</a:t>
                       </a:r>
                       <a:endParaRPr lang="en-US" sz="1000" dirty="0">
                         <a:latin typeface="Calibri" charset="0"/>
@@ -5808,7 +5808,7 @@
                           <a:ea typeface="Calibri" pitchFamily="34" charset="-122"/>
                           <a:cs typeface="Calibri" pitchFamily="34" charset="-120"/>
                         </a:rPr>
-                        <a:t>€3,930</a:t>
+                        <a:t>€1,620</a:t>
                       </a:r>
                       <a:endParaRPr lang="en-US" sz="1000" dirty="0">
                         <a:latin typeface="Calibri" charset="0"/>
@@ -5873,7 +5873,7 @@
                           <a:ea typeface="Calibri" pitchFamily="34" charset="-122"/>
                           <a:cs typeface="Calibri" pitchFamily="34" charset="-120"/>
                         </a:rPr>
-                        <a:t>LinkedIn 8.3 · referrals 0.7 · organic 0.6 · rediscovery 0.2 · tests 0.2</a:t>
+                        <a:t>LinkedIn 7.2 · organic 1.4 · referrals 0.7 · tests 0.4 · rediscovery 0.3</a:t>
                       </a:r>
                       <a:endParaRPr lang="en-US" sz="900" dirty="0">
                         <a:latin typeface="Calibri" charset="0"/>
@@ -6070,7 +6070,7 @@
                           <a:ea typeface="Calibri" pitchFamily="34" charset="-122"/>
                           <a:cs typeface="Calibri" pitchFamily="34" charset="-120"/>
                         </a:rPr>
-                        <a:t>€176.2k</a:t>
+                        <a:t>€99.2k</a:t>
                       </a:r>
                       <a:endParaRPr lang="en-US" sz="1000" dirty="0">
                         <a:latin typeface="Calibri" charset="0"/>
@@ -6135,7 +6135,7 @@
                           <a:ea typeface="Calibri" pitchFamily="34" charset="-122"/>
                           <a:cs typeface="Calibri" pitchFamily="34" charset="-120"/>
                         </a:rPr>
-                        <a:t>€1,762</a:t>
+                        <a:t>€992</a:t>
                       </a:r>
                       <a:endParaRPr lang="en-US" sz="1000" dirty="0">
                         <a:latin typeface="Calibri" charset="0"/>
@@ -6200,7 +6200,7 @@
                           <a:ea typeface="Calibri" pitchFamily="34" charset="-122"/>
                           <a:cs typeface="Calibri" pitchFamily="34" charset="-120"/>
                         </a:rPr>
-                        <a:t>+ €31.3k reserve = €207.5k</a:t>
+                        <a:t>+ €18.3k reserve = €117.5k</a:t>
                       </a:r>
                       <a:endParaRPr lang="en-US" sz="900" dirty="0">
                         <a:latin typeface="Calibri" charset="0"/>
@@ -6294,7 +6294,7 @@
                   <a:schemeClr val="tx1"/>
                 </a:solidFill>
               </a:rPr>
-              <a:t>€750 test in every paid CPC/CPA cell in weeks 1–2, then buy hires cheapest-first: free channels → ATS rediscovery → Polish corridor (≤40% of mechatronics) → referrals → construction-electrician campaign → StepStone → Meta → LinkedIn → programmatic. Pace ≤55 qualified a week; paid spend stops Tue 24 Nov.</a:t>
+              <a:t>€750 test in every paid CPC/CPA cell in weeks 1–2, then buy hires cheapest-first: free channels → ATS rediscovery → Polish corridor (≤40% of mechatronics) → referrals → construction-electrician campaign → StepStone → LinkedIn → Meta → programmatic. Pace ≤55 qualified a week; paid spend stops Tue 24 Nov.</a:t>
             </a:r>
             <a:endParaRPr lang="en-US" sz="1100" dirty="0"/>
           </a:p>
@@ -6434,7 +6434,7 @@
                   <a:schemeClr val="tx1"/>
                 </a:solidFill>
               </a:rPr>
-              <a:t>98% used. Pre-screened sources first, pace ≤55/wk, ask +10–15 slots (65/wk → 81% use).</a:t>
+              <a:t>98% used. Pre-screened sources first, pace ≤55/wk, ask +9 slots/wk (64/wk → 85% use, the utilisation standard).</a:t>
             </a:r>
             <a:endParaRPr lang="en-US" sz="1100" dirty="0"/>
           </a:p>
@@ -6465,7 +6465,7 @@
                   <a:schemeClr val="tx1"/>
                 </a:solidFill>
               </a:rPr>
-              <a:t>~9 of 30 need your OK on construction electricians by 23 Oct; without them programmatic ads fill the gap and the budget rises to €225.0k.</a:t>
+              <a:t>~9 of 30 need your OK on construction electricians by 23 Oct; without them programmatic ads fill the gap and the budget rises to €127.5k.</a:t>
             </a:r>
             <a:endParaRPr lang="en-US" sz="1100" dirty="0"/>
           </a:p>
@@ -6623,7 +6623,7 @@
                   <a:schemeClr val="tx1"/>
                 </a:solidFill>
               </a:rPr>
-              <a:t>55 assessments/wk 22 Oct–1 Dec (+10–15 if possible)</a:t>
+              <a:t>55 assessments/wk 22 Oct–30 Nov (+9 to reach 85% use)</a:t>
             </a:r>
             <a:endParaRPr lang="en-US" sz="1100" dirty="0"/>
           </a:p>
@@ -6695,7 +6695,7 @@
                   <a:schemeClr val="tx1"/>
                 </a:solidFill>
               </a:rPr>
-              <a:t>3-day offers, e-signature to 18 Dec; approve €207.5k</a:t>
+              <a:t>3-day offers, e-signature to 18 Dec; approve €117.5k</a:t>
             </a:r>
             <a:endParaRPr lang="en-US" sz="1100" dirty="0"/>
           </a:p>
@@ -6845,7 +6845,7 @@
                 <a:ea typeface="Cambria" pitchFamily="34" charset="-122"/>
                 <a:cs typeface="Cambria" pitchFamily="34" charset="-120"/>
               </a:rPr>
-              <a:t>Working back from 100 hires: ~309 qualified applicants for 314 assessment slots</a:t>
+              <a:t>Working back from 100 hires: ~308 qualified applicants for 314 assessment slots</a:t>
             </a:r>
             <a:endParaRPr lang="en-US" sz="2200" dirty="0"/>
           </a:p>
@@ -7566,7 +7566,7 @@
                             <a:schemeClr val="tx1"/>
                           </a:solidFill>
                         </a:rPr>
-                        <a:t>15%</a:t>
+                        <a:t>25%</a:t>
                       </a:r>
                       <a:endParaRPr lang="en-US" sz="1100" dirty="0"/>
                     </a:p>
@@ -7914,7 +7914,7 @@
                             <a:schemeClr val="tx1"/>
                           </a:solidFill>
                         </a:rPr>
-                        <a:t>635</a:t>
+                        <a:t>381</a:t>
                       </a:r>
                       <a:endParaRPr lang="en-US" sz="1100" dirty="0"/>
                     </a:p>
@@ -8090,7 +8090,7 @@
                             <a:schemeClr val="tx1"/>
                           </a:solidFill>
                         </a:rPr>
-                        <a:t>22%</a:t>
+                        <a:t>25%</a:t>
                       </a:r>
                       <a:endParaRPr lang="en-US" sz="1100" dirty="0"/>
                     </a:p>
@@ -8438,7 +8438,7 @@
                             <a:schemeClr val="tx1"/>
                           </a:solidFill>
                         </a:rPr>
-                        <a:t>551</a:t>
+                        <a:t>485</a:t>
                       </a:r>
                       <a:endParaRPr lang="en-US" sz="1100" dirty="0"/>
                     </a:p>
@@ -8614,7 +8614,7 @@
                             <a:schemeClr val="tx1"/>
                           </a:solidFill>
                         </a:rPr>
-                        <a:t>15%</a:t>
+                        <a:t>25%</a:t>
                       </a:r>
                       <a:endParaRPr lang="en-US" sz="1100" dirty="0"/>
                     </a:p>
@@ -8962,7 +8962,7 @@
                             <a:schemeClr val="tx1"/>
                           </a:solidFill>
                         </a:rPr>
-                        <a:t>353</a:t>
+                        <a:t>212</a:t>
                       </a:r>
                       <a:endParaRPr lang="en-US" sz="1100" dirty="0"/>
                     </a:p>
@@ -9138,7 +9138,7 @@
                             <a:schemeClr val="tx1"/>
                           </a:solidFill>
                         </a:rPr>
-                        <a:t>10%</a:t>
+                        <a:t>23%</a:t>
                       </a:r>
                       <a:endParaRPr lang="en-US" sz="1100" dirty="0"/>
                     </a:p>
@@ -9486,7 +9486,7 @@
                             <a:schemeClr val="tx1"/>
                           </a:solidFill>
                         </a:rPr>
-                        <a:t>420</a:t>
+                        <a:t>183</a:t>
                       </a:r>
                       <a:endParaRPr lang="en-US" sz="1100" dirty="0"/>
                     </a:p>
@@ -9978,7 +9978,7 @@
                             <a:schemeClr val="tx1"/>
                           </a:solidFill>
                         </a:rPr>
-                        <a:t>1,959</a:t>
+                        <a:t>1,260</a:t>
                       </a:r>
                       <a:endParaRPr lang="en-US" sz="1100" dirty="0"/>
                     </a:p>
@@ -10079,7 +10079,7 @@
                   <a:schemeClr val="tx1"/>
                 </a:solidFill>
               </a:rPr>
-              <a:t>309 qualified / 2,413 applications</a:t>
+              <a:t>308 qualified / 1,608 applications</a:t>
             </a:r>
             <a:pPr indent="0" marL="0">
               <a:buNone/>
@@ -10189,7 +10189,7 @@
                   <a:schemeClr val="tx2"/>
                 </a:solidFill>
               </a:rPr>
-              <a:t>Week 1: 38 of 39 slots; weeks 2–5: 54–55 of 55; week 6: 53; assessments end Mon 30 Nov. Rediscovery re-applicants (waves 21 Oct, 26 Oct and 2 Nov) and the €750 tests fill weeks 1–2, so regular spend ramps 10%, 16%, 18%, then 18–21% a week.</a:t>
+              <a:t>Week 1: 39 of 39 slots; weeks 2–5: 53–54 of 55; week 6: 54; assessments end Mon 30 Nov. Rediscovery re-applicants (waves 21 Oct, 26 Oct and 2 Nov) and the €750 tests fill weeks 1–2, so regular spend ramps 9%, 14%, 18%, then 18–22% a week.</a:t>
             </a:r>
             <a:endParaRPr lang="en-US" sz="1100" dirty="0"/>
           </a:p>
@@ -11166,7 +11166,7 @@
                             <a:schemeClr val="tx1"/>
                           </a:solidFill>
                         </a:rPr>
-                        <a:t>12.2×</a:t>
+                        <a:t>12.3×</a:t>
                       </a:r>
                       <a:endParaRPr lang="en-US" sz="1100" dirty="0"/>
                     </a:p>
@@ -11224,7 +11224,7 @@
                             <a:schemeClr val="tx1"/>
                           </a:solidFill>
                         </a:rPr>
-                        <a:t>12.2×</a:t>
+                        <a:t>12.3×</a:t>
                       </a:r>
                       <a:endParaRPr lang="en-US" sz="1100" dirty="0"/>
                     </a:p>
@@ -11516,7 +11516,7 @@
                             <a:schemeClr val="tx1"/>
                           </a:solidFill>
                         </a:rPr>
-                        <a:t>3.0×</a:t>
+                        <a:t>3.2×</a:t>
                       </a:r>
                       <a:endParaRPr lang="en-US" sz="1100" dirty="0"/>
                     </a:p>
@@ -11574,7 +11574,7 @@
                             <a:schemeClr val="tx1"/>
                           </a:solidFill>
                         </a:rPr>
-                        <a:t>3.0×</a:t>
+                        <a:t>3.2×</a:t>
                       </a:r>
                       <a:endParaRPr lang="en-US" sz="1100" dirty="0"/>
                     </a:p>
@@ -11866,7 +11866,7 @@
                             <a:schemeClr val="tx1"/>
                           </a:solidFill>
                         </a:rPr>
-                        <a:t>3.8×</a:t>
+                        <a:t>3.9×</a:t>
                       </a:r>
                       <a:endParaRPr lang="en-US" sz="1100" dirty="0"/>
                     </a:p>
@@ -11924,7 +11924,7 @@
                             <a:schemeClr val="tx1"/>
                           </a:solidFill>
                         </a:rPr>
-                        <a:t>3.8×</a:t>
+                        <a:t>3.9×</a:t>
                       </a:r>
                       <a:endParaRPr lang="en-US" sz="1100" dirty="0"/>
                     </a:p>
@@ -12188,7 +12188,7 @@
                   <a:schemeClr val="tx1"/>
                 </a:solidFill>
               </a:rPr>
-              <a:t>the scarcest trade in Brandenburg (KOFA 2026: 85.7% of vacancies have no suitable unemployed candidate, vs 41.4% across all occupations) and the largest scarce block (30), so they take 40% of the money. No Polish route and no foreign-trained route by 31 Dec. Supervisors cost more per hire and automation has thinner coverage, but they are 10 and 15 hires with fallbacks (internal promotion, foreign-trained).</a:t>
+              <a:t>the scarcest trade in Brandenburg (KOFA 2026: 85.7% of vacancies have no suitable unemployed candidate, vs 41.4% across all occupations) and the largest scarce block (30), so they take 38% of the money. No Polish route and no foreign-trained route by 31 Dec. Supervisors cost more per hire and automation has thinner coverage, but they are 10 and 15 hires with fallbacks (internal promotion, foreign-trained).</a:t>
             </a:r>
             <a:endParaRPr lang="en-US" sz="1200" dirty="0"/>
           </a:p>
@@ -12235,7 +12235,7 @@
                   <a:schemeClr val="tx1"/>
                 </a:solidFill>
               </a:rPr>
-              <a:t>30% worse pass or acceptance rates need 441 qualified for 314 slots (140%). The 43% more media that would need can't help: slots cap hires at ~71. Upstream misses (share qualified, cost per application) only cost money.</a:t>
+              <a:t>30% worse pass or acceptance rates need 440 qualified for 314 slots (140%). The 43% more media that would need can't help: slots cap hires at ~71. Upstream misses (share qualified, cost per application) only cost money.</a:t>
             </a:r>
             <a:endParaRPr lang="en-US" sz="1200" dirty="0"/>
           </a:p>
@@ -12542,7 +12542,7 @@
                             <a:schemeClr val="tx1"/>
                           </a:solidFill>
                         </a:rPr>
-                        <a:t>441</a:t>
+                        <a:t>440</a:t>
                       </a:r>
                       <a:endParaRPr lang="en-US" sz="1000" dirty="0"/>
                     </a:p>
@@ -12718,7 +12718,7 @@
                             <a:schemeClr val="tx1"/>
                           </a:solidFill>
                         </a:rPr>
-                        <a:t>441</a:t>
+                        <a:t>440</a:t>
                       </a:r>
                       <a:endParaRPr lang="en-US" sz="1000" dirty="0"/>
                     </a:p>
@@ -12894,7 +12894,7 @@
                             <a:schemeClr val="tx1"/>
                           </a:solidFill>
                         </a:rPr>
-                        <a:t>309</a:t>
+                        <a:t>308</a:t>
                       </a:r>
                       <a:endParaRPr lang="en-US" sz="1000" dirty="0"/>
                     </a:p>
@@ -13070,7 +13070,7 @@
                             <a:schemeClr val="tx1"/>
                           </a:solidFill>
                         </a:rPr>
-                        <a:t>309</a:t>
+                        <a:t>308</a:t>
                       </a:r>
                       <a:endParaRPr lang="en-US" sz="1000" dirty="0"/>
                     </a:p>
@@ -13246,7 +13246,7 @@
                             <a:schemeClr val="tx1"/>
                           </a:solidFill>
                         </a:rPr>
-                        <a:t>309</a:t>
+                        <a:t>308</a:t>
                       </a:r>
                       <a:endParaRPr lang="en-US" sz="1000" dirty="0"/>
                     </a:p>
@@ -13497,7 +13497,7 @@
                 <a:ea typeface="Cambria" pitchFamily="34" charset="-122"/>
                 <a:cs typeface="Cambria" pitchFamily="34" charset="-120"/>
               </a:rPr>
-              <a:t>Each role buys hires cheapest-first; electricians run out of cheap sources after ~4</a:t>
+              <a:t>Each role buys hires cheapest-first; electricians run out of cheap sources after ~7</a:t>
             </a:r>
             <a:endParaRPr lang="en-US" sz="2200" dirty="0"/>
           </a:p>
@@ -13912,7 +13912,7 @@
                             <a:schemeClr val="tx1"/>
                           </a:solidFill>
                         </a:rPr>
-                        <a:t>€0 / €0 · 3.5</a:t>
+                        <a:t>€0 / €0 · 5.9</a:t>
                       </a:r>
                       <a:endParaRPr lang="en-US" sz="1000" dirty="0"/>
                     </a:p>
@@ -13973,7 +13973,7 @@
                             <a:schemeClr val="tx1"/>
                           </a:solidFill>
                         </a:rPr>
-                        <a:t>€0 / €0 · 9.2</a:t>
+                        <a:t>€0 / €0 · 10.4</a:t>
                       </a:r>
                       <a:endParaRPr lang="en-US" sz="1000" dirty="0"/>
                     </a:p>
@@ -14034,7 +14034,7 @@
                             <a:schemeClr val="tx1"/>
                           </a:solidFill>
                         </a:rPr>
-                        <a:t>€0 / €0 · 1.6</a:t>
+                        <a:t>€0 / €0 · 2.7</a:t>
                       </a:r>
                       <a:endParaRPr lang="en-US" sz="1000" dirty="0"/>
                     </a:p>
@@ -14095,7 +14095,7 @@
                             <a:schemeClr val="tx1"/>
                           </a:solidFill>
                         </a:rPr>
-                        <a:t>€0 / €0 · 0.6</a:t>
+                        <a:t>€0 / €0 · 1.4</a:t>
                       </a:r>
                       <a:endParaRPr lang="en-US" sz="1000" dirty="0"/>
                     </a:p>
@@ -14216,7 +14216,7 @@
                             <a:schemeClr val="tx1"/>
                           </a:solidFill>
                         </a:rPr>
-                        <a:t>€5 / €14 · 0.9</a:t>
+                        <a:t>€5 / €14 · 1.4</a:t>
                       </a:r>
                       <a:endParaRPr lang="en-US" sz="1000" dirty="0"/>
                     </a:p>
@@ -14277,7 +14277,7 @@
                             <a:schemeClr val="tx1"/>
                           </a:solidFill>
                         </a:rPr>
-                        <a:t>€5 / €12 · 1.6</a:t>
+                        <a:t>€5 / €12 · 2.4</a:t>
                       </a:r>
                       <a:endParaRPr lang="en-US" sz="1000" dirty="0"/>
                     </a:p>
@@ -14338,7 +14338,7 @@
                             <a:schemeClr val="tx1"/>
                           </a:solidFill>
                         </a:rPr>
-                        <a:t>€5 / €15 · 0.4</a:t>
+                        <a:t>€5 / €15 · 0.6</a:t>
                       </a:r>
                       <a:endParaRPr lang="en-US" sz="1000" dirty="0"/>
                     </a:p>
@@ -14399,7 +14399,7 @@
                             <a:schemeClr val="tx1"/>
                           </a:solidFill>
                         </a:rPr>
-                        <a:t>€5 / €18 · 0.2</a:t>
+                        <a:t>€5 / €18 · 0.3</a:t>
                       </a:r>
                       <a:endParaRPr lang="en-US" sz="1000" dirty="0"/>
                     </a:p>
@@ -15061,7 +15061,7 @@
                             <a:schemeClr val="tx1"/>
                           </a:solidFill>
                         </a:rPr>
-                        <a:t>StepStone (German, CV-based, €1,449/ad)</a:t>
+                        <a:t>I2 Handwerk → Industrie (new pool)</a:t>
                       </a:r>
                       <a:endParaRPr lang="en-US" sz="1000" dirty="0"/>
                     </a:p>
@@ -15119,7 +15119,7 @@
                             <a:schemeClr val="tx1"/>
                           </a:solidFill>
                         </a:rPr>
-                        <a:t>€894 / €2,840 · 1.0</a:t>
+                        <a:t>€336 / €1,326 · 8.5</a:t>
                       </a:r>
                       <a:endParaRPr lang="en-US" sz="1000" dirty="0"/>
                     </a:p>
@@ -15177,10 +15177,244 @@
                       <a:r>
                         <a:rPr lang="en-US" sz="1000" dirty="0">
                           <a:solidFill>
+                            <a:schemeClr val="accent4"/>
+                          </a:solidFill>
+                        </a:rPr>
+                        <a:t>–</a:t>
+                      </a:r>
+                      <a:endParaRPr lang="en-US" sz="1000" dirty="0"/>
+                    </a:p>
+                  </a:txBody>
+                  <a:tcPr marL="91440" marR="91440" marT="45720" marB="45720" anchor="ctr">
+                    <a:lnL w="6350" cap="flat" cmpd="sng" algn="ctr">
+                      <a:solidFill>
+                        <a:srgbClr val="D6DEE5"/>
+                      </a:solidFill>
+                      <a:prstDash val="solid"/>
+                      <a:round/>
+                      <a:headEnd type="none" w="med" len="med"/>
+                      <a:tailEnd type="none" w="med" len="med"/>
+                    </a:lnL>
+                    <a:lnR w="6350" cap="flat" cmpd="sng" algn="ctr">
+                      <a:solidFill>
+                        <a:srgbClr val="D6DEE5"/>
+                      </a:solidFill>
+                      <a:prstDash val="solid"/>
+                      <a:round/>
+                      <a:headEnd type="none" w="med" len="med"/>
+                      <a:tailEnd type="none" w="med" len="med"/>
+                    </a:lnR>
+                    <a:lnT w="6350" cap="flat" cmpd="sng" algn="ctr">
+                      <a:solidFill>
+                        <a:srgbClr val="D6DEE5"/>
+                      </a:solidFill>
+                      <a:prstDash val="solid"/>
+                      <a:round/>
+                      <a:headEnd type="none" w="med" len="med"/>
+                      <a:tailEnd type="none" w="med" len="med"/>
+                    </a:lnT>
+                    <a:lnB w="6350" cap="flat" cmpd="sng" algn="ctr">
+                      <a:solidFill>
+                        <a:srgbClr val="D6DEE5"/>
+                      </a:solidFill>
+                      <a:prstDash val="solid"/>
+                      <a:round/>
+                      <a:headEnd type="none" w="med" len="med"/>
+                      <a:tailEnd type="none" w="med" len="med"/>
+                    </a:lnB>
+                  </a:tcPr>
+                </a:tc>
+                <a:tc>
+                  <a:txBody>
+                    <a:bodyPr/>
+                    <a:lstStyle/>
+                    <a:p>
+                      <a:pPr algn="ctr" indent="0" marL="0">
+                        <a:buNone/>
+                      </a:pPr>
+                      <a:r>
+                        <a:rPr lang="en-US" sz="1000" dirty="0">
+                          <a:solidFill>
+                            <a:schemeClr val="accent4"/>
+                          </a:solidFill>
+                        </a:rPr>
+                        <a:t>–</a:t>
+                      </a:r>
+                      <a:endParaRPr lang="en-US" sz="1000" dirty="0"/>
+                    </a:p>
+                  </a:txBody>
+                  <a:tcPr marL="91440" marR="91440" marT="45720" marB="45720" anchor="ctr">
+                    <a:lnL w="6350" cap="flat" cmpd="sng" algn="ctr">
+                      <a:solidFill>
+                        <a:srgbClr val="D6DEE5"/>
+                      </a:solidFill>
+                      <a:prstDash val="solid"/>
+                      <a:round/>
+                      <a:headEnd type="none" w="med" len="med"/>
+                      <a:tailEnd type="none" w="med" len="med"/>
+                    </a:lnL>
+                    <a:lnR w="6350" cap="flat" cmpd="sng" algn="ctr">
+                      <a:solidFill>
+                        <a:srgbClr val="D6DEE5"/>
+                      </a:solidFill>
+                      <a:prstDash val="solid"/>
+                      <a:round/>
+                      <a:headEnd type="none" w="med" len="med"/>
+                      <a:tailEnd type="none" w="med" len="med"/>
+                    </a:lnR>
+                    <a:lnT w="6350" cap="flat" cmpd="sng" algn="ctr">
+                      <a:solidFill>
+                        <a:srgbClr val="D6DEE5"/>
+                      </a:solidFill>
+                      <a:prstDash val="solid"/>
+                      <a:round/>
+                      <a:headEnd type="none" w="med" len="med"/>
+                      <a:tailEnd type="none" w="med" len="med"/>
+                    </a:lnT>
+                    <a:lnB w="6350" cap="flat" cmpd="sng" algn="ctr">
+                      <a:solidFill>
+                        <a:srgbClr val="D6DEE5"/>
+                      </a:solidFill>
+                      <a:prstDash val="solid"/>
+                      <a:round/>
+                      <a:headEnd type="none" w="med" len="med"/>
+                      <a:tailEnd type="none" w="med" len="med"/>
+                    </a:lnB>
+                  </a:tcPr>
+                </a:tc>
+                <a:tc>
+                  <a:txBody>
+                    <a:bodyPr/>
+                    <a:lstStyle/>
+                    <a:p>
+                      <a:pPr algn="ctr" indent="0" marL="0">
+                        <a:buNone/>
+                      </a:pPr>
+                      <a:r>
+                        <a:rPr lang="en-US" sz="1000" dirty="0">
+                          <a:solidFill>
+                            <a:schemeClr val="accent4"/>
+                          </a:solidFill>
+                        </a:rPr>
+                        <a:t>–</a:t>
+                      </a:r>
+                      <a:endParaRPr lang="en-US" sz="1000" dirty="0"/>
+                    </a:p>
+                  </a:txBody>
+                  <a:tcPr marL="91440" marR="91440" marT="45720" marB="45720" anchor="ctr">
+                    <a:lnL w="6350" cap="flat" cmpd="sng" algn="ctr">
+                      <a:solidFill>
+                        <a:srgbClr val="D6DEE5"/>
+                      </a:solidFill>
+                      <a:prstDash val="solid"/>
+                      <a:round/>
+                      <a:headEnd type="none" w="med" len="med"/>
+                      <a:tailEnd type="none" w="med" len="med"/>
+                    </a:lnL>
+                    <a:lnR w="6350" cap="flat" cmpd="sng" algn="ctr">
+                      <a:solidFill>
+                        <a:srgbClr val="D6DEE5"/>
+                      </a:solidFill>
+                      <a:prstDash val="solid"/>
+                      <a:round/>
+                      <a:headEnd type="none" w="med" len="med"/>
+                      <a:tailEnd type="none" w="med" len="med"/>
+                    </a:lnR>
+                    <a:lnT w="6350" cap="flat" cmpd="sng" algn="ctr">
+                      <a:solidFill>
+                        <a:srgbClr val="D6DEE5"/>
+                      </a:solidFill>
+                      <a:prstDash val="solid"/>
+                      <a:round/>
+                      <a:headEnd type="none" w="med" len="med"/>
+                      <a:tailEnd type="none" w="med" len="med"/>
+                    </a:lnT>
+                    <a:lnB w="6350" cap="flat" cmpd="sng" algn="ctr">
+                      <a:solidFill>
+                        <a:srgbClr val="D6DEE5"/>
+                      </a:solidFill>
+                      <a:prstDash val="solid"/>
+                      <a:round/>
+                      <a:headEnd type="none" w="med" len="med"/>
+                      <a:tailEnd type="none" w="med" len="med"/>
+                    </a:lnB>
+                  </a:tcPr>
+                </a:tc>
+              </a:tr>
+              <a:tr h="329184">
+                <a:tc>
+                  <a:txBody>
+                    <a:bodyPr/>
+                    <a:lstStyle/>
+                    <a:p>
+                      <a:pPr indent="0" marL="0">
+                        <a:buNone/>
+                      </a:pPr>
+                      <a:r>
+                        <a:rPr lang="en-US" sz="1000" dirty="0">
+                          <a:solidFill>
                             <a:schemeClr val="tx1"/>
                           </a:solidFill>
                         </a:rPr>
-                        <a:t>€610 / €1,643 · 1.8</a:t>
+                        <a:t>StepStone (German, CV-based, €1,449/ad)</a:t>
+                      </a:r>
+                      <a:endParaRPr lang="en-US" sz="1000" dirty="0"/>
+                    </a:p>
+                  </a:txBody>
+                  <a:tcPr marL="91440" marR="91440" marT="45720" marB="45720" anchor="ctr">
+                    <a:lnL w="6350" cap="flat" cmpd="sng" algn="ctr">
+                      <a:solidFill>
+                        <a:srgbClr val="D6DEE5"/>
+                      </a:solidFill>
+                      <a:prstDash val="solid"/>
+                      <a:round/>
+                      <a:headEnd type="none" w="med" len="med"/>
+                      <a:tailEnd type="none" w="med" len="med"/>
+                    </a:lnL>
+                    <a:lnR w="6350" cap="flat" cmpd="sng" algn="ctr">
+                      <a:solidFill>
+                        <a:srgbClr val="D6DEE5"/>
+                      </a:solidFill>
+                      <a:prstDash val="solid"/>
+                      <a:round/>
+                      <a:headEnd type="none" w="med" len="med"/>
+                      <a:tailEnd type="none" w="med" len="med"/>
+                    </a:lnR>
+                    <a:lnT w="6350" cap="flat" cmpd="sng" algn="ctr">
+                      <a:solidFill>
+                        <a:srgbClr val="D6DEE5"/>
+                      </a:solidFill>
+                      <a:prstDash val="solid"/>
+                      <a:round/>
+                      <a:headEnd type="none" w="med" len="med"/>
+                      <a:tailEnd type="none" w="med" len="med"/>
+                    </a:lnT>
+                    <a:lnB w="6350" cap="flat" cmpd="sng" algn="ctr">
+                      <a:solidFill>
+                        <a:srgbClr val="D6DEE5"/>
+                      </a:solidFill>
+                      <a:prstDash val="solid"/>
+                      <a:round/>
+                      <a:headEnd type="none" w="med" len="med"/>
+                      <a:tailEnd type="none" w="med" len="med"/>
+                    </a:lnB>
+                  </a:tcPr>
+                </a:tc>
+                <a:tc>
+                  <a:txBody>
+                    <a:bodyPr/>
+                    <a:lstStyle/>
+                    <a:p>
+                      <a:pPr algn="ctr" indent="0" marL="0">
+                        <a:buNone/>
+                      </a:pPr>
+                      <a:r>
+                        <a:rPr lang="en-US" sz="1000" dirty="0">
+                          <a:solidFill>
+                            <a:schemeClr val="tx1"/>
+                          </a:solidFill>
+                        </a:rPr>
+                        <a:t>€537 / €1,704 · 1.7</a:t>
                       </a:r>
                       <a:endParaRPr lang="en-US" sz="1000" dirty="0"/>
                     </a:p>
@@ -15241,7 +15475,7 @@
                             <a:schemeClr val="tx1"/>
                           </a:solidFill>
                         </a:rPr>
-                        <a:t>€894 / €3,155 · 0.9</a:t>
+                        <a:t>€537 / €1,446 · 2.0</a:t>
                       </a:r>
                       <a:endParaRPr lang="en-US" sz="1000" dirty="0"/>
                     </a:p>
@@ -15302,7 +15536,7 @@
                             <a:schemeClr val="tx1"/>
                           </a:solidFill>
                         </a:rPr>
-                        <a:t>€1,342 / €5,637 · –</a:t>
+                        <a:t>€537 / €1,893 · –</a:t>
                       </a:r>
                       <a:endParaRPr lang="en-US" sz="1000" dirty="0"/>
                     </a:p>
@@ -15349,6 +15583,67 @@
                     </a:solidFill>
                   </a:tcPr>
                 </a:tc>
+                <a:tc>
+                  <a:txBody>
+                    <a:bodyPr/>
+                    <a:lstStyle/>
+                    <a:p>
+                      <a:pPr algn="ctr" indent="0" marL="0">
+                        <a:buNone/>
+                      </a:pPr>
+                      <a:r>
+                        <a:rPr lang="en-US" sz="1000" dirty="0">
+                          <a:solidFill>
+                            <a:schemeClr val="tx1"/>
+                          </a:solidFill>
+                        </a:rPr>
+                        <a:t>€583 / €2,451 · –</a:t>
+                      </a:r>
+                      <a:endParaRPr lang="en-US" sz="1000" dirty="0"/>
+                    </a:p>
+                  </a:txBody>
+                  <a:tcPr marL="91440" marR="91440" marT="45720" marB="45720" anchor="ctr">
+                    <a:lnL w="6350" cap="flat" cmpd="sng" algn="ctr">
+                      <a:solidFill>
+                        <a:srgbClr val="D6DEE5"/>
+                      </a:solidFill>
+                      <a:prstDash val="solid"/>
+                      <a:round/>
+                      <a:headEnd type="none" w="med" len="med"/>
+                      <a:tailEnd type="none" w="med" len="med"/>
+                    </a:lnL>
+                    <a:lnR w="6350" cap="flat" cmpd="sng" algn="ctr">
+                      <a:solidFill>
+                        <a:srgbClr val="D6DEE5"/>
+                      </a:solidFill>
+                      <a:prstDash val="solid"/>
+                      <a:round/>
+                      <a:headEnd type="none" w="med" len="med"/>
+                      <a:tailEnd type="none" w="med" len="med"/>
+                    </a:lnR>
+                    <a:lnT w="6350" cap="flat" cmpd="sng" algn="ctr">
+                      <a:solidFill>
+                        <a:srgbClr val="D6DEE5"/>
+                      </a:solidFill>
+                      <a:prstDash val="solid"/>
+                      <a:round/>
+                      <a:headEnd type="none" w="med" len="med"/>
+                      <a:tailEnd type="none" w="med" len="med"/>
+                    </a:lnT>
+                    <a:lnB w="6350" cap="flat" cmpd="sng" algn="ctr">
+                      <a:solidFill>
+                        <a:srgbClr val="D6DEE5"/>
+                      </a:solidFill>
+                      <a:prstDash val="solid"/>
+                      <a:round/>
+                      <a:headEnd type="none" w="med" len="med"/>
+                      <a:tailEnd type="none" w="med" len="med"/>
+                    </a:lnB>
+                    <a:solidFill>
+                      <a:srgbClr val="F2F4F6"/>
+                    </a:solidFill>
+                  </a:tcPr>
+                </a:tc>
               </a:tr>
               <a:tr h="329184">
                 <a:tc>
@@ -15365,7 +15660,7 @@
                             <a:schemeClr val="tx1"/>
                           </a:solidFill>
                         </a:rPr>
-                        <a:t>Meta lead ads (passive blue-collar reach)</a:t>
+                        <a:t>LinkedIn (PLC/TIA and Meister profiles)</a:t>
                       </a:r>
                       <a:endParaRPr lang="en-US" sz="1000" dirty="0"/>
                     </a:p>
@@ -15420,10 +15715,126 @@
                       <a:r>
                         <a:rPr lang="en-US" sz="1000" dirty="0">
                           <a:solidFill>
+                            <a:schemeClr val="accent4"/>
+                          </a:solidFill>
+                        </a:rPr>
+                        <a:t>–</a:t>
+                      </a:r>
+                      <a:endParaRPr lang="en-US" sz="1000" dirty="0"/>
+                    </a:p>
+                  </a:txBody>
+                  <a:tcPr marL="91440" marR="91440" marT="45720" marB="45720" anchor="ctr">
+                    <a:lnL w="6350" cap="flat" cmpd="sng" algn="ctr">
+                      <a:solidFill>
+                        <a:srgbClr val="D6DEE5"/>
+                      </a:solidFill>
+                      <a:prstDash val="solid"/>
+                      <a:round/>
+                      <a:headEnd type="none" w="med" len="med"/>
+                      <a:tailEnd type="none" w="med" len="med"/>
+                    </a:lnL>
+                    <a:lnR w="6350" cap="flat" cmpd="sng" algn="ctr">
+                      <a:solidFill>
+                        <a:srgbClr val="D6DEE5"/>
+                      </a:solidFill>
+                      <a:prstDash val="solid"/>
+                      <a:round/>
+                      <a:headEnd type="none" w="med" len="med"/>
+                      <a:tailEnd type="none" w="med" len="med"/>
+                    </a:lnR>
+                    <a:lnT w="6350" cap="flat" cmpd="sng" algn="ctr">
+                      <a:solidFill>
+                        <a:srgbClr val="D6DEE5"/>
+                      </a:solidFill>
+                      <a:prstDash val="solid"/>
+                      <a:round/>
+                      <a:headEnd type="none" w="med" len="med"/>
+                      <a:tailEnd type="none" w="med" len="med"/>
+                    </a:lnT>
+                    <a:lnB w="6350" cap="flat" cmpd="sng" algn="ctr">
+                      <a:solidFill>
+                        <a:srgbClr val="D6DEE5"/>
+                      </a:solidFill>
+                      <a:prstDash val="solid"/>
+                      <a:round/>
+                      <a:headEnd type="none" w="med" len="med"/>
+                      <a:tailEnd type="none" w="med" len="med"/>
+                    </a:lnB>
+                  </a:tcPr>
+                </a:tc>
+                <a:tc>
+                  <a:txBody>
+                    <a:bodyPr/>
+                    <a:lstStyle/>
+                    <a:p>
+                      <a:pPr algn="ctr" indent="0" marL="0">
+                        <a:buNone/>
+                      </a:pPr>
+                      <a:r>
+                        <a:rPr lang="en-US" sz="1000" dirty="0">
+                          <a:solidFill>
+                            <a:schemeClr val="accent4"/>
+                          </a:solidFill>
+                        </a:rPr>
+                        <a:t>–</a:t>
+                      </a:r>
+                      <a:endParaRPr lang="en-US" sz="1000" dirty="0"/>
+                    </a:p>
+                  </a:txBody>
+                  <a:tcPr marL="91440" marR="91440" marT="45720" marB="45720" anchor="ctr">
+                    <a:lnL w="6350" cap="flat" cmpd="sng" algn="ctr">
+                      <a:solidFill>
+                        <a:srgbClr val="D6DEE5"/>
+                      </a:solidFill>
+                      <a:prstDash val="solid"/>
+                      <a:round/>
+                      <a:headEnd type="none" w="med" len="med"/>
+                      <a:tailEnd type="none" w="med" len="med"/>
+                    </a:lnL>
+                    <a:lnR w="6350" cap="flat" cmpd="sng" algn="ctr">
+                      <a:solidFill>
+                        <a:srgbClr val="D6DEE5"/>
+                      </a:solidFill>
+                      <a:prstDash val="solid"/>
+                      <a:round/>
+                      <a:headEnd type="none" w="med" len="med"/>
+                      <a:tailEnd type="none" w="med" len="med"/>
+                    </a:lnR>
+                    <a:lnT w="6350" cap="flat" cmpd="sng" algn="ctr">
+                      <a:solidFill>
+                        <a:srgbClr val="D6DEE5"/>
+                      </a:solidFill>
+                      <a:prstDash val="solid"/>
+                      <a:round/>
+                      <a:headEnd type="none" w="med" len="med"/>
+                      <a:tailEnd type="none" w="med" len="med"/>
+                    </a:lnT>
+                    <a:lnB w="6350" cap="flat" cmpd="sng" algn="ctr">
+                      <a:solidFill>
+                        <a:srgbClr val="D6DEE5"/>
+                      </a:solidFill>
+                      <a:prstDash val="solid"/>
+                      <a:round/>
+                      <a:headEnd type="none" w="med" len="med"/>
+                      <a:tailEnd type="none" w="med" len="med"/>
+                    </a:lnB>
+                  </a:tcPr>
+                </a:tc>
+                <a:tc>
+                  <a:txBody>
+                    <a:bodyPr/>
+                    <a:lstStyle/>
+                    <a:p>
+                      <a:pPr algn="ctr" indent="0" marL="0">
+                        <a:buNone/>
+                      </a:pPr>
+                      <a:r>
+                        <a:rPr lang="en-US" sz="1000" dirty="0">
+                          <a:solidFill>
                             <a:schemeClr val="tx1"/>
                           </a:solidFill>
                         </a:rPr>
-                        <a:t>€1,120 / €3,556 · 9.5</a:t>
+                        <a:t>€427 / €1,505 · 9.7</a:t>
                       </a:r>
                       <a:endParaRPr lang="en-US" sz="1000" dirty="0"/>
                     </a:p>
@@ -15484,7 +15895,7 @@
                             <a:schemeClr val="tx1"/>
                           </a:solidFill>
                         </a:rPr>
-                        <a:t>€764 / €2,057 · 8.2</a:t>
+                        <a:t>€464 / €1,949 · 7.2</a:t>
                       </a:r>
                       <a:endParaRPr lang="en-US" sz="1000" dirty="0"/>
                     </a:p>
@@ -15531,122 +15942,6 @@
                     </a:solidFill>
                   </a:tcPr>
                 </a:tc>
-                <a:tc>
-                  <a:txBody>
-                    <a:bodyPr/>
-                    <a:lstStyle/>
-                    <a:p>
-                      <a:pPr algn="ctr" indent="0" marL="0">
-                        <a:buNone/>
-                      </a:pPr>
-                      <a:r>
-                        <a:rPr lang="en-US" sz="1000" dirty="0">
-                          <a:solidFill>
-                            <a:schemeClr val="accent4"/>
-                          </a:solidFill>
-                        </a:rPr>
-                        <a:t>–</a:t>
-                      </a:r>
-                      <a:endParaRPr lang="en-US" sz="1000" dirty="0"/>
-                    </a:p>
-                  </a:txBody>
-                  <a:tcPr marL="91440" marR="91440" marT="45720" marB="45720" anchor="ctr">
-                    <a:lnL w="6350" cap="flat" cmpd="sng" algn="ctr">
-                      <a:solidFill>
-                        <a:srgbClr val="D6DEE5"/>
-                      </a:solidFill>
-                      <a:prstDash val="solid"/>
-                      <a:round/>
-                      <a:headEnd type="none" w="med" len="med"/>
-                      <a:tailEnd type="none" w="med" len="med"/>
-                    </a:lnL>
-                    <a:lnR w="6350" cap="flat" cmpd="sng" algn="ctr">
-                      <a:solidFill>
-                        <a:srgbClr val="D6DEE5"/>
-                      </a:solidFill>
-                      <a:prstDash val="solid"/>
-                      <a:round/>
-                      <a:headEnd type="none" w="med" len="med"/>
-                      <a:tailEnd type="none" w="med" len="med"/>
-                    </a:lnR>
-                    <a:lnT w="6350" cap="flat" cmpd="sng" algn="ctr">
-                      <a:solidFill>
-                        <a:srgbClr val="D6DEE5"/>
-                      </a:solidFill>
-                      <a:prstDash val="solid"/>
-                      <a:round/>
-                      <a:headEnd type="none" w="med" len="med"/>
-                      <a:tailEnd type="none" w="med" len="med"/>
-                    </a:lnT>
-                    <a:lnB w="6350" cap="flat" cmpd="sng" algn="ctr">
-                      <a:solidFill>
-                        <a:srgbClr val="D6DEE5"/>
-                      </a:solidFill>
-                      <a:prstDash val="solid"/>
-                      <a:round/>
-                      <a:headEnd type="none" w="med" len="med"/>
-                      <a:tailEnd type="none" w="med" len="med"/>
-                    </a:lnB>
-                  </a:tcPr>
-                </a:tc>
-                <a:tc>
-                  <a:txBody>
-                    <a:bodyPr/>
-                    <a:lstStyle/>
-                    <a:p>
-                      <a:pPr algn="ctr" indent="0" marL="0">
-                        <a:buNone/>
-                      </a:pPr>
-                      <a:r>
-                        <a:rPr lang="en-US" sz="1000" dirty="0">
-                          <a:solidFill>
-                            <a:schemeClr val="accent4"/>
-                          </a:solidFill>
-                        </a:rPr>
-                        <a:t>–</a:t>
-                      </a:r>
-                      <a:endParaRPr lang="en-US" sz="1000" dirty="0"/>
-                    </a:p>
-                  </a:txBody>
-                  <a:tcPr marL="91440" marR="91440" marT="45720" marB="45720" anchor="ctr">
-                    <a:lnL w="6350" cap="flat" cmpd="sng" algn="ctr">
-                      <a:solidFill>
-                        <a:srgbClr val="D6DEE5"/>
-                      </a:solidFill>
-                      <a:prstDash val="solid"/>
-                      <a:round/>
-                      <a:headEnd type="none" w="med" len="med"/>
-                      <a:tailEnd type="none" w="med" len="med"/>
-                    </a:lnL>
-                    <a:lnR w="6350" cap="flat" cmpd="sng" algn="ctr">
-                      <a:solidFill>
-                        <a:srgbClr val="D6DEE5"/>
-                      </a:solidFill>
-                      <a:prstDash val="solid"/>
-                      <a:round/>
-                      <a:headEnd type="none" w="med" len="med"/>
-                      <a:tailEnd type="none" w="med" len="med"/>
-                    </a:lnR>
-                    <a:lnT w="6350" cap="flat" cmpd="sng" algn="ctr">
-                      <a:solidFill>
-                        <a:srgbClr val="D6DEE5"/>
-                      </a:solidFill>
-                      <a:prstDash val="solid"/>
-                      <a:round/>
-                      <a:headEnd type="none" w="med" len="med"/>
-                      <a:tailEnd type="none" w="med" len="med"/>
-                    </a:lnT>
-                    <a:lnB w="6350" cap="flat" cmpd="sng" algn="ctr">
-                      <a:solidFill>
-                        <a:srgbClr val="D6DEE5"/>
-                      </a:solidFill>
-                      <a:prstDash val="solid"/>
-                      <a:round/>
-                      <a:headEnd type="none" w="med" len="med"/>
-                      <a:tailEnd type="none" w="med" len="med"/>
-                    </a:lnB>
-                  </a:tcPr>
-                </a:tc>
               </a:tr>
               <a:tr h="329184">
                 <a:tc>
@@ -15663,7 +15958,7 @@
                             <a:schemeClr val="tx1"/>
                           </a:solidFill>
                         </a:rPr>
-                        <a:t>I2 Handwerk → Industrie (new pool)</a:t>
+                        <a:t>Meta lead ads (passive blue-collar reach)</a:t>
                       </a:r>
                       <a:endParaRPr lang="en-US" sz="1000" dirty="0"/>
                     </a:p>
@@ -15721,7 +16016,7 @@
                             <a:schemeClr val="tx1"/>
                           </a:solidFill>
                         </a:rPr>
-                        <a:t>€560 / €2,116 · 8.5</a:t>
+                        <a:t>€672 / €2,133 · 6.3</a:t>
                       </a:r>
                       <a:endParaRPr lang="en-US" sz="1000" dirty="0"/>
                     </a:p>
@@ -15779,244 +16074,10 @@
                       <a:r>
                         <a:rPr lang="en-US" sz="1000" dirty="0">
                           <a:solidFill>
-                            <a:schemeClr val="accent4"/>
-                          </a:solidFill>
-                        </a:rPr>
-                        <a:t>–</a:t>
-                      </a:r>
-                      <a:endParaRPr lang="en-US" sz="1000" dirty="0"/>
-                    </a:p>
-                  </a:txBody>
-                  <a:tcPr marL="91440" marR="91440" marT="45720" marB="45720" anchor="ctr">
-                    <a:lnL w="6350" cap="flat" cmpd="sng" algn="ctr">
-                      <a:solidFill>
-                        <a:srgbClr val="D6DEE5"/>
-                      </a:solidFill>
-                      <a:prstDash val="solid"/>
-                      <a:round/>
-                      <a:headEnd type="none" w="med" len="med"/>
-                      <a:tailEnd type="none" w="med" len="med"/>
-                    </a:lnL>
-                    <a:lnR w="6350" cap="flat" cmpd="sng" algn="ctr">
-                      <a:solidFill>
-                        <a:srgbClr val="D6DEE5"/>
-                      </a:solidFill>
-                      <a:prstDash val="solid"/>
-                      <a:round/>
-                      <a:headEnd type="none" w="med" len="med"/>
-                      <a:tailEnd type="none" w="med" len="med"/>
-                    </a:lnR>
-                    <a:lnT w="6350" cap="flat" cmpd="sng" algn="ctr">
-                      <a:solidFill>
-                        <a:srgbClr val="D6DEE5"/>
-                      </a:solidFill>
-                      <a:prstDash val="solid"/>
-                      <a:round/>
-                      <a:headEnd type="none" w="med" len="med"/>
-                      <a:tailEnd type="none" w="med" len="med"/>
-                    </a:lnT>
-                    <a:lnB w="6350" cap="flat" cmpd="sng" algn="ctr">
-                      <a:solidFill>
-                        <a:srgbClr val="D6DEE5"/>
-                      </a:solidFill>
-                      <a:prstDash val="solid"/>
-                      <a:round/>
-                      <a:headEnd type="none" w="med" len="med"/>
-                      <a:tailEnd type="none" w="med" len="med"/>
-                    </a:lnB>
-                  </a:tcPr>
-                </a:tc>
-                <a:tc>
-                  <a:txBody>
-                    <a:bodyPr/>
-                    <a:lstStyle/>
-                    <a:p>
-                      <a:pPr algn="ctr" indent="0" marL="0">
-                        <a:buNone/>
-                      </a:pPr>
-                      <a:r>
-                        <a:rPr lang="en-US" sz="1000" dirty="0">
-                          <a:solidFill>
-                            <a:schemeClr val="accent4"/>
-                          </a:solidFill>
-                        </a:rPr>
-                        <a:t>–</a:t>
-                      </a:r>
-                      <a:endParaRPr lang="en-US" sz="1000" dirty="0"/>
-                    </a:p>
-                  </a:txBody>
-                  <a:tcPr marL="91440" marR="91440" marT="45720" marB="45720" anchor="ctr">
-                    <a:lnL w="6350" cap="flat" cmpd="sng" algn="ctr">
-                      <a:solidFill>
-                        <a:srgbClr val="D6DEE5"/>
-                      </a:solidFill>
-                      <a:prstDash val="solid"/>
-                      <a:round/>
-                      <a:headEnd type="none" w="med" len="med"/>
-                      <a:tailEnd type="none" w="med" len="med"/>
-                    </a:lnL>
-                    <a:lnR w="6350" cap="flat" cmpd="sng" algn="ctr">
-                      <a:solidFill>
-                        <a:srgbClr val="D6DEE5"/>
-                      </a:solidFill>
-                      <a:prstDash val="solid"/>
-                      <a:round/>
-                      <a:headEnd type="none" w="med" len="med"/>
-                      <a:tailEnd type="none" w="med" len="med"/>
-                    </a:lnR>
-                    <a:lnT w="6350" cap="flat" cmpd="sng" algn="ctr">
-                      <a:solidFill>
-                        <a:srgbClr val="D6DEE5"/>
-                      </a:solidFill>
-                      <a:prstDash val="solid"/>
-                      <a:round/>
-                      <a:headEnd type="none" w="med" len="med"/>
-                      <a:tailEnd type="none" w="med" len="med"/>
-                    </a:lnT>
-                    <a:lnB w="6350" cap="flat" cmpd="sng" algn="ctr">
-                      <a:solidFill>
-                        <a:srgbClr val="D6DEE5"/>
-                      </a:solidFill>
-                      <a:prstDash val="solid"/>
-                      <a:round/>
-                      <a:headEnd type="none" w="med" len="med"/>
-                      <a:tailEnd type="none" w="med" len="med"/>
-                    </a:lnB>
-                  </a:tcPr>
-                </a:tc>
-                <a:tc>
-                  <a:txBody>
-                    <a:bodyPr/>
-                    <a:lstStyle/>
-                    <a:p>
-                      <a:pPr algn="ctr" indent="0" marL="0">
-                        <a:buNone/>
-                      </a:pPr>
-                      <a:r>
-                        <a:rPr lang="en-US" sz="1000" dirty="0">
-                          <a:solidFill>
-                            <a:schemeClr val="accent4"/>
-                          </a:solidFill>
-                        </a:rPr>
-                        <a:t>–</a:t>
-                      </a:r>
-                      <a:endParaRPr lang="en-US" sz="1000" dirty="0"/>
-                    </a:p>
-                  </a:txBody>
-                  <a:tcPr marL="91440" marR="91440" marT="45720" marB="45720" anchor="ctr">
-                    <a:lnL w="6350" cap="flat" cmpd="sng" algn="ctr">
-                      <a:solidFill>
-                        <a:srgbClr val="D6DEE5"/>
-                      </a:solidFill>
-                      <a:prstDash val="solid"/>
-                      <a:round/>
-                      <a:headEnd type="none" w="med" len="med"/>
-                      <a:tailEnd type="none" w="med" len="med"/>
-                    </a:lnL>
-                    <a:lnR w="6350" cap="flat" cmpd="sng" algn="ctr">
-                      <a:solidFill>
-                        <a:srgbClr val="D6DEE5"/>
-                      </a:solidFill>
-                      <a:prstDash val="solid"/>
-                      <a:round/>
-                      <a:headEnd type="none" w="med" len="med"/>
-                      <a:tailEnd type="none" w="med" len="med"/>
-                    </a:lnR>
-                    <a:lnT w="6350" cap="flat" cmpd="sng" algn="ctr">
-                      <a:solidFill>
-                        <a:srgbClr val="D6DEE5"/>
-                      </a:solidFill>
-                      <a:prstDash val="solid"/>
-                      <a:round/>
-                      <a:headEnd type="none" w="med" len="med"/>
-                      <a:tailEnd type="none" w="med" len="med"/>
-                    </a:lnT>
-                    <a:lnB w="6350" cap="flat" cmpd="sng" algn="ctr">
-                      <a:solidFill>
-                        <a:srgbClr val="D6DEE5"/>
-                      </a:solidFill>
-                      <a:prstDash val="solid"/>
-                      <a:round/>
-                      <a:headEnd type="none" w="med" len="med"/>
-                      <a:tailEnd type="none" w="med" len="med"/>
-                    </a:lnB>
-                  </a:tcPr>
-                </a:tc>
-              </a:tr>
-              <a:tr h="329184">
-                <a:tc>
-                  <a:txBody>
-                    <a:bodyPr/>
-                    <a:lstStyle/>
-                    <a:p>
-                      <a:pPr indent="0" marL="0">
-                        <a:buNone/>
-                      </a:pPr>
-                      <a:r>
-                        <a:rPr lang="en-US" sz="1000" dirty="0">
-                          <a:solidFill>
                             <a:schemeClr val="tx1"/>
                           </a:solidFill>
                         </a:rPr>
-                        <a:t>Programmatic (Indeed, Jooble, Talent.com…)</a:t>
-                      </a:r>
-                      <a:endParaRPr lang="en-US" sz="1000" dirty="0"/>
-                    </a:p>
-                  </a:txBody>
-                  <a:tcPr marL="91440" marR="91440" marT="45720" marB="45720" anchor="ctr">
-                    <a:lnL w="6350" cap="flat" cmpd="sng" algn="ctr">
-                      <a:solidFill>
-                        <a:srgbClr val="D6DEE5"/>
-                      </a:solidFill>
-                      <a:prstDash val="solid"/>
-                      <a:round/>
-                      <a:headEnd type="none" w="med" len="med"/>
-                      <a:tailEnd type="none" w="med" len="med"/>
-                    </a:lnL>
-                    <a:lnR w="6350" cap="flat" cmpd="sng" algn="ctr">
-                      <a:solidFill>
-                        <a:srgbClr val="D6DEE5"/>
-                      </a:solidFill>
-                      <a:prstDash val="solid"/>
-                      <a:round/>
-                      <a:headEnd type="none" w="med" len="med"/>
-                      <a:tailEnd type="none" w="med" len="med"/>
-                    </a:lnR>
-                    <a:lnT w="6350" cap="flat" cmpd="sng" algn="ctr">
-                      <a:solidFill>
-                        <a:srgbClr val="D6DEE5"/>
-                      </a:solidFill>
-                      <a:prstDash val="solid"/>
-                      <a:round/>
-                      <a:headEnd type="none" w="med" len="med"/>
-                      <a:tailEnd type="none" w="med" len="med"/>
-                    </a:lnT>
-                    <a:lnB w="6350" cap="flat" cmpd="sng" algn="ctr">
-                      <a:solidFill>
-                        <a:srgbClr val="D6DEE5"/>
-                      </a:solidFill>
-                      <a:prstDash val="solid"/>
-                      <a:round/>
-                      <a:headEnd type="none" w="med" len="med"/>
-                      <a:tailEnd type="none" w="med" len="med"/>
-                    </a:lnB>
-                  </a:tcPr>
-                </a:tc>
-                <a:tc>
-                  <a:txBody>
-                    <a:bodyPr/>
-                    <a:lstStyle/>
-                    <a:p>
-                      <a:pPr algn="ctr" indent="0" marL="0">
-                        <a:buNone/>
-                      </a:pPr>
-                      <a:r>
-                        <a:rPr lang="en-US" sz="1000" dirty="0">
-                          <a:solidFill>
-                            <a:schemeClr val="tx1"/>
-                          </a:solidFill>
-                        </a:rPr>
-                        <a:t>€1,193 / €3,786 · 3.2</a:t>
+                        <a:t>€672 / €1,810 · 5.7</a:t>
                       </a:r>
                       <a:endParaRPr lang="en-US" sz="1000" dirty="0"/>
                     </a:p>
@@ -16074,10 +16135,247 @@
                       <a:r>
                         <a:rPr lang="en-US" sz="1000" dirty="0">
                           <a:solidFill>
+                            <a:schemeClr val="accent4"/>
+                          </a:solidFill>
+                        </a:rPr>
+                        <a:t>–</a:t>
+                      </a:r>
+                      <a:endParaRPr lang="en-US" sz="1000" dirty="0"/>
+                    </a:p>
+                  </a:txBody>
+                  <a:tcPr marL="91440" marR="91440" marT="45720" marB="45720" anchor="ctr">
+                    <a:lnL w="6350" cap="flat" cmpd="sng" algn="ctr">
+                      <a:solidFill>
+                        <a:srgbClr val="D6DEE5"/>
+                      </a:solidFill>
+                      <a:prstDash val="solid"/>
+                      <a:round/>
+                      <a:headEnd type="none" w="med" len="med"/>
+                      <a:tailEnd type="none" w="med" len="med"/>
+                    </a:lnL>
+                    <a:lnR w="6350" cap="flat" cmpd="sng" algn="ctr">
+                      <a:solidFill>
+                        <a:srgbClr val="D6DEE5"/>
+                      </a:solidFill>
+                      <a:prstDash val="solid"/>
+                      <a:round/>
+                      <a:headEnd type="none" w="med" len="med"/>
+                      <a:tailEnd type="none" w="med" len="med"/>
+                    </a:lnR>
+                    <a:lnT w="6350" cap="flat" cmpd="sng" algn="ctr">
+                      <a:solidFill>
+                        <a:srgbClr val="D6DEE5"/>
+                      </a:solidFill>
+                      <a:prstDash val="solid"/>
+                      <a:round/>
+                      <a:headEnd type="none" w="med" len="med"/>
+                      <a:tailEnd type="none" w="med" len="med"/>
+                    </a:lnT>
+                    <a:lnB w="6350" cap="flat" cmpd="sng" algn="ctr">
+                      <a:solidFill>
+                        <a:srgbClr val="D6DEE5"/>
+                      </a:solidFill>
+                      <a:prstDash val="solid"/>
+                      <a:round/>
+                      <a:headEnd type="none" w="med" len="med"/>
+                      <a:tailEnd type="none" w="med" len="med"/>
+                    </a:lnB>
+                  </a:tcPr>
+                </a:tc>
+                <a:tc>
+                  <a:txBody>
+                    <a:bodyPr/>
+                    <a:lstStyle/>
+                    <a:p>
+                      <a:pPr algn="ctr" indent="0" marL="0">
+                        <a:buNone/>
+                      </a:pPr>
+                      <a:r>
+                        <a:rPr lang="en-US" sz="1000" dirty="0">
+                          <a:solidFill>
+                            <a:schemeClr val="accent4"/>
+                          </a:solidFill>
+                        </a:rPr>
+                        <a:t>–</a:t>
+                      </a:r>
+                      <a:endParaRPr lang="en-US" sz="1000" dirty="0"/>
+                    </a:p>
+                  </a:txBody>
+                  <a:tcPr marL="91440" marR="91440" marT="45720" marB="45720" anchor="ctr">
+                    <a:lnL w="6350" cap="flat" cmpd="sng" algn="ctr">
+                      <a:solidFill>
+                        <a:srgbClr val="D6DEE5"/>
+                      </a:solidFill>
+                      <a:prstDash val="solid"/>
+                      <a:round/>
+                      <a:headEnd type="none" w="med" len="med"/>
+                      <a:tailEnd type="none" w="med" len="med"/>
+                    </a:lnL>
+                    <a:lnR w="6350" cap="flat" cmpd="sng" algn="ctr">
+                      <a:solidFill>
+                        <a:srgbClr val="D6DEE5"/>
+                      </a:solidFill>
+                      <a:prstDash val="solid"/>
+                      <a:round/>
+                      <a:headEnd type="none" w="med" len="med"/>
+                      <a:tailEnd type="none" w="med" len="med"/>
+                    </a:lnR>
+                    <a:lnT w="6350" cap="flat" cmpd="sng" algn="ctr">
+                      <a:solidFill>
+                        <a:srgbClr val="D6DEE5"/>
+                      </a:solidFill>
+                      <a:prstDash val="solid"/>
+                      <a:round/>
+                      <a:headEnd type="none" w="med" len="med"/>
+                      <a:tailEnd type="none" w="med" len="med"/>
+                    </a:lnT>
+                    <a:lnB w="6350" cap="flat" cmpd="sng" algn="ctr">
+                      <a:solidFill>
+                        <a:srgbClr val="D6DEE5"/>
+                      </a:solidFill>
+                      <a:prstDash val="solid"/>
+                      <a:round/>
+                      <a:headEnd type="none" w="med" len="med"/>
+                      <a:tailEnd type="none" w="med" len="med"/>
+                    </a:lnB>
+                  </a:tcPr>
+                </a:tc>
+              </a:tr>
+              <a:tr h="329184">
+                <a:tc>
+                  <a:txBody>
+                    <a:bodyPr/>
+                    <a:lstStyle/>
+                    <a:p>
+                      <a:pPr indent="0" marL="0">
+                        <a:buNone/>
+                      </a:pPr>
+                      <a:r>
+                        <a:rPr lang="en-US" sz="1000" dirty="0">
+                          <a:solidFill>
                             <a:schemeClr val="tx1"/>
                           </a:solidFill>
                         </a:rPr>
-                        <a:t>€813 / €2,190 · 0.3 T</a:t>
+                        <a:t>Programmatic (Indeed, Jooble, Talent.com…)</a:t>
+                      </a:r>
+                      <a:endParaRPr lang="en-US" sz="1000" dirty="0"/>
+                    </a:p>
+                  </a:txBody>
+                  <a:tcPr marL="91440" marR="91440" marT="45720" marB="45720" anchor="ctr">
+                    <a:lnL w="6350" cap="flat" cmpd="sng" algn="ctr">
+                      <a:solidFill>
+                        <a:srgbClr val="D6DEE5"/>
+                      </a:solidFill>
+                      <a:prstDash val="solid"/>
+                      <a:round/>
+                      <a:headEnd type="none" w="med" len="med"/>
+                      <a:tailEnd type="none" w="med" len="med"/>
+                    </a:lnL>
+                    <a:lnR w="6350" cap="flat" cmpd="sng" algn="ctr">
+                      <a:solidFill>
+                        <a:srgbClr val="D6DEE5"/>
+                      </a:solidFill>
+                      <a:prstDash val="solid"/>
+                      <a:round/>
+                      <a:headEnd type="none" w="med" len="med"/>
+                      <a:tailEnd type="none" w="med" len="med"/>
+                    </a:lnR>
+                    <a:lnT w="6350" cap="flat" cmpd="sng" algn="ctr">
+                      <a:solidFill>
+                        <a:srgbClr val="D6DEE5"/>
+                      </a:solidFill>
+                      <a:prstDash val="solid"/>
+                      <a:round/>
+                      <a:headEnd type="none" w="med" len="med"/>
+                      <a:tailEnd type="none" w="med" len="med"/>
+                    </a:lnT>
+                    <a:lnB w="6350" cap="flat" cmpd="sng" algn="ctr">
+                      <a:solidFill>
+                        <a:srgbClr val="D6DEE5"/>
+                      </a:solidFill>
+                      <a:prstDash val="solid"/>
+                      <a:round/>
+                      <a:headEnd type="none" w="med" len="med"/>
+                      <a:tailEnd type="none" w="med" len="med"/>
+                    </a:lnB>
+                  </a:tcPr>
+                </a:tc>
+                <a:tc>
+                  <a:txBody>
+                    <a:bodyPr/>
+                    <a:lstStyle/>
+                    <a:p>
+                      <a:pPr algn="ctr" indent="0" marL="0">
+                        <a:buNone/>
+                      </a:pPr>
+                      <a:r>
+                        <a:rPr lang="en-US" sz="1000" dirty="0">
+                          <a:solidFill>
+                            <a:schemeClr val="tx1"/>
+                          </a:solidFill>
+                        </a:rPr>
+                        <a:t>€716 / €2,272 · 2.8</a:t>
+                      </a:r>
+                      <a:endParaRPr lang="en-US" sz="1000" dirty="0"/>
+                    </a:p>
+                  </a:txBody>
+                  <a:tcPr marL="91440" marR="91440" marT="45720" marB="45720" anchor="ctr">
+                    <a:lnL w="6350" cap="flat" cmpd="sng" algn="ctr">
+                      <a:solidFill>
+                        <a:srgbClr val="D6DEE5"/>
+                      </a:solidFill>
+                      <a:prstDash val="solid"/>
+                      <a:round/>
+                      <a:headEnd type="none" w="med" len="med"/>
+                      <a:tailEnd type="none" w="med" len="med"/>
+                    </a:lnL>
+                    <a:lnR w="6350" cap="flat" cmpd="sng" algn="ctr">
+                      <a:solidFill>
+                        <a:srgbClr val="D6DEE5"/>
+                      </a:solidFill>
+                      <a:prstDash val="solid"/>
+                      <a:round/>
+                      <a:headEnd type="none" w="med" len="med"/>
+                      <a:tailEnd type="none" w="med" len="med"/>
+                    </a:lnR>
+                    <a:lnT w="6350" cap="flat" cmpd="sng" algn="ctr">
+                      <a:solidFill>
+                        <a:srgbClr val="D6DEE5"/>
+                      </a:solidFill>
+                      <a:prstDash val="solid"/>
+                      <a:round/>
+                      <a:headEnd type="none" w="med" len="med"/>
+                      <a:tailEnd type="none" w="med" len="med"/>
+                    </a:lnT>
+                    <a:lnB w="6350" cap="flat" cmpd="sng" algn="ctr">
+                      <a:solidFill>
+                        <a:srgbClr val="D6DEE5"/>
+                      </a:solidFill>
+                      <a:prstDash val="solid"/>
+                      <a:round/>
+                      <a:headEnd type="none" w="med" len="med"/>
+                      <a:tailEnd type="none" w="med" len="med"/>
+                    </a:lnB>
+                    <a:solidFill>
+                      <a:srgbClr val="DCEFE8"/>
+                    </a:solidFill>
+                  </a:tcPr>
+                </a:tc>
+                <a:tc>
+                  <a:txBody>
+                    <a:bodyPr/>
+                    <a:lstStyle/>
+                    <a:p>
+                      <a:pPr algn="ctr" indent="0" marL="0">
+                        <a:buNone/>
+                      </a:pPr>
+                      <a:r>
+                        <a:rPr lang="en-US" sz="1000" dirty="0">
+                          <a:solidFill>
+                            <a:schemeClr val="tx1"/>
+                          </a:solidFill>
+                        </a:rPr>
+                        <a:t>€716 / €1,927 · 0.4 T</a:t>
                       </a:r>
                       <a:endParaRPr lang="en-US" sz="1000" dirty="0"/>
                     </a:p>
@@ -16138,68 +16436,7 @@
                             <a:schemeClr val="tx1"/>
                           </a:solidFill>
                         </a:rPr>
-                        <a:t>€1,193 / €4,207 · 0.5</a:t>
-                      </a:r>
-                      <a:endParaRPr lang="en-US" sz="1000" dirty="0"/>
-                    </a:p>
-                  </a:txBody>
-                  <a:tcPr marL="91440" marR="91440" marT="45720" marB="45720" anchor="ctr">
-                    <a:lnL w="6350" cap="flat" cmpd="sng" algn="ctr">
-                      <a:solidFill>
-                        <a:srgbClr val="D6DEE5"/>
-                      </a:solidFill>
-                      <a:prstDash val="solid"/>
-                      <a:round/>
-                      <a:headEnd type="none" w="med" len="med"/>
-                      <a:tailEnd type="none" w="med" len="med"/>
-                    </a:lnL>
-                    <a:lnR w="6350" cap="flat" cmpd="sng" algn="ctr">
-                      <a:solidFill>
-                        <a:srgbClr val="D6DEE5"/>
-                      </a:solidFill>
-                      <a:prstDash val="solid"/>
-                      <a:round/>
-                      <a:headEnd type="none" w="med" len="med"/>
-                      <a:tailEnd type="none" w="med" len="med"/>
-                    </a:lnR>
-                    <a:lnT w="6350" cap="flat" cmpd="sng" algn="ctr">
-                      <a:solidFill>
-                        <a:srgbClr val="D6DEE5"/>
-                      </a:solidFill>
-                      <a:prstDash val="solid"/>
-                      <a:round/>
-                      <a:headEnd type="none" w="med" len="med"/>
-                      <a:tailEnd type="none" w="med" len="med"/>
-                    </a:lnT>
-                    <a:lnB w="6350" cap="flat" cmpd="sng" algn="ctr">
-                      <a:solidFill>
-                        <a:srgbClr val="D6DEE5"/>
-                      </a:solidFill>
-                      <a:prstDash val="solid"/>
-                      <a:round/>
-                      <a:headEnd type="none" w="med" len="med"/>
-                      <a:tailEnd type="none" w="med" len="med"/>
-                    </a:lnB>
-                    <a:solidFill>
-                      <a:srgbClr val="DCEFE8"/>
-                    </a:solidFill>
-                  </a:tcPr>
-                </a:tc>
-                <a:tc>
-                  <a:txBody>
-                    <a:bodyPr/>
-                    <a:lstStyle/>
-                    <a:p>
-                      <a:pPr algn="ctr" indent="0" marL="0">
-                        <a:buNone/>
-                      </a:pPr>
-                      <a:r>
-                        <a:rPr lang="en-US" sz="1000" dirty="0">
-                          <a:solidFill>
-                            <a:schemeClr val="tx1"/>
-                          </a:solidFill>
-                        </a:rPr>
-                        <a:t>€1,789 / €7,516 · 0.1 T</a:t>
+                        <a:t>€716 / €2,524 · 0.3 T</a:t>
                       </a:r>
                       <a:endParaRPr lang="en-US" sz="1000" dirty="0"/>
                     </a:p>
@@ -16246,14 +16483,12 @@
                     </a:solidFill>
                   </a:tcPr>
                 </a:tc>
-              </a:tr>
-              <a:tr h="329184">
-                <a:tc>
-                  <a:txBody>
-                    <a:bodyPr/>
-                    <a:lstStyle/>
-                    <a:p>
-                      <a:pPr indent="0" marL="0">
+                <a:tc>
+                  <a:txBody>
+                    <a:bodyPr/>
+                    <a:lstStyle/>
+                    <a:p>
+                      <a:pPr algn="ctr" indent="0" marL="0">
                         <a:buNone/>
                       </a:pPr>
                       <a:r>
@@ -16262,363 +16497,7 @@
                             <a:schemeClr val="tx1"/>
                           </a:solidFill>
                         </a:rPr>
-                        <a:t>LinkedIn (PLC/TIA and Meister profiles)</a:t>
-                      </a:r>
-                      <a:endParaRPr lang="en-US" sz="1000" dirty="0"/>
-                    </a:p>
-                  </a:txBody>
-                  <a:tcPr marL="91440" marR="91440" marT="45720" marB="45720" anchor="ctr">
-                    <a:lnL w="6350" cap="flat" cmpd="sng" algn="ctr">
-                      <a:solidFill>
-                        <a:srgbClr val="D6DEE5"/>
-                      </a:solidFill>
-                      <a:prstDash val="solid"/>
-                      <a:round/>
-                      <a:headEnd type="none" w="med" len="med"/>
-                      <a:tailEnd type="none" w="med" len="med"/>
-                    </a:lnL>
-                    <a:lnR w="6350" cap="flat" cmpd="sng" algn="ctr">
-                      <a:solidFill>
-                        <a:srgbClr val="D6DEE5"/>
-                      </a:solidFill>
-                      <a:prstDash val="solid"/>
-                      <a:round/>
-                      <a:headEnd type="none" w="med" len="med"/>
-                      <a:tailEnd type="none" w="med" len="med"/>
-                    </a:lnR>
-                    <a:lnT w="6350" cap="flat" cmpd="sng" algn="ctr">
-                      <a:solidFill>
-                        <a:srgbClr val="D6DEE5"/>
-                      </a:solidFill>
-                      <a:prstDash val="solid"/>
-                      <a:round/>
-                      <a:headEnd type="none" w="med" len="med"/>
-                      <a:tailEnd type="none" w="med" len="med"/>
-                    </a:lnT>
-                    <a:lnB w="6350" cap="flat" cmpd="sng" algn="ctr">
-                      <a:solidFill>
-                        <a:srgbClr val="D6DEE5"/>
-                      </a:solidFill>
-                      <a:prstDash val="solid"/>
-                      <a:round/>
-                      <a:headEnd type="none" w="med" len="med"/>
-                      <a:tailEnd type="none" w="med" len="med"/>
-                    </a:lnB>
-                  </a:tcPr>
-                </a:tc>
-                <a:tc>
-                  <a:txBody>
-                    <a:bodyPr/>
-                    <a:lstStyle/>
-                    <a:p>
-                      <a:pPr algn="ctr" indent="0" marL="0">
-                        <a:buNone/>
-                      </a:pPr>
-                      <a:r>
-                        <a:rPr lang="en-US" sz="1000" dirty="0">
-                          <a:solidFill>
-                            <a:schemeClr val="accent4"/>
-                          </a:solidFill>
-                        </a:rPr>
-                        <a:t>–</a:t>
-                      </a:r>
-                      <a:endParaRPr lang="en-US" sz="1000" dirty="0"/>
-                    </a:p>
-                  </a:txBody>
-                  <a:tcPr marL="91440" marR="91440" marT="45720" marB="45720" anchor="ctr">
-                    <a:lnL w="6350" cap="flat" cmpd="sng" algn="ctr">
-                      <a:solidFill>
-                        <a:srgbClr val="D6DEE5"/>
-                      </a:solidFill>
-                      <a:prstDash val="solid"/>
-                      <a:round/>
-                      <a:headEnd type="none" w="med" len="med"/>
-                      <a:tailEnd type="none" w="med" len="med"/>
-                    </a:lnL>
-                    <a:lnR w="6350" cap="flat" cmpd="sng" algn="ctr">
-                      <a:solidFill>
-                        <a:srgbClr val="D6DEE5"/>
-                      </a:solidFill>
-                      <a:prstDash val="solid"/>
-                      <a:round/>
-                      <a:headEnd type="none" w="med" len="med"/>
-                      <a:tailEnd type="none" w="med" len="med"/>
-                    </a:lnR>
-                    <a:lnT w="6350" cap="flat" cmpd="sng" algn="ctr">
-                      <a:solidFill>
-                        <a:srgbClr val="D6DEE5"/>
-                      </a:solidFill>
-                      <a:prstDash val="solid"/>
-                      <a:round/>
-                      <a:headEnd type="none" w="med" len="med"/>
-                      <a:tailEnd type="none" w="med" len="med"/>
-                    </a:lnT>
-                    <a:lnB w="6350" cap="flat" cmpd="sng" algn="ctr">
-                      <a:solidFill>
-                        <a:srgbClr val="D6DEE5"/>
-                      </a:solidFill>
-                      <a:prstDash val="solid"/>
-                      <a:round/>
-                      <a:headEnd type="none" w="med" len="med"/>
-                      <a:tailEnd type="none" w="med" len="med"/>
-                    </a:lnB>
-                  </a:tcPr>
-                </a:tc>
-                <a:tc>
-                  <a:txBody>
-                    <a:bodyPr/>
-                    <a:lstStyle/>
-                    <a:p>
-                      <a:pPr algn="ctr" indent="0" marL="0">
-                        <a:buNone/>
-                      </a:pPr>
-                      <a:r>
-                        <a:rPr lang="en-US" sz="1000" dirty="0">
-                          <a:solidFill>
-                            <a:schemeClr val="accent4"/>
-                          </a:solidFill>
-                        </a:rPr>
-                        <a:t>–</a:t>
-                      </a:r>
-                      <a:endParaRPr lang="en-US" sz="1000" dirty="0"/>
-                    </a:p>
-                  </a:txBody>
-                  <a:tcPr marL="91440" marR="91440" marT="45720" marB="45720" anchor="ctr">
-                    <a:lnL w="6350" cap="flat" cmpd="sng" algn="ctr">
-                      <a:solidFill>
-                        <a:srgbClr val="D6DEE5"/>
-                      </a:solidFill>
-                      <a:prstDash val="solid"/>
-                      <a:round/>
-                      <a:headEnd type="none" w="med" len="med"/>
-                      <a:tailEnd type="none" w="med" len="med"/>
-                    </a:lnL>
-                    <a:lnR w="6350" cap="flat" cmpd="sng" algn="ctr">
-                      <a:solidFill>
-                        <a:srgbClr val="D6DEE5"/>
-                      </a:solidFill>
-                      <a:prstDash val="solid"/>
-                      <a:round/>
-                      <a:headEnd type="none" w="med" len="med"/>
-                      <a:tailEnd type="none" w="med" len="med"/>
-                    </a:lnR>
-                    <a:lnT w="6350" cap="flat" cmpd="sng" algn="ctr">
-                      <a:solidFill>
-                        <a:srgbClr val="D6DEE5"/>
-                      </a:solidFill>
-                      <a:prstDash val="solid"/>
-                      <a:round/>
-                      <a:headEnd type="none" w="med" len="med"/>
-                      <a:tailEnd type="none" w="med" len="med"/>
-                    </a:lnT>
-                    <a:lnB w="6350" cap="flat" cmpd="sng" algn="ctr">
-                      <a:solidFill>
-                        <a:srgbClr val="D6DEE5"/>
-                      </a:solidFill>
-                      <a:prstDash val="solid"/>
-                      <a:round/>
-                      <a:headEnd type="none" w="med" len="med"/>
-                      <a:tailEnd type="none" w="med" len="med"/>
-                    </a:lnB>
-                  </a:tcPr>
-                </a:tc>
-                <a:tc>
-                  <a:txBody>
-                    <a:bodyPr/>
-                    <a:lstStyle/>
-                    <a:p>
-                      <a:pPr algn="ctr" indent="0" marL="0">
-                        <a:buNone/>
-                      </a:pPr>
-                      <a:r>
-                        <a:rPr lang="en-US" sz="1000" dirty="0">
-                          <a:solidFill>
-                            <a:schemeClr val="tx1"/>
-                          </a:solidFill>
-                        </a:rPr>
-                        <a:t>€711 / €2,508 · 10.0</a:t>
-                      </a:r>
-                      <a:endParaRPr lang="en-US" sz="1000" dirty="0"/>
-                    </a:p>
-                  </a:txBody>
-                  <a:tcPr marL="91440" marR="91440" marT="45720" marB="45720" anchor="ctr">
-                    <a:lnL w="6350" cap="flat" cmpd="sng" algn="ctr">
-                      <a:solidFill>
-                        <a:srgbClr val="D6DEE5"/>
-                      </a:solidFill>
-                      <a:prstDash val="solid"/>
-                      <a:round/>
-                      <a:headEnd type="none" w="med" len="med"/>
-                      <a:tailEnd type="none" w="med" len="med"/>
-                    </a:lnL>
-                    <a:lnR w="6350" cap="flat" cmpd="sng" algn="ctr">
-                      <a:solidFill>
-                        <a:srgbClr val="D6DEE5"/>
-                      </a:solidFill>
-                      <a:prstDash val="solid"/>
-                      <a:round/>
-                      <a:headEnd type="none" w="med" len="med"/>
-                      <a:tailEnd type="none" w="med" len="med"/>
-                    </a:lnR>
-                    <a:lnT w="6350" cap="flat" cmpd="sng" algn="ctr">
-                      <a:solidFill>
-                        <a:srgbClr val="D6DEE5"/>
-                      </a:solidFill>
-                      <a:prstDash val="solid"/>
-                      <a:round/>
-                      <a:headEnd type="none" w="med" len="med"/>
-                      <a:tailEnd type="none" w="med" len="med"/>
-                    </a:lnT>
-                    <a:lnB w="6350" cap="flat" cmpd="sng" algn="ctr">
-                      <a:solidFill>
-                        <a:srgbClr val="D6DEE5"/>
-                      </a:solidFill>
-                      <a:prstDash val="solid"/>
-                      <a:round/>
-                      <a:headEnd type="none" w="med" len="med"/>
-                      <a:tailEnd type="none" w="med" len="med"/>
-                    </a:lnB>
-                    <a:solidFill>
-                      <a:srgbClr val="DCEFE8"/>
-                    </a:solidFill>
-                  </a:tcPr>
-                </a:tc>
-                <a:tc>
-                  <a:txBody>
-                    <a:bodyPr/>
-                    <a:lstStyle/>
-                    <a:p>
-                      <a:pPr algn="ctr" indent="0" marL="0">
-                        <a:buNone/>
-                      </a:pPr>
-                      <a:r>
-                        <a:rPr lang="en-US" sz="1000" dirty="0">
-                          <a:solidFill>
-                            <a:schemeClr val="tx1"/>
-                          </a:solidFill>
-                        </a:rPr>
-                        <a:t>€1,067 / €4,482 · 8.3</a:t>
-                      </a:r>
-                      <a:endParaRPr lang="en-US" sz="1000" dirty="0"/>
-                    </a:p>
-                  </a:txBody>
-                  <a:tcPr marL="91440" marR="91440" marT="45720" marB="45720" anchor="ctr">
-                    <a:lnL w="6350" cap="flat" cmpd="sng" algn="ctr">
-                      <a:solidFill>
-                        <a:srgbClr val="D6DEE5"/>
-                      </a:solidFill>
-                      <a:prstDash val="solid"/>
-                      <a:round/>
-                      <a:headEnd type="none" w="med" len="med"/>
-                      <a:tailEnd type="none" w="med" len="med"/>
-                    </a:lnL>
-                    <a:lnR w="6350" cap="flat" cmpd="sng" algn="ctr">
-                      <a:solidFill>
-                        <a:srgbClr val="D6DEE5"/>
-                      </a:solidFill>
-                      <a:prstDash val="solid"/>
-                      <a:round/>
-                      <a:headEnd type="none" w="med" len="med"/>
-                      <a:tailEnd type="none" w="med" len="med"/>
-                    </a:lnR>
-                    <a:lnT w="6350" cap="flat" cmpd="sng" algn="ctr">
-                      <a:solidFill>
-                        <a:srgbClr val="D6DEE5"/>
-                      </a:solidFill>
-                      <a:prstDash val="solid"/>
-                      <a:round/>
-                      <a:headEnd type="none" w="med" len="med"/>
-                      <a:tailEnd type="none" w="med" len="med"/>
-                    </a:lnT>
-                    <a:lnB w="6350" cap="flat" cmpd="sng" algn="ctr">
-                      <a:solidFill>
-                        <a:srgbClr val="D6DEE5"/>
-                      </a:solidFill>
-                      <a:prstDash val="solid"/>
-                      <a:round/>
-                      <a:headEnd type="none" w="med" len="med"/>
-                      <a:tailEnd type="none" w="med" len="med"/>
-                    </a:lnB>
-                    <a:solidFill>
-                      <a:srgbClr val="DCEFE8"/>
-                    </a:solidFill>
-                  </a:tcPr>
-                </a:tc>
-              </a:tr>
-              <a:tr h="329184">
-                <a:tc>
-                  <a:txBody>
-                    <a:bodyPr/>
-                    <a:lstStyle/>
-                    <a:p>
-                      <a:pPr indent="0" marL="0">
-                        <a:buNone/>
-                      </a:pPr>
-                      <a:r>
-                        <a:rPr lang="en-US" sz="1000" dirty="0">
-                          <a:solidFill>
-                            <a:schemeClr val="tx1"/>
-                          </a:solidFill>
-                        </a:rPr>
-                        <a:t>Google Search (high intent, low volume)</a:t>
-                      </a:r>
-                      <a:endParaRPr lang="en-US" sz="1000" dirty="0"/>
-                    </a:p>
-                  </a:txBody>
-                  <a:tcPr marL="91440" marR="91440" marT="45720" marB="45720" anchor="ctr">
-                    <a:lnL w="6350" cap="flat" cmpd="sng" algn="ctr">
-                      <a:solidFill>
-                        <a:srgbClr val="D6DEE5"/>
-                      </a:solidFill>
-                      <a:prstDash val="solid"/>
-                      <a:round/>
-                      <a:headEnd type="none" w="med" len="med"/>
-                      <a:tailEnd type="none" w="med" len="med"/>
-                    </a:lnL>
-                    <a:lnR w="6350" cap="flat" cmpd="sng" algn="ctr">
-                      <a:solidFill>
-                        <a:srgbClr val="D6DEE5"/>
-                      </a:solidFill>
-                      <a:prstDash val="solid"/>
-                      <a:round/>
-                      <a:headEnd type="none" w="med" len="med"/>
-                      <a:tailEnd type="none" w="med" len="med"/>
-                    </a:lnR>
-                    <a:lnT w="6350" cap="flat" cmpd="sng" algn="ctr">
-                      <a:solidFill>
-                        <a:srgbClr val="D6DEE5"/>
-                      </a:solidFill>
-                      <a:prstDash val="solid"/>
-                      <a:round/>
-                      <a:headEnd type="none" w="med" len="med"/>
-                      <a:tailEnd type="none" w="med" len="med"/>
-                    </a:lnT>
-                    <a:lnB w="6350" cap="flat" cmpd="sng" algn="ctr">
-                      <a:solidFill>
-                        <a:srgbClr val="D6DEE5"/>
-                      </a:solidFill>
-                      <a:prstDash val="solid"/>
-                      <a:round/>
-                      <a:headEnd type="none" w="med" len="med"/>
-                      <a:tailEnd type="none" w="med" len="med"/>
-                    </a:lnB>
-                  </a:tcPr>
-                </a:tc>
-                <a:tc>
-                  <a:txBody>
-                    <a:bodyPr/>
-                    <a:lstStyle/>
-                    <a:p>
-                      <a:pPr algn="ctr" indent="0" marL="0">
-                        <a:buNone/>
-                      </a:pPr>
-                      <a:r>
-                        <a:rPr lang="en-US" sz="1000" dirty="0">
-                          <a:solidFill>
-                            <a:schemeClr val="tx1"/>
-                          </a:solidFill>
-                        </a:rPr>
-                        <a:t>€1,681 / €5,336 · 0.1 T</a:t>
+                        <a:t>€778 / €3,268 · 0.2 T</a:t>
                       </a:r>
                       <a:endParaRPr lang="en-US" sz="1000" dirty="0"/>
                     </a:p>
@@ -16665,6 +16544,66 @@
                     </a:solidFill>
                   </a:tcPr>
                 </a:tc>
+              </a:tr>
+              <a:tr h="329184">
+                <a:tc>
+                  <a:txBody>
+                    <a:bodyPr/>
+                    <a:lstStyle/>
+                    <a:p>
+                      <a:pPr indent="0" marL="0">
+                        <a:buNone/>
+                      </a:pPr>
+                      <a:r>
+                        <a:rPr lang="en-US" sz="1000" dirty="0">
+                          <a:solidFill>
+                            <a:schemeClr val="tx1"/>
+                          </a:solidFill>
+                        </a:rPr>
+                        <a:t>Google Search (high intent, low volume)</a:t>
+                      </a:r>
+                      <a:endParaRPr lang="en-US" sz="1000" dirty="0"/>
+                    </a:p>
+                  </a:txBody>
+                  <a:tcPr marL="91440" marR="91440" marT="45720" marB="45720" anchor="ctr">
+                    <a:lnL w="6350" cap="flat" cmpd="sng" algn="ctr">
+                      <a:solidFill>
+                        <a:srgbClr val="D6DEE5"/>
+                      </a:solidFill>
+                      <a:prstDash val="solid"/>
+                      <a:round/>
+                      <a:headEnd type="none" w="med" len="med"/>
+                      <a:tailEnd type="none" w="med" len="med"/>
+                    </a:lnL>
+                    <a:lnR w="6350" cap="flat" cmpd="sng" algn="ctr">
+                      <a:solidFill>
+                        <a:srgbClr val="D6DEE5"/>
+                      </a:solidFill>
+                      <a:prstDash val="solid"/>
+                      <a:round/>
+                      <a:headEnd type="none" w="med" len="med"/>
+                      <a:tailEnd type="none" w="med" len="med"/>
+                    </a:lnR>
+                    <a:lnT w="6350" cap="flat" cmpd="sng" algn="ctr">
+                      <a:solidFill>
+                        <a:srgbClr val="D6DEE5"/>
+                      </a:solidFill>
+                      <a:prstDash val="solid"/>
+                      <a:round/>
+                      <a:headEnd type="none" w="med" len="med"/>
+                      <a:tailEnd type="none" w="med" len="med"/>
+                    </a:lnT>
+                    <a:lnB w="6350" cap="flat" cmpd="sng" algn="ctr">
+                      <a:solidFill>
+                        <a:srgbClr val="D6DEE5"/>
+                      </a:solidFill>
+                      <a:prstDash val="solid"/>
+                      <a:round/>
+                      <a:headEnd type="none" w="med" len="med"/>
+                      <a:tailEnd type="none" w="med" len="med"/>
+                    </a:lnB>
+                  </a:tcPr>
+                </a:tc>
                 <a:tc>
                   <a:txBody>
                     <a:bodyPr/>
@@ -16679,7 +16618,7 @@
                             <a:schemeClr val="tx1"/>
                           </a:solidFill>
                         </a:rPr>
-                        <a:t>€1,146 / €3,087 · 0.2 T</a:t>
+                        <a:t>€1,008 / €3,201 · 0.2 T</a:t>
                       </a:r>
                       <a:endParaRPr lang="en-US" sz="1000" dirty="0"/>
                     </a:p>
@@ -16740,7 +16679,7 @@
                             <a:schemeClr val="tx1"/>
                           </a:solidFill>
                         </a:rPr>
-                        <a:t>€1,681 / €5,929 · 0.1 T</a:t>
+                        <a:t>€1,008 / €2,716 · 0.3 T</a:t>
                       </a:r>
                       <a:endParaRPr lang="en-US" sz="1000" dirty="0"/>
                     </a:p>
@@ -16801,7 +16740,68 @@
                             <a:schemeClr val="tx1"/>
                           </a:solidFill>
                         </a:rPr>
-                        <a:t>€2,521 / €10,593 · 0.1 T</a:t>
+                        <a:t>€1,008 / €3,557 · 0.2 T</a:t>
+                      </a:r>
+                      <a:endParaRPr lang="en-US" sz="1000" dirty="0"/>
+                    </a:p>
+                  </a:txBody>
+                  <a:tcPr marL="91440" marR="91440" marT="45720" marB="45720" anchor="ctr">
+                    <a:lnL w="6350" cap="flat" cmpd="sng" algn="ctr">
+                      <a:solidFill>
+                        <a:srgbClr val="D6DEE5"/>
+                      </a:solidFill>
+                      <a:prstDash val="solid"/>
+                      <a:round/>
+                      <a:headEnd type="none" w="med" len="med"/>
+                      <a:tailEnd type="none" w="med" len="med"/>
+                    </a:lnL>
+                    <a:lnR w="6350" cap="flat" cmpd="sng" algn="ctr">
+                      <a:solidFill>
+                        <a:srgbClr val="D6DEE5"/>
+                      </a:solidFill>
+                      <a:prstDash val="solid"/>
+                      <a:round/>
+                      <a:headEnd type="none" w="med" len="med"/>
+                      <a:tailEnd type="none" w="med" len="med"/>
+                    </a:lnR>
+                    <a:lnT w="6350" cap="flat" cmpd="sng" algn="ctr">
+                      <a:solidFill>
+                        <a:srgbClr val="D6DEE5"/>
+                      </a:solidFill>
+                      <a:prstDash val="solid"/>
+                      <a:round/>
+                      <a:headEnd type="none" w="med" len="med"/>
+                      <a:tailEnd type="none" w="med" len="med"/>
+                    </a:lnT>
+                    <a:lnB w="6350" cap="flat" cmpd="sng" algn="ctr">
+                      <a:solidFill>
+                        <a:srgbClr val="D6DEE5"/>
+                      </a:solidFill>
+                      <a:prstDash val="solid"/>
+                      <a:round/>
+                      <a:headEnd type="none" w="med" len="med"/>
+                      <a:tailEnd type="none" w="med" len="med"/>
+                    </a:lnB>
+                    <a:solidFill>
+                      <a:srgbClr val="FBEBC8"/>
+                    </a:solidFill>
+                  </a:tcPr>
+                </a:tc>
+                <a:tc>
+                  <a:txBody>
+                    <a:bodyPr/>
+                    <a:lstStyle/>
+                    <a:p>
+                      <a:pPr algn="ctr" indent="0" marL="0">
+                        <a:buNone/>
+                      </a:pPr>
+                      <a:r>
+                        <a:rPr lang="en-US" sz="1000" dirty="0">
+                          <a:solidFill>
+                            <a:schemeClr val="tx1"/>
+                          </a:solidFill>
+                        </a:rPr>
+                        <a:t>€1,096 / €4,606 · 0.2 T</a:t>
                       </a:r>
                       <a:endParaRPr lang="en-US" sz="1000" dirty="0"/>
                     </a:p>
@@ -17066,7 +17066,7 @@
                   <a:schemeClr val="tx2"/>
                 </a:solidFill>
               </a:rPr>
-              <a:t>Cells: cost per qualified / cost per hire · hires planned. Cost per hire = (cost per application × applications + set-up) ÷ hires at full capacity; I2 includes €1,200 set-up, I3 €400 translation. StepStone ads (6 × €1,449) are costed whole and credited only the applications the plan needs (conservative).</a:t>
+              <a:t>Cells: cost per qualified / cost per hire · hires planned. Cost per hire = (cost per application × applications + set-up) ÷ hires at full capacity; I2 includes €1,200 set-up, I3 €400 translation. StepStone ads (4 × €1,449) are costed whole and credited only the applications the plan needs (conservative).</a:t>
             </a:r>
             <a:endParaRPr lang="en-US" sz="1000" dirty="0"/>
           </a:p>
@@ -17252,7 +17252,7 @@
                 <a:ea typeface="Cambria" pitchFamily="34" charset="-122"/>
                 <a:cs typeface="Cambria" pitchFamily="34" charset="-120"/>
               </a:rPr>
-              <a:t>€176.2k planned across roles and weeks, plus €31.3k reserve released on results</a:t>
+              <a:t>€99.2k planned across roles and weeks, plus €18.3k reserve released on results</a:t>
             </a:r>
             <a:endParaRPr lang="en-US" sz="2200" dirty="0"/>
           </a:p>
@@ -17321,7 +17321,7 @@
                   <a:schemeClr val="tx1"/>
                 </a:solidFill>
               </a:rPr>
-              <a:t>€140.1k paid channels (incl. €9.0k tests) + €34.6k initiative media, pre-screen calls and bonuses + €1.6k set-up = €176.2k. Reserve: 15% of €207.3k plus rounding = €31.3k.</a:t>
+              <a:t>€69.7k paid channels (incl. €9.0k tests) + €27.9k initiative media, pre-screen calls and bonuses + €1.6k set-up = €99.2k. Reserve: 15% of €116.7k plus rounding = €18.3k.</a:t>
             </a:r>
             <a:endParaRPr lang="en-US" sz="1100" dirty="0"/>
           </a:p>
@@ -17352,7 +17352,7 @@
                   <a:schemeClr val="tx1"/>
                 </a:solidFill>
               </a:rPr>
-              <a:t>weeks 1–2 cost €58.9k (28%), mostly tests. Duds are cut from Mon 2 Nov (after €500 / 30 apps); tests and the full re-allocation are judged by Mon 9 Nov; the reserve moves only from week 3. Paid media stops after Tue 24 Nov.</a:t>
+              <a:t>weeks 1–2 cost €34.1k (29%), mostly tests. Duds are cut from Mon 2 Nov (after €500 / 30 apps); tests and the full re-allocation are judged by Mon 9 Nov; the reserve moves only from week 3. Paid media stops after Tue 24 Nov.</a:t>
             </a:r>
             <a:endParaRPr lang="en-US" sz="1100" dirty="0"/>
           </a:p>
@@ -17767,7 +17767,7 @@
                             <a:schemeClr val="tx1"/>
                           </a:solidFill>
                         </a:rPr>
-                        <a:t>€70.7k</a:t>
+                        <a:t>€37.9k</a:t>
                       </a:r>
                       <a:endParaRPr lang="en-US" sz="1100" dirty="0"/>
                     </a:p>
@@ -17941,7 +17941,7 @@
                             <a:schemeClr val="tx1"/>
                           </a:solidFill>
                         </a:rPr>
-                        <a:t>€2,356</a:t>
+                        <a:t>€1,264</a:t>
                       </a:r>
                       <a:endParaRPr lang="en-US" sz="1100" dirty="0"/>
                     </a:p>
@@ -18059,7 +18059,7 @@
                             <a:schemeClr val="tx1"/>
                           </a:solidFill>
                         </a:rPr>
-                        <a:t>€33.9k</a:t>
+                        <a:t>€27.4k</a:t>
                       </a:r>
                       <a:endParaRPr lang="en-US" sz="1100" dirty="0"/>
                     </a:p>
@@ -18233,7 +18233,7 @@
                             <a:schemeClr val="tx1"/>
                           </a:solidFill>
                         </a:rPr>
-                        <a:t>€752</a:t>
+                        <a:t>€610</a:t>
                       </a:r>
                       <a:endParaRPr lang="en-US" sz="1100" dirty="0"/>
                     </a:p>
@@ -18351,7 +18351,7 @@
                             <a:schemeClr val="tx1"/>
                           </a:solidFill>
                         </a:rPr>
-                        <a:t>€32.4k</a:t>
+                        <a:t>€17.6k</a:t>
                       </a:r>
                       <a:endParaRPr lang="en-US" sz="1100" dirty="0"/>
                     </a:p>
@@ -18525,7 +18525,7 @@
                             <a:schemeClr val="tx1"/>
                           </a:solidFill>
                         </a:rPr>
-                        <a:t>€2,158</a:t>
+                        <a:t>€1,175</a:t>
                       </a:r>
                       <a:endParaRPr lang="en-US" sz="1100" dirty="0"/>
                     </a:p>
@@ -18643,7 +18643,7 @@
                             <a:schemeClr val="tx1"/>
                           </a:solidFill>
                         </a:rPr>
-                        <a:t>€39.3k</a:t>
+                        <a:t>€16.2k</a:t>
                       </a:r>
                       <a:endParaRPr lang="en-US" sz="1100" dirty="0"/>
                     </a:p>
@@ -18817,7 +18817,7 @@
                             <a:schemeClr val="tx1"/>
                           </a:solidFill>
                         </a:rPr>
-                        <a:t>€3,930</a:t>
+                        <a:t>€1,620</a:t>
                       </a:r>
                       <a:endParaRPr lang="en-US" sz="1100" dirty="0"/>
                     </a:p>
@@ -18935,7 +18935,7 @@
                             <a:schemeClr val="tx1"/>
                           </a:solidFill>
                         </a:rPr>
-                        <a:t>€176.2k</a:t>
+                        <a:t>€99.2k</a:t>
                       </a:r>
                       <a:endParaRPr lang="en-US" sz="1100" dirty="0"/>
                     </a:p>
@@ -19109,7 +19109,7 @@
                             <a:schemeClr val="tx1"/>
                           </a:solidFill>
                         </a:rPr>
-                        <a:t>€1,762</a:t>
+                        <a:t>€992</a:t>
                       </a:r>
                       <a:endParaRPr lang="en-US" sz="1100" dirty="0"/>
                     </a:p>
@@ -19563,7 +19563,7 @@
                             <a:schemeClr val="tx1"/>
                           </a:solidFill>
                         </a:rPr>
-                        <a:t>14.9</a:t>
+                        <a:t>20.3</a:t>
                       </a:r>
                       <a:endParaRPr lang="en-US" sz="1000" dirty="0"/>
                     </a:p>
@@ -19739,7 +19739,7 @@
                             <a:schemeClr val="tx1"/>
                           </a:solidFill>
                         </a:rPr>
-                        <a:t>€15.9k</a:t>
+                        <a:t>€8.5k</a:t>
                       </a:r>
                       <a:endParaRPr lang="en-US" sz="1000" dirty="0"/>
                     </a:p>
@@ -19797,7 +19797,7 @@
                             <a:schemeClr val="tx1"/>
                           </a:solidFill>
                         </a:rPr>
-                        <a:t>4.2</a:t>
+                        <a:t>3.7</a:t>
                       </a:r>
                       <a:endParaRPr lang="en-US" sz="1000" dirty="0"/>
                     </a:p>
@@ -19855,7 +19855,7 @@
                             <a:schemeClr val="tx1"/>
                           </a:solidFill>
                         </a:rPr>
-                        <a:t>€3,799</a:t>
+                        <a:t>€2,318</a:t>
                       </a:r>
                       <a:endParaRPr lang="en-US" sz="1000" dirty="0"/>
                     </a:p>
@@ -19973,7 +19973,7 @@
                             <a:schemeClr val="tx1"/>
                           </a:solidFill>
                         </a:rPr>
-                        <a:t>€8.7k</a:t>
+                        <a:t>€5.8k</a:t>
                       </a:r>
                       <a:endParaRPr lang="en-US" sz="1000" dirty="0"/>
                     </a:p>
@@ -20089,7 +20089,7 @@
                             <a:schemeClr val="tx1"/>
                           </a:solidFill>
                         </a:rPr>
-                        <a:t>€2,348</a:t>
+                        <a:t>€1,564</a:t>
                       </a:r>
                       <a:endParaRPr lang="en-US" sz="1000" dirty="0"/>
                     </a:p>
@@ -20207,7 +20207,7 @@
                             <a:schemeClr val="tx1"/>
                           </a:solidFill>
                         </a:rPr>
-                        <a:t>€62.0k</a:t>
+                        <a:t>€28.6k</a:t>
                       </a:r>
                       <a:endParaRPr lang="en-US" sz="1000" dirty="0"/>
                     </a:p>
@@ -20265,7 +20265,7 @@
                             <a:schemeClr val="tx1"/>
                           </a:solidFill>
                         </a:rPr>
-                        <a:t>18.2</a:t>
+                        <a:t>16.9</a:t>
                       </a:r>
                       <a:endParaRPr lang="en-US" sz="1000" dirty="0"/>
                     </a:p>
@@ -20323,7 +20323,7 @@
                             <a:schemeClr val="tx1"/>
                           </a:solidFill>
                         </a:rPr>
-                        <a:t>€3,404</a:t>
+                        <a:t>€1,693</a:t>
                       </a:r>
                       <a:endParaRPr lang="en-US" sz="1000" dirty="0"/>
                     </a:p>
@@ -20441,7 +20441,7 @@
                             <a:schemeClr val="tx1"/>
                           </a:solidFill>
                         </a:rPr>
-                        <a:t>€50.4k</a:t>
+                        <a:t>€23.8k</a:t>
                       </a:r>
                       <a:endParaRPr lang="en-US" sz="1000" dirty="0"/>
                     </a:p>
@@ -20499,7 +20499,7 @@
                             <a:schemeClr val="tx1"/>
                           </a:solidFill>
                         </a:rPr>
-                        <a:t>17.6</a:t>
+                        <a:t>12.0</a:t>
                       </a:r>
                       <a:endParaRPr lang="en-US" sz="1000" dirty="0"/>
                     </a:p>
@@ -20557,7 +20557,7 @@
                             <a:schemeClr val="tx1"/>
                           </a:solidFill>
                         </a:rPr>
-                        <a:t>€2,861</a:t>
+                        <a:t>€1,979</a:t>
                       </a:r>
                       <a:endParaRPr lang="en-US" sz="1000" dirty="0"/>
                     </a:p>
@@ -20733,7 +20733,7 @@
                             <a:schemeClr val="tx1"/>
                           </a:solidFill>
                         </a:rPr>
-                        <a:t>0.6</a:t>
+                        <a:t>0.9</a:t>
                       </a:r>
                       <a:endParaRPr lang="en-US" sz="1000" dirty="0"/>
                     </a:p>
@@ -20791,7 +20791,7 @@
                             <a:schemeClr val="tx1"/>
                           </a:solidFill>
                         </a:rPr>
-                        <a:t>€5,165</a:t>
+                        <a:t>€3,393</a:t>
                       </a:r>
                       <a:endParaRPr lang="en-US" sz="1000" dirty="0"/>
                     </a:p>
@@ -20909,7 +20909,7 @@
                             <a:schemeClr val="tx1"/>
                           </a:solidFill>
                         </a:rPr>
-                        <a:t>€41</a:t>
+                        <a:t>€63</a:t>
                       </a:r>
                       <a:endParaRPr lang="en-US" sz="1000" dirty="0"/>
                     </a:p>
@@ -20967,7 +20967,7 @@
                             <a:schemeClr val="tx1"/>
                           </a:solidFill>
                         </a:rPr>
-                        <a:t>3.1</a:t>
+                        <a:t>4.8</a:t>
                       </a:r>
                       <a:endParaRPr lang="en-US" sz="1000" dirty="0"/>
                     </a:p>
@@ -21377,7 +21377,7 @@
                             <a:schemeClr val="tx1"/>
                           </a:solidFill>
                         </a:rPr>
-                        <a:t>€18.0k</a:t>
+                        <a:t>€11.3k</a:t>
                       </a:r>
                       <a:endParaRPr lang="en-US" sz="1000" dirty="0"/>
                     </a:p>
@@ -21493,7 +21493,7 @@
                             <a:schemeClr val="tx1"/>
                           </a:solidFill>
                         </a:rPr>
-                        <a:t>€2,116</a:t>
+                        <a:t>€1,326</a:t>
                       </a:r>
                       <a:endParaRPr lang="en-US" sz="1000" dirty="0"/>
                     </a:p>
@@ -21920,7 +21920,7 @@
                 <a:ea typeface="Cambria" pitchFamily="34" charset="-122"/>
                 <a:cs typeface="Cambria" pitchFamily="34" charset="-120"/>
               </a:rPr>
-              <a:t>30% less (€145.25k) still signs ~88; supervisors take most of the loss</a:t>
+              <a:t>30% less (€82.25k) still signs ~87; electricians take most of the loss</a:t>
             </a:r>
             <a:endParaRPr lang="en-US" sz="2200" dirty="0"/>
           </a:p>
@@ -22169,7 +22169,7 @@
                             <a:schemeClr val="tx1"/>
                           </a:solidFill>
                         </a:rPr>
-                        <a:t>100% · €207.50k</a:t>
+                        <a:t>100% · €117.50k</a:t>
                       </a:r>
                       <a:endParaRPr lang="en-US" sz="1100" dirty="0"/>
                     </a:p>
@@ -22285,7 +22285,7 @@
                             <a:schemeClr val="tx1"/>
                           </a:solidFill>
                         </a:rPr>
-                        <a:t>€2,075</a:t>
+                        <a:t>€1,175</a:t>
                       </a:r>
                       <a:endParaRPr lang="en-US" sz="1100" dirty="0"/>
                     </a:p>
@@ -22345,7 +22345,7 @@
                             <a:schemeClr val="tx1"/>
                           </a:solidFill>
                         </a:rPr>
-                        <a:t>85% · €176.38k</a:t>
+                        <a:t>85% · €99.88k</a:t>
                       </a:r>
                       <a:endParaRPr lang="en-US" sz="1100" dirty="0"/>
                     </a:p>
@@ -22461,7 +22461,7 @@
                             <a:schemeClr val="tx1"/>
                           </a:solidFill>
                         </a:rPr>
-                        <a:t>€1,869</a:t>
+                        <a:t>€1,060</a:t>
                       </a:r>
                       <a:endParaRPr lang="en-US" sz="1100" dirty="0"/>
                     </a:p>
@@ -22521,7 +22521,7 @@
                             <a:schemeClr val="tx1"/>
                           </a:solidFill>
                         </a:rPr>
-                        <a:t>70% · €145.25k</a:t>
+                        <a:t>70% · €82.25k</a:t>
                       </a:r>
                       <a:endParaRPr lang="en-US" sz="1100" dirty="0"/>
                     </a:p>
@@ -22579,7 +22579,7 @@
                             <a:schemeClr val="tx1"/>
                           </a:solidFill>
                         </a:rPr>
-                        <a:t>88</a:t>
+                        <a:t>87</a:t>
                       </a:r>
                       <a:endParaRPr lang="en-US" sz="1100" dirty="0"/>
                     </a:p>
@@ -22637,7 +22637,7 @@
                             <a:schemeClr val="tx1"/>
                           </a:solidFill>
                         </a:rPr>
-                        <a:t>€1,651</a:t>
+                        <a:t>€946</a:t>
                       </a:r>
                       <a:endParaRPr lang="en-US" sz="1100" dirty="0"/>
                     </a:p>
@@ -22697,7 +22697,7 @@
                             <a:schemeClr val="tx1"/>
                           </a:solidFill>
                         </a:rPr>
-                        <a:t>50% · €103.75k</a:t>
+                        <a:t>50% · €58.75k</a:t>
                       </a:r>
                       <a:endParaRPr lang="en-US" sz="1100" dirty="0"/>
                     </a:p>
@@ -22755,7 +22755,7 @@
                             <a:schemeClr val="tx1"/>
                           </a:solidFill>
                         </a:rPr>
-                        <a:t>78</a:t>
+                        <a:t>76</a:t>
                       </a:r>
                       <a:endParaRPr lang="en-US" sz="1100" dirty="0"/>
                     </a:p>
@@ -22813,7 +22813,7 @@
                             <a:schemeClr val="tx1"/>
                           </a:solidFill>
                         </a:rPr>
-                        <a:t>€1,328</a:t>
+                        <a:t>€770</a:t>
                       </a:r>
                       <a:endParaRPr lang="en-US" sz="1100" dirty="0"/>
                     </a:p>
@@ -22964,7 +22964,7 @@
                   <a:schemeClr val="tx1"/>
                 </a:solidFill>
               </a:rPr>
-              <a:t>at −30%: supervisors 1.6 of 10, electricians 27.1 of 30, automation 14.3 of 15. Mechatronics never falls short.</a:t>
+              <a:t>at −30%: electricians 20.7 of 30, supervisors 7.0 of 10, automation 14.5 of 15, mechatronics 44.7 of 45. Mechatronics slips to 44.7.</a:t>
             </a:r>
             <a:endParaRPr lang="en-US" sz="1200" dirty="0"/>
           </a:p>
@@ -22995,7 +22995,7 @@
                   <a:schemeClr val="tx1"/>
                 </a:solidFill>
               </a:rPr>
-              <a:t>the last €62.25k buys ~12 hires at ~€5,190 each, mostly supervisors. If you must cut, cover supervisors through internal promotion and protect electricians, the role that keeps lines running. Above €207.5k, extra money buys at most ~2 more hires (the 6 spare slots); then the 55/week limit binds.</a:t>
+              <a:t>the last €35.25k buys ~13 hires at ~€2,700 each, mostly electricians, the role that keeps lines running. Keep it. If you must cut, cover supervisors through internal promotion and protect electricians. Above €117.5k, extra money buys at most ~2 more hires (the 6 spare slots); then the 55/week limit binds.</a:t>
             </a:r>
             <a:endParaRPr lang="en-US" sz="1200" dirty="0"/>
           </a:p>
@@ -23145,7 +23145,7 @@
                 <a:ea typeface="Cambria" pitchFamily="34" charset="-122"/>
                 <a:cs typeface="Cambria" pitchFamily="34" charset="-120"/>
               </a:rPr>
-              <a:t>Three new sources supply ~41 of the 100 hires, one built for electricians</a:t>
+              <a:t>Three new sources supply ~43 of the 100 hires, one built for electricians</a:t>
             </a:r>
             <a:endParaRPr lang="en-US" sz="2200" dirty="0"/>
           </a:p>
@@ -23285,7 +23285,7 @@
                   <a:schemeClr val="tx1"/>
                 </a:solidFill>
               </a:rPr>
-              <a:t>136 runners-up from the last year (consented talent pool); the plant's 10,703 staff as referrers</a:t>
+              <a:t>211 runners-up from the last year (consented talent pool); the plant's 10,703 staff as referrers</a:t>
             </a:r>
             <a:endParaRPr lang="en-US" sz="1200" dirty="0"/>
           </a:p>
@@ -23378,7 +23378,7 @@
                   <a:schemeClr val="tx1"/>
                 </a:solidFill>
               </a:rPr>
-              <a:t>€41 + €11.2k bonuses → 16 re-apps + 66 referrals → ~38 qualified → ~14 hires</a:t>
+              <a:t>€63 + €11.2k bonuses → 25 re-apps + 66 referrals → ~42 qualified → ~16 hires</a:t>
             </a:r>
             <a:endParaRPr lang="en-US" sz="1200" dirty="0"/>
           </a:p>
@@ -23409,7 +23409,7 @@
                   <a:schemeClr val="tx1"/>
                 </a:solidFill>
               </a:rPr>
-              <a:t>Wed 21 Oct – Tue 3 Nov (waves 1–3): €41. Pass: ≥8 qualified (≥⅓ electricians). Kill: &lt;5 → no further re-contacts; bonus stays live</a:t>
+              <a:t>Wed 21 Oct – Tue 3 Nov (waves 1–3): €63. Pass: ≥12 qualified. Kill: &lt;9 → no further re-contacts; bonus stays live</a:t>
             </a:r>
             <a:endParaRPr lang="en-US" sz="1200" dirty="0"/>
           </a:p>
@@ -23673,7 +23673,7 @@
                   <a:schemeClr val="tx1"/>
                 </a:solidFill>
               </a:rPr>
-              <a:t>200 apps × €84 = €16.8k + €1.2k set-up → 30 qualified × 28% = 8.5 hires (€2,116/hire)</a:t>
+              <a:t>120 apps × €84 = €10.1k + €1.2k set-up → 30 qualified × 28% = 8.5 hires (€1,326/hire)</a:t>
             </a:r>
             <a:endParaRPr lang="en-US" sz="1200" dirty="0"/>
           </a:p>
@@ -23704,7 +23704,7 @@
                   <a:schemeClr val="tx1"/>
                 </a:solidFill>
               </a:rPr>
-              <a:t>Fri 23 Oct – Thu 5 Nov (read Mon 9 Nov): €6.0k. Pass: ≥5 qualified at ≤€700. Kill: &lt;3, &gt;€840 per qualified, or profile rejected; week 4: &lt;40% interview pass</a:t>
+              <a:t>Fri 23 Oct – Thu 5 Nov (read Mon 9 Nov): €4.0k. Pass: ≥4 qualified at ≤€500. Kill: &lt;2, &gt;€670 per qualified, or profile rejected; week 4: interview pass below the planned 45% once ≥10 interviews are in</a:t>
             </a:r>
             <a:endParaRPr lang="en-US" sz="1200" dirty="0"/>
           </a:p>
@@ -23999,7 +23999,7 @@
                   <a:schemeClr val="tx1"/>
                 </a:solidFill>
               </a:rPr>
-              <a:t>Tue 27 Oct – Mon 9 Nov (freelancer starts 27 Oct): €2.5k. Pass: ≥9 qualified at ≤€170. Kill: &lt;5, &gt;€200 per qualified, or &lt;30% pass the language check</a:t>
+              <a:t>Tue 27 Oct – Mon 9 Nov (freelancer starts 27 Oct): €2.5k. Pass: ≥10 qualified at ≤€200. Kill: &lt;7, &gt;€270 per qualified, or fewer than the planned 14% pass the language call after 30 calls</a:t>
             </a:r>
             <a:endParaRPr lang="en-US" sz="1200" dirty="0"/>
           </a:p>
@@ -24077,7 +24077,7 @@
                   <a:schemeClr val="tx1"/>
                 </a:solidFill>
               </a:rPr>
-              <a:t>Every employer may keep consenting runners-up for up to a year, and they are rarely re-marketed to. Here 136 records cost ~€13 per hire and fill week-1 slots before paid channels warm up. Joveo already matches jobs to supply programmatically. Adding a consented rediscovery source, tracked to hire with the same source tags, is repeatable in any market without local staff.</a:t>
+              <a:t>Every employer may keep consenting runners-up for up to a year, and they are rarely re-marketed to. Here 211 records cost ~€13 per hire and fill week-1 slots before paid channels warm up. Joveo already matches jobs to supply programmatically. Adding a consented rediscovery source, tracked to hire with the same source tags, is repeatable in any market without local staff.</a:t>
             </a:r>
             <a:endParaRPr lang="en-US" sz="1200" dirty="0"/>
           </a:p>
@@ -24473,7 +24473,7 @@
                   <a:schemeClr val="tx1"/>
                 </a:solidFill>
               </a:rPr>
-              <a:t>No judgement before €500 / 30 apps (tests run to €750). Updated Q = (qual + 30 × plan) ÷ (apps + 30). Cost per qualified ≤0.8× plan with free slots → +25%/wk from reserve; ≥1.5× → cut 50%; ≥2× → off. Zero qualified at €750 → off where ≥3 were expected; low-yield cells → off if applications are &lt;50% of plan. Next week forecast &gt;55 qualified → pause the costliest cells; &lt;45 → release reserve.</a:t>
+              <a:t>No judgement before €500 / 30 apps (tests run to €750). Updated Q = (qual + 30 × plan) ÷ (apps + 30). Cost per qualified ≤0.75× plan with free slots → +25%/wk from reserve; ≥1.5× → cut 50%; ≥2× → off. Zero qualified at €750 → off where ≥3 were expected; low-yield cells → off if applications are &lt;50% of plan. Next week forecast &gt;55 qualified → pause the costliest cells; &lt;47 → release reserve.</a:t>
             </a:r>
             <a:endParaRPr lang="en-US" sz="1250" dirty="0"/>
           </a:p>
@@ -24596,7 +24596,7 @@
                   <a:schemeClr val="tx1"/>
                 </a:solidFill>
               </a:rPr>
-              <a:t>1) Pass rate on the week-1 cohort (interviews 29 Oct–2 Nov), the most sensitive input: if &lt;45% → tighter knock-outs, pre-screen calls, ask +10 slots, re-run the model. 2) Electrician supply: profile decision + I2's two-week read on 9 Nov; if killed → programmatic picks up the gap: all 30 still possible (model run with I2 off), budget €225.0k, electricians at €2,829 per hire. 3) The 12 tests' cost per application and share qualified → re-rank on Assumptions §7. Week 4 (16 Nov): acceptance &lt;55% → earlier cut-off + signing bonus.</a:t>
+              <a:t>1) Pass rate on the week-1 cohort (interviews 29 Oct–2 Nov), the most sensitive input: if below plan (electricians 50%) once ≥10 interviews are in → tighter knock-outs, pre-screen calls, ask +9 slots, re-run the model (pass 10% worse = ~92 hires). 2) Electrician supply: profile decision + I2's two-week read on 9 Nov; if killed → programmatic picks up the gap: all 30 still possible (model run with I2 off), budget €127.5k, electricians at €1,532 per hire. 3) The 12 tests' cost per application and share qualified → re-rank on Assumptions §7. Week 4 (16 Nov): acceptance below plan (70%) once ≥7 offers are out → earlier cut-off + signing bonus.</a:t>
             </a:r>
             <a:endParaRPr lang="en-US" sz="1250" dirty="0"/>
           </a:p>

--- a/operation_uptime/Operation_Uptime_Deck.pptx
+++ b/operation_uptime/Operation_Uptime_Deck.pptx
@@ -114,30 +114,30 @@
   <p:extLst>
     <p:ext uri="{521415D9-36F7-43E2-AB2F-B90AF26B5E84}">
       <p14:sectionLst xmlns:p14="http://schemas.microsoft.com/office/powerpoint/2010/main">
-        <p14:section name="Summary" id="{b5206f16-7ef7-5e8f-5b97-a2281e36dda5}">
+        <p14:section name="Summary" id="{1fcf6e0f-dd7b-1c8a-d91b-49fd30472ba7}">
           <p14:sldIdLst>
             <p14:sldId id="256"/>
           </p14:sldIdLst>
         </p14:section>
-        <p14:section name="Part 1 Funnel" id="{a4a93b05-1ac7-e866-a8e2-08c32e5adc77}">
+        <p14:section name="Part 1 Funnel" id="{f4483b49-6276-932f-511c-bf1b063d8899}">
           <p14:sldIdLst>
             <p14:sldId id="257"/>
             <p14:sldId id="258"/>
           </p14:sldIdLst>
         </p14:section>
-        <p14:section name="Part 2 Channels &amp; budget" id="{b95f9b78-760f-da98-8859-d4736eebed2d}">
+        <p14:section name="Part 2 Channels &amp; budget" id="{e6f3d0d1-af6d-b401-95ed-760ba5fd2496}">
           <p14:sldIdLst>
             <p14:sldId id="259"/>
             <p14:sldId id="260"/>
             <p14:sldId id="261"/>
           </p14:sldIdLst>
         </p14:section>
-        <p14:section name="Part 3 New sources" id="{00b2a2b2-5d6b-340f-c280-4390cbd11ada}">
+        <p14:section name="Part 3 New sources" id="{90b73861-fa43-3e79-1a39-cdbbc9b8caa8}">
           <p14:sldIdLst>
             <p14:sldId id="262"/>
           </p14:sldIdLst>
         </p14:section>
-        <p14:section name="Part 4 Run it" id="{7779d167-52e6-e63b-e9ed-2e16521153a4}">
+        <p14:section name="Part 4 Run it" id="{991bbb75-c7b7-8241-b263-874fee82182f}">
           <p14:sldIdLst>
             <p14:sldId id="263"/>
           </p14:sldIdLst>
@@ -24473,7 +24473,7 @@
                   <a:schemeClr val="tx1"/>
                 </a:solidFill>
               </a:rPr>
-              <a:t>No judgement before €500 / 30 apps (tests run to €750). Updated Q = (qual + 30 × plan) ÷ (apps + 30). Cost per qualified ≤0.75× plan with free slots → +25%/wk from reserve; ≥1.5× → cut 50%; ≥2× → off. Zero qualified at €750 → off where ≥3 were expected; low-yield cells → off if applications are &lt;50% of plan. Next week forecast &gt;55 qualified → pause the costliest cells; &lt;47 → release reserve.</a:t>
+              <a:t>No judgement before €500 / 30 apps (tests run to €750). Updated Q = (qual + 30 × plan) ÷ (apps + 30). Cost per qualified ≤0.75× plan with free slots → +25%/wk from reserve; ≥1.5× → cut 50%; ≥2× → off. Zero qualified at €750 → off where ≥3 were expected; low-yield cells → off if applications are &lt;50% of plan. Next week forecast &gt;55 qualified → pause the costliest cells; &lt;50 → release reserve.</a:t>
             </a:r>
             <a:endParaRPr lang="en-US" sz="1250" dirty="0"/>
           </a:p>

--- a/operation_uptime/Operation_Uptime_Deck.pptx
+++ b/operation_uptime/Operation_Uptime_Deck.pptx
@@ -114,30 +114,30 @@
   <p:extLst>
     <p:ext uri="{521415D9-36F7-43E2-AB2F-B90AF26B5E84}">
       <p14:sectionLst xmlns:p14="http://schemas.microsoft.com/office/powerpoint/2010/main">
-        <p14:section name="Summary" id="{1fcf6e0f-dd7b-1c8a-d91b-49fd30472ba7}">
+        <p14:section name="Summary" id="{419a3669-44ab-ed75-820e-f6c8f08a2b0e}">
           <p14:sldIdLst>
             <p14:sldId id="256"/>
           </p14:sldIdLst>
         </p14:section>
-        <p14:section name="Part 1 Funnel" id="{f4483b49-6276-932f-511c-bf1b063d8899}">
+        <p14:section name="Part 1 Funnel" id="{e5bfc387-1ed4-ea49-35f0-167cec35a232}">
           <p14:sldIdLst>
             <p14:sldId id="257"/>
             <p14:sldId id="258"/>
           </p14:sldIdLst>
         </p14:section>
-        <p14:section name="Part 2 Channels &amp; budget" id="{e6f3d0d1-af6d-b401-95ed-760ba5fd2496}">
+        <p14:section name="Part 2 Channels &amp; budget" id="{a2038b24-3a39-9e48-6d88-ba19ad61abfb}">
           <p14:sldIdLst>
             <p14:sldId id="259"/>
             <p14:sldId id="260"/>
             <p14:sldId id="261"/>
           </p14:sldIdLst>
         </p14:section>
-        <p14:section name="Part 3 New sources" id="{90b73861-fa43-3e79-1a39-cdbbc9b8caa8}">
+        <p14:section name="Part 3 New sources" id="{b7a4091e-7f74-17cc-a65f-334645a97f69}">
           <p14:sldIdLst>
             <p14:sldId id="262"/>
           </p14:sldIdLst>
         </p14:section>
-        <p14:section name="Part 4 Run it" id="{991bbb75-c7b7-8241-b263-874fee82182f}">
+        <p14:section name="Part 4 Run it" id="{8171a141-a7a8-3c7e-ddc6-512fe70ab195}">
           <p14:sldIdLst>
             <p14:sldId id="263"/>
           </p14:sldIdLst>
@@ -1107,22 +1107,22 @@
                 <c:formatCode>General</c:formatCode>
                 <c:ptCount val="9"/>
                 <c:pt idx="0">
-                  <c:v>6808</c:v>
+                  <c:v>6858</c:v>
                 </c:pt>
                 <c:pt idx="1">
-                  <c:v>10925</c:v>
+                  <c:v>11006</c:v>
                 </c:pt>
                 <c:pt idx="2">
-                  <c:v>13546</c:v>
+                  <c:v>13646</c:v>
                 </c:pt>
                 <c:pt idx="3">
-                  <c:v>13539</c:v>
+                  <c:v>13639</c:v>
                 </c:pt>
                 <c:pt idx="4">
-                  <c:v>13915</c:v>
+                  <c:v>14018</c:v>
                 </c:pt>
                 <c:pt idx="5">
-                  <c:v>12822</c:v>
+                  <c:v>13247</c:v>
                 </c:pt>
                 <c:pt idx="6">
                   <c:v>0</c:v>
@@ -1354,22 +1354,22 @@
                   <c:v>0</c:v>
                 </c:pt>
                 <c:pt idx="3">
-                  <c:v>944</c:v>
+                  <c:v>888</c:v>
                 </c:pt>
                 <c:pt idx="4">
-                  <c:v>1606</c:v>
+                  <c:v>1559</c:v>
                 </c:pt>
                 <c:pt idx="5">
-                  <c:v>2026</c:v>
+                  <c:v>1983</c:v>
                 </c:pt>
                 <c:pt idx="6">
-                  <c:v>2059</c:v>
+                  <c:v>2032</c:v>
                 </c:pt>
                 <c:pt idx="7">
-                  <c:v>2111</c:v>
+                  <c:v>2082</c:v>
                 </c:pt>
                 <c:pt idx="8">
-                  <c:v>2483</c:v>
+                  <c:v>2434</c:v>
                 </c:pt>
               </c:numCache>
             </c:numRef>
@@ -1656,13 +1656,13 @@
                   <c:v>30</c:v>
                 </c:pt>
                 <c:pt idx="1">
-                  <c:v>25.4</c:v>
+                  <c:v>25.1</c:v>
                 </c:pt>
                 <c:pt idx="2">
-                  <c:v>20.7</c:v>
+                  <c:v>20.6</c:v>
                 </c:pt>
                 <c:pt idx="3">
-                  <c:v>20.7</c:v>
+                  <c:v>20.6</c:v>
                 </c:pt>
               </c:numCache>
             </c:numRef>
@@ -1752,7 +1752,7 @@
                   <c:v>44.7</c:v>
                 </c:pt>
                 <c:pt idx="3">
-                  <c:v>38.6</c:v>
+                  <c:v>37.8</c:v>
                 </c:pt>
               </c:numCache>
             </c:numRef>
@@ -1929,10 +1929,10 @@
                   <c:v>9.6</c:v>
                 </c:pt>
                 <c:pt idx="2">
-                  <c:v>7</c:v>
+                  <c:v>6.8</c:v>
                 </c:pt>
                 <c:pt idx="3">
-                  <c:v>2.4</c:v>
+                  <c:v>3</c:v>
                 </c:pt>
               </c:numCache>
             </c:numRef>
@@ -3862,7 +3862,7 @@
                   <a:schemeClr val="tx2"/>
                 </a:solidFill>
               </a:rPr>
-              <a:t>recommended budget: €99.2k planned + €18.3k reserve released only on results</a:t>
+              <a:t>recommended budget: €99.8k planned + €17.7k reserve released only on results</a:t>
             </a:r>
             <a:endParaRPr lang="en-US" sz="1000" dirty="0"/>
           </a:p>
@@ -3928,7 +3928,7 @@
                 <a:ea typeface="Cambria" pitchFamily="34" charset="-122"/>
                 <a:cs typeface="Cambria" pitchFamily="34" charset="-120"/>
               </a:rPr>
-              <a:t>€992</a:t>
+              <a:t>€998</a:t>
             </a:r>
             <a:endParaRPr lang="en-US" sz="2600" dirty="0"/>
           </a:p>
@@ -4237,7 +4237,7 @@
                   <a:schemeClr val="tx1"/>
                 </a:solidFill>
               </a:rPr>
-              <a:t>(€82.25k): ~87 hires; electricians fall short first (20.7 of 30).</a:t>
+              <a:t>(€82.25k): ~87 hires; electricians fall short first (20.6 of 30).</a:t>
             </a:r>
             <a:endParaRPr lang="en-US" sz="1100" dirty="0"/>
           </a:p>
@@ -4762,7 +4762,7 @@
                           <a:ea typeface="Calibri" pitchFamily="34" charset="-122"/>
                           <a:cs typeface="Calibri" pitchFamily="34" charset="-120"/>
                         </a:rPr>
-                        <a:t>€37.9k</a:t>
+                        <a:t>€38.0k</a:t>
                       </a:r>
                       <a:endParaRPr lang="en-US" sz="1000" dirty="0">
                         <a:latin typeface="Calibri" charset="0"/>
@@ -4827,7 +4827,7 @@
                           <a:ea typeface="Calibri" pitchFamily="34" charset="-122"/>
                           <a:cs typeface="Calibri" pitchFamily="34" charset="-120"/>
                         </a:rPr>
-                        <a:t>€1,264</a:t>
+                        <a:t>€1,266</a:t>
                       </a:r>
                       <a:endParaRPr lang="en-US" sz="1000" dirty="0">
                         <a:latin typeface="Calibri" charset="0"/>
@@ -4892,7 +4892,7 @@
                           <a:ea typeface="Calibri" pitchFamily="34" charset="-122"/>
                           <a:cs typeface="Calibri" pitchFamily="34" charset="-120"/>
                         </a:rPr>
-                        <a:t>Handwerk→Industrie 8.5 · Meta 6.3 · organic 5.9 · referrals 3.3 · programmatic 2.8 · other 3.3</a:t>
+                        <a:t>Handwerk→Industrie 8.4 · Meta 6.3 · organic 5.9 · referrals 3.3 · programmatic 2.9 · other 3.3</a:t>
                       </a:r>
                       <a:endParaRPr lang="en-US" sz="900" dirty="0">
                         <a:latin typeface="Calibri" charset="0"/>
@@ -5089,7 +5089,7 @@
                           <a:ea typeface="Calibri" pitchFamily="34" charset="-122"/>
                           <a:cs typeface="Calibri" pitchFamily="34" charset="-120"/>
                         </a:rPr>
-                        <a:t>€27.4k</a:t>
+                        <a:t>€28.9k</a:t>
                       </a:r>
                       <a:endParaRPr lang="en-US" sz="1000" dirty="0">
                         <a:latin typeface="Calibri" charset="0"/>
@@ -5154,7 +5154,7 @@
                           <a:ea typeface="Calibri" pitchFamily="34" charset="-122"/>
                           <a:cs typeface="Calibri" pitchFamily="34" charset="-120"/>
                         </a:rPr>
-                        <a:t>€610</a:t>
+                        <a:t>€643</a:t>
                       </a:r>
                       <a:endParaRPr lang="en-US" sz="1000" dirty="0">
                         <a:latin typeface="Calibri" charset="0"/>
@@ -5219,7 +5219,7 @@
                           <a:ea typeface="Calibri" pitchFamily="34" charset="-122"/>
                           <a:cs typeface="Calibri" pitchFamily="34" charset="-120"/>
                         </a:rPr>
-                        <a:t>Polish corridor 18.0 · organic 10.4 · referrals 5.8 · Meta 5.7 · rediscovery 2.4 · other 2.7</a:t>
+                        <a:t>Polish corridor 18.0 · organic 10.4 · Meta 7.0 · referrals 5.0 · StepStone 2.0 · other 2.6</a:t>
                       </a:r>
                       <a:endParaRPr lang="en-US" sz="900" dirty="0">
                         <a:latin typeface="Calibri" charset="0"/>
@@ -5416,7 +5416,7 @@
                           <a:ea typeface="Calibri" pitchFamily="34" charset="-122"/>
                           <a:cs typeface="Calibri" pitchFamily="34" charset="-120"/>
                         </a:rPr>
-                        <a:t>€17.6k</a:t>
+                        <a:t>€17.4k</a:t>
                       </a:r>
                       <a:endParaRPr lang="en-US" sz="1000" dirty="0">
                         <a:latin typeface="Calibri" charset="0"/>
@@ -5481,7 +5481,7 @@
                           <a:ea typeface="Calibri" pitchFamily="34" charset="-122"/>
                           <a:cs typeface="Calibri" pitchFamily="34" charset="-120"/>
                         </a:rPr>
-                        <a:t>€1,175</a:t>
+                        <a:t>€1,158</a:t>
                       </a:r>
                       <a:endParaRPr lang="en-US" sz="1000" dirty="0">
                         <a:latin typeface="Calibri" charset="0"/>
@@ -5546,7 +5546,7 @@
                           <a:ea typeface="Calibri" pitchFamily="34" charset="-122"/>
                           <a:cs typeface="Calibri" pitchFamily="34" charset="-120"/>
                         </a:rPr>
-                        <a:t>LinkedIn 9.7 · organic 2.7 · referrals 1.5 · rediscovery 0.6 · tests 0.5</a:t>
+                        <a:t>LinkedIn 9.5 · organic 2.7 · referrals 1.6 · rediscovery 0.7 · tests 0.5</a:t>
                       </a:r>
                       <a:endParaRPr lang="en-US" sz="900" dirty="0">
                         <a:latin typeface="Calibri" charset="0"/>
@@ -5743,7 +5743,7 @@
                           <a:ea typeface="Calibri" pitchFamily="34" charset="-122"/>
                           <a:cs typeface="Calibri" pitchFamily="34" charset="-120"/>
                         </a:rPr>
-                        <a:t>€16.2k</a:t>
+                        <a:t>€15.5k</a:t>
                       </a:r>
                       <a:endParaRPr lang="en-US" sz="1000" dirty="0">
                         <a:latin typeface="Calibri" charset="0"/>
@@ -5808,7 +5808,7 @@
                           <a:ea typeface="Calibri" pitchFamily="34" charset="-122"/>
                           <a:cs typeface="Calibri" pitchFamily="34" charset="-120"/>
                         </a:rPr>
-                        <a:t>€1,620</a:t>
+                        <a:t>€1,550</a:t>
                       </a:r>
                       <a:endParaRPr lang="en-US" sz="1000" dirty="0">
                         <a:latin typeface="Calibri" charset="0"/>
@@ -5873,7 +5873,7 @@
                           <a:ea typeface="Calibri" pitchFamily="34" charset="-122"/>
                           <a:cs typeface="Calibri" pitchFamily="34" charset="-120"/>
                         </a:rPr>
-                        <a:t>LinkedIn 7.2 · organic 1.4 · referrals 0.7 · tests 0.4 · rediscovery 0.3</a:t>
+                        <a:t>LinkedIn 6.6 · organic 1.4 · referrals 1.1 · rediscovery 0.5 · tests 0.4</a:t>
                       </a:r>
                       <a:endParaRPr lang="en-US" sz="900" dirty="0">
                         <a:latin typeface="Calibri" charset="0"/>
@@ -6070,7 +6070,7 @@
                           <a:ea typeface="Calibri" pitchFamily="34" charset="-122"/>
                           <a:cs typeface="Calibri" pitchFamily="34" charset="-120"/>
                         </a:rPr>
-                        <a:t>€99.2k</a:t>
+                        <a:t>€99.8k</a:t>
                       </a:r>
                       <a:endParaRPr lang="en-US" sz="1000" dirty="0">
                         <a:latin typeface="Calibri" charset="0"/>
@@ -6135,7 +6135,7 @@
                           <a:ea typeface="Calibri" pitchFamily="34" charset="-122"/>
                           <a:cs typeface="Calibri" pitchFamily="34" charset="-120"/>
                         </a:rPr>
-                        <a:t>€992</a:t>
+                        <a:t>€998</a:t>
                       </a:r>
                       <a:endParaRPr lang="en-US" sz="1000" dirty="0">
                         <a:latin typeface="Calibri" charset="0"/>
@@ -6200,7 +6200,7 @@
                           <a:ea typeface="Calibri" pitchFamily="34" charset="-122"/>
                           <a:cs typeface="Calibri" pitchFamily="34" charset="-120"/>
                         </a:rPr>
-                        <a:t>+ €18.3k reserve = €117.5k</a:t>
+                        <a:t>+ €17.7k reserve = €117.5k</a:t>
                       </a:r>
                       <a:endParaRPr lang="en-US" sz="900" dirty="0">
                         <a:latin typeface="Calibri" charset="0"/>
@@ -6465,7 +6465,7 @@
                   <a:schemeClr val="tx1"/>
                 </a:solidFill>
               </a:rPr>
-              <a:t>~9 of 30 need your OK on construction electricians by 23 Oct; without them programmatic ads fill the gap and the budget rises to €127.5k.</a:t>
+              <a:t>~8 of 30 need your OK on construction electricians by 23 Oct; without them programmatic ads fill the gap and the budget rises to €127.5k.</a:t>
             </a:r>
             <a:endParaRPr lang="en-US" sz="1100" dirty="0"/>
           </a:p>
@@ -10079,7 +10079,7 @@
                   <a:schemeClr val="tx1"/>
                 </a:solidFill>
               </a:rPr>
-              <a:t>308 qualified / 1,608 applications</a:t>
+              <a:t>308 qualified / 1,619 applications</a:t>
             </a:r>
             <a:pPr indent="0" marL="0">
               <a:buNone/>
@@ -11866,7 +11866,7 @@
                             <a:schemeClr val="tx1"/>
                           </a:solidFill>
                         </a:rPr>
-                        <a:t>3.9×</a:t>
+                        <a:t>4.0×</a:t>
                       </a:r>
                       <a:endParaRPr lang="en-US" sz="1100" dirty="0"/>
                     </a:p>
@@ -11924,7 +11924,7 @@
                             <a:schemeClr val="tx1"/>
                           </a:solidFill>
                         </a:rPr>
-                        <a:t>3.9×</a:t>
+                        <a:t>4.0×</a:t>
                       </a:r>
                       <a:endParaRPr lang="en-US" sz="1100" dirty="0"/>
                     </a:p>
@@ -14277,7 +14277,7 @@
                             <a:schemeClr val="tx1"/>
                           </a:solidFill>
                         </a:rPr>
-                        <a:t>€5 / €12 · 2.4</a:t>
+                        <a:t>€5 / €12 · 1.9</a:t>
                       </a:r>
                       <a:endParaRPr lang="en-US" sz="1000" dirty="0"/>
                     </a:p>
@@ -14338,7 +14338,7 @@
                             <a:schemeClr val="tx1"/>
                           </a:solidFill>
                         </a:rPr>
-                        <a:t>€5 / €15 · 0.6</a:t>
+                        <a:t>€5 / €15 · 0.7</a:t>
                       </a:r>
                       <a:endParaRPr lang="en-US" sz="1000" dirty="0"/>
                     </a:p>
@@ -14399,7 +14399,7 @@
                             <a:schemeClr val="tx1"/>
                           </a:solidFill>
                         </a:rPr>
-                        <a:t>€5 / €18 · 0.3</a:t>
+                        <a:t>€5 / €18 · 0.5</a:t>
                       </a:r>
                       <a:endParaRPr lang="en-US" sz="1000" dirty="0"/>
                     </a:p>
@@ -14876,7 +14876,7 @@
                             <a:schemeClr val="tx1"/>
                           </a:solidFill>
                         </a:rPr>
-                        <a:t>€427 / €1,000 · 5.8</a:t>
+                        <a:t>€427 / €1,000 · 5.0</a:t>
                       </a:r>
                       <a:endParaRPr lang="en-US" sz="1000" dirty="0"/>
                     </a:p>
@@ -14937,7 +14937,7 @@
                             <a:schemeClr val="tx1"/>
                           </a:solidFill>
                         </a:rPr>
-                        <a:t>€326 / €1,000 · 1.5</a:t>
+                        <a:t>€326 / €1,000 · 1.6</a:t>
                       </a:r>
                       <a:endParaRPr lang="en-US" sz="1000" dirty="0"/>
                     </a:p>
@@ -14998,7 +14998,7 @@
                             <a:schemeClr val="tx1"/>
                           </a:solidFill>
                         </a:rPr>
-                        <a:t>€274 / €1,000 · 0.7</a:t>
+                        <a:t>€274 / €1,000 · 1.1</a:t>
                       </a:r>
                       <a:endParaRPr lang="en-US" sz="1000" dirty="0"/>
                     </a:p>
@@ -15119,7 +15119,7 @@
                             <a:schemeClr val="tx1"/>
                           </a:solidFill>
                         </a:rPr>
-                        <a:t>€336 / €1,326 · 8.5</a:t>
+                        <a:t>€336 / €1,329 · 8.4</a:t>
                       </a:r>
                       <a:endParaRPr lang="en-US" sz="1000" dirty="0"/>
                     </a:p>
@@ -15834,7 +15834,7 @@
                             <a:schemeClr val="tx1"/>
                           </a:solidFill>
                         </a:rPr>
-                        <a:t>€427 / €1,505 · 9.7</a:t>
+                        <a:t>€427 / €1,505 · 9.5</a:t>
                       </a:r>
                       <a:endParaRPr lang="en-US" sz="1000" dirty="0"/>
                     </a:p>
@@ -15895,7 +15895,7 @@
                             <a:schemeClr val="tx1"/>
                           </a:solidFill>
                         </a:rPr>
-                        <a:t>€464 / €1,949 · 7.2</a:t>
+                        <a:t>€464 / €1,949 · 6.6</a:t>
                       </a:r>
                       <a:endParaRPr lang="en-US" sz="1000" dirty="0"/>
                     </a:p>
@@ -16077,7 +16077,7 @@
                             <a:schemeClr val="tx1"/>
                           </a:solidFill>
                         </a:rPr>
-                        <a:t>€672 / €1,810 · 5.7</a:t>
+                        <a:t>€672 / €1,810 · 7.0</a:t>
                       </a:r>
                       <a:endParaRPr lang="en-US" sz="1000" dirty="0"/>
                     </a:p>
@@ -16314,7 +16314,7 @@
                             <a:schemeClr val="tx1"/>
                           </a:solidFill>
                         </a:rPr>
-                        <a:t>€716 / €2,272 · 2.8</a:t>
+                        <a:t>€716 / €2,272 · 2.9</a:t>
                       </a:r>
                       <a:endParaRPr lang="en-US" sz="1000" dirty="0"/>
                     </a:p>
@@ -17066,7 +17066,7 @@
                   <a:schemeClr val="tx2"/>
                 </a:solidFill>
               </a:rPr>
-              <a:t>Cells: cost per qualified / cost per hire · hires planned. Cost per hire = (cost per application × applications + set-up) ÷ hires at full capacity; I2 includes €1,200 set-up, I3 €400 translation. StepStone ads (4 × €1,449) are costed whole and credited only the applications the plan needs (conservative).</a:t>
+              <a:t>Cells: cost per qualified / cost per hire · hires planned (cost per hire includes set-up: I2 €1,200, I3 €400). Joveo upside: Joveo's published manufacturing cases cut cost per application by 17–32%; applied to programmatic, the budget falls to €112.5k–€107.5k (model runs).</a:t>
             </a:r>
             <a:endParaRPr lang="en-US" sz="1000" dirty="0"/>
           </a:p>
@@ -17252,7 +17252,7 @@
                 <a:ea typeface="Cambria" pitchFamily="34" charset="-122"/>
                 <a:cs typeface="Cambria" pitchFamily="34" charset="-120"/>
               </a:rPr>
-              <a:t>€99.2k planned across roles and weeks, plus €18.3k reserve released on results</a:t>
+              <a:t>€99.8k planned across roles and weeks, plus €17.7k reserve released on results</a:t>
             </a:r>
             <a:endParaRPr lang="en-US" sz="2200" dirty="0"/>
           </a:p>
@@ -17321,7 +17321,7 @@
                   <a:schemeClr val="tx1"/>
                 </a:solidFill>
               </a:rPr>
-              <a:t>€69.7k paid channels (incl. €9.0k tests) + €27.9k initiative media, pre-screen calls and bonuses + €1.6k set-up = €99.2k. Reserve: 15% of €116.7k plus rounding = €18.3k.</a:t>
+              <a:t>€70.7k paid channels (incl. €9.0k tests) + €27.4k initiative media, pre-screen calls and bonuses + €1.6k set-up = €99.8k. Reserve: 15% of €117.4k plus rounding = €17.7k.</a:t>
             </a:r>
             <a:endParaRPr lang="en-US" sz="1100" dirty="0"/>
           </a:p>
@@ -17352,7 +17352,7 @@
                   <a:schemeClr val="tx1"/>
                 </a:solidFill>
               </a:rPr>
-              <a:t>weeks 1–2 cost €34.1k (29%), mostly tests. Duds are cut from Mon 2 Nov (after €500 / 30 apps); tests and the full re-allocation are judged by Mon 9 Nov; the reserve moves only from week 3. Paid media stops after Tue 24 Nov.</a:t>
+              <a:t>weeks 1–2 cost €34.3k (29%), mostly tests. Duds are cut from Mon 2 Nov (after €500 / 30 apps); tests and the full re-allocation are judged by Mon 9 Nov; the reserve moves only from week 3. Paid media stops after Tue 24 Nov.</a:t>
             </a:r>
             <a:endParaRPr lang="en-US" sz="1100" dirty="0"/>
           </a:p>
@@ -17767,7 +17767,7 @@
                             <a:schemeClr val="tx1"/>
                           </a:solidFill>
                         </a:rPr>
-                        <a:t>€37.9k</a:t>
+                        <a:t>€38.0k</a:t>
                       </a:r>
                       <a:endParaRPr lang="en-US" sz="1100" dirty="0"/>
                     </a:p>
@@ -17941,7 +17941,7 @@
                             <a:schemeClr val="tx1"/>
                           </a:solidFill>
                         </a:rPr>
-                        <a:t>€1,264</a:t>
+                        <a:t>€1,266</a:t>
                       </a:r>
                       <a:endParaRPr lang="en-US" sz="1100" dirty="0"/>
                     </a:p>
@@ -18059,7 +18059,7 @@
                             <a:schemeClr val="tx1"/>
                           </a:solidFill>
                         </a:rPr>
-                        <a:t>€27.4k</a:t>
+                        <a:t>€28.9k</a:t>
                       </a:r>
                       <a:endParaRPr lang="en-US" sz="1100" dirty="0"/>
                     </a:p>
@@ -18233,7 +18233,7 @@
                             <a:schemeClr val="tx1"/>
                           </a:solidFill>
                         </a:rPr>
-                        <a:t>€610</a:t>
+                        <a:t>€643</a:t>
                       </a:r>
                       <a:endParaRPr lang="en-US" sz="1100" dirty="0"/>
                     </a:p>
@@ -18351,7 +18351,7 @@
                             <a:schemeClr val="tx1"/>
                           </a:solidFill>
                         </a:rPr>
-                        <a:t>€17.6k</a:t>
+                        <a:t>€17.4k</a:t>
                       </a:r>
                       <a:endParaRPr lang="en-US" sz="1100" dirty="0"/>
                     </a:p>
@@ -18525,7 +18525,7 @@
                             <a:schemeClr val="tx1"/>
                           </a:solidFill>
                         </a:rPr>
-                        <a:t>€1,175</a:t>
+                        <a:t>€1,158</a:t>
                       </a:r>
                       <a:endParaRPr lang="en-US" sz="1100" dirty="0"/>
                     </a:p>
@@ -18643,7 +18643,7 @@
                             <a:schemeClr val="tx1"/>
                           </a:solidFill>
                         </a:rPr>
-                        <a:t>€16.2k</a:t>
+                        <a:t>€15.5k</a:t>
                       </a:r>
                       <a:endParaRPr lang="en-US" sz="1100" dirty="0"/>
                     </a:p>
@@ -18817,7 +18817,7 @@
                             <a:schemeClr val="tx1"/>
                           </a:solidFill>
                         </a:rPr>
-                        <a:t>€1,620</a:t>
+                        <a:t>€1,550</a:t>
                       </a:r>
                       <a:endParaRPr lang="en-US" sz="1100" dirty="0"/>
                     </a:p>
@@ -18935,7 +18935,7 @@
                             <a:schemeClr val="tx1"/>
                           </a:solidFill>
                         </a:rPr>
-                        <a:t>€99.2k</a:t>
+                        <a:t>€99.8k</a:t>
                       </a:r>
                       <a:endParaRPr lang="en-US" sz="1100" dirty="0"/>
                     </a:p>
@@ -19109,7 +19109,7 @@
                             <a:schemeClr val="tx1"/>
                           </a:solidFill>
                         </a:rPr>
-                        <a:t>€992</a:t>
+                        <a:t>€998</a:t>
                       </a:r>
                       <a:endParaRPr lang="en-US" sz="1100" dirty="0"/>
                     </a:p>
@@ -19739,7 +19739,7 @@
                             <a:schemeClr val="tx1"/>
                           </a:solidFill>
                         </a:rPr>
-                        <a:t>€8.5k</a:t>
+                        <a:t>€8.7k</a:t>
                       </a:r>
                       <a:endParaRPr lang="en-US" sz="1000" dirty="0"/>
                     </a:p>
@@ -19797,7 +19797,7 @@
                             <a:schemeClr val="tx1"/>
                           </a:solidFill>
                         </a:rPr>
-                        <a:t>3.7</a:t>
+                        <a:t>3.8</a:t>
                       </a:r>
                       <a:endParaRPr lang="en-US" sz="1000" dirty="0"/>
                     </a:p>
@@ -19855,7 +19855,7 @@
                             <a:schemeClr val="tx1"/>
                           </a:solidFill>
                         </a:rPr>
-                        <a:t>€2,318</a:t>
+                        <a:t>€2,317</a:t>
                       </a:r>
                       <a:endParaRPr lang="en-US" sz="1000" dirty="0"/>
                     </a:p>
@@ -20207,7 +20207,7 @@
                             <a:schemeClr val="tx1"/>
                           </a:solidFill>
                         </a:rPr>
-                        <a:t>€28.6k</a:t>
+                        <a:t>€27.1k</a:t>
                       </a:r>
                       <a:endParaRPr lang="en-US" sz="1000" dirty="0"/>
                     </a:p>
@@ -20265,7 +20265,7 @@
                             <a:schemeClr val="tx1"/>
                           </a:solidFill>
                         </a:rPr>
-                        <a:t>16.9</a:t>
+                        <a:t>16.1</a:t>
                       </a:r>
                       <a:endParaRPr lang="en-US" sz="1000" dirty="0"/>
                     </a:p>
@@ -20323,7 +20323,7 @@
                             <a:schemeClr val="tx1"/>
                           </a:solidFill>
                         </a:rPr>
-                        <a:t>€1,693</a:t>
+                        <a:t>€1,687</a:t>
                       </a:r>
                       <a:endParaRPr lang="en-US" sz="1000" dirty="0"/>
                     </a:p>
@@ -20441,7 +20441,7 @@
                             <a:schemeClr val="tx1"/>
                           </a:solidFill>
                         </a:rPr>
-                        <a:t>€23.8k</a:t>
+                        <a:t>€26.1k</a:t>
                       </a:r>
                       <a:endParaRPr lang="en-US" sz="1000" dirty="0"/>
                     </a:p>
@@ -20499,7 +20499,7 @@
                             <a:schemeClr val="tx1"/>
                           </a:solidFill>
                         </a:rPr>
-                        <a:t>12.0</a:t>
+                        <a:t>13.3</a:t>
                       </a:r>
                       <a:endParaRPr lang="en-US" sz="1000" dirty="0"/>
                     </a:p>
@@ -20557,7 +20557,7 @@
                             <a:schemeClr val="tx1"/>
                           </a:solidFill>
                         </a:rPr>
-                        <a:t>€1,979</a:t>
+                        <a:t>€1,963</a:t>
                       </a:r>
                       <a:endParaRPr lang="en-US" sz="1000" dirty="0"/>
                     </a:p>
@@ -20967,7 +20967,7 @@
                             <a:schemeClr val="tx1"/>
                           </a:solidFill>
                         </a:rPr>
-                        <a:t>4.8</a:t>
+                        <a:t>4.6</a:t>
                       </a:r>
                       <a:endParaRPr lang="en-US" sz="1000" dirty="0"/>
                     </a:p>
@@ -21025,7 +21025,7 @@
                             <a:schemeClr val="tx1"/>
                           </a:solidFill>
                         </a:rPr>
-                        <a:t>€13</a:t>
+                        <a:t>€14</a:t>
                       </a:r>
                       <a:endParaRPr lang="en-US" sz="1000" dirty="0"/>
                     </a:p>
@@ -21143,7 +21143,7 @@
                             <a:schemeClr val="tx1"/>
                           </a:solidFill>
                         </a:rPr>
-                        <a:t>€11.2k</a:t>
+                        <a:t>€11.0k</a:t>
                       </a:r>
                       <a:endParaRPr lang="en-US" sz="1000" dirty="0"/>
                     </a:p>
@@ -21201,7 +21201,7 @@
                             <a:schemeClr val="tx1"/>
                           </a:solidFill>
                         </a:rPr>
-                        <a:t>11.2</a:t>
+                        <a:t>11.0</a:t>
                       </a:r>
                       <a:endParaRPr lang="en-US" sz="1000" dirty="0"/>
                     </a:p>
@@ -21377,7 +21377,7 @@
                             <a:schemeClr val="tx1"/>
                           </a:solidFill>
                         </a:rPr>
-                        <a:t>€11.3k</a:t>
+                        <a:t>€11.1k</a:t>
                       </a:r>
                       <a:endParaRPr lang="en-US" sz="1000" dirty="0"/>
                     </a:p>
@@ -21435,7 +21435,7 @@
                             <a:schemeClr val="tx1"/>
                           </a:solidFill>
                         </a:rPr>
-                        <a:t>8.5</a:t>
+                        <a:t>8.4</a:t>
                       </a:r>
                       <a:endParaRPr lang="en-US" sz="1000" dirty="0"/>
                     </a:p>
@@ -21493,7 +21493,7 @@
                             <a:schemeClr val="tx1"/>
                           </a:solidFill>
                         </a:rPr>
-                        <a:t>€1,326</a:t>
+                        <a:t>€1,329</a:t>
                       </a:r>
                       <a:endParaRPr lang="en-US" sz="1000" dirty="0"/>
                     </a:p>
@@ -22461,7 +22461,7 @@
                             <a:schemeClr val="tx1"/>
                           </a:solidFill>
                         </a:rPr>
-                        <a:t>€1,060</a:t>
+                        <a:t>€1,064</a:t>
                       </a:r>
                       <a:endParaRPr lang="en-US" sz="1100" dirty="0"/>
                     </a:p>
@@ -22637,7 +22637,7 @@
                             <a:schemeClr val="tx1"/>
                           </a:solidFill>
                         </a:rPr>
-                        <a:t>€946</a:t>
+                        <a:t>€949</a:t>
                       </a:r>
                       <a:endParaRPr lang="en-US" sz="1100" dirty="0"/>
                     </a:p>
@@ -22813,7 +22813,7 @@
                             <a:schemeClr val="tx1"/>
                           </a:solidFill>
                         </a:rPr>
-                        <a:t>€770</a:t>
+                        <a:t>€774</a:t>
                       </a:r>
                       <a:endParaRPr lang="en-US" sz="1100" dirty="0"/>
                     </a:p>
@@ -22964,7 +22964,7 @@
                   <a:schemeClr val="tx1"/>
                 </a:solidFill>
               </a:rPr>
-              <a:t>at −30%: electricians 20.7 of 30, supervisors 7.0 of 10, automation 14.5 of 15, mechatronics 44.7 of 45. Mechatronics slips to 44.7.</a:t>
+              <a:t>at −30%: electricians 20.6 of 30, supervisors 6.8 of 10, automation 14.5 of 15, mechatronics 44.7 of 45. Mechatronics slips to 44.7.</a:t>
             </a:r>
             <a:endParaRPr lang="en-US" sz="1200" dirty="0"/>
           </a:p>
@@ -22995,7 +22995,7 @@
                   <a:schemeClr val="tx1"/>
                 </a:solidFill>
               </a:rPr>
-              <a:t>the last €35.25k buys ~13 hires at ~€2,700 each, mostly electricians, the role that keeps lines running. Keep it. If you must cut, cover supervisors through internal promotion and protect electricians. Above €117.5k, extra money buys at most ~2 more hires (the 6 spare slots); then the 55/week limit binds.</a:t>
+              <a:t>the last €35.25k buys ~13 hires at ~€2,640 each, mostly electricians, the role that keeps lines running. Keep it. If you must cut, cover supervisors through internal promotion and protect electricians. Above €117.5k, extra money buys at most ~2 more hires (the 6 spare slots); then the 55/week limit binds.</a:t>
             </a:r>
             <a:endParaRPr lang="en-US" sz="1200" dirty="0"/>
           </a:p>
@@ -23145,7 +23145,7 @@
                 <a:ea typeface="Cambria" pitchFamily="34" charset="-122"/>
                 <a:cs typeface="Cambria" pitchFamily="34" charset="-120"/>
               </a:rPr>
-              <a:t>Three new sources supply ~43 of the 100 hires, one built for electricians</a:t>
+              <a:t>Three new sources supply ~42 of the 100 hires, one built for electricians</a:t>
             </a:r>
             <a:endParaRPr lang="en-US" sz="2200" dirty="0"/>
           </a:p>
@@ -23378,7 +23378,7 @@
                   <a:schemeClr val="tx1"/>
                 </a:solidFill>
               </a:rPr>
-              <a:t>€63 + €11.2k bonuses → 25 re-apps + 66 referrals → ~42 qualified → ~16 hires</a:t>
+              <a:t>€63 + €11.0k bonuses → 25 re-apps + 66 referrals → ~42 qualified → ~16 hires</a:t>
             </a:r>
             <a:endParaRPr lang="en-US" sz="1200" dirty="0"/>
           </a:p>
@@ -23673,7 +23673,7 @@
                   <a:schemeClr val="tx1"/>
                 </a:solidFill>
               </a:rPr>
-              <a:t>120 apps × €84 = €10.1k + €1.2k set-up → 30 qualified × 28% = 8.5 hires (€1,326/hire)</a:t>
+              <a:t>118 apps × €84 = €9.9k + €1.2k set-up → 30 qualified × 28% = 8.4 hires (€1,329/hire)</a:t>
             </a:r>
             <a:endParaRPr lang="en-US" sz="1200" dirty="0"/>
           </a:p>
@@ -23704,7 +23704,7 @@
                   <a:schemeClr val="tx1"/>
                 </a:solidFill>
               </a:rPr>
-              <a:t>Fri 23 Oct – Thu 5 Nov (read Mon 9 Nov): €4.0k. Pass: ≥4 qualified at ≤€500. Kill: &lt;2, &gt;€670 per qualified, or profile rejected; week 4: interview pass below the planned 45% once ≥10 interviews are in</a:t>
+              <a:t>Fri 23 Oct – Thu 5 Nov (read Mon 9 Nov): €3.9k. Pass: ≥4 qualified at ≤€500. Kill: &lt;2, &gt;€670 per qualified, or profile rejected; week 4: interview pass below the planned 45% once ≥10 interviews are in</a:t>
             </a:r>
             <a:endParaRPr lang="en-US" sz="1200" dirty="0"/>
           </a:p>
@@ -24077,7 +24077,7 @@
                   <a:schemeClr val="tx1"/>
                 </a:solidFill>
               </a:rPr>
-              <a:t>Every employer may keep consenting runners-up for up to a year, and they are rarely re-marketed to. Here 211 records cost ~€13 per hire and fill week-1 slots before paid channels warm up. Joveo already matches jobs to supply programmatically. Adding a consented rediscovery source, tracked to hire with the same source tags, is repeatable in any market without local staff.</a:t>
+              <a:t>Every employer may keep consenting runners-up for up to a year, and they are rarely re-marketed to. Here 211 records cost ~€14 per hire and fill week-1 slots before paid channels warm up. Joveo already matches jobs to supply programmatically. Adding a consented rediscovery source, tracked to hire with the same source tags, is repeatable in any market without local staff.</a:t>
             </a:r>
             <a:endParaRPr lang="en-US" sz="1200" dirty="0"/>
           </a:p>
@@ -24596,7 +24596,7 @@
                   <a:schemeClr val="tx1"/>
                 </a:solidFill>
               </a:rPr>
-              <a:t>1) Pass rate on the week-1 cohort (interviews 29 Oct–2 Nov), the most sensitive input: if below plan (electricians 50%) once ≥10 interviews are in → tighter knock-outs, pre-screen calls, ask +9 slots, re-run the model (pass 10% worse = ~92 hires). 2) Electrician supply: profile decision + I2's two-week read on 9 Nov; if killed → programmatic picks up the gap: all 30 still possible (model run with I2 off), budget €127.5k, electricians at €1,532 per hire. 3) The 12 tests' cost per application and share qualified → re-rank on Assumptions §7. Week 4 (16 Nov): acceptance below plan (70%) once ≥7 offers are out → earlier cut-off + signing bonus.</a:t>
+              <a:t>1) Pass rate on the week-1 cohort (interviews 29 Oct–2 Nov), the most sensitive input: if below plan (electricians 50%) once ≥10 interviews are in → tighter knock-outs, pre-screen calls, ask +9 slots, re-run the model (pass 10% worse = ~92 hires). 2) Electrician supply: profile decision + I2's two-week read on 9 Nov; if killed → programmatic picks up the gap: all 30 still possible (model run with I2 off), budget €127.5k, electricians at €1,529 per hire. 3) The 12 tests' cost per application and share qualified → re-rank on Assumptions §7. Week 4 (16 Nov): acceptance below plan (70%) once ≥7 offers are out → earlier cut-off + signing bonus.</a:t>
             </a:r>
             <a:endParaRPr lang="en-US" sz="1250" dirty="0"/>
           </a:p>

--- a/operation_uptime/Operation_Uptime_Deck.pptx
+++ b/operation_uptime/Operation_Uptime_Deck.pptx
@@ -114,30 +114,30 @@
   <p:extLst>
     <p:ext uri="{521415D9-36F7-43E2-AB2F-B90AF26B5E84}">
       <p14:sectionLst xmlns:p14="http://schemas.microsoft.com/office/powerpoint/2010/main">
-        <p14:section name="Summary" id="{419a3669-44ab-ed75-820e-f6c8f08a2b0e}">
+        <p14:section name="Summary" id="{54a71469-4236-bda2-0b26-6cabd6ce2030}">
           <p14:sldIdLst>
             <p14:sldId id="256"/>
           </p14:sldIdLst>
         </p14:section>
-        <p14:section name="Part 1 Funnel" id="{e5bfc387-1ed4-ea49-35f0-167cec35a232}">
+        <p14:section name="Part 1 Funnel" id="{00875c10-09bf-44b3-7d0b-a43a5f7c7e46}">
           <p14:sldIdLst>
             <p14:sldId id="257"/>
             <p14:sldId id="258"/>
           </p14:sldIdLst>
         </p14:section>
-        <p14:section name="Part 2 Channels &amp; budget" id="{a2038b24-3a39-9e48-6d88-ba19ad61abfb}">
+        <p14:section name="Part 2 Channels &amp; budget" id="{7fc5a8a6-5596-3a6b-0fc5-bb8ea5b5e2b0}">
           <p14:sldIdLst>
             <p14:sldId id="259"/>
             <p14:sldId id="260"/>
             <p14:sldId id="261"/>
           </p14:sldIdLst>
         </p14:section>
-        <p14:section name="Part 3 New sources" id="{b7a4091e-7f74-17cc-a65f-334645a97f69}">
+        <p14:section name="Part 3 New sources" id="{64d396eb-54d0-552c-75da-aad4e3cdf8f6}">
           <p14:sldIdLst>
             <p14:sldId id="262"/>
           </p14:sldIdLst>
         </p14:section>
-        <p14:section name="Part 4 Run it" id="{8171a141-a7a8-3c7e-ddc6-512fe70ab195}">
+        <p14:section name="Part 4 Run it" id="{a524c6b6-ad41-7ff2-aa85-a56c1581f70f}">
           <p14:sldIdLst>
             <p14:sldId id="263"/>
           </p14:sldIdLst>
@@ -6434,7 +6434,7 @@
                   <a:schemeClr val="tx1"/>
                 </a:solidFill>
               </a:rPr>
-              <a:t>98% used. Pre-screened sources first, pace ≤55/wk, ask +9 slots/wk (64/wk → 85% use, the utilisation standard).</a:t>
+              <a:t>98% used. Pre-screened sources first, pace ≤55/wk, ask +9 slots/wk (64/wk → 85% use).</a:t>
             </a:r>
             <a:endParaRPr lang="en-US" sz="1100" dirty="0"/>
           </a:p>
@@ -10068,7 +10068,7 @@
                   <a:schemeClr val="tx1"/>
                 </a:solidFill>
               </a:rPr>
-              <a:t>Sourced where data exists (IAB: 28% of applications suitable; Gem interview-pass and Königsteiner/StepStone offer-acceptance data), own estimates otherwise; each labelled on the Assumptions tab. Few applicants qualify (brief), and foreign-trained electricians can't be recognised in time (2–4 months, §6 BQFG). Acceptance reflects counter-offers in Engpass trades. With the channel mix, the plan needs </a:t>
+              <a:t>Rates come from IAB (about 1 in 4 applications is suitable), Gem pass rates and German offer-acceptance surveys; every input and its source is on the Assumptions tab. With this channel mix the plan needs </a:t>
             </a:r>
             <a:pPr indent="0" marL="0">
               <a:buNone/>
@@ -10137,7 +10137,7 @@
                   <a:schemeClr val="tx1"/>
                 </a:solidFill>
               </a:rPr>
-              <a:t>Application → assessment 6 days, → interview 8, → offer 3, → signature 7 (first two: SmartRecruiters DE benchmark); supervisors +7. Last realistic signature Fri 18 Dec, so applications must arrive by Tue 24 Nov (E/M/A) and Tue 17 Nov (supervisors). Slots = 55 × 40 days ÷ 7 = 314.</a:t>
+              <a:t>Work back from the last realistic signature, Fri 18 Dec: offer 7 days, interview → offer 3, assessment → interview 8, application → assessment 6 (supervisors +7). So applications must arrive by Tue 24 Nov (supervisors Tue 17 Nov). Slots = 55 × 40 days ÷ 7 = 314.</a:t>
             </a:r>
             <a:endParaRPr lang="en-US" sz="1200" dirty="0"/>
           </a:p>
@@ -17066,43 +17066,7 @@
                   <a:schemeClr val="tx2"/>
                 </a:solidFill>
               </a:rPr>
-              <a:t>Cells: cost per qualified / cost per hire · hires planned (cost per hire includes set-up: I2 €1,200, I3 €400). Joveo upside: Joveo's published manufacturing cases cut cost per application by 17–32%; applied to programmatic, the budget falls to €112.5k–€107.5k (model runs).</a:t>
-            </a:r>
-            <a:endParaRPr lang="en-US" sz="1000" dirty="0"/>
-          </a:p>
-        </p:txBody>
-      </p:sp>
-      <p:sp>
-        <p:nvSpPr>
-          <p:cNvPr id="12" name="Text 9"/>
-          <p:cNvSpPr txBox="1"/>
-          <p:nvPr/>
-        </p:nvSpPr>
-        <p:spPr>
-          <a:xfrm>
-            <a:off x="457200" y="5760720"/>
-            <a:ext cx="11274552" cy="457200"/>
-          </a:xfrm>
-          <a:prstGeom prst="rect">
-            <a:avLst/>
-          </a:prstGeom>
-          <a:noFill/>
-          <a:ln/>
-        </p:spPr>
-        <p:txBody>
-          <a:bodyPr wrap="square" lIns="0" tIns="0" rIns="0" bIns="0" rtlCol="0" anchor="t"/>
-          <a:lstStyle/>
-          <a:p>
-            <a:pPr indent="0" marL="0">
-              <a:buNone/>
-            </a:pPr>
-            <a:r>
-              <a:rPr lang="en-US" sz="1000" i="1" dirty="0">
-                <a:solidFill>
-                  <a:schemeClr val="accent4"/>
-                </a:solidFill>
-              </a:rPr>
-              <a:t>Sourced: cost per application, DACH medians: Indeed €161, Google €179, LinkedIn €96, Meta €84 (TalentBait 2024–26) · StepStone €1,449/ad, 12 applications per ad · share qualified: IAB 2026 (28%), channel index from IAB 2025 (job boards 0.90, careers page 0.71, social 0.50) · volume caps: channel reach (Trendence 2023: Indeed 36%, LinkedIn 15%) × in-market pool (BA 2025, Gallup 11%) · Meta volumes: Redline 2024–26. Every input's source or derivation is on the Assumptions tab.</a:t>
+              <a:t>Cells: cost per qualified / cost per hire · hires planned. Joveo upside: Joveo's own manufacturing cases cut cost per application by 17–32%; applied to programmatic, the budget falls to €107.5k–€112.5k.</a:t>
             </a:r>
             <a:endParaRPr lang="en-US" sz="1000" dirty="0"/>
           </a:p>
@@ -23285,7 +23249,7 @@
                   <a:schemeClr val="tx1"/>
                 </a:solidFill>
               </a:rPr>
-              <a:t>211 runners-up from the last year (consented talent pool); the plant's 10,703 staff as referrers</a:t>
+              <a:t>211 past runners-up (consented, last year) + staff referrals</a:t>
             </a:r>
             <a:endParaRPr lang="en-US" sz="1200" dirty="0"/>
           </a:p>
@@ -23316,7 +23280,7 @@
                   <a:schemeClr val="tx1"/>
                 </a:solidFill>
               </a:rPr>
-              <a:t>DE email + SMS waves (days 2, 7, 14), 1-click re-apply; €1,000 bonus on a signed referral</a:t>
+              <a:t>Email + SMS waves on days 2, 7 and 14; €1,000 bonus per signed referral</a:t>
             </a:r>
             <a:endParaRPr lang="en-US" sz="1200" dirty="0"/>
           </a:p>
@@ -23347,7 +23311,7 @@
                   <a:schemeClr val="tx1"/>
                 </a:solidFill>
               </a:rPr>
-              <a:t>Already screened (50% still qualified, below the 70% skills match Forrester reports), already wanted Tesla, ~€3 per application</a:t>
+              <a:t>Already screened and already wanted Tesla; ~€3 per application</a:t>
             </a:r>
             <a:endParaRPr lang="en-US" sz="1200" dirty="0"/>
           </a:p>
@@ -23409,7 +23373,7 @@
                   <a:schemeClr val="tx1"/>
                 </a:solidFill>
               </a:rPr>
-              <a:t>Wed 21 Oct – Tue 3 Nov (waves 1–3): €63. Pass: ≥12 qualified. Kill: &lt;9 → no further re-contacts; bonus stays live</a:t>
+              <a:t>Wed 21 Oct – Tue 3 Nov (waves 1–3): €63. Pass: ≥10 qualified. Kill: &lt;6 → no further re-contacts; bonus stays live</a:t>
             </a:r>
             <a:endParaRPr lang="en-US" sz="1200" dirty="0"/>
           </a:p>
@@ -23440,7 +23404,7 @@
                   <a:schemeClr val="tx1"/>
                 </a:solidFill>
               </a:rPr>
-              <a:t>Me: copy, segments and tracked links ready before 20 Oct; wave 1 on day 2 once the GDPR-checked export arrives. Client: ATS export + consent check, bonus approval, one staff message</a:t>
+              <a:t>Me: copy, segments, tracked links. Client: GDPR-checked export, bonus approval, one staff message</a:t>
             </a:r>
             <a:endParaRPr lang="en-US" sz="1200" dirty="0"/>
           </a:p>
@@ -23580,7 +23544,7 @@
                   <a:schemeClr val="tx1"/>
                 </a:solidFill>
               </a:rPr>
-              <a:t>~10,000 construction electricians (Elektroniker EGT, BA KldB 2621) within 75 km</a:t>
+              <a:t>~10,000 construction electricians within 75 km</a:t>
             </a:r>
             <a:endParaRPr lang="en-US" sz="1200" dirty="0"/>
           </a:p>
@@ -23611,7 +23575,7 @@
                   <a:schemeClr val="tx1"/>
                 </a:solidFill>
               </a:rPr>
-              <a:t>Meta + Google ads with a 6-question quiz (Gesellenbrief, Elektrofachkraft, shifts, language); Tesla runs a 2–4 week bridge</a:t>
+              <a:t>Social and search ads with a 6-question quiz; Tesla runs a 2–4 week bridge course</a:t>
             </a:r>
             <a:endParaRPr lang="en-US" sz="1200" dirty="0"/>
           </a:p>
@@ -23642,7 +23606,7 @@
                   <a:schemeClr val="tx1"/>
                 </a:solidFill>
               </a:rPr>
-              <a:t>A certified pool that never searches 'Betriebstechnik' jobs; roughly doubles the hardest pool</a:t>
+              <a:t>Certified electricians who never search for plant jobs; doubles the hardest pool</a:t>
             </a:r>
             <a:endParaRPr lang="en-US" sz="1200" dirty="0"/>
           </a:p>
@@ -23704,7 +23668,7 @@
                   <a:schemeClr val="tx1"/>
                 </a:solidFill>
               </a:rPr>
-              <a:t>Fri 23 Oct – Thu 5 Nov (read Mon 9 Nov): €3.9k. Pass: ≥4 qualified at ≤€500. Kill: &lt;2, &gt;€670 per qualified, or profile rejected; week 4: interview pass below the planned 45% once ≥10 interviews are in</a:t>
+              <a:t>Fri 23 Oct – Thu 5 Nov (read Mon 9 Nov): €3.9k. Pass: ≥4 qualified at ≤€500. Kill: &lt;3, &gt;€670 per qualified, or profile rejected</a:t>
             </a:r>
             <a:endParaRPr lang="en-US" sz="1200" dirty="0"/>
           </a:p>
@@ -23735,7 +23699,7 @@
                   <a:schemeClr val="tx1"/>
                 </a:solidFill>
               </a:rPr>
-              <a:t>Me: audiences, quiz, remote DE copywriter (€700), live 23 Oct. Client: profile sign-off by 23 Oct, bridge plan</a:t>
+              <a:t>Me: ads, quiz, copy; live 23 Oct. Client: profile sign-off by 23 Oct, bridge plan</a:t>
             </a:r>
             <a:endParaRPr lang="en-US" sz="1200" dirty="0"/>
           </a:p>
@@ -23875,7 +23839,7 @@
                   <a:schemeClr val="tx1"/>
                 </a:solidFill>
               </a:rPr>
-              <a:t>Mechatronics/Industriemechanik in Słubice, Kostrzyn, Gorzów, Zielona Góra (60–130 km, EU)</a:t>
+              <a:t>Mechatronics workers in Polish border towns, 60–130 km away (EU)</a:t>
             </a:r>
             <a:endParaRPr lang="en-US" sz="1200" dirty="0"/>
           </a:p>
@@ -23906,7 +23870,7 @@
                   <a:schemeClr val="tx1"/>
                 </a:solidFill>
               </a:rPr>
-              <a:t>Pracuj.pl, OLX Praca and Polish-geo Meta; a remote Polish-speaking freelancer phones each applicant (15 min, low end of Indeed’s 15–30 min range)</a:t>
+              <a:t>Polish job boards and Meta; a Polish-speaking freelancer phones each applicant (15 min)</a:t>
             </a:r>
             <a:endParaRPr lang="en-US" sz="1200" dirty="0"/>
           </a:p>
@@ -23937,7 +23901,7 @@
                   <a:schemeClr val="tx1"/>
                 </a:solidFill>
               </a:rPr>
-              <a:t>Pracuj.pl is Poland's largest job board (762,827 offers in 2025); ~2,000 Polish trade workers already commute to Brandenburg</a:t>
+              <a:t>~2,000 Polish trade workers already commute to Brandenburg; the call checks language before using our slots</a:t>
             </a:r>
             <a:endParaRPr lang="en-US" sz="1200" dirty="0"/>
           </a:p>
@@ -23999,7 +23963,7 @@
                   <a:schemeClr val="tx1"/>
                 </a:solidFill>
               </a:rPr>
-              <a:t>Tue 27 Oct – Mon 9 Nov (freelancer starts 27 Oct): €2.5k. Pass: ≥10 qualified at ≤€200. Kill: &lt;7, &gt;€270 per qualified, or fewer than the planned 14% pass the language call after 30 calls</a:t>
+              <a:t>Tue 27 Oct – Mon 9 Nov (freelancer starts 27 Oct): €2.5k. Pass: ≥9 qualified at ≤€200. Kill: &lt;5, &gt;€270 per qualified, or too few pass the language call</a:t>
             </a:r>
             <a:endParaRPr lang="en-US" sz="1200" dirty="0"/>
           </a:p>
@@ -24030,7 +23994,7 @@
                   <a:schemeClr val="tx1"/>
                 </a:solidFill>
               </a:rPr>
-              <a:t>Me: ads on day 3, contract the freelancer (live 27 Oct), script and scorecard. Client: approve PL ads</a:t>
+              <a:t>Me: ads, freelancer, call script. Client: approve the Polish ads</a:t>
             </a:r>
             <a:endParaRPr lang="en-US" sz="1200" dirty="0"/>
           </a:p>
@@ -24473,7 +24437,7 @@
                   <a:schemeClr val="tx1"/>
                 </a:solidFill>
               </a:rPr>
-              <a:t>No judgement before €500 / 30 apps (tests run to €750). Updated Q = (qual + 30 × plan) ÷ (apps + 30). Cost per qualified ≤0.75× plan with free slots → +25%/wk from reserve; ≥1.5× → cut 50%; ≥2× → off. Zero qualified at €750 → off where ≥3 were expected; low-yield cells → off if applications are &lt;50% of plan. Next week forecast &gt;55 qualified → pause the costliest cells; &lt;50 → release reserve.</a:t>
+              <a:t>Judge a channel only after €500 or 30 applications. Early results are blended with the plan so one week doesn't swing decisions. 20% cheaper than plan with free slots → +25% a week from the reserve; 50% dearer → halve it; twice the cost → switch off. A spent test with no qualified applicants → off. Next week over 55 qualified → pause the dearest channels; under 50 → release reserve.</a:t>
             </a:r>
             <a:endParaRPr lang="en-US" sz="1250" dirty="0"/>
           </a:p>
@@ -24596,7 +24560,7 @@
                   <a:schemeClr val="tx1"/>
                 </a:solidFill>
               </a:rPr>
-              <a:t>1) Pass rate on the week-1 cohort (interviews 29 Oct–2 Nov), the most sensitive input: if below plan (electricians 50%) once ≥10 interviews are in → tighter knock-outs, pre-screen calls, ask +9 slots, re-run the model (pass 10% worse = ~92 hires). 2) Electrician supply: profile decision + I2's two-week read on 9 Nov; if killed → programmatic picks up the gap: all 30 still possible (model run with I2 off), budget €127.5k, electricians at €1,529 per hire. 3) The 12 tests' cost per application and share qualified → re-rank on Assumptions §7. Week 4 (16 Nov): acceptance below plan (70%) once ≥7 offers are out → earlier cut-off + signing bonus.</a:t>
+              <a:t>1) Week-1 pass rate: if below plan after 10 interviews → sharper screening questions, pre-screen calls, ask for more slots (10% lower pass ≈ 92 hires). 2) Construction-electrician decision and its 9 Nov read; if stopped, programmatic fills the gap (budget €127.5k). 3) Re-rank channels on the tests' real costs. Week 4: acceptance below plan after 5 offers → earlier cut-off + signing bonus.</a:t>
             </a:r>
             <a:endParaRPr lang="en-US" sz="1250" dirty="0"/>
           </a:p>

--- a/operation_uptime/Operation_Uptime_Deck.pptx
+++ b/operation_uptime/Operation_Uptime_Deck.pptx
@@ -114,30 +114,30 @@
   <p:extLst>
     <p:ext uri="{521415D9-36F7-43E2-AB2F-B90AF26B5E84}">
       <p14:sectionLst xmlns:p14="http://schemas.microsoft.com/office/powerpoint/2010/main">
-        <p14:section name="Summary" id="{c5e66185-e052-c6fd-c8a7-31dac0f97e56}">
+        <p14:section name="Summary" id="{eb02dada-b911-1ff0-dc16-f427edafb414}">
           <p14:sldIdLst>
             <p14:sldId id="256"/>
           </p14:sldIdLst>
         </p14:section>
-        <p14:section name="Part 1 Funnel" id="{c5316525-4025-b99a-d43d-b630e7c019bb}">
+        <p14:section name="Part 1 Funnel" id="{913a2bc7-2828-f388-da77-4e2345fcd06b}">
           <p14:sldIdLst>
             <p14:sldId id="257"/>
             <p14:sldId id="258"/>
           </p14:sldIdLst>
         </p14:section>
-        <p14:section name="Part 2 Channels &amp; budget" id="{f24e8158-79ea-d641-ea0a-4000824fb5d6}">
+        <p14:section name="Part 2 Channels &amp; budget" id="{f4a86167-7bbd-4b65-4294-627187c83646}">
           <p14:sldIdLst>
             <p14:sldId id="259"/>
             <p14:sldId id="260"/>
             <p14:sldId id="261"/>
           </p14:sldIdLst>
         </p14:section>
-        <p14:section name="Part 3 New sources" id="{3c8582b9-4814-f252-04e7-3435ec1032ea}">
+        <p14:section name="Part 3 New sources" id="{f1035cb5-55eb-9169-b1cc-8ea76e1ddf1d}">
           <p14:sldIdLst>
             <p14:sldId id="262"/>
           </p14:sldIdLst>
         </p14:section>
-        <p14:section name="Part 4 Run it" id="{e0427f7c-8c26-3458-b37b-8a22e1e2ca4d}">
+        <p14:section name="Part 4 Run it" id="{62daabf8-4e46-0b80-aaa1-eb58439c6957}">
           <p14:sldIdLst>
             <p14:sldId id="263"/>
           </p14:sldIdLst>
@@ -11800,11 +11800,11 @@
         <p:spPr>
           <a:xfrm>
             <a:off x="8595360" y="1188720"/>
-            <a:ext cx="3136392" cy="4846320"/>
+            <a:ext cx="3136392" cy="3108960"/>
           </a:xfrm>
           <a:prstGeom prst="roundRect">
             <a:avLst>
-              <a:gd name="adj" fmla="val 2332"/>
+              <a:gd name="adj" fmla="val 2353"/>
             </a:avLst>
           </a:prstGeom>
           <a:solidFill>
@@ -11827,7 +11827,7 @@
         <p:spPr>
           <a:xfrm>
             <a:off x="8778240" y="1325880"/>
-            <a:ext cx="2834640" cy="4617720"/>
+            <a:ext cx="2834640" cy="2880360"/>
           </a:xfrm>
           <a:prstGeom prst="rect">
             <a:avLst/>
@@ -11906,24 +11906,6 @@
                 </a:solidFill>
               </a:rPr>
               <a:t>Every paid channel gets a €750 test first; the dearest (Search, most programmatic) stay at test level.</a:t>
-            </a:r>
-            <a:endParaRPr lang="en-US" sz="1150" dirty="0"/>
-          </a:p>
-          <a:p>
-            <a:pPr marL="342900" indent="-342900">
-              <a:spcAft>
-                <a:spcPts val="800"/>
-              </a:spcAft>
-              <a:buSzPct val="100000"/>
-              <a:buChar char="•"/>
-            </a:pPr>
-            <a:r>
-              <a:rPr lang="en-US" sz="1150" dirty="0">
-                <a:solidFill>
-                  <a:schemeClr val="tx1"/>
-                </a:solidFill>
-              </a:rPr>
-              <a:t>Joveo upside: Joveo's own manufacturing cases cut cost per application 17–32%; on programmatic that takes the budget to €107.5k–€112.5k.</a:t>
             </a:r>
             <a:endParaRPr lang="en-US" sz="1150" dirty="0"/>
           </a:p>
@@ -14118,7 +14100,7 @@
                             <a:schemeClr val="tx1"/>
                           </a:solidFill>
                         </a:rPr>
-                        <a:t>100% · €117.50k</a:t>
+                        <a:t>Recommended · €117.50k</a:t>
                       </a:r>
                       <a:endParaRPr lang="en-US" sz="1100" dirty="0"/>
                     </a:p>
@@ -14294,183 +14276,7 @@
                             <a:schemeClr val="tx1"/>
                           </a:solidFill>
                         </a:rPr>
-                        <a:t>85% · €99.88k</a:t>
-                      </a:r>
-                      <a:endParaRPr lang="en-US" sz="1100" dirty="0"/>
-                    </a:p>
-                  </a:txBody>
-                  <a:tcPr marL="91440" marR="91440" marT="45720" marB="45720" anchor="ctr">
-                    <a:lnL w="6350" cap="flat" cmpd="sng" algn="ctr">
-                      <a:solidFill>
-                        <a:srgbClr val="D6DEE5"/>
-                      </a:solidFill>
-                      <a:prstDash val="solid"/>
-                      <a:round/>
-                      <a:headEnd type="none" w="med" len="med"/>
-                      <a:tailEnd type="none" w="med" len="med"/>
-                    </a:lnL>
-                    <a:lnR w="6350" cap="flat" cmpd="sng" algn="ctr">
-                      <a:solidFill>
-                        <a:srgbClr val="D6DEE5"/>
-                      </a:solidFill>
-                      <a:prstDash val="solid"/>
-                      <a:round/>
-                      <a:headEnd type="none" w="med" len="med"/>
-                      <a:tailEnd type="none" w="med" len="med"/>
-                    </a:lnR>
-                    <a:lnT w="6350" cap="flat" cmpd="sng" algn="ctr">
-                      <a:solidFill>
-                        <a:srgbClr val="D6DEE5"/>
-                      </a:solidFill>
-                      <a:prstDash val="solid"/>
-                      <a:round/>
-                      <a:headEnd type="none" w="med" len="med"/>
-                      <a:tailEnd type="none" w="med" len="med"/>
-                    </a:lnT>
-                    <a:lnB w="6350" cap="flat" cmpd="sng" algn="ctr">
-                      <a:solidFill>
-                        <a:srgbClr val="D6DEE5"/>
-                      </a:solidFill>
-                      <a:prstDash val="solid"/>
-                      <a:round/>
-                      <a:headEnd type="none" w="med" len="med"/>
-                      <a:tailEnd type="none" w="med" len="med"/>
-                    </a:lnB>
-                  </a:tcPr>
-                </a:tc>
-                <a:tc>
-                  <a:txBody>
-                    <a:bodyPr/>
-                    <a:lstStyle/>
-                    <a:p>
-                      <a:pPr algn="ctr" indent="0" marL="0">
-                        <a:buNone/>
-                      </a:pPr>
-                      <a:r>
-                        <a:rPr lang="en-US" sz="1100" b="1" dirty="0">
-                          <a:solidFill>
-                            <a:schemeClr val="tx1"/>
-                          </a:solidFill>
-                        </a:rPr>
-                        <a:t>94</a:t>
-                      </a:r>
-                      <a:endParaRPr lang="en-US" sz="1100" dirty="0"/>
-                    </a:p>
-                  </a:txBody>
-                  <a:tcPr marL="91440" marR="91440" marT="45720" marB="45720" anchor="ctr">
-                    <a:lnL w="6350" cap="flat" cmpd="sng" algn="ctr">
-                      <a:solidFill>
-                        <a:srgbClr val="D6DEE5"/>
-                      </a:solidFill>
-                      <a:prstDash val="solid"/>
-                      <a:round/>
-                      <a:headEnd type="none" w="med" len="med"/>
-                      <a:tailEnd type="none" w="med" len="med"/>
-                    </a:lnL>
-                    <a:lnR w="6350" cap="flat" cmpd="sng" algn="ctr">
-                      <a:solidFill>
-                        <a:srgbClr val="D6DEE5"/>
-                      </a:solidFill>
-                      <a:prstDash val="solid"/>
-                      <a:round/>
-                      <a:headEnd type="none" w="med" len="med"/>
-                      <a:tailEnd type="none" w="med" len="med"/>
-                    </a:lnR>
-                    <a:lnT w="6350" cap="flat" cmpd="sng" algn="ctr">
-                      <a:solidFill>
-                        <a:srgbClr val="D6DEE5"/>
-                      </a:solidFill>
-                      <a:prstDash val="solid"/>
-                      <a:round/>
-                      <a:headEnd type="none" w="med" len="med"/>
-                      <a:tailEnd type="none" w="med" len="med"/>
-                    </a:lnT>
-                    <a:lnB w="6350" cap="flat" cmpd="sng" algn="ctr">
-                      <a:solidFill>
-                        <a:srgbClr val="D6DEE5"/>
-                      </a:solidFill>
-                      <a:prstDash val="solid"/>
-                      <a:round/>
-                      <a:headEnd type="none" w="med" len="med"/>
-                      <a:tailEnd type="none" w="med" len="med"/>
-                    </a:lnB>
-                  </a:tcPr>
-                </a:tc>
-                <a:tc>
-                  <a:txBody>
-                    <a:bodyPr/>
-                    <a:lstStyle/>
-                    <a:p>
-                      <a:pPr algn="ctr" indent="0" marL="0">
-                        <a:buNone/>
-                      </a:pPr>
-                      <a:r>
-                        <a:rPr lang="en-US" sz="1100" dirty="0">
-                          <a:solidFill>
-                            <a:schemeClr val="tx1"/>
-                          </a:solidFill>
-                        </a:rPr>
-                        <a:t>€1,064</a:t>
-                      </a:r>
-                      <a:endParaRPr lang="en-US" sz="1100" dirty="0"/>
-                    </a:p>
-                  </a:txBody>
-                  <a:tcPr marL="91440" marR="91440" marT="45720" marB="45720" anchor="ctr">
-                    <a:lnL w="6350" cap="flat" cmpd="sng" algn="ctr">
-                      <a:solidFill>
-                        <a:srgbClr val="D6DEE5"/>
-                      </a:solidFill>
-                      <a:prstDash val="solid"/>
-                      <a:round/>
-                      <a:headEnd type="none" w="med" len="med"/>
-                      <a:tailEnd type="none" w="med" len="med"/>
-                    </a:lnL>
-                    <a:lnR w="6350" cap="flat" cmpd="sng" algn="ctr">
-                      <a:solidFill>
-                        <a:srgbClr val="D6DEE5"/>
-                      </a:solidFill>
-                      <a:prstDash val="solid"/>
-                      <a:round/>
-                      <a:headEnd type="none" w="med" len="med"/>
-                      <a:tailEnd type="none" w="med" len="med"/>
-                    </a:lnR>
-                    <a:lnT w="6350" cap="flat" cmpd="sng" algn="ctr">
-                      <a:solidFill>
-                        <a:srgbClr val="D6DEE5"/>
-                      </a:solidFill>
-                      <a:prstDash val="solid"/>
-                      <a:round/>
-                      <a:headEnd type="none" w="med" len="med"/>
-                      <a:tailEnd type="none" w="med" len="med"/>
-                    </a:lnT>
-                    <a:lnB w="6350" cap="flat" cmpd="sng" algn="ctr">
-                      <a:solidFill>
-                        <a:srgbClr val="D6DEE5"/>
-                      </a:solidFill>
-                      <a:prstDash val="solid"/>
-                      <a:round/>
-                      <a:headEnd type="none" w="med" len="med"/>
-                      <a:tailEnd type="none" w="med" len="med"/>
-                    </a:lnB>
-                  </a:tcPr>
-                </a:tc>
-              </a:tr>
-              <a:tr h="365760">
-                <a:tc>
-                  <a:txBody>
-                    <a:bodyPr/>
-                    <a:lstStyle/>
-                    <a:p>
-                      <a:pPr indent="0" marL="0">
-                        <a:buNone/>
-                      </a:pPr>
-                      <a:r>
-                        <a:rPr lang="en-US" sz="1100" dirty="0">
-                          <a:solidFill>
-                            <a:schemeClr val="tx1"/>
-                          </a:solidFill>
-                        </a:rPr>
-                        <a:t>70% · €82.25k</a:t>
+                        <a:t>30% less · €82.25k</a:t>
                       </a:r>
                       <a:endParaRPr lang="en-US" sz="1100" dirty="0"/>
                     </a:p>
@@ -14640,182 +14446,6 @@
                   </a:tcPr>
                 </a:tc>
               </a:tr>
-              <a:tr h="365760">
-                <a:tc>
-                  <a:txBody>
-                    <a:bodyPr/>
-                    <a:lstStyle/>
-                    <a:p>
-                      <a:pPr indent="0" marL="0">
-                        <a:buNone/>
-                      </a:pPr>
-                      <a:r>
-                        <a:rPr lang="en-US" sz="1100" dirty="0">
-                          <a:solidFill>
-                            <a:schemeClr val="tx1"/>
-                          </a:solidFill>
-                        </a:rPr>
-                        <a:t>50% · €58.75k</a:t>
-                      </a:r>
-                      <a:endParaRPr lang="en-US" sz="1100" dirty="0"/>
-                    </a:p>
-                  </a:txBody>
-                  <a:tcPr marL="91440" marR="91440" marT="45720" marB="45720" anchor="ctr">
-                    <a:lnL w="6350" cap="flat" cmpd="sng" algn="ctr">
-                      <a:solidFill>
-                        <a:srgbClr val="D6DEE5"/>
-                      </a:solidFill>
-                      <a:prstDash val="solid"/>
-                      <a:round/>
-                      <a:headEnd type="none" w="med" len="med"/>
-                      <a:tailEnd type="none" w="med" len="med"/>
-                    </a:lnL>
-                    <a:lnR w="6350" cap="flat" cmpd="sng" algn="ctr">
-                      <a:solidFill>
-                        <a:srgbClr val="D6DEE5"/>
-                      </a:solidFill>
-                      <a:prstDash val="solid"/>
-                      <a:round/>
-                      <a:headEnd type="none" w="med" len="med"/>
-                      <a:tailEnd type="none" w="med" len="med"/>
-                    </a:lnR>
-                    <a:lnT w="6350" cap="flat" cmpd="sng" algn="ctr">
-                      <a:solidFill>
-                        <a:srgbClr val="D6DEE5"/>
-                      </a:solidFill>
-                      <a:prstDash val="solid"/>
-                      <a:round/>
-                      <a:headEnd type="none" w="med" len="med"/>
-                      <a:tailEnd type="none" w="med" len="med"/>
-                    </a:lnT>
-                    <a:lnB w="6350" cap="flat" cmpd="sng" algn="ctr">
-                      <a:solidFill>
-                        <a:srgbClr val="D6DEE5"/>
-                      </a:solidFill>
-                      <a:prstDash val="solid"/>
-                      <a:round/>
-                      <a:headEnd type="none" w="med" len="med"/>
-                      <a:tailEnd type="none" w="med" len="med"/>
-                    </a:lnB>
-                  </a:tcPr>
-                </a:tc>
-                <a:tc>
-                  <a:txBody>
-                    <a:bodyPr/>
-                    <a:lstStyle/>
-                    <a:p>
-                      <a:pPr algn="ctr" indent="0" marL="0">
-                        <a:buNone/>
-                      </a:pPr>
-                      <a:r>
-                        <a:rPr lang="en-US" sz="1100" b="1" dirty="0">
-                          <a:solidFill>
-                            <a:schemeClr val="tx1"/>
-                          </a:solidFill>
-                        </a:rPr>
-                        <a:t>76</a:t>
-                      </a:r>
-                      <a:endParaRPr lang="en-US" sz="1100" dirty="0"/>
-                    </a:p>
-                  </a:txBody>
-                  <a:tcPr marL="91440" marR="91440" marT="45720" marB="45720" anchor="ctr">
-                    <a:lnL w="6350" cap="flat" cmpd="sng" algn="ctr">
-                      <a:solidFill>
-                        <a:srgbClr val="D6DEE5"/>
-                      </a:solidFill>
-                      <a:prstDash val="solid"/>
-                      <a:round/>
-                      <a:headEnd type="none" w="med" len="med"/>
-                      <a:tailEnd type="none" w="med" len="med"/>
-                    </a:lnL>
-                    <a:lnR w="6350" cap="flat" cmpd="sng" algn="ctr">
-                      <a:solidFill>
-                        <a:srgbClr val="D6DEE5"/>
-                      </a:solidFill>
-                      <a:prstDash val="solid"/>
-                      <a:round/>
-                      <a:headEnd type="none" w="med" len="med"/>
-                      <a:tailEnd type="none" w="med" len="med"/>
-                    </a:lnR>
-                    <a:lnT w="6350" cap="flat" cmpd="sng" algn="ctr">
-                      <a:solidFill>
-                        <a:srgbClr val="D6DEE5"/>
-                      </a:solidFill>
-                      <a:prstDash val="solid"/>
-                      <a:round/>
-                      <a:headEnd type="none" w="med" len="med"/>
-                      <a:tailEnd type="none" w="med" len="med"/>
-                    </a:lnT>
-                    <a:lnB w="6350" cap="flat" cmpd="sng" algn="ctr">
-                      <a:solidFill>
-                        <a:srgbClr val="D6DEE5"/>
-                      </a:solidFill>
-                      <a:prstDash val="solid"/>
-                      <a:round/>
-                      <a:headEnd type="none" w="med" len="med"/>
-                      <a:tailEnd type="none" w="med" len="med"/>
-                    </a:lnB>
-                  </a:tcPr>
-                </a:tc>
-                <a:tc>
-                  <a:txBody>
-                    <a:bodyPr/>
-                    <a:lstStyle/>
-                    <a:p>
-                      <a:pPr algn="ctr" indent="0" marL="0">
-                        <a:buNone/>
-                      </a:pPr>
-                      <a:r>
-                        <a:rPr lang="en-US" sz="1100" dirty="0">
-                          <a:solidFill>
-                            <a:schemeClr val="tx1"/>
-                          </a:solidFill>
-                        </a:rPr>
-                        <a:t>€774</a:t>
-                      </a:r>
-                      <a:endParaRPr lang="en-US" sz="1100" dirty="0"/>
-                    </a:p>
-                  </a:txBody>
-                  <a:tcPr marL="91440" marR="91440" marT="45720" marB="45720" anchor="ctr">
-                    <a:lnL w="6350" cap="flat" cmpd="sng" algn="ctr">
-                      <a:solidFill>
-                        <a:srgbClr val="D6DEE5"/>
-                      </a:solidFill>
-                      <a:prstDash val="solid"/>
-                      <a:round/>
-                      <a:headEnd type="none" w="med" len="med"/>
-                      <a:tailEnd type="none" w="med" len="med"/>
-                    </a:lnL>
-                    <a:lnR w="6350" cap="flat" cmpd="sng" algn="ctr">
-                      <a:solidFill>
-                        <a:srgbClr val="D6DEE5"/>
-                      </a:solidFill>
-                      <a:prstDash val="solid"/>
-                      <a:round/>
-                      <a:headEnd type="none" w="med" len="med"/>
-                      <a:tailEnd type="none" w="med" len="med"/>
-                    </a:lnR>
-                    <a:lnT w="6350" cap="flat" cmpd="sng" algn="ctr">
-                      <a:solidFill>
-                        <a:srgbClr val="D6DEE5"/>
-                      </a:solidFill>
-                      <a:prstDash val="solid"/>
-                      <a:round/>
-                      <a:headEnd type="none" w="med" len="med"/>
-                      <a:tailEnd type="none" w="med" len="med"/>
-                    </a:lnT>
-                    <a:lnB w="6350" cap="flat" cmpd="sng" algn="ctr">
-                      <a:solidFill>
-                        <a:srgbClr val="D6DEE5"/>
-                      </a:solidFill>
-                      <a:prstDash val="solid"/>
-                      <a:round/>
-                      <a:headEnd type="none" w="med" len="med"/>
-                      <a:tailEnd type="none" w="med" len="med"/>
-                    </a:lnB>
-                  </a:tcPr>
-                </a:tc>
-              </a:tr>
             </a:tbl>
           </a:graphicData>
         </a:graphic>
@@ -14828,8 +14458,8 @@
         </p:nvSpPr>
         <p:spPr>
           <a:xfrm>
-            <a:off x="7498080" y="3291840"/>
-            <a:ext cx="4233672" cy="2834640"/>
+            <a:off x="7498080" y="2377440"/>
+            <a:ext cx="4233672" cy="3291840"/>
           </a:xfrm>
           <a:prstGeom prst="rect">
             <a:avLst/>

--- a/operation_uptime/Operation_Uptime_Deck.pptx
+++ b/operation_uptime/Operation_Uptime_Deck.pptx
@@ -114,30 +114,30 @@
   <p:extLst>
     <p:ext uri="{521415D9-36F7-43E2-AB2F-B90AF26B5E84}">
       <p14:sectionLst xmlns:p14="http://schemas.microsoft.com/office/powerpoint/2010/main">
-        <p14:section name="Summary" id="{eb02dada-b911-1ff0-dc16-f427edafb414}">
+        <p14:section name="Summary" id="{0998aca1-4dac-cff6-32c5-15b63094eb61}">
           <p14:sldIdLst>
             <p14:sldId id="256"/>
           </p14:sldIdLst>
         </p14:section>
-        <p14:section name="Part 1 Funnel" id="{913a2bc7-2828-f388-da77-4e2345fcd06b}">
+        <p14:section name="Part 1 Funnel" id="{c695d7fc-de8a-33fd-3ff1-d60996bf1a7f}">
           <p14:sldIdLst>
             <p14:sldId id="257"/>
             <p14:sldId id="258"/>
           </p14:sldIdLst>
         </p14:section>
-        <p14:section name="Part 2 Channels &amp; budget" id="{f4a86167-7bbd-4b65-4294-627187c83646}">
+        <p14:section name="Part 2 Channels &amp; budget" id="{07c2f6a0-4e86-45a7-661e-60b8cfdfc42d}">
           <p14:sldIdLst>
             <p14:sldId id="259"/>
             <p14:sldId id="260"/>
             <p14:sldId id="261"/>
           </p14:sldIdLst>
         </p14:section>
-        <p14:section name="Part 3 New sources" id="{f1035cb5-55eb-9169-b1cc-8ea76e1ddf1d}">
+        <p14:section name="Part 3 New sources" id="{20f604ac-afa6-484c-24a4-720bf32dbb7a}">
           <p14:sldIdLst>
             <p14:sldId id="262"/>
           </p14:sldIdLst>
         </p14:section>
-        <p14:section name="Part 4 Run it" id="{62daabf8-4e46-0b80-aaa1-eb58439c6957}">
+        <p14:section name="Part 4 Run it" id="{3a89b1d8-151f-1abe-2a65-ad443650bf5a}">
           <p14:sldIdLst>
             <p14:sldId id="263"/>
           </p14:sldIdLst>
@@ -259,7 +259,7 @@
                     <c:v>Cost per app ×1.3</c:v>
                   </c:pt>
                   <c:pt idx="5">
-                    <c:v>Capacity ×0.7</c:v>
+                    <c:v>Capacity ×0.7 (given)</c:v>
                   </c:pt>
                 </c:lvl>
               </c:multiLvlStrCache>
@@ -8831,11 +8831,11 @@
         <p:spPr>
           <a:xfrm>
             <a:off x="457200" y="1188720"/>
-            <a:ext cx="5394960" cy="4846320"/>
+            <a:ext cx="5394960" cy="3291840"/>
           </a:xfrm>
           <a:prstGeom prst="roundRect">
             <a:avLst>
-              <a:gd name="adj" fmla="val 1509"/>
+              <a:gd name="adj" fmla="val 2222"/>
             </a:avLst>
           </a:prstGeom>
           <a:solidFill>
@@ -8858,7 +8858,7 @@
         <p:spPr>
           <a:xfrm>
             <a:off x="640080" y="1325880"/>
-            <a:ext cx="5029200" cy="4572000"/>
+            <a:ext cx="5029200" cy="3063240"/>
           </a:xfrm>
           <a:prstGeom prst="rect">
             <a:avLst/>
@@ -8984,8 +8984,8 @@
         </p:nvSpPr>
         <p:spPr>
           <a:xfrm>
-            <a:off x="6126480" y="4572000"/>
-            <a:ext cx="5605272" cy="1463040"/>
+            <a:off x="6126480" y="4526280"/>
+            <a:ext cx="5605272" cy="1737360"/>
           </a:xfrm>
           <a:prstGeom prst="rect">
             <a:avLst/>
@@ -9001,7 +9001,7 @@
               <a:buNone/>
             </a:pPr>
             <a:r>
-              <a:rPr lang="en-US" sz="1250" b="1" dirty="0">
+              <a:rPr lang="en-US" sz="1200" b="1" dirty="0">
                 <a:solidFill>
                   <a:schemeClr val="accent3"/>
                 </a:solidFill>
@@ -9012,14 +9012,14 @@
               <a:buNone/>
             </a:pPr>
             <a:r>
-              <a:rPr lang="en-US" sz="1250" dirty="0">
+              <a:rPr lang="en-US" sz="1200" dirty="0">
                 <a:solidFill>
                   <a:schemeClr val="tx1"/>
                 </a:solidFill>
               </a:rPr>
-              <a:t>30% worse means 440 qualified applicants for 314 slots, so only ~71 can be hired. Spending more doesn't help. A weaker share qualified or dearer clicks only cost money (+43% / +30% media), not hires.</a:t>
+              <a:t>30% worse means 440 qualified applicants for 314 slots, so only ~71 can be hired; spending more doesn't help. Acceptance ties, but fast offers protect it; the pass rate depends on the plant's own test and is only known after interviews (week-2 check). A weaker share qualified or dearer clicks only cost money (+43% / +30% media), not hires.</a:t>
             </a:r>
-            <a:endParaRPr lang="en-US" sz="1250" dirty="0"/>
+            <a:endParaRPr lang="en-US" sz="1200" dirty="0"/>
           </a:p>
         </p:txBody>
       </p:sp>
@@ -15641,7 +15641,7 @@
                   <a:schemeClr val="tx1"/>
                 </a:solidFill>
               </a:rPr>
-              <a:t>every employer holds consenting past applicants that nobody re-markets. Here 211 records cost ~€14 per hire and fill week-1 slots. Joveo could add them as one more tracked source in any market, with no local staff.</a:t>
+              <a:t>Every employer holds consenting past applicants that nobody re-markets. Here 211 records cost ~€14 per hire and fill week-1 slots. Joveo could add them as one more tracked source in any market, with no local staff.</a:t>
             </a:r>
             <a:endParaRPr lang="en-US" sz="1200" dirty="0"/>
           </a:p>

--- a/operation_uptime/Operation_Uptime_Deck.pptx
+++ b/operation_uptime/Operation_Uptime_Deck.pptx
@@ -114,30 +114,30 @@
   <p:extLst>
     <p:ext uri="{521415D9-36F7-43E2-AB2F-B90AF26B5E84}">
       <p14:sectionLst xmlns:p14="http://schemas.microsoft.com/office/powerpoint/2010/main">
-        <p14:section name="Summary" id="{0998aca1-4dac-cff6-32c5-15b63094eb61}">
+        <p14:section name="Summary" id="{b2534f28-1be0-04c9-e730-bc8cde4eff0b}">
           <p14:sldIdLst>
             <p14:sldId id="256"/>
           </p14:sldIdLst>
         </p14:section>
-        <p14:section name="Part 1 Funnel" id="{c695d7fc-de8a-33fd-3ff1-d60996bf1a7f}">
+        <p14:section name="Part 1 Funnel" id="{a5bf262f-2bcf-1ed7-14e6-98295b0d4adc}">
           <p14:sldIdLst>
             <p14:sldId id="257"/>
             <p14:sldId id="258"/>
           </p14:sldIdLst>
         </p14:section>
-        <p14:section name="Part 2 Channels &amp; budget" id="{07c2f6a0-4e86-45a7-661e-60b8cfdfc42d}">
+        <p14:section name="Part 2 Channels &amp; budget" id="{2c189f27-23d9-607a-56ef-22da50f12f00}">
           <p14:sldIdLst>
             <p14:sldId id="259"/>
             <p14:sldId id="260"/>
             <p14:sldId id="261"/>
           </p14:sldIdLst>
         </p14:section>
-        <p14:section name="Part 3 New sources" id="{20f604ac-afa6-484c-24a4-720bf32dbb7a}">
+        <p14:section name="Part 3 New sources" id="{67f979f0-ae60-e0e3-9b44-0ab93fa5f6e6}">
           <p14:sldIdLst>
             <p14:sldId id="262"/>
           </p14:sldIdLst>
         </p14:section>
-        <p14:section name="Part 4 Run it" id="{3a89b1d8-151f-1abe-2a65-ad443650bf5a}">
+        <p14:section name="Part 4 Run it" id="{6a145c07-1f8e-0405-e288-af0027a83bd0}">
           <p14:sldIdLst>
             <p14:sldId id="263"/>
           </p14:sldIdLst>
@@ -689,22 +689,22 @@
                 <c:formatCode>General</c:formatCode>
                 <c:ptCount val="9"/>
                 <c:pt idx="0">
-                  <c:v>6858</c:v>
+                  <c:v>19436</c:v>
                 </c:pt>
                 <c:pt idx="1">
-                  <c:v>11006</c:v>
+                  <c:v>10836</c:v>
                 </c:pt>
                 <c:pt idx="2">
-                  <c:v>13646</c:v>
+                  <c:v>13809</c:v>
                 </c:pt>
                 <c:pt idx="3">
-                  <c:v>13639</c:v>
+                  <c:v>14175</c:v>
                 </c:pt>
                 <c:pt idx="4">
-                  <c:v>14018</c:v>
+                  <c:v>14175</c:v>
                 </c:pt>
                 <c:pt idx="5">
-                  <c:v>13247</c:v>
+                  <c:v>1863</c:v>
                 </c:pt>
                 <c:pt idx="6">
                   <c:v>0</c:v>
@@ -936,22 +936,22 @@
                   <c:v>0</c:v>
                 </c:pt>
                 <c:pt idx="3">
-                  <c:v>888</c:v>
+                  <c:v>2566</c:v>
                 </c:pt>
                 <c:pt idx="4">
-                  <c:v>1559</c:v>
+                  <c:v>1728</c:v>
                 </c:pt>
                 <c:pt idx="5">
-                  <c:v>1983</c:v>
+                  <c:v>1992</c:v>
                 </c:pt>
                 <c:pt idx="6">
-                  <c:v>2032</c:v>
+                  <c:v>2087</c:v>
                 </c:pt>
                 <c:pt idx="7">
-                  <c:v>2082</c:v>
+                  <c:v>2092</c:v>
                 </c:pt>
                 <c:pt idx="8">
-                  <c:v>2434</c:v>
+                  <c:v>513</c:v>
                 </c:pt>
               </c:numCache>
             </c:numRef>
@@ -1169,7 +1169,7 @@
               <c:strCache>
                 <c:ptCount val="1"/>
                 <c:pt idx="0">
-                  <c:v>Recommended (€117.5k)</c:v>
+                  <c:v>Recommended (€120k)</c:v>
                 </c:pt>
               </c:strCache>
             </c:strRef>
@@ -1258,7 +1258,7 @@
               <c:strCache>
                 <c:ptCount val="1"/>
                 <c:pt idx="0">
-                  <c:v>30% less (€82.25k)</c:v>
+                  <c:v>30% less (€84k)</c:v>
                 </c:pt>
               </c:strCache>
             </c:strRef>
@@ -1326,13 +1326,13 @@
                   <c:v>20.6</c:v>
                 </c:pt>
                 <c:pt idx="1">
-                  <c:v>44.7</c:v>
+                  <c:v>44.4</c:v>
                 </c:pt>
                 <c:pt idx="2">
                   <c:v>14.5</c:v>
                 </c:pt>
                 <c:pt idx="3">
-                  <c:v>6.8</c:v>
+                  <c:v>7.5</c:v>
                 </c:pt>
               </c:numCache>
             </c:numRef>
@@ -3158,7 +3158,7 @@
                 <a:ea typeface="Cambria" pitchFamily="34" charset="-122"/>
                 <a:cs typeface="Cambria" pitchFamily="34" charset="-120"/>
               </a:rPr>
-              <a:t>€117.5k signs 100 maintenance hires by 31 Dec, if the client can assess 55 a week</a:t>
+              <a:t>€120k signs 100 maintenance hires by 31 Dec, if the client can assess 55 a week</a:t>
             </a:r>
             <a:endParaRPr lang="en-US" sz="2200" dirty="0"/>
           </a:p>
@@ -3224,7 +3224,7 @@
                 <a:ea typeface="Cambria" pitchFamily="34" charset="-122"/>
                 <a:cs typeface="Cambria" pitchFamily="34" charset="-120"/>
               </a:rPr>
-              <a:t>€117.5k</a:t>
+              <a:t>€120k</a:t>
             </a:r>
             <a:endParaRPr lang="en-US" sz="2000" dirty="0"/>
           </a:p>
@@ -3260,7 +3260,7 @@
                   <a:schemeClr val="tx2"/>
                 </a:solidFill>
               </a:rPr>
-              <a:t>budget: €99.8k plan + €17.7k reserve, released only on results</a:t>
+              <a:t>budget: €101.7k plan + €18.3k reserve, released only on results</a:t>
             </a:r>
             <a:endParaRPr lang="en-US" sz="950" dirty="0"/>
           </a:p>
@@ -3326,7 +3326,7 @@
                 <a:ea typeface="Cambria" pitchFamily="34" charset="-122"/>
                 <a:cs typeface="Cambria" pitchFamily="34" charset="-120"/>
               </a:rPr>
-              <a:t>€998</a:t>
+              <a:t>€1,017</a:t>
             </a:r>
             <a:endParaRPr lang="en-US" sz="2000" dirty="0"/>
           </a:p>
@@ -3362,7 +3362,7 @@
                   <a:schemeClr val="tx2"/>
                 </a:solidFill>
               </a:rPr>
-              <a:t>media cost per hire (€1,175 if the reserve is spent)</a:t>
+              <a:t>media cost per hire (€1,200 if the reserve is spent)</a:t>
             </a:r>
             <a:endParaRPr lang="en-US" sz="950" dirty="0"/>
           </a:p>
@@ -3521,7 +3521,7 @@
                   <a:schemeClr val="tx1"/>
                 </a:solidFill>
               </a:rPr>
-              <a:t>€750 test in every paid channel in weeks 1–2, then buy hires cheapest first.</a:t>
+              <a:t>€750 test in each pay-per-click channel in weeks 1–2, then buy hires cheapest first.</a:t>
             </a:r>
             <a:endParaRPr lang="en-US" sz="1200" dirty="0"/>
           </a:p>
@@ -3574,7 +3574,7 @@
                   <a:schemeClr val="tx1"/>
                 </a:solidFill>
               </a:rPr>
-              <a:t>How sure: 100 if funnel rates hold; pass rate 10% worse → ~92; 30% less budget → ~87.</a:t>
+              <a:t>How sure: 100 if funnel rates hold, with no slack (98% of slots used); pass rate 10% worse → ~92; 30% less budget → ~87.</a:t>
             </a:r>
             <a:endParaRPr lang="en-US" sz="1200" dirty="0"/>
           </a:p>
@@ -3985,7 +3985,7 @@
                             <a:schemeClr val="tx1"/>
                           </a:solidFill>
                         </a:rPr>
-                        <a:t>€38.0k</a:t>
+                        <a:t>€38.9k</a:t>
                       </a:r>
                       <a:endParaRPr lang="en-US" sz="1100" dirty="0"/>
                     </a:p>
@@ -4043,7 +4043,7 @@
                             <a:schemeClr val="tx1"/>
                           </a:solidFill>
                         </a:rPr>
-                        <a:t>€1,266</a:t>
+                        <a:t>€1,298</a:t>
                       </a:r>
                       <a:endParaRPr lang="en-US" sz="1100" dirty="0"/>
                     </a:p>
@@ -4219,7 +4219,7 @@
                             <a:schemeClr val="tx1"/>
                           </a:solidFill>
                         </a:rPr>
-                        <a:t>€28.9k</a:t>
+                        <a:t>€29.9k</a:t>
                       </a:r>
                       <a:endParaRPr lang="en-US" sz="1100" dirty="0"/>
                     </a:p>
@@ -4277,7 +4277,7 @@
                             <a:schemeClr val="tx1"/>
                           </a:solidFill>
                         </a:rPr>
-                        <a:t>€643</a:t>
+                        <a:t>€663</a:t>
                       </a:r>
                       <a:endParaRPr lang="en-US" sz="1100" dirty="0"/>
                     </a:p>
@@ -4921,7 +4921,7 @@
                             <a:schemeClr val="tx1"/>
                           </a:solidFill>
                         </a:rPr>
-                        <a:t>€99.8k</a:t>
+                        <a:t>€101.7k</a:t>
                       </a:r>
                       <a:endParaRPr lang="en-US" sz="1100" dirty="0"/>
                     </a:p>
@@ -4979,7 +4979,7 @@
                             <a:schemeClr val="tx1"/>
                           </a:solidFill>
                         </a:rPr>
-                        <a:t>€998</a:t>
+                        <a:t>€1,017</a:t>
                       </a:r>
                       <a:endParaRPr lang="en-US" sz="1100" dirty="0"/>
                     </a:p>
@@ -5193,7 +5193,7 @@
                   <a:schemeClr val="tx1"/>
                 </a:solidFill>
               </a:rPr>
-              <a:t>construction-electrician route needs your OK by 23 Oct; without it €127.5k.</a:t>
+              <a:t>construction-electrician route needs your OK by 23 Oct; without it €130k.</a:t>
             </a:r>
             <a:endParaRPr lang="en-US" sz="1100" dirty="0"/>
           </a:p>
@@ -5423,7 +5423,7 @@
                   <a:schemeClr val="tx1"/>
                 </a:solidFill>
               </a:rPr>
-              <a:t>Approve €117.5k</a:t>
+              <a:t>Approve €120k</a:t>
             </a:r>
             <a:endParaRPr lang="en-US" sz="1100" dirty="0"/>
           </a:p>
@@ -8632,7 +8632,7 @@
                   <a:schemeClr val="tx1"/>
                 </a:solidFill>
               </a:rPr>
-              <a:t>308 qualified applicants in the plan (from 1,619 applications) against 314 slots: 55 a week × 40 assessment days ÷ 7.</a:t>
+              <a:t>308 qualified applicants in the plan (from 1,490 applications) against 314 slots: 55 a week × 40 assessment days ÷ 7.</a:t>
             </a:r>
             <a:endParaRPr lang="en-US" sz="1200" dirty="0"/>
           </a:p>
@@ -8666,7 +8666,7 @@
                   <a:schemeClr val="tx2"/>
                 </a:solidFill>
               </a:rPr>
-              <a:t>Why 308, not 311: referrals and past applicants convert better than the table's standard rates, so the plan needs slightly fewer.</a:t>
+              <a:t>Why 308, not 311: referrals and past applicants convert better than the table's standard rates, so the plan needs slightly fewer. Applications: 1,490, not 1,260, because the plan's channels average 21% qualified (social ads lower), below the ~25% baseline.</a:t>
             </a:r>
             <a:endParaRPr lang="en-US" sz="1200" dirty="0"/>
           </a:p>
@@ -8918,7 +8918,7 @@
                   <a:schemeClr val="tx1"/>
                 </a:solidFill>
               </a:rPr>
-              <a:t>The biggest scarce block: 30 hires, 38% of the money.</a:t>
+              <a:t>Dearest last hire: €2,272, the highest of the four roles (Funnel column H).</a:t>
             </a:r>
             <a:endParaRPr lang="en-US" sz="1300" dirty="0"/>
           </a:p>
@@ -8954,7 +8954,7 @@
                   <a:schemeClr val="tx1"/>
                 </a:solidFill>
               </a:rPr>
-              <a:t>Supervisors cost more per hire but are only 10, with internal promotion as a fallback.</a:t>
+              <a:t>Automation has the tighter pool (22% of reachable people vs 12%), but needs only 15 and costs less per hire, so it is watched weekly.</a:t>
             </a:r>
             <a:endParaRPr lang="en-US" sz="1300" dirty="0"/>
           </a:p>
@@ -9196,10 +9196,11 @@
             <a:tbl>
               <a:tblPr/>
               <a:tblGrid>
-                <a:gridCol w="1828800"/>
-                <a:gridCol w="4023360"/>
-                <a:gridCol w="1097280"/>
-                <a:gridCol w="914400"/>
+                <a:gridCol w="1737360"/>
+                <a:gridCol w="822960"/>
+                <a:gridCol w="3383280"/>
+                <a:gridCol w="1051560"/>
+                <a:gridCol w="868680"/>
               </a:tblGrid>
               <a:tr h="384048">
                 <a:tc>
@@ -9217,6 +9218,67 @@
                           </a:solidFill>
                         </a:rPr>
                         <a:t>Channel</a:t>
+                      </a:r>
+                      <a:endParaRPr lang="en-US" sz="1100" dirty="0"/>
+                    </a:p>
+                  </a:txBody>
+                  <a:tcPr marL="91440" marR="91440" marT="45720" marB="45720" anchor="ctr">
+                    <a:lnL w="6350" cap="flat" cmpd="sng" algn="ctr">
+                      <a:solidFill>
+                        <a:srgbClr val="D6DEE5"/>
+                      </a:solidFill>
+                      <a:prstDash val="solid"/>
+                      <a:round/>
+                      <a:headEnd type="none" w="med" len="med"/>
+                      <a:tailEnd type="none" w="med" len="med"/>
+                    </a:lnL>
+                    <a:lnR w="6350" cap="flat" cmpd="sng" algn="ctr">
+                      <a:solidFill>
+                        <a:srgbClr val="D6DEE5"/>
+                      </a:solidFill>
+                      <a:prstDash val="solid"/>
+                      <a:round/>
+                      <a:headEnd type="none" w="med" len="med"/>
+                      <a:tailEnd type="none" w="med" len="med"/>
+                    </a:lnR>
+                    <a:lnT w="6350" cap="flat" cmpd="sng" algn="ctr">
+                      <a:solidFill>
+                        <a:srgbClr val="D6DEE5"/>
+                      </a:solidFill>
+                      <a:prstDash val="solid"/>
+                      <a:round/>
+                      <a:headEnd type="none" w="med" len="med"/>
+                      <a:tailEnd type="none" w="med" len="med"/>
+                    </a:lnT>
+                    <a:lnB w="6350" cap="flat" cmpd="sng" algn="ctr">
+                      <a:solidFill>
+                        <a:srgbClr val="D6DEE5"/>
+                      </a:solidFill>
+                      <a:prstDash val="solid"/>
+                      <a:round/>
+                      <a:headEnd type="none" w="med" len="med"/>
+                      <a:tailEnd type="none" w="med" len="med"/>
+                    </a:lnB>
+                    <a:solidFill>
+                      <a:schemeClr val="tx1"/>
+                    </a:solidFill>
+                  </a:tcPr>
+                </a:tc>
+                <a:tc>
+                  <a:txBody>
+                    <a:bodyPr/>
+                    <a:lstStyle/>
+                    <a:p>
+                      <a:pPr algn="ctr" indent="0" marL="0">
+                        <a:buNone/>
+                      </a:pPr>
+                      <a:r>
+                        <a:rPr lang="en-US" sz="1100" b="1" dirty="0">
+                          <a:solidFill>
+                            <a:schemeClr val="bg1"/>
+                          </a:solidFill>
+                        </a:rPr>
+                        <a:t>Roles</a:t>
                       </a:r>
                       <a:endParaRPr lang="en-US" sz="1100" dirty="0"/>
                     </a:p>
@@ -9511,6 +9573,64 @@
                     <a:bodyPr/>
                     <a:lstStyle/>
                     <a:p>
+                      <a:pPr algn="ctr" indent="0" marL="0">
+                        <a:buNone/>
+                      </a:pPr>
+                      <a:r>
+                        <a:rPr lang="en-US" sz="1100" dirty="0">
+                          <a:solidFill>
+                            <a:schemeClr val="tx1"/>
+                          </a:solidFill>
+                        </a:rPr>
+                        <a:t>E M A S</a:t>
+                      </a:r>
+                      <a:endParaRPr lang="en-US" sz="1100" dirty="0"/>
+                    </a:p>
+                  </a:txBody>
+                  <a:tcPr marL="91440" marR="91440" marT="45720" marB="45720" anchor="ctr">
+                    <a:lnL w="6350" cap="flat" cmpd="sng" algn="ctr">
+                      <a:solidFill>
+                        <a:srgbClr val="D6DEE5"/>
+                      </a:solidFill>
+                      <a:prstDash val="solid"/>
+                      <a:round/>
+                      <a:headEnd type="none" w="med" len="med"/>
+                      <a:tailEnd type="none" w="med" len="med"/>
+                    </a:lnL>
+                    <a:lnR w="6350" cap="flat" cmpd="sng" algn="ctr">
+                      <a:solidFill>
+                        <a:srgbClr val="D6DEE5"/>
+                      </a:solidFill>
+                      <a:prstDash val="solid"/>
+                      <a:round/>
+                      <a:headEnd type="none" w="med" len="med"/>
+                      <a:tailEnd type="none" w="med" len="med"/>
+                    </a:lnR>
+                    <a:lnT w="6350" cap="flat" cmpd="sng" algn="ctr">
+                      <a:solidFill>
+                        <a:srgbClr val="D6DEE5"/>
+                      </a:solidFill>
+                      <a:prstDash val="solid"/>
+                      <a:round/>
+                      <a:headEnd type="none" w="med" len="med"/>
+                      <a:tailEnd type="none" w="med" len="med"/>
+                    </a:lnT>
+                    <a:lnB w="6350" cap="flat" cmpd="sng" algn="ctr">
+                      <a:solidFill>
+                        <a:srgbClr val="D6DEE5"/>
+                      </a:solidFill>
+                      <a:prstDash val="solid"/>
+                      <a:round/>
+                      <a:headEnd type="none" w="med" len="med"/>
+                      <a:tailEnd type="none" w="med" len="med"/>
+                    </a:lnB>
+                  </a:tcPr>
+                </a:tc>
+                <a:tc>
+                  <a:txBody>
+                    <a:bodyPr/>
+                    <a:lstStyle/>
+                    <a:p>
                       <a:pPr indent="0" marL="0">
                         <a:buNone/>
                       </a:pPr>
@@ -9745,6 +9865,64 @@
                     <a:bodyPr/>
                     <a:lstStyle/>
                     <a:p>
+                      <a:pPr algn="ctr" indent="0" marL="0">
+                        <a:buNone/>
+                      </a:pPr>
+                      <a:r>
+                        <a:rPr lang="en-US" sz="1100" dirty="0">
+                          <a:solidFill>
+                            <a:schemeClr val="tx1"/>
+                          </a:solidFill>
+                        </a:rPr>
+                        <a:t>E M A S</a:t>
+                      </a:r>
+                      <a:endParaRPr lang="en-US" sz="1100" dirty="0"/>
+                    </a:p>
+                  </a:txBody>
+                  <a:tcPr marL="91440" marR="91440" marT="45720" marB="45720" anchor="ctr">
+                    <a:lnL w="6350" cap="flat" cmpd="sng" algn="ctr">
+                      <a:solidFill>
+                        <a:srgbClr val="D6DEE5"/>
+                      </a:solidFill>
+                      <a:prstDash val="solid"/>
+                      <a:round/>
+                      <a:headEnd type="none" w="med" len="med"/>
+                      <a:tailEnd type="none" w="med" len="med"/>
+                    </a:lnL>
+                    <a:lnR w="6350" cap="flat" cmpd="sng" algn="ctr">
+                      <a:solidFill>
+                        <a:srgbClr val="D6DEE5"/>
+                      </a:solidFill>
+                      <a:prstDash val="solid"/>
+                      <a:round/>
+                      <a:headEnd type="none" w="med" len="med"/>
+                      <a:tailEnd type="none" w="med" len="med"/>
+                    </a:lnR>
+                    <a:lnT w="6350" cap="flat" cmpd="sng" algn="ctr">
+                      <a:solidFill>
+                        <a:srgbClr val="D6DEE5"/>
+                      </a:solidFill>
+                      <a:prstDash val="solid"/>
+                      <a:round/>
+                      <a:headEnd type="none" w="med" len="med"/>
+                      <a:tailEnd type="none" w="med" len="med"/>
+                    </a:lnT>
+                    <a:lnB w="6350" cap="flat" cmpd="sng" algn="ctr">
+                      <a:solidFill>
+                        <a:srgbClr val="D6DEE5"/>
+                      </a:solidFill>
+                      <a:prstDash val="solid"/>
+                      <a:round/>
+                      <a:headEnd type="none" w="med" len="med"/>
+                      <a:tailEnd type="none" w="med" len="med"/>
+                    </a:lnB>
+                  </a:tcPr>
+                </a:tc>
+                <a:tc>
+                  <a:txBody>
+                    <a:bodyPr/>
+                    <a:lstStyle/>
+                    <a:p>
                       <a:pPr indent="0" marL="0">
                         <a:buNone/>
                       </a:pPr>
@@ -9979,6 +10157,64 @@
                     <a:bodyPr/>
                     <a:lstStyle/>
                     <a:p>
+                      <a:pPr algn="ctr" indent="0" marL="0">
+                        <a:buNone/>
+                      </a:pPr>
+                      <a:r>
+                        <a:rPr lang="en-US" sz="1100" dirty="0">
+                          <a:solidFill>
+                            <a:schemeClr val="tx1"/>
+                          </a:solidFill>
+                        </a:rPr>
+                        <a:t>M</a:t>
+                      </a:r>
+                      <a:endParaRPr lang="en-US" sz="1100" dirty="0"/>
+                    </a:p>
+                  </a:txBody>
+                  <a:tcPr marL="91440" marR="91440" marT="45720" marB="45720" anchor="ctr">
+                    <a:lnL w="6350" cap="flat" cmpd="sng" algn="ctr">
+                      <a:solidFill>
+                        <a:srgbClr val="D6DEE5"/>
+                      </a:solidFill>
+                      <a:prstDash val="solid"/>
+                      <a:round/>
+                      <a:headEnd type="none" w="med" len="med"/>
+                      <a:tailEnd type="none" w="med" len="med"/>
+                    </a:lnL>
+                    <a:lnR w="6350" cap="flat" cmpd="sng" algn="ctr">
+                      <a:solidFill>
+                        <a:srgbClr val="D6DEE5"/>
+                      </a:solidFill>
+                      <a:prstDash val="solid"/>
+                      <a:round/>
+                      <a:headEnd type="none" w="med" len="med"/>
+                      <a:tailEnd type="none" w="med" len="med"/>
+                    </a:lnR>
+                    <a:lnT w="6350" cap="flat" cmpd="sng" algn="ctr">
+                      <a:solidFill>
+                        <a:srgbClr val="D6DEE5"/>
+                      </a:solidFill>
+                      <a:prstDash val="solid"/>
+                      <a:round/>
+                      <a:headEnd type="none" w="med" len="med"/>
+                      <a:tailEnd type="none" w="med" len="med"/>
+                    </a:lnT>
+                    <a:lnB w="6350" cap="flat" cmpd="sng" algn="ctr">
+                      <a:solidFill>
+                        <a:srgbClr val="D6DEE5"/>
+                      </a:solidFill>
+                      <a:prstDash val="solid"/>
+                      <a:round/>
+                      <a:headEnd type="none" w="med" len="med"/>
+                      <a:tailEnd type="none" w="med" len="med"/>
+                    </a:lnB>
+                  </a:tcPr>
+                </a:tc>
+                <a:tc>
+                  <a:txBody>
+                    <a:bodyPr/>
+                    <a:lstStyle/>
+                    <a:p>
                       <a:pPr indent="0" marL="0">
                         <a:buNone/>
                       </a:pPr>
@@ -10213,6 +10449,64 @@
                     <a:bodyPr/>
                     <a:lstStyle/>
                     <a:p>
+                      <a:pPr algn="ctr" indent="0" marL="0">
+                        <a:buNone/>
+                      </a:pPr>
+                      <a:r>
+                        <a:rPr lang="en-US" sz="1100" dirty="0">
+                          <a:solidFill>
+                            <a:schemeClr val="tx1"/>
+                          </a:solidFill>
+                        </a:rPr>
+                        <a:t>E M A S</a:t>
+                      </a:r>
+                      <a:endParaRPr lang="en-US" sz="1100" dirty="0"/>
+                    </a:p>
+                  </a:txBody>
+                  <a:tcPr marL="91440" marR="91440" marT="45720" marB="45720" anchor="ctr">
+                    <a:lnL w="6350" cap="flat" cmpd="sng" algn="ctr">
+                      <a:solidFill>
+                        <a:srgbClr val="D6DEE5"/>
+                      </a:solidFill>
+                      <a:prstDash val="solid"/>
+                      <a:round/>
+                      <a:headEnd type="none" w="med" len="med"/>
+                      <a:tailEnd type="none" w="med" len="med"/>
+                    </a:lnL>
+                    <a:lnR w="6350" cap="flat" cmpd="sng" algn="ctr">
+                      <a:solidFill>
+                        <a:srgbClr val="D6DEE5"/>
+                      </a:solidFill>
+                      <a:prstDash val="solid"/>
+                      <a:round/>
+                      <a:headEnd type="none" w="med" len="med"/>
+                      <a:tailEnd type="none" w="med" len="med"/>
+                    </a:lnR>
+                    <a:lnT w="6350" cap="flat" cmpd="sng" algn="ctr">
+                      <a:solidFill>
+                        <a:srgbClr val="D6DEE5"/>
+                      </a:solidFill>
+                      <a:prstDash val="solid"/>
+                      <a:round/>
+                      <a:headEnd type="none" w="med" len="med"/>
+                      <a:tailEnd type="none" w="med" len="med"/>
+                    </a:lnT>
+                    <a:lnB w="6350" cap="flat" cmpd="sng" algn="ctr">
+                      <a:solidFill>
+                        <a:srgbClr val="D6DEE5"/>
+                      </a:solidFill>
+                      <a:prstDash val="solid"/>
+                      <a:round/>
+                      <a:headEnd type="none" w="med" len="med"/>
+                      <a:tailEnd type="none" w="med" len="med"/>
+                    </a:lnB>
+                  </a:tcPr>
+                </a:tc>
+                <a:tc>
+                  <a:txBody>
+                    <a:bodyPr/>
+                    <a:lstStyle/>
+                    <a:p>
                       <a:pPr indent="0" marL="0">
                         <a:buNone/>
                       </a:pPr>
@@ -10447,6 +10741,64 @@
                     <a:bodyPr/>
                     <a:lstStyle/>
                     <a:p>
+                      <a:pPr algn="ctr" indent="0" marL="0">
+                        <a:buNone/>
+                      </a:pPr>
+                      <a:r>
+                        <a:rPr lang="en-US" sz="1100" dirty="0">
+                          <a:solidFill>
+                            <a:schemeClr val="tx1"/>
+                          </a:solidFill>
+                        </a:rPr>
+                        <a:t>E</a:t>
+                      </a:r>
+                      <a:endParaRPr lang="en-US" sz="1100" dirty="0"/>
+                    </a:p>
+                  </a:txBody>
+                  <a:tcPr marL="91440" marR="91440" marT="45720" marB="45720" anchor="ctr">
+                    <a:lnL w="6350" cap="flat" cmpd="sng" algn="ctr">
+                      <a:solidFill>
+                        <a:srgbClr val="D6DEE5"/>
+                      </a:solidFill>
+                      <a:prstDash val="solid"/>
+                      <a:round/>
+                      <a:headEnd type="none" w="med" len="med"/>
+                      <a:tailEnd type="none" w="med" len="med"/>
+                    </a:lnL>
+                    <a:lnR w="6350" cap="flat" cmpd="sng" algn="ctr">
+                      <a:solidFill>
+                        <a:srgbClr val="D6DEE5"/>
+                      </a:solidFill>
+                      <a:prstDash val="solid"/>
+                      <a:round/>
+                      <a:headEnd type="none" w="med" len="med"/>
+                      <a:tailEnd type="none" w="med" len="med"/>
+                    </a:lnR>
+                    <a:lnT w="6350" cap="flat" cmpd="sng" algn="ctr">
+                      <a:solidFill>
+                        <a:srgbClr val="D6DEE5"/>
+                      </a:solidFill>
+                      <a:prstDash val="solid"/>
+                      <a:round/>
+                      <a:headEnd type="none" w="med" len="med"/>
+                      <a:tailEnd type="none" w="med" len="med"/>
+                    </a:lnT>
+                    <a:lnB w="6350" cap="flat" cmpd="sng" algn="ctr">
+                      <a:solidFill>
+                        <a:srgbClr val="D6DEE5"/>
+                      </a:solidFill>
+                      <a:prstDash val="solid"/>
+                      <a:round/>
+                      <a:headEnd type="none" w="med" len="med"/>
+                      <a:tailEnd type="none" w="med" len="med"/>
+                    </a:lnB>
+                  </a:tcPr>
+                </a:tc>
+                <a:tc>
+                  <a:txBody>
+                    <a:bodyPr/>
+                    <a:lstStyle/>
+                    <a:p>
                       <a:pPr indent="0" marL="0">
                         <a:buNone/>
                       </a:pPr>
@@ -10681,6 +11033,64 @@
                     <a:bodyPr/>
                     <a:lstStyle/>
                     <a:p>
+                      <a:pPr algn="ctr" indent="0" marL="0">
+                        <a:buNone/>
+                      </a:pPr>
+                      <a:r>
+                        <a:rPr lang="en-US" sz="1100" dirty="0">
+                          <a:solidFill>
+                            <a:schemeClr val="tx1"/>
+                          </a:solidFill>
+                        </a:rPr>
+                        <a:t>E M</a:t>
+                      </a:r>
+                      <a:endParaRPr lang="en-US" sz="1100" dirty="0"/>
+                    </a:p>
+                  </a:txBody>
+                  <a:tcPr marL="91440" marR="91440" marT="45720" marB="45720" anchor="ctr">
+                    <a:lnL w="6350" cap="flat" cmpd="sng" algn="ctr">
+                      <a:solidFill>
+                        <a:srgbClr val="D6DEE5"/>
+                      </a:solidFill>
+                      <a:prstDash val="solid"/>
+                      <a:round/>
+                      <a:headEnd type="none" w="med" len="med"/>
+                      <a:tailEnd type="none" w="med" len="med"/>
+                    </a:lnL>
+                    <a:lnR w="6350" cap="flat" cmpd="sng" algn="ctr">
+                      <a:solidFill>
+                        <a:srgbClr val="D6DEE5"/>
+                      </a:solidFill>
+                      <a:prstDash val="solid"/>
+                      <a:round/>
+                      <a:headEnd type="none" w="med" len="med"/>
+                      <a:tailEnd type="none" w="med" len="med"/>
+                    </a:lnR>
+                    <a:lnT w="6350" cap="flat" cmpd="sng" algn="ctr">
+                      <a:solidFill>
+                        <a:srgbClr val="D6DEE5"/>
+                      </a:solidFill>
+                      <a:prstDash val="solid"/>
+                      <a:round/>
+                      <a:headEnd type="none" w="med" len="med"/>
+                      <a:tailEnd type="none" w="med" len="med"/>
+                    </a:lnT>
+                    <a:lnB w="6350" cap="flat" cmpd="sng" algn="ctr">
+                      <a:solidFill>
+                        <a:srgbClr val="D6DEE5"/>
+                      </a:solidFill>
+                      <a:prstDash val="solid"/>
+                      <a:round/>
+                      <a:headEnd type="none" w="med" len="med"/>
+                      <a:tailEnd type="none" w="med" len="med"/>
+                    </a:lnB>
+                  </a:tcPr>
+                </a:tc>
+                <a:tc>
+                  <a:txBody>
+                    <a:bodyPr/>
+                    <a:lstStyle/>
+                    <a:p>
                       <a:pPr indent="0" marL="0">
                         <a:buNone/>
                       </a:pPr>
@@ -10915,6 +11325,64 @@
                     <a:bodyPr/>
                     <a:lstStyle/>
                     <a:p>
+                      <a:pPr algn="ctr" indent="0" marL="0">
+                        <a:buNone/>
+                      </a:pPr>
+                      <a:r>
+                        <a:rPr lang="en-US" sz="1100" dirty="0">
+                          <a:solidFill>
+                            <a:schemeClr val="tx1"/>
+                          </a:solidFill>
+                        </a:rPr>
+                        <a:t>A S</a:t>
+                      </a:r>
+                      <a:endParaRPr lang="en-US" sz="1100" dirty="0"/>
+                    </a:p>
+                  </a:txBody>
+                  <a:tcPr marL="91440" marR="91440" marT="45720" marB="45720" anchor="ctr">
+                    <a:lnL w="6350" cap="flat" cmpd="sng" algn="ctr">
+                      <a:solidFill>
+                        <a:srgbClr val="D6DEE5"/>
+                      </a:solidFill>
+                      <a:prstDash val="solid"/>
+                      <a:round/>
+                      <a:headEnd type="none" w="med" len="med"/>
+                      <a:tailEnd type="none" w="med" len="med"/>
+                    </a:lnL>
+                    <a:lnR w="6350" cap="flat" cmpd="sng" algn="ctr">
+                      <a:solidFill>
+                        <a:srgbClr val="D6DEE5"/>
+                      </a:solidFill>
+                      <a:prstDash val="solid"/>
+                      <a:round/>
+                      <a:headEnd type="none" w="med" len="med"/>
+                      <a:tailEnd type="none" w="med" len="med"/>
+                    </a:lnR>
+                    <a:lnT w="6350" cap="flat" cmpd="sng" algn="ctr">
+                      <a:solidFill>
+                        <a:srgbClr val="D6DEE5"/>
+                      </a:solidFill>
+                      <a:prstDash val="solid"/>
+                      <a:round/>
+                      <a:headEnd type="none" w="med" len="med"/>
+                      <a:tailEnd type="none" w="med" len="med"/>
+                    </a:lnT>
+                    <a:lnB w="6350" cap="flat" cmpd="sng" algn="ctr">
+                      <a:solidFill>
+                        <a:srgbClr val="D6DEE5"/>
+                      </a:solidFill>
+                      <a:prstDash val="solid"/>
+                      <a:round/>
+                      <a:headEnd type="none" w="med" len="med"/>
+                      <a:tailEnd type="none" w="med" len="med"/>
+                    </a:lnB>
+                  </a:tcPr>
+                </a:tc>
+                <a:tc>
+                  <a:txBody>
+                    <a:bodyPr/>
+                    <a:lstStyle/>
+                    <a:p>
                       <a:pPr indent="0" marL="0">
                         <a:buNone/>
                       </a:pPr>
@@ -11041,6 +11509,298 @@
                           </a:solidFill>
                         </a:rPr>
                         <a:t>16.1</a:t>
+                      </a:r>
+                      <a:endParaRPr lang="en-US" sz="1100" dirty="0"/>
+                    </a:p>
+                  </a:txBody>
+                  <a:tcPr marL="91440" marR="91440" marT="45720" marB="45720" anchor="ctr">
+                    <a:lnL w="6350" cap="flat" cmpd="sng" algn="ctr">
+                      <a:solidFill>
+                        <a:srgbClr val="D6DEE5"/>
+                      </a:solidFill>
+                      <a:prstDash val="solid"/>
+                      <a:round/>
+                      <a:headEnd type="none" w="med" len="med"/>
+                      <a:tailEnd type="none" w="med" len="med"/>
+                    </a:lnL>
+                    <a:lnR w="6350" cap="flat" cmpd="sng" algn="ctr">
+                      <a:solidFill>
+                        <a:srgbClr val="D6DEE5"/>
+                      </a:solidFill>
+                      <a:prstDash val="solid"/>
+                      <a:round/>
+                      <a:headEnd type="none" w="med" len="med"/>
+                      <a:tailEnd type="none" w="med" len="med"/>
+                    </a:lnR>
+                    <a:lnT w="6350" cap="flat" cmpd="sng" algn="ctr">
+                      <a:solidFill>
+                        <a:srgbClr val="D6DEE5"/>
+                      </a:solidFill>
+                      <a:prstDash val="solid"/>
+                      <a:round/>
+                      <a:headEnd type="none" w="med" len="med"/>
+                      <a:tailEnd type="none" w="med" len="med"/>
+                    </a:lnT>
+                    <a:lnB w="6350" cap="flat" cmpd="sng" algn="ctr">
+                      <a:solidFill>
+                        <a:srgbClr val="D6DEE5"/>
+                      </a:solidFill>
+                      <a:prstDash val="solid"/>
+                      <a:round/>
+                      <a:headEnd type="none" w="med" len="med"/>
+                      <a:tailEnd type="none" w="med" len="med"/>
+                    </a:lnB>
+                  </a:tcPr>
+                </a:tc>
+              </a:tr>
+              <a:tr h="384048">
+                <a:tc>
+                  <a:txBody>
+                    <a:bodyPr/>
+                    <a:lstStyle/>
+                    <a:p>
+                      <a:pPr indent="0" marL="0">
+                        <a:buNone/>
+                      </a:pPr>
+                      <a:r>
+                        <a:rPr lang="en-US" sz="1100" b="1" dirty="0">
+                          <a:solidFill>
+                            <a:schemeClr val="tx1"/>
+                          </a:solidFill>
+                        </a:rPr>
+                        <a:t>Programmatic</a:t>
+                      </a:r>
+                      <a:endParaRPr lang="en-US" sz="1100" dirty="0"/>
+                    </a:p>
+                  </a:txBody>
+                  <a:tcPr marL="91440" marR="91440" marT="45720" marB="45720" anchor="ctr">
+                    <a:lnL w="6350" cap="flat" cmpd="sng" algn="ctr">
+                      <a:solidFill>
+                        <a:srgbClr val="D6DEE5"/>
+                      </a:solidFill>
+                      <a:prstDash val="solid"/>
+                      <a:round/>
+                      <a:headEnd type="none" w="med" len="med"/>
+                      <a:tailEnd type="none" w="med" len="med"/>
+                    </a:lnL>
+                    <a:lnR w="6350" cap="flat" cmpd="sng" algn="ctr">
+                      <a:solidFill>
+                        <a:srgbClr val="D6DEE5"/>
+                      </a:solidFill>
+                      <a:prstDash val="solid"/>
+                      <a:round/>
+                      <a:headEnd type="none" w="med" len="med"/>
+                      <a:tailEnd type="none" w="med" len="med"/>
+                    </a:lnR>
+                    <a:lnT w="6350" cap="flat" cmpd="sng" algn="ctr">
+                      <a:solidFill>
+                        <a:srgbClr val="D6DEE5"/>
+                      </a:solidFill>
+                      <a:prstDash val="solid"/>
+                      <a:round/>
+                      <a:headEnd type="none" w="med" len="med"/>
+                      <a:tailEnd type="none" w="med" len="med"/>
+                    </a:lnT>
+                    <a:lnB w="6350" cap="flat" cmpd="sng" algn="ctr">
+                      <a:solidFill>
+                        <a:srgbClr val="D6DEE5"/>
+                      </a:solidFill>
+                      <a:prstDash val="solid"/>
+                      <a:round/>
+                      <a:headEnd type="none" w="med" len="med"/>
+                      <a:tailEnd type="none" w="med" len="med"/>
+                    </a:lnB>
+                  </a:tcPr>
+                </a:tc>
+                <a:tc>
+                  <a:txBody>
+                    <a:bodyPr/>
+                    <a:lstStyle/>
+                    <a:p>
+                      <a:pPr algn="ctr" indent="0" marL="0">
+                        <a:buNone/>
+                      </a:pPr>
+                      <a:r>
+                        <a:rPr lang="en-US" sz="1100" dirty="0">
+                          <a:solidFill>
+                            <a:schemeClr val="tx1"/>
+                          </a:solidFill>
+                        </a:rPr>
+                        <a:t>E M A S</a:t>
+                      </a:r>
+                      <a:endParaRPr lang="en-US" sz="1100" dirty="0"/>
+                    </a:p>
+                  </a:txBody>
+                  <a:tcPr marL="91440" marR="91440" marT="45720" marB="45720" anchor="ctr">
+                    <a:lnL w="6350" cap="flat" cmpd="sng" algn="ctr">
+                      <a:solidFill>
+                        <a:srgbClr val="D6DEE5"/>
+                      </a:solidFill>
+                      <a:prstDash val="solid"/>
+                      <a:round/>
+                      <a:headEnd type="none" w="med" len="med"/>
+                      <a:tailEnd type="none" w="med" len="med"/>
+                    </a:lnL>
+                    <a:lnR w="6350" cap="flat" cmpd="sng" algn="ctr">
+                      <a:solidFill>
+                        <a:srgbClr val="D6DEE5"/>
+                      </a:solidFill>
+                      <a:prstDash val="solid"/>
+                      <a:round/>
+                      <a:headEnd type="none" w="med" len="med"/>
+                      <a:tailEnd type="none" w="med" len="med"/>
+                    </a:lnR>
+                    <a:lnT w="6350" cap="flat" cmpd="sng" algn="ctr">
+                      <a:solidFill>
+                        <a:srgbClr val="D6DEE5"/>
+                      </a:solidFill>
+                      <a:prstDash val="solid"/>
+                      <a:round/>
+                      <a:headEnd type="none" w="med" len="med"/>
+                      <a:tailEnd type="none" w="med" len="med"/>
+                    </a:lnT>
+                    <a:lnB w="6350" cap="flat" cmpd="sng" algn="ctr">
+                      <a:solidFill>
+                        <a:srgbClr val="D6DEE5"/>
+                      </a:solidFill>
+                      <a:prstDash val="solid"/>
+                      <a:round/>
+                      <a:headEnd type="none" w="med" len="med"/>
+                      <a:tailEnd type="none" w="med" len="med"/>
+                    </a:lnB>
+                  </a:tcPr>
+                </a:tc>
+                <a:tc>
+                  <a:txBody>
+                    <a:bodyPr/>
+                    <a:lstStyle/>
+                    <a:p>
+                      <a:pPr indent="0" marL="0">
+                        <a:buNone/>
+                      </a:pPr>
+                      <a:r>
+                        <a:rPr lang="en-US" sz="1100" dirty="0">
+                          <a:solidFill>
+                            <a:schemeClr val="tx1"/>
+                          </a:solidFill>
+                        </a:rPr>
+                        <a:t>Indeed and other boards, paid per application</a:t>
+                      </a:r>
+                      <a:endParaRPr lang="en-US" sz="1100" dirty="0"/>
+                    </a:p>
+                  </a:txBody>
+                  <a:tcPr marL="91440" marR="91440" marT="45720" marB="45720" anchor="ctr">
+                    <a:lnL w="6350" cap="flat" cmpd="sng" algn="ctr">
+                      <a:solidFill>
+                        <a:srgbClr val="D6DEE5"/>
+                      </a:solidFill>
+                      <a:prstDash val="solid"/>
+                      <a:round/>
+                      <a:headEnd type="none" w="med" len="med"/>
+                      <a:tailEnd type="none" w="med" len="med"/>
+                    </a:lnL>
+                    <a:lnR w="6350" cap="flat" cmpd="sng" algn="ctr">
+                      <a:solidFill>
+                        <a:srgbClr val="D6DEE5"/>
+                      </a:solidFill>
+                      <a:prstDash val="solid"/>
+                      <a:round/>
+                      <a:headEnd type="none" w="med" len="med"/>
+                      <a:tailEnd type="none" w="med" len="med"/>
+                    </a:lnR>
+                    <a:lnT w="6350" cap="flat" cmpd="sng" algn="ctr">
+                      <a:solidFill>
+                        <a:srgbClr val="D6DEE5"/>
+                      </a:solidFill>
+                      <a:prstDash val="solid"/>
+                      <a:round/>
+                      <a:headEnd type="none" w="med" len="med"/>
+                      <a:tailEnd type="none" w="med" len="med"/>
+                    </a:lnT>
+                    <a:lnB w="6350" cap="flat" cmpd="sng" algn="ctr">
+                      <a:solidFill>
+                        <a:srgbClr val="D6DEE5"/>
+                      </a:solidFill>
+                      <a:prstDash val="solid"/>
+                      <a:round/>
+                      <a:headEnd type="none" w="med" len="med"/>
+                      <a:tailEnd type="none" w="med" len="med"/>
+                    </a:lnB>
+                  </a:tcPr>
+                </a:tc>
+                <a:tc>
+                  <a:txBody>
+                    <a:bodyPr/>
+                    <a:lstStyle/>
+                    <a:p>
+                      <a:pPr algn="ctr" indent="0" marL="0">
+                        <a:buNone/>
+                      </a:pPr>
+                      <a:r>
+                        <a:rPr lang="en-US" sz="1100" dirty="0">
+                          <a:solidFill>
+                            <a:schemeClr val="tx1"/>
+                          </a:solidFill>
+                        </a:rPr>
+                        <a:t>€2,143</a:t>
+                      </a:r>
+                      <a:endParaRPr lang="en-US" sz="1100" dirty="0"/>
+                    </a:p>
+                  </a:txBody>
+                  <a:tcPr marL="91440" marR="91440" marT="45720" marB="45720" anchor="ctr">
+                    <a:lnL w="6350" cap="flat" cmpd="sng" algn="ctr">
+                      <a:solidFill>
+                        <a:srgbClr val="D6DEE5"/>
+                      </a:solidFill>
+                      <a:prstDash val="solid"/>
+                      <a:round/>
+                      <a:headEnd type="none" w="med" len="med"/>
+                      <a:tailEnd type="none" w="med" len="med"/>
+                    </a:lnL>
+                    <a:lnR w="6350" cap="flat" cmpd="sng" algn="ctr">
+                      <a:solidFill>
+                        <a:srgbClr val="D6DEE5"/>
+                      </a:solidFill>
+                      <a:prstDash val="solid"/>
+                      <a:round/>
+                      <a:headEnd type="none" w="med" len="med"/>
+                      <a:tailEnd type="none" w="med" len="med"/>
+                    </a:lnR>
+                    <a:lnT w="6350" cap="flat" cmpd="sng" algn="ctr">
+                      <a:solidFill>
+                        <a:srgbClr val="D6DEE5"/>
+                      </a:solidFill>
+                      <a:prstDash val="solid"/>
+                      <a:round/>
+                      <a:headEnd type="none" w="med" len="med"/>
+                      <a:tailEnd type="none" w="med" len="med"/>
+                    </a:lnT>
+                    <a:lnB w="6350" cap="flat" cmpd="sng" algn="ctr">
+                      <a:solidFill>
+                        <a:srgbClr val="D6DEE5"/>
+                      </a:solidFill>
+                      <a:prstDash val="solid"/>
+                      <a:round/>
+                      <a:headEnd type="none" w="med" len="med"/>
+                      <a:tailEnd type="none" w="med" len="med"/>
+                    </a:lnB>
+                  </a:tcPr>
+                </a:tc>
+                <a:tc>
+                  <a:txBody>
+                    <a:bodyPr/>
+                    <a:lstStyle/>
+                    <a:p>
+                      <a:pPr algn="ctr" indent="0" marL="0">
+                        <a:buNone/>
+                      </a:pPr>
+                      <a:r>
+                        <a:rPr lang="en-US" sz="1100" dirty="0">
+                          <a:solidFill>
+                            <a:schemeClr val="tx1"/>
+                          </a:solidFill>
+                        </a:rPr>
+                        <a:t>16.4</a:t>
                       </a:r>
                       <a:endParaRPr lang="en-US" sz="1100" dirty="0"/>
                     </a:p>
@@ -11149,6 +11909,64 @@
                     <a:bodyPr/>
                     <a:lstStyle/>
                     <a:p>
+                      <a:pPr algn="ctr" indent="0" marL="0">
+                        <a:buNone/>
+                      </a:pPr>
+                      <a:r>
+                        <a:rPr lang="en-US" sz="1100" dirty="0">
+                          <a:solidFill>
+                            <a:schemeClr val="tx1"/>
+                          </a:solidFill>
+                        </a:rPr>
+                        <a:t>E M</a:t>
+                      </a:r>
+                      <a:endParaRPr lang="en-US" sz="1100" dirty="0"/>
+                    </a:p>
+                  </a:txBody>
+                  <a:tcPr marL="91440" marR="91440" marT="45720" marB="45720" anchor="ctr">
+                    <a:lnL w="6350" cap="flat" cmpd="sng" algn="ctr">
+                      <a:solidFill>
+                        <a:srgbClr val="D6DEE5"/>
+                      </a:solidFill>
+                      <a:prstDash val="solid"/>
+                      <a:round/>
+                      <a:headEnd type="none" w="med" len="med"/>
+                      <a:tailEnd type="none" w="med" len="med"/>
+                    </a:lnL>
+                    <a:lnR w="6350" cap="flat" cmpd="sng" algn="ctr">
+                      <a:solidFill>
+                        <a:srgbClr val="D6DEE5"/>
+                      </a:solidFill>
+                      <a:prstDash val="solid"/>
+                      <a:round/>
+                      <a:headEnd type="none" w="med" len="med"/>
+                      <a:tailEnd type="none" w="med" len="med"/>
+                    </a:lnR>
+                    <a:lnT w="6350" cap="flat" cmpd="sng" algn="ctr">
+                      <a:solidFill>
+                        <a:srgbClr val="D6DEE5"/>
+                      </a:solidFill>
+                      <a:prstDash val="solid"/>
+                      <a:round/>
+                      <a:headEnd type="none" w="med" len="med"/>
+                      <a:tailEnd type="none" w="med" len="med"/>
+                    </a:lnT>
+                    <a:lnB w="6350" cap="flat" cmpd="sng" algn="ctr">
+                      <a:solidFill>
+                        <a:srgbClr val="D6DEE5"/>
+                      </a:solidFill>
+                      <a:prstDash val="solid"/>
+                      <a:round/>
+                      <a:headEnd type="none" w="med" len="med"/>
+                      <a:tailEnd type="none" w="med" len="med"/>
+                    </a:lnB>
+                  </a:tcPr>
+                </a:tc>
+                <a:tc>
+                  <a:txBody>
+                    <a:bodyPr/>
+                    <a:lstStyle/>
+                    <a:p>
                       <a:pPr indent="0" marL="0">
                         <a:buNone/>
                       </a:pPr>
@@ -11216,7 +12034,7 @@
                             <a:schemeClr val="tx1"/>
                           </a:solidFill>
                         </a:rPr>
-                        <a:t>€1,963</a:t>
+                        <a:t>€2,388</a:t>
                       </a:r>
                       <a:endParaRPr lang="en-US" sz="1100" dirty="0"/>
                     </a:p>
@@ -11274,241 +12092,7 @@
                             <a:schemeClr val="tx1"/>
                           </a:solidFill>
                         </a:rPr>
-                        <a:t>13.3</a:t>
-                      </a:r>
-                      <a:endParaRPr lang="en-US" sz="1100" dirty="0"/>
-                    </a:p>
-                  </a:txBody>
-                  <a:tcPr marL="91440" marR="91440" marT="45720" marB="45720" anchor="ctr">
-                    <a:lnL w="6350" cap="flat" cmpd="sng" algn="ctr">
-                      <a:solidFill>
-                        <a:srgbClr val="D6DEE5"/>
-                      </a:solidFill>
-                      <a:prstDash val="solid"/>
-                      <a:round/>
-                      <a:headEnd type="none" w="med" len="med"/>
-                      <a:tailEnd type="none" w="med" len="med"/>
-                    </a:lnL>
-                    <a:lnR w="6350" cap="flat" cmpd="sng" algn="ctr">
-                      <a:solidFill>
-                        <a:srgbClr val="D6DEE5"/>
-                      </a:solidFill>
-                      <a:prstDash val="solid"/>
-                      <a:round/>
-                      <a:headEnd type="none" w="med" len="med"/>
-                      <a:tailEnd type="none" w="med" len="med"/>
-                    </a:lnR>
-                    <a:lnT w="6350" cap="flat" cmpd="sng" algn="ctr">
-                      <a:solidFill>
-                        <a:srgbClr val="D6DEE5"/>
-                      </a:solidFill>
-                      <a:prstDash val="solid"/>
-                      <a:round/>
-                      <a:headEnd type="none" w="med" len="med"/>
-                      <a:tailEnd type="none" w="med" len="med"/>
-                    </a:lnT>
-                    <a:lnB w="6350" cap="flat" cmpd="sng" algn="ctr">
-                      <a:solidFill>
-                        <a:srgbClr val="D6DEE5"/>
-                      </a:solidFill>
-                      <a:prstDash val="solid"/>
-                      <a:round/>
-                      <a:headEnd type="none" w="med" len="med"/>
-                      <a:tailEnd type="none" w="med" len="med"/>
-                    </a:lnB>
-                  </a:tcPr>
-                </a:tc>
-              </a:tr>
-              <a:tr h="384048">
-                <a:tc>
-                  <a:txBody>
-                    <a:bodyPr/>
-                    <a:lstStyle/>
-                    <a:p>
-                      <a:pPr indent="0" marL="0">
-                        <a:buNone/>
-                      </a:pPr>
-                      <a:r>
-                        <a:rPr lang="en-US" sz="1100" b="1" dirty="0">
-                          <a:solidFill>
-                            <a:schemeClr val="tx1"/>
-                          </a:solidFill>
-                        </a:rPr>
-                        <a:t>Programmatic</a:t>
-                      </a:r>
-                      <a:endParaRPr lang="en-US" sz="1100" dirty="0"/>
-                    </a:p>
-                  </a:txBody>
-                  <a:tcPr marL="91440" marR="91440" marT="45720" marB="45720" anchor="ctr">
-                    <a:lnL w="6350" cap="flat" cmpd="sng" algn="ctr">
-                      <a:solidFill>
-                        <a:srgbClr val="D6DEE5"/>
-                      </a:solidFill>
-                      <a:prstDash val="solid"/>
-                      <a:round/>
-                      <a:headEnd type="none" w="med" len="med"/>
-                      <a:tailEnd type="none" w="med" len="med"/>
-                    </a:lnL>
-                    <a:lnR w="6350" cap="flat" cmpd="sng" algn="ctr">
-                      <a:solidFill>
-                        <a:srgbClr val="D6DEE5"/>
-                      </a:solidFill>
-                      <a:prstDash val="solid"/>
-                      <a:round/>
-                      <a:headEnd type="none" w="med" len="med"/>
-                      <a:tailEnd type="none" w="med" len="med"/>
-                    </a:lnR>
-                    <a:lnT w="6350" cap="flat" cmpd="sng" algn="ctr">
-                      <a:solidFill>
-                        <a:srgbClr val="D6DEE5"/>
-                      </a:solidFill>
-                      <a:prstDash val="solid"/>
-                      <a:round/>
-                      <a:headEnd type="none" w="med" len="med"/>
-                      <a:tailEnd type="none" w="med" len="med"/>
-                    </a:lnT>
-                    <a:lnB w="6350" cap="flat" cmpd="sng" algn="ctr">
-                      <a:solidFill>
-                        <a:srgbClr val="D6DEE5"/>
-                      </a:solidFill>
-                      <a:prstDash val="solid"/>
-                      <a:round/>
-                      <a:headEnd type="none" w="med" len="med"/>
-                      <a:tailEnd type="none" w="med" len="med"/>
-                    </a:lnB>
-                  </a:tcPr>
-                </a:tc>
-                <a:tc>
-                  <a:txBody>
-                    <a:bodyPr/>
-                    <a:lstStyle/>
-                    <a:p>
-                      <a:pPr indent="0" marL="0">
-                        <a:buNone/>
-                      </a:pPr>
-                      <a:r>
-                        <a:rPr lang="en-US" sz="1100" dirty="0">
-                          <a:solidFill>
-                            <a:schemeClr val="tx1"/>
-                          </a:solidFill>
-                        </a:rPr>
-                        <a:t>Indeed and other boards, paid per application</a:t>
-                      </a:r>
-                      <a:endParaRPr lang="en-US" sz="1100" dirty="0"/>
-                    </a:p>
-                  </a:txBody>
-                  <a:tcPr marL="91440" marR="91440" marT="45720" marB="45720" anchor="ctr">
-                    <a:lnL w="6350" cap="flat" cmpd="sng" algn="ctr">
-                      <a:solidFill>
-                        <a:srgbClr val="D6DEE5"/>
-                      </a:solidFill>
-                      <a:prstDash val="solid"/>
-                      <a:round/>
-                      <a:headEnd type="none" w="med" len="med"/>
-                      <a:tailEnd type="none" w="med" len="med"/>
-                    </a:lnL>
-                    <a:lnR w="6350" cap="flat" cmpd="sng" algn="ctr">
-                      <a:solidFill>
-                        <a:srgbClr val="D6DEE5"/>
-                      </a:solidFill>
-                      <a:prstDash val="solid"/>
-                      <a:round/>
-                      <a:headEnd type="none" w="med" len="med"/>
-                      <a:tailEnd type="none" w="med" len="med"/>
-                    </a:lnR>
-                    <a:lnT w="6350" cap="flat" cmpd="sng" algn="ctr">
-                      <a:solidFill>
-                        <a:srgbClr val="D6DEE5"/>
-                      </a:solidFill>
-                      <a:prstDash val="solid"/>
-                      <a:round/>
-                      <a:headEnd type="none" w="med" len="med"/>
-                      <a:tailEnd type="none" w="med" len="med"/>
-                    </a:lnT>
-                    <a:lnB w="6350" cap="flat" cmpd="sng" algn="ctr">
-                      <a:solidFill>
-                        <a:srgbClr val="D6DEE5"/>
-                      </a:solidFill>
-                      <a:prstDash val="solid"/>
-                      <a:round/>
-                      <a:headEnd type="none" w="med" len="med"/>
-                      <a:tailEnd type="none" w="med" len="med"/>
-                    </a:lnB>
-                  </a:tcPr>
-                </a:tc>
-                <a:tc>
-                  <a:txBody>
-                    <a:bodyPr/>
-                    <a:lstStyle/>
-                    <a:p>
-                      <a:pPr algn="ctr" indent="0" marL="0">
-                        <a:buNone/>
-                      </a:pPr>
-                      <a:r>
-                        <a:rPr lang="en-US" sz="1100" dirty="0">
-                          <a:solidFill>
-                            <a:schemeClr val="tx1"/>
-                          </a:solidFill>
-                        </a:rPr>
-                        <a:t>€2,317</a:t>
-                      </a:r>
-                      <a:endParaRPr lang="en-US" sz="1100" dirty="0"/>
-                    </a:p>
-                  </a:txBody>
-                  <a:tcPr marL="91440" marR="91440" marT="45720" marB="45720" anchor="ctr">
-                    <a:lnL w="6350" cap="flat" cmpd="sng" algn="ctr">
-                      <a:solidFill>
-                        <a:srgbClr val="D6DEE5"/>
-                      </a:solidFill>
-                      <a:prstDash val="solid"/>
-                      <a:round/>
-                      <a:headEnd type="none" w="med" len="med"/>
-                      <a:tailEnd type="none" w="med" len="med"/>
-                    </a:lnL>
-                    <a:lnR w="6350" cap="flat" cmpd="sng" algn="ctr">
-                      <a:solidFill>
-                        <a:srgbClr val="D6DEE5"/>
-                      </a:solidFill>
-                      <a:prstDash val="solid"/>
-                      <a:round/>
-                      <a:headEnd type="none" w="med" len="med"/>
-                      <a:tailEnd type="none" w="med" len="med"/>
-                    </a:lnR>
-                    <a:lnT w="6350" cap="flat" cmpd="sng" algn="ctr">
-                      <a:solidFill>
-                        <a:srgbClr val="D6DEE5"/>
-                      </a:solidFill>
-                      <a:prstDash val="solid"/>
-                      <a:round/>
-                      <a:headEnd type="none" w="med" len="med"/>
-                      <a:tailEnd type="none" w="med" len="med"/>
-                    </a:lnT>
-                    <a:lnB w="6350" cap="flat" cmpd="sng" algn="ctr">
-                      <a:solidFill>
-                        <a:srgbClr val="D6DEE5"/>
-                      </a:solidFill>
-                      <a:prstDash val="solid"/>
-                      <a:round/>
-                      <a:headEnd type="none" w="med" len="med"/>
-                      <a:tailEnd type="none" w="med" len="med"/>
-                    </a:lnB>
-                  </a:tcPr>
-                </a:tc>
-                <a:tc>
-                  <a:txBody>
-                    <a:bodyPr/>
-                    <a:lstStyle/>
-                    <a:p>
-                      <a:pPr algn="ctr" indent="0" marL="0">
-                        <a:buNone/>
-                      </a:pPr>
-                      <a:r>
-                        <a:rPr lang="en-US" sz="1100" dirty="0">
-                          <a:solidFill>
-                            <a:schemeClr val="tx1"/>
-                          </a:solidFill>
-                        </a:rPr>
-                        <a:t>3.8</a:t>
+                        <a:t>0.6</a:t>
                       </a:r>
                       <a:endParaRPr lang="en-US" sz="1100" dirty="0"/>
                     </a:p>
@@ -11569,6 +12153,64 @@
                           </a:solidFill>
                         </a:rPr>
                         <a:t>Google Search</a:t>
+                      </a:r>
+                      <a:endParaRPr lang="en-US" sz="1100" dirty="0"/>
+                    </a:p>
+                  </a:txBody>
+                  <a:tcPr marL="91440" marR="91440" marT="45720" marB="45720" anchor="ctr">
+                    <a:lnL w="6350" cap="flat" cmpd="sng" algn="ctr">
+                      <a:solidFill>
+                        <a:srgbClr val="D6DEE5"/>
+                      </a:solidFill>
+                      <a:prstDash val="solid"/>
+                      <a:round/>
+                      <a:headEnd type="none" w="med" len="med"/>
+                      <a:tailEnd type="none" w="med" len="med"/>
+                    </a:lnL>
+                    <a:lnR w="6350" cap="flat" cmpd="sng" algn="ctr">
+                      <a:solidFill>
+                        <a:srgbClr val="D6DEE5"/>
+                      </a:solidFill>
+                      <a:prstDash val="solid"/>
+                      <a:round/>
+                      <a:headEnd type="none" w="med" len="med"/>
+                      <a:tailEnd type="none" w="med" len="med"/>
+                    </a:lnR>
+                    <a:lnT w="6350" cap="flat" cmpd="sng" algn="ctr">
+                      <a:solidFill>
+                        <a:srgbClr val="D6DEE5"/>
+                      </a:solidFill>
+                      <a:prstDash val="solid"/>
+                      <a:round/>
+                      <a:headEnd type="none" w="med" len="med"/>
+                      <a:tailEnd type="none" w="med" len="med"/>
+                    </a:lnT>
+                    <a:lnB w="6350" cap="flat" cmpd="sng" algn="ctr">
+                      <a:solidFill>
+                        <a:srgbClr val="D6DEE5"/>
+                      </a:solidFill>
+                      <a:prstDash val="solid"/>
+                      <a:round/>
+                      <a:headEnd type="none" w="med" len="med"/>
+                      <a:tailEnd type="none" w="med" len="med"/>
+                    </a:lnB>
+                  </a:tcPr>
+                </a:tc>
+                <a:tc>
+                  <a:txBody>
+                    <a:bodyPr/>
+                    <a:lstStyle/>
+                    <a:p>
+                      <a:pPr algn="ctr" indent="0" marL="0">
+                        <a:buNone/>
+                      </a:pPr>
+                      <a:r>
+                        <a:rPr lang="en-US" sz="1100" dirty="0">
+                          <a:solidFill>
+                            <a:schemeClr val="tx1"/>
+                          </a:solidFill>
+                        </a:rPr>
+                        <a:t>E M A S</a:t>
                       </a:r>
                       <a:endParaRPr lang="en-US" sz="1100" dirty="0"/>
                     </a:p>
@@ -11905,7 +12547,25 @@
                   <a:schemeClr val="tx1"/>
                 </a:solidFill>
               </a:rPr>
-              <a:t>Every paid channel gets a €750 test first; the dearest (Search, most programmatic) stay at test level.</a:t>
+              <a:t>Each pay-per-click channel gets a €750 test per role first; the dearest (Search, most programmatic) stay at test level.</a:t>
+            </a:r>
+            <a:endParaRPr lang="en-US" sz="1150" dirty="0"/>
+          </a:p>
+          <a:p>
+            <a:pPr marL="342900" indent="-342900">
+              <a:spcAft>
+                <a:spcPts val="800"/>
+              </a:spcAft>
+              <a:buSzPct val="100000"/>
+              <a:buChar char="•"/>
+            </a:pPr>
+            <a:r>
+              <a:rPr lang="en-US" sz="1150" dirty="0">
+                <a:solidFill>
+                  <a:schemeClr val="tx1"/>
+                </a:solidFill>
+              </a:rPr>
+              <a:t>Roles: E electricians, M mechatronics, A automation, S supervisors.</a:t>
             </a:r>
             <a:endParaRPr lang="en-US" sz="1150" dirty="0"/>
           </a:p>
@@ -12055,7 +12715,7 @@
                 <a:ea typeface="Cambria" pitchFamily="34" charset="-122"/>
                 <a:cs typeface="Cambria" pitchFamily="34" charset="-120"/>
               </a:rPr>
-              <a:t>€99.8k planned across roles and weeks, plus a €17.7k reserve</a:t>
+              <a:t>€101.7k planned across roles and weeks, plus a €18.3k reserve</a:t>
             </a:r>
             <a:endParaRPr lang="en-US" sz="2200" dirty="0"/>
           </a:p>
@@ -12424,7 +13084,7 @@
                             <a:schemeClr val="tx1"/>
                           </a:solidFill>
                         </a:rPr>
-                        <a:t>€38.0k</a:t>
+                        <a:t>€38.9k</a:t>
                       </a:r>
                       <a:endParaRPr lang="en-US" sz="1100" dirty="0"/>
                     </a:p>
@@ -12540,7 +13200,7 @@
                             <a:schemeClr val="tx1"/>
                           </a:solidFill>
                         </a:rPr>
-                        <a:t>€1,266</a:t>
+                        <a:t>€1,298</a:t>
                       </a:r>
                       <a:endParaRPr lang="en-US" sz="1100" dirty="0"/>
                     </a:p>
@@ -12658,7 +13318,7 @@
                             <a:schemeClr val="tx1"/>
                           </a:solidFill>
                         </a:rPr>
-                        <a:t>€28.9k</a:t>
+                        <a:t>€29.9k</a:t>
                       </a:r>
                       <a:endParaRPr lang="en-US" sz="1100" dirty="0"/>
                     </a:p>
@@ -12774,7 +13434,7 @@
                             <a:schemeClr val="tx1"/>
                           </a:solidFill>
                         </a:rPr>
-                        <a:t>€643</a:t>
+                        <a:t>€663</a:t>
                       </a:r>
                       <a:endParaRPr lang="en-US" sz="1100" dirty="0"/>
                     </a:p>
@@ -13360,7 +14020,7 @@
                             <a:schemeClr val="tx1"/>
                           </a:solidFill>
                         </a:rPr>
-                        <a:t>€99.8k</a:t>
+                        <a:t>€101.7k</a:t>
                       </a:r>
                       <a:endParaRPr lang="en-US" sz="1100" dirty="0"/>
                     </a:p>
@@ -13476,7 +14136,7 @@
                             <a:schemeClr val="tx1"/>
                           </a:solidFill>
                         </a:rPr>
-                        <a:t>€998</a:t>
+                        <a:t>€1,017</a:t>
                       </a:r>
                       <a:endParaRPr lang="en-US" sz="1100" dirty="0"/>
                     </a:p>
@@ -13572,7 +14232,7 @@
                   <a:schemeClr val="tx1"/>
                 </a:solidFill>
               </a:rPr>
-              <a:t>€9.0k in weeks 1–2 (€750 per paid channel and role).</a:t>
+              <a:t>€9k in weeks 1–2: 12 tests of €750 (programmatic, LinkedIn, Meta, Search × role).</a:t>
             </a:r>
             <a:endParaRPr lang="en-US" sz="1200" dirty="0"/>
           </a:p>
@@ -13634,7 +14294,7 @@
                   <a:schemeClr val="tx1"/>
                 </a:solidFill>
               </a:rPr>
-              <a:t>€17.7k (15% + rounding), released from week 3 only on results.</a:t>
+              <a:t>€18.3k (15% + rounding), released from week 3 only on results.</a:t>
             </a:r>
             <a:endParaRPr lang="en-US" sz="1200" dirty="0"/>
           </a:p>
@@ -13701,7 +14361,7 @@
                   <a:schemeClr val="tx2"/>
                 </a:solidFill>
               </a:rPr>
-              <a:t>Weeks 1–2 carry the tests, StepStone ads and set-up; weekly spend then follows the pacing that keeps assessments within 55 a week.</a:t>
+              <a:t>Why week 1 is biggest: assessments start 22 Oct and an unused slot is lost, so week-1 applications must fill 11 days of slots (22 Oct – 1 Nov). The tests then decide where weeks 3–6 money goes. Week 6 is small: only 24 Nov is still a useful application day.</a:t>
             </a:r>
             <a:endParaRPr lang="en-US" sz="1150" dirty="0"/>
           </a:p>
@@ -13851,7 +14511,7 @@
                 <a:ea typeface="Cambria" pitchFamily="34" charset="-122"/>
                 <a:cs typeface="Cambria" pitchFamily="34" charset="-120"/>
               </a:rPr>
-              <a:t>30% less (€82.25k) signs ~87; electricians fall short first</a:t>
+              <a:t>30% less (€84k) signs ~87; electricians fall short first</a:t>
             </a:r>
             <a:endParaRPr lang="en-US" sz="2200" dirty="0"/>
           </a:p>
@@ -14100,7 +14760,7 @@
                             <a:schemeClr val="tx1"/>
                           </a:solidFill>
                         </a:rPr>
-                        <a:t>Recommended · €117.50k</a:t>
+                        <a:t>Recommended · €120k</a:t>
                       </a:r>
                       <a:endParaRPr lang="en-US" sz="1100" dirty="0"/>
                     </a:p>
@@ -14216,7 +14876,7 @@
                             <a:schemeClr val="tx1"/>
                           </a:solidFill>
                         </a:rPr>
-                        <a:t>€1,175</a:t>
+                        <a:t>€1,200</a:t>
                       </a:r>
                       <a:endParaRPr lang="en-US" sz="1100" dirty="0"/>
                     </a:p>
@@ -14276,7 +14936,7 @@
                             <a:schemeClr val="tx1"/>
                           </a:solidFill>
                         </a:rPr>
-                        <a:t>30% less · €82.25k</a:t>
+                        <a:t>30% less · €84k</a:t>
                       </a:r>
                       <a:endParaRPr lang="en-US" sz="1100" dirty="0"/>
                     </a:p>
@@ -14398,7 +15058,7 @@
                             <a:schemeClr val="tx1"/>
                           </a:solidFill>
                         </a:rPr>
-                        <a:t>€949</a:t>
+                        <a:t>€966</a:t>
                       </a:r>
                       <a:endParaRPr lang="en-US" sz="1100" dirty="0"/>
                     </a:p>
@@ -14528,7 +15188,7 @@
                   <a:schemeClr val="tx1"/>
                 </a:solidFill>
               </a:rPr>
-              <a:t>electricians 20.6 of 30, supervisors 6.8 of 10, automation 14.5 of 15, mechatronics 44.7 of 45.</a:t>
+              <a:t>electricians 20.6 of 30, supervisors 7.5 of 10, mechatronics 44.4 of 45, automation 14.5 of 15.</a:t>
             </a:r>
             <a:endParaRPr lang="en-US" sz="1200" dirty="0"/>
           </a:p>
@@ -14559,7 +15219,7 @@
                   <a:schemeClr val="tx1"/>
                 </a:solidFill>
               </a:rPr>
-              <a:t>the last €35.25k buys ~13 hires, mostly electricians, the people who keep the lines running. Keep it. If you must cut, cover supervisors by internal promotion and protect electricians.</a:t>
+              <a:t>the last €36k buys ~13 hires, mostly electricians, the people who keep the lines running. Keep it. If you must cut, the rule cuts the dearest channels, which are mostly electrician and supervisor channels: agree that up front, and cover supervisors by internal promotion.</a:t>
             </a:r>
             <a:endParaRPr lang="en-US" sz="1200" dirty="0"/>
           </a:p>
@@ -14724,7 +15384,7 @@
         <p:spPr>
           <a:xfrm>
             <a:off x="457200" y="1188720"/>
-            <a:ext cx="3630168" cy="3977640"/>
+            <a:ext cx="3630168" cy="4206240"/>
           </a:xfrm>
           <a:prstGeom prst="roundRect">
             <a:avLst>
@@ -14811,7 +15471,7 @@
         <p:spPr>
           <a:xfrm>
             <a:off x="594360" y="1691640"/>
-            <a:ext cx="3355848" cy="3383280"/>
+            <a:ext cx="3355848" cy="3611880"/>
           </a:xfrm>
           <a:prstGeom prst="rect">
             <a:avLst/>
@@ -14825,12 +15485,12 @@
           <a:p>
             <a:pPr indent="0" marL="0">
               <a:spcAft>
-                <a:spcPts val="400"/>
+                <a:spcPts val="300"/>
               </a:spcAft>
               <a:buNone/>
             </a:pPr>
             <a:r>
-              <a:rPr lang="en-US" sz="1200" b="1" dirty="0">
+              <a:rPr lang="en-US" sz="1150" b="1" dirty="0">
                 <a:solidFill>
                   <a:schemeClr val="accent6"/>
                 </a:solidFill>
@@ -14839,29 +15499,29 @@
             </a:r>
             <a:pPr indent="0" marL="0">
               <a:spcAft>
-                <a:spcPts val="400"/>
+                <a:spcPts val="300"/>
               </a:spcAft>
               <a:buNone/>
             </a:pPr>
             <a:r>
-              <a:rPr lang="en-US" sz="1200" dirty="0">
+              <a:rPr lang="en-US" sz="1150" dirty="0">
                 <a:solidFill>
                   <a:schemeClr val="tx1"/>
                 </a:solidFill>
               </a:rPr>
               <a:t>211 past runners-up (consented, last year) + staff referrals</a:t>
             </a:r>
-            <a:endParaRPr lang="en-US" sz="1200" dirty="0"/>
+            <a:endParaRPr lang="en-US" sz="1150" dirty="0"/>
           </a:p>
           <a:p>
             <a:pPr indent="0" marL="0">
               <a:spcAft>
-                <a:spcPts val="400"/>
+                <a:spcPts val="300"/>
               </a:spcAft>
               <a:buNone/>
             </a:pPr>
             <a:r>
-              <a:rPr lang="en-US" sz="1200" b="1" dirty="0">
+              <a:rPr lang="en-US" sz="1150" b="1" dirty="0">
                 <a:solidFill>
                   <a:schemeClr val="accent6"/>
                 </a:solidFill>
@@ -14870,29 +15530,29 @@
             </a:r>
             <a:pPr indent="0" marL="0">
               <a:spcAft>
-                <a:spcPts val="400"/>
+                <a:spcPts val="300"/>
               </a:spcAft>
               <a:buNone/>
             </a:pPr>
             <a:r>
-              <a:rPr lang="en-US" sz="1200" dirty="0">
+              <a:rPr lang="en-US" sz="1150" dirty="0">
                 <a:solidFill>
                   <a:schemeClr val="tx1"/>
                 </a:solidFill>
               </a:rPr>
               <a:t>Email + SMS waves on days 2, 7 and 14; €1,000 bonus per signed referral</a:t>
             </a:r>
-            <a:endParaRPr lang="en-US" sz="1200" dirty="0"/>
+            <a:endParaRPr lang="en-US" sz="1150" dirty="0"/>
           </a:p>
           <a:p>
             <a:pPr indent="0" marL="0">
               <a:spcAft>
-                <a:spcPts val="400"/>
+                <a:spcPts val="300"/>
               </a:spcAft>
               <a:buNone/>
             </a:pPr>
             <a:r>
-              <a:rPr lang="en-US" sz="1200" b="1" dirty="0">
+              <a:rPr lang="en-US" sz="1150" b="1" dirty="0">
                 <a:solidFill>
                   <a:schemeClr val="accent6"/>
                 </a:solidFill>
@@ -14901,29 +15561,29 @@
             </a:r>
             <a:pPr indent="0" marL="0">
               <a:spcAft>
-                <a:spcPts val="400"/>
+                <a:spcPts val="300"/>
               </a:spcAft>
               <a:buNone/>
             </a:pPr>
             <a:r>
-              <a:rPr lang="en-US" sz="1200" dirty="0">
+              <a:rPr lang="en-US" sz="1150" dirty="0">
                 <a:solidFill>
                   <a:schemeClr val="tx1"/>
                 </a:solidFill>
               </a:rPr>
-              <a:t>Already screened and already wanted Tesla; ~€3 per application</a:t>
+              <a:t>Already screened and already wanted Tesla; ~€2.50 per application</a:t>
             </a:r>
-            <a:endParaRPr lang="en-US" sz="1200" dirty="0"/>
+            <a:endParaRPr lang="en-US" sz="1150" dirty="0"/>
           </a:p>
           <a:p>
             <a:pPr indent="0" marL="0">
               <a:spcAft>
-                <a:spcPts val="400"/>
+                <a:spcPts val="300"/>
               </a:spcAft>
               <a:buNone/>
             </a:pPr>
             <a:r>
-              <a:rPr lang="en-US" sz="1200" b="1" dirty="0">
+              <a:rPr lang="en-US" sz="1150" b="1" dirty="0">
                 <a:solidFill>
                   <a:schemeClr val="accent6"/>
                 </a:solidFill>
@@ -14932,29 +15592,29 @@
             </a:r>
             <a:pPr indent="0" marL="0">
               <a:spcAft>
-                <a:spcPts val="400"/>
+                <a:spcPts val="300"/>
               </a:spcAft>
               <a:buNone/>
             </a:pPr>
             <a:r>
-              <a:rPr lang="en-US" sz="1200" dirty="0">
+              <a:rPr lang="en-US" sz="1150" dirty="0">
                 <a:solidFill>
                   <a:schemeClr val="tx1"/>
                 </a:solidFill>
               </a:rPr>
-              <a:t>€63 + €11.0k bonuses → 25 re-apps + 66 referrals → ~42 qualified → ~16 hires</a:t>
+              <a:t>€63 + €11k bonuses → 25 re-apps + 66 referrals → ~42 qualified → ~16 hires</a:t>
             </a:r>
-            <a:endParaRPr lang="en-US" sz="1200" dirty="0"/>
+            <a:endParaRPr lang="en-US" sz="1150" dirty="0"/>
           </a:p>
           <a:p>
             <a:pPr indent="0" marL="0">
               <a:spcAft>
-                <a:spcPts val="400"/>
+                <a:spcPts val="300"/>
               </a:spcAft>
               <a:buNone/>
             </a:pPr>
             <a:r>
-              <a:rPr lang="en-US" sz="1200" b="1" dirty="0">
+              <a:rPr lang="en-US" sz="1150" b="1" dirty="0">
                 <a:solidFill>
                   <a:schemeClr val="accent6"/>
                 </a:solidFill>
@@ -14963,29 +15623,29 @@
             </a:r>
             <a:pPr indent="0" marL="0">
               <a:spcAft>
-                <a:spcPts val="400"/>
+                <a:spcPts val="300"/>
               </a:spcAft>
               <a:buNone/>
             </a:pPr>
             <a:r>
-              <a:rPr lang="en-US" sz="1200" dirty="0">
+              <a:rPr lang="en-US" sz="1150" dirty="0">
                 <a:solidFill>
                   <a:schemeClr val="tx1"/>
                 </a:solidFill>
               </a:rPr>
-              <a:t>Wed 21 Oct – Tue 3 Nov (waves 1–3): €63. Pass: ≥10 qualified. Kill: &lt;6 → no further re-contacts; bonus stays live</a:t>
+              <a:t>Wed 21 Oct – Tue 3 Nov (waves 1–3): €63. Pass: ≥13 qualified. Kill: &lt;7 → no further re-contacts; bonus stays live</a:t>
             </a:r>
-            <a:endParaRPr lang="en-US" sz="1200" dirty="0"/>
+            <a:endParaRPr lang="en-US" sz="1150" dirty="0"/>
           </a:p>
           <a:p>
             <a:pPr indent="0" marL="0">
               <a:spcAft>
-                <a:spcPts val="400"/>
+                <a:spcPts val="300"/>
               </a:spcAft>
               <a:buNone/>
             </a:pPr>
             <a:r>
-              <a:rPr lang="en-US" sz="1200" b="1" dirty="0">
+              <a:rPr lang="en-US" sz="1150" b="1" dirty="0">
                 <a:solidFill>
                   <a:schemeClr val="accent6"/>
                 </a:solidFill>
@@ -14994,19 +15654,19 @@
             </a:r>
             <a:pPr indent="0" marL="0">
               <a:spcAft>
-                <a:spcPts val="400"/>
+                <a:spcPts val="300"/>
               </a:spcAft>
               <a:buNone/>
             </a:pPr>
             <a:r>
-              <a:rPr lang="en-US" sz="1200" dirty="0">
+              <a:rPr lang="en-US" sz="1150" dirty="0">
                 <a:solidFill>
                   <a:schemeClr val="tx1"/>
                 </a:solidFill>
               </a:rPr>
-              <a:t>Me: copy, segments, tracked links. Client: GDPR-checked export, bonus approval, one staff message</a:t>
+              <a:t>Setup 1 day (live Wed 21 Oct). Me: copy, segments, tracked links. Client: GDPR-checked export, bonus approval, one staff message</a:t>
             </a:r>
-            <a:endParaRPr lang="en-US" sz="1200" dirty="0"/>
+            <a:endParaRPr lang="en-US" sz="1150" dirty="0"/>
           </a:p>
         </p:txBody>
       </p:sp>
@@ -15019,7 +15679,7 @@
         <p:spPr>
           <a:xfrm>
             <a:off x="4279392" y="1188720"/>
-            <a:ext cx="3630168" cy="3977640"/>
+            <a:ext cx="3630168" cy="4206240"/>
           </a:xfrm>
           <a:prstGeom prst="roundRect">
             <a:avLst>
@@ -15106,7 +15766,7 @@
         <p:spPr>
           <a:xfrm>
             <a:off x="4416552" y="1691640"/>
-            <a:ext cx="3355848" cy="3383280"/>
+            <a:ext cx="3355848" cy="3611880"/>
           </a:xfrm>
           <a:prstGeom prst="rect">
             <a:avLst/>
@@ -15120,12 +15780,12 @@
           <a:p>
             <a:pPr indent="0" marL="0">
               <a:spcAft>
-                <a:spcPts val="400"/>
+                <a:spcPts val="300"/>
               </a:spcAft>
               <a:buNone/>
             </a:pPr>
             <a:r>
-              <a:rPr lang="en-US" sz="1200" b="1" dirty="0">
+              <a:rPr lang="en-US" sz="1150" b="1" dirty="0">
                 <a:solidFill>
                   <a:schemeClr val="accent6"/>
                 </a:solidFill>
@@ -15134,29 +15794,29 @@
             </a:r>
             <a:pPr indent="0" marL="0">
               <a:spcAft>
-                <a:spcPts val="400"/>
+                <a:spcPts val="300"/>
               </a:spcAft>
               <a:buNone/>
             </a:pPr>
             <a:r>
-              <a:rPr lang="en-US" sz="1200" dirty="0">
+              <a:rPr lang="en-US" sz="1150" dirty="0">
                 <a:solidFill>
                   <a:schemeClr val="tx1"/>
                 </a:solidFill>
               </a:rPr>
               <a:t>~10,000 construction electricians within 75 km</a:t>
             </a:r>
-            <a:endParaRPr lang="en-US" sz="1200" dirty="0"/>
+            <a:endParaRPr lang="en-US" sz="1150" dirty="0"/>
           </a:p>
           <a:p>
             <a:pPr indent="0" marL="0">
               <a:spcAft>
-                <a:spcPts val="400"/>
+                <a:spcPts val="300"/>
               </a:spcAft>
               <a:buNone/>
             </a:pPr>
             <a:r>
-              <a:rPr lang="en-US" sz="1200" b="1" dirty="0">
+              <a:rPr lang="en-US" sz="1150" b="1" dirty="0">
                 <a:solidFill>
                   <a:schemeClr val="accent6"/>
                 </a:solidFill>
@@ -15165,29 +15825,29 @@
             </a:r>
             <a:pPr indent="0" marL="0">
               <a:spcAft>
-                <a:spcPts val="400"/>
+                <a:spcPts val="300"/>
               </a:spcAft>
               <a:buNone/>
             </a:pPr>
             <a:r>
-              <a:rPr lang="en-US" sz="1200" dirty="0">
+              <a:rPr lang="en-US" sz="1150" dirty="0">
                 <a:solidFill>
                   <a:schemeClr val="tx1"/>
                 </a:solidFill>
               </a:rPr>
               <a:t>Social and search ads with a 6-question quiz; Tesla runs a 2–4 week bridge course</a:t>
             </a:r>
-            <a:endParaRPr lang="en-US" sz="1200" dirty="0"/>
+            <a:endParaRPr lang="en-US" sz="1150" dirty="0"/>
           </a:p>
           <a:p>
             <a:pPr indent="0" marL="0">
               <a:spcAft>
-                <a:spcPts val="400"/>
+                <a:spcPts val="300"/>
               </a:spcAft>
               <a:buNone/>
             </a:pPr>
             <a:r>
-              <a:rPr lang="en-US" sz="1200" b="1" dirty="0">
+              <a:rPr lang="en-US" sz="1150" b="1" dirty="0">
                 <a:solidFill>
                   <a:schemeClr val="accent6"/>
                 </a:solidFill>
@@ -15196,29 +15856,29 @@
             </a:r>
             <a:pPr indent="0" marL="0">
               <a:spcAft>
-                <a:spcPts val="400"/>
+                <a:spcPts val="300"/>
               </a:spcAft>
               <a:buNone/>
             </a:pPr>
             <a:r>
-              <a:rPr lang="en-US" sz="1200" dirty="0">
+              <a:rPr lang="en-US" sz="1150" dirty="0">
                 <a:solidFill>
                   <a:schemeClr val="tx1"/>
                 </a:solidFill>
               </a:rPr>
               <a:t>Certified electricians who never search for plant jobs; doubles the hardest pool</a:t>
             </a:r>
-            <a:endParaRPr lang="en-US" sz="1200" dirty="0"/>
+            <a:endParaRPr lang="en-US" sz="1150" dirty="0"/>
           </a:p>
           <a:p>
             <a:pPr indent="0" marL="0">
               <a:spcAft>
-                <a:spcPts val="400"/>
+                <a:spcPts val="300"/>
               </a:spcAft>
               <a:buNone/>
             </a:pPr>
             <a:r>
-              <a:rPr lang="en-US" sz="1200" b="1" dirty="0">
+              <a:rPr lang="en-US" sz="1150" b="1" dirty="0">
                 <a:solidFill>
                   <a:schemeClr val="accent6"/>
                 </a:solidFill>
@@ -15227,29 +15887,29 @@
             </a:r>
             <a:pPr indent="0" marL="0">
               <a:spcAft>
-                <a:spcPts val="400"/>
+                <a:spcPts val="300"/>
               </a:spcAft>
               <a:buNone/>
             </a:pPr>
             <a:r>
-              <a:rPr lang="en-US" sz="1200" dirty="0">
+              <a:rPr lang="en-US" sz="1150" dirty="0">
                 <a:solidFill>
                   <a:schemeClr val="tx1"/>
                 </a:solidFill>
               </a:rPr>
               <a:t>118 apps × €84 = €9.9k + €1.2k set-up → 30 qualified × 28% = 8.4 hires (€1,329/hire)</a:t>
             </a:r>
-            <a:endParaRPr lang="en-US" sz="1200" dirty="0"/>
+            <a:endParaRPr lang="en-US" sz="1150" dirty="0"/>
           </a:p>
           <a:p>
             <a:pPr indent="0" marL="0">
               <a:spcAft>
-                <a:spcPts val="400"/>
+                <a:spcPts val="300"/>
               </a:spcAft>
               <a:buNone/>
             </a:pPr>
             <a:r>
-              <a:rPr lang="en-US" sz="1200" b="1" dirty="0">
+              <a:rPr lang="en-US" sz="1150" b="1" dirty="0">
                 <a:solidFill>
                   <a:schemeClr val="accent6"/>
                 </a:solidFill>
@@ -15258,29 +15918,29 @@
             </a:r>
             <a:pPr indent="0" marL="0">
               <a:spcAft>
-                <a:spcPts val="400"/>
+                <a:spcPts val="300"/>
               </a:spcAft>
               <a:buNone/>
             </a:pPr>
             <a:r>
-              <a:rPr lang="en-US" sz="1200" dirty="0">
+              <a:rPr lang="en-US" sz="1150" dirty="0">
                 <a:solidFill>
                   <a:schemeClr val="tx1"/>
                 </a:solidFill>
               </a:rPr>
-              <a:t>Fri 23 Oct – Thu 5 Nov (read Mon 9 Nov): €3.9k. Pass: ≥4 qualified at ≤€500. Kill: &lt;3, &gt;€670 per qualified, or profile rejected</a:t>
+              <a:t>Fri 23 Oct – Thu 5 Nov (read Mon 9 Nov): €4.9k. Pass: ≥6 qualified at ≤€500. Kill: &lt;4, &gt;€670 per qualified, or profile rejected</a:t>
             </a:r>
-            <a:endParaRPr lang="en-US" sz="1200" dirty="0"/>
+            <a:endParaRPr lang="en-US" sz="1150" dirty="0"/>
           </a:p>
           <a:p>
             <a:pPr indent="0" marL="0">
               <a:spcAft>
-                <a:spcPts val="400"/>
+                <a:spcPts val="300"/>
               </a:spcAft>
               <a:buNone/>
             </a:pPr>
             <a:r>
-              <a:rPr lang="en-US" sz="1200" b="1" dirty="0">
+              <a:rPr lang="en-US" sz="1150" b="1" dirty="0">
                 <a:solidFill>
                   <a:schemeClr val="accent6"/>
                 </a:solidFill>
@@ -15289,19 +15949,19 @@
             </a:r>
             <a:pPr indent="0" marL="0">
               <a:spcAft>
-                <a:spcPts val="400"/>
+                <a:spcPts val="300"/>
               </a:spcAft>
               <a:buNone/>
             </a:pPr>
             <a:r>
-              <a:rPr lang="en-US" sz="1200" dirty="0">
+              <a:rPr lang="en-US" sz="1150" dirty="0">
                 <a:solidFill>
                   <a:schemeClr val="tx1"/>
                 </a:solidFill>
               </a:rPr>
-              <a:t>Me: ads, quiz, copy; live 23 Oct. Client: profile sign-off by 23 Oct, bridge plan</a:t>
+              <a:t>Setup 3 days (live Fri 23 Oct). Me: ads, quiz, German copywriter. Client: profile sign-off by 23 Oct, bridge course</a:t>
             </a:r>
-            <a:endParaRPr lang="en-US" sz="1200" dirty="0"/>
+            <a:endParaRPr lang="en-US" sz="1150" dirty="0"/>
           </a:p>
         </p:txBody>
       </p:sp>
@@ -15314,7 +15974,7 @@
         <p:spPr>
           <a:xfrm>
             <a:off x="8101584" y="1188720"/>
-            <a:ext cx="3630168" cy="3977640"/>
+            <a:ext cx="3630168" cy="4206240"/>
           </a:xfrm>
           <a:prstGeom prst="roundRect">
             <a:avLst>
@@ -15401,7 +16061,7 @@
         <p:spPr>
           <a:xfrm>
             <a:off x="8238744" y="1691640"/>
-            <a:ext cx="3355848" cy="3383280"/>
+            <a:ext cx="3355848" cy="3611880"/>
           </a:xfrm>
           <a:prstGeom prst="rect">
             <a:avLst/>
@@ -15415,12 +16075,12 @@
           <a:p>
             <a:pPr indent="0" marL="0">
               <a:spcAft>
-                <a:spcPts val="400"/>
+                <a:spcPts val="300"/>
               </a:spcAft>
               <a:buNone/>
             </a:pPr>
             <a:r>
-              <a:rPr lang="en-US" sz="1200" b="1" dirty="0">
+              <a:rPr lang="en-US" sz="1150" b="1" dirty="0">
                 <a:solidFill>
                   <a:schemeClr val="accent6"/>
                 </a:solidFill>
@@ -15429,29 +16089,29 @@
             </a:r>
             <a:pPr indent="0" marL="0">
               <a:spcAft>
-                <a:spcPts val="400"/>
+                <a:spcPts val="300"/>
               </a:spcAft>
               <a:buNone/>
             </a:pPr>
             <a:r>
-              <a:rPr lang="en-US" sz="1200" dirty="0">
+              <a:rPr lang="en-US" sz="1150" dirty="0">
                 <a:solidFill>
                   <a:schemeClr val="tx1"/>
                 </a:solidFill>
               </a:rPr>
               <a:t>Mechatronics workers in Polish border towns, 60–130 km away (EU)</a:t>
             </a:r>
-            <a:endParaRPr lang="en-US" sz="1200" dirty="0"/>
+            <a:endParaRPr lang="en-US" sz="1150" dirty="0"/>
           </a:p>
           <a:p>
             <a:pPr indent="0" marL="0">
               <a:spcAft>
-                <a:spcPts val="400"/>
+                <a:spcPts val="300"/>
               </a:spcAft>
               <a:buNone/>
             </a:pPr>
             <a:r>
-              <a:rPr lang="en-US" sz="1200" b="1" dirty="0">
+              <a:rPr lang="en-US" sz="1150" b="1" dirty="0">
                 <a:solidFill>
                   <a:schemeClr val="accent6"/>
                 </a:solidFill>
@@ -15460,29 +16120,29 @@
             </a:r>
             <a:pPr indent="0" marL="0">
               <a:spcAft>
-                <a:spcPts val="400"/>
+                <a:spcPts val="300"/>
               </a:spcAft>
               <a:buNone/>
             </a:pPr>
             <a:r>
-              <a:rPr lang="en-US" sz="1200" dirty="0">
+              <a:rPr lang="en-US" sz="1150" dirty="0">
                 <a:solidFill>
                   <a:schemeClr val="tx1"/>
                 </a:solidFill>
               </a:rPr>
               <a:t>Polish job boards and Meta; a Polish-speaking freelancer phones each applicant (15 min)</a:t>
             </a:r>
-            <a:endParaRPr lang="en-US" sz="1200" dirty="0"/>
+            <a:endParaRPr lang="en-US" sz="1150" dirty="0"/>
           </a:p>
           <a:p>
             <a:pPr indent="0" marL="0">
               <a:spcAft>
-                <a:spcPts val="400"/>
+                <a:spcPts val="300"/>
               </a:spcAft>
               <a:buNone/>
             </a:pPr>
             <a:r>
-              <a:rPr lang="en-US" sz="1200" b="1" dirty="0">
+              <a:rPr lang="en-US" sz="1150" b="1" dirty="0">
                 <a:solidFill>
                   <a:schemeClr val="accent6"/>
                 </a:solidFill>
@@ -15491,29 +16151,29 @@
             </a:r>
             <a:pPr indent="0" marL="0">
               <a:spcAft>
-                <a:spcPts val="400"/>
+                <a:spcPts val="300"/>
               </a:spcAft>
               <a:buNone/>
             </a:pPr>
             <a:r>
-              <a:rPr lang="en-US" sz="1200" dirty="0">
+              <a:rPr lang="en-US" sz="1150" dirty="0">
                 <a:solidFill>
                   <a:schemeClr val="tx1"/>
                 </a:solidFill>
               </a:rPr>
-              <a:t>~2,000 Polish trade workers already commute to Brandenburg; the call checks language before using our slots</a:t>
+              <a:t>~13,800 Poles commute to Brandenburg jobs, ~1,700 in machine, metal and building trades (IAB 2020); the call checks language before using our slots</a:t>
             </a:r>
-            <a:endParaRPr lang="en-US" sz="1200" dirty="0"/>
+            <a:endParaRPr lang="en-US" sz="1150" dirty="0"/>
           </a:p>
           <a:p>
             <a:pPr indent="0" marL="0">
               <a:spcAft>
-                <a:spcPts val="400"/>
+                <a:spcPts val="300"/>
               </a:spcAft>
               <a:buNone/>
             </a:pPr>
             <a:r>
-              <a:rPr lang="en-US" sz="1200" b="1" dirty="0">
+              <a:rPr lang="en-US" sz="1150" b="1" dirty="0">
                 <a:solidFill>
                   <a:schemeClr val="accent6"/>
                 </a:solidFill>
@@ -15522,29 +16182,29 @@
             </a:r>
             <a:pPr indent="0" marL="0">
               <a:spcAft>
-                <a:spcPts val="400"/>
+                <a:spcPts val="300"/>
               </a:spcAft>
               <a:buNone/>
             </a:pPr>
             <a:r>
-              <a:rPr lang="en-US" sz="1200" dirty="0">
+              <a:rPr lang="en-US" sz="1150" dirty="0">
                 <a:solidFill>
                   <a:schemeClr val="tx1"/>
                 </a:solidFill>
               </a:rPr>
               <a:t>346 apps × €18.75 + €400 → 48 qualified × 37% = 18.0 hires (40% of mech, cap 40%)</a:t>
             </a:r>
-            <a:endParaRPr lang="en-US" sz="1200" dirty="0"/>
+            <a:endParaRPr lang="en-US" sz="1150" dirty="0"/>
           </a:p>
           <a:p>
             <a:pPr indent="0" marL="0">
               <a:spcAft>
-                <a:spcPts val="400"/>
+                <a:spcPts val="300"/>
               </a:spcAft>
               <a:buNone/>
             </a:pPr>
             <a:r>
-              <a:rPr lang="en-US" sz="1200" b="1" dirty="0">
+              <a:rPr lang="en-US" sz="1150" b="1" dirty="0">
                 <a:solidFill>
                   <a:schemeClr val="accent6"/>
                 </a:solidFill>
@@ -15553,29 +16213,29 @@
             </a:r>
             <a:pPr indent="0" marL="0">
               <a:spcAft>
-                <a:spcPts val="400"/>
+                <a:spcPts val="300"/>
               </a:spcAft>
               <a:buNone/>
             </a:pPr>
             <a:r>
-              <a:rPr lang="en-US" sz="1200" dirty="0">
+              <a:rPr lang="en-US" sz="1150" dirty="0">
                 <a:solidFill>
                   <a:schemeClr val="tx1"/>
                 </a:solidFill>
               </a:rPr>
               <a:t>Tue 27 Oct – Mon 9 Nov (freelancer starts 27 Oct): €2.5k. Pass: ≥9 qualified at ≤€200. Kill: &lt;5, &gt;€270 per qualified, or too few pass the language call</a:t>
             </a:r>
-            <a:endParaRPr lang="en-US" sz="1200" dirty="0"/>
+            <a:endParaRPr lang="en-US" sz="1150" dirty="0"/>
           </a:p>
           <a:p>
             <a:pPr indent="0" marL="0">
               <a:spcAft>
-                <a:spcPts val="400"/>
+                <a:spcPts val="300"/>
               </a:spcAft>
               <a:buNone/>
             </a:pPr>
             <a:r>
-              <a:rPr lang="en-US" sz="1200" b="1" dirty="0">
+              <a:rPr lang="en-US" sz="1150" b="1" dirty="0">
                 <a:solidFill>
                   <a:schemeClr val="accent6"/>
                 </a:solidFill>
@@ -15584,19 +16244,19 @@
             </a:r>
             <a:pPr indent="0" marL="0">
               <a:spcAft>
-                <a:spcPts val="400"/>
+                <a:spcPts val="300"/>
               </a:spcAft>
               <a:buNone/>
             </a:pPr>
             <a:r>
-              <a:rPr lang="en-US" sz="1200" dirty="0">
+              <a:rPr lang="en-US" sz="1150" dirty="0">
                 <a:solidFill>
                   <a:schemeClr val="tx1"/>
                 </a:solidFill>
               </a:rPr>
-              <a:t>Me: ads, freelancer, call script. Client: approve the Polish ads</a:t>
+              <a:t>Setup 1 week (live Tue 27 Oct). Me: Polish ads, hire the freelancer via rocketjobs.pl (~€19/h), call script, weekly call checks. Client: approve the ads</a:t>
             </a:r>
-            <a:endParaRPr lang="en-US" sz="1200" dirty="0"/>
+            <a:endParaRPr lang="en-US" sz="1150" dirty="0"/>
           </a:p>
         </p:txBody>
       </p:sp>
@@ -15608,8 +16268,8 @@
         </p:nvSpPr>
         <p:spPr>
           <a:xfrm>
-            <a:off x="457200" y="5349240"/>
-            <a:ext cx="11274552" cy="914400"/>
+            <a:off x="457200" y="5504688"/>
+            <a:ext cx="11274552" cy="822960"/>
           </a:xfrm>
           <a:prstGeom prst="rect">
             <a:avLst/>
@@ -15625,7 +16285,7 @@
               <a:buNone/>
             </a:pPr>
             <a:r>
-              <a:rPr lang="en-US" sz="1200" b="1" dirty="0">
+              <a:rPr lang="en-US" sz="1150" b="1" dirty="0">
                 <a:solidFill>
                   <a:schemeClr val="tx1"/>
                 </a:solidFill>
@@ -15636,14 +16296,14 @@
               <a:buNone/>
             </a:pPr>
             <a:r>
-              <a:rPr lang="en-US" sz="1200" dirty="0">
+              <a:rPr lang="en-US" sz="1150" dirty="0">
                 <a:solidFill>
                   <a:schemeClr val="tx1"/>
                 </a:solidFill>
               </a:rPr>
-              <a:t>Every employer holds consenting past applicants that nobody re-markets. Here 211 records cost ~€14 per hire and fill week-1 slots. Joveo could add them as one more tracked source in any market, with no local staff.</a:t>
+              <a:t>Every employer holds past applicants who consented to be kept on file (GDPR allows up to a year), and nobody re-markets them. Here 211 records cost ~€14 per hire and fill week-1 slots. Joveo already runs the tracked links and distribution, so a consented past-applicant feed is one more source in the same pipeline, in any market, with no local staff.</a:t>
             </a:r>
-            <a:endParaRPr lang="en-US" sz="1200" dirty="0"/>
+            <a:endParaRPr lang="en-US" sz="1150" dirty="0"/>
           </a:p>
         </p:txBody>
       </p:sp>
@@ -15918,7 +16578,7 @@
                   <a:schemeClr val="tx1"/>
                 </a:solidFill>
               </a:rPr>
-              <a:t>Spend → applications → qualified → assessed → passed → offers → signed, by source × role</a:t>
+              <a:t>By source × role: spend, applications, qualified. By role: assessed, passed, offers, signed (each hire keeps its ATS source tag)</a:t>
             </a:r>
             <a:endParaRPr lang="en-US" sz="1250" dirty="0"/>
           </a:p>
@@ -16244,7 +16904,7 @@
                   <a:schemeClr val="tx1"/>
                 </a:solidFill>
               </a:rPr>
-              <a:t>Pass rate after 10 interviews: if low → sharper screening, more slots (10% lower ≈ 92 hires)</a:t>
+              <a:t>Pass rate: first read 2 Nov, confirmed 9 Nov once a role has 10 interviews; if low → tighter knock-out questions, ask for more slots (10% lower ≈ 92 hires)</a:t>
             </a:r>
             <a:endParaRPr lang="en-US" sz="1250" dirty="0"/>
           </a:p>
@@ -16262,7 +16922,7 @@
                   <a:schemeClr val="tx1"/>
                 </a:solidFill>
               </a:rPr>
-              <a:t>Construction electricians: if stopped, programmatic fills the gap (€127.5k)</a:t>
+              <a:t>Construction electricians: if stopped, programmatic fills the gap (€130k)</a:t>
             </a:r>
             <a:endParaRPr lang="en-US" sz="1250" dirty="0"/>
           </a:p>
@@ -16461,7 +17121,7 @@
                   <a:schemeClr val="tx1"/>
                 </a:solidFill>
               </a:rPr>
-              <a:t>Wed–Fri: Polish ads + freelancer; construction campaign live 23 Oct</a:t>
+              <a:t>Wed–Fri: set up Polish ads + freelancer (live 27 Oct); construction campaign live 23 Oct</a:t>
             </a:r>
             <a:endParaRPr lang="en-US" sz="1250" dirty="0"/>
           </a:p>

--- a/operation_uptime/Operation_Uptime_Deck.pptx
+++ b/operation_uptime/Operation_Uptime_Deck.pptx
@@ -114,30 +114,30 @@
   <p:extLst>
     <p:ext uri="{521415D9-36F7-43E2-AB2F-B90AF26B5E84}">
       <p14:sectionLst xmlns:p14="http://schemas.microsoft.com/office/powerpoint/2010/main">
-        <p14:section name="Summary" id="{b2534f28-1be0-04c9-e730-bc8cde4eff0b}">
+        <p14:section name="Summary" id="{36363604-2906-6250-aa1b-624a3114097d}">
           <p14:sldIdLst>
             <p14:sldId id="256"/>
           </p14:sldIdLst>
         </p14:section>
-        <p14:section name="Part 1 Funnel" id="{a5bf262f-2bcf-1ed7-14e6-98295b0d4adc}">
+        <p14:section name="Part 1 Funnel" id="{6f7a91f6-cdfb-c1bd-c2d4-2e6eadd0bdd3}">
           <p14:sldIdLst>
             <p14:sldId id="257"/>
             <p14:sldId id="258"/>
           </p14:sldIdLst>
         </p14:section>
-        <p14:section name="Part 2 Channels &amp; budget" id="{2c189f27-23d9-607a-56ef-22da50f12f00}">
+        <p14:section name="Part 2 Channels &amp; budget" id="{d1adaa91-57e6-263b-75f4-66ce9655cd2e}">
           <p14:sldIdLst>
             <p14:sldId id="259"/>
             <p14:sldId id="260"/>
             <p14:sldId id="261"/>
           </p14:sldIdLst>
         </p14:section>
-        <p14:section name="Part 3 New sources" id="{67f979f0-ae60-e0e3-9b44-0ab93fa5f6e6}">
+        <p14:section name="Part 3 New sources" id="{dac1dd19-520a-c259-7dc6-cfd98d7cd407}">
           <p14:sldIdLst>
             <p14:sldId id="262"/>
           </p14:sldIdLst>
         </p14:section>
-        <p14:section name="Part 4 Run it" id="{6a145c07-1f8e-0405-e288-af0027a83bd0}">
+        <p14:section name="Part 4 Run it" id="{c3dc25a9-f77b-8b32-5d85-bd07e1d27eb2}">
           <p14:sldIdLst>
             <p14:sldId id="263"/>
           </p14:sldIdLst>

--- a/operation_uptime/Operation_Uptime_Deck.pptx
+++ b/operation_uptime/Operation_Uptime_Deck.pptx
@@ -114,30 +114,30 @@
   <p:extLst>
     <p:ext uri="{521415D9-36F7-43E2-AB2F-B90AF26B5E84}">
       <p14:sectionLst xmlns:p14="http://schemas.microsoft.com/office/powerpoint/2010/main">
-        <p14:section name="Summary" id="{36363604-2906-6250-aa1b-624a3114097d}">
+        <p14:section name="Summary" id="{7beed538-4479-14d9-8d3f-51955cf24a07}">
           <p14:sldIdLst>
             <p14:sldId id="256"/>
           </p14:sldIdLst>
         </p14:section>
-        <p14:section name="Part 1 Funnel" id="{6f7a91f6-cdfb-c1bd-c2d4-2e6eadd0bdd3}">
+        <p14:section name="Part 1 Funnel" id="{e845b4d9-fc81-5ce6-963c-0c5851845eac}">
           <p14:sldIdLst>
             <p14:sldId id="257"/>
             <p14:sldId id="258"/>
           </p14:sldIdLst>
         </p14:section>
-        <p14:section name="Part 2 Channels &amp; budget" id="{d1adaa91-57e6-263b-75f4-66ce9655cd2e}">
+        <p14:section name="Part 2 Channels &amp; budget" id="{b6c03d9e-2050-23bc-c31a-f2bc55390b53}">
           <p14:sldIdLst>
             <p14:sldId id="259"/>
             <p14:sldId id="260"/>
             <p14:sldId id="261"/>
           </p14:sldIdLst>
         </p14:section>
-        <p14:section name="Part 3 New sources" id="{dac1dd19-520a-c259-7dc6-cfd98d7cd407}">
+        <p14:section name="Part 3 New sources" id="{b986d8da-4bca-e40a-1952-ce2790e5ff3f}">
           <p14:sldIdLst>
             <p14:sldId id="262"/>
           </p14:sldIdLst>
         </p14:section>
-        <p14:section name="Part 4 Run it" id="{c3dc25a9-f77b-8b32-5d85-bd07e1d27eb2}">
+        <p14:section name="Part 4 Run it" id="{68f43251-2403-19e5-0271-1857f0143322}">
           <p14:sldIdLst>
             <p14:sldId id="263"/>
           </p14:sldIdLst>
@@ -689,22 +689,22 @@
                 <c:formatCode>General</c:formatCode>
                 <c:ptCount val="9"/>
                 <c:pt idx="0">
-                  <c:v>19436</c:v>
+                  <c:v>19399</c:v>
                 </c:pt>
                 <c:pt idx="1">
-                  <c:v>10836</c:v>
+                  <c:v>11248</c:v>
                 </c:pt>
                 <c:pt idx="2">
-                  <c:v>13809</c:v>
+                  <c:v>13947</c:v>
                 </c:pt>
                 <c:pt idx="3">
-                  <c:v>14175</c:v>
+                  <c:v>14327</c:v>
                 </c:pt>
                 <c:pt idx="4">
-                  <c:v>14175</c:v>
+                  <c:v>13822</c:v>
                 </c:pt>
                 <c:pt idx="5">
-                  <c:v>1863</c:v>
+                  <c:v>1552</c:v>
                 </c:pt>
                 <c:pt idx="6">
                   <c:v>0</c:v>
@@ -936,22 +936,22 @@
                   <c:v>0</c:v>
                 </c:pt>
                 <c:pt idx="3">
-                  <c:v>2566</c:v>
+                  <c:v>2467</c:v>
                 </c:pt>
                 <c:pt idx="4">
-                  <c:v>1728</c:v>
+                  <c:v>1782</c:v>
                 </c:pt>
                 <c:pt idx="5">
-                  <c:v>1992</c:v>
+                  <c:v>1980</c:v>
                 </c:pt>
                 <c:pt idx="6">
-                  <c:v>2087</c:v>
+                  <c:v>2078</c:v>
                 </c:pt>
                 <c:pt idx="7">
-                  <c:v>2092</c:v>
+                  <c:v>2381</c:v>
                 </c:pt>
                 <c:pt idx="8">
-                  <c:v>513</c:v>
+                  <c:v>290</c:v>
                 </c:pt>
               </c:numCache>
             </c:numRef>
@@ -3557,7 +3557,7 @@
                   <a:schemeClr val="tx1"/>
                 </a:solidFill>
               </a:rPr>
-              <a:t>Pace ≤55 qualified a week; applications until Tue 24 Nov, signatures by Fri 18 Dec.</a:t>
+              <a:t>Pace ≤55 assessments a week; applications until Tue 24 Nov, signatures by Fri 18 Dec.</a:t>
             </a:r>
             <a:endParaRPr lang="en-US" sz="1200" dirty="0"/>
           </a:p>
@@ -5351,7 +5351,7 @@
                   <a:schemeClr val="tx1"/>
                 </a:solidFill>
               </a:rPr>
-              <a:t>55 assessments a week (+9 if possible)</a:t>
+              <a:t>55 assessments a week from Thu 22 Oct (+9 if possible)</a:t>
             </a:r>
             <a:endParaRPr lang="en-US" sz="1100" dirty="0"/>
           </a:p>
@@ -8954,7 +8954,7 @@
                   <a:schemeClr val="tx1"/>
                 </a:solidFill>
               </a:rPr>
-              <a:t>Automation has the tighter pool (22% of reachable people vs 12%), but needs only 15 and costs less per hire, so it is watched weekly.</a:t>
+              <a:t>Automation has a tighter pool and less channel headroom (22% of reachable people vs 12%), but needs only 15 and costs less per hire, so it is watched weekly.</a:t>
             </a:r>
             <a:endParaRPr lang="en-US" sz="1300" dirty="0"/>
           </a:p>
@@ -9017,7 +9017,7 @@
                   <a:schemeClr val="tx1"/>
                 </a:solidFill>
               </a:rPr>
-              <a:t>30% worse means 440 qualified applicants for 314 slots, so only ~71 can be hired; spending more doesn't help. Acceptance ties, but fast offers protect it; the pass rate depends on the plant's own test and is only known after interviews (week-2 check). A weaker share qualified or dearer clicks only cost money (+43% / +30% media), not hires.</a:t>
+              <a:t>30% worse means 440 qualified applicants for 314 slots, so only ~71 can be hired; spending more doesn't help. Acceptance ties, but fast offers protect it; the pass rate depends on the plant's own test and is only known after interviews (week-2 check). A weaker share qualified or dearer clicks only cost money (at least +43% / +30% media), not hires.</a:t>
             </a:r>
             <a:endParaRPr lang="en-US" sz="1200" dirty="0"/>
           </a:p>
@@ -12547,7 +12547,7 @@
                   <a:schemeClr val="tx1"/>
                 </a:solidFill>
               </a:rPr>
-              <a:t>Each pay-per-click channel gets a €750 test per role first; the dearest (Search, most programmatic) stay at test level.</a:t>
+              <a:t>Each pay-per-click channel gets a €750 test per role first; Search and Meta stay at test level, and so does programmatic for automation and supervisors.</a:t>
             </a:r>
             <a:endParaRPr lang="en-US" sz="1150" dirty="0"/>
           </a:p>
@@ -14311,7 +14311,7 @@
                   <a:schemeClr val="tx1"/>
                 </a:solidFill>
               </a:rPr>
-              <a:t>Spend stops: </a:t>
+              <a:t>Paid media stops: </a:t>
             </a:r>
             <a:pPr indent="0" marL="0">
               <a:spcAft>
@@ -14325,7 +14325,7 @@
                   <a:schemeClr val="tx1"/>
                 </a:solidFill>
               </a:rPr>
-              <a:t>Tue 24 Nov, the last useful application date.</a:t>
+              <a:t>Tue 24 Nov, the last useful application date (referral bonuses are paid as people sign).</a:t>
             </a:r>
             <a:endParaRPr lang="en-US" sz="1200" dirty="0"/>
           </a:p>
@@ -15928,7 +15928,7 @@
                   <a:schemeClr val="tx1"/>
                 </a:solidFill>
               </a:rPr>
-              <a:t>Fri 23 Oct – Thu 5 Nov (read Mon 9 Nov): €4.9k. Pass: ≥6 qualified at ≤€500. Kill: &lt;4, &gt;€670 per qualified, or profile rejected</a:t>
+              <a:t>Fri 23 Oct – Thu 5 Nov (read Mon 9 Nov): €4.8k. Pass: ≥6 qualified at ≤€500. Kill: &lt;4, &gt;€670 per qualified, or profile rejected</a:t>
             </a:r>
             <a:endParaRPr lang="en-US" sz="1150" dirty="0"/>
           </a:p>

--- a/operation_uptime/Operation_Uptime_Deck.pptx
+++ b/operation_uptime/Operation_Uptime_Deck.pptx
@@ -114,30 +114,30 @@
   <p:extLst>
     <p:ext uri="{521415D9-36F7-43E2-AB2F-B90AF26B5E84}">
       <p14:sectionLst xmlns:p14="http://schemas.microsoft.com/office/powerpoint/2010/main">
-        <p14:section name="Summary" id="{7beed538-4479-14d9-8d3f-51955cf24a07}">
+        <p14:section name="Summary" id="{926d00cb-f4c4-a5ae-228c-4b0c3d50167d}">
           <p14:sldIdLst>
             <p14:sldId id="256"/>
           </p14:sldIdLst>
         </p14:section>
-        <p14:section name="Part 1 Funnel" id="{e845b4d9-fc81-5ce6-963c-0c5851845eac}">
+        <p14:section name="Part 1 Funnel" id="{bcddfa11-b553-bbe0-2f01-c9d6baa03d4b}">
           <p14:sldIdLst>
             <p14:sldId id="257"/>
             <p14:sldId id="258"/>
           </p14:sldIdLst>
         </p14:section>
-        <p14:section name="Part 2 Channels &amp; budget" id="{b6c03d9e-2050-23bc-c31a-f2bc55390b53}">
+        <p14:section name="Part 2 Channels &amp; budget" id="{b6fd8dc5-8654-efcf-1ac9-a8ae9c1301a4}">
           <p14:sldIdLst>
             <p14:sldId id="259"/>
             <p14:sldId id="260"/>
             <p14:sldId id="261"/>
           </p14:sldIdLst>
         </p14:section>
-        <p14:section name="Part 3 New sources" id="{b986d8da-4bca-e40a-1952-ce2790e5ff3f}">
+        <p14:section name="Part 3 New sources" id="{28f08e97-08e9-652a-c441-6ff0d03d04ae}">
           <p14:sldIdLst>
             <p14:sldId id="262"/>
           </p14:sldIdLst>
         </p14:section>
-        <p14:section name="Part 4 Run it" id="{68f43251-2403-19e5-0271-1857f0143322}">
+        <p14:section name="Part 4 Run it" id="{3412d43f-7a5c-a7e5-bfbb-44fa7efd31c2}">
           <p14:sldIdLst>
             <p14:sldId id="263"/>
           </p14:sldIdLst>
@@ -5162,7 +5162,7 @@
                   <a:schemeClr val="tx1"/>
                 </a:solidFill>
               </a:rPr>
-              <a:t>pace ≤55 a week, pre-screened sources first, ask for +9 slots.</a:t>
+              <a:t>pace ≤55 a week, pre-screened sources first, ask for +9 slots. If assessments can't start 22 Oct: ~92 hires (100 then needs 60 a week).</a:t>
             </a:r>
             <a:endParaRPr lang="en-US" sz="1100" dirty="0"/>
           </a:p>

--- a/operation_uptime/Operation_Uptime_Deck.pptx
+++ b/operation_uptime/Operation_Uptime_Deck.pptx
@@ -114,30 +114,30 @@
   <p:extLst>
     <p:ext uri="{521415D9-36F7-43E2-AB2F-B90AF26B5E84}">
       <p14:sectionLst xmlns:p14="http://schemas.microsoft.com/office/powerpoint/2010/main">
-        <p14:section name="Summary" id="{926d00cb-f4c4-a5ae-228c-4b0c3d50167d}">
+        <p14:section name="Summary" id="{512c0325-63bd-2124-7305-7cc4b400a1b9}">
           <p14:sldIdLst>
             <p14:sldId id="256"/>
           </p14:sldIdLst>
         </p14:section>
-        <p14:section name="Part 1 Funnel" id="{bcddfa11-b553-bbe0-2f01-c9d6baa03d4b}">
+        <p14:section name="Part 1 Funnel" id="{c5af8bb1-9ac0-7224-4e31-5faeaf5bfdf8}">
           <p14:sldIdLst>
             <p14:sldId id="257"/>
             <p14:sldId id="258"/>
           </p14:sldIdLst>
         </p14:section>
-        <p14:section name="Part 2 Channels &amp; budget" id="{b6fd8dc5-8654-efcf-1ac9-a8ae9c1301a4}">
+        <p14:section name="Part 2 Channels &amp; budget" id="{a5496b52-d5be-64be-f374-bff54b2aed5f}">
           <p14:sldIdLst>
             <p14:sldId id="259"/>
             <p14:sldId id="260"/>
             <p14:sldId id="261"/>
           </p14:sldIdLst>
         </p14:section>
-        <p14:section name="Part 3 New sources" id="{28f08e97-08e9-652a-c441-6ff0d03d04ae}">
+        <p14:section name="Part 3 New sources" id="{2124ba60-6187-0667-504c-409cf81817be}">
           <p14:sldIdLst>
             <p14:sldId id="262"/>
           </p14:sldIdLst>
         </p14:section>
-        <p14:section name="Part 4 Run it" id="{3412d43f-7a5c-a7e5-bfbb-44fa7efd31c2}">
+        <p14:section name="Part 4 Run it" id="{6fe372e7-78b2-19ab-a03c-22831a4fc1fa}">
           <p14:sldIdLst>
             <p14:sldId id="263"/>
           </p14:sldIdLst>
@@ -689,22 +689,22 @@
                 <c:formatCode>General</c:formatCode>
                 <c:ptCount val="9"/>
                 <c:pt idx="0">
-                  <c:v>19399</c:v>
+                  <c:v>19549</c:v>
                 </c:pt>
                 <c:pt idx="1">
-                  <c:v>11248</c:v>
+                  <c:v>11334</c:v>
                 </c:pt>
                 <c:pt idx="2">
-                  <c:v>13947</c:v>
+                  <c:v>14055</c:v>
                 </c:pt>
                 <c:pt idx="3">
-                  <c:v>14327</c:v>
+                  <c:v>14438</c:v>
                 </c:pt>
                 <c:pt idx="4">
-                  <c:v>13822</c:v>
+                  <c:v>13941</c:v>
                 </c:pt>
                 <c:pt idx="5">
-                  <c:v>1552</c:v>
+                  <c:v>1566</c:v>
                 </c:pt>
                 <c:pt idx="6">
                   <c:v>0</c:v>
@@ -1169,7 +1169,7 @@
               <c:strCache>
                 <c:ptCount val="1"/>
                 <c:pt idx="0">
-                  <c:v>Recommended (€120k)</c:v>
+                  <c:v>Recommended (€122.5k)</c:v>
                 </c:pt>
               </c:strCache>
             </c:strRef>
@@ -1258,7 +1258,7 @@
               <c:strCache>
                 <c:ptCount val="1"/>
                 <c:pt idx="0">
-                  <c:v>30% less (€84k)</c:v>
+                  <c:v>30% less (€85.75k)</c:v>
                 </c:pt>
               </c:strCache>
             </c:strRef>
@@ -1323,16 +1323,16 @@
                 <c:formatCode>General</c:formatCode>
                 <c:ptCount val="4"/>
                 <c:pt idx="0">
-                  <c:v>20.6</c:v>
+                  <c:v>20.5</c:v>
                 </c:pt>
                 <c:pt idx="1">
-                  <c:v>44.4</c:v>
+                  <c:v>44</c:v>
                 </c:pt>
                 <c:pt idx="2">
                   <c:v>14.5</c:v>
                 </c:pt>
                 <c:pt idx="3">
-                  <c:v>7.5</c:v>
+                  <c:v>8.1</c:v>
                 </c:pt>
               </c:numCache>
             </c:numRef>
@@ -3158,7 +3158,7 @@
                 <a:ea typeface="Cambria" pitchFamily="34" charset="-122"/>
                 <a:cs typeface="Cambria" pitchFamily="34" charset="-120"/>
               </a:rPr>
-              <a:t>€120k signs 100 maintenance hires by 31 Dec, if the client can assess 55 a week</a:t>
+              <a:t>€122.5k signs 100 maintenance hires by 31 Dec, if the client can assess 55 a week</a:t>
             </a:r>
             <a:endParaRPr lang="en-US" sz="2200" dirty="0"/>
           </a:p>
@@ -3224,7 +3224,7 @@
                 <a:ea typeface="Cambria" pitchFamily="34" charset="-122"/>
                 <a:cs typeface="Cambria" pitchFamily="34" charset="-120"/>
               </a:rPr>
-              <a:t>€120k</a:t>
+              <a:t>€122.5k</a:t>
             </a:r>
             <a:endParaRPr lang="en-US" sz="2000" dirty="0"/>
           </a:p>
@@ -3260,7 +3260,7 @@
                   <a:schemeClr val="tx2"/>
                 </a:solidFill>
               </a:rPr>
-              <a:t>budget: €101.7k plan + €18.3k reserve, released only on results</a:t>
+              <a:t>budget: €102.3k plan + €20.2k reserve, released only on results</a:t>
             </a:r>
             <a:endParaRPr lang="en-US" sz="950" dirty="0"/>
           </a:p>
@@ -3326,7 +3326,7 @@
                 <a:ea typeface="Cambria" pitchFamily="34" charset="-122"/>
                 <a:cs typeface="Cambria" pitchFamily="34" charset="-120"/>
               </a:rPr>
-              <a:t>€1,017</a:t>
+              <a:t>€1,023</a:t>
             </a:r>
             <a:endParaRPr lang="en-US" sz="2000" dirty="0"/>
           </a:p>
@@ -3362,7 +3362,7 @@
                   <a:schemeClr val="tx2"/>
                 </a:solidFill>
               </a:rPr>
-              <a:t>media cost per hire (€1,200 if the reserve is spent)</a:t>
+              <a:t>media cost per hire (€1,225 if the reserve is spent)</a:t>
             </a:r>
             <a:endParaRPr lang="en-US" sz="950" dirty="0"/>
           </a:p>
@@ -3985,7 +3985,7 @@
                             <a:schemeClr val="tx1"/>
                           </a:solidFill>
                         </a:rPr>
-                        <a:t>€38.9k</a:t>
+                        <a:t>€39.1k</a:t>
                       </a:r>
                       <a:endParaRPr lang="en-US" sz="1100" dirty="0"/>
                     </a:p>
@@ -4043,7 +4043,7 @@
                             <a:schemeClr val="tx1"/>
                           </a:solidFill>
                         </a:rPr>
-                        <a:t>€1,298</a:t>
+                        <a:t>€1,304</a:t>
                       </a:r>
                       <a:endParaRPr lang="en-US" sz="1100" dirty="0"/>
                     </a:p>
@@ -4219,7 +4219,7 @@
                             <a:schemeClr val="tx1"/>
                           </a:solidFill>
                         </a:rPr>
-                        <a:t>€29.9k</a:t>
+                        <a:t>€30.1k</a:t>
                       </a:r>
                       <a:endParaRPr lang="en-US" sz="1100" dirty="0"/>
                     </a:p>
@@ -4277,7 +4277,7 @@
                             <a:schemeClr val="tx1"/>
                           </a:solidFill>
                         </a:rPr>
-                        <a:t>€663</a:t>
+                        <a:t>€670</a:t>
                       </a:r>
                       <a:endParaRPr lang="en-US" sz="1100" dirty="0"/>
                     </a:p>
@@ -4511,7 +4511,7 @@
                             <a:schemeClr val="tx1"/>
                           </a:solidFill>
                         </a:rPr>
-                        <a:t>€1,158</a:t>
+                        <a:t>€1,162</a:t>
                       </a:r>
                       <a:endParaRPr lang="en-US" sz="1100" dirty="0"/>
                     </a:p>
@@ -4745,7 +4745,7 @@
                             <a:schemeClr val="tx1"/>
                           </a:solidFill>
                         </a:rPr>
-                        <a:t>€1,550</a:t>
+                        <a:t>€1,555</a:t>
                       </a:r>
                       <a:endParaRPr lang="en-US" sz="1100" dirty="0"/>
                     </a:p>
@@ -4921,7 +4921,7 @@
                             <a:schemeClr val="tx1"/>
                           </a:solidFill>
                         </a:rPr>
-                        <a:t>€101.7k</a:t>
+                        <a:t>€102.3k</a:t>
                       </a:r>
                       <a:endParaRPr lang="en-US" sz="1100" dirty="0"/>
                     </a:p>
@@ -4979,7 +4979,7 @@
                             <a:schemeClr val="tx1"/>
                           </a:solidFill>
                         </a:rPr>
-                        <a:t>€1,017</a:t>
+                        <a:t>€1,023</a:t>
                       </a:r>
                       <a:endParaRPr lang="en-US" sz="1100" dirty="0"/>
                     </a:p>
@@ -5423,7 +5423,7 @@
                   <a:schemeClr val="tx1"/>
                 </a:solidFill>
               </a:rPr>
-              <a:t>Approve €120k</a:t>
+              <a:t>Approve €122.5k</a:t>
             </a:r>
             <a:endParaRPr lang="en-US" sz="1100" dirty="0"/>
           </a:p>
@@ -8632,7 +8632,7 @@
                   <a:schemeClr val="tx1"/>
                 </a:solidFill>
               </a:rPr>
-              <a:t>308 qualified applicants in the plan (from 1,490 applications) against 314 slots: 55 a week × 40 assessment days ÷ 7.</a:t>
+              <a:t>308 qualified applicants in the plan (from 1,495 applications) against 314 slots: 55 a week × 40 assessment days ÷ 7.</a:t>
             </a:r>
             <a:endParaRPr lang="en-US" sz="1200" dirty="0"/>
           </a:p>
@@ -8666,7 +8666,7 @@
                   <a:schemeClr val="tx2"/>
                 </a:solidFill>
               </a:rPr>
-              <a:t>Why 308, not 311: referrals and past applicants convert better than the table's standard rates, so the plan needs slightly fewer. Applications: 1,490, not 1,260, because the plan's channels average 21% qualified (social ads lower), below the ~25% baseline.</a:t>
+              <a:t>Why 308, not 311: referrals and past applicants convert better than the table's standard rates, so the plan needs slightly fewer. Applications: 1,495, not 1,260, because the plan's channels average 21% qualified (social ads lower), below the ~25% baseline.</a:t>
             </a:r>
             <a:endParaRPr lang="en-US" sz="1200" dirty="0"/>
           </a:p>
@@ -9017,7 +9017,7 @@
                   <a:schemeClr val="tx1"/>
                 </a:solidFill>
               </a:rPr>
-              <a:t>30% worse means 440 qualified applicants for 314 slots, so only ~71 can be hired; spending more doesn't help. Acceptance ties, but fast offers protect it; the pass rate depends on the plant's own test and is only known after interviews (week-2 check). A weaker share qualified or dearer clicks only cost money (at least +43% / +30% media), not hires.</a:t>
+              <a:t>30% worse means 440 qualified applicants for 314 slots, so only ~71 can be hired; spending more doesn't help. Acceptance ties, but fast offers protect it; the pass rate depends on the plant's own test and is only known after interviews (week-2 check). A weaker share qualified or dearer clicks only cost money, not hires: a 30% lower share qualified needs a €185k budget on a full re-run (cheap channels hit their caps); dearer clicks +30% media.</a:t>
             </a:r>
             <a:endParaRPr lang="en-US" sz="1200" dirty="0"/>
           </a:p>
@@ -9189,20 +9189,22 @@
         </p:nvGraphicFramePr>
         <p:xfrm>
           <a:off x="457200" y="1188720"/>
-          <a:ext cx="7863840" cy="914400"/>
+          <a:ext cx="8686800" cy="914400"/>
         </p:xfrm>
         <a:graphic>
           <a:graphicData uri="http://schemas.openxmlformats.org/drawingml/2006/table">
             <a:tbl>
               <a:tblPr/>
               <a:tblGrid>
-                <a:gridCol w="1737360"/>
-                <a:gridCol w="822960"/>
-                <a:gridCol w="3383280"/>
-                <a:gridCol w="1051560"/>
+                <a:gridCol w="1600200"/>
+                <a:gridCol w="685800"/>
+                <a:gridCol w="2834640"/>
+                <a:gridCol w="868680"/>
+                <a:gridCol w="960120"/>
+                <a:gridCol w="868680"/>
                 <a:gridCol w="868680"/>
               </a:tblGrid>
-              <a:tr h="384048">
+              <a:tr h="365760">
                 <a:tc>
                   <a:txBody>
                     <a:bodyPr/>
@@ -9400,7 +9402,129 @@
                             <a:schemeClr val="bg1"/>
                           </a:solidFill>
                         </a:rPr>
-                        <a:t>Cost per hire</a:t>
+                        <a:t>Spend</a:t>
+                      </a:r>
+                      <a:endParaRPr lang="en-US" sz="1100" dirty="0"/>
+                    </a:p>
+                  </a:txBody>
+                  <a:tcPr marL="91440" marR="91440" marT="45720" marB="45720" anchor="ctr">
+                    <a:lnL w="6350" cap="flat" cmpd="sng" algn="ctr">
+                      <a:solidFill>
+                        <a:srgbClr val="D6DEE5"/>
+                      </a:solidFill>
+                      <a:prstDash val="solid"/>
+                      <a:round/>
+                      <a:headEnd type="none" w="med" len="med"/>
+                      <a:tailEnd type="none" w="med" len="med"/>
+                    </a:lnL>
+                    <a:lnR w="6350" cap="flat" cmpd="sng" algn="ctr">
+                      <a:solidFill>
+                        <a:srgbClr val="D6DEE5"/>
+                      </a:solidFill>
+                      <a:prstDash val="solid"/>
+                      <a:round/>
+                      <a:headEnd type="none" w="med" len="med"/>
+                      <a:tailEnd type="none" w="med" len="med"/>
+                    </a:lnR>
+                    <a:lnT w="6350" cap="flat" cmpd="sng" algn="ctr">
+                      <a:solidFill>
+                        <a:srgbClr val="D6DEE5"/>
+                      </a:solidFill>
+                      <a:prstDash val="solid"/>
+                      <a:round/>
+                      <a:headEnd type="none" w="med" len="med"/>
+                      <a:tailEnd type="none" w="med" len="med"/>
+                    </a:lnT>
+                    <a:lnB w="6350" cap="flat" cmpd="sng" algn="ctr">
+                      <a:solidFill>
+                        <a:srgbClr val="D6DEE5"/>
+                      </a:solidFill>
+                      <a:prstDash val="solid"/>
+                      <a:round/>
+                      <a:headEnd type="none" w="med" len="med"/>
+                      <a:tailEnd type="none" w="med" len="med"/>
+                    </a:lnB>
+                    <a:solidFill>
+                      <a:schemeClr val="tx1"/>
+                    </a:solidFill>
+                  </a:tcPr>
+                </a:tc>
+                <a:tc>
+                  <a:txBody>
+                    <a:bodyPr/>
+                    <a:lstStyle/>
+                    <a:p>
+                      <a:pPr algn="ctr" indent="0" marL="0">
+                        <a:buNone/>
+                      </a:pPr>
+                      <a:r>
+                        <a:rPr lang="en-US" sz="1100" b="1" dirty="0">
+                          <a:solidFill>
+                            <a:schemeClr val="bg1"/>
+                          </a:solidFill>
+                        </a:rPr>
+                        <a:t>€ / qualified</a:t>
+                      </a:r>
+                      <a:endParaRPr lang="en-US" sz="1100" dirty="0"/>
+                    </a:p>
+                  </a:txBody>
+                  <a:tcPr marL="91440" marR="91440" marT="45720" marB="45720" anchor="ctr">
+                    <a:lnL w="6350" cap="flat" cmpd="sng" algn="ctr">
+                      <a:solidFill>
+                        <a:srgbClr val="D6DEE5"/>
+                      </a:solidFill>
+                      <a:prstDash val="solid"/>
+                      <a:round/>
+                      <a:headEnd type="none" w="med" len="med"/>
+                      <a:tailEnd type="none" w="med" len="med"/>
+                    </a:lnL>
+                    <a:lnR w="6350" cap="flat" cmpd="sng" algn="ctr">
+                      <a:solidFill>
+                        <a:srgbClr val="D6DEE5"/>
+                      </a:solidFill>
+                      <a:prstDash val="solid"/>
+                      <a:round/>
+                      <a:headEnd type="none" w="med" len="med"/>
+                      <a:tailEnd type="none" w="med" len="med"/>
+                    </a:lnR>
+                    <a:lnT w="6350" cap="flat" cmpd="sng" algn="ctr">
+                      <a:solidFill>
+                        <a:srgbClr val="D6DEE5"/>
+                      </a:solidFill>
+                      <a:prstDash val="solid"/>
+                      <a:round/>
+                      <a:headEnd type="none" w="med" len="med"/>
+                      <a:tailEnd type="none" w="med" len="med"/>
+                    </a:lnT>
+                    <a:lnB w="6350" cap="flat" cmpd="sng" algn="ctr">
+                      <a:solidFill>
+                        <a:srgbClr val="D6DEE5"/>
+                      </a:solidFill>
+                      <a:prstDash val="solid"/>
+                      <a:round/>
+                      <a:headEnd type="none" w="med" len="med"/>
+                      <a:tailEnd type="none" w="med" len="med"/>
+                    </a:lnB>
+                    <a:solidFill>
+                      <a:schemeClr val="tx1"/>
+                    </a:solidFill>
+                  </a:tcPr>
+                </a:tc>
+                <a:tc>
+                  <a:txBody>
+                    <a:bodyPr/>
+                    <a:lstStyle/>
+                    <a:p>
+                      <a:pPr algn="ctr" indent="0" marL="0">
+                        <a:buNone/>
+                      </a:pPr>
+                      <a:r>
+                        <a:rPr lang="en-US" sz="1100" b="1" dirty="0">
+                          <a:solidFill>
+                            <a:schemeClr val="bg1"/>
+                          </a:solidFill>
+                        </a:rPr>
+                        <a:t>€ / hire</a:t>
                       </a:r>
                       <a:endParaRPr lang="en-US" sz="1100" dirty="0"/>
                     </a:p>
@@ -9509,7 +9633,7 @@
                   </a:tcPr>
                 </a:tc>
               </a:tr>
-              <a:tr h="384048">
+              <a:tr h="365760">
                 <a:tc>
                   <a:txBody>
                     <a:bodyPr/>
@@ -9756,7 +9880,7 @@
                             <a:schemeClr val="tx1"/>
                           </a:solidFill>
                         </a:rPr>
-                        <a:t>20.3</a:t>
+                        <a:t>€0</a:t>
                       </a:r>
                       <a:endParaRPr lang="en-US" sz="1100" dirty="0"/>
                     </a:p>
@@ -9800,8 +9924,124 @@
                     </a:lnB>
                   </a:tcPr>
                 </a:tc>
+                <a:tc>
+                  <a:txBody>
+                    <a:bodyPr/>
+                    <a:lstStyle/>
+                    <a:p>
+                      <a:pPr algn="ctr" indent="0" marL="0">
+                        <a:buNone/>
+                      </a:pPr>
+                      <a:r>
+                        <a:rPr lang="en-US" sz="1100" dirty="0">
+                          <a:solidFill>
+                            <a:schemeClr val="tx1"/>
+                          </a:solidFill>
+                        </a:rPr>
+                        <a:t>€0</a:t>
+                      </a:r>
+                      <a:endParaRPr lang="en-US" sz="1100" dirty="0"/>
+                    </a:p>
+                  </a:txBody>
+                  <a:tcPr marL="91440" marR="91440" marT="45720" marB="45720" anchor="ctr">
+                    <a:lnL w="6350" cap="flat" cmpd="sng" algn="ctr">
+                      <a:solidFill>
+                        <a:srgbClr val="D6DEE5"/>
+                      </a:solidFill>
+                      <a:prstDash val="solid"/>
+                      <a:round/>
+                      <a:headEnd type="none" w="med" len="med"/>
+                      <a:tailEnd type="none" w="med" len="med"/>
+                    </a:lnL>
+                    <a:lnR w="6350" cap="flat" cmpd="sng" algn="ctr">
+                      <a:solidFill>
+                        <a:srgbClr val="D6DEE5"/>
+                      </a:solidFill>
+                      <a:prstDash val="solid"/>
+                      <a:round/>
+                      <a:headEnd type="none" w="med" len="med"/>
+                      <a:tailEnd type="none" w="med" len="med"/>
+                    </a:lnR>
+                    <a:lnT w="6350" cap="flat" cmpd="sng" algn="ctr">
+                      <a:solidFill>
+                        <a:srgbClr val="D6DEE5"/>
+                      </a:solidFill>
+                      <a:prstDash val="solid"/>
+                      <a:round/>
+                      <a:headEnd type="none" w="med" len="med"/>
+                      <a:tailEnd type="none" w="med" len="med"/>
+                    </a:lnT>
+                    <a:lnB w="6350" cap="flat" cmpd="sng" algn="ctr">
+                      <a:solidFill>
+                        <a:srgbClr val="D6DEE5"/>
+                      </a:solidFill>
+                      <a:prstDash val="solid"/>
+                      <a:round/>
+                      <a:headEnd type="none" w="med" len="med"/>
+                      <a:tailEnd type="none" w="med" len="med"/>
+                    </a:lnB>
+                  </a:tcPr>
+                </a:tc>
+                <a:tc>
+                  <a:txBody>
+                    <a:bodyPr/>
+                    <a:lstStyle/>
+                    <a:p>
+                      <a:pPr algn="ctr" indent="0" marL="0">
+                        <a:buNone/>
+                      </a:pPr>
+                      <a:r>
+                        <a:rPr lang="en-US" sz="1100" dirty="0">
+                          <a:solidFill>
+                            <a:schemeClr val="tx1"/>
+                          </a:solidFill>
+                        </a:rPr>
+                        <a:t>20.0</a:t>
+                      </a:r>
+                      <a:endParaRPr lang="en-US" sz="1100" dirty="0"/>
+                    </a:p>
+                  </a:txBody>
+                  <a:tcPr marL="91440" marR="91440" marT="45720" marB="45720" anchor="ctr">
+                    <a:lnL w="6350" cap="flat" cmpd="sng" algn="ctr">
+                      <a:solidFill>
+                        <a:srgbClr val="D6DEE5"/>
+                      </a:solidFill>
+                      <a:prstDash val="solid"/>
+                      <a:round/>
+                      <a:headEnd type="none" w="med" len="med"/>
+                      <a:tailEnd type="none" w="med" len="med"/>
+                    </a:lnL>
+                    <a:lnR w="6350" cap="flat" cmpd="sng" algn="ctr">
+                      <a:solidFill>
+                        <a:srgbClr val="D6DEE5"/>
+                      </a:solidFill>
+                      <a:prstDash val="solid"/>
+                      <a:round/>
+                      <a:headEnd type="none" w="med" len="med"/>
+                      <a:tailEnd type="none" w="med" len="med"/>
+                    </a:lnR>
+                    <a:lnT w="6350" cap="flat" cmpd="sng" algn="ctr">
+                      <a:solidFill>
+                        <a:srgbClr val="D6DEE5"/>
+                      </a:solidFill>
+                      <a:prstDash val="solid"/>
+                      <a:round/>
+                      <a:headEnd type="none" w="med" len="med"/>
+                      <a:tailEnd type="none" w="med" len="med"/>
+                    </a:lnT>
+                    <a:lnB w="6350" cap="flat" cmpd="sng" algn="ctr">
+                      <a:solidFill>
+                        <a:srgbClr val="D6DEE5"/>
+                      </a:solidFill>
+                      <a:prstDash val="solid"/>
+                      <a:round/>
+                      <a:headEnd type="none" w="med" len="med"/>
+                      <a:tailEnd type="none" w="med" len="med"/>
+                    </a:lnB>
+                  </a:tcPr>
+                </a:tc>
               </a:tr>
-              <a:tr h="384048">
+              <a:tr h="365760">
                 <a:tc>
                   <a:txBody>
                     <a:bodyPr/>
@@ -9990,6 +10230,122 @@
                             <a:schemeClr val="tx1"/>
                           </a:solidFill>
                         </a:rPr>
+                        <a:t>€63</a:t>
+                      </a:r>
+                      <a:endParaRPr lang="en-US" sz="1100" dirty="0"/>
+                    </a:p>
+                  </a:txBody>
+                  <a:tcPr marL="91440" marR="91440" marT="45720" marB="45720" anchor="ctr">
+                    <a:lnL w="6350" cap="flat" cmpd="sng" algn="ctr">
+                      <a:solidFill>
+                        <a:srgbClr val="D6DEE5"/>
+                      </a:solidFill>
+                      <a:prstDash val="solid"/>
+                      <a:round/>
+                      <a:headEnd type="none" w="med" len="med"/>
+                      <a:tailEnd type="none" w="med" len="med"/>
+                    </a:lnL>
+                    <a:lnR w="6350" cap="flat" cmpd="sng" algn="ctr">
+                      <a:solidFill>
+                        <a:srgbClr val="D6DEE5"/>
+                      </a:solidFill>
+                      <a:prstDash val="solid"/>
+                      <a:round/>
+                      <a:headEnd type="none" w="med" len="med"/>
+                      <a:tailEnd type="none" w="med" len="med"/>
+                    </a:lnR>
+                    <a:lnT w="6350" cap="flat" cmpd="sng" algn="ctr">
+                      <a:solidFill>
+                        <a:srgbClr val="D6DEE5"/>
+                      </a:solidFill>
+                      <a:prstDash val="solid"/>
+                      <a:round/>
+                      <a:headEnd type="none" w="med" len="med"/>
+                      <a:tailEnd type="none" w="med" len="med"/>
+                    </a:lnT>
+                    <a:lnB w="6350" cap="flat" cmpd="sng" algn="ctr">
+                      <a:solidFill>
+                        <a:srgbClr val="D6DEE5"/>
+                      </a:solidFill>
+                      <a:prstDash val="solid"/>
+                      <a:round/>
+                      <a:headEnd type="none" w="med" len="med"/>
+                      <a:tailEnd type="none" w="med" len="med"/>
+                    </a:lnB>
+                  </a:tcPr>
+                </a:tc>
+                <a:tc>
+                  <a:txBody>
+                    <a:bodyPr/>
+                    <a:lstStyle/>
+                    <a:p>
+                      <a:pPr algn="ctr" indent="0" marL="0">
+                        <a:buNone/>
+                      </a:pPr>
+                      <a:r>
+                        <a:rPr lang="en-US" sz="1100" dirty="0">
+                          <a:solidFill>
+                            <a:schemeClr val="tx1"/>
+                          </a:solidFill>
+                        </a:rPr>
+                        <a:t>€5</a:t>
+                      </a:r>
+                      <a:endParaRPr lang="en-US" sz="1100" dirty="0"/>
+                    </a:p>
+                  </a:txBody>
+                  <a:tcPr marL="91440" marR="91440" marT="45720" marB="45720" anchor="ctr">
+                    <a:lnL w="6350" cap="flat" cmpd="sng" algn="ctr">
+                      <a:solidFill>
+                        <a:srgbClr val="D6DEE5"/>
+                      </a:solidFill>
+                      <a:prstDash val="solid"/>
+                      <a:round/>
+                      <a:headEnd type="none" w="med" len="med"/>
+                      <a:tailEnd type="none" w="med" len="med"/>
+                    </a:lnL>
+                    <a:lnR w="6350" cap="flat" cmpd="sng" algn="ctr">
+                      <a:solidFill>
+                        <a:srgbClr val="D6DEE5"/>
+                      </a:solidFill>
+                      <a:prstDash val="solid"/>
+                      <a:round/>
+                      <a:headEnd type="none" w="med" len="med"/>
+                      <a:tailEnd type="none" w="med" len="med"/>
+                    </a:lnR>
+                    <a:lnT w="6350" cap="flat" cmpd="sng" algn="ctr">
+                      <a:solidFill>
+                        <a:srgbClr val="D6DEE5"/>
+                      </a:solidFill>
+                      <a:prstDash val="solid"/>
+                      <a:round/>
+                      <a:headEnd type="none" w="med" len="med"/>
+                      <a:tailEnd type="none" w="med" len="med"/>
+                    </a:lnT>
+                    <a:lnB w="6350" cap="flat" cmpd="sng" algn="ctr">
+                      <a:solidFill>
+                        <a:srgbClr val="D6DEE5"/>
+                      </a:solidFill>
+                      <a:prstDash val="solid"/>
+                      <a:round/>
+                      <a:headEnd type="none" w="med" len="med"/>
+                      <a:tailEnd type="none" w="med" len="med"/>
+                    </a:lnB>
+                  </a:tcPr>
+                </a:tc>
+                <a:tc>
+                  <a:txBody>
+                    <a:bodyPr/>
+                    <a:lstStyle/>
+                    <a:p>
+                      <a:pPr algn="ctr" indent="0" marL="0">
+                        <a:buNone/>
+                      </a:pPr>
+                      <a:r>
+                        <a:rPr lang="en-US" sz="1100" dirty="0">
+                          <a:solidFill>
+                            <a:schemeClr val="tx1"/>
+                          </a:solidFill>
+                        </a:rPr>
                         <a:t>€14</a:t>
                       </a:r>
                       <a:endParaRPr lang="en-US" sz="1100" dirty="0"/>
@@ -10093,7 +10449,7 @@
                   </a:tcPr>
                 </a:tc>
               </a:tr>
-              <a:tr h="384048">
+              <a:tr h="365760">
                 <a:tc>
                   <a:txBody>
                     <a:bodyPr/>
@@ -10282,6 +10638,122 @@
                             <a:schemeClr val="tx1"/>
                           </a:solidFill>
                         </a:rPr>
+                        <a:t>€6.9k</a:t>
+                      </a:r>
+                      <a:endParaRPr lang="en-US" sz="1100" dirty="0"/>
+                    </a:p>
+                  </a:txBody>
+                  <a:tcPr marL="91440" marR="91440" marT="45720" marB="45720" anchor="ctr">
+                    <a:lnL w="6350" cap="flat" cmpd="sng" algn="ctr">
+                      <a:solidFill>
+                        <a:srgbClr val="D6DEE5"/>
+                      </a:solidFill>
+                      <a:prstDash val="solid"/>
+                      <a:round/>
+                      <a:headEnd type="none" w="med" len="med"/>
+                      <a:tailEnd type="none" w="med" len="med"/>
+                    </a:lnL>
+                    <a:lnR w="6350" cap="flat" cmpd="sng" algn="ctr">
+                      <a:solidFill>
+                        <a:srgbClr val="D6DEE5"/>
+                      </a:solidFill>
+                      <a:prstDash val="solid"/>
+                      <a:round/>
+                      <a:headEnd type="none" w="med" len="med"/>
+                      <a:tailEnd type="none" w="med" len="med"/>
+                    </a:lnR>
+                    <a:lnT w="6350" cap="flat" cmpd="sng" algn="ctr">
+                      <a:solidFill>
+                        <a:srgbClr val="D6DEE5"/>
+                      </a:solidFill>
+                      <a:prstDash val="solid"/>
+                      <a:round/>
+                      <a:headEnd type="none" w="med" len="med"/>
+                      <a:tailEnd type="none" w="med" len="med"/>
+                    </a:lnT>
+                    <a:lnB w="6350" cap="flat" cmpd="sng" algn="ctr">
+                      <a:solidFill>
+                        <a:srgbClr val="D6DEE5"/>
+                      </a:solidFill>
+                      <a:prstDash val="solid"/>
+                      <a:round/>
+                      <a:headEnd type="none" w="med" len="med"/>
+                      <a:tailEnd type="none" w="med" len="med"/>
+                    </a:lnB>
+                  </a:tcPr>
+                </a:tc>
+                <a:tc>
+                  <a:txBody>
+                    <a:bodyPr/>
+                    <a:lstStyle/>
+                    <a:p>
+                      <a:pPr algn="ctr" indent="0" marL="0">
+                        <a:buNone/>
+                      </a:pPr>
+                      <a:r>
+                        <a:rPr lang="en-US" sz="1100" dirty="0">
+                          <a:solidFill>
+                            <a:schemeClr val="tx1"/>
+                          </a:solidFill>
+                        </a:rPr>
+                        <a:t>€142</a:t>
+                      </a:r>
+                      <a:endParaRPr lang="en-US" sz="1100" dirty="0"/>
+                    </a:p>
+                  </a:txBody>
+                  <a:tcPr marL="91440" marR="91440" marT="45720" marB="45720" anchor="ctr">
+                    <a:lnL w="6350" cap="flat" cmpd="sng" algn="ctr">
+                      <a:solidFill>
+                        <a:srgbClr val="D6DEE5"/>
+                      </a:solidFill>
+                      <a:prstDash val="solid"/>
+                      <a:round/>
+                      <a:headEnd type="none" w="med" len="med"/>
+                      <a:tailEnd type="none" w="med" len="med"/>
+                    </a:lnL>
+                    <a:lnR w="6350" cap="flat" cmpd="sng" algn="ctr">
+                      <a:solidFill>
+                        <a:srgbClr val="D6DEE5"/>
+                      </a:solidFill>
+                      <a:prstDash val="solid"/>
+                      <a:round/>
+                      <a:headEnd type="none" w="med" len="med"/>
+                      <a:tailEnd type="none" w="med" len="med"/>
+                    </a:lnR>
+                    <a:lnT w="6350" cap="flat" cmpd="sng" algn="ctr">
+                      <a:solidFill>
+                        <a:srgbClr val="D6DEE5"/>
+                      </a:solidFill>
+                      <a:prstDash val="solid"/>
+                      <a:round/>
+                      <a:headEnd type="none" w="med" len="med"/>
+                      <a:tailEnd type="none" w="med" len="med"/>
+                    </a:lnT>
+                    <a:lnB w="6350" cap="flat" cmpd="sng" algn="ctr">
+                      <a:solidFill>
+                        <a:srgbClr val="D6DEE5"/>
+                      </a:solidFill>
+                      <a:prstDash val="solid"/>
+                      <a:round/>
+                      <a:headEnd type="none" w="med" len="med"/>
+                      <a:tailEnd type="none" w="med" len="med"/>
+                    </a:lnB>
+                  </a:tcPr>
+                </a:tc>
+                <a:tc>
+                  <a:txBody>
+                    <a:bodyPr/>
+                    <a:lstStyle/>
+                    <a:p>
+                      <a:pPr algn="ctr" indent="0" marL="0">
+                        <a:buNone/>
+                      </a:pPr>
+                      <a:r>
+                        <a:rPr lang="en-US" sz="1100" dirty="0">
+                          <a:solidFill>
+                            <a:schemeClr val="tx1"/>
+                          </a:solidFill>
+                        </a:rPr>
                         <a:t>€383</a:t>
                       </a:r>
                       <a:endParaRPr lang="en-US" sz="1100" dirty="0"/>
@@ -10385,7 +10857,7 @@
                   </a:tcPr>
                 </a:tc>
               </a:tr>
-              <a:tr h="384048">
+              <a:tr h="365760">
                 <a:tc>
                   <a:txBody>
                     <a:bodyPr/>
@@ -10574,6 +11046,122 @@
                             <a:schemeClr val="tx1"/>
                           </a:solidFill>
                         </a:rPr>
+                        <a:t>€11k</a:t>
+                      </a:r>
+                      <a:endParaRPr lang="en-US" sz="1100" dirty="0"/>
+                    </a:p>
+                  </a:txBody>
+                  <a:tcPr marL="91440" marR="91440" marT="45720" marB="45720" anchor="ctr">
+                    <a:lnL w="6350" cap="flat" cmpd="sng" algn="ctr">
+                      <a:solidFill>
+                        <a:srgbClr val="D6DEE5"/>
+                      </a:solidFill>
+                      <a:prstDash val="solid"/>
+                      <a:round/>
+                      <a:headEnd type="none" w="med" len="med"/>
+                      <a:tailEnd type="none" w="med" len="med"/>
+                    </a:lnL>
+                    <a:lnR w="6350" cap="flat" cmpd="sng" algn="ctr">
+                      <a:solidFill>
+                        <a:srgbClr val="D6DEE5"/>
+                      </a:solidFill>
+                      <a:prstDash val="solid"/>
+                      <a:round/>
+                      <a:headEnd type="none" w="med" len="med"/>
+                      <a:tailEnd type="none" w="med" len="med"/>
+                    </a:lnR>
+                    <a:lnT w="6350" cap="flat" cmpd="sng" algn="ctr">
+                      <a:solidFill>
+                        <a:srgbClr val="D6DEE5"/>
+                      </a:solidFill>
+                      <a:prstDash val="solid"/>
+                      <a:round/>
+                      <a:headEnd type="none" w="med" len="med"/>
+                      <a:tailEnd type="none" w="med" len="med"/>
+                    </a:lnT>
+                    <a:lnB w="6350" cap="flat" cmpd="sng" algn="ctr">
+                      <a:solidFill>
+                        <a:srgbClr val="D6DEE5"/>
+                      </a:solidFill>
+                      <a:prstDash val="solid"/>
+                      <a:round/>
+                      <a:headEnd type="none" w="med" len="med"/>
+                      <a:tailEnd type="none" w="med" len="med"/>
+                    </a:lnB>
+                  </a:tcPr>
+                </a:tc>
+                <a:tc>
+                  <a:txBody>
+                    <a:bodyPr/>
+                    <a:lstStyle/>
+                    <a:p>
+                      <a:pPr algn="ctr" indent="0" marL="0">
+                        <a:buNone/>
+                      </a:pPr>
+                      <a:r>
+                        <a:rPr lang="en-US" sz="1100" dirty="0">
+                          <a:solidFill>
+                            <a:schemeClr val="tx1"/>
+                          </a:solidFill>
+                        </a:rPr>
+                        <a:t>€370</a:t>
+                      </a:r>
+                      <a:endParaRPr lang="en-US" sz="1100" dirty="0"/>
+                    </a:p>
+                  </a:txBody>
+                  <a:tcPr marL="91440" marR="91440" marT="45720" marB="45720" anchor="ctr">
+                    <a:lnL w="6350" cap="flat" cmpd="sng" algn="ctr">
+                      <a:solidFill>
+                        <a:srgbClr val="D6DEE5"/>
+                      </a:solidFill>
+                      <a:prstDash val="solid"/>
+                      <a:round/>
+                      <a:headEnd type="none" w="med" len="med"/>
+                      <a:tailEnd type="none" w="med" len="med"/>
+                    </a:lnL>
+                    <a:lnR w="6350" cap="flat" cmpd="sng" algn="ctr">
+                      <a:solidFill>
+                        <a:srgbClr val="D6DEE5"/>
+                      </a:solidFill>
+                      <a:prstDash val="solid"/>
+                      <a:round/>
+                      <a:headEnd type="none" w="med" len="med"/>
+                      <a:tailEnd type="none" w="med" len="med"/>
+                    </a:lnR>
+                    <a:lnT w="6350" cap="flat" cmpd="sng" algn="ctr">
+                      <a:solidFill>
+                        <a:srgbClr val="D6DEE5"/>
+                      </a:solidFill>
+                      <a:prstDash val="solid"/>
+                      <a:round/>
+                      <a:headEnd type="none" w="med" len="med"/>
+                      <a:tailEnd type="none" w="med" len="med"/>
+                    </a:lnT>
+                    <a:lnB w="6350" cap="flat" cmpd="sng" algn="ctr">
+                      <a:solidFill>
+                        <a:srgbClr val="D6DEE5"/>
+                      </a:solidFill>
+                      <a:prstDash val="solid"/>
+                      <a:round/>
+                      <a:headEnd type="none" w="med" len="med"/>
+                      <a:tailEnd type="none" w="med" len="med"/>
+                    </a:lnB>
+                  </a:tcPr>
+                </a:tc>
+                <a:tc>
+                  <a:txBody>
+                    <a:bodyPr/>
+                    <a:lstStyle/>
+                    <a:p>
+                      <a:pPr algn="ctr" indent="0" marL="0">
+                        <a:buNone/>
+                      </a:pPr>
+                      <a:r>
+                        <a:rPr lang="en-US" sz="1100" dirty="0">
+                          <a:solidFill>
+                            <a:schemeClr val="tx1"/>
+                          </a:solidFill>
+                        </a:rPr>
                         <a:t>€1,000</a:t>
                       </a:r>
                       <a:endParaRPr lang="en-US" sz="1100" dirty="0"/>
@@ -10677,7 +11265,7 @@
                   </a:tcPr>
                 </a:tc>
               </a:tr>
-              <a:tr h="384048">
+              <a:tr h="365760">
                 <a:tc>
                   <a:txBody>
                     <a:bodyPr/>
@@ -10866,6 +11454,122 @@
                             <a:schemeClr val="tx1"/>
                           </a:solidFill>
                         </a:rPr>
+                        <a:t>€11.1k</a:t>
+                      </a:r>
+                      <a:endParaRPr lang="en-US" sz="1100" dirty="0"/>
+                    </a:p>
+                  </a:txBody>
+                  <a:tcPr marL="91440" marR="91440" marT="45720" marB="45720" anchor="ctr">
+                    <a:lnL w="6350" cap="flat" cmpd="sng" algn="ctr">
+                      <a:solidFill>
+                        <a:srgbClr val="D6DEE5"/>
+                      </a:solidFill>
+                      <a:prstDash val="solid"/>
+                      <a:round/>
+                      <a:headEnd type="none" w="med" len="med"/>
+                      <a:tailEnd type="none" w="med" len="med"/>
+                    </a:lnL>
+                    <a:lnR w="6350" cap="flat" cmpd="sng" algn="ctr">
+                      <a:solidFill>
+                        <a:srgbClr val="D6DEE5"/>
+                      </a:solidFill>
+                      <a:prstDash val="solid"/>
+                      <a:round/>
+                      <a:headEnd type="none" w="med" len="med"/>
+                      <a:tailEnd type="none" w="med" len="med"/>
+                    </a:lnR>
+                    <a:lnT w="6350" cap="flat" cmpd="sng" algn="ctr">
+                      <a:solidFill>
+                        <a:srgbClr val="D6DEE5"/>
+                      </a:solidFill>
+                      <a:prstDash val="solid"/>
+                      <a:round/>
+                      <a:headEnd type="none" w="med" len="med"/>
+                      <a:tailEnd type="none" w="med" len="med"/>
+                    </a:lnT>
+                    <a:lnB w="6350" cap="flat" cmpd="sng" algn="ctr">
+                      <a:solidFill>
+                        <a:srgbClr val="D6DEE5"/>
+                      </a:solidFill>
+                      <a:prstDash val="solid"/>
+                      <a:round/>
+                      <a:headEnd type="none" w="med" len="med"/>
+                      <a:tailEnd type="none" w="med" len="med"/>
+                    </a:lnB>
+                  </a:tcPr>
+                </a:tc>
+                <a:tc>
+                  <a:txBody>
+                    <a:bodyPr/>
+                    <a:lstStyle/>
+                    <a:p>
+                      <a:pPr algn="ctr" indent="0" marL="0">
+                        <a:buNone/>
+                      </a:pPr>
+                      <a:r>
+                        <a:rPr lang="en-US" sz="1100" dirty="0">
+                          <a:solidFill>
+                            <a:schemeClr val="tx1"/>
+                          </a:solidFill>
+                        </a:rPr>
+                        <a:t>€377</a:t>
+                      </a:r>
+                      <a:endParaRPr lang="en-US" sz="1100" dirty="0"/>
+                    </a:p>
+                  </a:txBody>
+                  <a:tcPr marL="91440" marR="91440" marT="45720" marB="45720" anchor="ctr">
+                    <a:lnL w="6350" cap="flat" cmpd="sng" algn="ctr">
+                      <a:solidFill>
+                        <a:srgbClr val="D6DEE5"/>
+                      </a:solidFill>
+                      <a:prstDash val="solid"/>
+                      <a:round/>
+                      <a:headEnd type="none" w="med" len="med"/>
+                      <a:tailEnd type="none" w="med" len="med"/>
+                    </a:lnL>
+                    <a:lnR w="6350" cap="flat" cmpd="sng" algn="ctr">
+                      <a:solidFill>
+                        <a:srgbClr val="D6DEE5"/>
+                      </a:solidFill>
+                      <a:prstDash val="solid"/>
+                      <a:round/>
+                      <a:headEnd type="none" w="med" len="med"/>
+                      <a:tailEnd type="none" w="med" len="med"/>
+                    </a:lnR>
+                    <a:lnT w="6350" cap="flat" cmpd="sng" algn="ctr">
+                      <a:solidFill>
+                        <a:srgbClr val="D6DEE5"/>
+                      </a:solidFill>
+                      <a:prstDash val="solid"/>
+                      <a:round/>
+                      <a:headEnd type="none" w="med" len="med"/>
+                      <a:tailEnd type="none" w="med" len="med"/>
+                    </a:lnT>
+                    <a:lnB w="6350" cap="flat" cmpd="sng" algn="ctr">
+                      <a:solidFill>
+                        <a:srgbClr val="D6DEE5"/>
+                      </a:solidFill>
+                      <a:prstDash val="solid"/>
+                      <a:round/>
+                      <a:headEnd type="none" w="med" len="med"/>
+                      <a:tailEnd type="none" w="med" len="med"/>
+                    </a:lnB>
+                  </a:tcPr>
+                </a:tc>
+                <a:tc>
+                  <a:txBody>
+                    <a:bodyPr/>
+                    <a:lstStyle/>
+                    <a:p>
+                      <a:pPr algn="ctr" indent="0" marL="0">
+                        <a:buNone/>
+                      </a:pPr>
+                      <a:r>
+                        <a:rPr lang="en-US" sz="1100" dirty="0">
+                          <a:solidFill>
+                            <a:schemeClr val="tx1"/>
+                          </a:solidFill>
+                        </a:rPr>
                         <a:t>€1,329</a:t>
                       </a:r>
                       <a:endParaRPr lang="en-US" sz="1100" dirty="0"/>
@@ -10969,7 +11673,7 @@
                   </a:tcPr>
                 </a:tc>
               </a:tr>
-              <a:tr h="384048">
+              <a:tr h="365760">
                 <a:tc>
                   <a:txBody>
                     <a:bodyPr/>
@@ -11158,6 +11862,122 @@
                             <a:schemeClr val="tx1"/>
                           </a:solidFill>
                         </a:rPr>
+                        <a:t>€5.8k</a:t>
+                      </a:r>
+                      <a:endParaRPr lang="en-US" sz="1100" dirty="0"/>
+                    </a:p>
+                  </a:txBody>
+                  <a:tcPr marL="91440" marR="91440" marT="45720" marB="45720" anchor="ctr">
+                    <a:lnL w="6350" cap="flat" cmpd="sng" algn="ctr">
+                      <a:solidFill>
+                        <a:srgbClr val="D6DEE5"/>
+                      </a:solidFill>
+                      <a:prstDash val="solid"/>
+                      <a:round/>
+                      <a:headEnd type="none" w="med" len="med"/>
+                      <a:tailEnd type="none" w="med" len="med"/>
+                    </a:lnL>
+                    <a:lnR w="6350" cap="flat" cmpd="sng" algn="ctr">
+                      <a:solidFill>
+                        <a:srgbClr val="D6DEE5"/>
+                      </a:solidFill>
+                      <a:prstDash val="solid"/>
+                      <a:round/>
+                      <a:headEnd type="none" w="med" len="med"/>
+                      <a:tailEnd type="none" w="med" len="med"/>
+                    </a:lnR>
+                    <a:lnT w="6350" cap="flat" cmpd="sng" algn="ctr">
+                      <a:solidFill>
+                        <a:srgbClr val="D6DEE5"/>
+                      </a:solidFill>
+                      <a:prstDash val="solid"/>
+                      <a:round/>
+                      <a:headEnd type="none" w="med" len="med"/>
+                      <a:tailEnd type="none" w="med" len="med"/>
+                    </a:lnT>
+                    <a:lnB w="6350" cap="flat" cmpd="sng" algn="ctr">
+                      <a:solidFill>
+                        <a:srgbClr val="D6DEE5"/>
+                      </a:solidFill>
+                      <a:prstDash val="solid"/>
+                      <a:round/>
+                      <a:headEnd type="none" w="med" len="med"/>
+                      <a:tailEnd type="none" w="med" len="med"/>
+                    </a:lnB>
+                  </a:tcPr>
+                </a:tc>
+                <a:tc>
+                  <a:txBody>
+                    <a:bodyPr/>
+                    <a:lstStyle/>
+                    <a:p>
+                      <a:pPr algn="ctr" indent="0" marL="0">
+                        <a:buNone/>
+                      </a:pPr>
+                      <a:r>
+                        <a:rPr lang="en-US" sz="1100" dirty="0">
+                          <a:solidFill>
+                            <a:schemeClr val="tx1"/>
+                          </a:solidFill>
+                        </a:rPr>
+                        <a:t>€537</a:t>
+                      </a:r>
+                      <a:endParaRPr lang="en-US" sz="1100" dirty="0"/>
+                    </a:p>
+                  </a:txBody>
+                  <a:tcPr marL="91440" marR="91440" marT="45720" marB="45720" anchor="ctr">
+                    <a:lnL w="6350" cap="flat" cmpd="sng" algn="ctr">
+                      <a:solidFill>
+                        <a:srgbClr val="D6DEE5"/>
+                      </a:solidFill>
+                      <a:prstDash val="solid"/>
+                      <a:round/>
+                      <a:headEnd type="none" w="med" len="med"/>
+                      <a:tailEnd type="none" w="med" len="med"/>
+                    </a:lnL>
+                    <a:lnR w="6350" cap="flat" cmpd="sng" algn="ctr">
+                      <a:solidFill>
+                        <a:srgbClr val="D6DEE5"/>
+                      </a:solidFill>
+                      <a:prstDash val="solid"/>
+                      <a:round/>
+                      <a:headEnd type="none" w="med" len="med"/>
+                      <a:tailEnd type="none" w="med" len="med"/>
+                    </a:lnR>
+                    <a:lnT w="6350" cap="flat" cmpd="sng" algn="ctr">
+                      <a:solidFill>
+                        <a:srgbClr val="D6DEE5"/>
+                      </a:solidFill>
+                      <a:prstDash val="solid"/>
+                      <a:round/>
+                      <a:headEnd type="none" w="med" len="med"/>
+                      <a:tailEnd type="none" w="med" len="med"/>
+                    </a:lnT>
+                    <a:lnB w="6350" cap="flat" cmpd="sng" algn="ctr">
+                      <a:solidFill>
+                        <a:srgbClr val="D6DEE5"/>
+                      </a:solidFill>
+                      <a:prstDash val="solid"/>
+                      <a:round/>
+                      <a:headEnd type="none" w="med" len="med"/>
+                      <a:tailEnd type="none" w="med" len="med"/>
+                    </a:lnB>
+                  </a:tcPr>
+                </a:tc>
+                <a:tc>
+                  <a:txBody>
+                    <a:bodyPr/>
+                    <a:lstStyle/>
+                    <a:p>
+                      <a:pPr algn="ctr" indent="0" marL="0">
+                        <a:buNone/>
+                      </a:pPr>
+                      <a:r>
+                        <a:rPr lang="en-US" sz="1100" dirty="0">
+                          <a:solidFill>
+                            <a:schemeClr val="tx1"/>
+                          </a:solidFill>
+                        </a:rPr>
                         <a:t>€1,564</a:t>
                       </a:r>
                       <a:endParaRPr lang="en-US" sz="1100" dirty="0"/>
@@ -11261,7 +12081,7 @@
                   </a:tcPr>
                 </a:tc>
               </a:tr>
-              <a:tr h="384048">
+              <a:tr h="365760">
                 <a:tc>
                   <a:txBody>
                     <a:bodyPr/>
@@ -11450,6 +12270,122 @@
                             <a:schemeClr val="tx1"/>
                           </a:solidFill>
                         </a:rPr>
+                        <a:t>€27.2k</a:t>
+                      </a:r>
+                      <a:endParaRPr lang="en-US" sz="1100" dirty="0"/>
+                    </a:p>
+                  </a:txBody>
+                  <a:tcPr marL="91440" marR="91440" marT="45720" marB="45720" anchor="ctr">
+                    <a:lnL w="6350" cap="flat" cmpd="sng" algn="ctr">
+                      <a:solidFill>
+                        <a:srgbClr val="D6DEE5"/>
+                      </a:solidFill>
+                      <a:prstDash val="solid"/>
+                      <a:round/>
+                      <a:headEnd type="none" w="med" len="med"/>
+                      <a:tailEnd type="none" w="med" len="med"/>
+                    </a:lnL>
+                    <a:lnR w="6350" cap="flat" cmpd="sng" algn="ctr">
+                      <a:solidFill>
+                        <a:srgbClr val="D6DEE5"/>
+                      </a:solidFill>
+                      <a:prstDash val="solid"/>
+                      <a:round/>
+                      <a:headEnd type="none" w="med" len="med"/>
+                      <a:tailEnd type="none" w="med" len="med"/>
+                    </a:lnR>
+                    <a:lnT w="6350" cap="flat" cmpd="sng" algn="ctr">
+                      <a:solidFill>
+                        <a:srgbClr val="D6DEE5"/>
+                      </a:solidFill>
+                      <a:prstDash val="solid"/>
+                      <a:round/>
+                      <a:headEnd type="none" w="med" len="med"/>
+                      <a:tailEnd type="none" w="med" len="med"/>
+                    </a:lnT>
+                    <a:lnB w="6350" cap="flat" cmpd="sng" algn="ctr">
+                      <a:solidFill>
+                        <a:srgbClr val="D6DEE5"/>
+                      </a:solidFill>
+                      <a:prstDash val="solid"/>
+                      <a:round/>
+                      <a:headEnd type="none" w="med" len="med"/>
+                      <a:tailEnd type="none" w="med" len="med"/>
+                    </a:lnB>
+                  </a:tcPr>
+                </a:tc>
+                <a:tc>
+                  <a:txBody>
+                    <a:bodyPr/>
+                    <a:lstStyle/>
+                    <a:p>
+                      <a:pPr algn="ctr" indent="0" marL="0">
+                        <a:buNone/>
+                      </a:pPr>
+                      <a:r>
+                        <a:rPr lang="en-US" sz="1100" dirty="0">
+                          <a:solidFill>
+                            <a:schemeClr val="tx1"/>
+                          </a:solidFill>
+                        </a:rPr>
+                        <a:t>€444</a:t>
+                      </a:r>
+                      <a:endParaRPr lang="en-US" sz="1100" dirty="0"/>
+                    </a:p>
+                  </a:txBody>
+                  <a:tcPr marL="91440" marR="91440" marT="45720" marB="45720" anchor="ctr">
+                    <a:lnL w="6350" cap="flat" cmpd="sng" algn="ctr">
+                      <a:solidFill>
+                        <a:srgbClr val="D6DEE5"/>
+                      </a:solidFill>
+                      <a:prstDash val="solid"/>
+                      <a:round/>
+                      <a:headEnd type="none" w="med" len="med"/>
+                      <a:tailEnd type="none" w="med" len="med"/>
+                    </a:lnL>
+                    <a:lnR w="6350" cap="flat" cmpd="sng" algn="ctr">
+                      <a:solidFill>
+                        <a:srgbClr val="D6DEE5"/>
+                      </a:solidFill>
+                      <a:prstDash val="solid"/>
+                      <a:round/>
+                      <a:headEnd type="none" w="med" len="med"/>
+                      <a:tailEnd type="none" w="med" len="med"/>
+                    </a:lnR>
+                    <a:lnT w="6350" cap="flat" cmpd="sng" algn="ctr">
+                      <a:solidFill>
+                        <a:srgbClr val="D6DEE5"/>
+                      </a:solidFill>
+                      <a:prstDash val="solid"/>
+                      <a:round/>
+                      <a:headEnd type="none" w="med" len="med"/>
+                      <a:tailEnd type="none" w="med" len="med"/>
+                    </a:lnT>
+                    <a:lnB w="6350" cap="flat" cmpd="sng" algn="ctr">
+                      <a:solidFill>
+                        <a:srgbClr val="D6DEE5"/>
+                      </a:solidFill>
+                      <a:prstDash val="solid"/>
+                      <a:round/>
+                      <a:headEnd type="none" w="med" len="med"/>
+                      <a:tailEnd type="none" w="med" len="med"/>
+                    </a:lnB>
+                  </a:tcPr>
+                </a:tc>
+                <a:tc>
+                  <a:txBody>
+                    <a:bodyPr/>
+                    <a:lstStyle/>
+                    <a:p>
+                      <a:pPr algn="ctr" indent="0" marL="0">
+                        <a:buNone/>
+                      </a:pPr>
+                      <a:r>
+                        <a:rPr lang="en-US" sz="1100" dirty="0">
+                          <a:solidFill>
+                            <a:schemeClr val="tx1"/>
+                          </a:solidFill>
+                        </a:rPr>
                         <a:t>€1,687</a:t>
                       </a:r>
                       <a:endParaRPr lang="en-US" sz="1100" dirty="0"/>
@@ -11553,7 +12489,7 @@
                   </a:tcPr>
                 </a:tc>
               </a:tr>
-              <a:tr h="384048">
+              <a:tr h="365760">
                 <a:tc>
                   <a:txBody>
                     <a:bodyPr/>
@@ -11742,7 +12678,7 @@
                             <a:schemeClr val="tx1"/>
                           </a:solidFill>
                         </a:rPr>
-                        <a:t>€2,143</a:t>
+                        <a:t>€35.7k</a:t>
                       </a:r>
                       <a:endParaRPr lang="en-US" sz="1100" dirty="0"/>
                     </a:p>
@@ -11800,7 +12736,7 @@
                             <a:schemeClr val="tx1"/>
                           </a:solidFill>
                         </a:rPr>
-                        <a:t>16.4</a:t>
+                        <a:t>€717</a:t>
                       </a:r>
                       <a:endParaRPr lang="en-US" sz="1100" dirty="0"/>
                     </a:p>
@@ -11844,8 +12780,124 @@
                     </a:lnB>
                   </a:tcPr>
                 </a:tc>
+                <a:tc>
+                  <a:txBody>
+                    <a:bodyPr/>
+                    <a:lstStyle/>
+                    <a:p>
+                      <a:pPr algn="ctr" indent="0" marL="0">
+                        <a:buNone/>
+                      </a:pPr>
+                      <a:r>
+                        <a:rPr lang="en-US" sz="1100" dirty="0">
+                          <a:solidFill>
+                            <a:schemeClr val="tx1"/>
+                          </a:solidFill>
+                        </a:rPr>
+                        <a:t>€2,142</a:t>
+                      </a:r>
+                      <a:endParaRPr lang="en-US" sz="1100" dirty="0"/>
+                    </a:p>
+                  </a:txBody>
+                  <a:tcPr marL="91440" marR="91440" marT="45720" marB="45720" anchor="ctr">
+                    <a:lnL w="6350" cap="flat" cmpd="sng" algn="ctr">
+                      <a:solidFill>
+                        <a:srgbClr val="D6DEE5"/>
+                      </a:solidFill>
+                      <a:prstDash val="solid"/>
+                      <a:round/>
+                      <a:headEnd type="none" w="med" len="med"/>
+                      <a:tailEnd type="none" w="med" len="med"/>
+                    </a:lnL>
+                    <a:lnR w="6350" cap="flat" cmpd="sng" algn="ctr">
+                      <a:solidFill>
+                        <a:srgbClr val="D6DEE5"/>
+                      </a:solidFill>
+                      <a:prstDash val="solid"/>
+                      <a:round/>
+                      <a:headEnd type="none" w="med" len="med"/>
+                      <a:tailEnd type="none" w="med" len="med"/>
+                    </a:lnR>
+                    <a:lnT w="6350" cap="flat" cmpd="sng" algn="ctr">
+                      <a:solidFill>
+                        <a:srgbClr val="D6DEE5"/>
+                      </a:solidFill>
+                      <a:prstDash val="solid"/>
+                      <a:round/>
+                      <a:headEnd type="none" w="med" len="med"/>
+                      <a:tailEnd type="none" w="med" len="med"/>
+                    </a:lnT>
+                    <a:lnB w="6350" cap="flat" cmpd="sng" algn="ctr">
+                      <a:solidFill>
+                        <a:srgbClr val="D6DEE5"/>
+                      </a:solidFill>
+                      <a:prstDash val="solid"/>
+                      <a:round/>
+                      <a:headEnd type="none" w="med" len="med"/>
+                      <a:tailEnd type="none" w="med" len="med"/>
+                    </a:lnB>
+                  </a:tcPr>
+                </a:tc>
+                <a:tc>
+                  <a:txBody>
+                    <a:bodyPr/>
+                    <a:lstStyle/>
+                    <a:p>
+                      <a:pPr algn="ctr" indent="0" marL="0">
+                        <a:buNone/>
+                      </a:pPr>
+                      <a:r>
+                        <a:rPr lang="en-US" sz="1100" dirty="0">
+                          <a:solidFill>
+                            <a:schemeClr val="tx1"/>
+                          </a:solidFill>
+                        </a:rPr>
+                        <a:t>16.7</a:t>
+                      </a:r>
+                      <a:endParaRPr lang="en-US" sz="1100" dirty="0"/>
+                    </a:p>
+                  </a:txBody>
+                  <a:tcPr marL="91440" marR="91440" marT="45720" marB="45720" anchor="ctr">
+                    <a:lnL w="6350" cap="flat" cmpd="sng" algn="ctr">
+                      <a:solidFill>
+                        <a:srgbClr val="D6DEE5"/>
+                      </a:solidFill>
+                      <a:prstDash val="solid"/>
+                      <a:round/>
+                      <a:headEnd type="none" w="med" len="med"/>
+                      <a:tailEnd type="none" w="med" len="med"/>
+                    </a:lnL>
+                    <a:lnR w="6350" cap="flat" cmpd="sng" algn="ctr">
+                      <a:solidFill>
+                        <a:srgbClr val="D6DEE5"/>
+                      </a:solidFill>
+                      <a:prstDash val="solid"/>
+                      <a:round/>
+                      <a:headEnd type="none" w="med" len="med"/>
+                      <a:tailEnd type="none" w="med" len="med"/>
+                    </a:lnR>
+                    <a:lnT w="6350" cap="flat" cmpd="sng" algn="ctr">
+                      <a:solidFill>
+                        <a:srgbClr val="D6DEE5"/>
+                      </a:solidFill>
+                      <a:prstDash val="solid"/>
+                      <a:round/>
+                      <a:headEnd type="none" w="med" len="med"/>
+                      <a:tailEnd type="none" w="med" len="med"/>
+                    </a:lnT>
+                    <a:lnB w="6350" cap="flat" cmpd="sng" algn="ctr">
+                      <a:solidFill>
+                        <a:srgbClr val="D6DEE5"/>
+                      </a:solidFill>
+                      <a:prstDash val="solid"/>
+                      <a:round/>
+                      <a:headEnd type="none" w="med" len="med"/>
+                      <a:tailEnd type="none" w="med" len="med"/>
+                    </a:lnB>
+                  </a:tcPr>
+                </a:tc>
               </a:tr>
-              <a:tr h="384048">
+              <a:tr h="365760">
                 <a:tc>
                   <a:txBody>
                     <a:bodyPr/>
@@ -12034,6 +13086,122 @@
                             <a:schemeClr val="tx1"/>
                           </a:solidFill>
                         </a:rPr>
+                        <a:t>€1.5k</a:t>
+                      </a:r>
+                      <a:endParaRPr lang="en-US" sz="1100" dirty="0"/>
+                    </a:p>
+                  </a:txBody>
+                  <a:tcPr marL="91440" marR="91440" marT="45720" marB="45720" anchor="ctr">
+                    <a:lnL w="6350" cap="flat" cmpd="sng" algn="ctr">
+                      <a:solidFill>
+                        <a:srgbClr val="D6DEE5"/>
+                      </a:solidFill>
+                      <a:prstDash val="solid"/>
+                      <a:round/>
+                      <a:headEnd type="none" w="med" len="med"/>
+                      <a:tailEnd type="none" w="med" len="med"/>
+                    </a:lnL>
+                    <a:lnR w="6350" cap="flat" cmpd="sng" algn="ctr">
+                      <a:solidFill>
+                        <a:srgbClr val="D6DEE5"/>
+                      </a:solidFill>
+                      <a:prstDash val="solid"/>
+                      <a:round/>
+                      <a:headEnd type="none" w="med" len="med"/>
+                      <a:tailEnd type="none" w="med" len="med"/>
+                    </a:lnR>
+                    <a:lnT w="6350" cap="flat" cmpd="sng" algn="ctr">
+                      <a:solidFill>
+                        <a:srgbClr val="D6DEE5"/>
+                      </a:solidFill>
+                      <a:prstDash val="solid"/>
+                      <a:round/>
+                      <a:headEnd type="none" w="med" len="med"/>
+                      <a:tailEnd type="none" w="med" len="med"/>
+                    </a:lnT>
+                    <a:lnB w="6350" cap="flat" cmpd="sng" algn="ctr">
+                      <a:solidFill>
+                        <a:srgbClr val="D6DEE5"/>
+                      </a:solidFill>
+                      <a:prstDash val="solid"/>
+                      <a:round/>
+                      <a:headEnd type="none" w="med" len="med"/>
+                      <a:tailEnd type="none" w="med" len="med"/>
+                    </a:lnB>
+                  </a:tcPr>
+                </a:tc>
+                <a:tc>
+                  <a:txBody>
+                    <a:bodyPr/>
+                    <a:lstStyle/>
+                    <a:p>
+                      <a:pPr algn="ctr" indent="0" marL="0">
+                        <a:buNone/>
+                      </a:pPr>
+                      <a:r>
+                        <a:rPr lang="en-US" sz="1100" dirty="0">
+                          <a:solidFill>
+                            <a:schemeClr val="tx1"/>
+                          </a:solidFill>
+                        </a:rPr>
+                        <a:t>€820</a:t>
+                      </a:r>
+                      <a:endParaRPr lang="en-US" sz="1100" dirty="0"/>
+                    </a:p>
+                  </a:txBody>
+                  <a:tcPr marL="91440" marR="91440" marT="45720" marB="45720" anchor="ctr">
+                    <a:lnL w="6350" cap="flat" cmpd="sng" algn="ctr">
+                      <a:solidFill>
+                        <a:srgbClr val="D6DEE5"/>
+                      </a:solidFill>
+                      <a:prstDash val="solid"/>
+                      <a:round/>
+                      <a:headEnd type="none" w="med" len="med"/>
+                      <a:tailEnd type="none" w="med" len="med"/>
+                    </a:lnL>
+                    <a:lnR w="6350" cap="flat" cmpd="sng" algn="ctr">
+                      <a:solidFill>
+                        <a:srgbClr val="D6DEE5"/>
+                      </a:solidFill>
+                      <a:prstDash val="solid"/>
+                      <a:round/>
+                      <a:headEnd type="none" w="med" len="med"/>
+                      <a:tailEnd type="none" w="med" len="med"/>
+                    </a:lnR>
+                    <a:lnT w="6350" cap="flat" cmpd="sng" algn="ctr">
+                      <a:solidFill>
+                        <a:srgbClr val="D6DEE5"/>
+                      </a:solidFill>
+                      <a:prstDash val="solid"/>
+                      <a:round/>
+                      <a:headEnd type="none" w="med" len="med"/>
+                      <a:tailEnd type="none" w="med" len="med"/>
+                    </a:lnT>
+                    <a:lnB w="6350" cap="flat" cmpd="sng" algn="ctr">
+                      <a:solidFill>
+                        <a:srgbClr val="D6DEE5"/>
+                      </a:solidFill>
+                      <a:prstDash val="solid"/>
+                      <a:round/>
+                      <a:headEnd type="none" w="med" len="med"/>
+                      <a:tailEnd type="none" w="med" len="med"/>
+                    </a:lnB>
+                  </a:tcPr>
+                </a:tc>
+                <a:tc>
+                  <a:txBody>
+                    <a:bodyPr/>
+                    <a:lstStyle/>
+                    <a:p>
+                      <a:pPr algn="ctr" indent="0" marL="0">
+                        <a:buNone/>
+                      </a:pPr>
+                      <a:r>
+                        <a:rPr lang="en-US" sz="1100" dirty="0">
+                          <a:solidFill>
+                            <a:schemeClr val="tx1"/>
+                          </a:solidFill>
+                        </a:rPr>
                         <a:t>€2,388</a:t>
                       </a:r>
                       <a:endParaRPr lang="en-US" sz="1100" dirty="0"/>
@@ -12137,7 +13305,7 @@
                   </a:tcPr>
                 </a:tc>
               </a:tr>
-              <a:tr h="384048">
+              <a:tr h="365760">
                 <a:tc>
                   <a:txBody>
                     <a:bodyPr/>
@@ -12326,7 +13494,123 @@
                             <a:schemeClr val="tx1"/>
                           </a:solidFill>
                         </a:rPr>
-                        <a:t>€3,393</a:t>
+                        <a:t>€3k</a:t>
+                      </a:r>
+                      <a:endParaRPr lang="en-US" sz="1100" dirty="0"/>
+                    </a:p>
+                  </a:txBody>
+                  <a:tcPr marL="91440" marR="91440" marT="45720" marB="45720" anchor="ctr">
+                    <a:lnL w="6350" cap="flat" cmpd="sng" algn="ctr">
+                      <a:solidFill>
+                        <a:srgbClr val="D6DEE5"/>
+                      </a:solidFill>
+                      <a:prstDash val="solid"/>
+                      <a:round/>
+                      <a:headEnd type="none" w="med" len="med"/>
+                      <a:tailEnd type="none" w="med" len="med"/>
+                    </a:lnL>
+                    <a:lnR w="6350" cap="flat" cmpd="sng" algn="ctr">
+                      <a:solidFill>
+                        <a:srgbClr val="D6DEE5"/>
+                      </a:solidFill>
+                      <a:prstDash val="solid"/>
+                      <a:round/>
+                      <a:headEnd type="none" w="med" len="med"/>
+                      <a:tailEnd type="none" w="med" len="med"/>
+                    </a:lnR>
+                    <a:lnT w="6350" cap="flat" cmpd="sng" algn="ctr">
+                      <a:solidFill>
+                        <a:srgbClr val="D6DEE5"/>
+                      </a:solidFill>
+                      <a:prstDash val="solid"/>
+                      <a:round/>
+                      <a:headEnd type="none" w="med" len="med"/>
+                      <a:tailEnd type="none" w="med" len="med"/>
+                    </a:lnT>
+                    <a:lnB w="6350" cap="flat" cmpd="sng" algn="ctr">
+                      <a:solidFill>
+                        <a:srgbClr val="D6DEE5"/>
+                      </a:solidFill>
+                      <a:prstDash val="solid"/>
+                      <a:round/>
+                      <a:headEnd type="none" w="med" len="med"/>
+                      <a:tailEnd type="none" w="med" len="med"/>
+                    </a:lnB>
+                  </a:tcPr>
+                </a:tc>
+                <a:tc>
+                  <a:txBody>
+                    <a:bodyPr/>
+                    <a:lstStyle/>
+                    <a:p>
+                      <a:pPr algn="ctr" indent="0" marL="0">
+                        <a:buNone/>
+                      </a:pPr>
+                      <a:r>
+                        <a:rPr lang="en-US" sz="1100" dirty="0">
+                          <a:solidFill>
+                            <a:schemeClr val="tx1"/>
+                          </a:solidFill>
+                        </a:rPr>
+                        <a:t>€1,044</a:t>
+                      </a:r>
+                      <a:endParaRPr lang="en-US" sz="1100" dirty="0"/>
+                    </a:p>
+                  </a:txBody>
+                  <a:tcPr marL="91440" marR="91440" marT="45720" marB="45720" anchor="ctr">
+                    <a:lnL w="6350" cap="flat" cmpd="sng" algn="ctr">
+                      <a:solidFill>
+                        <a:srgbClr val="D6DEE5"/>
+                      </a:solidFill>
+                      <a:prstDash val="solid"/>
+                      <a:round/>
+                      <a:headEnd type="none" w="med" len="med"/>
+                      <a:tailEnd type="none" w="med" len="med"/>
+                    </a:lnL>
+                    <a:lnR w="6350" cap="flat" cmpd="sng" algn="ctr">
+                      <a:solidFill>
+                        <a:srgbClr val="D6DEE5"/>
+                      </a:solidFill>
+                      <a:prstDash val="solid"/>
+                      <a:round/>
+                      <a:headEnd type="none" w="med" len="med"/>
+                      <a:tailEnd type="none" w="med" len="med"/>
+                    </a:lnR>
+                    <a:lnT w="6350" cap="flat" cmpd="sng" algn="ctr">
+                      <a:solidFill>
+                        <a:srgbClr val="D6DEE5"/>
+                      </a:solidFill>
+                      <a:prstDash val="solid"/>
+                      <a:round/>
+                      <a:headEnd type="none" w="med" len="med"/>
+                      <a:tailEnd type="none" w="med" len="med"/>
+                    </a:lnT>
+                    <a:lnB w="6350" cap="flat" cmpd="sng" algn="ctr">
+                      <a:solidFill>
+                        <a:srgbClr val="D6DEE5"/>
+                      </a:solidFill>
+                      <a:prstDash val="solid"/>
+                      <a:round/>
+                      <a:headEnd type="none" w="med" len="med"/>
+                      <a:tailEnd type="none" w="med" len="med"/>
+                    </a:lnB>
+                  </a:tcPr>
+                </a:tc>
+                <a:tc>
+                  <a:txBody>
+                    <a:bodyPr/>
+                    <a:lstStyle/>
+                    <a:p>
+                      <a:pPr algn="ctr" indent="0" marL="0">
+                        <a:buNone/>
+                      </a:pPr>
+                      <a:r>
+                        <a:rPr lang="en-US" sz="1100" dirty="0">
+                          <a:solidFill>
+                            <a:schemeClr val="tx1"/>
+                          </a:solidFill>
+                        </a:rPr>
+                        <a:t>€3,442</a:t>
                       </a:r>
                       <a:endParaRPr lang="en-US" sz="1100" dirty="0"/>
                     </a:p>
@@ -12429,6 +13713,390 @@
                   </a:tcPr>
                 </a:tc>
               </a:tr>
+              <a:tr h="365760">
+                <a:tc>
+                  <a:txBody>
+                    <a:bodyPr/>
+                    <a:lstStyle/>
+                    <a:p>
+                      <a:pPr indent="0" marL="0">
+                        <a:buNone/>
+                      </a:pPr>
+                      <a:r>
+                        <a:rPr lang="en-US" sz="1100" b="1" dirty="0">
+                          <a:solidFill>
+                            <a:schemeClr val="tx1"/>
+                          </a:solidFill>
+                        </a:rPr>
+                        <a:t>Total</a:t>
+                      </a:r>
+                      <a:endParaRPr lang="en-US" sz="1100" dirty="0"/>
+                    </a:p>
+                  </a:txBody>
+                  <a:tcPr marL="91440" marR="91440" marT="45720" marB="45720" anchor="ctr">
+                    <a:lnL w="6350" cap="flat" cmpd="sng" algn="ctr">
+                      <a:solidFill>
+                        <a:srgbClr val="D6DEE5"/>
+                      </a:solidFill>
+                      <a:prstDash val="solid"/>
+                      <a:round/>
+                      <a:headEnd type="none" w="med" len="med"/>
+                      <a:tailEnd type="none" w="med" len="med"/>
+                    </a:lnL>
+                    <a:lnR w="6350" cap="flat" cmpd="sng" algn="ctr">
+                      <a:solidFill>
+                        <a:srgbClr val="D6DEE5"/>
+                      </a:solidFill>
+                      <a:prstDash val="solid"/>
+                      <a:round/>
+                      <a:headEnd type="none" w="med" len="med"/>
+                      <a:tailEnd type="none" w="med" len="med"/>
+                    </a:lnR>
+                    <a:lnT w="6350" cap="flat" cmpd="sng" algn="ctr">
+                      <a:solidFill>
+                        <a:srgbClr val="D6DEE5"/>
+                      </a:solidFill>
+                      <a:prstDash val="solid"/>
+                      <a:round/>
+                      <a:headEnd type="none" w="med" len="med"/>
+                      <a:tailEnd type="none" w="med" len="med"/>
+                    </a:lnT>
+                    <a:lnB w="6350" cap="flat" cmpd="sng" algn="ctr">
+                      <a:solidFill>
+                        <a:srgbClr val="D6DEE5"/>
+                      </a:solidFill>
+                      <a:prstDash val="solid"/>
+                      <a:round/>
+                      <a:headEnd type="none" w="med" len="med"/>
+                      <a:tailEnd type="none" w="med" len="med"/>
+                    </a:lnB>
+                  </a:tcPr>
+                </a:tc>
+                <a:tc>
+                  <a:txBody>
+                    <a:bodyPr/>
+                    <a:lstStyle/>
+                    <a:p>
+                      <a:pPr indent="0" marL="0">
+                        <a:buNone/>
+                      </a:pPr>
+                      <a:endParaRPr lang="en-US" sz="1100" dirty="0"/>
+                    </a:p>
+                  </a:txBody>
+                  <a:tcPr marL="91440" marR="91440" marT="45720" marB="45720" anchor="ctr">
+                    <a:lnL w="6350" cap="flat" cmpd="sng" algn="ctr">
+                      <a:solidFill>
+                        <a:srgbClr val="D6DEE5"/>
+                      </a:solidFill>
+                      <a:prstDash val="solid"/>
+                      <a:round/>
+                      <a:headEnd type="none" w="med" len="med"/>
+                      <a:tailEnd type="none" w="med" len="med"/>
+                    </a:lnL>
+                    <a:lnR w="6350" cap="flat" cmpd="sng" algn="ctr">
+                      <a:solidFill>
+                        <a:srgbClr val="D6DEE5"/>
+                      </a:solidFill>
+                      <a:prstDash val="solid"/>
+                      <a:round/>
+                      <a:headEnd type="none" w="med" len="med"/>
+                      <a:tailEnd type="none" w="med" len="med"/>
+                    </a:lnR>
+                    <a:lnT w="6350" cap="flat" cmpd="sng" algn="ctr">
+                      <a:solidFill>
+                        <a:srgbClr val="D6DEE5"/>
+                      </a:solidFill>
+                      <a:prstDash val="solid"/>
+                      <a:round/>
+                      <a:headEnd type="none" w="med" len="med"/>
+                      <a:tailEnd type="none" w="med" len="med"/>
+                    </a:lnT>
+                    <a:lnB w="6350" cap="flat" cmpd="sng" algn="ctr">
+                      <a:solidFill>
+                        <a:srgbClr val="D6DEE5"/>
+                      </a:solidFill>
+                      <a:prstDash val="solid"/>
+                      <a:round/>
+                      <a:headEnd type="none" w="med" len="med"/>
+                      <a:tailEnd type="none" w="med" len="med"/>
+                    </a:lnB>
+                  </a:tcPr>
+                </a:tc>
+                <a:tc>
+                  <a:txBody>
+                    <a:bodyPr/>
+                    <a:lstStyle/>
+                    <a:p>
+                      <a:pPr indent="0" marL="0">
+                        <a:buNone/>
+                      </a:pPr>
+                      <a:endParaRPr lang="en-US" sz="1100" dirty="0"/>
+                    </a:p>
+                  </a:txBody>
+                  <a:tcPr marL="91440" marR="91440" marT="45720" marB="45720" anchor="ctr">
+                    <a:lnL w="6350" cap="flat" cmpd="sng" algn="ctr">
+                      <a:solidFill>
+                        <a:srgbClr val="D6DEE5"/>
+                      </a:solidFill>
+                      <a:prstDash val="solid"/>
+                      <a:round/>
+                      <a:headEnd type="none" w="med" len="med"/>
+                      <a:tailEnd type="none" w="med" len="med"/>
+                    </a:lnL>
+                    <a:lnR w="6350" cap="flat" cmpd="sng" algn="ctr">
+                      <a:solidFill>
+                        <a:srgbClr val="D6DEE5"/>
+                      </a:solidFill>
+                      <a:prstDash val="solid"/>
+                      <a:round/>
+                      <a:headEnd type="none" w="med" len="med"/>
+                      <a:tailEnd type="none" w="med" len="med"/>
+                    </a:lnR>
+                    <a:lnT w="6350" cap="flat" cmpd="sng" algn="ctr">
+                      <a:solidFill>
+                        <a:srgbClr val="D6DEE5"/>
+                      </a:solidFill>
+                      <a:prstDash val="solid"/>
+                      <a:round/>
+                      <a:headEnd type="none" w="med" len="med"/>
+                      <a:tailEnd type="none" w="med" len="med"/>
+                    </a:lnT>
+                    <a:lnB w="6350" cap="flat" cmpd="sng" algn="ctr">
+                      <a:solidFill>
+                        <a:srgbClr val="D6DEE5"/>
+                      </a:solidFill>
+                      <a:prstDash val="solid"/>
+                      <a:round/>
+                      <a:headEnd type="none" w="med" len="med"/>
+                      <a:tailEnd type="none" w="med" len="med"/>
+                    </a:lnB>
+                  </a:tcPr>
+                </a:tc>
+                <a:tc>
+                  <a:txBody>
+                    <a:bodyPr/>
+                    <a:lstStyle/>
+                    <a:p>
+                      <a:pPr algn="ctr" indent="0" marL="0">
+                        <a:buNone/>
+                      </a:pPr>
+                      <a:r>
+                        <a:rPr lang="en-US" sz="1100" b="1" dirty="0">
+                          <a:solidFill>
+                            <a:schemeClr val="tx1"/>
+                          </a:solidFill>
+                        </a:rPr>
+                        <a:t>€102.3k</a:t>
+                      </a:r>
+                      <a:endParaRPr lang="en-US" sz="1100" dirty="0"/>
+                    </a:p>
+                  </a:txBody>
+                  <a:tcPr marL="91440" marR="91440" marT="45720" marB="45720" anchor="ctr">
+                    <a:lnL w="6350" cap="flat" cmpd="sng" algn="ctr">
+                      <a:solidFill>
+                        <a:srgbClr val="D6DEE5"/>
+                      </a:solidFill>
+                      <a:prstDash val="solid"/>
+                      <a:round/>
+                      <a:headEnd type="none" w="med" len="med"/>
+                      <a:tailEnd type="none" w="med" len="med"/>
+                    </a:lnL>
+                    <a:lnR w="6350" cap="flat" cmpd="sng" algn="ctr">
+                      <a:solidFill>
+                        <a:srgbClr val="D6DEE5"/>
+                      </a:solidFill>
+                      <a:prstDash val="solid"/>
+                      <a:round/>
+                      <a:headEnd type="none" w="med" len="med"/>
+                      <a:tailEnd type="none" w="med" len="med"/>
+                    </a:lnR>
+                    <a:lnT w="6350" cap="flat" cmpd="sng" algn="ctr">
+                      <a:solidFill>
+                        <a:srgbClr val="D6DEE5"/>
+                      </a:solidFill>
+                      <a:prstDash val="solid"/>
+                      <a:round/>
+                      <a:headEnd type="none" w="med" len="med"/>
+                      <a:tailEnd type="none" w="med" len="med"/>
+                    </a:lnT>
+                    <a:lnB w="6350" cap="flat" cmpd="sng" algn="ctr">
+                      <a:solidFill>
+                        <a:srgbClr val="D6DEE5"/>
+                      </a:solidFill>
+                      <a:prstDash val="solid"/>
+                      <a:round/>
+                      <a:headEnd type="none" w="med" len="med"/>
+                      <a:tailEnd type="none" w="med" len="med"/>
+                    </a:lnB>
+                  </a:tcPr>
+                </a:tc>
+                <a:tc>
+                  <a:txBody>
+                    <a:bodyPr/>
+                    <a:lstStyle/>
+                    <a:p>
+                      <a:pPr indent="0" marL="0">
+                        <a:buNone/>
+                      </a:pPr>
+                      <a:endParaRPr lang="en-US" sz="1100" dirty="0"/>
+                    </a:p>
+                  </a:txBody>
+                  <a:tcPr marL="91440" marR="91440" marT="45720" marB="45720" anchor="ctr">
+                    <a:lnL w="6350" cap="flat" cmpd="sng" algn="ctr">
+                      <a:solidFill>
+                        <a:srgbClr val="D6DEE5"/>
+                      </a:solidFill>
+                      <a:prstDash val="solid"/>
+                      <a:round/>
+                      <a:headEnd type="none" w="med" len="med"/>
+                      <a:tailEnd type="none" w="med" len="med"/>
+                    </a:lnL>
+                    <a:lnR w="6350" cap="flat" cmpd="sng" algn="ctr">
+                      <a:solidFill>
+                        <a:srgbClr val="D6DEE5"/>
+                      </a:solidFill>
+                      <a:prstDash val="solid"/>
+                      <a:round/>
+                      <a:headEnd type="none" w="med" len="med"/>
+                      <a:tailEnd type="none" w="med" len="med"/>
+                    </a:lnR>
+                    <a:lnT w="6350" cap="flat" cmpd="sng" algn="ctr">
+                      <a:solidFill>
+                        <a:srgbClr val="D6DEE5"/>
+                      </a:solidFill>
+                      <a:prstDash val="solid"/>
+                      <a:round/>
+                      <a:headEnd type="none" w="med" len="med"/>
+                      <a:tailEnd type="none" w="med" len="med"/>
+                    </a:lnT>
+                    <a:lnB w="6350" cap="flat" cmpd="sng" algn="ctr">
+                      <a:solidFill>
+                        <a:srgbClr val="D6DEE5"/>
+                      </a:solidFill>
+                      <a:prstDash val="solid"/>
+                      <a:round/>
+                      <a:headEnd type="none" w="med" len="med"/>
+                      <a:tailEnd type="none" w="med" len="med"/>
+                    </a:lnB>
+                  </a:tcPr>
+                </a:tc>
+                <a:tc>
+                  <a:txBody>
+                    <a:bodyPr/>
+                    <a:lstStyle/>
+                    <a:p>
+                      <a:pPr algn="ctr" indent="0" marL="0">
+                        <a:buNone/>
+                      </a:pPr>
+                      <a:r>
+                        <a:rPr lang="en-US" sz="1100" b="1" dirty="0">
+                          <a:solidFill>
+                            <a:schemeClr val="tx1"/>
+                          </a:solidFill>
+                        </a:rPr>
+                        <a:t>€1,023</a:t>
+                      </a:r>
+                      <a:endParaRPr lang="en-US" sz="1100" dirty="0"/>
+                    </a:p>
+                  </a:txBody>
+                  <a:tcPr marL="91440" marR="91440" marT="45720" marB="45720" anchor="ctr">
+                    <a:lnL w="6350" cap="flat" cmpd="sng" algn="ctr">
+                      <a:solidFill>
+                        <a:srgbClr val="D6DEE5"/>
+                      </a:solidFill>
+                      <a:prstDash val="solid"/>
+                      <a:round/>
+                      <a:headEnd type="none" w="med" len="med"/>
+                      <a:tailEnd type="none" w="med" len="med"/>
+                    </a:lnL>
+                    <a:lnR w="6350" cap="flat" cmpd="sng" algn="ctr">
+                      <a:solidFill>
+                        <a:srgbClr val="D6DEE5"/>
+                      </a:solidFill>
+                      <a:prstDash val="solid"/>
+                      <a:round/>
+                      <a:headEnd type="none" w="med" len="med"/>
+                      <a:tailEnd type="none" w="med" len="med"/>
+                    </a:lnR>
+                    <a:lnT w="6350" cap="flat" cmpd="sng" algn="ctr">
+                      <a:solidFill>
+                        <a:srgbClr val="D6DEE5"/>
+                      </a:solidFill>
+                      <a:prstDash val="solid"/>
+                      <a:round/>
+                      <a:headEnd type="none" w="med" len="med"/>
+                      <a:tailEnd type="none" w="med" len="med"/>
+                    </a:lnT>
+                    <a:lnB w="6350" cap="flat" cmpd="sng" algn="ctr">
+                      <a:solidFill>
+                        <a:srgbClr val="D6DEE5"/>
+                      </a:solidFill>
+                      <a:prstDash val="solid"/>
+                      <a:round/>
+                      <a:headEnd type="none" w="med" len="med"/>
+                      <a:tailEnd type="none" w="med" len="med"/>
+                    </a:lnB>
+                  </a:tcPr>
+                </a:tc>
+                <a:tc>
+                  <a:txBody>
+                    <a:bodyPr/>
+                    <a:lstStyle/>
+                    <a:p>
+                      <a:pPr algn="ctr" indent="0" marL="0">
+                        <a:buNone/>
+                      </a:pPr>
+                      <a:r>
+                        <a:rPr lang="en-US" sz="1100" b="1" dirty="0">
+                          <a:solidFill>
+                            <a:schemeClr val="tx1"/>
+                          </a:solidFill>
+                        </a:rPr>
+                        <a:t>100</a:t>
+                      </a:r>
+                      <a:endParaRPr lang="en-US" sz="1100" dirty="0"/>
+                    </a:p>
+                  </a:txBody>
+                  <a:tcPr marL="91440" marR="91440" marT="45720" marB="45720" anchor="ctr">
+                    <a:lnL w="6350" cap="flat" cmpd="sng" algn="ctr">
+                      <a:solidFill>
+                        <a:srgbClr val="D6DEE5"/>
+                      </a:solidFill>
+                      <a:prstDash val="solid"/>
+                      <a:round/>
+                      <a:headEnd type="none" w="med" len="med"/>
+                      <a:tailEnd type="none" w="med" len="med"/>
+                    </a:lnL>
+                    <a:lnR w="6350" cap="flat" cmpd="sng" algn="ctr">
+                      <a:solidFill>
+                        <a:srgbClr val="D6DEE5"/>
+                      </a:solidFill>
+                      <a:prstDash val="solid"/>
+                      <a:round/>
+                      <a:headEnd type="none" w="med" len="med"/>
+                      <a:tailEnd type="none" w="med" len="med"/>
+                    </a:lnR>
+                    <a:lnT w="6350" cap="flat" cmpd="sng" algn="ctr">
+                      <a:solidFill>
+                        <a:srgbClr val="D6DEE5"/>
+                      </a:solidFill>
+                      <a:prstDash val="solid"/>
+                      <a:round/>
+                      <a:headEnd type="none" w="med" len="med"/>
+                      <a:tailEnd type="none" w="med" len="med"/>
+                    </a:lnT>
+                    <a:lnB w="6350" cap="flat" cmpd="sng" algn="ctr">
+                      <a:solidFill>
+                        <a:srgbClr val="D6DEE5"/>
+                      </a:solidFill>
+                      <a:prstDash val="solid"/>
+                      <a:round/>
+                      <a:headEnd type="none" w="med" len="med"/>
+                      <a:tailEnd type="none" w="med" len="med"/>
+                    </a:lnB>
+                  </a:tcPr>
+                </a:tc>
+              </a:tr>
             </a:tbl>
           </a:graphicData>
         </a:graphic>
@@ -12441,12 +14109,12 @@
         </p:nvSpPr>
         <p:spPr>
           <a:xfrm>
-            <a:off x="8595360" y="1188720"/>
-            <a:ext cx="3136392" cy="3108960"/>
+            <a:off x="9326880" y="1188720"/>
+            <a:ext cx="2404872" cy="4846320"/>
           </a:xfrm>
           <a:prstGeom prst="roundRect">
             <a:avLst>
-              <a:gd name="adj" fmla="val 2353"/>
+              <a:gd name="adj" fmla="val 3042"/>
             </a:avLst>
           </a:prstGeom>
           <a:solidFill>
@@ -12468,8 +14136,8 @@
         </p:nvSpPr>
         <p:spPr>
           <a:xfrm>
-            <a:off x="8778240" y="1325880"/>
-            <a:ext cx="2834640" cy="2880360"/>
+            <a:off x="9464040" y="1325880"/>
+            <a:ext cx="2148840" cy="4617720"/>
           </a:xfrm>
           <a:prstGeom prst="rect">
             <a:avLst/>
@@ -12483,7 +14151,7 @@
           <a:p>
             <a:pPr indent="0" marL="0">
               <a:spcAft>
-                <a:spcPts val="800"/>
+                <a:spcPts val="600"/>
               </a:spcAft>
               <a:buNone/>
             </a:pPr>
@@ -12495,79 +14163,97 @@
               </a:rPr>
               <a:t>How it works</a:t>
             </a:r>
-            <a:endParaRPr lang="en-US" sz="1150" dirty="0"/>
+            <a:endParaRPr lang="en-US" sz="1050" dirty="0"/>
           </a:p>
           <a:p>
             <a:pPr marL="342900" indent="-342900">
               <a:spcAft>
-                <a:spcPts val="800"/>
+                <a:spcPts val="600"/>
               </a:spcAft>
               <a:buSzPct val="100000"/>
               <a:buChar char="•"/>
             </a:pPr>
             <a:r>
-              <a:rPr lang="en-US" sz="1150" dirty="0">
+              <a:rPr lang="en-US" sz="1050" dirty="0">
                 <a:solidFill>
                   <a:schemeClr val="tx1"/>
                 </a:solidFill>
               </a:rPr>
               <a:t>Cost per hire = cost per application ÷ share qualified ÷ qualified → signed.</a:t>
             </a:r>
-            <a:endParaRPr lang="en-US" sz="1150" dirty="0"/>
+            <a:endParaRPr lang="en-US" sz="1050" dirty="0"/>
           </a:p>
           <a:p>
             <a:pPr marL="342900" indent="-342900">
               <a:spcAft>
-                <a:spcPts val="800"/>
+                <a:spcPts val="600"/>
               </a:spcAft>
               <a:buSzPct val="100000"/>
               <a:buChar char="•"/>
             </a:pPr>
             <a:r>
-              <a:rPr lang="en-US" sz="1150" dirty="0">
+              <a:rPr lang="en-US" sz="1050" dirty="0">
                 <a:solidFill>
                   <a:schemeClr val="tx1"/>
                 </a:solidFill>
               </a:rPr>
               <a:t>Each channel is capped by how many people in the local talent pool it can reach.</a:t>
             </a:r>
-            <a:endParaRPr lang="en-US" sz="1150" dirty="0"/>
+            <a:endParaRPr lang="en-US" sz="1050" dirty="0"/>
           </a:p>
           <a:p>
             <a:pPr marL="342900" indent="-342900">
               <a:spcAft>
-                <a:spcPts val="800"/>
+                <a:spcPts val="600"/>
               </a:spcAft>
               <a:buSzPct val="100000"/>
               <a:buChar char="•"/>
             </a:pPr>
             <a:r>
-              <a:rPr lang="en-US" sz="1150" dirty="0">
+              <a:rPr lang="en-US" sz="1050" dirty="0">
                 <a:solidFill>
                   <a:schemeClr val="tx1"/>
                 </a:solidFill>
               </a:rPr>
               <a:t>Each pay-per-click channel gets a €750 test per role first; Search and Meta stay at test level, and so does programmatic for automation and supervisors.</a:t>
             </a:r>
-            <a:endParaRPr lang="en-US" sz="1150" dirty="0"/>
+            <a:endParaRPr lang="en-US" sz="1050" dirty="0"/>
           </a:p>
           <a:p>
             <a:pPr marL="342900" indent="-342900">
               <a:spcAft>
-                <a:spcPts val="800"/>
+                <a:spcPts val="600"/>
               </a:spcAft>
               <a:buSzPct val="100000"/>
               <a:buChar char="•"/>
             </a:pPr>
             <a:r>
-              <a:rPr lang="en-US" sz="1150" dirty="0">
+              <a:rPr lang="en-US" sz="1050" dirty="0">
                 <a:solidFill>
                   <a:schemeClr val="tx1"/>
                 </a:solidFill>
               </a:rPr>
               <a:t>Roles: E electricians, M mechatronics, A automation, S supervisors.</a:t>
             </a:r>
-            <a:endParaRPr lang="en-US" sz="1150" dirty="0"/>
+            <a:endParaRPr lang="en-US" sz="1050" dirty="0"/>
+          </a:p>
+          <a:p>
+            <a:pPr marL="342900" indent="-342900">
+              <a:spcAft>
+                <a:spcPts val="600"/>
+              </a:spcAft>
+              <a:buSzPct val="100000"/>
+              <a:buChar char="•"/>
+            </a:pPr>
+            <a:r>
+              <a:rPr lang="en-US" sz="1050" dirty="0">
+                <a:solidFill>
+                  <a:schemeClr val="tx1"/>
+                </a:solidFill>
+              </a:rPr>
+              <a:t>Per channel × role: Channels tab (cost per qualified col O, per hire col P, rank col AC).</a:t>
+            </a:r>
+            <a:endParaRPr lang="en-US" sz="1050" dirty="0"/>
           </a:p>
         </p:txBody>
       </p:sp>
@@ -12715,7 +14401,7 @@
                 <a:ea typeface="Cambria" pitchFamily="34" charset="-122"/>
                 <a:cs typeface="Cambria" pitchFamily="34" charset="-120"/>
               </a:rPr>
-              <a:t>€101.7k planned across roles and weeks, plus a €18.3k reserve</a:t>
+              <a:t>€102.3k planned across roles and weeks, plus a €20.2k reserve</a:t>
             </a:r>
             <a:endParaRPr lang="en-US" sz="2200" dirty="0"/>
           </a:p>
@@ -13084,7 +14770,7 @@
                             <a:schemeClr val="tx1"/>
                           </a:solidFill>
                         </a:rPr>
-                        <a:t>€38.9k</a:t>
+                        <a:t>€39.1k</a:t>
                       </a:r>
                       <a:endParaRPr lang="en-US" sz="1100" dirty="0"/>
                     </a:p>
@@ -13200,7 +14886,7 @@
                             <a:schemeClr val="tx1"/>
                           </a:solidFill>
                         </a:rPr>
-                        <a:t>€1,298</a:t>
+                        <a:t>€1,304</a:t>
                       </a:r>
                       <a:endParaRPr lang="en-US" sz="1100" dirty="0"/>
                     </a:p>
@@ -13318,7 +15004,7 @@
                             <a:schemeClr val="tx1"/>
                           </a:solidFill>
                         </a:rPr>
-                        <a:t>€29.9k</a:t>
+                        <a:t>€30.1k</a:t>
                       </a:r>
                       <a:endParaRPr lang="en-US" sz="1100" dirty="0"/>
                     </a:p>
@@ -13434,7 +15120,7 @@
                             <a:schemeClr val="tx1"/>
                           </a:solidFill>
                         </a:rPr>
-                        <a:t>€663</a:t>
+                        <a:t>€670</a:t>
                       </a:r>
                       <a:endParaRPr lang="en-US" sz="1100" dirty="0"/>
                     </a:p>
@@ -13668,7 +15354,7 @@
                             <a:schemeClr val="tx1"/>
                           </a:solidFill>
                         </a:rPr>
-                        <a:t>€1,158</a:t>
+                        <a:t>€1,162</a:t>
                       </a:r>
                       <a:endParaRPr lang="en-US" sz="1100" dirty="0"/>
                     </a:p>
@@ -13902,7 +15588,7 @@
                             <a:schemeClr val="tx1"/>
                           </a:solidFill>
                         </a:rPr>
-                        <a:t>€1,550</a:t>
+                        <a:t>€1,555</a:t>
                       </a:r>
                       <a:endParaRPr lang="en-US" sz="1100" dirty="0"/>
                     </a:p>
@@ -14020,7 +15706,7 @@
                             <a:schemeClr val="tx1"/>
                           </a:solidFill>
                         </a:rPr>
-                        <a:t>€101.7k</a:t>
+                        <a:t>€102.3k</a:t>
                       </a:r>
                       <a:endParaRPr lang="en-US" sz="1100" dirty="0"/>
                     </a:p>
@@ -14136,7 +15822,7 @@
                             <a:schemeClr val="tx1"/>
                           </a:solidFill>
                         </a:rPr>
-                        <a:t>€1,017</a:t>
+                        <a:t>€1,023</a:t>
                       </a:r>
                       <a:endParaRPr lang="en-US" sz="1100" dirty="0"/>
                     </a:p>
@@ -14294,7 +15980,7 @@
                   <a:schemeClr val="tx1"/>
                 </a:solidFill>
               </a:rPr>
-              <a:t>€18.3k (15% + rounding), released from week 3 only on results.</a:t>
+              <a:t>€20.2k (15% + rounding), released from week 3 only on results.</a:t>
             </a:r>
             <a:endParaRPr lang="en-US" sz="1200" dirty="0"/>
           </a:p>
@@ -14511,7 +16197,7 @@
                 <a:ea typeface="Cambria" pitchFamily="34" charset="-122"/>
                 <a:cs typeface="Cambria" pitchFamily="34" charset="-120"/>
               </a:rPr>
-              <a:t>30% less (€84k) signs ~87; electricians fall short first</a:t>
+              <a:t>30% less (€85.75k) signs ~87; electricians fall short first</a:t>
             </a:r>
             <a:endParaRPr lang="en-US" sz="2200" dirty="0"/>
           </a:p>
@@ -14760,7 +16446,7 @@
                             <a:schemeClr val="tx1"/>
                           </a:solidFill>
                         </a:rPr>
-                        <a:t>Recommended · €120k</a:t>
+                        <a:t>Recommended · €122.5k</a:t>
                       </a:r>
                       <a:endParaRPr lang="en-US" sz="1100" dirty="0"/>
                     </a:p>
@@ -14876,7 +16562,7 @@
                             <a:schemeClr val="tx1"/>
                           </a:solidFill>
                         </a:rPr>
-                        <a:t>€1,200</a:t>
+                        <a:t>€1,225</a:t>
                       </a:r>
                       <a:endParaRPr lang="en-US" sz="1100" dirty="0"/>
                     </a:p>
@@ -14936,7 +16622,7 @@
                             <a:schemeClr val="tx1"/>
                           </a:solidFill>
                         </a:rPr>
-                        <a:t>30% less · €84k</a:t>
+                        <a:t>30% less · €85.75k</a:t>
                       </a:r>
                       <a:endParaRPr lang="en-US" sz="1100" dirty="0"/>
                     </a:p>
@@ -15058,7 +16744,7 @@
                             <a:schemeClr val="tx1"/>
                           </a:solidFill>
                         </a:rPr>
-                        <a:t>€966</a:t>
+                        <a:t>€985</a:t>
                       </a:r>
                       <a:endParaRPr lang="en-US" sz="1100" dirty="0"/>
                     </a:p>
@@ -15188,7 +16874,7 @@
                   <a:schemeClr val="tx1"/>
                 </a:solidFill>
               </a:rPr>
-              <a:t>electricians 20.6 of 30, supervisors 7.5 of 10, mechatronics 44.4 of 45, automation 14.5 of 15.</a:t>
+              <a:t>electricians 20.5 of 30, supervisors 8.1 of 10, mechatronics 44.0 of 45, automation 14.5 of 15.</a:t>
             </a:r>
             <a:endParaRPr lang="en-US" sz="1200" dirty="0"/>
           </a:p>
@@ -15219,7 +16905,7 @@
                   <a:schemeClr val="tx1"/>
                 </a:solidFill>
               </a:rPr>
-              <a:t>the last €36k buys ~13 hires, mostly electricians, the people who keep the lines running. Keep it. If you must cut, the rule cuts the dearest channels, which are mostly electrician and supervisor channels: agree that up front, and cover supervisors by internal promotion.</a:t>
+              <a:t>the last €36.75k buys ~13 hires, mostly electricians, the people who keep the lines running. Keep it. If you must cut, the rule cuts the dearest channels, which are mostly electrician and supervisor channels: agree that up front, and cover supervisors by internal promotion.</a:t>
             </a:r>
             <a:endParaRPr lang="en-US" sz="1200" dirty="0"/>
           </a:p>
@@ -15509,7 +17195,7 @@
                   <a:schemeClr val="tx1"/>
                 </a:solidFill>
               </a:rPr>
-              <a:t>211 past runners-up (consented, last year) + staff referrals</a:t>
+              <a:t>~211 past runners-up from the last 12 months (my estimate; the real export replaces it on day 1) + staff referrals</a:t>
             </a:r>
             <a:endParaRPr lang="en-US" sz="1150" dirty="0"/>
           </a:p>
@@ -16161,7 +17847,7 @@
                   <a:schemeClr val="tx1"/>
                 </a:solidFill>
               </a:rPr>
-              <a:t>~13,800 Poles commute to Brandenburg jobs, ~1,700 in machine, metal and building trades (IAB 2020); the call checks language before using our slots</a:t>
+              <a:t>~1,700 Polish machine, metal and building workers already commute to Brandenburg (IAB 2020); the call checks language before using our slots. If it fails: budget €155k</a:t>
             </a:r>
             <a:endParaRPr lang="en-US" sz="1150" dirty="0"/>
           </a:p>
@@ -16301,7 +17987,7 @@
                   <a:schemeClr val="tx1"/>
                 </a:solidFill>
               </a:rPr>
-              <a:t>Every employer holds past applicants who consented to be kept on file (GDPR allows up to a year), and nobody re-markets them. Here 211 records cost ~€14 per hire and fill week-1 slots. Joveo already runs the tracked links and distribution, so a consented past-applicant feed is one more source in the same pipeline, in any market, with no local staff.</a:t>
+              <a:t>Every employer holds past applicants who consented to be kept on file, and nobody re-markets them. Here ~211 records cost ~€14 per hire and fill week-1 slots. Joveo already runs the tracked links and distribution, so a consented past-applicant feed is one more source in the same pipeline, in any market, with no local staff.</a:t>
             </a:r>
             <a:endParaRPr lang="en-US" sz="1150" dirty="0"/>
           </a:p>

--- a/operation_uptime/Operation_Uptime_Deck.pptx
+++ b/operation_uptime/Operation_Uptime_Deck.pptx
@@ -114,30 +114,30 @@
   <p:extLst>
     <p:ext uri="{521415D9-36F7-43E2-AB2F-B90AF26B5E84}">
       <p14:sectionLst xmlns:p14="http://schemas.microsoft.com/office/powerpoint/2010/main">
-        <p14:section name="Summary" id="{512c0325-63bd-2124-7305-7cc4b400a1b9}">
+        <p14:section name="Summary" id="{908ceaaa-0a8a-7316-77ef-81e8ab90c16b}">
           <p14:sldIdLst>
             <p14:sldId id="256"/>
           </p14:sldIdLst>
         </p14:section>
-        <p14:section name="Part 1 Funnel" id="{c5af8bb1-9ac0-7224-4e31-5faeaf5bfdf8}">
+        <p14:section name="Part 1 Funnel" id="{390e3f9f-e498-3d58-12ba-1ce986b60c9b}">
           <p14:sldIdLst>
             <p14:sldId id="257"/>
             <p14:sldId id="258"/>
           </p14:sldIdLst>
         </p14:section>
-        <p14:section name="Part 2 Channels &amp; budget" id="{a5496b52-d5be-64be-f374-bff54b2aed5f}">
+        <p14:section name="Part 2 Channels &amp; budget" id="{b9c47897-2869-02ee-82ad-cf1f74d10f8a}">
           <p14:sldIdLst>
             <p14:sldId id="259"/>
             <p14:sldId id="260"/>
             <p14:sldId id="261"/>
           </p14:sldIdLst>
         </p14:section>
-        <p14:section name="Part 3 New sources" id="{2124ba60-6187-0667-504c-409cf81817be}">
+        <p14:section name="Part 3 New sources" id="{5a30b7f8-8568-0332-c2de-1146fcde999e}">
           <p14:sldIdLst>
             <p14:sldId id="262"/>
           </p14:sldIdLst>
         </p14:section>
-        <p14:section name="Part 4 Run it" id="{6fe372e7-78b2-19ab-a03c-22831a4fc1fa}">
+        <p14:section name="Part 4 Run it" id="{0bba412e-8fd9-357b-0619-3a4db2e3bb2a}">
           <p14:sldIdLst>
             <p14:sldId id="263"/>
           </p14:sldIdLst>
@@ -17552,7 +17552,7 @@
                   <a:schemeClr val="tx1"/>
                 </a:solidFill>
               </a:rPr>
-              <a:t>Certified electricians who never search for plant jobs; doubles the hardest pool</a:t>
+              <a:t>Certified electricians who never search for plant jobs; more than doubles the hardest pool (10,000 vs 4,800)</a:t>
             </a:r>
             <a:endParaRPr lang="en-US" sz="1150" dirty="0"/>
           </a:p>
@@ -17847,7 +17847,7 @@
                   <a:schemeClr val="tx1"/>
                 </a:solidFill>
               </a:rPr>
-              <a:t>~1,700 Polish machine, metal and building workers already commute to Brandenburg (IAB 2020); the call checks language before using our slots. If it fails: budget €155k</a:t>
+              <a:t>~1,700 Polish machine, metal and building workers already commute to Brandenburg (IAB 2020); the call checks language before using our slots. If response is only I2's rate (~219 applications): €132.5k; if it fails: €155k</a:t>
             </a:r>
             <a:endParaRPr lang="en-US" sz="1150" dirty="0"/>
           </a:p>
@@ -17987,7 +17987,7 @@
                   <a:schemeClr val="tx1"/>
                 </a:solidFill>
               </a:rPr>
-              <a:t>Every employer holds past applicants who consented to be kept on file, and nobody re-markets them. Here ~211 records cost ~€14 per hire and fill week-1 slots. Joveo already runs the tracked links and distribution, so a consented past-applicant feed is one more source in the same pipeline, in any market, with no local staff.</a:t>
+              <a:t>Employers that keep consented past applicants rarely run campaigns to them. Here ~211 records (my estimate) cost ~€14 per hire and fill week-1 slots. Joveo already runs the tracked links and distribution, and its Talent CRM re-engages past applicants, so a consented past-applicant feed becomes one more tracked source, in any market, with no local staff.</a:t>
             </a:r>
             <a:endParaRPr lang="en-US" sz="1150" dirty="0"/>
           </a:p>

--- a/operation_uptime/Operation_Uptime_Deck.pptx
+++ b/operation_uptime/Operation_Uptime_Deck.pptx
@@ -114,30 +114,30 @@
   <p:extLst>
     <p:ext uri="{521415D9-36F7-43E2-AB2F-B90AF26B5E84}">
       <p14:sectionLst xmlns:p14="http://schemas.microsoft.com/office/powerpoint/2010/main">
-        <p14:section name="Summary" id="{908ceaaa-0a8a-7316-77ef-81e8ab90c16b}">
+        <p14:section name="Summary" id="{57c27507-5448-50c4-fc60-93dd383255f1}">
           <p14:sldIdLst>
             <p14:sldId id="256"/>
           </p14:sldIdLst>
         </p14:section>
-        <p14:section name="Part 1 Funnel" id="{390e3f9f-e498-3d58-12ba-1ce986b60c9b}">
+        <p14:section name="Part 1 Funnel" id="{072670da-7f55-c29d-cdbc-8459dc440dac}">
           <p14:sldIdLst>
             <p14:sldId id="257"/>
             <p14:sldId id="258"/>
           </p14:sldIdLst>
         </p14:section>
-        <p14:section name="Part 2 Channels &amp; budget" id="{b9c47897-2869-02ee-82ad-cf1f74d10f8a}">
+        <p14:section name="Part 2 Channels &amp; budget" id="{f2a8b8ca-8fa3-9bbc-97d4-37cef136cfd8}">
           <p14:sldIdLst>
             <p14:sldId id="259"/>
             <p14:sldId id="260"/>
             <p14:sldId id="261"/>
           </p14:sldIdLst>
         </p14:section>
-        <p14:section name="Part 3 New sources" id="{5a30b7f8-8568-0332-c2de-1146fcde999e}">
+        <p14:section name="Part 3 New sources" id="{3d20c671-61a7-d459-f38b-dce0c89d7a68}">
           <p14:sldIdLst>
             <p14:sldId id="262"/>
           </p14:sldIdLst>
         </p14:section>
-        <p14:section name="Part 4 Run it" id="{0bba412e-8fd9-357b-0619-3a4db2e3bb2a}">
+        <p14:section name="Part 4 Run it" id="{8fe2f974-0f61-f137-2783-447144421495}">
           <p14:sldIdLst>
             <p14:sldId id="263"/>
           </p14:sldIdLst>
@@ -689,22 +689,22 @@
                 <c:formatCode>General</c:formatCode>
                 <c:ptCount val="9"/>
                 <c:pt idx="0">
-                  <c:v>19549</c:v>
+                  <c:v>21494</c:v>
                 </c:pt>
                 <c:pt idx="1">
-                  <c:v>11334</c:v>
+                  <c:v>10800</c:v>
                 </c:pt>
                 <c:pt idx="2">
-                  <c:v>14055</c:v>
+                  <c:v>13258</c:v>
                 </c:pt>
                 <c:pt idx="3">
-                  <c:v>14438</c:v>
+                  <c:v>13992</c:v>
                 </c:pt>
                 <c:pt idx="4">
-                  <c:v>13941</c:v>
+                  <c:v>13524</c:v>
                 </c:pt>
                 <c:pt idx="5">
-                  <c:v>1566</c:v>
+                  <c:v>1814</c:v>
                 </c:pt>
                 <c:pt idx="6">
                   <c:v>0</c:v>
@@ -936,22 +936,22 @@
                   <c:v>0</c:v>
                 </c:pt>
                 <c:pt idx="3">
-                  <c:v>2467</c:v>
+                  <c:v>3119</c:v>
                 </c:pt>
                 <c:pt idx="4">
-                  <c:v>1782</c:v>
+                  <c:v>1728</c:v>
                 </c:pt>
                 <c:pt idx="5">
-                  <c:v>1980</c:v>
+                  <c:v>1769</c:v>
                 </c:pt>
                 <c:pt idx="6">
-                  <c:v>2078</c:v>
+                  <c:v>1899</c:v>
                 </c:pt>
                 <c:pt idx="7">
-                  <c:v>2381</c:v>
+                  <c:v>2158</c:v>
                 </c:pt>
                 <c:pt idx="8">
-                  <c:v>290</c:v>
+                  <c:v>305</c:v>
                 </c:pt>
               </c:numCache>
             </c:numRef>
@@ -17319,7 +17319,7 @@
                   <a:schemeClr val="tx1"/>
                 </a:solidFill>
               </a:rPr>
-              <a:t>Wed 21 Oct – Tue 3 Nov (waves 1–3): €63. Pass: ≥13 qualified. Kill: &lt;7 → no further re-contacts; bonus stays live</a:t>
+              <a:t>Wed 21 Oct – Tue 3 Nov (waves 1–3): €63. Pass: ≥14 qualified. Kill: &lt;8 → no further re-contacts; bonus stays live</a:t>
             </a:r>
             <a:endParaRPr lang="en-US" sz="1150" dirty="0"/>
           </a:p>
@@ -17614,7 +17614,7 @@
                   <a:schemeClr val="tx1"/>
                 </a:solidFill>
               </a:rPr>
-              <a:t>Fri 23 Oct – Thu 5 Nov (read Mon 9 Nov): €4.8k. Pass: ≥6 qualified at ≤€500. Kill: &lt;4, &gt;€670 per qualified, or profile rejected</a:t>
+              <a:t>Fri 23 Oct – Thu 5 Nov (read Mon 9 Nov): €5.6k. Pass: ≥7 qualified at ≤€500. Kill: &lt;4, &gt;€670 per qualified, or profile rejected</a:t>
             </a:r>
             <a:endParaRPr lang="en-US" sz="1150" dirty="0"/>
           </a:p>
@@ -17909,7 +17909,7 @@
                   <a:schemeClr val="tx1"/>
                 </a:solidFill>
               </a:rPr>
-              <a:t>Tue 27 Oct – Mon 9 Nov (freelancer starts 27 Oct): €2.5k. Pass: ≥9 qualified at ≤€200. Kill: &lt;5, &gt;€270 per qualified, or too few pass the language call</a:t>
+              <a:t>Tue 27 Oct – Mon 9 Nov (freelancer starts 27 Oct): €3.2k. Pass: ≥12 qualified at ≤€200. Kill: &lt;7, &gt;€270 per qualified, or too few pass the language call</a:t>
             </a:r>
             <a:endParaRPr lang="en-US" sz="1150" dirty="0"/>
           </a:p>

--- a/operation_uptime/Operation_Uptime_Deck.pptx
+++ b/operation_uptime/Operation_Uptime_Deck.pptx
@@ -114,30 +114,30 @@
   <p:extLst>
     <p:ext uri="{521415D9-36F7-43E2-AB2F-B90AF26B5E84}">
       <p14:sectionLst xmlns:p14="http://schemas.microsoft.com/office/powerpoint/2010/main">
-        <p14:section name="Summary" id="{57c27507-5448-50c4-fc60-93dd383255f1}">
+        <p14:section name="Summary" id="{5ab33925-92a7-b0dc-36ae-fbcee60535d5}">
           <p14:sldIdLst>
             <p14:sldId id="256"/>
           </p14:sldIdLst>
         </p14:section>
-        <p14:section name="Part 1 Funnel" id="{072670da-7f55-c29d-cdbc-8459dc440dac}">
+        <p14:section name="Part 1 Funnel" id="{f9f83de2-f83b-f70e-188a-d23016dc5b0c}">
           <p14:sldIdLst>
             <p14:sldId id="257"/>
             <p14:sldId id="258"/>
           </p14:sldIdLst>
         </p14:section>
-        <p14:section name="Part 2 Channels &amp; budget" id="{f2a8b8ca-8fa3-9bbc-97d4-37cef136cfd8}">
+        <p14:section name="Part 2 Channels &amp; budget" id="{f8249b27-bc07-91bc-8f29-6a75416b6ab2}">
           <p14:sldIdLst>
             <p14:sldId id="259"/>
             <p14:sldId id="260"/>
             <p14:sldId id="261"/>
           </p14:sldIdLst>
         </p14:section>
-        <p14:section name="Part 3 New sources" id="{3d20c671-61a7-d459-f38b-dce0c89d7a68}">
+        <p14:section name="Part 3 New sources" id="{30a1c0ef-840e-68a2-fd45-e241a39598a8}">
           <p14:sldIdLst>
             <p14:sldId id="262"/>
           </p14:sldIdLst>
         </p14:section>
-        <p14:section name="Part 4 Run it" id="{8fe2f974-0f61-f137-2783-447144421495}">
+        <p14:section name="Part 4 Run it" id="{a4802716-74ad-b8ba-01f4-72d682cd9f94}">
           <p14:sldIdLst>
             <p14:sldId id="263"/>
           </p14:sldIdLst>
@@ -5224,7 +5224,7 @@
                   <a:schemeClr val="tx1"/>
                 </a:solidFill>
               </a:rPr>
-              <a:t>offers within 3 days, e-signature, stop spend Tue 24 Nov.</a:t>
+              <a:t>offers within 3 days, e-signature, stop spend Tue 24 Nov. At German process pace (8 + 12 days): ~92 hires; +9 slots a week restores 100.</a:t>
             </a:r>
             <a:endParaRPr lang="en-US" sz="1100" dirty="0"/>
           </a:p>
@@ -5405,7 +5405,7 @@
                   <a:schemeClr val="tx1"/>
                 </a:solidFill>
               </a:rPr>
-              <a:t>Construction-electrician decision by 23 Oct</a:t>
+              <a:t>Construction-electrician decision + bridge-course trainer by 23 Oct</a:t>
             </a:r>
             <a:endParaRPr lang="en-US" sz="1100" dirty="0"/>
           </a:p>
@@ -17645,7 +17645,7 @@
                   <a:schemeClr val="tx1"/>
                 </a:solidFill>
               </a:rPr>
-              <a:t>Setup 3 days (live Fri 23 Oct). Me: ads, quiz, German copywriter. Client: profile sign-off by 23 Oct, bridge course</a:t>
+              <a:t>Setup 3 days (live Fri 23 Oct). Me: ads, quiz, German copywriter. Client: profile sign-off by 23 Oct; its maintenance trainers run the 2–4 week bridge course after signing (onboarding time, not campaign budget)</a:t>
             </a:r>
             <a:endParaRPr lang="en-US" sz="1150" dirty="0"/>
           </a:p>

--- a/operation_uptime/Operation_Uptime_Deck.pptx
+++ b/operation_uptime/Operation_Uptime_Deck.pptx
@@ -114,30 +114,30 @@
   <p:extLst>
     <p:ext uri="{521415D9-36F7-43E2-AB2F-B90AF26B5E84}">
       <p14:sectionLst xmlns:p14="http://schemas.microsoft.com/office/powerpoint/2010/main">
-        <p14:section name="Summary" id="{5ab33925-92a7-b0dc-36ae-fbcee60535d5}">
+        <p14:section name="Summary" id="{5ef78ee5-3f89-00f9-7439-03126e264ae0}">
           <p14:sldIdLst>
             <p14:sldId id="256"/>
           </p14:sldIdLst>
         </p14:section>
-        <p14:section name="Part 1 Funnel" id="{f9f83de2-f83b-f70e-188a-d23016dc5b0c}">
+        <p14:section name="Part 1 Funnel" id="{ee58a048-36dd-305f-49c6-5dcdf423e9f6}">
           <p14:sldIdLst>
             <p14:sldId id="257"/>
             <p14:sldId id="258"/>
           </p14:sldIdLst>
         </p14:section>
-        <p14:section name="Part 2 Channels &amp; budget" id="{f8249b27-bc07-91bc-8f29-6a75416b6ab2}">
+        <p14:section name="Part 2 Channels &amp; budget" id="{68d46700-3da8-dc71-1177-ccfe1e9169e1}">
           <p14:sldIdLst>
             <p14:sldId id="259"/>
             <p14:sldId id="260"/>
             <p14:sldId id="261"/>
           </p14:sldIdLst>
         </p14:section>
-        <p14:section name="Part 3 New sources" id="{30a1c0ef-840e-68a2-fd45-e241a39598a8}">
+        <p14:section name="Part 3 New sources" id="{15777c3d-c783-94cd-7c65-e867410de0b6}">
           <p14:sldIdLst>
             <p14:sldId id="262"/>
           </p14:sldIdLst>
         </p14:section>
-        <p14:section name="Part 4 Run it" id="{a4802716-74ad-b8ba-01f4-72d682cd9f94}">
+        <p14:section name="Part 4 Run it" id="{8e2cf20a-be37-c5bb-6626-8d521561e42a}">
           <p14:sldIdLst>
             <p14:sldId id="263"/>
           </p14:sldIdLst>
@@ -17257,7 +17257,7 @@
                   <a:schemeClr val="tx1"/>
                 </a:solidFill>
               </a:rPr>
-              <a:t>Already screened and already wanted Tesla; ~€2.50 per application</a:t>
+              <a:t>Already screened and already wanted Tesla; ~€2.50 per application. If the export is empty: budget €135k</a:t>
             </a:r>
             <a:endParaRPr lang="en-US" sz="1150" dirty="0"/>
           </a:p>

--- a/operation_uptime/Operation_Uptime_Deck.pptx
+++ b/operation_uptime/Operation_Uptime_Deck.pptx
@@ -114,30 +114,30 @@
   <p:extLst>
     <p:ext uri="{521415D9-36F7-43E2-AB2F-B90AF26B5E84}">
       <p14:sectionLst xmlns:p14="http://schemas.microsoft.com/office/powerpoint/2010/main">
-        <p14:section name="Summary" id="{5ef78ee5-3f89-00f9-7439-03126e264ae0}">
+        <p14:section name="Summary" id="{581bceb2-2a05-6c9a-ae0d-a3eb8ee37cb6}">
           <p14:sldIdLst>
             <p14:sldId id="256"/>
           </p14:sldIdLst>
         </p14:section>
-        <p14:section name="Part 1 Funnel" id="{ee58a048-36dd-305f-49c6-5dcdf423e9f6}">
+        <p14:section name="Part 1 Funnel" id="{07c4c5de-e699-646c-7d4e-71211a21c487}">
           <p14:sldIdLst>
             <p14:sldId id="257"/>
             <p14:sldId id="258"/>
           </p14:sldIdLst>
         </p14:section>
-        <p14:section name="Part 2 Channels &amp; budget" id="{68d46700-3da8-dc71-1177-ccfe1e9169e1}">
+        <p14:section name="Part 2 Channels &amp; budget" id="{27d300ca-c76c-cf70-0eeb-e7d7f41e29f8}">
           <p14:sldIdLst>
             <p14:sldId id="259"/>
             <p14:sldId id="260"/>
             <p14:sldId id="261"/>
           </p14:sldIdLst>
         </p14:section>
-        <p14:section name="Part 3 New sources" id="{15777c3d-c783-94cd-7c65-e867410de0b6}">
+        <p14:section name="Part 3 New sources" id="{0e7b1f20-4734-bf07-d882-92b728cc8750}">
           <p14:sldIdLst>
             <p14:sldId id="262"/>
           </p14:sldIdLst>
         </p14:section>
-        <p14:section name="Part 4 Run it" id="{8e2cf20a-be37-c5bb-6626-8d521561e42a}">
+        <p14:section name="Part 4 Run it" id="{bb78509b-9802-d8e1-1ae6-31877147b0b7}">
           <p14:sldIdLst>
             <p14:sldId id="263"/>
           </p14:sldIdLst>
@@ -17257,7 +17257,7 @@
                   <a:schemeClr val="tx1"/>
                 </a:solidFill>
               </a:rPr>
-              <a:t>Already screened and already wanted Tesla; ~€2.50 per application. If the export is empty: budget €135k</a:t>
+              <a:t>Already screened and already wanted Tesla; ~€2.50 per application. If the export is empty: €135k; if referrals deliver half: €130k</a:t>
             </a:r>
             <a:endParaRPr lang="en-US" sz="1150" dirty="0"/>
           </a:p>
@@ -17645,7 +17645,7 @@
                   <a:schemeClr val="tx1"/>
                 </a:solidFill>
               </a:rPr>
-              <a:t>Setup 3 days (live Fri 23 Oct). Me: ads, quiz, German copywriter. Client: profile sign-off by 23 Oct; its maintenance trainers run the 2–4 week bridge course after signing (onboarding time, not campaign budget)</a:t>
+              <a:t>Setup 3 days (live Fri 23 Oct). Me: ads, quiz, German copywriter. Client: profile sign-off by 23 Oct; one client trainer runs the 2–4 week bridge course for the ~8 hires (≈15 person-days, client-funded onboarding)</a:t>
             </a:r>
             <a:endParaRPr lang="en-US" sz="1150" dirty="0"/>
           </a:p>

--- a/operation_uptime/Operation_Uptime_Deck.pptx
+++ b/operation_uptime/Operation_Uptime_Deck.pptx
@@ -114,30 +114,30 @@
   <p:extLst>
     <p:ext uri="{521415D9-36F7-43E2-AB2F-B90AF26B5E84}">
       <p14:sectionLst xmlns:p14="http://schemas.microsoft.com/office/powerpoint/2010/main">
-        <p14:section name="Summary" id="{581bceb2-2a05-6c9a-ae0d-a3eb8ee37cb6}">
+        <p14:section name="Summary" id="{7213c9ca-9871-4781-df10-46c5254c824f}">
           <p14:sldIdLst>
             <p14:sldId id="256"/>
           </p14:sldIdLst>
         </p14:section>
-        <p14:section name="Part 1 Funnel" id="{07c4c5de-e699-646c-7d4e-71211a21c487}">
+        <p14:section name="Part 1 Funnel" id="{4683a472-40c5-423c-765d-7a37e7788a30}">
           <p14:sldIdLst>
             <p14:sldId id="257"/>
             <p14:sldId id="258"/>
           </p14:sldIdLst>
         </p14:section>
-        <p14:section name="Part 2 Channels &amp; budget" id="{27d300ca-c76c-cf70-0eeb-e7d7f41e29f8}">
+        <p14:section name="Part 2 Channels &amp; budget" id="{cb3bb589-bbb8-3cbe-9ecb-af30ad1df453}">
           <p14:sldIdLst>
             <p14:sldId id="259"/>
             <p14:sldId id="260"/>
             <p14:sldId id="261"/>
           </p14:sldIdLst>
         </p14:section>
-        <p14:section name="Part 3 New sources" id="{0e7b1f20-4734-bf07-d882-92b728cc8750}">
+        <p14:section name="Part 3 New sources" id="{0b0dd07d-1fbd-62b8-020c-402dce2e0021}">
           <p14:sldIdLst>
             <p14:sldId id="262"/>
           </p14:sldIdLst>
         </p14:section>
-        <p14:section name="Part 4 Run it" id="{bb78509b-9802-d8e1-1ae6-31877147b0b7}">
+        <p14:section name="Part 4 Run it" id="{6622be80-6875-61e2-cf90-26dd30df70fe}">
           <p14:sldIdLst>
             <p14:sldId id="263"/>
           </p14:sldIdLst>
@@ -5224,7 +5224,7 @@
                   <a:schemeClr val="tx1"/>
                 </a:solidFill>
               </a:rPr>
-              <a:t>offers within 3 days, e-signature, stop spend Tue 24 Nov. At German process pace (8 + 12 days): ~92 hires; +9 slots a week restores 100.</a:t>
+              <a:t>offers within 3 days, e-signature, stop spend Tue 24 Nov. German process pace (8 + 12 days) or 7-day offers: ~92 hires each; +9 slots a week restores 100.</a:t>
             </a:r>
             <a:endParaRPr lang="en-US" sz="1100" dirty="0"/>
           </a:p>
@@ -17940,7 +17940,7 @@
                   <a:schemeClr val="tx1"/>
                 </a:solidFill>
               </a:rPr>
-              <a:t>Setup 1 week (live Tue 27 Oct). Me: Polish ads, hire the freelancer via rocketjobs.pl (~€19/h), call script, weekly call checks. Client: approve the ads</a:t>
+              <a:t>Setup 1 week (live Tue 27 Oct). German-market ads exclude Poland, so Polish hires come only through this route (40% cap). Me: Polish ads, hire the freelancer via rocketjobs.pl (~€19/h), call script, weekly call checks. Client: approve the ads</a:t>
             </a:r>
             <a:endParaRPr lang="en-US" sz="1150" dirty="0"/>
           </a:p>
@@ -18264,7 +18264,7 @@
                   <a:schemeClr val="tx1"/>
                 </a:solidFill>
               </a:rPr>
-              <a:t>By source × role: spend, applications, qualified. By role: assessed, passed, offers, signed (each hire keeps its ATS source tag)</a:t>
+              <a:t>By source × role: spend, applications, qualified. By role: assessed, passed, offers, signed (each hire keeps its ATS source tag and country of residence, so every Polish hire counts toward the 40% cap)</a:t>
             </a:r>
             <a:endParaRPr lang="en-US" sz="1250" dirty="0"/>
           </a:p>
@@ -18608,7 +18608,7 @@
                   <a:schemeClr val="tx1"/>
                 </a:solidFill>
               </a:rPr>
-              <a:t>Construction electricians: if stopped, programmatic fills the gap (€130k)</a:t>
+              <a:t>Construction electricians' share qualified (25%, I2Q): read 9 Nov; if far below, stop and let programmatic fill the gap (€130k)</a:t>
             </a:r>
             <a:endParaRPr lang="en-US" sz="1250" dirty="0"/>
           </a:p>

--- a/operation_uptime/Operation_Uptime_Deck.pptx
+++ b/operation_uptime/Operation_Uptime_Deck.pptx
@@ -114,30 +114,30 @@
   <p:extLst>
     <p:ext uri="{521415D9-36F7-43E2-AB2F-B90AF26B5E84}">
       <p14:sectionLst xmlns:p14="http://schemas.microsoft.com/office/powerpoint/2010/main">
-        <p14:section name="Summary" id="{7213c9ca-9871-4781-df10-46c5254c824f}">
+        <p14:section name="Summary" id="{34e3d4d6-382c-2112-dee6-102c002a5318}">
           <p14:sldIdLst>
             <p14:sldId id="256"/>
           </p14:sldIdLst>
         </p14:section>
-        <p14:section name="Part 1 Funnel" id="{4683a472-40c5-423c-765d-7a37e7788a30}">
+        <p14:section name="Part 1 Funnel" id="{1b367d1c-0d9c-3661-8ed2-da8ef135f59e}">
           <p14:sldIdLst>
             <p14:sldId id="257"/>
             <p14:sldId id="258"/>
           </p14:sldIdLst>
         </p14:section>
-        <p14:section name="Part 2 Channels &amp; budget" id="{cb3bb589-bbb8-3cbe-9ecb-af30ad1df453}">
+        <p14:section name="Part 2 Channels &amp; budget" id="{12da56cf-c95b-99f4-5bea-96714e13c0a9}">
           <p14:sldIdLst>
             <p14:sldId id="259"/>
             <p14:sldId id="260"/>
             <p14:sldId id="261"/>
           </p14:sldIdLst>
         </p14:section>
-        <p14:section name="Part 3 New sources" id="{0b0dd07d-1fbd-62b8-020c-402dce2e0021}">
+        <p14:section name="Part 3 New sources" id="{22bdfa45-d8bd-040e-e47e-c8e09ce35735}">
           <p14:sldIdLst>
             <p14:sldId id="262"/>
           </p14:sldIdLst>
         </p14:section>
-        <p14:section name="Part 4 Run it" id="{6622be80-6875-61e2-cf90-26dd30df70fe}">
+        <p14:section name="Part 4 Run it" id="{e96adb5c-42ec-77f4-21a5-09c411540a5a}">
           <p14:sldIdLst>
             <p14:sldId id="263"/>
           </p14:sldIdLst>
@@ -14251,7 +14251,7 @@
                   <a:schemeClr val="tx1"/>
                 </a:solidFill>
               </a:rPr>
-              <a:t>Per channel × role: Channels tab (cost per qualified col O, per hire col P, rank col AC).</a:t>
+              <a:t>€ / qualified and € / hire here include set-up costs (Budget tab). Media-only figures per channel × role: Channels tab (col O, col P, rank col AC).</a:t>
             </a:r>
             <a:endParaRPr lang="en-US" sz="1050" dirty="0"/>
           </a:p>

--- a/operation_uptime/Operation_Uptime_Deck.pptx
+++ b/operation_uptime/Operation_Uptime_Deck.pptx
@@ -114,30 +114,30 @@
   <p:extLst>
     <p:ext uri="{521415D9-36F7-43E2-AB2F-B90AF26B5E84}">
       <p14:sectionLst xmlns:p14="http://schemas.microsoft.com/office/powerpoint/2010/main">
-        <p14:section name="Summary" id="{34e3d4d6-382c-2112-dee6-102c002a5318}">
+        <p14:section name="Summary" id="{a23f6a43-57cf-822e-c38c-d48c8ae6dab7}">
           <p14:sldIdLst>
             <p14:sldId id="256"/>
           </p14:sldIdLst>
         </p14:section>
-        <p14:section name="Part 1 Funnel" id="{1b367d1c-0d9c-3661-8ed2-da8ef135f59e}">
+        <p14:section name="Part 1 Funnel" id="{96ef476e-4c8b-51b0-b3de-288c4d09b9db}">
           <p14:sldIdLst>
             <p14:sldId id="257"/>
             <p14:sldId id="258"/>
           </p14:sldIdLst>
         </p14:section>
-        <p14:section name="Part 2 Channels &amp; budget" id="{12da56cf-c95b-99f4-5bea-96714e13c0a9}">
+        <p14:section name="Part 2 Channels &amp; budget" id="{66fe7696-34af-7012-e726-ebd84919e1be}">
           <p14:sldIdLst>
             <p14:sldId id="259"/>
             <p14:sldId id="260"/>
             <p14:sldId id="261"/>
           </p14:sldIdLst>
         </p14:section>
-        <p14:section name="Part 3 New sources" id="{22bdfa45-d8bd-040e-e47e-c8e09ce35735}">
+        <p14:section name="Part 3 New sources" id="{667b969a-06c9-95d9-5af1-29de5695fed1}">
           <p14:sldIdLst>
             <p14:sldId id="262"/>
           </p14:sldIdLst>
         </p14:section>
-        <p14:section name="Part 4 Run it" id="{e96adb5c-42ec-77f4-21a5-09c411540a5a}">
+        <p14:section name="Part 4 Run it" id="{37a467f0-651c-c18a-5c80-1d64e00aaa89}">
           <p14:sldIdLst>
             <p14:sldId id="263"/>
           </p14:sldIdLst>
@@ -8666,7 +8666,7 @@
                   <a:schemeClr val="tx2"/>
                 </a:solidFill>
               </a:rPr>
-              <a:t>Why 308, not 311: referrals and past applicants convert better than the table's standard rates, so the plan needs slightly fewer. Applications: 1,495, not 1,260, because the plan's channels average 21% qualified (social ads lower), below the ~25% baseline.</a:t>
+              <a:t>Why 308, not 311: referrals and past applicants convert better than the table's standard rates, so the plan needs slightly fewer. Applications: 1,495, not 1,260, because the plan's channels average 21% qualified (Polish pre-screened applications 14%, organic 17.5%), below the ~25% baseline.</a:t>
             </a:r>
             <a:endParaRPr lang="en-US" sz="1200" dirty="0"/>
           </a:p>
@@ -17645,7 +17645,7 @@
                   <a:schemeClr val="tx1"/>
                 </a:solidFill>
               </a:rPr>
-              <a:t>Setup 3 days (live Fri 23 Oct). Me: ads, quiz, German copywriter. Client: profile sign-off by 23 Oct; one client trainer runs the 2–4 week bridge course for the ~8 hires (≈15 person-days, client-funded onboarding)</a:t>
+              <a:t>Setup 3 days (live Fri 23 Oct). Me: ads, quiz, German copywriter. Client: profile sign-off by 23 Oct; one client trainer runs the 2–4 week bridge course for the ~8 hires (≈15 person-days of the client's normal onboarding, not campaign spend)</a:t>
             </a:r>
             <a:endParaRPr lang="en-US" sz="1150" dirty="0"/>
           </a:p>

--- a/operation_uptime/Operation_Uptime_Deck.pptx
+++ b/operation_uptime/Operation_Uptime_Deck.pptx
@@ -114,30 +114,30 @@
   <p:extLst>
     <p:ext uri="{521415D9-36F7-43E2-AB2F-B90AF26B5E84}">
       <p14:sectionLst xmlns:p14="http://schemas.microsoft.com/office/powerpoint/2010/main">
-        <p14:section name="Summary" id="{a23f6a43-57cf-822e-c38c-d48c8ae6dab7}">
+        <p14:section name="Summary" id="{fa400ee0-8c64-3790-c865-4662f7f91df1}">
           <p14:sldIdLst>
             <p14:sldId id="256"/>
           </p14:sldIdLst>
         </p14:section>
-        <p14:section name="Part 1 Funnel" id="{96ef476e-4c8b-51b0-b3de-288c4d09b9db}">
+        <p14:section name="Part 1 Funnel" id="{94c3a27b-147f-c402-3389-29edf581d02a}">
           <p14:sldIdLst>
             <p14:sldId id="257"/>
             <p14:sldId id="258"/>
           </p14:sldIdLst>
         </p14:section>
-        <p14:section name="Part 2 Channels &amp; budget" id="{66fe7696-34af-7012-e726-ebd84919e1be}">
+        <p14:section name="Part 2 Channels &amp; budget" id="{277ef7cd-9563-df91-eee2-22087a23e4a9}">
           <p14:sldIdLst>
             <p14:sldId id="259"/>
             <p14:sldId id="260"/>
             <p14:sldId id="261"/>
           </p14:sldIdLst>
         </p14:section>
-        <p14:section name="Part 3 New sources" id="{667b969a-06c9-95d9-5af1-29de5695fed1}">
+        <p14:section name="Part 3 New sources" id="{6f8bb144-eeb8-075d-1835-b8c83377bc31}">
           <p14:sldIdLst>
             <p14:sldId id="262"/>
           </p14:sldIdLst>
         </p14:section>
-        <p14:section name="Part 4 Run it" id="{37a467f0-651c-c18a-5c80-1d64e00aaa89}">
+        <p14:section name="Part 4 Run it" id="{037a210e-42d1-d9b4-2d87-d8a1b3d87860}">
           <p14:sldIdLst>
             <p14:sldId id="263"/>
           </p14:sldIdLst>
@@ -5224,7 +5224,7 @@
                   <a:schemeClr val="tx1"/>
                 </a:solidFill>
               </a:rPr>
-              <a:t>offers within 3 days, e-signature, stop spend Tue 24 Nov. German process pace (8 + 12 days) or 7-day offers: ~92 hires each; +9 slots a week restores 100.</a:t>
+              <a:t>offers within 3 days, e-signature, stop spend Tue 24 Nov. German process pace (8 + 12 days) or offers 7 days after interview (not 3): ~92 hires each; +9 slots a week restores 100.</a:t>
             </a:r>
             <a:endParaRPr lang="en-US" sz="1100" dirty="0"/>
           </a:p>
@@ -14197,7 +14197,7 @@
                   <a:schemeClr val="tx1"/>
                 </a:solidFill>
               </a:rPr>
-              <a:t>Each channel is capped by how many people in the local talent pool it can reach.</a:t>
+              <a:t>Paid channels are capped by how many people in the local talent pool they reach (StepStone by its number of ads; new sources by their own volumes).</a:t>
             </a:r>
             <a:endParaRPr lang="en-US" sz="1050" dirty="0"/>
           </a:p>
